--- a/deliverables/michaelmas_presentation.pptx
+++ b/deliverables/michaelmas_presentation.pptx
@@ -4,6 +4,9 @@
   <p:sldMasterIdLst>
     <p:sldMasterId id="2147483648" r:id="rId1"/>
   </p:sldMasterIdLst>
+  <p:notesMasterIdLst>
+    <p:notesMasterId r:id="rId11"/>
+  </p:notesMasterIdLst>
   <p:sldIdLst>
     <p:sldId id="256" r:id="rId2"/>
     <p:sldId id="257" r:id="rId3"/>
@@ -11,7 +14,9 @@
     <p:sldId id="259" r:id="rId5"/>
     <p:sldId id="260" r:id="rId6"/>
     <p:sldId id="261" r:id="rId7"/>
-    <p:sldId id="262" r:id="rId8"/>
+    <p:sldId id="263" r:id="rId8"/>
+    <p:sldId id="264" r:id="rId9"/>
+    <p:sldId id="262" r:id="rId10"/>
   </p:sldIdLst>
   <p:sldSz cx="12192000" cy="6858000"/>
   <p:notesSz cx="6858000" cy="9144000"/>
@@ -110,7 +115,542 @@
       </a:defRPr>
     </a:lvl9pPr>
   </p:defaultTextStyle>
+  <p:extLst>
+    <p:ext uri="{EFAFB233-063F-42B5-8137-9DF3F51BA10A}">
+      <p15:sldGuideLst xmlns:p15="http://schemas.microsoft.com/office/powerpoint/2012/main"/>
+    </p:ext>
+  </p:extLst>
 </p:presentation>
+</file>
+
+<file path=ppt/notesMasters/notesMaster1.xml><?xml version="1.0" encoding="utf-8"?>
+<p:notesMaster xmlns:a="http://schemas.openxmlformats.org/drawingml/2006/main" xmlns:r="http://schemas.openxmlformats.org/officeDocument/2006/relationships" xmlns:p="http://schemas.openxmlformats.org/presentationml/2006/main">
+  <p:cSld>
+    <p:bg>
+      <p:bgRef idx="1001">
+        <a:schemeClr val="bg1"/>
+      </p:bgRef>
+    </p:bg>
+    <p:spTree>
+      <p:nvGrpSpPr>
+        <p:cNvPr id="1" name=""/>
+        <p:cNvGrpSpPr/>
+        <p:nvPr/>
+      </p:nvGrpSpPr>
+      <p:grpSpPr>
+        <a:xfrm>
+          <a:off x="0" y="0"/>
+          <a:ext cx="0" cy="0"/>
+          <a:chOff x="0" y="0"/>
+          <a:chExt cx="0" cy="0"/>
+        </a:xfrm>
+      </p:grpSpPr>
+      <p:sp>
+        <p:nvSpPr>
+          <p:cNvPr id="2" name="Header Placeholder 1"/>
+          <p:cNvSpPr>
+            <a:spLocks noGrp="1"/>
+          </p:cNvSpPr>
+          <p:nvPr>
+            <p:ph type="hdr" sz="quarter"/>
+          </p:nvPr>
+        </p:nvSpPr>
+        <p:spPr>
+          <a:xfrm>
+            <a:off x="0" y="0"/>
+            <a:ext cx="2971800" cy="458788"/>
+          </a:xfrm>
+          <a:prstGeom prst="rect">
+            <a:avLst/>
+          </a:prstGeom>
+        </p:spPr>
+        <p:txBody>
+          <a:bodyPr vert="horz" lIns="91440" tIns="45720" rIns="91440" bIns="45720" rtlCol="0"/>
+          <a:lstStyle>
+            <a:lvl1pPr algn="l">
+              <a:defRPr sz="1200"/>
+            </a:lvl1pPr>
+          </a:lstStyle>
+          <a:p>
+            <a:endParaRPr lang="en-GB"/>
+          </a:p>
+        </p:txBody>
+      </p:sp>
+      <p:sp>
+        <p:nvSpPr>
+          <p:cNvPr id="3" name="Date Placeholder 2"/>
+          <p:cNvSpPr>
+            <a:spLocks noGrp="1"/>
+          </p:cNvSpPr>
+          <p:nvPr>
+            <p:ph type="dt" idx="1"/>
+          </p:nvPr>
+        </p:nvSpPr>
+        <p:spPr>
+          <a:xfrm>
+            <a:off x="3884613" y="0"/>
+            <a:ext cx="2971800" cy="458788"/>
+          </a:xfrm>
+          <a:prstGeom prst="rect">
+            <a:avLst/>
+          </a:prstGeom>
+        </p:spPr>
+        <p:txBody>
+          <a:bodyPr vert="horz" lIns="91440" tIns="45720" rIns="91440" bIns="45720" rtlCol="0"/>
+          <a:lstStyle>
+            <a:lvl1pPr algn="r">
+              <a:defRPr sz="1200"/>
+            </a:lvl1pPr>
+          </a:lstStyle>
+          <a:p>
+            <a:fld id="{C0BB89D3-1E85-48CA-BFDB-0FE03B3C9B40}" type="datetimeFigureOut">
+              <a:rPr lang="en-GB" smtClean="0"/>
+              <a:t>24/11/2024</a:t>
+            </a:fld>
+            <a:endParaRPr lang="en-GB"/>
+          </a:p>
+        </p:txBody>
+      </p:sp>
+      <p:sp>
+        <p:nvSpPr>
+          <p:cNvPr id="4" name="Slide Image Placeholder 3"/>
+          <p:cNvSpPr>
+            <a:spLocks noGrp="1" noRot="1" noChangeAspect="1"/>
+          </p:cNvSpPr>
+          <p:nvPr>
+            <p:ph type="sldImg" idx="2"/>
+          </p:nvPr>
+        </p:nvSpPr>
+        <p:spPr>
+          <a:xfrm>
+            <a:off x="685800" y="1143000"/>
+            <a:ext cx="5486400" cy="3086100"/>
+          </a:xfrm>
+          <a:prstGeom prst="rect">
+            <a:avLst/>
+          </a:prstGeom>
+          <a:noFill/>
+          <a:ln w="12700">
+            <a:solidFill>
+              <a:prstClr val="black"/>
+            </a:solidFill>
+          </a:ln>
+        </p:spPr>
+        <p:txBody>
+          <a:bodyPr vert="horz" lIns="91440" tIns="45720" rIns="91440" bIns="45720" rtlCol="0" anchor="ctr"/>
+          <a:lstStyle/>
+          <a:p>
+            <a:endParaRPr lang="en-GB"/>
+          </a:p>
+        </p:txBody>
+      </p:sp>
+      <p:sp>
+        <p:nvSpPr>
+          <p:cNvPr id="5" name="Notes Placeholder 4"/>
+          <p:cNvSpPr>
+            <a:spLocks noGrp="1"/>
+          </p:cNvSpPr>
+          <p:nvPr>
+            <p:ph type="body" sz="quarter" idx="3"/>
+          </p:nvPr>
+        </p:nvSpPr>
+        <p:spPr>
+          <a:xfrm>
+            <a:off x="685800" y="4400550"/>
+            <a:ext cx="5486400" cy="3600450"/>
+          </a:xfrm>
+          <a:prstGeom prst="rect">
+            <a:avLst/>
+          </a:prstGeom>
+        </p:spPr>
+        <p:txBody>
+          <a:bodyPr vert="horz" lIns="91440" tIns="45720" rIns="91440" bIns="45720" rtlCol="0"/>
+          <a:lstStyle/>
+          <a:p>
+            <a:pPr lvl="0"/>
+            <a:r>
+              <a:rPr lang="en-US"/>
+              <a:t>Click to edit Master text styles</a:t>
+            </a:r>
+          </a:p>
+          <a:p>
+            <a:pPr lvl="1"/>
+            <a:r>
+              <a:rPr lang="en-US"/>
+              <a:t>Second level</a:t>
+            </a:r>
+          </a:p>
+          <a:p>
+            <a:pPr lvl="2"/>
+            <a:r>
+              <a:rPr lang="en-US"/>
+              <a:t>Third level</a:t>
+            </a:r>
+          </a:p>
+          <a:p>
+            <a:pPr lvl="3"/>
+            <a:r>
+              <a:rPr lang="en-US"/>
+              <a:t>Fourth level</a:t>
+            </a:r>
+          </a:p>
+          <a:p>
+            <a:pPr lvl="4"/>
+            <a:r>
+              <a:rPr lang="en-US"/>
+              <a:t>Fifth level</a:t>
+            </a:r>
+            <a:endParaRPr lang="en-GB"/>
+          </a:p>
+        </p:txBody>
+      </p:sp>
+      <p:sp>
+        <p:nvSpPr>
+          <p:cNvPr id="6" name="Footer Placeholder 5"/>
+          <p:cNvSpPr>
+            <a:spLocks noGrp="1"/>
+          </p:cNvSpPr>
+          <p:nvPr>
+            <p:ph type="ftr" sz="quarter" idx="4"/>
+          </p:nvPr>
+        </p:nvSpPr>
+        <p:spPr>
+          <a:xfrm>
+            <a:off x="0" y="8685213"/>
+            <a:ext cx="2971800" cy="458787"/>
+          </a:xfrm>
+          <a:prstGeom prst="rect">
+            <a:avLst/>
+          </a:prstGeom>
+        </p:spPr>
+        <p:txBody>
+          <a:bodyPr vert="horz" lIns="91440" tIns="45720" rIns="91440" bIns="45720" rtlCol="0" anchor="b"/>
+          <a:lstStyle>
+            <a:lvl1pPr algn="l">
+              <a:defRPr sz="1200"/>
+            </a:lvl1pPr>
+          </a:lstStyle>
+          <a:p>
+            <a:endParaRPr lang="en-GB"/>
+          </a:p>
+        </p:txBody>
+      </p:sp>
+      <p:sp>
+        <p:nvSpPr>
+          <p:cNvPr id="7" name="Slide Number Placeholder 6"/>
+          <p:cNvSpPr>
+            <a:spLocks noGrp="1"/>
+          </p:cNvSpPr>
+          <p:nvPr>
+            <p:ph type="sldNum" sz="quarter" idx="5"/>
+          </p:nvPr>
+        </p:nvSpPr>
+        <p:spPr>
+          <a:xfrm>
+            <a:off x="3884613" y="8685213"/>
+            <a:ext cx="2971800" cy="458787"/>
+          </a:xfrm>
+          <a:prstGeom prst="rect">
+            <a:avLst/>
+          </a:prstGeom>
+        </p:spPr>
+        <p:txBody>
+          <a:bodyPr vert="horz" lIns="91440" tIns="45720" rIns="91440" bIns="45720" rtlCol="0" anchor="b"/>
+          <a:lstStyle>
+            <a:lvl1pPr algn="r">
+              <a:defRPr sz="1200"/>
+            </a:lvl1pPr>
+          </a:lstStyle>
+          <a:p>
+            <a:fld id="{339AB5C0-8D71-4250-8AD2-76EE22722959}" type="slidenum">
+              <a:rPr lang="en-GB" smtClean="0"/>
+              <a:t>‹#›</a:t>
+            </a:fld>
+            <a:endParaRPr lang="en-GB"/>
+          </a:p>
+        </p:txBody>
+      </p:sp>
+    </p:spTree>
+    <p:extLst>
+      <p:ext uri="{BB962C8B-B14F-4D97-AF65-F5344CB8AC3E}">
+        <p14:creationId xmlns:p14="http://schemas.microsoft.com/office/powerpoint/2010/main" val="2764755657"/>
+      </p:ext>
+    </p:extLst>
+  </p:cSld>
+  <p:clrMap bg1="lt1" tx1="dk1" bg2="lt2" tx2="dk2" accent1="accent1" accent2="accent2" accent3="accent3" accent4="accent4" accent5="accent5" accent6="accent6" hlink="hlink" folHlink="folHlink"/>
+  <p:notesStyle>
+    <a:lvl1pPr marL="0" algn="l" defTabSz="914400" rtl="0" eaLnBrk="1" latinLnBrk="0" hangingPunct="1">
+      <a:defRPr sz="1200" kern="1200">
+        <a:solidFill>
+          <a:schemeClr val="tx1"/>
+        </a:solidFill>
+        <a:latin typeface="+mn-lt"/>
+        <a:ea typeface="+mn-ea"/>
+        <a:cs typeface="+mn-cs"/>
+      </a:defRPr>
+    </a:lvl1pPr>
+    <a:lvl2pPr marL="457200" algn="l" defTabSz="914400" rtl="0" eaLnBrk="1" latinLnBrk="0" hangingPunct="1">
+      <a:defRPr sz="1200" kern="1200">
+        <a:solidFill>
+          <a:schemeClr val="tx1"/>
+        </a:solidFill>
+        <a:latin typeface="+mn-lt"/>
+        <a:ea typeface="+mn-ea"/>
+        <a:cs typeface="+mn-cs"/>
+      </a:defRPr>
+    </a:lvl2pPr>
+    <a:lvl3pPr marL="914400" algn="l" defTabSz="914400" rtl="0" eaLnBrk="1" latinLnBrk="0" hangingPunct="1">
+      <a:defRPr sz="1200" kern="1200">
+        <a:solidFill>
+          <a:schemeClr val="tx1"/>
+        </a:solidFill>
+        <a:latin typeface="+mn-lt"/>
+        <a:ea typeface="+mn-ea"/>
+        <a:cs typeface="+mn-cs"/>
+      </a:defRPr>
+    </a:lvl3pPr>
+    <a:lvl4pPr marL="1371600" algn="l" defTabSz="914400" rtl="0" eaLnBrk="1" latinLnBrk="0" hangingPunct="1">
+      <a:defRPr sz="1200" kern="1200">
+        <a:solidFill>
+          <a:schemeClr val="tx1"/>
+        </a:solidFill>
+        <a:latin typeface="+mn-lt"/>
+        <a:ea typeface="+mn-ea"/>
+        <a:cs typeface="+mn-cs"/>
+      </a:defRPr>
+    </a:lvl4pPr>
+    <a:lvl5pPr marL="1828800" algn="l" defTabSz="914400" rtl="0" eaLnBrk="1" latinLnBrk="0" hangingPunct="1">
+      <a:defRPr sz="1200" kern="1200">
+        <a:solidFill>
+          <a:schemeClr val="tx1"/>
+        </a:solidFill>
+        <a:latin typeface="+mn-lt"/>
+        <a:ea typeface="+mn-ea"/>
+        <a:cs typeface="+mn-cs"/>
+      </a:defRPr>
+    </a:lvl5pPr>
+    <a:lvl6pPr marL="2286000" algn="l" defTabSz="914400" rtl="0" eaLnBrk="1" latinLnBrk="0" hangingPunct="1">
+      <a:defRPr sz="1200" kern="1200">
+        <a:solidFill>
+          <a:schemeClr val="tx1"/>
+        </a:solidFill>
+        <a:latin typeface="+mn-lt"/>
+        <a:ea typeface="+mn-ea"/>
+        <a:cs typeface="+mn-cs"/>
+      </a:defRPr>
+    </a:lvl6pPr>
+    <a:lvl7pPr marL="2743200" algn="l" defTabSz="914400" rtl="0" eaLnBrk="1" latinLnBrk="0" hangingPunct="1">
+      <a:defRPr sz="1200" kern="1200">
+        <a:solidFill>
+          <a:schemeClr val="tx1"/>
+        </a:solidFill>
+        <a:latin typeface="+mn-lt"/>
+        <a:ea typeface="+mn-ea"/>
+        <a:cs typeface="+mn-cs"/>
+      </a:defRPr>
+    </a:lvl7pPr>
+    <a:lvl8pPr marL="3200400" algn="l" defTabSz="914400" rtl="0" eaLnBrk="1" latinLnBrk="0" hangingPunct="1">
+      <a:defRPr sz="1200" kern="1200">
+        <a:solidFill>
+          <a:schemeClr val="tx1"/>
+        </a:solidFill>
+        <a:latin typeface="+mn-lt"/>
+        <a:ea typeface="+mn-ea"/>
+        <a:cs typeface="+mn-cs"/>
+      </a:defRPr>
+    </a:lvl8pPr>
+    <a:lvl9pPr marL="3657600" algn="l" defTabSz="914400" rtl="0" eaLnBrk="1" latinLnBrk="0" hangingPunct="1">
+      <a:defRPr sz="1200" kern="1200">
+        <a:solidFill>
+          <a:schemeClr val="tx1"/>
+        </a:solidFill>
+        <a:latin typeface="+mn-lt"/>
+        <a:ea typeface="+mn-ea"/>
+        <a:cs typeface="+mn-cs"/>
+      </a:defRPr>
+    </a:lvl9pPr>
+  </p:notesStyle>
+</p:notesMaster>
+</file>
+
+<file path=ppt/notesSlides/notesSlide1.xml><?xml version="1.0" encoding="utf-8"?>
+<p:notes xmlns:a="http://schemas.openxmlformats.org/drawingml/2006/main" xmlns:r="http://schemas.openxmlformats.org/officeDocument/2006/relationships" xmlns:p="http://schemas.openxmlformats.org/presentationml/2006/main">
+  <p:cSld>
+    <p:spTree>
+      <p:nvGrpSpPr>
+        <p:cNvPr id="1" name=""/>
+        <p:cNvGrpSpPr/>
+        <p:nvPr/>
+      </p:nvGrpSpPr>
+      <p:grpSpPr>
+        <a:xfrm>
+          <a:off x="0" y="0"/>
+          <a:ext cx="0" cy="0"/>
+          <a:chOff x="0" y="0"/>
+          <a:chExt cx="0" cy="0"/>
+        </a:xfrm>
+      </p:grpSpPr>
+      <p:sp>
+        <p:nvSpPr>
+          <p:cNvPr id="2" name="Slide Image Placeholder 1"/>
+          <p:cNvSpPr>
+            <a:spLocks noGrp="1" noRot="1" noChangeAspect="1"/>
+          </p:cNvSpPr>
+          <p:nvPr>
+            <p:ph type="sldImg"/>
+          </p:nvPr>
+        </p:nvSpPr>
+        <p:spPr/>
+      </p:sp>
+      <p:sp>
+        <p:nvSpPr>
+          <p:cNvPr id="3" name="Notes Placeholder 2"/>
+          <p:cNvSpPr>
+            <a:spLocks noGrp="1"/>
+          </p:cNvSpPr>
+          <p:nvPr>
+            <p:ph type="body" idx="1"/>
+          </p:nvPr>
+        </p:nvSpPr>
+        <p:spPr/>
+        <p:txBody>
+          <a:bodyPr/>
+          <a:lstStyle/>
+          <a:p>
+            <a:r>
+              <a:rPr lang="en-GB" dirty="0"/>
+              <a:t>For the experimental setup it's important to consider the parameters needed to define a given propellers performance. Dimensionless thrust and power coefficients can be found from blade tip speed and area. The ratio of these coefficients define a ‘static’ efficiency which is different to the typical propulsive efficiency. The values then required to be measured are the torque, thrust and angular speed.</a:t>
+            </a:r>
+          </a:p>
+          <a:p>
+            <a:r>
+              <a:rPr lang="en-GB" dirty="0"/>
+              <a:t>Dynamic measurements of torque and angular velocity could be fused together in a Kalman filter</a:t>
+            </a:r>
+          </a:p>
+        </p:txBody>
+      </p:sp>
+      <p:sp>
+        <p:nvSpPr>
+          <p:cNvPr id="4" name="Slide Number Placeholder 3"/>
+          <p:cNvSpPr>
+            <a:spLocks noGrp="1"/>
+          </p:cNvSpPr>
+          <p:nvPr>
+            <p:ph type="sldNum" sz="quarter" idx="5"/>
+          </p:nvPr>
+        </p:nvSpPr>
+        <p:spPr/>
+        <p:txBody>
+          <a:bodyPr/>
+          <a:lstStyle/>
+          <a:p>
+            <a:fld id="{339AB5C0-8D71-4250-8AD2-76EE22722959}" type="slidenum">
+              <a:rPr lang="en-GB" smtClean="0"/>
+              <a:t>6</a:t>
+            </a:fld>
+            <a:endParaRPr lang="en-GB"/>
+          </a:p>
+        </p:txBody>
+      </p:sp>
+    </p:spTree>
+    <p:extLst>
+      <p:ext uri="{BB962C8B-B14F-4D97-AF65-F5344CB8AC3E}">
+        <p14:creationId xmlns:p14="http://schemas.microsoft.com/office/powerpoint/2010/main" val="1790782265"/>
+      </p:ext>
+    </p:extLst>
+  </p:cSld>
+  <p:clrMapOvr>
+    <a:masterClrMapping/>
+  </p:clrMapOvr>
+</p:notes>
+</file>
+
+<file path=ppt/notesSlides/notesSlide2.xml><?xml version="1.0" encoding="utf-8"?>
+<p:notes xmlns:a="http://schemas.openxmlformats.org/drawingml/2006/main" xmlns:r="http://schemas.openxmlformats.org/officeDocument/2006/relationships" xmlns:p="http://schemas.openxmlformats.org/presentationml/2006/main">
+  <p:cSld>
+    <p:spTree>
+      <p:nvGrpSpPr>
+        <p:cNvPr id="1" name=""/>
+        <p:cNvGrpSpPr/>
+        <p:nvPr/>
+      </p:nvGrpSpPr>
+      <p:grpSpPr>
+        <a:xfrm>
+          <a:off x="0" y="0"/>
+          <a:ext cx="0" cy="0"/>
+          <a:chOff x="0" y="0"/>
+          <a:chExt cx="0" cy="0"/>
+        </a:xfrm>
+      </p:grpSpPr>
+      <p:sp>
+        <p:nvSpPr>
+          <p:cNvPr id="2" name="Slide Image Placeholder 1"/>
+          <p:cNvSpPr>
+            <a:spLocks noGrp="1" noRot="1" noChangeAspect="1"/>
+          </p:cNvSpPr>
+          <p:nvPr>
+            <p:ph type="sldImg"/>
+          </p:nvPr>
+        </p:nvSpPr>
+        <p:spPr/>
+      </p:sp>
+      <p:sp>
+        <p:nvSpPr>
+          <p:cNvPr id="3" name="Notes Placeholder 2"/>
+          <p:cNvSpPr>
+            <a:spLocks noGrp="1"/>
+          </p:cNvSpPr>
+          <p:nvPr>
+            <p:ph type="body" idx="1"/>
+          </p:nvPr>
+        </p:nvSpPr>
+        <p:spPr/>
+        <p:txBody>
+          <a:bodyPr/>
+          <a:lstStyle/>
+          <a:p>
+            <a:r>
+              <a:rPr lang="en-GB" dirty="0"/>
+              <a:t>To measure torque and thrust the deflection of load cells will be measured by strain gauges. This was preferred over null force balancing methods for its simple setup and ability to measure dynamic torque.</a:t>
+            </a:r>
+          </a:p>
+        </p:txBody>
+      </p:sp>
+      <p:sp>
+        <p:nvSpPr>
+          <p:cNvPr id="4" name="Slide Number Placeholder 3"/>
+          <p:cNvSpPr>
+            <a:spLocks noGrp="1"/>
+          </p:cNvSpPr>
+          <p:nvPr>
+            <p:ph type="sldNum" sz="quarter" idx="5"/>
+          </p:nvPr>
+        </p:nvSpPr>
+        <p:spPr/>
+        <p:txBody>
+          <a:bodyPr/>
+          <a:lstStyle/>
+          <a:p>
+            <a:fld id="{339AB5C0-8D71-4250-8AD2-76EE22722959}" type="slidenum">
+              <a:rPr lang="en-GB" smtClean="0"/>
+              <a:t>7</a:t>
+            </a:fld>
+            <a:endParaRPr lang="en-GB"/>
+          </a:p>
+        </p:txBody>
+      </p:sp>
+    </p:spTree>
+    <p:extLst>
+      <p:ext uri="{BB962C8B-B14F-4D97-AF65-F5344CB8AC3E}">
+        <p14:creationId xmlns:p14="http://schemas.microsoft.com/office/powerpoint/2010/main" val="1624805185"/>
+      </p:ext>
+    </p:extLst>
+  </p:cSld>
+  <p:clrMapOvr>
+    <a:masterClrMapping/>
+  </p:clrMapOvr>
+</p:notes>
 </file>
 
 <file path=ppt/slideLayouts/slideLayout1.xml><?xml version="1.0" encoding="utf-8"?>
@@ -262,7 +802,7 @@
           <a:p>
             <a:fld id="{B8C3C57F-C92A-483E-A8E5-2F94B59C9323}" type="datetimeFigureOut">
               <a:rPr lang="en-GB" smtClean="0"/>
-              <a:t>22/11/2024</a:t>
+              <a:t>24/11/2024</a:t>
             </a:fld>
             <a:endParaRPr lang="en-GB"/>
           </a:p>
@@ -462,7 +1002,7 @@
           <a:p>
             <a:fld id="{B8C3C57F-C92A-483E-A8E5-2F94B59C9323}" type="datetimeFigureOut">
               <a:rPr lang="en-GB" smtClean="0"/>
-              <a:t>22/11/2024</a:t>
+              <a:t>24/11/2024</a:t>
             </a:fld>
             <a:endParaRPr lang="en-GB"/>
           </a:p>
@@ -672,7 +1212,7 @@
           <a:p>
             <a:fld id="{B8C3C57F-C92A-483E-A8E5-2F94B59C9323}" type="datetimeFigureOut">
               <a:rPr lang="en-GB" smtClean="0"/>
-              <a:t>22/11/2024</a:t>
+              <a:t>24/11/2024</a:t>
             </a:fld>
             <a:endParaRPr lang="en-GB"/>
           </a:p>
@@ -872,7 +1412,7 @@
           <a:p>
             <a:fld id="{B8C3C57F-C92A-483E-A8E5-2F94B59C9323}" type="datetimeFigureOut">
               <a:rPr lang="en-GB" smtClean="0"/>
-              <a:t>22/11/2024</a:t>
+              <a:t>24/11/2024</a:t>
             </a:fld>
             <a:endParaRPr lang="en-GB"/>
           </a:p>
@@ -1148,7 +1688,7 @@
           <a:p>
             <a:fld id="{B8C3C57F-C92A-483E-A8E5-2F94B59C9323}" type="datetimeFigureOut">
               <a:rPr lang="en-GB" smtClean="0"/>
-              <a:t>22/11/2024</a:t>
+              <a:t>24/11/2024</a:t>
             </a:fld>
             <a:endParaRPr lang="en-GB"/>
           </a:p>
@@ -1416,7 +1956,7 @@
           <a:p>
             <a:fld id="{B8C3C57F-C92A-483E-A8E5-2F94B59C9323}" type="datetimeFigureOut">
               <a:rPr lang="en-GB" smtClean="0"/>
-              <a:t>22/11/2024</a:t>
+              <a:t>24/11/2024</a:t>
             </a:fld>
             <a:endParaRPr lang="en-GB"/>
           </a:p>
@@ -1831,7 +2371,7 @@
           <a:p>
             <a:fld id="{B8C3C57F-C92A-483E-A8E5-2F94B59C9323}" type="datetimeFigureOut">
               <a:rPr lang="en-GB" smtClean="0"/>
-              <a:t>22/11/2024</a:t>
+              <a:t>24/11/2024</a:t>
             </a:fld>
             <a:endParaRPr lang="en-GB"/>
           </a:p>
@@ -1973,7 +2513,7 @@
           <a:p>
             <a:fld id="{B8C3C57F-C92A-483E-A8E5-2F94B59C9323}" type="datetimeFigureOut">
               <a:rPr lang="en-GB" smtClean="0"/>
-              <a:t>22/11/2024</a:t>
+              <a:t>24/11/2024</a:t>
             </a:fld>
             <a:endParaRPr lang="en-GB"/>
           </a:p>
@@ -2086,7 +2626,7 @@
           <a:p>
             <a:fld id="{B8C3C57F-C92A-483E-A8E5-2F94B59C9323}" type="datetimeFigureOut">
               <a:rPr lang="en-GB" smtClean="0"/>
-              <a:t>22/11/2024</a:t>
+              <a:t>24/11/2024</a:t>
             </a:fld>
             <a:endParaRPr lang="en-GB"/>
           </a:p>
@@ -2399,7 +2939,7 @@
           <a:p>
             <a:fld id="{B8C3C57F-C92A-483E-A8E5-2F94B59C9323}" type="datetimeFigureOut">
               <a:rPr lang="en-GB" smtClean="0"/>
-              <a:t>22/11/2024</a:t>
+              <a:t>24/11/2024</a:t>
             </a:fld>
             <a:endParaRPr lang="en-GB"/>
           </a:p>
@@ -2688,7 +3228,7 @@
           <a:p>
             <a:fld id="{B8C3C57F-C92A-483E-A8E5-2F94B59C9323}" type="datetimeFigureOut">
               <a:rPr lang="en-GB" smtClean="0"/>
-              <a:t>22/11/2024</a:t>
+              <a:t>24/11/2024</a:t>
             </a:fld>
             <a:endParaRPr lang="en-GB"/>
           </a:p>
@@ -2931,7 +3471,7 @@
           <a:p>
             <a:fld id="{B8C3C57F-C92A-483E-A8E5-2F94B59C9323}" type="datetimeFigureOut">
               <a:rPr lang="en-GB" smtClean="0"/>
-              <a:t>22/11/2024</a:t>
+              <a:t>24/11/2024</a:t>
             </a:fld>
             <a:endParaRPr lang="en-GB"/>
           </a:p>
@@ -3480,27 +4020,42 @@
           <a:bodyPr/>
           <a:lstStyle/>
           <a:p>
+            <a:endParaRPr lang="en-GB" dirty="0"/>
+          </a:p>
+          <a:p>
+            <a:pPr marL="0" indent="0">
+              <a:buNone/>
+            </a:pPr>
             <a:r>
               <a:rPr lang="en-GB" dirty="0"/>
-              <a:t>Wider purpose and application </a:t>
-            </a:r>
-          </a:p>
-          <a:p>
+              <a:t>Public perception of drones is poor due to the annoying sound that they make.</a:t>
+            </a:r>
+          </a:p>
+          <a:p>
+            <a:pPr marL="0" indent="0">
+              <a:buNone/>
+            </a:pPr>
+            <a:endParaRPr lang="en-GB" dirty="0"/>
+          </a:p>
+          <a:p>
+            <a:pPr marL="0" indent="0">
+              <a:buNone/>
+            </a:pPr>
             <a:r>
               <a:rPr lang="en-GB" dirty="0"/>
-              <a:t>First slide should be attention grabbing</a:t>
+              <a:t>This, and other legislative barriers, prevent the adoption of drone-based services in urban environments.</a:t>
             </a:r>
           </a:p>
           <a:p>
             <a:endParaRPr lang="en-GB" dirty="0"/>
           </a:p>
           <a:p>
-            <a:endParaRPr lang="en-GB" dirty="0"/>
-          </a:p>
-          <a:p>
+            <a:pPr marL="0" indent="0">
+              <a:buNone/>
+            </a:pPr>
             <a:r>
               <a:rPr lang="en-GB" dirty="0"/>
-              <a:t>Recent research interest</a:t>
+              <a:t>Recent research has focused on optimising aerodynamic and aeroacoustics performance to overcome these barriers.</a:t>
             </a:r>
           </a:p>
           <a:p>
@@ -3626,7 +4181,15 @@
           <a:p>
             <a:r>
               <a:rPr lang="en-GB" dirty="0"/>
-              <a:t>Attribute changes in measured acoustic spectrum to changes in propeller geometry.</a:t>
+              <a:t>Attribute </a:t>
+            </a:r>
+            <a:r>
+              <a:rPr lang="en-US" dirty="0"/>
+              <a:t>changes in the acoustic spectrum to flow phenomena caused by propeller geometry modifications</a:t>
+            </a:r>
+            <a:r>
+              <a:rPr lang="en-GB" dirty="0"/>
+              <a:t>.</a:t>
             </a:r>
           </a:p>
           <a:p>
@@ -3635,7 +4198,7 @@
           <a:p>
             <a:r>
               <a:rPr lang="en-GB" dirty="0"/>
-              <a:t>Identify a trade-off between aerodynamic performance and acoustic annoyance</a:t>
+              <a:t>Analyse psychoacoustic performance </a:t>
             </a:r>
           </a:p>
           <a:p>
@@ -3689,14 +4252,19 @@
             <p:ph type="title"/>
           </p:nvPr>
         </p:nvSpPr>
-        <p:spPr/>
+        <p:spPr>
+          <a:xfrm>
+            <a:off x="499202" y="152898"/>
+            <a:ext cx="10515600" cy="1325563"/>
+          </a:xfrm>
+        </p:spPr>
         <p:txBody>
           <a:bodyPr/>
           <a:lstStyle/>
           <a:p>
             <a:r>
               <a:rPr lang="en-GB" dirty="0"/>
-              <a:t>Propeller geometry modifications</a:t>
+              <a:t>Propeller geometry</a:t>
             </a:r>
           </a:p>
         </p:txBody>
@@ -3717,58 +4285,150 @@
             <p:ph idx="1"/>
           </p:nvPr>
         </p:nvSpPr>
-        <p:spPr/>
-        <p:txBody>
-          <a:bodyPr/>
+        <p:spPr>
+          <a:xfrm>
+            <a:off x="499202" y="1394845"/>
+            <a:ext cx="10515600" cy="4906993"/>
+          </a:xfrm>
+        </p:spPr>
+        <p:txBody>
+          <a:bodyPr>
+            <a:normAutofit/>
+          </a:bodyPr>
           <a:lstStyle/>
           <a:p>
             <a:r>
               <a:rPr lang="en-GB" sz="3200" dirty="0"/>
-              <a:t>Current research has covered changes in</a:t>
+              <a:t>Consideration for Toroidal designs</a:t>
+            </a:r>
+          </a:p>
+          <a:p>
+            <a:endParaRPr lang="en-GB" sz="3200" dirty="0"/>
+          </a:p>
+          <a:p>
+            <a:r>
+              <a:rPr lang="en-GB" sz="3200" dirty="0"/>
+              <a:t>Previous research has covered:</a:t>
             </a:r>
           </a:p>
           <a:p>
             <a:pPr lvl="1"/>
             <a:r>
               <a:rPr lang="en-GB" sz="2800" dirty="0"/>
-              <a:t>tip geometry</a:t>
+              <a:t>Tip geometry</a:t>
             </a:r>
           </a:p>
           <a:p>
             <a:pPr lvl="1"/>
             <a:r>
               <a:rPr lang="en-GB" sz="2800" dirty="0"/>
-              <a:t>sweep</a:t>
+              <a:t>Blade sweep</a:t>
             </a:r>
           </a:p>
           <a:p>
             <a:pPr lvl="1"/>
             <a:r>
               <a:rPr lang="en-GB" sz="2800" dirty="0"/>
-              <a:t>blade spacing</a:t>
+              <a:t>Blade spacing</a:t>
             </a:r>
           </a:p>
           <a:p>
             <a:pPr lvl="1"/>
             <a:r>
               <a:rPr lang="en-GB" sz="2800" dirty="0"/>
-              <a:t>blade span</a:t>
-            </a:r>
-          </a:p>
-          <a:p>
-            <a:r>
-              <a:rPr lang="en-GB" sz="3200" dirty="0"/>
-              <a:t>Research into toroidal propellers is limited</a:t>
-            </a:r>
+              <a:t>Trailing edge serrations</a:t>
+            </a:r>
+          </a:p>
+          <a:p>
+            <a:endParaRPr lang="en-GB" dirty="0"/>
           </a:p>
           <a:p>
             <a:r>
               <a:rPr lang="en-GB" dirty="0"/>
-              <a:t> </a:t>
-            </a:r>
-          </a:p>
-        </p:txBody>
-      </p:sp>
+              <a:t>Varying blade span</a:t>
+            </a:r>
+          </a:p>
+        </p:txBody>
+      </p:sp>
+      <p:sp>
+        <p:nvSpPr>
+          <p:cNvPr id="5" name="Rectangle 4">
+            <a:extLst>
+              <a:ext uri="{FF2B5EF4-FFF2-40B4-BE49-F238E27FC236}">
+                <a16:creationId xmlns:a16="http://schemas.microsoft.com/office/drawing/2014/main" id="{590A1BD3-F005-347F-02C8-AFF37807D7C4}"/>
+              </a:ext>
+            </a:extLst>
+          </p:cNvPr>
+          <p:cNvSpPr/>
+          <p:nvPr/>
+        </p:nvSpPr>
+        <p:spPr>
+          <a:xfrm>
+            <a:off x="7128290" y="332960"/>
+            <a:ext cx="4942784" cy="5769665"/>
+          </a:xfrm>
+          <a:prstGeom prst="rect">
+            <a:avLst/>
+          </a:prstGeom>
+        </p:spPr>
+        <p:style>
+          <a:lnRef idx="2">
+            <a:schemeClr val="accent1">
+              <a:shade val="15000"/>
+            </a:schemeClr>
+          </a:lnRef>
+          <a:fillRef idx="1">
+            <a:schemeClr val="accent1"/>
+          </a:fillRef>
+          <a:effectRef idx="0">
+            <a:schemeClr val="accent1"/>
+          </a:effectRef>
+          <a:fontRef idx="minor">
+            <a:schemeClr val="lt1"/>
+          </a:fontRef>
+        </p:style>
+        <p:txBody>
+          <a:bodyPr rtlCol="0" anchor="ctr"/>
+          <a:lstStyle/>
+          <a:p>
+            <a:pPr algn="ctr"/>
+            <a:r>
+              <a:rPr lang="en-GB" dirty="0"/>
+              <a:t>TOROIDAL PROPELLERS</a:t>
+            </a:r>
+          </a:p>
+        </p:txBody>
+      </p:sp>
+      <p:pic>
+        <p:nvPicPr>
+          <p:cNvPr id="4" name="Picture 3">
+            <a:extLst>
+              <a:ext uri="{FF2B5EF4-FFF2-40B4-BE49-F238E27FC236}">
+                <a16:creationId xmlns:a16="http://schemas.microsoft.com/office/drawing/2014/main" id="{8E28C63F-94ED-AE22-8F66-C521AF20E882}"/>
+              </a:ext>
+            </a:extLst>
+          </p:cNvPr>
+          <p:cNvPicPr>
+            <a:picLocks noChangeAspect="1"/>
+          </p:cNvPicPr>
+          <p:nvPr/>
+        </p:nvPicPr>
+        <p:blipFill>
+          <a:blip r:embed="rId2"/>
+          <a:stretch>
+            <a:fillRect/>
+          </a:stretch>
+        </p:blipFill>
+        <p:spPr>
+          <a:xfrm>
+            <a:off x="6607124" y="3655269"/>
+            <a:ext cx="5336037" cy="3001521"/>
+          </a:xfrm>
+          <a:prstGeom prst="rect">
+            <a:avLst/>
+          </a:prstGeom>
+        </p:spPr>
+      </p:pic>
     </p:spTree>
     <p:extLst>
       <p:ext uri="{BB962C8B-B14F-4D97-AF65-F5344CB8AC3E}">
@@ -3904,110 +4564,401 @@
             <p:ph type="title"/>
           </p:nvPr>
         </p:nvSpPr>
-        <p:spPr/>
+        <p:spPr>
+          <a:xfrm>
+            <a:off x="695464" y="200087"/>
+            <a:ext cx="10515600" cy="1325563"/>
+          </a:xfrm>
+        </p:spPr>
         <p:txBody>
           <a:bodyPr/>
           <a:lstStyle/>
           <a:p>
             <a:r>
               <a:rPr lang="en-GB" dirty="0"/>
-              <a:t>Experimental setup</a:t>
-            </a:r>
-          </a:p>
-        </p:txBody>
-      </p:sp>
-      <p:sp>
-        <p:nvSpPr>
-          <p:cNvPr id="3" name="Content Placeholder 2">
-            <a:extLst>
-              <a:ext uri="{FF2B5EF4-FFF2-40B4-BE49-F238E27FC236}">
-                <a16:creationId xmlns:a16="http://schemas.microsoft.com/office/drawing/2014/main" id="{A9CDFD70-B897-4A43-D1BE-A1240A25FBB3}"/>
-              </a:ext>
-            </a:extLst>
-          </p:cNvPr>
-          <p:cNvSpPr>
-            <a:spLocks noGrp="1"/>
-          </p:cNvSpPr>
-          <p:nvPr>
-            <p:ph idx="1"/>
-          </p:nvPr>
-        </p:nvSpPr>
-        <p:spPr/>
-        <p:txBody>
-          <a:bodyPr/>
-          <a:lstStyle/>
-          <a:p>
-            <a:r>
-              <a:rPr lang="en-GB" dirty="0"/>
-              <a:t>Aerodynamic performance in the form of an efficiency value</a:t>
-            </a:r>
-          </a:p>
-          <a:p>
-            <a:pPr marL="0" indent="0">
-              <a:buNone/>
-            </a:pPr>
-            <a:endParaRPr lang="en-GB" dirty="0"/>
-          </a:p>
-          <a:p>
-            <a:pPr marL="0" indent="0">
-              <a:buNone/>
-            </a:pPr>
-            <a:r>
-              <a:rPr lang="en-GB" dirty="0"/>
-              <a:t>Efficiency = </a:t>
-            </a:r>
-            <a:r>
-              <a:rPr lang="en-GB" dirty="0" err="1"/>
-              <a:t>C_thrust</a:t>
-            </a:r>
-            <a:r>
-              <a:rPr lang="en-GB" dirty="0"/>
-              <a:t> / </a:t>
-            </a:r>
-            <a:r>
-              <a:rPr lang="en-GB" dirty="0" err="1"/>
-              <a:t>C_power</a:t>
-            </a:r>
-            <a:endParaRPr lang="en-GB" dirty="0"/>
-          </a:p>
-          <a:p>
-            <a:pPr marL="0" indent="0">
-              <a:buNone/>
-            </a:pPr>
-            <a:endParaRPr lang="en-GB" dirty="0"/>
-          </a:p>
-          <a:p>
-            <a:pPr marL="0" indent="0">
-              <a:buNone/>
-            </a:pPr>
-            <a:r>
-              <a:rPr lang="en-GB" dirty="0"/>
-              <a:t>Power is calculated by angular speed * torque from moment of drag.</a:t>
-            </a:r>
-          </a:p>
-          <a:p>
-            <a:pPr marL="0" indent="0">
-              <a:buNone/>
-            </a:pPr>
-            <a:r>
-              <a:rPr lang="en-GB" dirty="0"/>
-              <a:t>Need to measure speed, torque, thrust</a:t>
-            </a:r>
-          </a:p>
-          <a:p>
-            <a:pPr marL="0" indent="0">
-              <a:buNone/>
-            </a:pPr>
-            <a:endParaRPr lang="en-GB" dirty="0"/>
-          </a:p>
-          <a:p>
-            <a:pPr marL="0" indent="0">
-              <a:buNone/>
-            </a:pPr>
-            <a:endParaRPr lang="en-GB" dirty="0"/>
-          </a:p>
-        </p:txBody>
-      </p:sp>
+              <a:t>Aerodynamic performance</a:t>
+            </a:r>
+          </a:p>
+        </p:txBody>
+      </p:sp>
+      <mc:AlternateContent xmlns:mc="http://schemas.openxmlformats.org/markup-compatibility/2006">
+        <mc:Choice xmlns:a14="http://schemas.microsoft.com/office/drawing/2010/main" Requires="a14">
+          <p:sp>
+            <p:nvSpPr>
+              <p:cNvPr id="3" name="Content Placeholder 2">
+                <a:extLst>
+                  <a:ext uri="{FF2B5EF4-FFF2-40B4-BE49-F238E27FC236}">
+                    <a16:creationId xmlns:a16="http://schemas.microsoft.com/office/drawing/2014/main" id="{A9CDFD70-B897-4A43-D1BE-A1240A25FBB3}"/>
+                  </a:ext>
+                </a:extLst>
+              </p:cNvPr>
+              <p:cNvSpPr>
+                <a:spLocks noGrp="1"/>
+              </p:cNvSpPr>
+              <p:nvPr>
+                <p:ph idx="1"/>
+              </p:nvPr>
+            </p:nvSpPr>
+            <p:spPr>
+              <a:xfrm>
+                <a:off x="838200" y="1633824"/>
+                <a:ext cx="10515600" cy="4860646"/>
+              </a:xfrm>
+            </p:spPr>
+            <p:txBody>
+              <a:bodyPr/>
+              <a:lstStyle/>
+              <a:p>
+                <a:r>
+                  <a:rPr lang="en-GB" dirty="0"/>
+                  <a:t>Aerodynamic performance quantities</a:t>
+                </a:r>
+              </a:p>
+              <a:p>
+                <a:endParaRPr lang="en-GB" dirty="0"/>
+              </a:p>
+              <a:p>
+                <a:pPr marL="0" indent="0">
+                  <a:buNone/>
+                </a:pPr>
+                <a14:m>
+                  <m:oMathPara xmlns:m="http://schemas.openxmlformats.org/officeDocument/2006/math">
+                    <m:oMathParaPr>
+                      <m:jc m:val="centerGroup"/>
+                    </m:oMathParaPr>
+                    <m:oMath xmlns:m="http://schemas.openxmlformats.org/officeDocument/2006/math">
+                      <m:sSub>
+                        <m:sSubPr>
+                          <m:ctrlPr>
+                            <a:rPr lang="en-GB" b="0" i="1" smtClean="0">
+                              <a:latin typeface="Cambria Math" panose="02040503050406030204" pitchFamily="18" charset="0"/>
+                            </a:rPr>
+                          </m:ctrlPr>
+                        </m:sSubPr>
+                        <m:e>
+                          <m:r>
+                            <a:rPr lang="en-GB" b="0" i="1" smtClean="0">
+                              <a:latin typeface="Cambria Math" panose="02040503050406030204" pitchFamily="18" charset="0"/>
+                            </a:rPr>
+                            <m:t>𝐶</m:t>
+                          </m:r>
+                        </m:e>
+                        <m:sub>
+                          <m:r>
+                            <a:rPr lang="en-GB" b="0" i="1" smtClean="0">
+                              <a:latin typeface="Cambria Math" panose="02040503050406030204" pitchFamily="18" charset="0"/>
+                            </a:rPr>
+                            <m:t>𝑇</m:t>
+                          </m:r>
+                        </m:sub>
+                      </m:sSub>
+                      <m:r>
+                        <a:rPr lang="en-GB" b="0" i="1" smtClean="0">
+                          <a:latin typeface="Cambria Math" panose="02040503050406030204" pitchFamily="18" charset="0"/>
+                        </a:rPr>
+                        <m:t>=</m:t>
+                      </m:r>
+                      <m:f>
+                        <m:fPr>
+                          <m:ctrlPr>
+                            <a:rPr lang="en-GB" b="0" i="1" smtClean="0">
+                              <a:latin typeface="Cambria Math" panose="02040503050406030204" pitchFamily="18" charset="0"/>
+                            </a:rPr>
+                          </m:ctrlPr>
+                        </m:fPr>
+                        <m:num>
+                          <m:r>
+                            <a:rPr lang="en-GB" b="0" i="1" smtClean="0">
+                              <a:latin typeface="Cambria Math" panose="02040503050406030204" pitchFamily="18" charset="0"/>
+                            </a:rPr>
+                            <m:t>𝑇</m:t>
+                          </m:r>
+                        </m:num>
+                        <m:den>
+                          <m:r>
+                            <a:rPr lang="en-GB" b="0" i="1" smtClean="0">
+                              <a:latin typeface="Cambria Math" panose="02040503050406030204" pitchFamily="18" charset="0"/>
+                            </a:rPr>
+                            <m:t>𝜌</m:t>
+                          </m:r>
+                          <m:sSup>
+                            <m:sSupPr>
+                              <m:ctrlPr>
+                                <a:rPr lang="en-GB" b="0" i="1" smtClean="0">
+                                  <a:latin typeface="Cambria Math" panose="02040503050406030204" pitchFamily="18" charset="0"/>
+                                </a:rPr>
+                              </m:ctrlPr>
+                            </m:sSupPr>
+                            <m:e>
+                              <m:r>
+                                <a:rPr lang="en-GB" b="0" i="1" smtClean="0">
+                                  <a:latin typeface="Cambria Math" panose="02040503050406030204" pitchFamily="18" charset="0"/>
+                                </a:rPr>
+                                <m:t>𝑁</m:t>
+                              </m:r>
+                            </m:e>
+                            <m:sup>
+                              <m:r>
+                                <a:rPr lang="en-GB" b="0" i="1" smtClean="0">
+                                  <a:latin typeface="Cambria Math" panose="02040503050406030204" pitchFamily="18" charset="0"/>
+                                </a:rPr>
+                                <m:t>2</m:t>
+                              </m:r>
+                            </m:sup>
+                          </m:sSup>
+                          <m:sSup>
+                            <m:sSupPr>
+                              <m:ctrlPr>
+                                <a:rPr lang="en-GB" b="0" i="1" smtClean="0">
+                                  <a:latin typeface="Cambria Math" panose="02040503050406030204" pitchFamily="18" charset="0"/>
+                                </a:rPr>
+                              </m:ctrlPr>
+                            </m:sSupPr>
+                            <m:e>
+                              <m:r>
+                                <a:rPr lang="en-GB" b="0" i="1" smtClean="0">
+                                  <a:latin typeface="Cambria Math" panose="02040503050406030204" pitchFamily="18" charset="0"/>
+                                </a:rPr>
+                                <m:t>𝐷</m:t>
+                              </m:r>
+                            </m:e>
+                            <m:sup>
+                              <m:r>
+                                <a:rPr lang="en-GB" b="0" i="1" smtClean="0">
+                                  <a:latin typeface="Cambria Math" panose="02040503050406030204" pitchFamily="18" charset="0"/>
+                                </a:rPr>
+                                <m:t>4</m:t>
+                              </m:r>
+                            </m:sup>
+                          </m:sSup>
+                        </m:den>
+                      </m:f>
+                      <m:r>
+                        <a:rPr lang="en-GB" b="0" i="1" smtClean="0">
+                          <a:latin typeface="Cambria Math" panose="02040503050406030204" pitchFamily="18" charset="0"/>
+                        </a:rPr>
+                        <m:t>, </m:t>
+                      </m:r>
+                      <m:sSub>
+                        <m:sSubPr>
+                          <m:ctrlPr>
+                            <a:rPr lang="en-GB" b="0" i="1" smtClean="0">
+                              <a:latin typeface="Cambria Math" panose="02040503050406030204" pitchFamily="18" charset="0"/>
+                            </a:rPr>
+                          </m:ctrlPr>
+                        </m:sSubPr>
+                        <m:e>
+                          <m:r>
+                            <a:rPr lang="en-GB" b="0" i="1" smtClean="0">
+                              <a:latin typeface="Cambria Math" panose="02040503050406030204" pitchFamily="18" charset="0"/>
+                            </a:rPr>
+                            <m:t>𝐶</m:t>
+                          </m:r>
+                        </m:e>
+                        <m:sub>
+                          <m:r>
+                            <a:rPr lang="en-GB" b="0" i="1" smtClean="0">
+                              <a:latin typeface="Cambria Math" panose="02040503050406030204" pitchFamily="18" charset="0"/>
+                            </a:rPr>
+                            <m:t>𝑃</m:t>
+                          </m:r>
+                        </m:sub>
+                      </m:sSub>
+                      <m:r>
+                        <a:rPr lang="en-GB" b="0" i="1" smtClean="0">
+                          <a:latin typeface="Cambria Math" panose="02040503050406030204" pitchFamily="18" charset="0"/>
+                        </a:rPr>
+                        <m:t>=</m:t>
+                      </m:r>
+                      <m:f>
+                        <m:fPr>
+                          <m:ctrlPr>
+                            <a:rPr lang="en-GB" b="0" i="1" smtClean="0">
+                              <a:latin typeface="Cambria Math" panose="02040503050406030204" pitchFamily="18" charset="0"/>
+                            </a:rPr>
+                          </m:ctrlPr>
+                        </m:fPr>
+                        <m:num>
+                          <m:r>
+                            <a:rPr lang="en-GB" b="0" i="1" smtClean="0">
+                              <a:latin typeface="Cambria Math" panose="02040503050406030204" pitchFamily="18" charset="0"/>
+                            </a:rPr>
+                            <m:t>𝑃</m:t>
+                          </m:r>
+                        </m:num>
+                        <m:den>
+                          <m:r>
+                            <a:rPr lang="en-GB" b="0" i="1" smtClean="0">
+                              <a:latin typeface="Cambria Math" panose="02040503050406030204" pitchFamily="18" charset="0"/>
+                            </a:rPr>
+                            <m:t>𝜌</m:t>
+                          </m:r>
+                          <m:sSup>
+                            <m:sSupPr>
+                              <m:ctrlPr>
+                                <a:rPr lang="en-GB" b="0" i="1" smtClean="0">
+                                  <a:latin typeface="Cambria Math" panose="02040503050406030204" pitchFamily="18" charset="0"/>
+                                </a:rPr>
+                              </m:ctrlPr>
+                            </m:sSupPr>
+                            <m:e>
+                              <m:r>
+                                <a:rPr lang="en-GB" b="0" i="1" smtClean="0">
+                                  <a:latin typeface="Cambria Math" panose="02040503050406030204" pitchFamily="18" charset="0"/>
+                                </a:rPr>
+                                <m:t>𝑁</m:t>
+                              </m:r>
+                            </m:e>
+                            <m:sup>
+                              <m:r>
+                                <a:rPr lang="en-GB" b="0" i="1" smtClean="0">
+                                  <a:latin typeface="Cambria Math" panose="02040503050406030204" pitchFamily="18" charset="0"/>
+                                </a:rPr>
+                                <m:t>3</m:t>
+                              </m:r>
+                            </m:sup>
+                          </m:sSup>
+                          <m:sSup>
+                            <m:sSupPr>
+                              <m:ctrlPr>
+                                <a:rPr lang="en-GB" b="0" i="1" smtClean="0">
+                                  <a:latin typeface="Cambria Math" panose="02040503050406030204" pitchFamily="18" charset="0"/>
+                                </a:rPr>
+                              </m:ctrlPr>
+                            </m:sSupPr>
+                            <m:e>
+                              <m:r>
+                                <a:rPr lang="en-GB" b="0" i="1" smtClean="0">
+                                  <a:latin typeface="Cambria Math" panose="02040503050406030204" pitchFamily="18" charset="0"/>
+                                </a:rPr>
+                                <m:t>𝐷</m:t>
+                              </m:r>
+                            </m:e>
+                            <m:sup>
+                              <m:r>
+                                <a:rPr lang="en-GB" b="0" i="1" smtClean="0">
+                                  <a:latin typeface="Cambria Math" panose="02040503050406030204" pitchFamily="18" charset="0"/>
+                                </a:rPr>
+                                <m:t>5</m:t>
+                              </m:r>
+                            </m:sup>
+                          </m:sSup>
+                        </m:den>
+                      </m:f>
+                    </m:oMath>
+                  </m:oMathPara>
+                </a14:m>
+                <a:endParaRPr lang="en-GB" dirty="0"/>
+              </a:p>
+              <a:p>
+                <a:pPr marL="0" indent="0">
+                  <a:buNone/>
+                </a:pPr>
+                <a:endParaRPr lang="en-GB" dirty="0"/>
+              </a:p>
+              <a:p>
+                <a:pPr marL="0" indent="0">
+                  <a:buNone/>
+                </a:pPr>
+                <a:r>
+                  <a:rPr lang="en-GB" dirty="0"/>
+                  <a:t>Power is obtained from </a:t>
+                </a:r>
+                <a14:m>
+                  <m:oMath xmlns:m="http://schemas.openxmlformats.org/officeDocument/2006/math">
+                    <m:r>
+                      <a:rPr lang="en-GB" b="0" i="1" smtClean="0">
+                        <a:latin typeface="Cambria Math" panose="02040503050406030204" pitchFamily="18" charset="0"/>
+                      </a:rPr>
+                      <m:t>𝜏</m:t>
+                    </m:r>
+                    <m:r>
+                      <a:rPr lang="en-GB" b="0" i="1" smtClean="0">
+                        <a:latin typeface="Cambria Math" panose="02040503050406030204" pitchFamily="18" charset="0"/>
+                      </a:rPr>
+                      <m:t>⋅2</m:t>
+                    </m:r>
+                    <m:r>
+                      <a:rPr lang="en-GB" b="0" i="1" smtClean="0">
+                        <a:latin typeface="Cambria Math" panose="02040503050406030204" pitchFamily="18" charset="0"/>
+                      </a:rPr>
+                      <m:t>𝜋</m:t>
+                    </m:r>
+                    <m:r>
+                      <a:rPr lang="en-GB" b="0" i="1" smtClean="0">
+                        <a:latin typeface="Cambria Math" panose="02040503050406030204" pitchFamily="18" charset="0"/>
+                      </a:rPr>
+                      <m:t>𝑁</m:t>
+                    </m:r>
+                  </m:oMath>
+                </a14:m>
+                <a:r>
+                  <a:rPr lang="en-GB" dirty="0"/>
+                  <a:t> </a:t>
+                </a:r>
+              </a:p>
+              <a:p>
+                <a:pPr marL="0" indent="0">
+                  <a:buNone/>
+                </a:pPr>
+                <a:endParaRPr lang="en-GB" dirty="0"/>
+              </a:p>
+              <a:p>
+                <a:pPr marL="0" indent="0">
+                  <a:buNone/>
+                </a:pPr>
+                <a:r>
+                  <a:rPr lang="en-GB" dirty="0"/>
+                  <a:t>Require values for torque, thrust and angular speed.</a:t>
+                </a:r>
+              </a:p>
+            </p:txBody>
+          </p:sp>
+        </mc:Choice>
+        <mc:Fallback>
+          <p:sp>
+            <p:nvSpPr>
+              <p:cNvPr id="3" name="Content Placeholder 2">
+                <a:extLst>
+                  <a:ext uri="{FF2B5EF4-FFF2-40B4-BE49-F238E27FC236}">
+                    <a16:creationId xmlns:a16="http://schemas.microsoft.com/office/drawing/2014/main" id="{A9CDFD70-B897-4A43-D1BE-A1240A25FBB3}"/>
+                  </a:ext>
+                </a:extLst>
+              </p:cNvPr>
+              <p:cNvSpPr>
+                <a:spLocks noGrp="1" noRot="1" noChangeAspect="1" noMove="1" noResize="1" noEditPoints="1" noAdjustHandles="1" noChangeArrowheads="1" noChangeShapeType="1" noTextEdit="1"/>
+              </p:cNvSpPr>
+              <p:nvPr>
+                <p:ph idx="1"/>
+              </p:nvPr>
+            </p:nvSpPr>
+            <p:spPr>
+              <a:xfrm>
+                <a:off x="838200" y="1633824"/>
+                <a:ext cx="10515600" cy="4860646"/>
+              </a:xfrm>
+              <a:blipFill>
+                <a:blip r:embed="rId3"/>
+                <a:stretch>
+                  <a:fillRect l="-1217" t="-2133"/>
+                </a:stretch>
+              </a:blipFill>
+            </p:spPr>
+            <p:txBody>
+              <a:bodyPr/>
+              <a:lstStyle/>
+              <a:p>
+                <a:r>
+                  <a:rPr lang="en-GB">
+                    <a:noFill/>
+                  </a:rPr>
+                  <a:t> </a:t>
+                </a:r>
+              </a:p>
+            </p:txBody>
+          </p:sp>
+        </mc:Fallback>
+      </mc:AlternateContent>
     </p:spTree>
     <p:extLst>
       <p:ext uri="{BB962C8B-B14F-4D97-AF65-F5344CB8AC3E}">
@@ -4043,6 +4994,301 @@
           <p:cNvPr id="2" name="Title 1">
             <a:extLst>
               <a:ext uri="{FF2B5EF4-FFF2-40B4-BE49-F238E27FC236}">
+                <a16:creationId xmlns:a16="http://schemas.microsoft.com/office/drawing/2014/main" id="{DD1D9AC5-0EC4-38D7-8E7D-41944460A213}"/>
+              </a:ext>
+            </a:extLst>
+          </p:cNvPr>
+          <p:cNvSpPr>
+            <a:spLocks noGrp="1"/>
+          </p:cNvSpPr>
+          <p:nvPr>
+            <p:ph type="title"/>
+          </p:nvPr>
+        </p:nvSpPr>
+        <p:spPr>
+          <a:xfrm>
+            <a:off x="614570" y="231946"/>
+            <a:ext cx="10515600" cy="1325563"/>
+          </a:xfrm>
+        </p:spPr>
+        <p:txBody>
+          <a:bodyPr/>
+          <a:lstStyle/>
+          <a:p>
+            <a:r>
+              <a:rPr lang="en-GB" dirty="0"/>
+              <a:t>Aerodynamic measurements</a:t>
+            </a:r>
+          </a:p>
+        </p:txBody>
+      </p:sp>
+      <p:sp>
+        <p:nvSpPr>
+          <p:cNvPr id="3" name="Content Placeholder 2">
+            <a:extLst>
+              <a:ext uri="{FF2B5EF4-FFF2-40B4-BE49-F238E27FC236}">
+                <a16:creationId xmlns:a16="http://schemas.microsoft.com/office/drawing/2014/main" id="{9C7375A3-69B7-413F-69EC-A8BA51B8A28B}"/>
+              </a:ext>
+            </a:extLst>
+          </p:cNvPr>
+          <p:cNvSpPr>
+            <a:spLocks noGrp="1"/>
+          </p:cNvSpPr>
+          <p:nvPr>
+            <p:ph idx="1"/>
+          </p:nvPr>
+        </p:nvSpPr>
+        <p:spPr>
+          <a:xfrm>
+            <a:off x="569845" y="1756051"/>
+            <a:ext cx="5304181" cy="4629840"/>
+          </a:xfrm>
+        </p:spPr>
+        <p:txBody>
+          <a:bodyPr>
+            <a:normAutofit/>
+          </a:bodyPr>
+          <a:lstStyle/>
+          <a:p>
+            <a:pPr marL="0" indent="0">
+              <a:buNone/>
+            </a:pPr>
+            <a:r>
+              <a:rPr lang="en-GB" dirty="0"/>
+              <a:t>Torque and thrust measured by strain gauge load cells</a:t>
+            </a:r>
+          </a:p>
+          <a:p>
+            <a:pPr marL="0" indent="0">
+              <a:buNone/>
+            </a:pPr>
+            <a:endParaRPr lang="en-GB" dirty="0"/>
+          </a:p>
+          <a:p>
+            <a:pPr marL="0" indent="0">
+              <a:buNone/>
+            </a:pPr>
+            <a:r>
+              <a:rPr lang="en-GB" dirty="0"/>
+              <a:t>Full bridge cantilever models selected for sensitivity and resistance to off-axis forces</a:t>
+            </a:r>
+          </a:p>
+          <a:p>
+            <a:pPr marL="0" indent="0">
+              <a:buNone/>
+            </a:pPr>
+            <a:endParaRPr lang="en-GB" dirty="0"/>
+          </a:p>
+          <a:p>
+            <a:pPr marL="0" indent="0">
+              <a:buNone/>
+            </a:pPr>
+            <a:r>
+              <a:rPr lang="en-GB" dirty="0"/>
+              <a:t>Orientation selected for accuracy, and ease of calibration</a:t>
+            </a:r>
+          </a:p>
+        </p:txBody>
+      </p:sp>
+      <p:sp>
+        <p:nvSpPr>
+          <p:cNvPr id="7" name="Rectangle 6">
+            <a:extLst>
+              <a:ext uri="{FF2B5EF4-FFF2-40B4-BE49-F238E27FC236}">
+                <a16:creationId xmlns:a16="http://schemas.microsoft.com/office/drawing/2014/main" id="{CA5045A9-E972-F760-9683-4A4D6E4619BE}"/>
+              </a:ext>
+            </a:extLst>
+          </p:cNvPr>
+          <p:cNvSpPr/>
+          <p:nvPr/>
+        </p:nvSpPr>
+        <p:spPr>
+          <a:xfrm>
+            <a:off x="6157291" y="1232452"/>
+            <a:ext cx="5680213" cy="5317435"/>
+          </a:xfrm>
+          <a:prstGeom prst="rect">
+            <a:avLst/>
+          </a:prstGeom>
+        </p:spPr>
+        <p:style>
+          <a:lnRef idx="2">
+            <a:schemeClr val="accent1">
+              <a:shade val="15000"/>
+            </a:schemeClr>
+          </a:lnRef>
+          <a:fillRef idx="1">
+            <a:schemeClr val="accent1"/>
+          </a:fillRef>
+          <a:effectRef idx="0">
+            <a:schemeClr val="accent1"/>
+          </a:effectRef>
+          <a:fontRef idx="minor">
+            <a:schemeClr val="lt1"/>
+          </a:fontRef>
+        </p:style>
+        <p:txBody>
+          <a:bodyPr rtlCol="0" anchor="ctr"/>
+          <a:lstStyle/>
+          <a:p>
+            <a:pPr algn="ctr"/>
+            <a:r>
+              <a:rPr lang="en-GB" dirty="0"/>
+              <a:t>CAD</a:t>
+            </a:r>
+          </a:p>
+        </p:txBody>
+      </p:sp>
+    </p:spTree>
+    <p:extLst>
+      <p:ext uri="{BB962C8B-B14F-4D97-AF65-F5344CB8AC3E}">
+        <p14:creationId xmlns:p14="http://schemas.microsoft.com/office/powerpoint/2010/main" val="2695031417"/>
+      </p:ext>
+    </p:extLst>
+  </p:cSld>
+  <p:clrMapOvr>
+    <a:masterClrMapping/>
+  </p:clrMapOvr>
+</p:sld>
+</file>
+
+<file path=ppt/slides/slide8.xml><?xml version="1.0" encoding="utf-8"?>
+<p:sld xmlns:a="http://schemas.openxmlformats.org/drawingml/2006/main" xmlns:r="http://schemas.openxmlformats.org/officeDocument/2006/relationships" xmlns:p="http://schemas.openxmlformats.org/presentationml/2006/main">
+  <p:cSld>
+    <p:spTree>
+      <p:nvGrpSpPr>
+        <p:cNvPr id="1" name=""/>
+        <p:cNvGrpSpPr/>
+        <p:nvPr/>
+      </p:nvGrpSpPr>
+      <p:grpSpPr>
+        <a:xfrm>
+          <a:off x="0" y="0"/>
+          <a:ext cx="0" cy="0"/>
+          <a:chOff x="0" y="0"/>
+          <a:chExt cx="0" cy="0"/>
+        </a:xfrm>
+      </p:grpSpPr>
+      <p:sp>
+        <p:nvSpPr>
+          <p:cNvPr id="2" name="Title 1">
+            <a:extLst>
+              <a:ext uri="{FF2B5EF4-FFF2-40B4-BE49-F238E27FC236}">
+                <a16:creationId xmlns:a16="http://schemas.microsoft.com/office/drawing/2014/main" id="{92553C29-8BE0-FA3F-BADF-EB4F5C5E7059}"/>
+              </a:ext>
+            </a:extLst>
+          </p:cNvPr>
+          <p:cNvSpPr>
+            <a:spLocks noGrp="1"/>
+          </p:cNvSpPr>
+          <p:nvPr>
+            <p:ph type="title"/>
+          </p:nvPr>
+        </p:nvSpPr>
+        <p:spPr/>
+        <p:txBody>
+          <a:bodyPr/>
+          <a:lstStyle/>
+          <a:p>
+            <a:r>
+              <a:rPr lang="en-GB" dirty="0"/>
+              <a:t>Acoustic performance</a:t>
+            </a:r>
+          </a:p>
+        </p:txBody>
+      </p:sp>
+      <p:sp>
+        <p:nvSpPr>
+          <p:cNvPr id="3" name="Content Placeholder 2">
+            <a:extLst>
+              <a:ext uri="{FF2B5EF4-FFF2-40B4-BE49-F238E27FC236}">
+                <a16:creationId xmlns:a16="http://schemas.microsoft.com/office/drawing/2014/main" id="{5C5C9FEE-F51C-BBC5-5750-D5F85AFD1F9B}"/>
+              </a:ext>
+            </a:extLst>
+          </p:cNvPr>
+          <p:cNvSpPr>
+            <a:spLocks noGrp="1"/>
+          </p:cNvSpPr>
+          <p:nvPr>
+            <p:ph idx="1"/>
+          </p:nvPr>
+        </p:nvSpPr>
+        <p:spPr/>
+        <p:txBody>
+          <a:bodyPr>
+            <a:normAutofit/>
+          </a:bodyPr>
+          <a:lstStyle/>
+          <a:p>
+            <a:pPr marL="0" indent="0">
+              <a:buNone/>
+            </a:pPr>
+            <a:r>
+              <a:rPr lang="en-GB" dirty="0"/>
+              <a:t>To quantify the annoyance of sound the psychoacoustics must be considered</a:t>
+            </a:r>
+          </a:p>
+          <a:p>
+            <a:pPr marL="0" indent="0">
+              <a:buNone/>
+            </a:pPr>
+            <a:endParaRPr lang="en-GB" dirty="0"/>
+          </a:p>
+          <a:p>
+            <a:pPr marL="0" indent="0">
+              <a:buNone/>
+            </a:pPr>
+            <a:r>
+              <a:rPr lang="en-GB" dirty="0"/>
+              <a:t>P</a:t>
+            </a:r>
+            <a:r>
+              <a:rPr lang="en-US" dirty="0" err="1"/>
+              <a:t>sychoacoustic</a:t>
+            </a:r>
+            <a:r>
+              <a:rPr lang="en-US" dirty="0"/>
+              <a:t> metrics of loudness, fluctuation strength, roughness, sharpness, tonality</a:t>
+            </a:r>
+            <a:endParaRPr lang="en-GB" dirty="0"/>
+          </a:p>
+        </p:txBody>
+      </p:sp>
+    </p:spTree>
+    <p:extLst>
+      <p:ext uri="{BB962C8B-B14F-4D97-AF65-F5344CB8AC3E}">
+        <p14:creationId xmlns:p14="http://schemas.microsoft.com/office/powerpoint/2010/main" val="1354065674"/>
+      </p:ext>
+    </p:extLst>
+  </p:cSld>
+  <p:clrMapOvr>
+    <a:masterClrMapping/>
+  </p:clrMapOvr>
+</p:sld>
+</file>
+
+<file path=ppt/slides/slide9.xml><?xml version="1.0" encoding="utf-8"?>
+<p:sld xmlns:a="http://schemas.openxmlformats.org/drawingml/2006/main" xmlns:r="http://schemas.openxmlformats.org/officeDocument/2006/relationships" xmlns:p="http://schemas.openxmlformats.org/presentationml/2006/main">
+  <p:cSld>
+    <p:spTree>
+      <p:nvGrpSpPr>
+        <p:cNvPr id="1" name=""/>
+        <p:cNvGrpSpPr/>
+        <p:nvPr/>
+      </p:nvGrpSpPr>
+      <p:grpSpPr>
+        <a:xfrm>
+          <a:off x="0" y="0"/>
+          <a:ext cx="0" cy="0"/>
+          <a:chOff x="0" y="0"/>
+          <a:chExt cx="0" cy="0"/>
+        </a:xfrm>
+      </p:grpSpPr>
+      <p:sp>
+        <p:nvSpPr>
+          <p:cNvPr id="2" name="Title 1">
+            <a:extLst>
+              <a:ext uri="{FF2B5EF4-FFF2-40B4-BE49-F238E27FC236}">
                 <a16:creationId xmlns:a16="http://schemas.microsoft.com/office/drawing/2014/main" id="{1EBECBE2-A4C4-70B6-C758-B1BD9EEA99FE}"/>
               </a:ext>
             </a:extLst>
@@ -4054,37 +5300,115 @@
             <p:ph type="title"/>
           </p:nvPr>
         </p:nvSpPr>
-        <p:spPr/>
-        <p:txBody>
-          <a:bodyPr/>
-          <a:lstStyle/>
-          <a:p>
-            <a:endParaRPr lang="en-GB"/>
-          </a:p>
-        </p:txBody>
-      </p:sp>
-      <p:sp>
-        <p:nvSpPr>
-          <p:cNvPr id="3" name="Content Placeholder 2">
-            <a:extLst>
-              <a:ext uri="{FF2B5EF4-FFF2-40B4-BE49-F238E27FC236}">
-                <a16:creationId xmlns:a16="http://schemas.microsoft.com/office/drawing/2014/main" id="{FDADD7C6-C812-D98F-82FE-5FE4081FFFD0}"/>
-              </a:ext>
-            </a:extLst>
-          </p:cNvPr>
-          <p:cNvSpPr>
-            <a:spLocks noGrp="1"/>
-          </p:cNvSpPr>
-          <p:nvPr>
-            <p:ph idx="1"/>
-          </p:nvPr>
-        </p:nvSpPr>
-        <p:spPr/>
-        <p:txBody>
-          <a:bodyPr/>
-          <a:lstStyle/>
-          <a:p>
-            <a:endParaRPr lang="en-GB"/>
+        <p:spPr>
+          <a:xfrm>
+            <a:off x="753451" y="249153"/>
+            <a:ext cx="10515600" cy="1325563"/>
+          </a:xfrm>
+        </p:spPr>
+        <p:txBody>
+          <a:bodyPr/>
+          <a:lstStyle/>
+          <a:p>
+            <a:r>
+              <a:rPr lang="en-GB" dirty="0"/>
+              <a:t>Questions?</a:t>
+            </a:r>
+          </a:p>
+        </p:txBody>
+      </p:sp>
+      <p:sp>
+        <p:nvSpPr>
+          <p:cNvPr id="5" name="TextBox 4">
+            <a:extLst>
+              <a:ext uri="{FF2B5EF4-FFF2-40B4-BE49-F238E27FC236}">
+                <a16:creationId xmlns:a16="http://schemas.microsoft.com/office/drawing/2014/main" id="{E44BC597-3E26-981B-2200-703284AC4B74}"/>
+              </a:ext>
+            </a:extLst>
+          </p:cNvPr>
+          <p:cNvSpPr txBox="1"/>
+          <p:nvPr/>
+        </p:nvSpPr>
+        <p:spPr>
+          <a:xfrm>
+            <a:off x="922949" y="4398395"/>
+            <a:ext cx="6095256" cy="646331"/>
+          </a:xfrm>
+          <a:prstGeom prst="rect">
+            <a:avLst/>
+          </a:prstGeom>
+          <a:noFill/>
+        </p:spPr>
+        <p:txBody>
+          <a:bodyPr wrap="square">
+            <a:spAutoFit/>
+          </a:bodyPr>
+          <a:lstStyle/>
+          <a:p>
+            <a:r>
+              <a:rPr lang="en-GB" dirty="0"/>
+              <a:t>Toroidal propeller designs – Thingyverse </a:t>
+            </a:r>
+          </a:p>
+          <a:p>
+            <a:r>
+              <a:rPr lang="en-GB" dirty="0"/>
+              <a:t>Owl image – Wang and Liu</a:t>
+            </a:r>
+          </a:p>
+        </p:txBody>
+      </p:sp>
+      <p:sp>
+        <p:nvSpPr>
+          <p:cNvPr id="6" name="Title 1">
+            <a:extLst>
+              <a:ext uri="{FF2B5EF4-FFF2-40B4-BE49-F238E27FC236}">
+                <a16:creationId xmlns:a16="http://schemas.microsoft.com/office/drawing/2014/main" id="{B2EDC919-4D0D-9CAF-829E-6BC52F9E82E6}"/>
+              </a:ext>
+            </a:extLst>
+          </p:cNvPr>
+          <p:cNvSpPr txBox="1">
+            <a:spLocks/>
+          </p:cNvSpPr>
+          <p:nvPr/>
+        </p:nvSpPr>
+        <p:spPr>
+          <a:xfrm>
+            <a:off x="753451" y="3072832"/>
+            <a:ext cx="10515600" cy="1325563"/>
+          </a:xfrm>
+          <a:prstGeom prst="rect">
+            <a:avLst/>
+          </a:prstGeom>
+        </p:spPr>
+        <p:txBody>
+          <a:bodyPr vert="horz" lIns="91440" tIns="45720" rIns="91440" bIns="45720" rtlCol="0" anchor="ctr">
+            <a:normAutofit/>
+          </a:bodyPr>
+          <a:lstStyle>
+            <a:lvl1pPr algn="l" defTabSz="914400" rtl="0" eaLnBrk="1" latinLnBrk="0" hangingPunct="1">
+              <a:lnSpc>
+                <a:spcPct val="90000"/>
+              </a:lnSpc>
+              <a:spcBef>
+                <a:spcPct val="0"/>
+              </a:spcBef>
+              <a:buNone/>
+              <a:defRPr sz="4400" kern="1200">
+                <a:solidFill>
+                  <a:schemeClr val="tx1"/>
+                </a:solidFill>
+                <a:latin typeface="+mj-lt"/>
+                <a:ea typeface="+mj-ea"/>
+                <a:cs typeface="+mj-cs"/>
+              </a:defRPr>
+            </a:lvl1pPr>
+          </a:lstStyle>
+          <a:p>
+            <a:r>
+              <a:rPr lang="en-GB" dirty="0"/>
+              <a:t>References</a:t>
+            </a:r>
           </a:p>
         </p:txBody>
       </p:sp>
@@ -4414,4 +5738,319 @@
     </a:ext>
   </a:extLst>
 </a:theme>
+</file>
+
+<file path=ppt/theme/theme2.xml><?xml version="1.0" encoding="utf-8"?>
+<a:theme xmlns:a="http://schemas.openxmlformats.org/drawingml/2006/main" name="Office Theme">
+  <a:themeElements>
+    <a:clrScheme name="Office">
+      <a:dk1>
+        <a:sysClr val="windowText" lastClr="000000"/>
+      </a:dk1>
+      <a:lt1>
+        <a:sysClr val="window" lastClr="FFFFFF"/>
+      </a:lt1>
+      <a:dk2>
+        <a:srgbClr val="0E2841"/>
+      </a:dk2>
+      <a:lt2>
+        <a:srgbClr val="E8E8E8"/>
+      </a:lt2>
+      <a:accent1>
+        <a:srgbClr val="156082"/>
+      </a:accent1>
+      <a:accent2>
+        <a:srgbClr val="E97132"/>
+      </a:accent2>
+      <a:accent3>
+        <a:srgbClr val="196B24"/>
+      </a:accent3>
+      <a:accent4>
+        <a:srgbClr val="0F9ED5"/>
+      </a:accent4>
+      <a:accent5>
+        <a:srgbClr val="A02B93"/>
+      </a:accent5>
+      <a:accent6>
+        <a:srgbClr val="4EA72E"/>
+      </a:accent6>
+      <a:hlink>
+        <a:srgbClr val="467886"/>
+      </a:hlink>
+      <a:folHlink>
+        <a:srgbClr val="96607D"/>
+      </a:folHlink>
+    </a:clrScheme>
+    <a:fontScheme name="Office">
+      <a:majorFont>
+        <a:latin typeface="Aptos Display" panose="02110004020202020204"/>
+        <a:ea typeface=""/>
+        <a:cs typeface=""/>
+        <a:font script="Jpan" typeface="游ゴシック Light"/>
+        <a:font script="Hang" typeface="맑은 고딕"/>
+        <a:font script="Hans" typeface="等线 Light"/>
+        <a:font script="Hant" typeface="新細明體"/>
+        <a:font script="Arab" typeface="Times New Roman"/>
+        <a:font script="Hebr" typeface="Times New Roman"/>
+        <a:font script="Thai" typeface="Angsana New"/>
+        <a:font script="Ethi" typeface="Nyala"/>
+        <a:font script="Beng" typeface="Vrinda"/>
+        <a:font script="Gujr" typeface="Shruti"/>
+        <a:font script="Khmr" typeface="MoolBoran"/>
+        <a:font script="Knda" typeface="Tunga"/>
+        <a:font script="Guru" typeface="Raavi"/>
+        <a:font script="Cans" typeface="Euphemia"/>
+        <a:font script="Cher" typeface="Plantagenet Cherokee"/>
+        <a:font script="Yiii" typeface="Microsoft Yi Baiti"/>
+        <a:font script="Tibt" typeface="Microsoft Himalaya"/>
+        <a:font script="Thaa" typeface="MV Boli"/>
+        <a:font script="Deva" typeface="Mangal"/>
+        <a:font script="Telu" typeface="Gautami"/>
+        <a:font script="Taml" typeface="Latha"/>
+        <a:font script="Syrc" typeface="Estrangelo Edessa"/>
+        <a:font script="Orya" typeface="Kalinga"/>
+        <a:font script="Mlym" typeface="Kartika"/>
+        <a:font script="Laoo" typeface="DokChampa"/>
+        <a:font script="Sinh" typeface="Iskoola Pota"/>
+        <a:font script="Mong" typeface="Mongolian Baiti"/>
+        <a:font script="Viet" typeface="Times New Roman"/>
+        <a:font script="Uigh" typeface="Microsoft Uighur"/>
+        <a:font script="Geor" typeface="Sylfaen"/>
+        <a:font script="Armn" typeface="Arial"/>
+        <a:font script="Bugi" typeface="Leelawadee UI"/>
+        <a:font script="Bopo" typeface="Microsoft JhengHei"/>
+        <a:font script="Java" typeface="Javanese Text"/>
+        <a:font script="Lisu" typeface="Segoe UI"/>
+        <a:font script="Mymr" typeface="Myanmar Text"/>
+        <a:font script="Nkoo" typeface="Ebrima"/>
+        <a:font script="Olck" typeface="Nirmala UI"/>
+        <a:font script="Osma" typeface="Ebrima"/>
+        <a:font script="Phag" typeface="Phagspa"/>
+        <a:font script="Syrn" typeface="Estrangelo Edessa"/>
+        <a:font script="Syrj" typeface="Estrangelo Edessa"/>
+        <a:font script="Syre" typeface="Estrangelo Edessa"/>
+        <a:font script="Sora" typeface="Nirmala UI"/>
+        <a:font script="Tale" typeface="Microsoft Tai Le"/>
+        <a:font script="Talu" typeface="Microsoft New Tai Lue"/>
+        <a:font script="Tfng" typeface="Ebrima"/>
+      </a:majorFont>
+      <a:minorFont>
+        <a:latin typeface="Aptos" panose="02110004020202020204"/>
+        <a:ea typeface=""/>
+        <a:cs typeface=""/>
+        <a:font script="Jpan" typeface="游ゴシック"/>
+        <a:font script="Hang" typeface="맑은 고딕"/>
+        <a:font script="Hans" typeface="等线"/>
+        <a:font script="Hant" typeface="新細明體"/>
+        <a:font script="Arab" typeface="Arial"/>
+        <a:font script="Hebr" typeface="Arial"/>
+        <a:font script="Thai" typeface="Cordia New"/>
+        <a:font script="Ethi" typeface="Nyala"/>
+        <a:font script="Beng" typeface="Vrinda"/>
+        <a:font script="Gujr" typeface="Shruti"/>
+        <a:font script="Khmr" typeface="DaunPenh"/>
+        <a:font script="Knda" typeface="Tunga"/>
+        <a:font script="Guru" typeface="Raavi"/>
+        <a:font script="Cans" typeface="Euphemia"/>
+        <a:font script="Cher" typeface="Plantagenet Cherokee"/>
+        <a:font script="Yiii" typeface="Microsoft Yi Baiti"/>
+        <a:font script="Tibt" typeface="Microsoft Himalaya"/>
+        <a:font script="Thaa" typeface="MV Boli"/>
+        <a:font script="Deva" typeface="Mangal"/>
+        <a:font script="Telu" typeface="Gautami"/>
+        <a:font script="Taml" typeface="Latha"/>
+        <a:font script="Syrc" typeface="Estrangelo Edessa"/>
+        <a:font script="Orya" typeface="Kalinga"/>
+        <a:font script="Mlym" typeface="Kartika"/>
+        <a:font script="Laoo" typeface="DokChampa"/>
+        <a:font script="Sinh" typeface="Iskoola Pota"/>
+        <a:font script="Mong" typeface="Mongolian Baiti"/>
+        <a:font script="Viet" typeface="Arial"/>
+        <a:font script="Uigh" typeface="Microsoft Uighur"/>
+        <a:font script="Geor" typeface="Sylfaen"/>
+        <a:font script="Armn" typeface="Arial"/>
+        <a:font script="Bugi" typeface="Leelawadee UI"/>
+        <a:font script="Bopo" typeface="Microsoft JhengHei"/>
+        <a:font script="Java" typeface="Javanese Text"/>
+        <a:font script="Lisu" typeface="Segoe UI"/>
+        <a:font script="Mymr" typeface="Myanmar Text"/>
+        <a:font script="Nkoo" typeface="Ebrima"/>
+        <a:font script="Olck" typeface="Nirmala UI"/>
+        <a:font script="Osma" typeface="Ebrima"/>
+        <a:font script="Phag" typeface="Phagspa"/>
+        <a:font script="Syrn" typeface="Estrangelo Edessa"/>
+        <a:font script="Syrj" typeface="Estrangelo Edessa"/>
+        <a:font script="Syre" typeface="Estrangelo Edessa"/>
+        <a:font script="Sora" typeface="Nirmala UI"/>
+        <a:font script="Tale" typeface="Microsoft Tai Le"/>
+        <a:font script="Talu" typeface="Microsoft New Tai Lue"/>
+        <a:font script="Tfng" typeface="Ebrima"/>
+      </a:minorFont>
+    </a:fontScheme>
+    <a:fmtScheme name="Office">
+      <a:fillStyleLst>
+        <a:solidFill>
+          <a:schemeClr val="phClr"/>
+        </a:solidFill>
+        <a:gradFill rotWithShape="1">
+          <a:gsLst>
+            <a:gs pos="0">
+              <a:schemeClr val="phClr">
+                <a:lumMod val="110000"/>
+                <a:satMod val="105000"/>
+                <a:tint val="67000"/>
+              </a:schemeClr>
+            </a:gs>
+            <a:gs pos="50000">
+              <a:schemeClr val="phClr">
+                <a:lumMod val="105000"/>
+                <a:satMod val="103000"/>
+                <a:tint val="73000"/>
+              </a:schemeClr>
+            </a:gs>
+            <a:gs pos="100000">
+              <a:schemeClr val="phClr">
+                <a:lumMod val="105000"/>
+                <a:satMod val="109000"/>
+                <a:tint val="81000"/>
+              </a:schemeClr>
+            </a:gs>
+          </a:gsLst>
+          <a:lin ang="5400000" scaled="0"/>
+        </a:gradFill>
+        <a:gradFill rotWithShape="1">
+          <a:gsLst>
+            <a:gs pos="0">
+              <a:schemeClr val="phClr">
+                <a:satMod val="103000"/>
+                <a:lumMod val="102000"/>
+                <a:tint val="94000"/>
+              </a:schemeClr>
+            </a:gs>
+            <a:gs pos="50000">
+              <a:schemeClr val="phClr">
+                <a:satMod val="110000"/>
+                <a:lumMod val="100000"/>
+                <a:shade val="100000"/>
+              </a:schemeClr>
+            </a:gs>
+            <a:gs pos="100000">
+              <a:schemeClr val="phClr">
+                <a:lumMod val="99000"/>
+                <a:satMod val="120000"/>
+                <a:shade val="78000"/>
+              </a:schemeClr>
+            </a:gs>
+          </a:gsLst>
+          <a:lin ang="5400000" scaled="0"/>
+        </a:gradFill>
+      </a:fillStyleLst>
+      <a:lnStyleLst>
+        <a:ln w="12700" cap="flat" cmpd="sng" algn="ctr">
+          <a:solidFill>
+            <a:schemeClr val="phClr"/>
+          </a:solidFill>
+          <a:prstDash val="solid"/>
+          <a:miter lim="800000"/>
+        </a:ln>
+        <a:ln w="19050" cap="flat" cmpd="sng" algn="ctr">
+          <a:solidFill>
+            <a:schemeClr val="phClr"/>
+          </a:solidFill>
+          <a:prstDash val="solid"/>
+          <a:miter lim="800000"/>
+        </a:ln>
+        <a:ln w="25400" cap="flat" cmpd="sng" algn="ctr">
+          <a:solidFill>
+            <a:schemeClr val="phClr"/>
+          </a:solidFill>
+          <a:prstDash val="solid"/>
+          <a:miter lim="800000"/>
+        </a:ln>
+      </a:lnStyleLst>
+      <a:effectStyleLst>
+        <a:effectStyle>
+          <a:effectLst/>
+        </a:effectStyle>
+        <a:effectStyle>
+          <a:effectLst/>
+        </a:effectStyle>
+        <a:effectStyle>
+          <a:effectLst>
+            <a:outerShdw blurRad="57150" dist="19050" dir="5400000" algn="ctr" rotWithShape="0">
+              <a:srgbClr val="000000">
+                <a:alpha val="63000"/>
+              </a:srgbClr>
+            </a:outerShdw>
+          </a:effectLst>
+        </a:effectStyle>
+      </a:effectStyleLst>
+      <a:bgFillStyleLst>
+        <a:solidFill>
+          <a:schemeClr val="phClr"/>
+        </a:solidFill>
+        <a:solidFill>
+          <a:schemeClr val="phClr">
+            <a:tint val="95000"/>
+            <a:satMod val="170000"/>
+          </a:schemeClr>
+        </a:solidFill>
+        <a:gradFill rotWithShape="1">
+          <a:gsLst>
+            <a:gs pos="0">
+              <a:schemeClr val="phClr">
+                <a:tint val="93000"/>
+                <a:satMod val="150000"/>
+                <a:shade val="98000"/>
+                <a:lumMod val="102000"/>
+              </a:schemeClr>
+            </a:gs>
+            <a:gs pos="50000">
+              <a:schemeClr val="phClr">
+                <a:tint val="98000"/>
+                <a:satMod val="130000"/>
+                <a:shade val="90000"/>
+                <a:lumMod val="103000"/>
+              </a:schemeClr>
+            </a:gs>
+            <a:gs pos="100000">
+              <a:schemeClr val="phClr">
+                <a:shade val="63000"/>
+                <a:satMod val="120000"/>
+              </a:schemeClr>
+            </a:gs>
+          </a:gsLst>
+          <a:lin ang="5400000" scaled="0"/>
+        </a:gradFill>
+      </a:bgFillStyleLst>
+    </a:fmtScheme>
+  </a:themeElements>
+  <a:objectDefaults>
+    <a:lnDef>
+      <a:spPr/>
+      <a:bodyPr/>
+      <a:lstStyle/>
+      <a:style>
+        <a:lnRef idx="2">
+          <a:schemeClr val="accent1"/>
+        </a:lnRef>
+        <a:fillRef idx="0">
+          <a:schemeClr val="accent1"/>
+        </a:fillRef>
+        <a:effectRef idx="1">
+          <a:schemeClr val="accent1"/>
+        </a:effectRef>
+        <a:fontRef idx="minor">
+          <a:schemeClr val="tx1"/>
+        </a:fontRef>
+      </a:style>
+    </a:lnDef>
+  </a:objectDefaults>
+  <a:extraClrSchemeLst/>
+  <a:extLst>
+    <a:ext uri="{05A4C25C-085E-4340-85A3-A5531E510DB2}">
+      <thm15:themeFamily xmlns:thm15="http://schemas.microsoft.com/office/thememl/2012/main" name="Office Theme" id="{2E142A2C-CD16-42D6-873A-C26D2A0506FA}" vid="{1BDDFF52-6CD6-40A5-AB3C-68EB2F1E4D0A}"/>
+    </a:ext>
+  </a:extLst>
+</a:theme>
 </file>
--- a/deliverables/michaelmas_presentation.pptx
+++ b/deliverables/michaelmas_presentation.pptx
@@ -205,7 +205,7 @@
           <a:p>
             <a:fld id="{C0BB89D3-1E85-48CA-BFDB-0FE03B3C9B40}" type="datetimeFigureOut">
               <a:rPr lang="en-GB" smtClean="0"/>
-              <a:t>24/11/2024</a:t>
+              <a:t>25/11/2024</a:t>
             </a:fld>
             <a:endParaRPr lang="en-GB"/>
           </a:p>
@@ -517,6 +517,174 @@
           <a:bodyPr/>
           <a:lstStyle/>
           <a:p>
+            <a:endParaRPr lang="en-GB" dirty="0"/>
+          </a:p>
+        </p:txBody>
+      </p:sp>
+      <p:sp>
+        <p:nvSpPr>
+          <p:cNvPr id="4" name="Slide Number Placeholder 3"/>
+          <p:cNvSpPr>
+            <a:spLocks noGrp="1"/>
+          </p:cNvSpPr>
+          <p:nvPr>
+            <p:ph type="sldNum" sz="quarter" idx="5"/>
+          </p:nvPr>
+        </p:nvSpPr>
+        <p:spPr/>
+        <p:txBody>
+          <a:bodyPr/>
+          <a:lstStyle/>
+          <a:p>
+            <a:fld id="{339AB5C0-8D71-4250-8AD2-76EE22722959}" type="slidenum">
+              <a:rPr lang="en-GB" smtClean="0"/>
+              <a:t>1</a:t>
+            </a:fld>
+            <a:endParaRPr lang="en-GB"/>
+          </a:p>
+        </p:txBody>
+      </p:sp>
+    </p:spTree>
+    <p:extLst>
+      <p:ext uri="{BB962C8B-B14F-4D97-AF65-F5344CB8AC3E}">
+        <p14:creationId xmlns:p14="http://schemas.microsoft.com/office/powerpoint/2010/main" val="2935703679"/>
+      </p:ext>
+    </p:extLst>
+  </p:cSld>
+  <p:clrMapOvr>
+    <a:masterClrMapping/>
+  </p:clrMapOvr>
+</p:notes>
+</file>
+
+<file path=ppt/notesSlides/notesSlide2.xml><?xml version="1.0" encoding="utf-8"?>
+<p:notes xmlns:a="http://schemas.openxmlformats.org/drawingml/2006/main" xmlns:r="http://schemas.openxmlformats.org/officeDocument/2006/relationships" xmlns:p="http://schemas.openxmlformats.org/presentationml/2006/main">
+  <p:cSld>
+    <p:spTree>
+      <p:nvGrpSpPr>
+        <p:cNvPr id="1" name=""/>
+        <p:cNvGrpSpPr/>
+        <p:nvPr/>
+      </p:nvGrpSpPr>
+      <p:grpSpPr>
+        <a:xfrm>
+          <a:off x="0" y="0"/>
+          <a:ext cx="0" cy="0"/>
+          <a:chOff x="0" y="0"/>
+          <a:chExt cx="0" cy="0"/>
+        </a:xfrm>
+      </p:grpSpPr>
+      <p:sp>
+        <p:nvSpPr>
+          <p:cNvPr id="2" name="Slide Image Placeholder 1"/>
+          <p:cNvSpPr>
+            <a:spLocks noGrp="1" noRot="1" noChangeAspect="1"/>
+          </p:cNvSpPr>
+          <p:nvPr>
+            <p:ph type="sldImg"/>
+          </p:nvPr>
+        </p:nvSpPr>
+        <p:spPr/>
+      </p:sp>
+      <p:sp>
+        <p:nvSpPr>
+          <p:cNvPr id="3" name="Notes Placeholder 2"/>
+          <p:cNvSpPr>
+            <a:spLocks noGrp="1"/>
+          </p:cNvSpPr>
+          <p:nvPr>
+            <p:ph type="body" idx="1"/>
+          </p:nvPr>
+        </p:nvSpPr>
+        <p:spPr/>
+        <p:txBody>
+          <a:bodyPr/>
+          <a:lstStyle/>
+          <a:p>
+            <a:endParaRPr lang="en-GB" dirty="0"/>
+          </a:p>
+        </p:txBody>
+      </p:sp>
+      <p:sp>
+        <p:nvSpPr>
+          <p:cNvPr id="4" name="Slide Number Placeholder 3"/>
+          <p:cNvSpPr>
+            <a:spLocks noGrp="1"/>
+          </p:cNvSpPr>
+          <p:nvPr>
+            <p:ph type="sldNum" sz="quarter" idx="5"/>
+          </p:nvPr>
+        </p:nvSpPr>
+        <p:spPr/>
+        <p:txBody>
+          <a:bodyPr/>
+          <a:lstStyle/>
+          <a:p>
+            <a:fld id="{339AB5C0-8D71-4250-8AD2-76EE22722959}" type="slidenum">
+              <a:rPr lang="en-GB" smtClean="0"/>
+              <a:t>2</a:t>
+            </a:fld>
+            <a:endParaRPr lang="en-GB"/>
+          </a:p>
+        </p:txBody>
+      </p:sp>
+    </p:spTree>
+    <p:extLst>
+      <p:ext uri="{BB962C8B-B14F-4D97-AF65-F5344CB8AC3E}">
+        <p14:creationId xmlns:p14="http://schemas.microsoft.com/office/powerpoint/2010/main" val="3772234275"/>
+      </p:ext>
+    </p:extLst>
+  </p:cSld>
+  <p:clrMapOvr>
+    <a:masterClrMapping/>
+  </p:clrMapOvr>
+</p:notes>
+</file>
+
+<file path=ppt/notesSlides/notesSlide3.xml><?xml version="1.0" encoding="utf-8"?>
+<p:notes xmlns:a="http://schemas.openxmlformats.org/drawingml/2006/main" xmlns:r="http://schemas.openxmlformats.org/officeDocument/2006/relationships" xmlns:p="http://schemas.openxmlformats.org/presentationml/2006/main">
+  <p:cSld>
+    <p:spTree>
+      <p:nvGrpSpPr>
+        <p:cNvPr id="1" name=""/>
+        <p:cNvGrpSpPr/>
+        <p:nvPr/>
+      </p:nvGrpSpPr>
+      <p:grpSpPr>
+        <a:xfrm>
+          <a:off x="0" y="0"/>
+          <a:ext cx="0" cy="0"/>
+          <a:chOff x="0" y="0"/>
+          <a:chExt cx="0" cy="0"/>
+        </a:xfrm>
+      </p:grpSpPr>
+      <p:sp>
+        <p:nvSpPr>
+          <p:cNvPr id="2" name="Slide Image Placeholder 1"/>
+          <p:cNvSpPr>
+            <a:spLocks noGrp="1" noRot="1" noChangeAspect="1"/>
+          </p:cNvSpPr>
+          <p:nvPr>
+            <p:ph type="sldImg"/>
+          </p:nvPr>
+        </p:nvSpPr>
+        <p:spPr/>
+      </p:sp>
+      <p:sp>
+        <p:nvSpPr>
+          <p:cNvPr id="3" name="Notes Placeholder 2"/>
+          <p:cNvSpPr>
+            <a:spLocks noGrp="1"/>
+          </p:cNvSpPr>
+          <p:nvPr>
+            <p:ph type="body" idx="1"/>
+          </p:nvPr>
+        </p:nvSpPr>
+        <p:spPr/>
+        <p:txBody>
+          <a:bodyPr/>
+          <a:lstStyle/>
+          <a:p>
             <a:r>
               <a:rPr lang="en-GB" dirty="0"/>
               <a:t>For the experimental setup it's important to consider the parameters needed to define a given propellers performance. Dimensionless thrust and power coefficients can be found from blade tip speed and area. The ratio of these coefficients define a ‘static’ efficiency which is different to the typical propulsive efficiency. The values then required to be measured are the torque, thrust and angular speed.</a:t>
@@ -566,7 +734,7 @@
 </p:notes>
 </file>
 
-<file path=ppt/notesSlides/notesSlide2.xml><?xml version="1.0" encoding="utf-8"?>
+<file path=ppt/notesSlides/notesSlide4.xml><?xml version="1.0" encoding="utf-8"?>
 <p:notes xmlns:a="http://schemas.openxmlformats.org/drawingml/2006/main" xmlns:r="http://schemas.openxmlformats.org/officeDocument/2006/relationships" xmlns:p="http://schemas.openxmlformats.org/presentationml/2006/main">
   <p:cSld>
     <p:spTree>
@@ -802,7 +970,7 @@
           <a:p>
             <a:fld id="{B8C3C57F-C92A-483E-A8E5-2F94B59C9323}" type="datetimeFigureOut">
               <a:rPr lang="en-GB" smtClean="0"/>
-              <a:t>24/11/2024</a:t>
+              <a:t>25/11/2024</a:t>
             </a:fld>
             <a:endParaRPr lang="en-GB"/>
           </a:p>
@@ -1002,7 +1170,7 @@
           <a:p>
             <a:fld id="{B8C3C57F-C92A-483E-A8E5-2F94B59C9323}" type="datetimeFigureOut">
               <a:rPr lang="en-GB" smtClean="0"/>
-              <a:t>24/11/2024</a:t>
+              <a:t>25/11/2024</a:t>
             </a:fld>
             <a:endParaRPr lang="en-GB"/>
           </a:p>
@@ -1212,7 +1380,7 @@
           <a:p>
             <a:fld id="{B8C3C57F-C92A-483E-A8E5-2F94B59C9323}" type="datetimeFigureOut">
               <a:rPr lang="en-GB" smtClean="0"/>
-              <a:t>24/11/2024</a:t>
+              <a:t>25/11/2024</a:t>
             </a:fld>
             <a:endParaRPr lang="en-GB"/>
           </a:p>
@@ -1412,7 +1580,7 @@
           <a:p>
             <a:fld id="{B8C3C57F-C92A-483E-A8E5-2F94B59C9323}" type="datetimeFigureOut">
               <a:rPr lang="en-GB" smtClean="0"/>
-              <a:t>24/11/2024</a:t>
+              <a:t>25/11/2024</a:t>
             </a:fld>
             <a:endParaRPr lang="en-GB"/>
           </a:p>
@@ -1688,7 +1856,7 @@
           <a:p>
             <a:fld id="{B8C3C57F-C92A-483E-A8E5-2F94B59C9323}" type="datetimeFigureOut">
               <a:rPr lang="en-GB" smtClean="0"/>
-              <a:t>24/11/2024</a:t>
+              <a:t>25/11/2024</a:t>
             </a:fld>
             <a:endParaRPr lang="en-GB"/>
           </a:p>
@@ -1956,7 +2124,7 @@
           <a:p>
             <a:fld id="{B8C3C57F-C92A-483E-A8E5-2F94B59C9323}" type="datetimeFigureOut">
               <a:rPr lang="en-GB" smtClean="0"/>
-              <a:t>24/11/2024</a:t>
+              <a:t>25/11/2024</a:t>
             </a:fld>
             <a:endParaRPr lang="en-GB"/>
           </a:p>
@@ -2371,7 +2539,7 @@
           <a:p>
             <a:fld id="{B8C3C57F-C92A-483E-A8E5-2F94B59C9323}" type="datetimeFigureOut">
               <a:rPr lang="en-GB" smtClean="0"/>
-              <a:t>24/11/2024</a:t>
+              <a:t>25/11/2024</a:t>
             </a:fld>
             <a:endParaRPr lang="en-GB"/>
           </a:p>
@@ -2513,7 +2681,7 @@
           <a:p>
             <a:fld id="{B8C3C57F-C92A-483E-A8E5-2F94B59C9323}" type="datetimeFigureOut">
               <a:rPr lang="en-GB" smtClean="0"/>
-              <a:t>24/11/2024</a:t>
+              <a:t>25/11/2024</a:t>
             </a:fld>
             <a:endParaRPr lang="en-GB"/>
           </a:p>
@@ -2626,7 +2794,7 @@
           <a:p>
             <a:fld id="{B8C3C57F-C92A-483E-A8E5-2F94B59C9323}" type="datetimeFigureOut">
               <a:rPr lang="en-GB" smtClean="0"/>
-              <a:t>24/11/2024</a:t>
+              <a:t>25/11/2024</a:t>
             </a:fld>
             <a:endParaRPr lang="en-GB"/>
           </a:p>
@@ -2939,7 +3107,7 @@
           <a:p>
             <a:fld id="{B8C3C57F-C92A-483E-A8E5-2F94B59C9323}" type="datetimeFigureOut">
               <a:rPr lang="en-GB" smtClean="0"/>
-              <a:t>24/11/2024</a:t>
+              <a:t>25/11/2024</a:t>
             </a:fld>
             <a:endParaRPr lang="en-GB"/>
           </a:p>
@@ -3228,7 +3396,7 @@
           <a:p>
             <a:fld id="{B8C3C57F-C92A-483E-A8E5-2F94B59C9323}" type="datetimeFigureOut">
               <a:rPr lang="en-GB" smtClean="0"/>
-              <a:t>24/11/2024</a:t>
+              <a:t>25/11/2024</a:t>
             </a:fld>
             <a:endParaRPr lang="en-GB"/>
           </a:p>
@@ -3471,7 +3639,7 @@
           <a:p>
             <a:fld id="{B8C3C57F-C92A-483E-A8E5-2F94B59C9323}" type="datetimeFigureOut">
               <a:rPr lang="en-GB" smtClean="0"/>
-              <a:t>24/11/2024</a:t>
+              <a:t>25/11/2024</a:t>
             </a:fld>
             <a:endParaRPr lang="en-GB"/>
           </a:p>
@@ -3937,7 +4105,16 @@
           <a:bodyPr/>
           <a:lstStyle/>
           <a:p>
-            <a:endParaRPr lang="en-GB" dirty="0"/>
+            <a:r>
+              <a:rPr lang="en-GB" dirty="0"/>
+              <a:t>Louis Pender</a:t>
+            </a:r>
+          </a:p>
+          <a:p>
+            <a:r>
+              <a:rPr lang="en-GB" dirty="0"/>
+              <a:t>Lwp26</a:t>
+            </a:r>
           </a:p>
         </p:txBody>
       </p:sp>
@@ -4015,7 +4192,12 @@
             <p:ph idx="1"/>
           </p:nvPr>
         </p:nvSpPr>
-        <p:spPr/>
+        <p:spPr>
+          <a:xfrm>
+            <a:off x="838200" y="1516136"/>
+            <a:ext cx="10515600" cy="4351338"/>
+          </a:xfrm>
+        </p:spPr>
         <p:txBody>
           <a:bodyPr/>
           <a:lstStyle/>
@@ -4144,7 +4326,7 @@
         </p:nvSpPr>
         <p:spPr>
           <a:xfrm>
-            <a:off x="838200" y="1325562"/>
+            <a:off x="838200" y="1418394"/>
             <a:ext cx="10515600" cy="5208491"/>
           </a:xfrm>
         </p:spPr>
@@ -4439,6 +4621,81 @@
   <p:clrMapOvr>
     <a:masterClrMapping/>
   </p:clrMapOvr>
+  <p:timing>
+    <p:tnLst>
+      <p:par>
+        <p:cTn id="1" dur="indefinite" restart="never" nodeType="tmRoot">
+          <p:childTnLst>
+            <p:seq concurrent="1" nextAc="seek">
+              <p:cTn id="2" dur="indefinite" nodeType="mainSeq">
+                <p:childTnLst>
+                  <p:par>
+                    <p:cTn id="3" fill="hold">
+                      <p:stCondLst>
+                        <p:cond delay="indefinite"/>
+                      </p:stCondLst>
+                      <p:childTnLst>
+                        <p:par>
+                          <p:cTn id="4" fill="hold">
+                            <p:stCondLst>
+                              <p:cond delay="0"/>
+                            </p:stCondLst>
+                            <p:childTnLst>
+                              <p:par>
+                                <p:cTn id="5" presetID="1" presetClass="entr" presetSubtype="0" fill="hold" nodeType="clickEffect">
+                                  <p:stCondLst>
+                                    <p:cond delay="0"/>
+                                  </p:stCondLst>
+                                  <p:childTnLst>
+                                    <p:set>
+                                      <p:cBhvr>
+                                        <p:cTn id="6" dur="1" fill="hold">
+                                          <p:stCondLst>
+                                            <p:cond delay="0"/>
+                                          </p:stCondLst>
+                                        </p:cTn>
+                                        <p:tgtEl>
+                                          <p:spTgt spid="4"/>
+                                        </p:tgtEl>
+                                        <p:attrNameLst>
+                                          <p:attrName>style.visibility</p:attrName>
+                                        </p:attrNameLst>
+                                      </p:cBhvr>
+                                      <p:to>
+                                        <p:strVal val="visible"/>
+                                      </p:to>
+                                    </p:set>
+                                  </p:childTnLst>
+                                </p:cTn>
+                              </p:par>
+                            </p:childTnLst>
+                          </p:cTn>
+                        </p:par>
+                      </p:childTnLst>
+                    </p:cTn>
+                  </p:par>
+                </p:childTnLst>
+              </p:cTn>
+              <p:prevCondLst>
+                <p:cond evt="onPrev" delay="0">
+                  <p:tgtEl>
+                    <p:sldTgt/>
+                  </p:tgtEl>
+                </p:cond>
+              </p:prevCondLst>
+              <p:nextCondLst>
+                <p:cond evt="onNext" delay="0">
+                  <p:tgtEl>
+                    <p:sldTgt/>
+                  </p:tgtEl>
+                </p:cond>
+              </p:nextCondLst>
+            </p:seq>
+          </p:childTnLst>
+        </p:cTn>
+      </p:par>
+    </p:tnLst>
+  </p:timing>
 </p:sld>
 </file>
 
@@ -4508,13 +4765,16 @@
           <a:bodyPr/>
           <a:lstStyle/>
           <a:p>
+            <a:pPr marL="0" indent="0">
+              <a:buNone/>
+            </a:pPr>
+            <a:endParaRPr lang="en-GB" dirty="0"/>
+          </a:p>
+          <a:p>
             <a:r>
               <a:rPr lang="en-GB" dirty="0"/>
-              <a:t>Improvements in efficiency</a:t>
-            </a:r>
-          </a:p>
-          <a:p>
-            <a:endParaRPr lang="en-GB" dirty="0"/>
+              <a:t>The </a:t>
+            </a:r>
           </a:p>
         </p:txBody>
       </p:sp>
@@ -4581,8 +4841,8 @@
           </a:p>
         </p:txBody>
       </p:sp>
-      <mc:AlternateContent xmlns:mc="http://schemas.openxmlformats.org/markup-compatibility/2006">
-        <mc:Choice xmlns:a14="http://schemas.microsoft.com/office/drawing/2010/main" Requires="a14">
+      <mc:AlternateContent xmlns:mc="http://schemas.openxmlformats.org/markup-compatibility/2006" xmlns:a14="http://schemas.microsoft.com/office/drawing/2010/main">
+        <mc:Choice Requires="a14">
           <p:sp>
             <p:nvSpPr>
               <p:cNvPr id="3" name="Content Placeholder 2">
@@ -4915,7 +5175,7 @@
             </p:txBody>
           </p:sp>
         </mc:Choice>
-        <mc:Fallback>
+        <mc:Fallback xmlns="">
           <p:sp>
             <p:nvSpPr>
               <p:cNvPr id="3" name="Content Placeholder 2">

--- a/deliverables/michaelmas_presentation.pptx
+++ b/deliverables/michaelmas_presentation.pptx
@@ -10,12 +10,12 @@
   <p:sldIdLst>
     <p:sldId id="256" r:id="rId2"/>
     <p:sldId id="257" r:id="rId3"/>
-    <p:sldId id="258" r:id="rId4"/>
-    <p:sldId id="259" r:id="rId5"/>
-    <p:sldId id="260" r:id="rId6"/>
-    <p:sldId id="261" r:id="rId7"/>
-    <p:sldId id="263" r:id="rId8"/>
-    <p:sldId id="264" r:id="rId9"/>
+    <p:sldId id="265" r:id="rId4"/>
+    <p:sldId id="258" r:id="rId5"/>
+    <p:sldId id="261" r:id="rId6"/>
+    <p:sldId id="263" r:id="rId7"/>
+    <p:sldId id="264" r:id="rId8"/>
+    <p:sldId id="266" r:id="rId9"/>
     <p:sldId id="262" r:id="rId10"/>
   </p:sldIdLst>
   <p:sldSz cx="12192000" cy="6858000"/>
@@ -687,13 +687,7 @@
           <a:p>
             <a:r>
               <a:rPr lang="en-GB" dirty="0"/>
-              <a:t>For the experimental setup it's important to consider the parameters needed to define a given propellers performance. Dimensionless thrust and power coefficients can be found from blade tip speed and area. The ratio of these coefficients define a ‘static’ efficiency which is different to the typical propulsive efficiency. The values then required to be measured are the torque, thrust and angular speed.</a:t>
-            </a:r>
-          </a:p>
-          <a:p>
-            <a:r>
-              <a:rPr lang="en-GB" dirty="0"/>
-              <a:t>Dynamic measurements of torque and angular velocity could be fused together in a Kalman filter</a:t>
+              <a:t>Of course this isn’t a new topic </a:t>
             </a:r>
           </a:p>
         </p:txBody>
@@ -715,7 +709,7 @@
           <a:p>
             <a:fld id="{339AB5C0-8D71-4250-8AD2-76EE22722959}" type="slidenum">
               <a:rPr lang="en-GB" smtClean="0"/>
-              <a:t>6</a:t>
+              <a:t>3</a:t>
             </a:fld>
             <a:endParaRPr lang="en-GB"/>
           </a:p>
@@ -724,7 +718,7 @@
     </p:spTree>
     <p:extLst>
       <p:ext uri="{BB962C8B-B14F-4D97-AF65-F5344CB8AC3E}">
-        <p14:creationId xmlns:p14="http://schemas.microsoft.com/office/powerpoint/2010/main" val="1790782265"/>
+        <p14:creationId xmlns:p14="http://schemas.microsoft.com/office/powerpoint/2010/main" val="1580789794"/>
       </p:ext>
     </p:extLst>
   </p:cSld>
@@ -780,7 +774,13 @@
           <a:p>
             <a:r>
               <a:rPr lang="en-GB" dirty="0"/>
-              <a:t>To measure torque and thrust the deflection of load cells will be measured by strain gauges. This was preferred over null force balancing methods for its simple setup and ability to measure dynamic torque.</a:t>
+              <a:t>For the experimental setup it's important to consider the parameters needed to define a given propellers performance. Dimensionless thrust and power coefficients can be found from blade tip speed and area. The ratio of these coefficients define a ‘static’ efficiency which is different to the typical propulsive efficiency. The values then required to be measured are the torque, thrust and angular speed.</a:t>
+            </a:r>
+          </a:p>
+          <a:p>
+            <a:r>
+              <a:rPr lang="en-GB" dirty="0"/>
+              <a:t>Dynamic measurements of torque and angular velocity could be fused together in a Kalman filter</a:t>
             </a:r>
           </a:p>
         </p:txBody>
@@ -802,7 +802,103 @@
           <a:p>
             <a:fld id="{339AB5C0-8D71-4250-8AD2-76EE22722959}" type="slidenum">
               <a:rPr lang="en-GB" smtClean="0"/>
-              <a:t>7</a:t>
+              <a:t>5</a:t>
+            </a:fld>
+            <a:endParaRPr lang="en-GB"/>
+          </a:p>
+        </p:txBody>
+      </p:sp>
+    </p:spTree>
+    <p:extLst>
+      <p:ext uri="{BB962C8B-B14F-4D97-AF65-F5344CB8AC3E}">
+        <p14:creationId xmlns:p14="http://schemas.microsoft.com/office/powerpoint/2010/main" val="1790782265"/>
+      </p:ext>
+    </p:extLst>
+  </p:cSld>
+  <p:clrMapOvr>
+    <a:masterClrMapping/>
+  </p:clrMapOvr>
+</p:notes>
+</file>
+
+<file path=ppt/notesSlides/notesSlide5.xml><?xml version="1.0" encoding="utf-8"?>
+<p:notes xmlns:a="http://schemas.openxmlformats.org/drawingml/2006/main" xmlns:r="http://schemas.openxmlformats.org/officeDocument/2006/relationships" xmlns:p="http://schemas.openxmlformats.org/presentationml/2006/main">
+  <p:cSld>
+    <p:spTree>
+      <p:nvGrpSpPr>
+        <p:cNvPr id="1" name=""/>
+        <p:cNvGrpSpPr/>
+        <p:nvPr/>
+      </p:nvGrpSpPr>
+      <p:grpSpPr>
+        <a:xfrm>
+          <a:off x="0" y="0"/>
+          <a:ext cx="0" cy="0"/>
+          <a:chOff x="0" y="0"/>
+          <a:chExt cx="0" cy="0"/>
+        </a:xfrm>
+      </p:grpSpPr>
+      <p:sp>
+        <p:nvSpPr>
+          <p:cNvPr id="2" name="Slide Image Placeholder 1"/>
+          <p:cNvSpPr>
+            <a:spLocks noGrp="1" noRot="1" noChangeAspect="1"/>
+          </p:cNvSpPr>
+          <p:nvPr>
+            <p:ph type="sldImg"/>
+          </p:nvPr>
+        </p:nvSpPr>
+        <p:spPr/>
+      </p:sp>
+      <p:sp>
+        <p:nvSpPr>
+          <p:cNvPr id="3" name="Notes Placeholder 2"/>
+          <p:cNvSpPr>
+            <a:spLocks noGrp="1"/>
+          </p:cNvSpPr>
+          <p:nvPr>
+            <p:ph type="body" idx="1"/>
+          </p:nvPr>
+        </p:nvSpPr>
+        <p:spPr/>
+        <p:txBody>
+          <a:bodyPr/>
+          <a:lstStyle/>
+          <a:p>
+            <a:r>
+              <a:rPr lang="en-GB" dirty="0"/>
+              <a:t>To measure torque and thrust the deflection of load cells will be measured by strain gauges. This was chosen over null force balancing methods for its simple setup and sufficient accuracy.</a:t>
+            </a:r>
+          </a:p>
+          <a:p>
+            <a:r>
+              <a:rPr lang="en-GB" dirty="0"/>
+              <a:t>Full bridge load cell refers to 4 strain gauges in the Wheatstone bridge which compensates for off axis forces.</a:t>
+            </a:r>
+          </a:p>
+          <a:p>
+            <a:endParaRPr lang="en-GB" dirty="0"/>
+          </a:p>
+        </p:txBody>
+      </p:sp>
+      <p:sp>
+        <p:nvSpPr>
+          <p:cNvPr id="4" name="Slide Number Placeholder 3"/>
+          <p:cNvSpPr>
+            <a:spLocks noGrp="1"/>
+          </p:cNvSpPr>
+          <p:nvPr>
+            <p:ph type="sldNum" sz="quarter" idx="5"/>
+          </p:nvPr>
+        </p:nvSpPr>
+        <p:spPr/>
+        <p:txBody>
+          <a:bodyPr/>
+          <a:lstStyle/>
+          <a:p>
+            <a:fld id="{339AB5C0-8D71-4250-8AD2-76EE22722959}" type="slidenum">
+              <a:rPr lang="en-GB" smtClean="0"/>
+              <a:t>6</a:t>
             </a:fld>
             <a:endParaRPr lang="en-GB"/>
           </a:p>
@@ -4042,6 +4138,14 @@
 <file path=ppt/slides/slide1.xml><?xml version="1.0" encoding="utf-8"?>
 <p:sld xmlns:a="http://schemas.openxmlformats.org/drawingml/2006/main" xmlns:r="http://schemas.openxmlformats.org/officeDocument/2006/relationships" xmlns:p="http://schemas.openxmlformats.org/presentationml/2006/main">
   <p:cSld>
+    <p:bg>
+      <p:bgPr>
+        <a:solidFill>
+          <a:schemeClr val="bg1"/>
+        </a:solidFill>
+        <a:effectLst/>
+      </p:bgPr>
+    </p:bg>
     <p:spTree>
       <p:nvGrpSpPr>
         <p:cNvPr id="1" name=""/>
@@ -4056,6 +4160,536 @@
           <a:chExt cx="0" cy="0"/>
         </a:xfrm>
       </p:grpSpPr>
+      <p:sp useBgFill="1">
+        <p:nvSpPr>
+          <p:cNvPr id="8" name="Rectangle 7">
+            <a:extLst>
+              <a:ext uri="{FF2B5EF4-FFF2-40B4-BE49-F238E27FC236}">
+                <a16:creationId xmlns:a16="http://schemas.microsoft.com/office/drawing/2014/main" id="{577D6B2E-37A3-429E-A37C-F30ED6487282}"/>
+              </a:ext>
+              <a:ext uri="{C183D7F6-B498-43B3-948B-1728B52AA6E4}">
+                <adec:decorative xmlns:adec="http://schemas.microsoft.com/office/drawing/2017/decorative" val="1"/>
+              </a:ext>
+            </a:extLst>
+          </p:cNvPr>
+          <p:cNvSpPr>
+            <a:spLocks noGrp="1" noRot="1" noChangeAspect="1" noMove="1" noResize="1" noEditPoints="1" noAdjustHandles="1" noChangeArrowheads="1" noChangeShapeType="1" noTextEdit="1"/>
+          </p:cNvSpPr>
+          <p:nvPr>
+            <p:extLst>
+              <p:ext uri="{386F3935-93C4-4BCD-93E2-E3B085C9AB24}">
+                <p16:designElem xmlns:p16="http://schemas.microsoft.com/office/powerpoint/2015/main" val="1"/>
+              </p:ext>
+            </p:extLst>
+          </p:nvPr>
+        </p:nvSpPr>
+        <p:spPr>
+          <a:xfrm>
+            <a:off x="0" y="0"/>
+            <a:ext cx="12192000" cy="6858000"/>
+          </a:xfrm>
+          <a:prstGeom prst="rect">
+            <a:avLst/>
+          </a:prstGeom>
+          <a:ln w="12700" cap="flat" cmpd="sng" algn="ctr">
+            <a:noFill/>
+            <a:prstDash val="solid"/>
+            <a:miter lim="800000"/>
+          </a:ln>
+          <a:effectLst/>
+          <a:extLst>
+            <a:ext uri="{91240B29-F687-4F45-9708-019B960494DF}">
+              <a14:hiddenLine xmlns:a14="http://schemas.microsoft.com/office/drawing/2010/main" w="12700" cap="flat" cmpd="sng" algn="ctr">
+                <a:solidFill>
+                  <a:schemeClr val="accent1">
+                    <a:shade val="50000"/>
+                  </a:schemeClr>
+                </a:solidFill>
+                <a:prstDash val="solid"/>
+                <a:miter lim="800000"/>
+              </a14:hiddenLine>
+            </a:ext>
+          </a:extLst>
+        </p:spPr>
+        <p:style>
+          <a:lnRef idx="2">
+            <a:schemeClr val="accent1">
+              <a:shade val="50000"/>
+            </a:schemeClr>
+          </a:lnRef>
+          <a:fillRef idx="1">
+            <a:schemeClr val="accent1"/>
+          </a:fillRef>
+          <a:effectRef idx="0">
+            <a:schemeClr val="accent1"/>
+          </a:effectRef>
+          <a:fontRef idx="minor">
+            <a:schemeClr val="lt1"/>
+          </a:fontRef>
+        </p:style>
+        <p:txBody>
+          <a:bodyPr rtlCol="0" anchor="ctr"/>
+          <a:lstStyle/>
+          <a:p>
+            <a:pPr algn="ctr"/>
+            <a:endParaRPr lang="en-US"/>
+          </a:p>
+        </p:txBody>
+      </p:sp>
+      <p:sp>
+        <p:nvSpPr>
+          <p:cNvPr id="10" name="Rectangle 9">
+            <a:extLst>
+              <a:ext uri="{FF2B5EF4-FFF2-40B4-BE49-F238E27FC236}">
+                <a16:creationId xmlns:a16="http://schemas.microsoft.com/office/drawing/2014/main" id="{5CEAD642-85CF-4750-8432-7C80C901F001}"/>
+              </a:ext>
+              <a:ext uri="{C183D7F6-B498-43B3-948B-1728B52AA6E4}">
+                <adec:decorative xmlns:adec="http://schemas.microsoft.com/office/drawing/2017/decorative" val="1"/>
+              </a:ext>
+            </a:extLst>
+          </p:cNvPr>
+          <p:cNvSpPr>
+            <a:spLocks noGrp="1" noRot="1" noChangeAspect="1" noMove="1" noResize="1" noEditPoints="1" noAdjustHandles="1" noChangeArrowheads="1" noChangeShapeType="1" noTextEdit="1"/>
+          </p:cNvSpPr>
+          <p:nvPr>
+            <p:extLst>
+              <p:ext uri="{386F3935-93C4-4BCD-93E2-E3B085C9AB24}">
+                <p16:designElem xmlns:p16="http://schemas.microsoft.com/office/powerpoint/2015/main" val="1"/>
+              </p:ext>
+            </p:extLst>
+          </p:nvPr>
+        </p:nvSpPr>
+        <p:spPr>
+          <a:xfrm rot="10800000">
+            <a:off x="-11723" y="-1"/>
+            <a:ext cx="12225953" cy="6868071"/>
+          </a:xfrm>
+          <a:prstGeom prst="rect">
+            <a:avLst/>
+          </a:prstGeom>
+          <a:gradFill>
+            <a:gsLst>
+              <a:gs pos="0">
+                <a:srgbClr val="000000"/>
+              </a:gs>
+              <a:gs pos="100000">
+                <a:schemeClr val="accent1">
+                  <a:lumMod val="75000"/>
+                </a:schemeClr>
+              </a:gs>
+            </a:gsLst>
+            <a:lin ang="4200000" scaled="0"/>
+          </a:gradFill>
+          <a:ln>
+            <a:noFill/>
+          </a:ln>
+        </p:spPr>
+        <p:style>
+          <a:lnRef idx="2">
+            <a:schemeClr val="accent1">
+              <a:shade val="50000"/>
+            </a:schemeClr>
+          </a:lnRef>
+          <a:fillRef idx="1">
+            <a:schemeClr val="accent1"/>
+          </a:fillRef>
+          <a:effectRef idx="0">
+            <a:schemeClr val="accent1"/>
+          </a:effectRef>
+          <a:fontRef idx="minor">
+            <a:schemeClr val="lt1"/>
+          </a:fontRef>
+        </p:style>
+        <p:txBody>
+          <a:bodyPr rtlCol="0" anchor="ctr"/>
+          <a:lstStyle/>
+          <a:p>
+            <a:pPr algn="ctr"/>
+            <a:endParaRPr lang="en-US"/>
+          </a:p>
+        </p:txBody>
+      </p:sp>
+      <p:sp>
+        <p:nvSpPr>
+          <p:cNvPr id="12" name="Rectangle 11">
+            <a:extLst>
+              <a:ext uri="{FF2B5EF4-FFF2-40B4-BE49-F238E27FC236}">
+                <a16:creationId xmlns:a16="http://schemas.microsoft.com/office/drawing/2014/main" id="{FA33EEAE-15D5-4119-8C1E-89D943F911EF}"/>
+              </a:ext>
+              <a:ext uri="{C183D7F6-B498-43B3-948B-1728B52AA6E4}">
+                <adec:decorative xmlns:adec="http://schemas.microsoft.com/office/drawing/2017/decorative" val="1"/>
+              </a:ext>
+            </a:extLst>
+          </p:cNvPr>
+          <p:cNvSpPr>
+            <a:spLocks noGrp="1" noRot="1" noChangeAspect="1" noMove="1" noResize="1" noEditPoints="1" noAdjustHandles="1" noChangeArrowheads="1" noChangeShapeType="1" noTextEdit="1"/>
+          </p:cNvSpPr>
+          <p:nvPr>
+            <p:extLst>
+              <p:ext uri="{386F3935-93C4-4BCD-93E2-E3B085C9AB24}">
+                <p16:designElem xmlns:p16="http://schemas.microsoft.com/office/powerpoint/2015/main" val="1"/>
+              </p:ext>
+            </p:extLst>
+          </p:nvPr>
+        </p:nvSpPr>
+        <p:spPr>
+          <a:xfrm rot="10800000" flipH="1">
+            <a:off x="441959" y="-3"/>
+            <a:ext cx="11772269" cy="6868074"/>
+          </a:xfrm>
+          <a:prstGeom prst="rect">
+            <a:avLst/>
+          </a:prstGeom>
+          <a:gradFill>
+            <a:gsLst>
+              <a:gs pos="21000">
+                <a:schemeClr val="accent1">
+                  <a:lumMod val="50000"/>
+                  <a:alpha val="83000"/>
+                </a:schemeClr>
+              </a:gs>
+              <a:gs pos="100000">
+                <a:schemeClr val="accent1">
+                  <a:alpha val="0"/>
+                </a:schemeClr>
+              </a:gs>
+            </a:gsLst>
+            <a:lin ang="8400000" scaled="0"/>
+          </a:gradFill>
+          <a:ln>
+            <a:noFill/>
+          </a:ln>
+        </p:spPr>
+        <p:style>
+          <a:lnRef idx="2">
+            <a:schemeClr val="accent1">
+              <a:shade val="50000"/>
+            </a:schemeClr>
+          </a:lnRef>
+          <a:fillRef idx="1">
+            <a:schemeClr val="accent1"/>
+          </a:fillRef>
+          <a:effectRef idx="0">
+            <a:schemeClr val="accent1"/>
+          </a:effectRef>
+          <a:fontRef idx="minor">
+            <a:schemeClr val="lt1"/>
+          </a:fontRef>
+        </p:style>
+        <p:txBody>
+          <a:bodyPr rtlCol="0" anchor="ctr"/>
+          <a:lstStyle/>
+          <a:p>
+            <a:pPr algn="ctr"/>
+            <a:endParaRPr lang="en-US"/>
+          </a:p>
+        </p:txBody>
+      </p:sp>
+      <p:sp>
+        <p:nvSpPr>
+          <p:cNvPr id="14" name="Rectangle 13">
+            <a:extLst>
+              <a:ext uri="{FF2B5EF4-FFF2-40B4-BE49-F238E27FC236}">
+                <a16:creationId xmlns:a16="http://schemas.microsoft.com/office/drawing/2014/main" id="{730D8B3B-9B80-4025-B934-26DC7D7CD231}"/>
+              </a:ext>
+              <a:ext uri="{C183D7F6-B498-43B3-948B-1728B52AA6E4}">
+                <adec:decorative xmlns:adec="http://schemas.microsoft.com/office/drawing/2017/decorative" val="1"/>
+              </a:ext>
+            </a:extLst>
+          </p:cNvPr>
+          <p:cNvSpPr>
+            <a:spLocks noGrp="1" noRot="1" noChangeAspect="1" noMove="1" noResize="1" noEditPoints="1" noAdjustHandles="1" noChangeArrowheads="1" noChangeShapeType="1" noTextEdit="1"/>
+          </p:cNvSpPr>
+          <p:nvPr>
+            <p:extLst>
+              <p:ext uri="{386F3935-93C4-4BCD-93E2-E3B085C9AB24}">
+                <p16:designElem xmlns:p16="http://schemas.microsoft.com/office/powerpoint/2015/main" val="1"/>
+              </p:ext>
+            </p:extLst>
+          </p:nvPr>
+        </p:nvSpPr>
+        <p:spPr>
+          <a:xfrm rot="10800000">
+            <a:off x="-15200" y="0"/>
+            <a:ext cx="3623374" cy="6868072"/>
+          </a:xfrm>
+          <a:prstGeom prst="rect">
+            <a:avLst/>
+          </a:prstGeom>
+          <a:gradFill>
+            <a:gsLst>
+              <a:gs pos="0">
+                <a:schemeClr val="accent1">
+                  <a:lumMod val="75000"/>
+                  <a:alpha val="0"/>
+                </a:schemeClr>
+              </a:gs>
+              <a:gs pos="99000">
+                <a:srgbClr val="000000">
+                  <a:alpha val="41000"/>
+                </a:srgbClr>
+              </a:gs>
+            </a:gsLst>
+            <a:lin ang="13200000" scaled="0"/>
+          </a:gradFill>
+          <a:ln>
+            <a:noFill/>
+          </a:ln>
+        </p:spPr>
+        <p:style>
+          <a:lnRef idx="2">
+            <a:schemeClr val="accent1">
+              <a:shade val="50000"/>
+            </a:schemeClr>
+          </a:lnRef>
+          <a:fillRef idx="1">
+            <a:schemeClr val="accent1"/>
+          </a:fillRef>
+          <a:effectRef idx="0">
+            <a:schemeClr val="accent1"/>
+          </a:effectRef>
+          <a:fontRef idx="minor">
+            <a:schemeClr val="lt1"/>
+          </a:fontRef>
+        </p:style>
+        <p:txBody>
+          <a:bodyPr rtlCol="0" anchor="ctr"/>
+          <a:lstStyle/>
+          <a:p>
+            <a:pPr algn="ctr"/>
+            <a:endParaRPr lang="en-US"/>
+          </a:p>
+        </p:txBody>
+      </p:sp>
+      <p:sp>
+        <p:nvSpPr>
+          <p:cNvPr id="16" name="Rectangle 15">
+            <a:extLst>
+              <a:ext uri="{FF2B5EF4-FFF2-40B4-BE49-F238E27FC236}">
+                <a16:creationId xmlns:a16="http://schemas.microsoft.com/office/drawing/2014/main" id="{1064D5D5-227B-4F66-9AEA-46F570E793BD}"/>
+              </a:ext>
+              <a:ext uri="{C183D7F6-B498-43B3-948B-1728B52AA6E4}">
+                <adec:decorative xmlns:adec="http://schemas.microsoft.com/office/drawing/2017/decorative" val="1"/>
+              </a:ext>
+            </a:extLst>
+          </p:cNvPr>
+          <p:cNvSpPr>
+            <a:spLocks noGrp="1" noRot="1" noChangeAspect="1" noMove="1" noResize="1" noEditPoints="1" noAdjustHandles="1" noChangeArrowheads="1" noChangeShapeType="1" noTextEdit="1"/>
+          </p:cNvSpPr>
+          <p:nvPr>
+            <p:extLst>
+              <p:ext uri="{386F3935-93C4-4BCD-93E2-E3B085C9AB24}">
+                <p16:designElem xmlns:p16="http://schemas.microsoft.com/office/powerpoint/2015/main" val="1"/>
+              </p:ext>
+            </p:extLst>
+          </p:nvPr>
+        </p:nvSpPr>
+        <p:spPr>
+          <a:xfrm flipH="1">
+            <a:off x="-15875" y="-3"/>
+            <a:ext cx="12233581" cy="6868076"/>
+          </a:xfrm>
+          <a:prstGeom prst="rect">
+            <a:avLst/>
+          </a:prstGeom>
+          <a:gradFill>
+            <a:gsLst>
+              <a:gs pos="3000">
+                <a:schemeClr val="accent1">
+                  <a:lumMod val="75000"/>
+                  <a:alpha val="0"/>
+                </a:schemeClr>
+              </a:gs>
+              <a:gs pos="100000">
+                <a:srgbClr val="000000">
+                  <a:alpha val="73000"/>
+                </a:srgbClr>
+              </a:gs>
+            </a:gsLst>
+            <a:lin ang="17400000" scaled="0"/>
+          </a:gradFill>
+          <a:ln>
+            <a:noFill/>
+          </a:ln>
+        </p:spPr>
+        <p:style>
+          <a:lnRef idx="2">
+            <a:schemeClr val="accent1">
+              <a:shade val="50000"/>
+            </a:schemeClr>
+          </a:lnRef>
+          <a:fillRef idx="1">
+            <a:schemeClr val="accent1"/>
+          </a:fillRef>
+          <a:effectRef idx="0">
+            <a:schemeClr val="accent1"/>
+          </a:effectRef>
+          <a:fontRef idx="minor">
+            <a:schemeClr val="lt1"/>
+          </a:fontRef>
+        </p:style>
+        <p:txBody>
+          <a:bodyPr rtlCol="0" anchor="ctr"/>
+          <a:lstStyle/>
+          <a:p>
+            <a:pPr algn="ctr"/>
+            <a:endParaRPr lang="en-US"/>
+          </a:p>
+        </p:txBody>
+      </p:sp>
+      <p:sp>
+        <p:nvSpPr>
+          <p:cNvPr id="18" name="Rectangle 17">
+            <a:extLst>
+              <a:ext uri="{FF2B5EF4-FFF2-40B4-BE49-F238E27FC236}">
+                <a16:creationId xmlns:a16="http://schemas.microsoft.com/office/drawing/2014/main" id="{646B67A4-D328-4747-A82B-65E84FA46368}"/>
+              </a:ext>
+              <a:ext uri="{C183D7F6-B498-43B3-948B-1728B52AA6E4}">
+                <adec:decorative xmlns:adec="http://schemas.microsoft.com/office/drawing/2017/decorative" val="1"/>
+              </a:ext>
+            </a:extLst>
+          </p:cNvPr>
+          <p:cNvSpPr>
+            <a:spLocks noGrp="1" noRot="1" noChangeAspect="1" noMove="1" noResize="1" noEditPoints="1" noAdjustHandles="1" noChangeArrowheads="1" noChangeShapeType="1" noTextEdit="1"/>
+          </p:cNvSpPr>
+          <p:nvPr>
+            <p:extLst>
+              <p:ext uri="{386F3935-93C4-4BCD-93E2-E3B085C9AB24}">
+                <p16:designElem xmlns:p16="http://schemas.microsoft.com/office/powerpoint/2015/main" val="1"/>
+              </p:ext>
+            </p:extLst>
+          </p:nvPr>
+        </p:nvSpPr>
+        <p:spPr>
+          <a:xfrm rot="5400000" flipH="1">
+            <a:off x="4484334" y="-861824"/>
+            <a:ext cx="6861931" cy="8597859"/>
+          </a:xfrm>
+          <a:prstGeom prst="rect">
+            <a:avLst/>
+          </a:prstGeom>
+          <a:gradFill>
+            <a:gsLst>
+              <a:gs pos="3000">
+                <a:schemeClr val="accent1">
+                  <a:lumMod val="75000"/>
+                  <a:alpha val="0"/>
+                </a:schemeClr>
+              </a:gs>
+              <a:gs pos="100000">
+                <a:srgbClr val="000000">
+                  <a:alpha val="27000"/>
+                </a:srgbClr>
+              </a:gs>
+            </a:gsLst>
+            <a:lin ang="13800000" scaled="0"/>
+          </a:gradFill>
+          <a:ln>
+            <a:noFill/>
+          </a:ln>
+        </p:spPr>
+        <p:style>
+          <a:lnRef idx="2">
+            <a:schemeClr val="accent1">
+              <a:shade val="50000"/>
+            </a:schemeClr>
+          </a:lnRef>
+          <a:fillRef idx="1">
+            <a:schemeClr val="accent1"/>
+          </a:fillRef>
+          <a:effectRef idx="0">
+            <a:schemeClr val="accent1"/>
+          </a:effectRef>
+          <a:fontRef idx="minor">
+            <a:schemeClr val="lt1"/>
+          </a:fontRef>
+        </p:style>
+        <p:txBody>
+          <a:bodyPr rtlCol="0" anchor="ctr"/>
+          <a:lstStyle/>
+          <a:p>
+            <a:pPr algn="ctr"/>
+            <a:endParaRPr lang="en-US"/>
+          </a:p>
+        </p:txBody>
+      </p:sp>
+      <p:sp>
+        <p:nvSpPr>
+          <p:cNvPr id="20" name="Oval 19">
+            <a:extLst>
+              <a:ext uri="{FF2B5EF4-FFF2-40B4-BE49-F238E27FC236}">
+                <a16:creationId xmlns:a16="http://schemas.microsoft.com/office/drawing/2014/main" id="{B5A1B09C-1565-46F8-B70F-621C5EB48A09}"/>
+              </a:ext>
+              <a:ext uri="{C183D7F6-B498-43B3-948B-1728B52AA6E4}">
+                <adec:decorative xmlns:adec="http://schemas.microsoft.com/office/drawing/2017/decorative" val="1"/>
+              </a:ext>
+            </a:extLst>
+          </p:cNvPr>
+          <p:cNvSpPr>
+            <a:spLocks noGrp="1" noRot="1" noChangeAspect="1" noMove="1" noResize="1" noEditPoints="1" noAdjustHandles="1" noChangeArrowheads="1" noChangeShapeType="1" noTextEdit="1"/>
+          </p:cNvSpPr>
+          <p:nvPr>
+            <p:extLst>
+              <p:ext uri="{386F3935-93C4-4BCD-93E2-E3B085C9AB24}">
+                <p16:designElem xmlns:p16="http://schemas.microsoft.com/office/powerpoint/2015/main" val="1"/>
+              </p:ext>
+            </p:extLst>
+          </p:nvPr>
+        </p:nvSpPr>
+        <p:spPr>
+          <a:xfrm rot="5993193">
+            <a:off x="1186972" y="1089049"/>
+            <a:ext cx="4967533" cy="4988390"/>
+          </a:xfrm>
+          <a:prstGeom prst="ellipse">
+            <a:avLst/>
+          </a:prstGeom>
+          <a:gradFill>
+            <a:gsLst>
+              <a:gs pos="0">
+                <a:schemeClr val="accent1">
+                  <a:alpha val="26000"/>
+                </a:schemeClr>
+              </a:gs>
+              <a:gs pos="85000">
+                <a:schemeClr val="accent1">
+                  <a:lumMod val="60000"/>
+                  <a:lumOff val="40000"/>
+                  <a:alpha val="0"/>
+                </a:schemeClr>
+              </a:gs>
+            </a:gsLst>
+            <a:lin ang="14400000" scaled="0"/>
+          </a:gradFill>
+          <a:ln>
+            <a:noFill/>
+          </a:ln>
+        </p:spPr>
+        <p:style>
+          <a:lnRef idx="2">
+            <a:schemeClr val="accent1">
+              <a:shade val="50000"/>
+            </a:schemeClr>
+          </a:lnRef>
+          <a:fillRef idx="1">
+            <a:schemeClr val="accent1"/>
+          </a:fillRef>
+          <a:effectRef idx="0">
+            <a:schemeClr val="accent1"/>
+          </a:effectRef>
+          <a:fontRef idx="minor">
+            <a:schemeClr val="lt1"/>
+          </a:fontRef>
+        </p:style>
+        <p:txBody>
+          <a:bodyPr rtlCol="0" anchor="ctr"/>
+          <a:lstStyle/>
+          <a:p>
+            <a:pPr algn="ctr"/>
+            <a:endParaRPr lang="en-US" dirty="0"/>
+          </a:p>
+        </p:txBody>
+      </p:sp>
       <p:sp>
         <p:nvSpPr>
           <p:cNvPr id="2" name="Title 1">
@@ -4072,13 +4706,25 @@
             <p:ph type="ctrTitle"/>
           </p:nvPr>
         </p:nvSpPr>
-        <p:spPr/>
-        <p:txBody>
-          <a:bodyPr/>
-          <a:lstStyle/>
-          <a:p>
-            <a:r>
-              <a:rPr lang="en-GB" dirty="0"/>
+        <p:spPr>
+          <a:xfrm>
+            <a:off x="4162567" y="818984"/>
+            <a:ext cx="6714699" cy="3178689"/>
+          </a:xfrm>
+        </p:spPr>
+        <p:txBody>
+          <a:bodyPr>
+            <a:normAutofit/>
+          </a:bodyPr>
+          <a:lstStyle/>
+          <a:p>
+            <a:pPr algn="l"/>
+            <a:r>
+              <a:rPr lang="en-GB" sz="4800">
+                <a:solidFill>
+                  <a:srgbClr val="FFFFFF"/>
+                </a:solidFill>
+              </a:rPr>
               <a:t>Acoustic Signatures of Quadcopter Propellers</a:t>
             </a:r>
           </a:p>
@@ -4086,6 +4732,82 @@
       </p:sp>
       <p:sp>
         <p:nvSpPr>
+          <p:cNvPr id="22" name="Rectangle 21">
+            <a:extLst>
+              <a:ext uri="{FF2B5EF4-FFF2-40B4-BE49-F238E27FC236}">
+                <a16:creationId xmlns:a16="http://schemas.microsoft.com/office/drawing/2014/main" id="{8C516CC8-80AC-446C-A56E-9F54B7210402}"/>
+              </a:ext>
+              <a:ext uri="{C183D7F6-B498-43B3-948B-1728B52AA6E4}">
+                <adec:decorative xmlns:adec="http://schemas.microsoft.com/office/drawing/2017/decorative" val="1"/>
+              </a:ext>
+            </a:extLst>
+          </p:cNvPr>
+          <p:cNvSpPr>
+            <a:spLocks noGrp="1" noRot="1" noChangeAspect="1" noMove="1" noResize="1" noEditPoints="1" noAdjustHandles="1" noChangeArrowheads="1" noChangeShapeType="1" noTextEdit="1"/>
+          </p:cNvSpPr>
+          <p:nvPr>
+            <p:extLst>
+              <p:ext uri="{386F3935-93C4-4BCD-93E2-E3B085C9AB24}">
+                <p16:designElem xmlns:p16="http://schemas.microsoft.com/office/powerpoint/2015/main" val="1"/>
+              </p:ext>
+            </p:extLst>
+          </p:nvPr>
+        </p:nvSpPr>
+        <p:spPr>
+          <a:xfrm flipH="1">
+            <a:off x="-3" y="4490110"/>
+            <a:ext cx="12217710" cy="2377962"/>
+          </a:xfrm>
+          <a:prstGeom prst="rect">
+            <a:avLst/>
+          </a:prstGeom>
+          <a:gradFill>
+            <a:gsLst>
+              <a:gs pos="0">
+                <a:schemeClr val="accent1">
+                  <a:lumMod val="75000"/>
+                  <a:alpha val="50000"/>
+                </a:schemeClr>
+              </a:gs>
+              <a:gs pos="99000">
+                <a:srgbClr val="000000">
+                  <a:alpha val="34000"/>
+                </a:srgbClr>
+              </a:gs>
+            </a:gsLst>
+            <a:lin ang="13200000" scaled="0"/>
+          </a:gradFill>
+          <a:ln>
+            <a:noFill/>
+          </a:ln>
+        </p:spPr>
+        <p:style>
+          <a:lnRef idx="2">
+            <a:schemeClr val="accent1">
+              <a:shade val="50000"/>
+            </a:schemeClr>
+          </a:lnRef>
+          <a:fillRef idx="1">
+            <a:schemeClr val="accent1"/>
+          </a:fillRef>
+          <a:effectRef idx="0">
+            <a:schemeClr val="accent1"/>
+          </a:effectRef>
+          <a:fontRef idx="minor">
+            <a:schemeClr val="lt1"/>
+          </a:fontRef>
+        </p:style>
+        <p:txBody>
+          <a:bodyPr rtlCol="0" anchor="ctr"/>
+          <a:lstStyle/>
+          <a:p>
+            <a:pPr algn="ctr"/>
+            <a:endParaRPr lang="en-US"/>
+          </a:p>
+        </p:txBody>
+      </p:sp>
+      <p:sp>
+        <p:nvSpPr>
           <p:cNvPr id="3" name="Subtitle 2">
             <a:extLst>
               <a:ext uri="{FF2B5EF4-FFF2-40B4-BE49-F238E27FC236}">
@@ -4100,20 +4822,37 @@
             <p:ph type="subTitle" idx="1"/>
           </p:nvPr>
         </p:nvSpPr>
-        <p:spPr/>
-        <p:txBody>
-          <a:bodyPr/>
-          <a:lstStyle/>
-          <a:p>
-            <a:r>
-              <a:rPr lang="en-GB" dirty="0"/>
+        <p:spPr>
+          <a:xfrm>
+            <a:off x="4285397" y="4960961"/>
+            <a:ext cx="7055893" cy="1078054"/>
+          </a:xfrm>
+        </p:spPr>
+        <p:txBody>
+          <a:bodyPr>
+            <a:normAutofit/>
+          </a:bodyPr>
+          <a:lstStyle/>
+          <a:p>
+            <a:pPr algn="l"/>
+            <a:r>
+              <a:rPr lang="en-GB" dirty="0">
+                <a:solidFill>
+                  <a:srgbClr val="FFFFFF"/>
+                </a:solidFill>
+              </a:rPr>
               <a:t>Louis Pender</a:t>
             </a:r>
           </a:p>
           <a:p>
-            <a:r>
-              <a:rPr lang="en-GB" dirty="0"/>
-              <a:t>Lwp26</a:t>
+            <a:pPr algn="l"/>
+            <a:r>
+              <a:rPr lang="en-GB" dirty="0">
+                <a:solidFill>
+                  <a:srgbClr val="FFFFFF"/>
+                </a:solidFill>
+              </a:rPr>
+              <a:t>LWP26</a:t>
             </a:r>
           </a:p>
         </p:txBody>
@@ -4134,6 +4873,14 @@
 <file path=ppt/slides/slide2.xml><?xml version="1.0" encoding="utf-8"?>
 <p:sld xmlns:a="http://schemas.openxmlformats.org/drawingml/2006/main" xmlns:r="http://schemas.openxmlformats.org/officeDocument/2006/relationships" xmlns:p="http://schemas.openxmlformats.org/presentationml/2006/main">
   <p:cSld>
+    <p:bg>
+      <p:bgPr>
+        <a:solidFill>
+          <a:schemeClr val="bg1"/>
+        </a:solidFill>
+        <a:effectLst/>
+      </p:bgPr>
+    </p:bg>
     <p:spTree>
       <p:nvGrpSpPr>
         <p:cNvPr id="1" name=""/>
@@ -4148,69 +4895,455 @@
           <a:chExt cx="0" cy="0"/>
         </a:xfrm>
       </p:grpSpPr>
-      <p:sp>
-        <p:nvSpPr>
-          <p:cNvPr id="2" name="Title 1">
-            <a:extLst>
-              <a:ext uri="{FF2B5EF4-FFF2-40B4-BE49-F238E27FC236}">
-                <a16:creationId xmlns:a16="http://schemas.microsoft.com/office/drawing/2014/main" id="{4A8B66DD-BA91-54D3-4B60-73B1C0960095}"/>
-              </a:ext>
-            </a:extLst>
-          </p:cNvPr>
-          <p:cNvSpPr>
-            <a:spLocks noGrp="1"/>
-          </p:cNvSpPr>
-          <p:nvPr>
-            <p:ph type="title"/>
-          </p:nvPr>
-        </p:nvSpPr>
-        <p:spPr/>
-        <p:txBody>
-          <a:bodyPr/>
-          <a:lstStyle/>
-          <a:p>
-            <a:r>
-              <a:rPr lang="en-GB" dirty="0"/>
-              <a:t>Context and application</a:t>
-            </a:r>
-          </a:p>
-        </p:txBody>
-      </p:sp>
-      <p:sp>
-        <p:nvSpPr>
-          <p:cNvPr id="3" name="Content Placeholder 2">
-            <a:extLst>
-              <a:ext uri="{FF2B5EF4-FFF2-40B4-BE49-F238E27FC236}">
-                <a16:creationId xmlns:a16="http://schemas.microsoft.com/office/drawing/2014/main" id="{E6F4A76D-A7FD-8847-FF28-6A5BE4C3D10B}"/>
-              </a:ext>
-            </a:extLst>
-          </p:cNvPr>
-          <p:cNvSpPr>
-            <a:spLocks noGrp="1"/>
-          </p:cNvSpPr>
-          <p:nvPr>
-            <p:ph idx="1"/>
+      <p:sp useBgFill="1">
+        <p:nvSpPr>
+          <p:cNvPr id="8" name="Rectangle 7">
+            <a:extLst>
+              <a:ext uri="{FF2B5EF4-FFF2-40B4-BE49-F238E27FC236}">
+                <a16:creationId xmlns:a16="http://schemas.microsoft.com/office/drawing/2014/main" id="{1B15ED52-F352-441B-82BF-E0EA34836D08}"/>
+              </a:ext>
+              <a:ext uri="{C183D7F6-B498-43B3-948B-1728B52AA6E4}">
+                <adec:decorative xmlns:adec="http://schemas.microsoft.com/office/drawing/2017/decorative" val="1"/>
+              </a:ext>
+            </a:extLst>
+          </p:cNvPr>
+          <p:cNvSpPr>
+            <a:spLocks noGrp="1" noRot="1" noChangeAspect="1" noMove="1" noResize="1" noEditPoints="1" noAdjustHandles="1" noChangeArrowheads="1" noChangeShapeType="1" noTextEdit="1"/>
+          </p:cNvSpPr>
+          <p:nvPr>
+            <p:extLst>
+              <p:ext uri="{386F3935-93C4-4BCD-93E2-E3B085C9AB24}">
+                <p16:designElem xmlns:p16="http://schemas.microsoft.com/office/powerpoint/2015/main" val="1"/>
+              </p:ext>
+            </p:extLst>
           </p:nvPr>
         </p:nvSpPr>
         <p:spPr>
           <a:xfrm>
-            <a:off x="838200" y="1516136"/>
-            <a:ext cx="10515600" cy="4351338"/>
+            <a:off x="0" y="0"/>
+            <a:ext cx="12192000" cy="6858000"/>
+          </a:xfrm>
+          <a:prstGeom prst="rect">
+            <a:avLst/>
+          </a:prstGeom>
+          <a:ln w="12700" cap="flat" cmpd="sng" algn="ctr">
+            <a:noFill/>
+            <a:prstDash val="solid"/>
+            <a:miter lim="800000"/>
+          </a:ln>
+          <a:effectLst/>
+          <a:extLst>
+            <a:ext uri="{91240B29-F687-4F45-9708-019B960494DF}">
+              <a14:hiddenLine xmlns:a14="http://schemas.microsoft.com/office/drawing/2010/main" w="12700" cap="flat" cmpd="sng" algn="ctr">
+                <a:solidFill>
+                  <a:schemeClr val="accent1">
+                    <a:shade val="50000"/>
+                  </a:schemeClr>
+                </a:solidFill>
+                <a:prstDash val="solid"/>
+                <a:miter lim="800000"/>
+              </a14:hiddenLine>
+            </a:ext>
+          </a:extLst>
+        </p:spPr>
+        <p:style>
+          <a:lnRef idx="2">
+            <a:schemeClr val="accent1">
+              <a:shade val="50000"/>
+            </a:schemeClr>
+          </a:lnRef>
+          <a:fillRef idx="1">
+            <a:schemeClr val="accent1"/>
+          </a:fillRef>
+          <a:effectRef idx="0">
+            <a:schemeClr val="accent1"/>
+          </a:effectRef>
+          <a:fontRef idx="minor">
+            <a:schemeClr val="lt1"/>
+          </a:fontRef>
+        </p:style>
+        <p:txBody>
+          <a:bodyPr rtlCol="0" anchor="ctr"/>
+          <a:lstStyle/>
+          <a:p>
+            <a:pPr algn="ctr"/>
+            <a:endParaRPr lang="en-US"/>
+          </a:p>
+        </p:txBody>
+      </p:sp>
+      <p:sp>
+        <p:nvSpPr>
+          <p:cNvPr id="10" name="Rectangle 9">
+            <a:extLst>
+              <a:ext uri="{FF2B5EF4-FFF2-40B4-BE49-F238E27FC236}">
+                <a16:creationId xmlns:a16="http://schemas.microsoft.com/office/drawing/2014/main" id="{3B2E3793-BFE6-45A2-9B7B-E18844431C99}"/>
+              </a:ext>
+              <a:ext uri="{C183D7F6-B498-43B3-948B-1728B52AA6E4}">
+                <adec:decorative xmlns:adec="http://schemas.microsoft.com/office/drawing/2017/decorative" val="1"/>
+              </a:ext>
+            </a:extLst>
+          </p:cNvPr>
+          <p:cNvSpPr>
+            <a:spLocks noGrp="1" noRot="1" noChangeAspect="1" noMove="1" noResize="1" noEditPoints="1" noAdjustHandles="1" noChangeArrowheads="1" noChangeShapeType="1" noTextEdit="1"/>
+          </p:cNvSpPr>
+          <p:nvPr>
+            <p:extLst>
+              <p:ext uri="{386F3935-93C4-4BCD-93E2-E3B085C9AB24}">
+                <p16:designElem xmlns:p16="http://schemas.microsoft.com/office/powerpoint/2015/main" val="1"/>
+              </p:ext>
+            </p:extLst>
+          </p:nvPr>
+        </p:nvSpPr>
+        <p:spPr>
+          <a:xfrm flipH="1">
+            <a:off x="-1" y="-1"/>
+            <a:ext cx="12191998" cy="1590742"/>
+          </a:xfrm>
+          <a:prstGeom prst="rect">
+            <a:avLst/>
+          </a:prstGeom>
+          <a:gradFill>
+            <a:gsLst>
+              <a:gs pos="0">
+                <a:srgbClr val="000000"/>
+              </a:gs>
+              <a:gs pos="100000">
+                <a:schemeClr val="accent1">
+                  <a:lumMod val="75000"/>
+                </a:schemeClr>
+              </a:gs>
+            </a:gsLst>
+            <a:lin ang="8400000" scaled="0"/>
+          </a:gradFill>
+          <a:ln>
+            <a:noFill/>
+          </a:ln>
+        </p:spPr>
+        <p:style>
+          <a:lnRef idx="2">
+            <a:schemeClr val="accent1">
+              <a:shade val="50000"/>
+            </a:schemeClr>
+          </a:lnRef>
+          <a:fillRef idx="1">
+            <a:schemeClr val="accent1"/>
+          </a:fillRef>
+          <a:effectRef idx="0">
+            <a:schemeClr val="accent1"/>
+          </a:effectRef>
+          <a:fontRef idx="minor">
+            <a:schemeClr val="lt1"/>
+          </a:fontRef>
+        </p:style>
+        <p:txBody>
+          <a:bodyPr rtlCol="0" anchor="ctr"/>
+          <a:lstStyle/>
+          <a:p>
+            <a:pPr algn="ctr"/>
+            <a:endParaRPr lang="en-US"/>
+          </a:p>
+        </p:txBody>
+      </p:sp>
+      <p:sp>
+        <p:nvSpPr>
+          <p:cNvPr id="12" name="Rectangle 11">
+            <a:extLst>
+              <a:ext uri="{FF2B5EF4-FFF2-40B4-BE49-F238E27FC236}">
+                <a16:creationId xmlns:a16="http://schemas.microsoft.com/office/drawing/2014/main" id="{BC4C4868-CB8F-4AF9-9CDB-8108F2C19B67}"/>
+              </a:ext>
+              <a:ext uri="{C183D7F6-B498-43B3-948B-1728B52AA6E4}">
+                <adec:decorative xmlns:adec="http://schemas.microsoft.com/office/drawing/2017/decorative" val="1"/>
+              </a:ext>
+            </a:extLst>
+          </p:cNvPr>
+          <p:cNvSpPr>
+            <a:spLocks noGrp="1" noRot="1" noChangeAspect="1" noMove="1" noResize="1" noEditPoints="1" noAdjustHandles="1" noChangeArrowheads="1" noChangeShapeType="1" noTextEdit="1"/>
+          </p:cNvSpPr>
+          <p:nvPr>
+            <p:extLst>
+              <p:ext uri="{386F3935-93C4-4BCD-93E2-E3B085C9AB24}">
+                <p16:designElem xmlns:p16="http://schemas.microsoft.com/office/powerpoint/2015/main" val="1"/>
+              </p:ext>
+            </p:extLst>
+          </p:nvPr>
+        </p:nvSpPr>
+        <p:spPr>
+          <a:xfrm rot="10800000" flipH="1">
+            <a:off x="-3" y="0"/>
+            <a:ext cx="8115306" cy="1590742"/>
+          </a:xfrm>
+          <a:prstGeom prst="rect">
+            <a:avLst/>
+          </a:prstGeom>
+          <a:gradFill>
+            <a:gsLst>
+              <a:gs pos="20000">
+                <a:schemeClr val="accent1">
+                  <a:alpha val="0"/>
+                </a:schemeClr>
+              </a:gs>
+              <a:gs pos="100000">
+                <a:schemeClr val="accent1">
+                  <a:lumMod val="50000"/>
+                  <a:alpha val="55000"/>
+                </a:schemeClr>
+              </a:gs>
+            </a:gsLst>
+            <a:lin ang="13800000" scaled="0"/>
+          </a:gradFill>
+          <a:ln>
+            <a:noFill/>
+          </a:ln>
+        </p:spPr>
+        <p:style>
+          <a:lnRef idx="2">
+            <a:schemeClr val="accent1">
+              <a:shade val="50000"/>
+            </a:schemeClr>
+          </a:lnRef>
+          <a:fillRef idx="1">
+            <a:schemeClr val="accent1"/>
+          </a:fillRef>
+          <a:effectRef idx="0">
+            <a:schemeClr val="accent1"/>
+          </a:effectRef>
+          <a:fontRef idx="minor">
+            <a:schemeClr val="lt1"/>
+          </a:fontRef>
+        </p:style>
+        <p:txBody>
+          <a:bodyPr rtlCol="0" anchor="ctr"/>
+          <a:lstStyle/>
+          <a:p>
+            <a:pPr algn="ctr"/>
+            <a:endParaRPr lang="en-US"/>
+          </a:p>
+        </p:txBody>
+      </p:sp>
+      <p:sp>
+        <p:nvSpPr>
+          <p:cNvPr id="14" name="Rectangle 13">
+            <a:extLst>
+              <a:ext uri="{FF2B5EF4-FFF2-40B4-BE49-F238E27FC236}">
+                <a16:creationId xmlns:a16="http://schemas.microsoft.com/office/drawing/2014/main" id="{375E0459-6403-40CD-989D-56A4407CA12E}"/>
+              </a:ext>
+              <a:ext uri="{C183D7F6-B498-43B3-948B-1728B52AA6E4}">
+                <adec:decorative xmlns:adec="http://schemas.microsoft.com/office/drawing/2017/decorative" val="1"/>
+              </a:ext>
+            </a:extLst>
+          </p:cNvPr>
+          <p:cNvSpPr>
+            <a:spLocks noGrp="1" noRot="1" noChangeAspect="1" noMove="1" noResize="1" noEditPoints="1" noAdjustHandles="1" noChangeArrowheads="1" noChangeShapeType="1" noTextEdit="1"/>
+          </p:cNvSpPr>
+          <p:nvPr>
+            <p:extLst>
+              <p:ext uri="{386F3935-93C4-4BCD-93E2-E3B085C9AB24}">
+                <p16:designElem xmlns:p16="http://schemas.microsoft.com/office/powerpoint/2015/main" val="1"/>
+              </p:ext>
+            </p:extLst>
+          </p:nvPr>
+        </p:nvSpPr>
+        <p:spPr>
+          <a:xfrm flipH="1">
+            <a:off x="8115299" y="-1"/>
+            <a:ext cx="4076698" cy="1590742"/>
+          </a:xfrm>
+          <a:prstGeom prst="rect">
+            <a:avLst/>
+          </a:prstGeom>
+          <a:gradFill>
+            <a:gsLst>
+              <a:gs pos="0">
+                <a:schemeClr val="accent1">
+                  <a:alpha val="66000"/>
+                </a:schemeClr>
+              </a:gs>
+              <a:gs pos="100000">
+                <a:srgbClr val="000000">
+                  <a:alpha val="30000"/>
+                </a:srgbClr>
+              </a:gs>
+            </a:gsLst>
+            <a:lin ang="13200000" scaled="0"/>
+          </a:gradFill>
+          <a:ln>
+            <a:noFill/>
+          </a:ln>
+        </p:spPr>
+        <p:style>
+          <a:lnRef idx="2">
+            <a:schemeClr val="accent1">
+              <a:shade val="50000"/>
+            </a:schemeClr>
+          </a:lnRef>
+          <a:fillRef idx="1">
+            <a:schemeClr val="accent1"/>
+          </a:fillRef>
+          <a:effectRef idx="0">
+            <a:schemeClr val="accent1"/>
+          </a:effectRef>
+          <a:fontRef idx="minor">
+            <a:schemeClr val="lt1"/>
+          </a:fontRef>
+        </p:style>
+        <p:txBody>
+          <a:bodyPr rtlCol="0" anchor="ctr"/>
+          <a:lstStyle/>
+          <a:p>
+            <a:pPr algn="ctr"/>
+            <a:endParaRPr lang="en-US"/>
+          </a:p>
+        </p:txBody>
+      </p:sp>
+      <p:sp>
+        <p:nvSpPr>
+          <p:cNvPr id="16" name="Rectangle 15">
+            <a:extLst>
+              <a:ext uri="{FF2B5EF4-FFF2-40B4-BE49-F238E27FC236}">
+                <a16:creationId xmlns:a16="http://schemas.microsoft.com/office/drawing/2014/main" id="{53E5B1A8-3AC9-4BD1-9BBC-78CA94F2D1BA}"/>
+              </a:ext>
+              <a:ext uri="{C183D7F6-B498-43B3-948B-1728B52AA6E4}">
+                <adec:decorative xmlns:adec="http://schemas.microsoft.com/office/drawing/2017/decorative" val="1"/>
+              </a:ext>
+            </a:extLst>
+          </p:cNvPr>
+          <p:cNvSpPr>
+            <a:spLocks noGrp="1" noRot="1" noChangeAspect="1" noMove="1" noResize="1" noEditPoints="1" noAdjustHandles="1" noChangeArrowheads="1" noChangeShapeType="1" noTextEdit="1"/>
+          </p:cNvSpPr>
+          <p:nvPr>
+            <p:extLst>
+              <p:ext uri="{386F3935-93C4-4BCD-93E2-E3B085C9AB24}">
+                <p16:designElem xmlns:p16="http://schemas.microsoft.com/office/powerpoint/2015/main" val="1"/>
+              </p:ext>
+            </p:extLst>
+          </p:nvPr>
+        </p:nvSpPr>
+        <p:spPr>
+          <a:xfrm>
+            <a:off x="459350" y="-1"/>
+            <a:ext cx="11732646" cy="1597433"/>
+          </a:xfrm>
+          <a:prstGeom prst="rect">
+            <a:avLst/>
+          </a:prstGeom>
+          <a:gradFill>
+            <a:gsLst>
+              <a:gs pos="50000">
+                <a:srgbClr val="000000">
+                  <a:alpha val="0"/>
+                </a:srgbClr>
+              </a:gs>
+              <a:gs pos="99000">
+                <a:schemeClr val="accent1">
+                  <a:lumMod val="50000"/>
+                  <a:alpha val="52000"/>
+                </a:schemeClr>
+              </a:gs>
+            </a:gsLst>
+            <a:lin ang="16800000" scaled="0"/>
+          </a:gradFill>
+          <a:ln>
+            <a:noFill/>
+          </a:ln>
+        </p:spPr>
+        <p:style>
+          <a:lnRef idx="2">
+            <a:schemeClr val="accent1">
+              <a:shade val="50000"/>
+            </a:schemeClr>
+          </a:lnRef>
+          <a:fillRef idx="1">
+            <a:schemeClr val="accent1"/>
+          </a:fillRef>
+          <a:effectRef idx="0">
+            <a:schemeClr val="accent1"/>
+          </a:effectRef>
+          <a:fontRef idx="minor">
+            <a:schemeClr val="lt1"/>
+          </a:fontRef>
+        </p:style>
+        <p:txBody>
+          <a:bodyPr rtlCol="0" anchor="ctr"/>
+          <a:lstStyle/>
+          <a:p>
+            <a:pPr algn="ctr"/>
+            <a:endParaRPr lang="en-US"/>
+          </a:p>
+        </p:txBody>
+      </p:sp>
+      <p:sp>
+        <p:nvSpPr>
+          <p:cNvPr id="2" name="Title 1">
+            <a:extLst>
+              <a:ext uri="{FF2B5EF4-FFF2-40B4-BE49-F238E27FC236}">
+                <a16:creationId xmlns:a16="http://schemas.microsoft.com/office/drawing/2014/main" id="{4A8B66DD-BA91-54D3-4B60-73B1C0960095}"/>
+              </a:ext>
+            </a:extLst>
+          </p:cNvPr>
+          <p:cNvSpPr>
+            <a:spLocks noGrp="1"/>
+          </p:cNvSpPr>
+          <p:nvPr>
+            <p:ph type="title"/>
+          </p:nvPr>
+        </p:nvSpPr>
+        <p:spPr>
+          <a:xfrm>
+            <a:off x="1371599" y="294538"/>
+            <a:ext cx="9895951" cy="1033669"/>
           </a:xfrm>
         </p:spPr>
         <p:txBody>
-          <a:bodyPr/>
-          <a:lstStyle/>
-          <a:p>
-            <a:endParaRPr lang="en-GB" dirty="0"/>
-          </a:p>
+          <a:bodyPr>
+            <a:normAutofit/>
+          </a:bodyPr>
+          <a:lstStyle/>
+          <a:p>
+            <a:r>
+              <a:rPr lang="en-GB" sz="4000">
+                <a:solidFill>
+                  <a:srgbClr val="FFFFFF"/>
+                </a:solidFill>
+              </a:rPr>
+              <a:t>Context and application</a:t>
+            </a:r>
+          </a:p>
+        </p:txBody>
+      </p:sp>
+      <p:sp>
+        <p:nvSpPr>
+          <p:cNvPr id="3" name="Content Placeholder 2">
+            <a:extLst>
+              <a:ext uri="{FF2B5EF4-FFF2-40B4-BE49-F238E27FC236}">
+                <a16:creationId xmlns:a16="http://schemas.microsoft.com/office/drawing/2014/main" id="{E6F4A76D-A7FD-8847-FF28-6A5BE4C3D10B}"/>
+              </a:ext>
+            </a:extLst>
+          </p:cNvPr>
+          <p:cNvSpPr>
+            <a:spLocks noGrp="1"/>
+          </p:cNvSpPr>
+          <p:nvPr>
+            <p:ph idx="1"/>
+          </p:nvPr>
+        </p:nvSpPr>
+        <p:spPr>
+          <a:xfrm>
+            <a:off x="459350" y="1768200"/>
+            <a:ext cx="11484411" cy="4795261"/>
+          </a:xfrm>
+        </p:spPr>
+        <p:txBody>
+          <a:bodyPr anchor="ctr">
+            <a:normAutofit/>
+          </a:bodyPr>
+          <a:lstStyle/>
           <a:p>
             <a:pPr marL="0" indent="0">
               <a:buNone/>
             </a:pPr>
             <a:r>
               <a:rPr lang="en-GB" dirty="0"/>
-              <a:t>Public perception of drones is poor due to the annoying sound that they make.</a:t>
+              <a:t>The widespread adoption of drone-based services is limited by their negative public perception, which is in part due to the irritating noise they make.</a:t>
             </a:r>
           </a:p>
           <a:p>
@@ -4225,23 +5358,23 @@
             </a:pPr>
             <a:r>
               <a:rPr lang="en-GB" dirty="0"/>
-              <a:t>This, and other legislative barriers, prevent the adoption of drone-based services in urban environments.</a:t>
-            </a:r>
-          </a:p>
-          <a:p>
-            <a:endParaRPr lang="en-GB" dirty="0"/>
+              <a:t>Propellers are the primary source of noise but also </a:t>
+            </a:r>
           </a:p>
           <a:p>
             <a:pPr marL="0" indent="0">
               <a:buNone/>
             </a:pPr>
+            <a:endParaRPr lang="en-GB" dirty="0"/>
+          </a:p>
+          <a:p>
+            <a:pPr marL="0" indent="0">
+              <a:buNone/>
+            </a:pPr>
             <a:r>
               <a:rPr lang="en-GB" dirty="0"/>
               <a:t>Recent research has focused on optimising aerodynamic and aeroacoustics performance to overcome these barriers.</a:t>
             </a:r>
-          </a:p>
-          <a:p>
-            <a:endParaRPr lang="en-GB" dirty="0"/>
           </a:p>
         </p:txBody>
       </p:sp>
@@ -4261,9 +5394,23 @@
 <file path=ppt/slides/slide3.xml><?xml version="1.0" encoding="utf-8"?>
 <p:sld xmlns:a="http://schemas.openxmlformats.org/drawingml/2006/main" xmlns:r="http://schemas.openxmlformats.org/officeDocument/2006/relationships" xmlns:p="http://schemas.openxmlformats.org/presentationml/2006/main">
   <p:cSld>
+    <p:bg>
+      <p:bgPr>
+        <a:solidFill>
+          <a:schemeClr val="bg1"/>
+        </a:solidFill>
+        <a:effectLst/>
+      </p:bgPr>
+    </p:bg>
     <p:spTree>
       <p:nvGrpSpPr>
-        <p:cNvPr id="1" name=""/>
+        <p:cNvPr id="1" name="">
+          <a:extLst>
+            <a:ext uri="{FF2B5EF4-FFF2-40B4-BE49-F238E27FC236}">
+              <a16:creationId xmlns:a16="http://schemas.microsoft.com/office/drawing/2014/main" id="{05B5025B-3D80-0CC4-2006-923A1BC2AE9D}"/>
+            </a:ext>
+          </a:extLst>
+        </p:cNvPr>
         <p:cNvGrpSpPr/>
         <p:nvPr/>
       </p:nvGrpSpPr>
@@ -4275,288 +5422,61 @@
           <a:chExt cx="0" cy="0"/>
         </a:xfrm>
       </p:grpSpPr>
-      <p:sp>
-        <p:nvSpPr>
-          <p:cNvPr id="2" name="Title 1">
-            <a:extLst>
-              <a:ext uri="{FF2B5EF4-FFF2-40B4-BE49-F238E27FC236}">
-                <a16:creationId xmlns:a16="http://schemas.microsoft.com/office/drawing/2014/main" id="{4C6D6236-4AA6-6861-46AD-140A40AA449A}"/>
-              </a:ext>
-            </a:extLst>
-          </p:cNvPr>
-          <p:cNvSpPr>
-            <a:spLocks noGrp="1"/>
-          </p:cNvSpPr>
-          <p:nvPr>
-            <p:ph type="title"/>
+      <p:sp useBgFill="1">
+        <p:nvSpPr>
+          <p:cNvPr id="8" name="Rectangle 7">
+            <a:extLst>
+              <a:ext uri="{FF2B5EF4-FFF2-40B4-BE49-F238E27FC236}">
+                <a16:creationId xmlns:a16="http://schemas.microsoft.com/office/drawing/2014/main" id="{33D4F78A-F37B-B1DE-69AB-C270AC8F17AB}"/>
+              </a:ext>
+              <a:ext uri="{C183D7F6-B498-43B3-948B-1728B52AA6E4}">
+                <adec:decorative xmlns:adec="http://schemas.microsoft.com/office/drawing/2017/decorative" val="1"/>
+              </a:ext>
+            </a:extLst>
+          </p:cNvPr>
+          <p:cNvSpPr>
+            <a:spLocks noGrp="1" noRot="1" noChangeAspect="1" noMove="1" noResize="1" noEditPoints="1" noAdjustHandles="1" noChangeArrowheads="1" noChangeShapeType="1" noTextEdit="1"/>
+          </p:cNvSpPr>
+          <p:nvPr>
+            <p:extLst>
+              <p:ext uri="{386F3935-93C4-4BCD-93E2-E3B085C9AB24}">
+                <p16:designElem xmlns:p16="http://schemas.microsoft.com/office/powerpoint/2015/main" val="1"/>
+              </p:ext>
+            </p:extLst>
           </p:nvPr>
         </p:nvSpPr>
         <p:spPr>
           <a:xfrm>
-            <a:off x="838200" y="0"/>
-            <a:ext cx="10515600" cy="1325563"/>
-          </a:xfrm>
-        </p:spPr>
-        <p:txBody>
-          <a:bodyPr/>
-          <a:lstStyle/>
-          <a:p>
-            <a:r>
-              <a:rPr lang="en-GB" dirty="0"/>
-              <a:t>Objectives</a:t>
-            </a:r>
-          </a:p>
-        </p:txBody>
-      </p:sp>
-      <p:sp>
-        <p:nvSpPr>
-          <p:cNvPr id="3" name="Content Placeholder 2">
-            <a:extLst>
-              <a:ext uri="{FF2B5EF4-FFF2-40B4-BE49-F238E27FC236}">
-                <a16:creationId xmlns:a16="http://schemas.microsoft.com/office/drawing/2014/main" id="{70DE358F-D7FF-016F-569C-6BD94603C062}"/>
-              </a:ext>
-            </a:extLst>
-          </p:cNvPr>
-          <p:cNvSpPr>
-            <a:spLocks noGrp="1"/>
-          </p:cNvSpPr>
-          <p:nvPr>
-            <p:ph idx="1"/>
-          </p:nvPr>
-        </p:nvSpPr>
-        <p:spPr>
-          <a:xfrm>
-            <a:off x="838200" y="1418394"/>
-            <a:ext cx="10515600" cy="5208491"/>
-          </a:xfrm>
-        </p:spPr>
-        <p:txBody>
-          <a:bodyPr>
-            <a:normAutofit/>
-          </a:bodyPr>
-          <a:lstStyle/>
-          <a:p>
-            <a:r>
-              <a:rPr lang="en-GB" dirty="0"/>
-              <a:t>Design and build an experimental setup to measure</a:t>
-            </a:r>
-            <a:r>
-              <a:rPr lang="en-GB" b="1" dirty="0"/>
-              <a:t> aerodynamic performance</a:t>
-            </a:r>
-            <a:r>
-              <a:rPr lang="en-GB" dirty="0"/>
-              <a:t> and </a:t>
-            </a:r>
-            <a:r>
-              <a:rPr lang="en-GB" b="1" dirty="0"/>
-              <a:t>acoustic signatures </a:t>
-            </a:r>
-            <a:r>
-              <a:rPr lang="en-GB" sz="2800" dirty="0"/>
-              <a:t>of various propeller designs</a:t>
-            </a:r>
-          </a:p>
-          <a:p>
-            <a:endParaRPr lang="en-GB" dirty="0"/>
-          </a:p>
-          <a:p>
-            <a:r>
-              <a:rPr lang="en-GB" dirty="0"/>
-              <a:t>Attribute </a:t>
-            </a:r>
-            <a:r>
-              <a:rPr lang="en-US" dirty="0"/>
-              <a:t>changes in the acoustic spectrum to flow phenomena caused by propeller geometry modifications</a:t>
-            </a:r>
-            <a:r>
-              <a:rPr lang="en-GB" dirty="0"/>
-              <a:t>.</a:t>
-            </a:r>
-          </a:p>
-          <a:p>
-            <a:endParaRPr lang="en-GB" dirty="0"/>
-          </a:p>
-          <a:p>
-            <a:r>
-              <a:rPr lang="en-GB" dirty="0"/>
-              <a:t>Analyse psychoacoustic performance </a:t>
-            </a:r>
-          </a:p>
-          <a:p>
-            <a:endParaRPr lang="en-GB" sz="3200" dirty="0"/>
-          </a:p>
-        </p:txBody>
-      </p:sp>
-    </p:spTree>
-    <p:extLst>
-      <p:ext uri="{BB962C8B-B14F-4D97-AF65-F5344CB8AC3E}">
-        <p14:creationId xmlns:p14="http://schemas.microsoft.com/office/powerpoint/2010/main" val="1513545599"/>
-      </p:ext>
-    </p:extLst>
-  </p:cSld>
-  <p:clrMapOvr>
-    <a:masterClrMapping/>
-  </p:clrMapOvr>
-</p:sld>
-</file>
-
-<file path=ppt/slides/slide4.xml><?xml version="1.0" encoding="utf-8"?>
-<p:sld xmlns:a="http://schemas.openxmlformats.org/drawingml/2006/main" xmlns:r="http://schemas.openxmlformats.org/officeDocument/2006/relationships" xmlns:p="http://schemas.openxmlformats.org/presentationml/2006/main">
-  <p:cSld>
-    <p:spTree>
-      <p:nvGrpSpPr>
-        <p:cNvPr id="1" name=""/>
-        <p:cNvGrpSpPr/>
-        <p:nvPr/>
-      </p:nvGrpSpPr>
-      <p:grpSpPr>
-        <a:xfrm>
-          <a:off x="0" y="0"/>
-          <a:ext cx="0" cy="0"/>
-          <a:chOff x="0" y="0"/>
-          <a:chExt cx="0" cy="0"/>
-        </a:xfrm>
-      </p:grpSpPr>
-      <p:sp>
-        <p:nvSpPr>
-          <p:cNvPr id="2" name="Title 1">
-            <a:extLst>
-              <a:ext uri="{FF2B5EF4-FFF2-40B4-BE49-F238E27FC236}">
-                <a16:creationId xmlns:a16="http://schemas.microsoft.com/office/drawing/2014/main" id="{AAB10573-6E57-F2A4-9CFE-D27D9B593DAB}"/>
-              </a:ext>
-            </a:extLst>
-          </p:cNvPr>
-          <p:cNvSpPr>
-            <a:spLocks noGrp="1"/>
-          </p:cNvSpPr>
-          <p:nvPr>
-            <p:ph type="title"/>
-          </p:nvPr>
-        </p:nvSpPr>
-        <p:spPr>
-          <a:xfrm>
-            <a:off x="499202" y="152898"/>
-            <a:ext cx="10515600" cy="1325563"/>
-          </a:xfrm>
-        </p:spPr>
-        <p:txBody>
-          <a:bodyPr/>
-          <a:lstStyle/>
-          <a:p>
-            <a:r>
-              <a:rPr lang="en-GB" dirty="0"/>
-              <a:t>Propeller geometry</a:t>
-            </a:r>
-          </a:p>
-        </p:txBody>
-      </p:sp>
-      <p:sp>
-        <p:nvSpPr>
-          <p:cNvPr id="3" name="Content Placeholder 2">
-            <a:extLst>
-              <a:ext uri="{FF2B5EF4-FFF2-40B4-BE49-F238E27FC236}">
-                <a16:creationId xmlns:a16="http://schemas.microsoft.com/office/drawing/2014/main" id="{4340587A-2D0D-DEEE-A7B1-BA0FCA7A3B58}"/>
-              </a:ext>
-            </a:extLst>
-          </p:cNvPr>
-          <p:cNvSpPr>
-            <a:spLocks noGrp="1"/>
-          </p:cNvSpPr>
-          <p:nvPr>
-            <p:ph idx="1"/>
-          </p:nvPr>
-        </p:nvSpPr>
-        <p:spPr>
-          <a:xfrm>
-            <a:off x="499202" y="1394845"/>
-            <a:ext cx="10515600" cy="4906993"/>
-          </a:xfrm>
-        </p:spPr>
-        <p:txBody>
-          <a:bodyPr>
-            <a:normAutofit/>
-          </a:bodyPr>
-          <a:lstStyle/>
-          <a:p>
-            <a:r>
-              <a:rPr lang="en-GB" sz="3200" dirty="0"/>
-              <a:t>Consideration for Toroidal designs</a:t>
-            </a:r>
-          </a:p>
-          <a:p>
-            <a:endParaRPr lang="en-GB" sz="3200" dirty="0"/>
-          </a:p>
-          <a:p>
-            <a:r>
-              <a:rPr lang="en-GB" sz="3200" dirty="0"/>
-              <a:t>Previous research has covered:</a:t>
-            </a:r>
-          </a:p>
-          <a:p>
-            <a:pPr lvl="1"/>
-            <a:r>
-              <a:rPr lang="en-GB" sz="2800" dirty="0"/>
-              <a:t>Tip geometry</a:t>
-            </a:r>
-          </a:p>
-          <a:p>
-            <a:pPr lvl="1"/>
-            <a:r>
-              <a:rPr lang="en-GB" sz="2800" dirty="0"/>
-              <a:t>Blade sweep</a:t>
-            </a:r>
-          </a:p>
-          <a:p>
-            <a:pPr lvl="1"/>
-            <a:r>
-              <a:rPr lang="en-GB" sz="2800" dirty="0"/>
-              <a:t>Blade spacing</a:t>
-            </a:r>
-          </a:p>
-          <a:p>
-            <a:pPr lvl="1"/>
-            <a:r>
-              <a:rPr lang="en-GB" sz="2800" dirty="0"/>
-              <a:t>Trailing edge serrations</a:t>
-            </a:r>
-          </a:p>
-          <a:p>
-            <a:endParaRPr lang="en-GB" dirty="0"/>
-          </a:p>
-          <a:p>
-            <a:r>
-              <a:rPr lang="en-GB" dirty="0"/>
-              <a:t>Varying blade span</a:t>
-            </a:r>
-          </a:p>
-        </p:txBody>
-      </p:sp>
-      <p:sp>
-        <p:nvSpPr>
-          <p:cNvPr id="5" name="Rectangle 4">
-            <a:extLst>
-              <a:ext uri="{FF2B5EF4-FFF2-40B4-BE49-F238E27FC236}">
-                <a16:creationId xmlns:a16="http://schemas.microsoft.com/office/drawing/2014/main" id="{590A1BD3-F005-347F-02C8-AFF37807D7C4}"/>
-              </a:ext>
-            </a:extLst>
-          </p:cNvPr>
-          <p:cNvSpPr/>
-          <p:nvPr/>
-        </p:nvSpPr>
-        <p:spPr>
-          <a:xfrm>
-            <a:off x="7128290" y="332960"/>
-            <a:ext cx="4942784" cy="5769665"/>
+            <a:off x="0" y="0"/>
+            <a:ext cx="12192000" cy="6858000"/>
           </a:xfrm>
           <a:prstGeom prst="rect">
             <a:avLst/>
           </a:prstGeom>
+          <a:ln w="12700" cap="flat" cmpd="sng" algn="ctr">
+            <a:noFill/>
+            <a:prstDash val="solid"/>
+            <a:miter lim="800000"/>
+          </a:ln>
+          <a:effectLst/>
+          <a:extLst>
+            <a:ext uri="{91240B29-F687-4F45-9708-019B960494DF}">
+              <a14:hiddenLine xmlns:a14="http://schemas.microsoft.com/office/drawing/2010/main" w="12700" cap="flat" cmpd="sng" algn="ctr">
+                <a:solidFill>
+                  <a:schemeClr val="accent1">
+                    <a:shade val="50000"/>
+                  </a:schemeClr>
+                </a:solidFill>
+                <a:prstDash val="solid"/>
+                <a:miter lim="800000"/>
+              </a14:hiddenLine>
+            </a:ext>
+          </a:extLst>
         </p:spPr>
         <p:style>
           <a:lnRef idx="2">
             <a:schemeClr val="accent1">
-              <a:shade val="15000"/>
+              <a:shade val="50000"/>
             </a:schemeClr>
           </a:lnRef>
           <a:fillRef idx="1">
@@ -4574,19 +5494,501 @@
           <a:lstStyle/>
           <a:p>
             <a:pPr algn="ctr"/>
-            <a:r>
-              <a:rPr lang="en-GB" dirty="0"/>
-              <a:t>TOROIDAL PROPELLERS</a:t>
-            </a:r>
-          </a:p>
-        </p:txBody>
-      </p:sp>
+            <a:endParaRPr lang="en-US"/>
+          </a:p>
+        </p:txBody>
+      </p:sp>
+      <p:sp>
+        <p:nvSpPr>
+          <p:cNvPr id="10" name="Rectangle 9">
+            <a:extLst>
+              <a:ext uri="{FF2B5EF4-FFF2-40B4-BE49-F238E27FC236}">
+                <a16:creationId xmlns:a16="http://schemas.microsoft.com/office/drawing/2014/main" id="{035745CF-9619-AF40-1167-3856C048C0B8}"/>
+              </a:ext>
+              <a:ext uri="{C183D7F6-B498-43B3-948B-1728B52AA6E4}">
+                <adec:decorative xmlns:adec="http://schemas.microsoft.com/office/drawing/2017/decorative" val="1"/>
+              </a:ext>
+            </a:extLst>
+          </p:cNvPr>
+          <p:cNvSpPr>
+            <a:spLocks noGrp="1" noRot="1" noChangeAspect="1" noMove="1" noResize="1" noEditPoints="1" noAdjustHandles="1" noChangeArrowheads="1" noChangeShapeType="1" noTextEdit="1"/>
+          </p:cNvSpPr>
+          <p:nvPr>
+            <p:extLst>
+              <p:ext uri="{386F3935-93C4-4BCD-93E2-E3B085C9AB24}">
+                <p16:designElem xmlns:p16="http://schemas.microsoft.com/office/powerpoint/2015/main" val="1"/>
+              </p:ext>
+            </p:extLst>
+          </p:nvPr>
+        </p:nvSpPr>
+        <p:spPr>
+          <a:xfrm flipH="1">
+            <a:off x="-1" y="-1"/>
+            <a:ext cx="12191998" cy="1590742"/>
+          </a:xfrm>
+          <a:prstGeom prst="rect">
+            <a:avLst/>
+          </a:prstGeom>
+          <a:gradFill>
+            <a:gsLst>
+              <a:gs pos="0">
+                <a:srgbClr val="000000"/>
+              </a:gs>
+              <a:gs pos="100000">
+                <a:schemeClr val="accent1">
+                  <a:lumMod val="75000"/>
+                </a:schemeClr>
+              </a:gs>
+            </a:gsLst>
+            <a:lin ang="8400000" scaled="0"/>
+          </a:gradFill>
+          <a:ln>
+            <a:noFill/>
+          </a:ln>
+        </p:spPr>
+        <p:style>
+          <a:lnRef idx="2">
+            <a:schemeClr val="accent1">
+              <a:shade val="50000"/>
+            </a:schemeClr>
+          </a:lnRef>
+          <a:fillRef idx="1">
+            <a:schemeClr val="accent1"/>
+          </a:fillRef>
+          <a:effectRef idx="0">
+            <a:schemeClr val="accent1"/>
+          </a:effectRef>
+          <a:fontRef idx="minor">
+            <a:schemeClr val="lt1"/>
+          </a:fontRef>
+        </p:style>
+        <p:txBody>
+          <a:bodyPr rtlCol="0" anchor="ctr"/>
+          <a:lstStyle/>
+          <a:p>
+            <a:pPr algn="ctr"/>
+            <a:endParaRPr lang="en-US"/>
+          </a:p>
+        </p:txBody>
+      </p:sp>
+      <p:sp>
+        <p:nvSpPr>
+          <p:cNvPr id="12" name="Rectangle 11">
+            <a:extLst>
+              <a:ext uri="{FF2B5EF4-FFF2-40B4-BE49-F238E27FC236}">
+                <a16:creationId xmlns:a16="http://schemas.microsoft.com/office/drawing/2014/main" id="{4CE8B599-FC68-4E63-838A-8742AE80E50C}"/>
+              </a:ext>
+              <a:ext uri="{C183D7F6-B498-43B3-948B-1728B52AA6E4}">
+                <adec:decorative xmlns:adec="http://schemas.microsoft.com/office/drawing/2017/decorative" val="1"/>
+              </a:ext>
+            </a:extLst>
+          </p:cNvPr>
+          <p:cNvSpPr>
+            <a:spLocks noGrp="1" noRot="1" noChangeAspect="1" noMove="1" noResize="1" noEditPoints="1" noAdjustHandles="1" noChangeArrowheads="1" noChangeShapeType="1" noTextEdit="1"/>
+          </p:cNvSpPr>
+          <p:nvPr>
+            <p:extLst>
+              <p:ext uri="{386F3935-93C4-4BCD-93E2-E3B085C9AB24}">
+                <p16:designElem xmlns:p16="http://schemas.microsoft.com/office/powerpoint/2015/main" val="1"/>
+              </p:ext>
+            </p:extLst>
+          </p:nvPr>
+        </p:nvSpPr>
+        <p:spPr>
+          <a:xfrm rot="10800000" flipH="1">
+            <a:off x="-3" y="0"/>
+            <a:ext cx="8115306" cy="1590742"/>
+          </a:xfrm>
+          <a:prstGeom prst="rect">
+            <a:avLst/>
+          </a:prstGeom>
+          <a:gradFill>
+            <a:gsLst>
+              <a:gs pos="20000">
+                <a:schemeClr val="accent1">
+                  <a:alpha val="0"/>
+                </a:schemeClr>
+              </a:gs>
+              <a:gs pos="100000">
+                <a:schemeClr val="accent1">
+                  <a:lumMod val="50000"/>
+                  <a:alpha val="55000"/>
+                </a:schemeClr>
+              </a:gs>
+            </a:gsLst>
+            <a:lin ang="13800000" scaled="0"/>
+          </a:gradFill>
+          <a:ln>
+            <a:noFill/>
+          </a:ln>
+        </p:spPr>
+        <p:style>
+          <a:lnRef idx="2">
+            <a:schemeClr val="accent1">
+              <a:shade val="50000"/>
+            </a:schemeClr>
+          </a:lnRef>
+          <a:fillRef idx="1">
+            <a:schemeClr val="accent1"/>
+          </a:fillRef>
+          <a:effectRef idx="0">
+            <a:schemeClr val="accent1"/>
+          </a:effectRef>
+          <a:fontRef idx="minor">
+            <a:schemeClr val="lt1"/>
+          </a:fontRef>
+        </p:style>
+        <p:txBody>
+          <a:bodyPr rtlCol="0" anchor="ctr"/>
+          <a:lstStyle/>
+          <a:p>
+            <a:pPr algn="ctr"/>
+            <a:endParaRPr lang="en-US"/>
+          </a:p>
+        </p:txBody>
+      </p:sp>
+      <p:sp>
+        <p:nvSpPr>
+          <p:cNvPr id="14" name="Rectangle 13">
+            <a:extLst>
+              <a:ext uri="{FF2B5EF4-FFF2-40B4-BE49-F238E27FC236}">
+                <a16:creationId xmlns:a16="http://schemas.microsoft.com/office/drawing/2014/main" id="{0CF0590A-59B4-6573-5680-74BEE528BF36}"/>
+              </a:ext>
+              <a:ext uri="{C183D7F6-B498-43B3-948B-1728B52AA6E4}">
+                <adec:decorative xmlns:adec="http://schemas.microsoft.com/office/drawing/2017/decorative" val="1"/>
+              </a:ext>
+            </a:extLst>
+          </p:cNvPr>
+          <p:cNvSpPr>
+            <a:spLocks noGrp="1" noRot="1" noChangeAspect="1" noMove="1" noResize="1" noEditPoints="1" noAdjustHandles="1" noChangeArrowheads="1" noChangeShapeType="1" noTextEdit="1"/>
+          </p:cNvSpPr>
+          <p:nvPr>
+            <p:extLst>
+              <p:ext uri="{386F3935-93C4-4BCD-93E2-E3B085C9AB24}">
+                <p16:designElem xmlns:p16="http://schemas.microsoft.com/office/powerpoint/2015/main" val="1"/>
+              </p:ext>
+            </p:extLst>
+          </p:nvPr>
+        </p:nvSpPr>
+        <p:spPr>
+          <a:xfrm flipH="1">
+            <a:off x="8115299" y="-1"/>
+            <a:ext cx="4076698" cy="1590742"/>
+          </a:xfrm>
+          <a:prstGeom prst="rect">
+            <a:avLst/>
+          </a:prstGeom>
+          <a:gradFill>
+            <a:gsLst>
+              <a:gs pos="0">
+                <a:schemeClr val="accent1">
+                  <a:alpha val="66000"/>
+                </a:schemeClr>
+              </a:gs>
+              <a:gs pos="100000">
+                <a:srgbClr val="000000">
+                  <a:alpha val="30000"/>
+                </a:srgbClr>
+              </a:gs>
+            </a:gsLst>
+            <a:lin ang="13200000" scaled="0"/>
+          </a:gradFill>
+          <a:ln>
+            <a:noFill/>
+          </a:ln>
+        </p:spPr>
+        <p:style>
+          <a:lnRef idx="2">
+            <a:schemeClr val="accent1">
+              <a:shade val="50000"/>
+            </a:schemeClr>
+          </a:lnRef>
+          <a:fillRef idx="1">
+            <a:schemeClr val="accent1"/>
+          </a:fillRef>
+          <a:effectRef idx="0">
+            <a:schemeClr val="accent1"/>
+          </a:effectRef>
+          <a:fontRef idx="minor">
+            <a:schemeClr val="lt1"/>
+          </a:fontRef>
+        </p:style>
+        <p:txBody>
+          <a:bodyPr rtlCol="0" anchor="ctr"/>
+          <a:lstStyle/>
+          <a:p>
+            <a:pPr algn="ctr"/>
+            <a:endParaRPr lang="en-US"/>
+          </a:p>
+        </p:txBody>
+      </p:sp>
+      <p:sp>
+        <p:nvSpPr>
+          <p:cNvPr id="16" name="Rectangle 15">
+            <a:extLst>
+              <a:ext uri="{FF2B5EF4-FFF2-40B4-BE49-F238E27FC236}">
+                <a16:creationId xmlns:a16="http://schemas.microsoft.com/office/drawing/2014/main" id="{DB2AD4C7-3E3E-AA35-1F16-8BCB0365387B}"/>
+              </a:ext>
+              <a:ext uri="{C183D7F6-B498-43B3-948B-1728B52AA6E4}">
+                <adec:decorative xmlns:adec="http://schemas.microsoft.com/office/drawing/2017/decorative" val="1"/>
+              </a:ext>
+            </a:extLst>
+          </p:cNvPr>
+          <p:cNvSpPr>
+            <a:spLocks noGrp="1" noRot="1" noChangeAspect="1" noMove="1" noResize="1" noEditPoints="1" noAdjustHandles="1" noChangeArrowheads="1" noChangeShapeType="1" noTextEdit="1"/>
+          </p:cNvSpPr>
+          <p:nvPr>
+            <p:extLst>
+              <p:ext uri="{386F3935-93C4-4BCD-93E2-E3B085C9AB24}">
+                <p16:designElem xmlns:p16="http://schemas.microsoft.com/office/powerpoint/2015/main" val="1"/>
+              </p:ext>
+            </p:extLst>
+          </p:nvPr>
+        </p:nvSpPr>
+        <p:spPr>
+          <a:xfrm>
+            <a:off x="459350" y="-1"/>
+            <a:ext cx="11732646" cy="1597433"/>
+          </a:xfrm>
+          <a:prstGeom prst="rect">
+            <a:avLst/>
+          </a:prstGeom>
+          <a:gradFill>
+            <a:gsLst>
+              <a:gs pos="50000">
+                <a:srgbClr val="000000">
+                  <a:alpha val="0"/>
+                </a:srgbClr>
+              </a:gs>
+              <a:gs pos="99000">
+                <a:schemeClr val="accent1">
+                  <a:lumMod val="50000"/>
+                  <a:alpha val="52000"/>
+                </a:schemeClr>
+              </a:gs>
+            </a:gsLst>
+            <a:lin ang="16800000" scaled="0"/>
+          </a:gradFill>
+          <a:ln>
+            <a:noFill/>
+          </a:ln>
+        </p:spPr>
+        <p:style>
+          <a:lnRef idx="2">
+            <a:schemeClr val="accent1">
+              <a:shade val="50000"/>
+            </a:schemeClr>
+          </a:lnRef>
+          <a:fillRef idx="1">
+            <a:schemeClr val="accent1"/>
+          </a:fillRef>
+          <a:effectRef idx="0">
+            <a:schemeClr val="accent1"/>
+          </a:effectRef>
+          <a:fontRef idx="minor">
+            <a:schemeClr val="lt1"/>
+          </a:fontRef>
+        </p:style>
+        <p:txBody>
+          <a:bodyPr rtlCol="0" anchor="ctr"/>
+          <a:lstStyle/>
+          <a:p>
+            <a:pPr algn="ctr"/>
+            <a:endParaRPr lang="en-US"/>
+          </a:p>
+        </p:txBody>
+      </p:sp>
+      <p:sp>
+        <p:nvSpPr>
+          <p:cNvPr id="2" name="Title 1">
+            <a:extLst>
+              <a:ext uri="{FF2B5EF4-FFF2-40B4-BE49-F238E27FC236}">
+                <a16:creationId xmlns:a16="http://schemas.microsoft.com/office/drawing/2014/main" id="{09DF2F80-4B94-3290-D89A-4F89C94F2D60}"/>
+              </a:ext>
+            </a:extLst>
+          </p:cNvPr>
+          <p:cNvSpPr>
+            <a:spLocks noGrp="1"/>
+          </p:cNvSpPr>
+          <p:nvPr>
+            <p:ph type="title"/>
+          </p:nvPr>
+        </p:nvSpPr>
+        <p:spPr>
+          <a:xfrm>
+            <a:off x="392205" y="285873"/>
+            <a:ext cx="9895951" cy="1033669"/>
+          </a:xfrm>
+        </p:spPr>
+        <p:txBody>
+          <a:bodyPr>
+            <a:normAutofit/>
+          </a:bodyPr>
+          <a:lstStyle/>
+          <a:p>
+            <a:r>
+              <a:rPr lang="en-GB" sz="4000" dirty="0">
+                <a:solidFill>
+                  <a:srgbClr val="FFFFFF"/>
+                </a:solidFill>
+              </a:rPr>
+              <a:t>Previous aero acoustic research</a:t>
+            </a:r>
+          </a:p>
+        </p:txBody>
+      </p:sp>
+      <p:sp>
+        <p:nvSpPr>
+          <p:cNvPr id="3" name="Content Placeholder 2">
+            <a:extLst>
+              <a:ext uri="{FF2B5EF4-FFF2-40B4-BE49-F238E27FC236}">
+                <a16:creationId xmlns:a16="http://schemas.microsoft.com/office/drawing/2014/main" id="{540CA7AA-5659-48B1-C827-BCB210B1C7E8}"/>
+              </a:ext>
+            </a:extLst>
+          </p:cNvPr>
+          <p:cNvSpPr>
+            <a:spLocks noGrp="1"/>
+          </p:cNvSpPr>
+          <p:nvPr>
+            <p:ph idx="1"/>
+          </p:nvPr>
+        </p:nvSpPr>
+        <p:spPr>
+          <a:xfrm>
+            <a:off x="227818" y="1682605"/>
+            <a:ext cx="9724031" cy="3001521"/>
+          </a:xfrm>
+        </p:spPr>
+        <p:txBody>
+          <a:bodyPr anchor="ctr">
+            <a:normAutofit/>
+          </a:bodyPr>
+          <a:lstStyle/>
+          <a:p>
+            <a:pPr lvl="1"/>
+            <a:r>
+              <a:rPr lang="en-GB" sz="2800" dirty="0"/>
+              <a:t>Tip geometry</a:t>
+            </a:r>
+          </a:p>
+          <a:p>
+            <a:pPr lvl="1"/>
+            <a:r>
+              <a:rPr lang="en-GB" sz="2800" dirty="0"/>
+              <a:t>Blade sweep</a:t>
+            </a:r>
+          </a:p>
+          <a:p>
+            <a:pPr lvl="1"/>
+            <a:r>
+              <a:rPr lang="en-GB" sz="2800" dirty="0"/>
+              <a:t>Varying blade spacing</a:t>
+            </a:r>
+          </a:p>
+          <a:p>
+            <a:pPr lvl="1"/>
+            <a:r>
+              <a:rPr lang="en-GB" sz="2800" dirty="0"/>
+              <a:t>Trailing edge serrations</a:t>
+            </a:r>
+            <a:endParaRPr lang="en-GB" dirty="0"/>
+          </a:p>
+          <a:p>
+            <a:endParaRPr lang="en-GB" sz="2000" dirty="0"/>
+          </a:p>
+        </p:txBody>
+      </p:sp>
+      <p:grpSp>
+        <p:nvGrpSpPr>
+          <p:cNvPr id="20" name="Group 19">
+            <a:extLst>
+              <a:ext uri="{FF2B5EF4-FFF2-40B4-BE49-F238E27FC236}">
+                <a16:creationId xmlns:a16="http://schemas.microsoft.com/office/drawing/2014/main" id="{A116BA01-436A-5812-342F-E42141AB22F6}"/>
+              </a:ext>
+            </a:extLst>
+          </p:cNvPr>
+          <p:cNvGrpSpPr/>
+          <p:nvPr/>
+        </p:nvGrpSpPr>
+        <p:grpSpPr>
+          <a:xfrm>
+            <a:off x="7287219" y="441171"/>
+            <a:ext cx="4445431" cy="1948368"/>
+            <a:chOff x="459350" y="4615094"/>
+            <a:chExt cx="4445431" cy="1948368"/>
+          </a:xfrm>
+        </p:grpSpPr>
+        <p:pic>
+          <p:nvPicPr>
+            <p:cNvPr id="9" name="Picture 8">
+              <a:extLst>
+                <a:ext uri="{FF2B5EF4-FFF2-40B4-BE49-F238E27FC236}">
+                  <a16:creationId xmlns:a16="http://schemas.microsoft.com/office/drawing/2014/main" id="{D6EB6A47-5DB1-4897-6746-A076ABF9FF25}"/>
+                </a:ext>
+              </a:extLst>
+            </p:cNvPr>
+            <p:cNvPicPr>
+              <a:picLocks noChangeAspect="1"/>
+            </p:cNvPicPr>
+            <p:nvPr/>
+          </p:nvPicPr>
+          <p:blipFill>
+            <a:blip r:embed="rId3"/>
+            <a:srcRect b="49009"/>
+            <a:stretch/>
+          </p:blipFill>
+          <p:spPr>
+            <a:xfrm>
+              <a:off x="459350" y="4615094"/>
+              <a:ext cx="4445431" cy="1948368"/>
+            </a:xfrm>
+            <a:prstGeom prst="rect">
+              <a:avLst/>
+            </a:prstGeom>
+          </p:spPr>
+        </p:pic>
+        <p:sp>
+          <p:nvSpPr>
+            <p:cNvPr id="19" name="TextBox 18">
+              <a:extLst>
+                <a:ext uri="{FF2B5EF4-FFF2-40B4-BE49-F238E27FC236}">
+                  <a16:creationId xmlns:a16="http://schemas.microsoft.com/office/drawing/2014/main" id="{3C09827F-FB05-2B25-3EE1-3339B337B035}"/>
+                </a:ext>
+              </a:extLst>
+            </p:cNvPr>
+            <p:cNvSpPr txBox="1"/>
+            <p:nvPr/>
+          </p:nvSpPr>
+          <p:spPr>
+            <a:xfrm>
+              <a:off x="528178" y="5419923"/>
+              <a:ext cx="3104757" cy="369332"/>
+            </a:xfrm>
+            <a:prstGeom prst="rect">
+              <a:avLst/>
+            </a:prstGeom>
+            <a:noFill/>
+          </p:spPr>
+          <p:txBody>
+            <a:bodyPr wrap="square">
+              <a:spAutoFit/>
+            </a:bodyPr>
+            <a:lstStyle/>
+            <a:p>
+              <a:r>
+                <a:rPr lang="en-GB" dirty="0"/>
+                <a:t>C. F. Wisniewski et al.</a:t>
+              </a:r>
+            </a:p>
+          </p:txBody>
+        </p:sp>
+      </p:grpSp>
       <p:pic>
         <p:nvPicPr>
-          <p:cNvPr id="4" name="Picture 3">
-            <a:extLst>
-              <a:ext uri="{FF2B5EF4-FFF2-40B4-BE49-F238E27FC236}">
-                <a16:creationId xmlns:a16="http://schemas.microsoft.com/office/drawing/2014/main" id="{8E28C63F-94ED-AE22-8F66-C521AF20E882}"/>
+          <p:cNvPr id="26" name="Picture 25">
+            <a:extLst>
+              <a:ext uri="{FF2B5EF4-FFF2-40B4-BE49-F238E27FC236}">
+                <a16:creationId xmlns:a16="http://schemas.microsoft.com/office/drawing/2014/main" id="{AFBB8285-6432-1BCC-8C52-B726981C3B40}"/>
               </a:ext>
             </a:extLst>
           </p:cNvPr>
@@ -4596,14 +5998,144 @@
           <p:nvPr/>
         </p:nvPicPr>
         <p:blipFill>
-          <a:blip r:embed="rId2"/>
+          <a:blip r:embed="rId4"/>
           <a:stretch>
             <a:fillRect/>
           </a:stretch>
         </p:blipFill>
         <p:spPr>
           <a:xfrm>
-            <a:off x="6607124" y="3655269"/>
+            <a:off x="6724323" y="2667429"/>
+            <a:ext cx="5026054" cy="4033394"/>
+          </a:xfrm>
+          <a:prstGeom prst="rect">
+            <a:avLst/>
+          </a:prstGeom>
+        </p:spPr>
+      </p:pic>
+      <p:pic>
+        <p:nvPicPr>
+          <p:cNvPr id="30" name="Picture 29">
+            <a:extLst>
+              <a:ext uri="{FF2B5EF4-FFF2-40B4-BE49-F238E27FC236}">
+                <a16:creationId xmlns:a16="http://schemas.microsoft.com/office/drawing/2014/main" id="{7CD423FC-03F4-D5A1-2483-AE0A82548D4C}"/>
+              </a:ext>
+            </a:extLst>
+          </p:cNvPr>
+          <p:cNvPicPr>
+            <a:picLocks noChangeAspect="1"/>
+          </p:cNvPicPr>
+          <p:nvPr/>
+        </p:nvPicPr>
+        <p:blipFill>
+          <a:blip r:embed="rId5"/>
+          <a:stretch>
+            <a:fillRect/>
+          </a:stretch>
+        </p:blipFill>
+        <p:spPr>
+          <a:xfrm>
+            <a:off x="420859" y="4590779"/>
+            <a:ext cx="5861841" cy="1827277"/>
+          </a:xfrm>
+          <a:prstGeom prst="rect">
+            <a:avLst/>
+          </a:prstGeom>
+        </p:spPr>
+      </p:pic>
+      <p:sp>
+        <p:nvSpPr>
+          <p:cNvPr id="32" name="TextBox 31">
+            <a:extLst>
+              <a:ext uri="{FF2B5EF4-FFF2-40B4-BE49-F238E27FC236}">
+                <a16:creationId xmlns:a16="http://schemas.microsoft.com/office/drawing/2014/main" id="{84200314-9225-28E0-2806-649E768B771D}"/>
+              </a:ext>
+            </a:extLst>
+          </p:cNvPr>
+          <p:cNvSpPr txBox="1"/>
+          <p:nvPr/>
+        </p:nvSpPr>
+        <p:spPr>
+          <a:xfrm>
+            <a:off x="7959365" y="3673718"/>
+            <a:ext cx="2603941" cy="369332"/>
+          </a:xfrm>
+          <a:prstGeom prst="rect">
+            <a:avLst/>
+          </a:prstGeom>
+          <a:noFill/>
+        </p:spPr>
+        <p:txBody>
+          <a:bodyPr wrap="square">
+            <a:spAutoFit/>
+          </a:bodyPr>
+          <a:lstStyle/>
+          <a:p>
+            <a:r>
+              <a:rPr lang="en-GB" dirty="0"/>
+              <a:t>A. D. Wiedemann et al.</a:t>
+            </a:r>
+          </a:p>
+        </p:txBody>
+      </p:sp>
+      <p:sp>
+        <p:nvSpPr>
+          <p:cNvPr id="34" name="TextBox 33">
+            <a:extLst>
+              <a:ext uri="{FF2B5EF4-FFF2-40B4-BE49-F238E27FC236}">
+                <a16:creationId xmlns:a16="http://schemas.microsoft.com/office/drawing/2014/main" id="{C21B5BFC-0666-1747-43A2-6F76CB712D48}"/>
+              </a:ext>
+            </a:extLst>
+          </p:cNvPr>
+          <p:cNvSpPr txBox="1"/>
+          <p:nvPr/>
+        </p:nvSpPr>
+        <p:spPr>
+          <a:xfrm>
+            <a:off x="2403245" y="5703934"/>
+            <a:ext cx="1654405" cy="369332"/>
+          </a:xfrm>
+          <a:prstGeom prst="rect">
+            <a:avLst/>
+          </a:prstGeom>
+          <a:noFill/>
+        </p:spPr>
+        <p:txBody>
+          <a:bodyPr wrap="square">
+            <a:spAutoFit/>
+          </a:bodyPr>
+          <a:lstStyle/>
+          <a:p>
+            <a:r>
+              <a:rPr lang="en-GB" dirty="0"/>
+              <a:t>B. Zang et al.</a:t>
+            </a:r>
+          </a:p>
+        </p:txBody>
+      </p:sp>
+      <p:pic>
+        <p:nvPicPr>
+          <p:cNvPr id="6" name="Picture 5">
+            <a:extLst>
+              <a:ext uri="{FF2B5EF4-FFF2-40B4-BE49-F238E27FC236}">
+                <a16:creationId xmlns:a16="http://schemas.microsoft.com/office/drawing/2014/main" id="{8E28C63F-94ED-AE22-8F66-C521AF20E882}"/>
+              </a:ext>
+            </a:extLst>
+          </p:cNvPr>
+          <p:cNvPicPr>
+            <a:picLocks noChangeAspect="1"/>
+          </p:cNvPicPr>
+          <p:nvPr/>
+        </p:nvPicPr>
+        <p:blipFill>
+          <a:blip r:embed="rId6"/>
+          <a:stretch>
+            <a:fillRect/>
+          </a:stretch>
+        </p:blipFill>
+        <p:spPr>
+          <a:xfrm>
+            <a:off x="6397492" y="3420589"/>
             <a:ext cx="5336037" cy="3001521"/>
           </a:xfrm>
           <a:prstGeom prst="rect">
@@ -4614,7 +6146,7 @@
     </p:spTree>
     <p:extLst>
       <p:ext uri="{BB962C8B-B14F-4D97-AF65-F5344CB8AC3E}">
-        <p14:creationId xmlns:p14="http://schemas.microsoft.com/office/powerpoint/2010/main" val="3559493089"/>
+        <p14:creationId xmlns:p14="http://schemas.microsoft.com/office/powerpoint/2010/main" val="3244410690"/>
       </p:ext>
     </p:extLst>
   </p:cSld>
@@ -4655,7 +6187,7 @@
                                           </p:stCondLst>
                                         </p:cTn>
                                         <p:tgtEl>
-                                          <p:spTgt spid="4"/>
+                                          <p:spTgt spid="6"/>
                                         </p:tgtEl>
                                         <p:attrNameLst>
                                           <p:attrName>style.visibility</p:attrName>
@@ -4699,9 +6231,17 @@
 </p:sld>
 </file>
 
-<file path=ppt/slides/slide5.xml><?xml version="1.0" encoding="utf-8"?>
+<file path=ppt/slides/slide4.xml><?xml version="1.0" encoding="utf-8"?>
 <p:sld xmlns:a="http://schemas.openxmlformats.org/drawingml/2006/main" xmlns:r="http://schemas.openxmlformats.org/officeDocument/2006/relationships" xmlns:p="http://schemas.openxmlformats.org/presentationml/2006/main">
   <p:cSld>
+    <p:bg>
+      <p:bgPr>
+        <a:solidFill>
+          <a:schemeClr val="bg1"/>
+        </a:solidFill>
+        <a:effectLst/>
+      </p:bgPr>
+    </p:bg>
     <p:spTree>
       <p:nvGrpSpPr>
         <p:cNvPr id="1" name=""/>
@@ -4716,12 +6256,388 @@
           <a:chExt cx="0" cy="0"/>
         </a:xfrm>
       </p:grpSpPr>
+      <p:sp useBgFill="1">
+        <p:nvSpPr>
+          <p:cNvPr id="8" name="Rectangle 7">
+            <a:extLst>
+              <a:ext uri="{FF2B5EF4-FFF2-40B4-BE49-F238E27FC236}">
+                <a16:creationId xmlns:a16="http://schemas.microsoft.com/office/drawing/2014/main" id="{1B15ED52-F352-441B-82BF-E0EA34836D08}"/>
+              </a:ext>
+              <a:ext uri="{C183D7F6-B498-43B3-948B-1728B52AA6E4}">
+                <adec:decorative xmlns:adec="http://schemas.microsoft.com/office/drawing/2017/decorative" val="1"/>
+              </a:ext>
+            </a:extLst>
+          </p:cNvPr>
+          <p:cNvSpPr>
+            <a:spLocks noGrp="1" noRot="1" noChangeAspect="1" noMove="1" noResize="1" noEditPoints="1" noAdjustHandles="1" noChangeArrowheads="1" noChangeShapeType="1" noTextEdit="1"/>
+          </p:cNvSpPr>
+          <p:nvPr>
+            <p:extLst>
+              <p:ext uri="{386F3935-93C4-4BCD-93E2-E3B085C9AB24}">
+                <p16:designElem xmlns:p16="http://schemas.microsoft.com/office/powerpoint/2015/main" val="1"/>
+              </p:ext>
+            </p:extLst>
+          </p:nvPr>
+        </p:nvSpPr>
+        <p:spPr>
+          <a:xfrm>
+            <a:off x="0" y="0"/>
+            <a:ext cx="12192000" cy="6858000"/>
+          </a:xfrm>
+          <a:prstGeom prst="rect">
+            <a:avLst/>
+          </a:prstGeom>
+          <a:ln w="12700" cap="flat" cmpd="sng" algn="ctr">
+            <a:noFill/>
+            <a:prstDash val="solid"/>
+            <a:miter lim="800000"/>
+          </a:ln>
+          <a:effectLst/>
+          <a:extLst>
+            <a:ext uri="{91240B29-F687-4F45-9708-019B960494DF}">
+              <a14:hiddenLine xmlns:a14="http://schemas.microsoft.com/office/drawing/2010/main" w="12700" cap="flat" cmpd="sng" algn="ctr">
+                <a:solidFill>
+                  <a:schemeClr val="accent1">
+                    <a:shade val="50000"/>
+                  </a:schemeClr>
+                </a:solidFill>
+                <a:prstDash val="solid"/>
+                <a:miter lim="800000"/>
+              </a14:hiddenLine>
+            </a:ext>
+          </a:extLst>
+        </p:spPr>
+        <p:style>
+          <a:lnRef idx="2">
+            <a:schemeClr val="accent1">
+              <a:shade val="50000"/>
+            </a:schemeClr>
+          </a:lnRef>
+          <a:fillRef idx="1">
+            <a:schemeClr val="accent1"/>
+          </a:fillRef>
+          <a:effectRef idx="0">
+            <a:schemeClr val="accent1"/>
+          </a:effectRef>
+          <a:fontRef idx="minor">
+            <a:schemeClr val="lt1"/>
+          </a:fontRef>
+        </p:style>
+        <p:txBody>
+          <a:bodyPr rtlCol="0" anchor="ctr"/>
+          <a:lstStyle/>
+          <a:p>
+            <a:pPr algn="ctr"/>
+            <a:endParaRPr lang="en-US"/>
+          </a:p>
+        </p:txBody>
+      </p:sp>
+      <p:sp>
+        <p:nvSpPr>
+          <p:cNvPr id="10" name="Rectangle 9">
+            <a:extLst>
+              <a:ext uri="{FF2B5EF4-FFF2-40B4-BE49-F238E27FC236}">
+                <a16:creationId xmlns:a16="http://schemas.microsoft.com/office/drawing/2014/main" id="{3B2E3793-BFE6-45A2-9B7B-E18844431C99}"/>
+              </a:ext>
+              <a:ext uri="{C183D7F6-B498-43B3-948B-1728B52AA6E4}">
+                <adec:decorative xmlns:adec="http://schemas.microsoft.com/office/drawing/2017/decorative" val="1"/>
+              </a:ext>
+            </a:extLst>
+          </p:cNvPr>
+          <p:cNvSpPr>
+            <a:spLocks noGrp="1" noRot="1" noChangeAspect="1" noMove="1" noResize="1" noEditPoints="1" noAdjustHandles="1" noChangeArrowheads="1" noChangeShapeType="1" noTextEdit="1"/>
+          </p:cNvSpPr>
+          <p:nvPr>
+            <p:extLst>
+              <p:ext uri="{386F3935-93C4-4BCD-93E2-E3B085C9AB24}">
+                <p16:designElem xmlns:p16="http://schemas.microsoft.com/office/powerpoint/2015/main" val="1"/>
+              </p:ext>
+            </p:extLst>
+          </p:nvPr>
+        </p:nvSpPr>
+        <p:spPr>
+          <a:xfrm flipH="1">
+            <a:off x="-1" y="-1"/>
+            <a:ext cx="12191998" cy="1590742"/>
+          </a:xfrm>
+          <a:prstGeom prst="rect">
+            <a:avLst/>
+          </a:prstGeom>
+          <a:gradFill>
+            <a:gsLst>
+              <a:gs pos="0">
+                <a:srgbClr val="000000"/>
+              </a:gs>
+              <a:gs pos="100000">
+                <a:schemeClr val="accent1">
+                  <a:lumMod val="75000"/>
+                </a:schemeClr>
+              </a:gs>
+            </a:gsLst>
+            <a:lin ang="8400000" scaled="0"/>
+          </a:gradFill>
+          <a:ln>
+            <a:noFill/>
+          </a:ln>
+        </p:spPr>
+        <p:style>
+          <a:lnRef idx="2">
+            <a:schemeClr val="accent1">
+              <a:shade val="50000"/>
+            </a:schemeClr>
+          </a:lnRef>
+          <a:fillRef idx="1">
+            <a:schemeClr val="accent1"/>
+          </a:fillRef>
+          <a:effectRef idx="0">
+            <a:schemeClr val="accent1"/>
+          </a:effectRef>
+          <a:fontRef idx="minor">
+            <a:schemeClr val="lt1"/>
+          </a:fontRef>
+        </p:style>
+        <p:txBody>
+          <a:bodyPr rtlCol="0" anchor="ctr"/>
+          <a:lstStyle/>
+          <a:p>
+            <a:pPr algn="ctr"/>
+            <a:endParaRPr lang="en-US"/>
+          </a:p>
+        </p:txBody>
+      </p:sp>
+      <p:sp>
+        <p:nvSpPr>
+          <p:cNvPr id="12" name="Rectangle 11">
+            <a:extLst>
+              <a:ext uri="{FF2B5EF4-FFF2-40B4-BE49-F238E27FC236}">
+                <a16:creationId xmlns:a16="http://schemas.microsoft.com/office/drawing/2014/main" id="{BC4C4868-CB8F-4AF9-9CDB-8108F2C19B67}"/>
+              </a:ext>
+              <a:ext uri="{C183D7F6-B498-43B3-948B-1728B52AA6E4}">
+                <adec:decorative xmlns:adec="http://schemas.microsoft.com/office/drawing/2017/decorative" val="1"/>
+              </a:ext>
+            </a:extLst>
+          </p:cNvPr>
+          <p:cNvSpPr>
+            <a:spLocks noGrp="1" noRot="1" noChangeAspect="1" noMove="1" noResize="1" noEditPoints="1" noAdjustHandles="1" noChangeArrowheads="1" noChangeShapeType="1" noTextEdit="1"/>
+          </p:cNvSpPr>
+          <p:nvPr>
+            <p:extLst>
+              <p:ext uri="{386F3935-93C4-4BCD-93E2-E3B085C9AB24}">
+                <p16:designElem xmlns:p16="http://schemas.microsoft.com/office/powerpoint/2015/main" val="1"/>
+              </p:ext>
+            </p:extLst>
+          </p:nvPr>
+        </p:nvSpPr>
+        <p:spPr>
+          <a:xfrm rot="10800000" flipH="1">
+            <a:off x="-3" y="0"/>
+            <a:ext cx="8115306" cy="1590742"/>
+          </a:xfrm>
+          <a:prstGeom prst="rect">
+            <a:avLst/>
+          </a:prstGeom>
+          <a:gradFill>
+            <a:gsLst>
+              <a:gs pos="20000">
+                <a:schemeClr val="accent1">
+                  <a:alpha val="0"/>
+                </a:schemeClr>
+              </a:gs>
+              <a:gs pos="100000">
+                <a:schemeClr val="accent1">
+                  <a:lumMod val="50000"/>
+                  <a:alpha val="55000"/>
+                </a:schemeClr>
+              </a:gs>
+            </a:gsLst>
+            <a:lin ang="13800000" scaled="0"/>
+          </a:gradFill>
+          <a:ln>
+            <a:noFill/>
+          </a:ln>
+        </p:spPr>
+        <p:style>
+          <a:lnRef idx="2">
+            <a:schemeClr val="accent1">
+              <a:shade val="50000"/>
+            </a:schemeClr>
+          </a:lnRef>
+          <a:fillRef idx="1">
+            <a:schemeClr val="accent1"/>
+          </a:fillRef>
+          <a:effectRef idx="0">
+            <a:schemeClr val="accent1"/>
+          </a:effectRef>
+          <a:fontRef idx="minor">
+            <a:schemeClr val="lt1"/>
+          </a:fontRef>
+        </p:style>
+        <p:txBody>
+          <a:bodyPr rtlCol="0" anchor="ctr"/>
+          <a:lstStyle/>
+          <a:p>
+            <a:pPr algn="ctr"/>
+            <a:endParaRPr lang="en-US"/>
+          </a:p>
+        </p:txBody>
+      </p:sp>
+      <p:sp>
+        <p:nvSpPr>
+          <p:cNvPr id="14" name="Rectangle 13">
+            <a:extLst>
+              <a:ext uri="{FF2B5EF4-FFF2-40B4-BE49-F238E27FC236}">
+                <a16:creationId xmlns:a16="http://schemas.microsoft.com/office/drawing/2014/main" id="{375E0459-6403-40CD-989D-56A4407CA12E}"/>
+              </a:ext>
+              <a:ext uri="{C183D7F6-B498-43B3-948B-1728B52AA6E4}">
+                <adec:decorative xmlns:adec="http://schemas.microsoft.com/office/drawing/2017/decorative" val="1"/>
+              </a:ext>
+            </a:extLst>
+          </p:cNvPr>
+          <p:cNvSpPr>
+            <a:spLocks noGrp="1" noRot="1" noChangeAspect="1" noMove="1" noResize="1" noEditPoints="1" noAdjustHandles="1" noChangeArrowheads="1" noChangeShapeType="1" noTextEdit="1"/>
+          </p:cNvSpPr>
+          <p:nvPr>
+            <p:extLst>
+              <p:ext uri="{386F3935-93C4-4BCD-93E2-E3B085C9AB24}">
+                <p16:designElem xmlns:p16="http://schemas.microsoft.com/office/powerpoint/2015/main" val="1"/>
+              </p:ext>
+            </p:extLst>
+          </p:nvPr>
+        </p:nvSpPr>
+        <p:spPr>
+          <a:xfrm flipH="1">
+            <a:off x="8115299" y="-1"/>
+            <a:ext cx="4076698" cy="1590742"/>
+          </a:xfrm>
+          <a:prstGeom prst="rect">
+            <a:avLst/>
+          </a:prstGeom>
+          <a:gradFill>
+            <a:gsLst>
+              <a:gs pos="0">
+                <a:schemeClr val="accent1">
+                  <a:alpha val="66000"/>
+                </a:schemeClr>
+              </a:gs>
+              <a:gs pos="100000">
+                <a:srgbClr val="000000">
+                  <a:alpha val="30000"/>
+                </a:srgbClr>
+              </a:gs>
+            </a:gsLst>
+            <a:lin ang="13200000" scaled="0"/>
+          </a:gradFill>
+          <a:ln>
+            <a:noFill/>
+          </a:ln>
+        </p:spPr>
+        <p:style>
+          <a:lnRef idx="2">
+            <a:schemeClr val="accent1">
+              <a:shade val="50000"/>
+            </a:schemeClr>
+          </a:lnRef>
+          <a:fillRef idx="1">
+            <a:schemeClr val="accent1"/>
+          </a:fillRef>
+          <a:effectRef idx="0">
+            <a:schemeClr val="accent1"/>
+          </a:effectRef>
+          <a:fontRef idx="minor">
+            <a:schemeClr val="lt1"/>
+          </a:fontRef>
+        </p:style>
+        <p:txBody>
+          <a:bodyPr rtlCol="0" anchor="ctr"/>
+          <a:lstStyle/>
+          <a:p>
+            <a:pPr algn="ctr"/>
+            <a:endParaRPr lang="en-US"/>
+          </a:p>
+        </p:txBody>
+      </p:sp>
+      <p:sp>
+        <p:nvSpPr>
+          <p:cNvPr id="16" name="Rectangle 15">
+            <a:extLst>
+              <a:ext uri="{FF2B5EF4-FFF2-40B4-BE49-F238E27FC236}">
+                <a16:creationId xmlns:a16="http://schemas.microsoft.com/office/drawing/2014/main" id="{53E5B1A8-3AC9-4BD1-9BBC-78CA94F2D1BA}"/>
+              </a:ext>
+              <a:ext uri="{C183D7F6-B498-43B3-948B-1728B52AA6E4}">
+                <adec:decorative xmlns:adec="http://schemas.microsoft.com/office/drawing/2017/decorative" val="1"/>
+              </a:ext>
+            </a:extLst>
+          </p:cNvPr>
+          <p:cNvSpPr>
+            <a:spLocks noGrp="1" noRot="1" noChangeAspect="1" noMove="1" noResize="1" noEditPoints="1" noAdjustHandles="1" noChangeArrowheads="1" noChangeShapeType="1" noTextEdit="1"/>
+          </p:cNvSpPr>
+          <p:nvPr>
+            <p:extLst>
+              <p:ext uri="{386F3935-93C4-4BCD-93E2-E3B085C9AB24}">
+                <p16:designElem xmlns:p16="http://schemas.microsoft.com/office/powerpoint/2015/main" val="1"/>
+              </p:ext>
+            </p:extLst>
+          </p:nvPr>
+        </p:nvSpPr>
+        <p:spPr>
+          <a:xfrm>
+            <a:off x="459350" y="-1"/>
+            <a:ext cx="11732646" cy="1597433"/>
+          </a:xfrm>
+          <a:prstGeom prst="rect">
+            <a:avLst/>
+          </a:prstGeom>
+          <a:gradFill>
+            <a:gsLst>
+              <a:gs pos="50000">
+                <a:srgbClr val="000000">
+                  <a:alpha val="0"/>
+                </a:srgbClr>
+              </a:gs>
+              <a:gs pos="99000">
+                <a:schemeClr val="accent1">
+                  <a:lumMod val="50000"/>
+                  <a:alpha val="52000"/>
+                </a:schemeClr>
+              </a:gs>
+            </a:gsLst>
+            <a:lin ang="16800000" scaled="0"/>
+          </a:gradFill>
+          <a:ln>
+            <a:noFill/>
+          </a:ln>
+        </p:spPr>
+        <p:style>
+          <a:lnRef idx="2">
+            <a:schemeClr val="accent1">
+              <a:shade val="50000"/>
+            </a:schemeClr>
+          </a:lnRef>
+          <a:fillRef idx="1">
+            <a:schemeClr val="accent1"/>
+          </a:fillRef>
+          <a:effectRef idx="0">
+            <a:schemeClr val="accent1"/>
+          </a:effectRef>
+          <a:fontRef idx="minor">
+            <a:schemeClr val="lt1"/>
+          </a:fontRef>
+        </p:style>
+        <p:txBody>
+          <a:bodyPr rtlCol="0" anchor="ctr"/>
+          <a:lstStyle/>
+          <a:p>
+            <a:pPr algn="ctr"/>
+            <a:endParaRPr lang="en-US"/>
+          </a:p>
+        </p:txBody>
+      </p:sp>
       <p:sp>
         <p:nvSpPr>
           <p:cNvPr id="2" name="Title 1">
             <a:extLst>
               <a:ext uri="{FF2B5EF4-FFF2-40B4-BE49-F238E27FC236}">
-                <a16:creationId xmlns:a16="http://schemas.microsoft.com/office/drawing/2014/main" id="{58F25F83-4A70-EC07-83C3-28018AF71971}"/>
+                <a16:creationId xmlns:a16="http://schemas.microsoft.com/office/drawing/2014/main" id="{4C6D6236-4AA6-6861-46AD-140A40AA449A}"/>
               </a:ext>
             </a:extLst>
           </p:cNvPr>
@@ -4732,56 +6648,113 @@
             <p:ph type="title"/>
           </p:nvPr>
         </p:nvSpPr>
-        <p:spPr/>
-        <p:txBody>
-          <a:bodyPr/>
+        <p:spPr>
+          <a:xfrm>
+            <a:off x="1371599" y="294538"/>
+            <a:ext cx="9895951" cy="1033669"/>
+          </a:xfrm>
+        </p:spPr>
+        <p:txBody>
+          <a:bodyPr>
+            <a:normAutofit/>
+          </a:bodyPr>
+          <a:lstStyle/>
+          <a:p>
+            <a:r>
+              <a:rPr lang="en-GB" sz="4000" dirty="0">
+                <a:solidFill>
+                  <a:srgbClr val="FFFFFF"/>
+                </a:solidFill>
+              </a:rPr>
+              <a:t>Objectives</a:t>
+            </a:r>
+          </a:p>
+        </p:txBody>
+      </p:sp>
+      <p:sp>
+        <p:nvSpPr>
+          <p:cNvPr id="3" name="Content Placeholder 2">
+            <a:extLst>
+              <a:ext uri="{FF2B5EF4-FFF2-40B4-BE49-F238E27FC236}">
+                <a16:creationId xmlns:a16="http://schemas.microsoft.com/office/drawing/2014/main" id="{70DE358F-D7FF-016F-569C-6BD94603C062}"/>
+              </a:ext>
+            </a:extLst>
+          </p:cNvPr>
+          <p:cNvSpPr>
+            <a:spLocks noGrp="1"/>
+          </p:cNvSpPr>
+          <p:nvPr>
+            <p:ph idx="1"/>
+          </p:nvPr>
+        </p:nvSpPr>
+        <p:spPr>
+          <a:xfrm>
+            <a:off x="744719" y="2638708"/>
+            <a:ext cx="10398046" cy="3683358"/>
+          </a:xfrm>
+        </p:spPr>
+        <p:txBody>
+          <a:bodyPr anchor="ctr">
+            <a:normAutofit/>
+          </a:bodyPr>
           <a:lstStyle/>
           <a:p>
             <a:r>
               <a:rPr lang="en-GB" dirty="0"/>
-              <a:t>Hypothesis</a:t>
-            </a:r>
-          </a:p>
-        </p:txBody>
-      </p:sp>
-      <p:sp>
-        <p:nvSpPr>
-          <p:cNvPr id="3" name="Content Placeholder 2">
-            <a:extLst>
-              <a:ext uri="{FF2B5EF4-FFF2-40B4-BE49-F238E27FC236}">
-                <a16:creationId xmlns:a16="http://schemas.microsoft.com/office/drawing/2014/main" id="{99292C3A-A61D-9091-F578-573CE6EE4B50}"/>
-              </a:ext>
-            </a:extLst>
-          </p:cNvPr>
-          <p:cNvSpPr>
-            <a:spLocks noGrp="1"/>
-          </p:cNvSpPr>
-          <p:nvPr>
-            <p:ph idx="1"/>
-          </p:nvPr>
-        </p:nvSpPr>
-        <p:spPr/>
-        <p:txBody>
-          <a:bodyPr/>
-          <a:lstStyle/>
-          <a:p>
-            <a:pPr marL="0" indent="0">
-              <a:buNone/>
-            </a:pPr>
+              <a:t>Design and build an experimental setup to measure</a:t>
+            </a:r>
+            <a:r>
+              <a:rPr lang="en-GB" b="1" dirty="0"/>
+              <a:t> aerodynamic performance</a:t>
+            </a:r>
+            <a:r>
+              <a:rPr lang="en-GB" dirty="0"/>
+              <a:t> and </a:t>
+            </a:r>
+            <a:r>
+              <a:rPr lang="en-GB" b="1" dirty="0"/>
+              <a:t>acoustic signatures </a:t>
+            </a:r>
+            <a:r>
+              <a:rPr lang="en-GB" dirty="0"/>
+              <a:t>of various propeller designs</a:t>
+            </a:r>
+          </a:p>
+          <a:p>
             <a:endParaRPr lang="en-GB" dirty="0"/>
           </a:p>
           <a:p>
             <a:r>
               <a:rPr lang="en-GB" dirty="0"/>
-              <a:t>The </a:t>
-            </a:r>
+              <a:t>Attribute </a:t>
+            </a:r>
+            <a:r>
+              <a:rPr lang="en-US" dirty="0"/>
+              <a:t>changes in the acoustic spectrum to flow phenomena caused by propeller geometry modifications</a:t>
+            </a:r>
+            <a:r>
+              <a:rPr lang="en-GB" dirty="0"/>
+              <a:t>.</a:t>
+            </a:r>
+          </a:p>
+          <a:p>
+            <a:endParaRPr lang="en-GB" dirty="0"/>
+          </a:p>
+          <a:p>
+            <a:r>
+              <a:rPr lang="en-GB" dirty="0"/>
+              <a:t>Analyse psychoacoustic performance </a:t>
+            </a:r>
+          </a:p>
+          <a:p>
+            <a:endParaRPr lang="en-GB" dirty="0"/>
           </a:p>
         </p:txBody>
       </p:sp>
     </p:spTree>
     <p:extLst>
       <p:ext uri="{BB962C8B-B14F-4D97-AF65-F5344CB8AC3E}">
-        <p14:creationId xmlns:p14="http://schemas.microsoft.com/office/powerpoint/2010/main" val="2928061518"/>
+        <p14:creationId xmlns:p14="http://schemas.microsoft.com/office/powerpoint/2010/main" val="1513545599"/>
       </p:ext>
     </p:extLst>
   </p:cSld>
@@ -4791,9 +6764,17 @@
 </p:sld>
 </file>
 
-<file path=ppt/slides/slide6.xml><?xml version="1.0" encoding="utf-8"?>
+<file path=ppt/slides/slide5.xml><?xml version="1.0" encoding="utf-8"?>
 <p:sld xmlns:a="http://schemas.openxmlformats.org/drawingml/2006/main" xmlns:r="http://schemas.openxmlformats.org/officeDocument/2006/relationships" xmlns:p="http://schemas.openxmlformats.org/presentationml/2006/main">
   <p:cSld>
+    <p:bg>
+      <p:bgPr>
+        <a:solidFill>
+          <a:schemeClr val="bg1"/>
+        </a:solidFill>
+        <a:effectLst/>
+      </p:bgPr>
+    </p:bg>
     <p:spTree>
       <p:nvGrpSpPr>
         <p:cNvPr id="1" name=""/>
@@ -4808,41 +6789,423 @@
           <a:chExt cx="0" cy="0"/>
         </a:xfrm>
       </p:grpSpPr>
-      <p:sp>
-        <p:nvSpPr>
-          <p:cNvPr id="2" name="Title 1">
-            <a:extLst>
-              <a:ext uri="{FF2B5EF4-FFF2-40B4-BE49-F238E27FC236}">
-                <a16:creationId xmlns:a16="http://schemas.microsoft.com/office/drawing/2014/main" id="{3BEF8942-9360-F860-55C9-3090EA78559A}"/>
-              </a:ext>
-            </a:extLst>
-          </p:cNvPr>
-          <p:cNvSpPr>
-            <a:spLocks noGrp="1"/>
-          </p:cNvSpPr>
-          <p:nvPr>
-            <p:ph type="title"/>
+      <p:sp useBgFill="1">
+        <p:nvSpPr>
+          <p:cNvPr id="8" name="Rectangle 7">
+            <a:extLst>
+              <a:ext uri="{FF2B5EF4-FFF2-40B4-BE49-F238E27FC236}">
+                <a16:creationId xmlns:a16="http://schemas.microsoft.com/office/drawing/2014/main" id="{1B15ED52-F352-441B-82BF-E0EA34836D08}"/>
+              </a:ext>
+              <a:ext uri="{C183D7F6-B498-43B3-948B-1728B52AA6E4}">
+                <adec:decorative xmlns:adec="http://schemas.microsoft.com/office/drawing/2017/decorative" val="1"/>
+              </a:ext>
+            </a:extLst>
+          </p:cNvPr>
+          <p:cNvSpPr>
+            <a:spLocks noGrp="1" noRot="1" noChangeAspect="1" noMove="1" noResize="1" noEditPoints="1" noAdjustHandles="1" noChangeArrowheads="1" noChangeShapeType="1" noTextEdit="1"/>
+          </p:cNvSpPr>
+          <p:nvPr>
+            <p:extLst>
+              <p:ext uri="{386F3935-93C4-4BCD-93E2-E3B085C9AB24}">
+                <p16:designElem xmlns:p16="http://schemas.microsoft.com/office/powerpoint/2015/main" val="1"/>
+              </p:ext>
+            </p:extLst>
           </p:nvPr>
         </p:nvSpPr>
         <p:spPr>
           <a:xfrm>
-            <a:off x="695464" y="200087"/>
-            <a:ext cx="10515600" cy="1325563"/>
+            <a:off x="0" y="0"/>
+            <a:ext cx="12192000" cy="6858000"/>
+          </a:xfrm>
+          <a:prstGeom prst="rect">
+            <a:avLst/>
+          </a:prstGeom>
+          <a:ln w="12700" cap="flat" cmpd="sng" algn="ctr">
+            <a:noFill/>
+            <a:prstDash val="solid"/>
+            <a:miter lim="800000"/>
+          </a:ln>
+          <a:effectLst/>
+          <a:extLst>
+            <a:ext uri="{91240B29-F687-4F45-9708-019B960494DF}">
+              <a14:hiddenLine xmlns:a14="http://schemas.microsoft.com/office/drawing/2010/main" w="12700" cap="flat" cmpd="sng" algn="ctr">
+                <a:solidFill>
+                  <a:schemeClr val="accent1">
+                    <a:shade val="50000"/>
+                  </a:schemeClr>
+                </a:solidFill>
+                <a:prstDash val="solid"/>
+                <a:miter lim="800000"/>
+              </a14:hiddenLine>
+            </a:ext>
+          </a:extLst>
+        </p:spPr>
+        <p:style>
+          <a:lnRef idx="2">
+            <a:schemeClr val="accent1">
+              <a:shade val="50000"/>
+            </a:schemeClr>
+          </a:lnRef>
+          <a:fillRef idx="1">
+            <a:schemeClr val="accent1"/>
+          </a:fillRef>
+          <a:effectRef idx="0">
+            <a:schemeClr val="accent1"/>
+          </a:effectRef>
+          <a:fontRef idx="minor">
+            <a:schemeClr val="lt1"/>
+          </a:fontRef>
+        </p:style>
+        <p:txBody>
+          <a:bodyPr rtlCol="0" anchor="ctr"/>
+          <a:lstStyle/>
+          <a:p>
+            <a:pPr algn="ctr"/>
+            <a:endParaRPr lang="en-US"/>
+          </a:p>
+        </p:txBody>
+      </p:sp>
+      <p:sp>
+        <p:nvSpPr>
+          <p:cNvPr id="10" name="Rectangle 9">
+            <a:extLst>
+              <a:ext uri="{FF2B5EF4-FFF2-40B4-BE49-F238E27FC236}">
+                <a16:creationId xmlns:a16="http://schemas.microsoft.com/office/drawing/2014/main" id="{3B2E3793-BFE6-45A2-9B7B-E18844431C99}"/>
+              </a:ext>
+              <a:ext uri="{C183D7F6-B498-43B3-948B-1728B52AA6E4}">
+                <adec:decorative xmlns:adec="http://schemas.microsoft.com/office/drawing/2017/decorative" val="1"/>
+              </a:ext>
+            </a:extLst>
+          </p:cNvPr>
+          <p:cNvSpPr>
+            <a:spLocks noGrp="1" noRot="1" noChangeAspect="1" noMove="1" noResize="1" noEditPoints="1" noAdjustHandles="1" noChangeArrowheads="1" noChangeShapeType="1" noTextEdit="1"/>
+          </p:cNvSpPr>
+          <p:nvPr>
+            <p:extLst>
+              <p:ext uri="{386F3935-93C4-4BCD-93E2-E3B085C9AB24}">
+                <p16:designElem xmlns:p16="http://schemas.microsoft.com/office/powerpoint/2015/main" val="1"/>
+              </p:ext>
+            </p:extLst>
+          </p:nvPr>
+        </p:nvSpPr>
+        <p:spPr>
+          <a:xfrm flipH="1">
+            <a:off x="-1" y="-1"/>
+            <a:ext cx="12191998" cy="1590742"/>
+          </a:xfrm>
+          <a:prstGeom prst="rect">
+            <a:avLst/>
+          </a:prstGeom>
+          <a:gradFill>
+            <a:gsLst>
+              <a:gs pos="0">
+                <a:srgbClr val="000000"/>
+              </a:gs>
+              <a:gs pos="100000">
+                <a:schemeClr val="accent1">
+                  <a:lumMod val="75000"/>
+                </a:schemeClr>
+              </a:gs>
+            </a:gsLst>
+            <a:lin ang="8400000" scaled="0"/>
+          </a:gradFill>
+          <a:ln>
+            <a:noFill/>
+          </a:ln>
+        </p:spPr>
+        <p:style>
+          <a:lnRef idx="2">
+            <a:schemeClr val="accent1">
+              <a:shade val="50000"/>
+            </a:schemeClr>
+          </a:lnRef>
+          <a:fillRef idx="1">
+            <a:schemeClr val="accent1"/>
+          </a:fillRef>
+          <a:effectRef idx="0">
+            <a:schemeClr val="accent1"/>
+          </a:effectRef>
+          <a:fontRef idx="minor">
+            <a:schemeClr val="lt1"/>
+          </a:fontRef>
+        </p:style>
+        <p:txBody>
+          <a:bodyPr rtlCol="0" anchor="ctr"/>
+          <a:lstStyle/>
+          <a:p>
+            <a:pPr algn="ctr"/>
+            <a:endParaRPr lang="en-US"/>
+          </a:p>
+        </p:txBody>
+      </p:sp>
+      <p:sp>
+        <p:nvSpPr>
+          <p:cNvPr id="12" name="Rectangle 11">
+            <a:extLst>
+              <a:ext uri="{FF2B5EF4-FFF2-40B4-BE49-F238E27FC236}">
+                <a16:creationId xmlns:a16="http://schemas.microsoft.com/office/drawing/2014/main" id="{BC4C4868-CB8F-4AF9-9CDB-8108F2C19B67}"/>
+              </a:ext>
+              <a:ext uri="{C183D7F6-B498-43B3-948B-1728B52AA6E4}">
+                <adec:decorative xmlns:adec="http://schemas.microsoft.com/office/drawing/2017/decorative" val="1"/>
+              </a:ext>
+            </a:extLst>
+          </p:cNvPr>
+          <p:cNvSpPr>
+            <a:spLocks noGrp="1" noRot="1" noChangeAspect="1" noMove="1" noResize="1" noEditPoints="1" noAdjustHandles="1" noChangeArrowheads="1" noChangeShapeType="1" noTextEdit="1"/>
+          </p:cNvSpPr>
+          <p:nvPr>
+            <p:extLst>
+              <p:ext uri="{386F3935-93C4-4BCD-93E2-E3B085C9AB24}">
+                <p16:designElem xmlns:p16="http://schemas.microsoft.com/office/powerpoint/2015/main" val="1"/>
+              </p:ext>
+            </p:extLst>
+          </p:nvPr>
+        </p:nvSpPr>
+        <p:spPr>
+          <a:xfrm rot="10800000" flipH="1">
+            <a:off x="-3" y="0"/>
+            <a:ext cx="8115306" cy="1590742"/>
+          </a:xfrm>
+          <a:prstGeom prst="rect">
+            <a:avLst/>
+          </a:prstGeom>
+          <a:gradFill>
+            <a:gsLst>
+              <a:gs pos="20000">
+                <a:schemeClr val="accent1">
+                  <a:alpha val="0"/>
+                </a:schemeClr>
+              </a:gs>
+              <a:gs pos="100000">
+                <a:schemeClr val="accent1">
+                  <a:lumMod val="50000"/>
+                  <a:alpha val="55000"/>
+                </a:schemeClr>
+              </a:gs>
+            </a:gsLst>
+            <a:lin ang="13800000" scaled="0"/>
+          </a:gradFill>
+          <a:ln>
+            <a:noFill/>
+          </a:ln>
+        </p:spPr>
+        <p:style>
+          <a:lnRef idx="2">
+            <a:schemeClr val="accent1">
+              <a:shade val="50000"/>
+            </a:schemeClr>
+          </a:lnRef>
+          <a:fillRef idx="1">
+            <a:schemeClr val="accent1"/>
+          </a:fillRef>
+          <a:effectRef idx="0">
+            <a:schemeClr val="accent1"/>
+          </a:effectRef>
+          <a:fontRef idx="minor">
+            <a:schemeClr val="lt1"/>
+          </a:fontRef>
+        </p:style>
+        <p:txBody>
+          <a:bodyPr rtlCol="0" anchor="ctr"/>
+          <a:lstStyle/>
+          <a:p>
+            <a:pPr algn="ctr"/>
+            <a:endParaRPr lang="en-US"/>
+          </a:p>
+        </p:txBody>
+      </p:sp>
+      <p:sp>
+        <p:nvSpPr>
+          <p:cNvPr id="14" name="Rectangle 13">
+            <a:extLst>
+              <a:ext uri="{FF2B5EF4-FFF2-40B4-BE49-F238E27FC236}">
+                <a16:creationId xmlns:a16="http://schemas.microsoft.com/office/drawing/2014/main" id="{375E0459-6403-40CD-989D-56A4407CA12E}"/>
+              </a:ext>
+              <a:ext uri="{C183D7F6-B498-43B3-948B-1728B52AA6E4}">
+                <adec:decorative xmlns:adec="http://schemas.microsoft.com/office/drawing/2017/decorative" val="1"/>
+              </a:ext>
+            </a:extLst>
+          </p:cNvPr>
+          <p:cNvSpPr>
+            <a:spLocks noGrp="1" noRot="1" noChangeAspect="1" noMove="1" noResize="1" noEditPoints="1" noAdjustHandles="1" noChangeArrowheads="1" noChangeShapeType="1" noTextEdit="1"/>
+          </p:cNvSpPr>
+          <p:nvPr>
+            <p:extLst>
+              <p:ext uri="{386F3935-93C4-4BCD-93E2-E3B085C9AB24}">
+                <p16:designElem xmlns:p16="http://schemas.microsoft.com/office/powerpoint/2015/main" val="1"/>
+              </p:ext>
+            </p:extLst>
+          </p:nvPr>
+        </p:nvSpPr>
+        <p:spPr>
+          <a:xfrm flipH="1">
+            <a:off x="8115299" y="-1"/>
+            <a:ext cx="4076698" cy="1590742"/>
+          </a:xfrm>
+          <a:prstGeom prst="rect">
+            <a:avLst/>
+          </a:prstGeom>
+          <a:gradFill>
+            <a:gsLst>
+              <a:gs pos="0">
+                <a:schemeClr val="accent1">
+                  <a:alpha val="66000"/>
+                </a:schemeClr>
+              </a:gs>
+              <a:gs pos="100000">
+                <a:srgbClr val="000000">
+                  <a:alpha val="30000"/>
+                </a:srgbClr>
+              </a:gs>
+            </a:gsLst>
+            <a:lin ang="13200000" scaled="0"/>
+          </a:gradFill>
+          <a:ln>
+            <a:noFill/>
+          </a:ln>
+        </p:spPr>
+        <p:style>
+          <a:lnRef idx="2">
+            <a:schemeClr val="accent1">
+              <a:shade val="50000"/>
+            </a:schemeClr>
+          </a:lnRef>
+          <a:fillRef idx="1">
+            <a:schemeClr val="accent1"/>
+          </a:fillRef>
+          <a:effectRef idx="0">
+            <a:schemeClr val="accent1"/>
+          </a:effectRef>
+          <a:fontRef idx="minor">
+            <a:schemeClr val="lt1"/>
+          </a:fontRef>
+        </p:style>
+        <p:txBody>
+          <a:bodyPr rtlCol="0" anchor="ctr"/>
+          <a:lstStyle/>
+          <a:p>
+            <a:pPr algn="ctr"/>
+            <a:endParaRPr lang="en-US"/>
+          </a:p>
+        </p:txBody>
+      </p:sp>
+      <p:sp>
+        <p:nvSpPr>
+          <p:cNvPr id="16" name="Rectangle 15">
+            <a:extLst>
+              <a:ext uri="{FF2B5EF4-FFF2-40B4-BE49-F238E27FC236}">
+                <a16:creationId xmlns:a16="http://schemas.microsoft.com/office/drawing/2014/main" id="{53E5B1A8-3AC9-4BD1-9BBC-78CA94F2D1BA}"/>
+              </a:ext>
+              <a:ext uri="{C183D7F6-B498-43B3-948B-1728B52AA6E4}">
+                <adec:decorative xmlns:adec="http://schemas.microsoft.com/office/drawing/2017/decorative" val="1"/>
+              </a:ext>
+            </a:extLst>
+          </p:cNvPr>
+          <p:cNvSpPr>
+            <a:spLocks noGrp="1" noRot="1" noChangeAspect="1" noMove="1" noResize="1" noEditPoints="1" noAdjustHandles="1" noChangeArrowheads="1" noChangeShapeType="1" noTextEdit="1"/>
+          </p:cNvSpPr>
+          <p:nvPr>
+            <p:extLst>
+              <p:ext uri="{386F3935-93C4-4BCD-93E2-E3B085C9AB24}">
+                <p16:designElem xmlns:p16="http://schemas.microsoft.com/office/powerpoint/2015/main" val="1"/>
+              </p:ext>
+            </p:extLst>
+          </p:nvPr>
+        </p:nvSpPr>
+        <p:spPr>
+          <a:xfrm>
+            <a:off x="459350" y="-1"/>
+            <a:ext cx="11732646" cy="1597433"/>
+          </a:xfrm>
+          <a:prstGeom prst="rect">
+            <a:avLst/>
+          </a:prstGeom>
+          <a:gradFill>
+            <a:gsLst>
+              <a:gs pos="50000">
+                <a:srgbClr val="000000">
+                  <a:alpha val="0"/>
+                </a:srgbClr>
+              </a:gs>
+              <a:gs pos="99000">
+                <a:schemeClr val="accent1">
+                  <a:lumMod val="50000"/>
+                  <a:alpha val="52000"/>
+                </a:schemeClr>
+              </a:gs>
+            </a:gsLst>
+            <a:lin ang="16800000" scaled="0"/>
+          </a:gradFill>
+          <a:ln>
+            <a:noFill/>
+          </a:ln>
+        </p:spPr>
+        <p:style>
+          <a:lnRef idx="2">
+            <a:schemeClr val="accent1">
+              <a:shade val="50000"/>
+            </a:schemeClr>
+          </a:lnRef>
+          <a:fillRef idx="1">
+            <a:schemeClr val="accent1"/>
+          </a:fillRef>
+          <a:effectRef idx="0">
+            <a:schemeClr val="accent1"/>
+          </a:effectRef>
+          <a:fontRef idx="minor">
+            <a:schemeClr val="lt1"/>
+          </a:fontRef>
+        </p:style>
+        <p:txBody>
+          <a:bodyPr rtlCol="0" anchor="ctr"/>
+          <a:lstStyle/>
+          <a:p>
+            <a:pPr algn="ctr"/>
+            <a:endParaRPr lang="en-US"/>
+          </a:p>
+        </p:txBody>
+      </p:sp>
+      <p:sp>
+        <p:nvSpPr>
+          <p:cNvPr id="2" name="Title 1">
+            <a:extLst>
+              <a:ext uri="{FF2B5EF4-FFF2-40B4-BE49-F238E27FC236}">
+                <a16:creationId xmlns:a16="http://schemas.microsoft.com/office/drawing/2014/main" id="{3BEF8942-9360-F860-55C9-3090EA78559A}"/>
+              </a:ext>
+            </a:extLst>
+          </p:cNvPr>
+          <p:cNvSpPr>
+            <a:spLocks noGrp="1"/>
+          </p:cNvSpPr>
+          <p:nvPr>
+            <p:ph type="title"/>
+          </p:nvPr>
+        </p:nvSpPr>
+        <p:spPr>
+          <a:xfrm>
+            <a:off x="1371599" y="294538"/>
+            <a:ext cx="9895951" cy="1033669"/>
           </a:xfrm>
         </p:spPr>
         <p:txBody>
-          <a:bodyPr/>
-          <a:lstStyle/>
-          <a:p>
-            <a:r>
-              <a:rPr lang="en-GB" dirty="0"/>
+          <a:bodyPr>
+            <a:normAutofit/>
+          </a:bodyPr>
+          <a:lstStyle/>
+          <a:p>
+            <a:r>
+              <a:rPr lang="en-GB" sz="4000">
+                <a:solidFill>
+                  <a:srgbClr val="FFFFFF"/>
+                </a:solidFill>
+              </a:rPr>
               <a:t>Aerodynamic performance</a:t>
             </a:r>
           </a:p>
         </p:txBody>
       </p:sp>
-      <mc:AlternateContent xmlns:mc="http://schemas.openxmlformats.org/markup-compatibility/2006" xmlns:a14="http://schemas.microsoft.com/office/drawing/2010/main">
-        <mc:Choice Requires="a14">
+      <mc:AlternateContent xmlns:mc="http://schemas.openxmlformats.org/markup-compatibility/2006">
+        <mc:Choice xmlns:a14="http://schemas.microsoft.com/office/drawing/2010/main" Requires="a14">
           <p:sp>
             <p:nvSpPr>
               <p:cNvPr id="3" name="Content Placeholder 2">
@@ -4861,21 +7224,23 @@
             </p:nvSpPr>
             <p:spPr>
               <a:xfrm>
-                <a:off x="838200" y="1633824"/>
-                <a:ext cx="10515600" cy="4860646"/>
+                <a:off x="1371599" y="2019300"/>
+                <a:ext cx="9724031" cy="3982255"/>
               </a:xfrm>
             </p:spPr>
             <p:txBody>
-              <a:bodyPr/>
+              <a:bodyPr anchor="ctr">
+                <a:normAutofit/>
+              </a:bodyPr>
               <a:lstStyle/>
               <a:p>
                 <a:r>
-                  <a:rPr lang="en-GB" dirty="0"/>
+                  <a:rPr lang="en-GB" sz="2400" dirty="0"/>
                   <a:t>Aerodynamic performance quantities</a:t>
                 </a:r>
               </a:p>
               <a:p>
-                <a:endParaRPr lang="en-GB" dirty="0"/>
+                <a:endParaRPr lang="en-GB" sz="2400" dirty="0"/>
               </a:p>
               <a:p>
                 <a:pPr marL="0" indent="0">
@@ -4890,14 +7255,14 @@
                       <m:sSub>
                         <m:sSubPr>
                           <m:ctrlPr>
-                            <a:rPr lang="en-GB" b="0" i="1" smtClean="0">
+                            <a:rPr lang="en-GB" sz="2400" b="0" i="1">
                               <a:latin typeface="Cambria Math" panose="02040503050406030204" pitchFamily="18" charset="0"/>
                             </a:rPr>
                           </m:ctrlPr>
                         </m:sSubPr>
                         <m:e>
                           <m:r>
-                            <a:rPr lang="en-GB" b="0" i="1" smtClean="0">
+                            <a:rPr lang="en-GB" sz="2400" b="0" i="1">
                               <a:latin typeface="Cambria Math" panose="02040503050406030204" pitchFamily="18" charset="0"/>
                             </a:rPr>
                             <m:t>𝐶</m:t>
@@ -4905,7 +7270,7 @@
                         </m:e>
                         <m:sub>
                           <m:r>
-                            <a:rPr lang="en-GB" b="0" i="1" smtClean="0">
+                            <a:rPr lang="en-GB" sz="2400" b="0" i="1">
                               <a:latin typeface="Cambria Math" panose="02040503050406030204" pitchFamily="18" charset="0"/>
                             </a:rPr>
                             <m:t>𝑇</m:t>
@@ -4913,7 +7278,7 @@
                         </m:sub>
                       </m:sSub>
                       <m:r>
-                        <a:rPr lang="en-GB" b="0" i="1" smtClean="0">
+                        <a:rPr lang="en-GB" sz="2400" b="0" i="1">
                           <a:latin typeface="Cambria Math" panose="02040503050406030204" pitchFamily="18" charset="0"/>
                         </a:rPr>
                         <m:t>=</m:t>
@@ -4921,14 +7286,14 @@
                       <m:f>
                         <m:fPr>
                           <m:ctrlPr>
-                            <a:rPr lang="en-GB" b="0" i="1" smtClean="0">
+                            <a:rPr lang="en-GB" sz="2400" b="0" i="1">
                               <a:latin typeface="Cambria Math" panose="02040503050406030204" pitchFamily="18" charset="0"/>
                             </a:rPr>
                           </m:ctrlPr>
                         </m:fPr>
                         <m:num>
                           <m:r>
-                            <a:rPr lang="en-GB" b="0" i="1" smtClean="0">
+                            <a:rPr lang="en-GB" sz="2400" b="0" i="1">
                               <a:latin typeface="Cambria Math" panose="02040503050406030204" pitchFamily="18" charset="0"/>
                             </a:rPr>
                             <m:t>𝑇</m:t>
@@ -4936,7 +7301,7 @@
                         </m:num>
                         <m:den>
                           <m:r>
-                            <a:rPr lang="en-GB" b="0" i="1" smtClean="0">
+                            <a:rPr lang="en-GB" sz="2400" b="0" i="1">
                               <a:latin typeface="Cambria Math" panose="02040503050406030204" pitchFamily="18" charset="0"/>
                             </a:rPr>
                             <m:t>𝜌</m:t>
@@ -4944,14 +7309,14 @@
                           <m:sSup>
                             <m:sSupPr>
                               <m:ctrlPr>
-                                <a:rPr lang="en-GB" b="0" i="1" smtClean="0">
+                                <a:rPr lang="en-GB" sz="2400" b="0" i="1">
                                   <a:latin typeface="Cambria Math" panose="02040503050406030204" pitchFamily="18" charset="0"/>
                                 </a:rPr>
                               </m:ctrlPr>
                             </m:sSupPr>
                             <m:e>
                               <m:r>
-                                <a:rPr lang="en-GB" b="0" i="1" smtClean="0">
+                                <a:rPr lang="en-GB" sz="2400" b="0" i="1">
                                   <a:latin typeface="Cambria Math" panose="02040503050406030204" pitchFamily="18" charset="0"/>
                                 </a:rPr>
                                 <m:t>𝑁</m:t>
@@ -4959,7 +7324,7 @@
                             </m:e>
                             <m:sup>
                               <m:r>
-                                <a:rPr lang="en-GB" b="0" i="1" smtClean="0">
+                                <a:rPr lang="en-GB" sz="2400" b="0" i="1">
                                   <a:latin typeface="Cambria Math" panose="02040503050406030204" pitchFamily="18" charset="0"/>
                                 </a:rPr>
                                 <m:t>2</m:t>
@@ -4969,14 +7334,14 @@
                           <m:sSup>
                             <m:sSupPr>
                               <m:ctrlPr>
-                                <a:rPr lang="en-GB" b="0" i="1" smtClean="0">
+                                <a:rPr lang="en-GB" sz="2400" b="0" i="1">
                                   <a:latin typeface="Cambria Math" panose="02040503050406030204" pitchFamily="18" charset="0"/>
                                 </a:rPr>
                               </m:ctrlPr>
                             </m:sSupPr>
                             <m:e>
                               <m:r>
-                                <a:rPr lang="en-GB" b="0" i="1" smtClean="0">
+                                <a:rPr lang="en-GB" sz="2400" b="0" i="1">
                                   <a:latin typeface="Cambria Math" panose="02040503050406030204" pitchFamily="18" charset="0"/>
                                 </a:rPr>
                                 <m:t>𝐷</m:t>
@@ -4984,7 +7349,7 @@
                             </m:e>
                             <m:sup>
                               <m:r>
-                                <a:rPr lang="en-GB" b="0" i="1" smtClean="0">
+                                <a:rPr lang="en-GB" sz="2400" b="0" i="1">
                                   <a:latin typeface="Cambria Math" panose="02040503050406030204" pitchFamily="18" charset="0"/>
                                 </a:rPr>
                                 <m:t>4</m:t>
@@ -4994,7 +7359,7 @@
                         </m:den>
                       </m:f>
                       <m:r>
-                        <a:rPr lang="en-GB" b="0" i="1" smtClean="0">
+                        <a:rPr lang="en-GB" sz="2400" b="0" i="1">
                           <a:latin typeface="Cambria Math" panose="02040503050406030204" pitchFamily="18" charset="0"/>
                         </a:rPr>
                         <m:t>, </m:t>
@@ -5002,14 +7367,14 @@
                       <m:sSub>
                         <m:sSubPr>
                           <m:ctrlPr>
-                            <a:rPr lang="en-GB" b="0" i="1" smtClean="0">
+                            <a:rPr lang="en-GB" sz="2400" b="0" i="1">
                               <a:latin typeface="Cambria Math" panose="02040503050406030204" pitchFamily="18" charset="0"/>
                             </a:rPr>
                           </m:ctrlPr>
                         </m:sSubPr>
                         <m:e>
                           <m:r>
-                            <a:rPr lang="en-GB" b="0" i="1" smtClean="0">
+                            <a:rPr lang="en-GB" sz="2400" b="0" i="1">
                               <a:latin typeface="Cambria Math" panose="02040503050406030204" pitchFamily="18" charset="0"/>
                             </a:rPr>
                             <m:t>𝐶</m:t>
@@ -5017,7 +7382,7 @@
                         </m:e>
                         <m:sub>
                           <m:r>
-                            <a:rPr lang="en-GB" b="0" i="1" smtClean="0">
+                            <a:rPr lang="en-GB" sz="2400" b="0" i="1">
                               <a:latin typeface="Cambria Math" panose="02040503050406030204" pitchFamily="18" charset="0"/>
                             </a:rPr>
                             <m:t>𝑃</m:t>
@@ -5025,7 +7390,7 @@
                         </m:sub>
                       </m:sSub>
                       <m:r>
-                        <a:rPr lang="en-GB" b="0" i="1" smtClean="0">
+                        <a:rPr lang="en-GB" sz="2400" b="0" i="1">
                           <a:latin typeface="Cambria Math" panose="02040503050406030204" pitchFamily="18" charset="0"/>
                         </a:rPr>
                         <m:t>=</m:t>
@@ -5033,14 +7398,14 @@
                       <m:f>
                         <m:fPr>
                           <m:ctrlPr>
-                            <a:rPr lang="en-GB" b="0" i="1" smtClean="0">
+                            <a:rPr lang="en-GB" sz="2400" b="0" i="1">
                               <a:latin typeface="Cambria Math" panose="02040503050406030204" pitchFamily="18" charset="0"/>
                             </a:rPr>
                           </m:ctrlPr>
                         </m:fPr>
                         <m:num>
                           <m:r>
-                            <a:rPr lang="en-GB" b="0" i="1" smtClean="0">
+                            <a:rPr lang="en-GB" sz="2400" b="0" i="1">
                               <a:latin typeface="Cambria Math" panose="02040503050406030204" pitchFamily="18" charset="0"/>
                             </a:rPr>
                             <m:t>𝑃</m:t>
@@ -5048,7 +7413,7 @@
                         </m:num>
                         <m:den>
                           <m:r>
-                            <a:rPr lang="en-GB" b="0" i="1" smtClean="0">
+                            <a:rPr lang="en-GB" sz="2400" b="0" i="1">
                               <a:latin typeface="Cambria Math" panose="02040503050406030204" pitchFamily="18" charset="0"/>
                             </a:rPr>
                             <m:t>𝜌</m:t>
@@ -5056,14 +7421,14 @@
                           <m:sSup>
                             <m:sSupPr>
                               <m:ctrlPr>
-                                <a:rPr lang="en-GB" b="0" i="1" smtClean="0">
+                                <a:rPr lang="en-GB" sz="2400" b="0" i="1">
                                   <a:latin typeface="Cambria Math" panose="02040503050406030204" pitchFamily="18" charset="0"/>
                                 </a:rPr>
                               </m:ctrlPr>
                             </m:sSupPr>
                             <m:e>
                               <m:r>
-                                <a:rPr lang="en-GB" b="0" i="1" smtClean="0">
+                                <a:rPr lang="en-GB" sz="2400" b="0" i="1">
                                   <a:latin typeface="Cambria Math" panose="02040503050406030204" pitchFamily="18" charset="0"/>
                                 </a:rPr>
                                 <m:t>𝑁</m:t>
@@ -5071,7 +7436,7 @@
                             </m:e>
                             <m:sup>
                               <m:r>
-                                <a:rPr lang="en-GB" b="0" i="1" smtClean="0">
+                                <a:rPr lang="en-GB" sz="2400" b="0" i="1">
                                   <a:latin typeface="Cambria Math" panose="02040503050406030204" pitchFamily="18" charset="0"/>
                                 </a:rPr>
                                 <m:t>3</m:t>
@@ -5081,14 +7446,14 @@
                           <m:sSup>
                             <m:sSupPr>
                               <m:ctrlPr>
-                                <a:rPr lang="en-GB" b="0" i="1" smtClean="0">
+                                <a:rPr lang="en-GB" sz="2400" b="0" i="1">
                                   <a:latin typeface="Cambria Math" panose="02040503050406030204" pitchFamily="18" charset="0"/>
                                 </a:rPr>
                               </m:ctrlPr>
                             </m:sSupPr>
                             <m:e>
                               <m:r>
-                                <a:rPr lang="en-GB" b="0" i="1" smtClean="0">
+                                <a:rPr lang="en-GB" sz="2400" b="0" i="1">
                                   <a:latin typeface="Cambria Math" panose="02040503050406030204" pitchFamily="18" charset="0"/>
                                 </a:rPr>
                                 <m:t>𝐷</m:t>
@@ -5096,7 +7461,7 @@
                             </m:e>
                             <m:sup>
                               <m:r>
-                                <a:rPr lang="en-GB" b="0" i="1" smtClean="0">
+                                <a:rPr lang="en-GB" sz="2400" b="0" i="1">
                                   <a:latin typeface="Cambria Math" panose="02040503050406030204" pitchFamily="18" charset="0"/>
                                 </a:rPr>
                                 <m:t>5</m:t>
@@ -5108,44 +7473,44 @@
                     </m:oMath>
                   </m:oMathPara>
                 </a14:m>
-                <a:endParaRPr lang="en-GB" dirty="0"/>
+                <a:endParaRPr lang="en-GB" sz="2400" dirty="0"/>
               </a:p>
               <a:p>
                 <a:pPr marL="0" indent="0">
                   <a:buNone/>
                 </a:pPr>
-                <a:endParaRPr lang="en-GB" dirty="0"/>
+                <a:endParaRPr lang="en-GB" sz="2400" dirty="0"/>
               </a:p>
               <a:p>
                 <a:pPr marL="0" indent="0">
                   <a:buNone/>
                 </a:pPr>
                 <a:r>
-                  <a:rPr lang="en-GB" dirty="0"/>
+                  <a:rPr lang="en-GB" sz="2400" dirty="0"/>
                   <a:t>Power is obtained from </a:t>
                 </a:r>
                 <a14:m>
                   <m:oMath xmlns:m="http://schemas.openxmlformats.org/officeDocument/2006/math">
                     <m:r>
-                      <a:rPr lang="en-GB" b="0" i="1" smtClean="0">
+                      <a:rPr lang="en-GB" sz="2400" b="0" i="1">
                         <a:latin typeface="Cambria Math" panose="02040503050406030204" pitchFamily="18" charset="0"/>
                       </a:rPr>
                       <m:t>𝜏</m:t>
                     </m:r>
                     <m:r>
-                      <a:rPr lang="en-GB" b="0" i="1" smtClean="0">
+                      <a:rPr lang="en-GB" sz="2400" b="0" i="1">
                         <a:latin typeface="Cambria Math" panose="02040503050406030204" pitchFamily="18" charset="0"/>
                       </a:rPr>
                       <m:t>⋅2</m:t>
                     </m:r>
                     <m:r>
-                      <a:rPr lang="en-GB" b="0" i="1" smtClean="0">
+                      <a:rPr lang="en-GB" sz="2400" b="0" i="1">
                         <a:latin typeface="Cambria Math" panose="02040503050406030204" pitchFamily="18" charset="0"/>
                       </a:rPr>
                       <m:t>𝜋</m:t>
                     </m:r>
                     <m:r>
-                      <a:rPr lang="en-GB" b="0" i="1" smtClean="0">
+                      <a:rPr lang="en-GB" sz="2400" b="0" i="1">
                         <a:latin typeface="Cambria Math" panose="02040503050406030204" pitchFamily="18" charset="0"/>
                       </a:rPr>
                       <m:t>𝑁</m:t>
@@ -5153,7 +7518,7 @@
                   </m:oMath>
                 </a14:m>
                 <a:r>
-                  <a:rPr lang="en-GB" dirty="0"/>
+                  <a:rPr lang="en-GB" sz="2400" dirty="0"/>
                   <a:t> </a:t>
                 </a:r>
               </a:p>
@@ -5161,21 +7526,21 @@
                 <a:pPr marL="0" indent="0">
                   <a:buNone/>
                 </a:pPr>
-                <a:endParaRPr lang="en-GB" dirty="0"/>
+                <a:endParaRPr lang="en-GB" sz="2400" dirty="0"/>
               </a:p>
               <a:p>
                 <a:pPr marL="0" indent="0">
                   <a:buNone/>
                 </a:pPr>
                 <a:r>
-                  <a:rPr lang="en-GB" dirty="0"/>
+                  <a:rPr lang="en-GB" sz="2400" dirty="0"/>
                   <a:t>Require values for torque, thrust and angular speed.</a:t>
                 </a:r>
               </a:p>
             </p:txBody>
           </p:sp>
         </mc:Choice>
-        <mc:Fallback xmlns="">
+        <mc:Fallback>
           <p:sp>
             <p:nvSpPr>
               <p:cNvPr id="3" name="Content Placeholder 2">
@@ -5194,13 +7559,13 @@
             </p:nvSpPr>
             <p:spPr>
               <a:xfrm>
-                <a:off x="838200" y="1633824"/>
-                <a:ext cx="10515600" cy="4860646"/>
+                <a:off x="1371599" y="2019300"/>
+                <a:ext cx="9724031" cy="3982255"/>
               </a:xfrm>
               <a:blipFill>
                 <a:blip r:embed="rId3"/>
                 <a:stretch>
-                  <a:fillRect l="-1217" t="-2133"/>
+                  <a:fillRect l="-940"/>
                 </a:stretch>
               </a:blipFill>
             </p:spPr>
@@ -5232,6 +7597,169 @@
 </p:sld>
 </file>
 
+<file path=ppt/slides/slide6.xml><?xml version="1.0" encoding="utf-8"?>
+<p:sld xmlns:a="http://schemas.openxmlformats.org/drawingml/2006/main" xmlns:r="http://schemas.openxmlformats.org/officeDocument/2006/relationships" xmlns:p="http://schemas.openxmlformats.org/presentationml/2006/main">
+  <p:cSld>
+    <p:spTree>
+      <p:nvGrpSpPr>
+        <p:cNvPr id="1" name=""/>
+        <p:cNvGrpSpPr/>
+        <p:nvPr/>
+      </p:nvGrpSpPr>
+      <p:grpSpPr>
+        <a:xfrm>
+          <a:off x="0" y="0"/>
+          <a:ext cx="0" cy="0"/>
+          <a:chOff x="0" y="0"/>
+          <a:chExt cx="0" cy="0"/>
+        </a:xfrm>
+      </p:grpSpPr>
+      <p:sp>
+        <p:nvSpPr>
+          <p:cNvPr id="2" name="Title 1">
+            <a:extLst>
+              <a:ext uri="{FF2B5EF4-FFF2-40B4-BE49-F238E27FC236}">
+                <a16:creationId xmlns:a16="http://schemas.microsoft.com/office/drawing/2014/main" id="{DD1D9AC5-0EC4-38D7-8E7D-41944460A213}"/>
+              </a:ext>
+            </a:extLst>
+          </p:cNvPr>
+          <p:cNvSpPr>
+            <a:spLocks noGrp="1"/>
+          </p:cNvSpPr>
+          <p:nvPr>
+            <p:ph type="title"/>
+          </p:nvPr>
+        </p:nvSpPr>
+        <p:spPr>
+          <a:xfrm>
+            <a:off x="614570" y="231946"/>
+            <a:ext cx="10515600" cy="1325563"/>
+          </a:xfrm>
+        </p:spPr>
+        <p:txBody>
+          <a:bodyPr/>
+          <a:lstStyle/>
+          <a:p>
+            <a:r>
+              <a:rPr lang="en-GB"/>
+              <a:t>Aerodynamic measurements</a:t>
+            </a:r>
+            <a:endParaRPr lang="en-GB" dirty="0"/>
+          </a:p>
+        </p:txBody>
+      </p:sp>
+      <p:sp>
+        <p:nvSpPr>
+          <p:cNvPr id="3" name="Content Placeholder 2">
+            <a:extLst>
+              <a:ext uri="{FF2B5EF4-FFF2-40B4-BE49-F238E27FC236}">
+                <a16:creationId xmlns:a16="http://schemas.microsoft.com/office/drawing/2014/main" id="{9C7375A3-69B7-413F-69EC-A8BA51B8A28B}"/>
+              </a:ext>
+            </a:extLst>
+          </p:cNvPr>
+          <p:cNvSpPr>
+            <a:spLocks noGrp="1"/>
+          </p:cNvSpPr>
+          <p:nvPr>
+            <p:ph idx="1"/>
+          </p:nvPr>
+        </p:nvSpPr>
+        <p:spPr>
+          <a:xfrm>
+            <a:off x="569845" y="1756051"/>
+            <a:ext cx="5304181" cy="4629840"/>
+          </a:xfrm>
+        </p:spPr>
+        <p:txBody>
+          <a:bodyPr>
+            <a:normAutofit/>
+          </a:bodyPr>
+          <a:lstStyle/>
+          <a:p>
+            <a:pPr marL="0" indent="0">
+              <a:buNone/>
+            </a:pPr>
+            <a:r>
+              <a:rPr lang="en-GB"/>
+              <a:t>Torque and thrust measured by strain gauge load cells</a:t>
+            </a:r>
+          </a:p>
+          <a:p>
+            <a:pPr marL="0" indent="0">
+              <a:buNone/>
+            </a:pPr>
+            <a:endParaRPr lang="en-GB"/>
+          </a:p>
+          <a:p>
+            <a:pPr marL="0" indent="0">
+              <a:buNone/>
+            </a:pPr>
+            <a:r>
+              <a:rPr lang="en-GB"/>
+              <a:t>Full bridge cantilever models selected for sensitivity and resistance to off-axis forces</a:t>
+            </a:r>
+          </a:p>
+          <a:p>
+            <a:pPr marL="0" indent="0">
+              <a:buNone/>
+            </a:pPr>
+            <a:endParaRPr lang="en-GB"/>
+          </a:p>
+          <a:p>
+            <a:pPr marL="0" indent="0">
+              <a:buNone/>
+            </a:pPr>
+            <a:r>
+              <a:rPr lang="en-GB"/>
+              <a:t>Orientation selected for accuracy, and ease of calibration</a:t>
+            </a:r>
+            <a:endParaRPr lang="en-GB" dirty="0"/>
+          </a:p>
+        </p:txBody>
+      </p:sp>
+      <p:pic>
+        <p:nvPicPr>
+          <p:cNvPr id="5" name="Picture 4">
+            <a:extLst>
+              <a:ext uri="{FF2B5EF4-FFF2-40B4-BE49-F238E27FC236}">
+                <a16:creationId xmlns:a16="http://schemas.microsoft.com/office/drawing/2014/main" id="{CF86DFC9-3FCE-4B2C-21D4-5096FA13A820}"/>
+              </a:ext>
+            </a:extLst>
+          </p:cNvPr>
+          <p:cNvPicPr>
+            <a:picLocks noChangeAspect="1"/>
+          </p:cNvPicPr>
+          <p:nvPr/>
+        </p:nvPicPr>
+        <p:blipFill>
+          <a:blip r:embed="rId3"/>
+          <a:stretch>
+            <a:fillRect/>
+          </a:stretch>
+        </p:blipFill>
+        <p:spPr>
+          <a:xfrm>
+            <a:off x="6524624" y="1236485"/>
+            <a:ext cx="5199557" cy="5360993"/>
+          </a:xfrm>
+          <a:prstGeom prst="rect">
+            <a:avLst/>
+          </a:prstGeom>
+        </p:spPr>
+      </p:pic>
+    </p:spTree>
+    <p:extLst>
+      <p:ext uri="{BB962C8B-B14F-4D97-AF65-F5344CB8AC3E}">
+        <p14:creationId xmlns:p14="http://schemas.microsoft.com/office/powerpoint/2010/main" val="2695031417"/>
+      </p:ext>
+    </p:extLst>
+  </p:cSld>
+  <p:clrMapOvr>
+    <a:masterClrMapping/>
+  </p:clrMapOvr>
+</p:sld>
+</file>
+
 <file path=ppt/slides/slide7.xml><?xml version="1.0" encoding="utf-8"?>
 <p:sld xmlns:a="http://schemas.openxmlformats.org/drawingml/2006/main" xmlns:r="http://schemas.openxmlformats.org/officeDocument/2006/relationships" xmlns:p="http://schemas.openxmlformats.org/presentationml/2006/main">
   <p:cSld>
@@ -5254,7 +7782,7 @@
           <p:cNvPr id="2" name="Title 1">
             <a:extLst>
               <a:ext uri="{FF2B5EF4-FFF2-40B4-BE49-F238E27FC236}">
-                <a16:creationId xmlns:a16="http://schemas.microsoft.com/office/drawing/2014/main" id="{DD1D9AC5-0EC4-38D7-8E7D-41944460A213}"/>
+                <a16:creationId xmlns:a16="http://schemas.microsoft.com/office/drawing/2014/main" id="{92553C29-8BE0-FA3F-BADF-EB4F5C5E7059}"/>
               </a:ext>
             </a:extLst>
           </p:cNvPr>
@@ -5263,45 +7791,40 @@
           </p:cNvSpPr>
           <p:nvPr>
             <p:ph type="title"/>
+          </p:nvPr>
+        </p:nvSpPr>
+        <p:spPr/>
+        <p:txBody>
+          <a:bodyPr/>
+          <a:lstStyle/>
+          <a:p>
+            <a:r>
+              <a:rPr lang="en-GB" dirty="0"/>
+              <a:t>Acoustic performance</a:t>
+            </a:r>
+          </a:p>
+        </p:txBody>
+      </p:sp>
+      <p:sp>
+        <p:nvSpPr>
+          <p:cNvPr id="3" name="Content Placeholder 2">
+            <a:extLst>
+              <a:ext uri="{FF2B5EF4-FFF2-40B4-BE49-F238E27FC236}">
+                <a16:creationId xmlns:a16="http://schemas.microsoft.com/office/drawing/2014/main" id="{5C5C9FEE-F51C-BBC5-5750-D5F85AFD1F9B}"/>
+              </a:ext>
+            </a:extLst>
+          </p:cNvPr>
+          <p:cNvSpPr>
+            <a:spLocks noGrp="1"/>
+          </p:cNvSpPr>
+          <p:nvPr>
+            <p:ph idx="1"/>
           </p:nvPr>
         </p:nvSpPr>
         <p:spPr>
           <a:xfrm>
-            <a:off x="614570" y="231946"/>
-            <a:ext cx="10515600" cy="1325563"/>
-          </a:xfrm>
-        </p:spPr>
-        <p:txBody>
-          <a:bodyPr/>
-          <a:lstStyle/>
-          <a:p>
-            <a:r>
-              <a:rPr lang="en-GB" dirty="0"/>
-              <a:t>Aerodynamic measurements</a:t>
-            </a:r>
-          </a:p>
-        </p:txBody>
-      </p:sp>
-      <p:sp>
-        <p:nvSpPr>
-          <p:cNvPr id="3" name="Content Placeholder 2">
-            <a:extLst>
-              <a:ext uri="{FF2B5EF4-FFF2-40B4-BE49-F238E27FC236}">
-                <a16:creationId xmlns:a16="http://schemas.microsoft.com/office/drawing/2014/main" id="{9C7375A3-69B7-413F-69EC-A8BA51B8A28B}"/>
-              </a:ext>
-            </a:extLst>
-          </p:cNvPr>
-          <p:cNvSpPr>
-            <a:spLocks noGrp="1"/>
-          </p:cNvSpPr>
-          <p:nvPr>
-            <p:ph idx="1"/>
-          </p:nvPr>
-        </p:nvSpPr>
-        <p:spPr>
-          <a:xfrm>
-            <a:off x="569845" y="1756051"/>
-            <a:ext cx="5304181" cy="4629840"/>
+            <a:off x="838200" y="1825624"/>
+            <a:ext cx="10515600" cy="4367785"/>
           </a:xfrm>
         </p:spPr>
         <p:txBody>
@@ -5315,7 +7838,7 @@
             </a:pPr>
             <a:r>
               <a:rPr lang="en-GB" dirty="0"/>
-              <a:t>Torque and thrust measured by strain gauge load cells</a:t>
+              <a:t>Can be separated into tonal and broadband.</a:t>
             </a:r>
           </a:p>
           <a:p>
@@ -5330,7 +7853,7 @@
             </a:pPr>
             <a:r>
               <a:rPr lang="en-GB" dirty="0"/>
-              <a:t>Full bridge cantilever models selected for sensitivity and resistance to off-axis forces</a:t>
+              <a:t>To quantify the perceived annoyance of sound, a psychoacoustic model must be considered</a:t>
             </a:r>
           </a:p>
           <a:p>
@@ -5344,57 +7867,16 @@
               <a:buNone/>
             </a:pPr>
             <a:r>
+              <a:rPr lang="en-US" dirty="0"/>
+              <a:t>Psychoacoustic annoyance can be quantified </a:t>
+            </a:r>
+            <a:r>
               <a:rPr lang="en-GB" dirty="0"/>
-              <a:t>Orientation selected for accuracy, and ease of calibration</a:t>
-            </a:r>
-          </a:p>
-        </p:txBody>
-      </p:sp>
-      <p:sp>
-        <p:nvSpPr>
-          <p:cNvPr id="7" name="Rectangle 6">
-            <a:extLst>
-              <a:ext uri="{FF2B5EF4-FFF2-40B4-BE49-F238E27FC236}">
-                <a16:creationId xmlns:a16="http://schemas.microsoft.com/office/drawing/2014/main" id="{CA5045A9-E972-F760-9683-4A4D6E4619BE}"/>
-              </a:ext>
-            </a:extLst>
-          </p:cNvPr>
-          <p:cNvSpPr/>
-          <p:nvPr/>
-        </p:nvSpPr>
-        <p:spPr>
-          <a:xfrm>
-            <a:off x="6157291" y="1232452"/>
-            <a:ext cx="5680213" cy="5317435"/>
-          </a:xfrm>
-          <a:prstGeom prst="rect">
-            <a:avLst/>
-          </a:prstGeom>
-        </p:spPr>
-        <p:style>
-          <a:lnRef idx="2">
-            <a:schemeClr val="accent1">
-              <a:shade val="15000"/>
-            </a:schemeClr>
-          </a:lnRef>
-          <a:fillRef idx="1">
-            <a:schemeClr val="accent1"/>
-          </a:fillRef>
-          <a:effectRef idx="0">
-            <a:schemeClr val="accent1"/>
-          </a:effectRef>
-          <a:fontRef idx="minor">
-            <a:schemeClr val="lt1"/>
-          </a:fontRef>
-        </p:style>
-        <p:txBody>
-          <a:bodyPr rtlCol="0" anchor="ctr"/>
-          <a:lstStyle/>
-          <a:p>
-            <a:pPr algn="ctr"/>
-            <a:r>
-              <a:rPr lang="en-GB" dirty="0"/>
-              <a:t>CAD</a:t>
+              <a:t>using Zwicker’s model which defines </a:t>
+            </a:r>
+            <a:r>
+              <a:rPr lang="en-US" dirty="0"/>
+              <a:t>metrics of loudness, fluctuation strength, roughness, sharpness.</a:t>
             </a:r>
           </a:p>
         </p:txBody>
@@ -5402,7 +7884,7 @@
     </p:spTree>
     <p:extLst>
       <p:ext uri="{BB962C8B-B14F-4D97-AF65-F5344CB8AC3E}">
-        <p14:creationId xmlns:p14="http://schemas.microsoft.com/office/powerpoint/2010/main" val="2695031417"/>
+        <p14:creationId xmlns:p14="http://schemas.microsoft.com/office/powerpoint/2010/main" val="1354065674"/>
       </p:ext>
     </p:extLst>
   </p:cSld>
@@ -5429,12 +7911,42 @@
           <a:chExt cx="0" cy="0"/>
         </a:xfrm>
       </p:grpSpPr>
+      <p:pic>
+        <p:nvPicPr>
+          <p:cNvPr id="5" name="Picture 4">
+            <a:extLst>
+              <a:ext uri="{FF2B5EF4-FFF2-40B4-BE49-F238E27FC236}">
+                <a16:creationId xmlns:a16="http://schemas.microsoft.com/office/drawing/2014/main" id="{DE22670F-0D71-AD7E-B183-43040CD2741A}"/>
+              </a:ext>
+            </a:extLst>
+          </p:cNvPr>
+          <p:cNvPicPr>
+            <a:picLocks noChangeAspect="1"/>
+          </p:cNvPicPr>
+          <p:nvPr/>
+        </p:nvPicPr>
+        <p:blipFill>
+          <a:blip r:embed="rId2"/>
+          <a:stretch>
+            <a:fillRect/>
+          </a:stretch>
+        </p:blipFill>
+        <p:spPr>
+          <a:xfrm>
+            <a:off x="5303978" y="447674"/>
+            <a:ext cx="6820194" cy="6175375"/>
+          </a:xfrm>
+          <a:prstGeom prst="rect">
+            <a:avLst/>
+          </a:prstGeom>
+        </p:spPr>
+      </p:pic>
       <p:sp>
         <p:nvSpPr>
           <p:cNvPr id="2" name="Title 1">
             <a:extLst>
               <a:ext uri="{FF2B5EF4-FFF2-40B4-BE49-F238E27FC236}">
-                <a16:creationId xmlns:a16="http://schemas.microsoft.com/office/drawing/2014/main" id="{92553C29-8BE0-FA3F-BADF-EB4F5C5E7059}"/>
+                <a16:creationId xmlns:a16="http://schemas.microsoft.com/office/drawing/2014/main" id="{31AA5FBC-085C-6F67-FFE6-B768D4CC0250}"/>
               </a:ext>
             </a:extLst>
           </p:cNvPr>
@@ -5445,79 +7957,130 @@
             <p:ph type="title"/>
           </p:nvPr>
         </p:nvSpPr>
-        <p:spPr/>
+        <p:spPr>
+          <a:xfrm>
+            <a:off x="438150" y="155575"/>
+            <a:ext cx="10515600" cy="1325563"/>
+          </a:xfrm>
+        </p:spPr>
         <p:txBody>
           <a:bodyPr/>
           <a:lstStyle/>
           <a:p>
             <a:r>
               <a:rPr lang="en-GB" dirty="0"/>
-              <a:t>Acoustic performance</a:t>
-            </a:r>
-          </a:p>
-        </p:txBody>
-      </p:sp>
-      <p:sp>
-        <p:nvSpPr>
-          <p:cNvPr id="3" name="Content Placeholder 2">
-            <a:extLst>
-              <a:ext uri="{FF2B5EF4-FFF2-40B4-BE49-F238E27FC236}">
-                <a16:creationId xmlns:a16="http://schemas.microsoft.com/office/drawing/2014/main" id="{5C5C9FEE-F51C-BBC5-5750-D5F85AFD1F9B}"/>
-              </a:ext>
-            </a:extLst>
-          </p:cNvPr>
-          <p:cNvSpPr>
-            <a:spLocks noGrp="1"/>
-          </p:cNvSpPr>
-          <p:nvPr>
-            <p:ph idx="1"/>
-          </p:nvPr>
-        </p:nvSpPr>
-        <p:spPr/>
-        <p:txBody>
-          <a:bodyPr>
-            <a:normAutofit/>
-          </a:bodyPr>
-          <a:lstStyle/>
-          <a:p>
-            <a:pPr marL="0" indent="0">
-              <a:buNone/>
-            </a:pPr>
-            <a:r>
-              <a:rPr lang="en-GB" dirty="0"/>
-              <a:t>To quantify the annoyance of sound the psychoacoustics must be considered</a:t>
-            </a:r>
-          </a:p>
-          <a:p>
-            <a:pPr marL="0" indent="0">
-              <a:buNone/>
-            </a:pPr>
-            <a:endParaRPr lang="en-GB" dirty="0"/>
-          </a:p>
-          <a:p>
-            <a:pPr marL="0" indent="0">
-              <a:buNone/>
-            </a:pPr>
-            <a:r>
-              <a:rPr lang="en-GB" dirty="0"/>
-              <a:t>P</a:t>
-            </a:r>
-            <a:r>
-              <a:rPr lang="en-US" dirty="0" err="1"/>
-              <a:t>sychoacoustic</a:t>
-            </a:r>
-            <a:r>
-              <a:rPr lang="en-US" dirty="0"/>
-              <a:t> metrics of loudness, fluctuation strength, roughness, sharpness, tonality</a:t>
-            </a:r>
-            <a:endParaRPr lang="en-GB" dirty="0"/>
-          </a:p>
-        </p:txBody>
-      </p:sp>
+              <a:t>Acoustic measurements</a:t>
+            </a:r>
+          </a:p>
+        </p:txBody>
+      </p:sp>
+      <mc:AlternateContent xmlns:mc="http://schemas.openxmlformats.org/markup-compatibility/2006">
+        <mc:Choice xmlns:a14="http://schemas.microsoft.com/office/drawing/2010/main" Requires="a14">
+          <p:sp>
+            <p:nvSpPr>
+              <p:cNvPr id="7" name="TextBox 6">
+                <a:extLst>
+                  <a:ext uri="{FF2B5EF4-FFF2-40B4-BE49-F238E27FC236}">
+                    <a16:creationId xmlns:a16="http://schemas.microsoft.com/office/drawing/2014/main" id="{5FE54BC4-6E6B-11A7-1B30-9A93B0ACC3A4}"/>
+                  </a:ext>
+                </a:extLst>
+              </p:cNvPr>
+              <p:cNvSpPr txBox="1"/>
+              <p:nvPr/>
+            </p:nvSpPr>
+            <p:spPr>
+              <a:xfrm rot="2674917">
+                <a:off x="7101426" y="3867428"/>
+                <a:ext cx="675686" cy="369332"/>
+              </a:xfrm>
+              <a:prstGeom prst="rect">
+                <a:avLst/>
+              </a:prstGeom>
+              <a:solidFill>
+                <a:schemeClr val="bg1"/>
+              </a:solidFill>
+            </p:spPr>
+            <p:txBody>
+              <a:bodyPr wrap="square" rtlCol="0">
+                <a:spAutoFit/>
+              </a:bodyPr>
+              <a:lstStyle/>
+              <a:p>
+                <a14:m>
+                  <m:oMathPara xmlns:m="http://schemas.openxmlformats.org/officeDocument/2006/math">
+                    <m:oMathParaPr>
+                      <m:jc m:val="centerGroup"/>
+                    </m:oMathParaPr>
+                    <m:oMath xmlns:m="http://schemas.openxmlformats.org/officeDocument/2006/math">
+                      <m:r>
+                        <a:rPr lang="en-GB" b="0" i="1" smtClean="0">
+                          <a:latin typeface="Cambria Math" panose="02040503050406030204" pitchFamily="18" charset="0"/>
+                        </a:rPr>
+                        <m:t>2.5</m:t>
+                      </m:r>
+                      <m:r>
+                        <a:rPr lang="en-GB" b="0" i="1" smtClean="0">
+                          <a:latin typeface="Cambria Math" panose="02040503050406030204" pitchFamily="18" charset="0"/>
+                        </a:rPr>
+                        <m:t>𝑑</m:t>
+                      </m:r>
+                    </m:oMath>
+                  </m:oMathPara>
+                </a14:m>
+                <a:endParaRPr lang="en-GB" dirty="0"/>
+              </a:p>
+            </p:txBody>
+          </p:sp>
+        </mc:Choice>
+        <mc:Fallback>
+          <p:sp>
+            <p:nvSpPr>
+              <p:cNvPr id="7" name="TextBox 6">
+                <a:extLst>
+                  <a:ext uri="{FF2B5EF4-FFF2-40B4-BE49-F238E27FC236}">
+                    <a16:creationId xmlns:a16="http://schemas.microsoft.com/office/drawing/2014/main" id="{5FE54BC4-6E6B-11A7-1B30-9A93B0ACC3A4}"/>
+                  </a:ext>
+                </a:extLst>
+              </p:cNvPr>
+              <p:cNvSpPr txBox="1">
+                <a:spLocks noRot="1" noChangeAspect="1" noMove="1" noResize="1" noEditPoints="1" noAdjustHandles="1" noChangeArrowheads="1" noChangeShapeType="1" noTextEdit="1"/>
+              </p:cNvSpPr>
+              <p:nvPr/>
+            </p:nvSpPr>
+            <p:spPr>
+              <a:xfrm rot="2674917">
+                <a:off x="7101426" y="3867428"/>
+                <a:ext cx="675686" cy="369332"/>
+              </a:xfrm>
+              <a:prstGeom prst="rect">
+                <a:avLst/>
+              </a:prstGeom>
+              <a:blipFill>
+                <a:blip r:embed="rId3"/>
+                <a:stretch>
+                  <a:fillRect/>
+                </a:stretch>
+              </a:blipFill>
+            </p:spPr>
+            <p:txBody>
+              <a:bodyPr/>
+              <a:lstStyle/>
+              <a:p>
+                <a:r>
+                  <a:rPr lang="en-GB">
+                    <a:noFill/>
+                  </a:rPr>
+                  <a:t> </a:t>
+                </a:r>
+              </a:p>
+            </p:txBody>
+          </p:sp>
+        </mc:Fallback>
+      </mc:AlternateContent>
     </p:spTree>
     <p:extLst>
       <p:ext uri="{BB962C8B-B14F-4D97-AF65-F5344CB8AC3E}">
-        <p14:creationId xmlns:p14="http://schemas.microsoft.com/office/powerpoint/2010/main" val="1354065674"/>
+        <p14:creationId xmlns:p14="http://schemas.microsoft.com/office/powerpoint/2010/main" val="3386808046"/>
       </p:ext>
     </p:extLst>
   </p:cSld>

--- a/deliverables/michaelmas_presentation.pptx
+++ b/deliverables/michaelmas_presentation.pptx
@@ -5,18 +5,20 @@
     <p:sldMasterId id="2147483648" r:id="rId1"/>
   </p:sldMasterIdLst>
   <p:notesMasterIdLst>
-    <p:notesMasterId r:id="rId11"/>
+    <p:notesMasterId r:id="rId13"/>
   </p:notesMasterIdLst>
   <p:sldIdLst>
     <p:sldId id="256" r:id="rId2"/>
     <p:sldId id="257" r:id="rId3"/>
     <p:sldId id="265" r:id="rId4"/>
-    <p:sldId id="258" r:id="rId5"/>
-    <p:sldId id="261" r:id="rId6"/>
-    <p:sldId id="263" r:id="rId7"/>
-    <p:sldId id="264" r:id="rId8"/>
-    <p:sldId id="266" r:id="rId9"/>
-    <p:sldId id="262" r:id="rId10"/>
+    <p:sldId id="267" r:id="rId5"/>
+    <p:sldId id="258" r:id="rId6"/>
+    <p:sldId id="261" r:id="rId7"/>
+    <p:sldId id="263" r:id="rId8"/>
+    <p:sldId id="264" r:id="rId9"/>
+    <p:sldId id="266" r:id="rId10"/>
+    <p:sldId id="268" r:id="rId11"/>
+    <p:sldId id="262" r:id="rId12"/>
   </p:sldIdLst>
   <p:sldSz cx="12192000" cy="6858000"/>
   <p:notesSz cx="6858000" cy="9144000"/>
@@ -205,7 +207,7 @@
           <a:p>
             <a:fld id="{C0BB89D3-1E85-48CA-BFDB-0FE03B3C9B40}" type="datetimeFigureOut">
               <a:rPr lang="en-GB" smtClean="0"/>
-              <a:t>25/11/2024</a:t>
+              <a:t>26/11/2024</a:t>
             </a:fld>
             <a:endParaRPr lang="en-GB"/>
           </a:p>
@@ -601,7 +603,39 @@
           <a:bodyPr/>
           <a:lstStyle/>
           <a:p>
-            <a:endParaRPr lang="en-GB" dirty="0"/>
+            <a:r>
+              <a:rPr lang="en-GB" dirty="0"/>
+              <a:t>The noise made by drones acts as a barrier to their wider adoption for drone-based services such as logistics, surveying and mapping.</a:t>
+            </a:r>
+          </a:p>
+          <a:p>
+            <a:r>
+              <a:rPr lang="en-GB" dirty="0"/>
+              <a:t>The propellers of drones make up a small fraction of their cost, but efficient designs are important for productivity such as payload and flight time.</a:t>
+            </a:r>
+          </a:p>
+          <a:p>
+            <a:pPr marL="0" marR="0" lvl="0" indent="0" algn="l" defTabSz="914400" rtl="0" eaLnBrk="1" fontAlgn="auto" latinLnBrk="0" hangingPunct="1">
+              <a:lnSpc>
+                <a:spcPct val="100000"/>
+              </a:lnSpc>
+              <a:spcBef>
+                <a:spcPts val="0"/>
+              </a:spcBef>
+              <a:spcAft>
+                <a:spcPts val="0"/>
+              </a:spcAft>
+              <a:buClrTx/>
+              <a:buSzTx/>
+              <a:buFontTx/>
+              <a:buNone/>
+              <a:tabLst/>
+              <a:defRPr/>
+            </a:pPr>
+            <a:r>
+              <a:rPr lang="en-GB" dirty="0"/>
+              <a:t>Future legislation will likely require small and reliable drones with many propellers for redundancy.</a:t>
+            </a:r>
           </a:p>
         </p:txBody>
       </p:sp>
@@ -690,6 +724,30 @@
               <a:t>Of course this isn’t a new topic </a:t>
             </a:r>
           </a:p>
+          <a:p>
+            <a:r>
+              <a:rPr lang="en-GB" dirty="0"/>
+              <a:t>Previous research has covered changes to tip geometry which has reduced tonality from tip vortex blade interaction.</a:t>
+            </a:r>
+          </a:p>
+          <a:p>
+            <a:r>
+              <a:rPr lang="en-GB" dirty="0"/>
+              <a:t>Blade sweep was found to have little affect</a:t>
+            </a:r>
+          </a:p>
+          <a:p>
+            <a:r>
+              <a:rPr lang="en-GB" dirty="0"/>
+              <a:t>Variable blade spacing and trailing edge serrations reduced the broadband noise by destructive acoustic interference and mixing</a:t>
+            </a:r>
+          </a:p>
+          <a:p>
+            <a:r>
+              <a:rPr lang="en-GB" dirty="0"/>
+              <a:t>It's also worth noting that these trailing edge serrations at low Reynolds numbers were inspired by owl wings.</a:t>
+            </a:r>
+          </a:p>
         </p:txBody>
       </p:sp>
       <p:sp>
@@ -774,13 +832,7 @@
           <a:p>
             <a:r>
               <a:rPr lang="en-GB" dirty="0"/>
-              <a:t>For the experimental setup it's important to consider the parameters needed to define a given propellers performance. Dimensionless thrust and power coefficients can be found from blade tip speed and area. The ratio of these coefficients define a ‘static’ efficiency which is different to the typical propulsive efficiency. The values then required to be measured are the torque, thrust and angular speed.</a:t>
-            </a:r>
-          </a:p>
-          <a:p>
-            <a:r>
-              <a:rPr lang="en-GB" dirty="0"/>
-              <a:t>Dynamic measurements of torque and angular velocity could be fused together in a Kalman filter</a:t>
+              <a:t>The key designs considered in this project will be uneven blade span and toroidal on the right.</a:t>
             </a:r>
           </a:p>
         </p:txBody>
@@ -802,7 +854,7 @@
           <a:p>
             <a:fld id="{339AB5C0-8D71-4250-8AD2-76EE22722959}" type="slidenum">
               <a:rPr lang="en-GB" smtClean="0"/>
-              <a:t>5</a:t>
+              <a:t>4</a:t>
             </a:fld>
             <a:endParaRPr lang="en-GB"/>
           </a:p>
@@ -811,7 +863,7 @@
     </p:spTree>
     <p:extLst>
       <p:ext uri="{BB962C8B-B14F-4D97-AF65-F5344CB8AC3E}">
-        <p14:creationId xmlns:p14="http://schemas.microsoft.com/office/powerpoint/2010/main" val="1790782265"/>
+        <p14:creationId xmlns:p14="http://schemas.microsoft.com/office/powerpoint/2010/main" val="399730149"/>
       </p:ext>
     </p:extLst>
   </p:cSld>
@@ -867,13 +919,100 @@
           <a:p>
             <a:r>
               <a:rPr lang="en-GB" dirty="0"/>
-              <a:t>To measure torque and thrust the deflection of load cells will be measured by strain gauges. This was chosen over null force balancing methods for its simple setup and sufficient accuracy.</a:t>
+              <a:t>The objectives of this project are to design and build an experimental setup to measure aerodynamic and aeroacoustics performance.</a:t>
             </a:r>
           </a:p>
           <a:p>
             <a:r>
               <a:rPr lang="en-GB" dirty="0"/>
-              <a:t>Full bridge load cell refers to 4 strain gauges in the Wheatstone bridge which compensates for off axis forces.</a:t>
+              <a:t>This will be done for varying propeller geometry</a:t>
+            </a:r>
+          </a:p>
+        </p:txBody>
+      </p:sp>
+      <p:sp>
+        <p:nvSpPr>
+          <p:cNvPr id="4" name="Slide Number Placeholder 3"/>
+          <p:cNvSpPr>
+            <a:spLocks noGrp="1"/>
+          </p:cNvSpPr>
+          <p:nvPr>
+            <p:ph type="sldNum" sz="quarter" idx="5"/>
+          </p:nvPr>
+        </p:nvSpPr>
+        <p:spPr/>
+        <p:txBody>
+          <a:bodyPr/>
+          <a:lstStyle/>
+          <a:p>
+            <a:fld id="{339AB5C0-8D71-4250-8AD2-76EE22722959}" type="slidenum">
+              <a:rPr lang="en-GB" smtClean="0"/>
+              <a:t>5</a:t>
+            </a:fld>
+            <a:endParaRPr lang="en-GB"/>
+          </a:p>
+        </p:txBody>
+      </p:sp>
+    </p:spTree>
+    <p:extLst>
+      <p:ext uri="{BB962C8B-B14F-4D97-AF65-F5344CB8AC3E}">
+        <p14:creationId xmlns:p14="http://schemas.microsoft.com/office/powerpoint/2010/main" val="2282649506"/>
+      </p:ext>
+    </p:extLst>
+  </p:cSld>
+  <p:clrMapOvr>
+    <a:masterClrMapping/>
+  </p:clrMapOvr>
+</p:notes>
+</file>
+
+<file path=ppt/notesSlides/notesSlide6.xml><?xml version="1.0" encoding="utf-8"?>
+<p:notes xmlns:a="http://schemas.openxmlformats.org/drawingml/2006/main" xmlns:r="http://schemas.openxmlformats.org/officeDocument/2006/relationships" xmlns:p="http://schemas.openxmlformats.org/presentationml/2006/main">
+  <p:cSld>
+    <p:spTree>
+      <p:nvGrpSpPr>
+        <p:cNvPr id="1" name=""/>
+        <p:cNvGrpSpPr/>
+        <p:nvPr/>
+      </p:nvGrpSpPr>
+      <p:grpSpPr>
+        <a:xfrm>
+          <a:off x="0" y="0"/>
+          <a:ext cx="0" cy="0"/>
+          <a:chOff x="0" y="0"/>
+          <a:chExt cx="0" cy="0"/>
+        </a:xfrm>
+      </p:grpSpPr>
+      <p:sp>
+        <p:nvSpPr>
+          <p:cNvPr id="2" name="Slide Image Placeholder 1"/>
+          <p:cNvSpPr>
+            <a:spLocks noGrp="1" noRot="1" noChangeAspect="1"/>
+          </p:cNvSpPr>
+          <p:nvPr>
+            <p:ph type="sldImg"/>
+          </p:nvPr>
+        </p:nvSpPr>
+        <p:spPr/>
+      </p:sp>
+      <p:sp>
+        <p:nvSpPr>
+          <p:cNvPr id="3" name="Notes Placeholder 2"/>
+          <p:cNvSpPr>
+            <a:spLocks noGrp="1"/>
+          </p:cNvSpPr>
+          <p:nvPr>
+            <p:ph type="body" idx="1"/>
+          </p:nvPr>
+        </p:nvSpPr>
+        <p:spPr/>
+        <p:txBody>
+          <a:bodyPr/>
+          <a:lstStyle/>
+          <a:p>
+            <a:r>
+              <a:rPr lang="en-GB" dirty="0"/>
+              <a:t>For the experimental setup it's important to consider the parameters needed to define a given propellers performance. Dimensionless thrust and power coefficients can be found from blade tip speed and area. The ratio of these coefficients define a ‘static’ efficiency which is different to the typical propulsive efficiency. The values then required to be measured are the torque, thrust and angular speed.</a:t>
             </a:r>
           </a:p>
           <a:p>
@@ -907,7 +1046,271 @@
     </p:spTree>
     <p:extLst>
       <p:ext uri="{BB962C8B-B14F-4D97-AF65-F5344CB8AC3E}">
+        <p14:creationId xmlns:p14="http://schemas.microsoft.com/office/powerpoint/2010/main" val="1790782265"/>
+      </p:ext>
+    </p:extLst>
+  </p:cSld>
+  <p:clrMapOvr>
+    <a:masterClrMapping/>
+  </p:clrMapOvr>
+</p:notes>
+</file>
+
+<file path=ppt/notesSlides/notesSlide7.xml><?xml version="1.0" encoding="utf-8"?>
+<p:notes xmlns:a="http://schemas.openxmlformats.org/drawingml/2006/main" xmlns:r="http://schemas.openxmlformats.org/officeDocument/2006/relationships" xmlns:p="http://schemas.openxmlformats.org/presentationml/2006/main">
+  <p:cSld>
+    <p:spTree>
+      <p:nvGrpSpPr>
+        <p:cNvPr id="1" name=""/>
+        <p:cNvGrpSpPr/>
+        <p:nvPr/>
+      </p:nvGrpSpPr>
+      <p:grpSpPr>
+        <a:xfrm>
+          <a:off x="0" y="0"/>
+          <a:ext cx="0" cy="0"/>
+          <a:chOff x="0" y="0"/>
+          <a:chExt cx="0" cy="0"/>
+        </a:xfrm>
+      </p:grpSpPr>
+      <p:sp>
+        <p:nvSpPr>
+          <p:cNvPr id="2" name="Slide Image Placeholder 1"/>
+          <p:cNvSpPr>
+            <a:spLocks noGrp="1" noRot="1" noChangeAspect="1"/>
+          </p:cNvSpPr>
+          <p:nvPr>
+            <p:ph type="sldImg"/>
+          </p:nvPr>
+        </p:nvSpPr>
+        <p:spPr/>
+      </p:sp>
+      <p:sp>
+        <p:nvSpPr>
+          <p:cNvPr id="3" name="Notes Placeholder 2"/>
+          <p:cNvSpPr>
+            <a:spLocks noGrp="1"/>
+          </p:cNvSpPr>
+          <p:nvPr>
+            <p:ph type="body" idx="1"/>
+          </p:nvPr>
+        </p:nvSpPr>
+        <p:spPr/>
+        <p:txBody>
+          <a:bodyPr/>
+          <a:lstStyle/>
+          <a:p>
+            <a:r>
+              <a:rPr lang="en-GB" dirty="0"/>
+              <a:t>To measure torque and thrust the deflection of load cells will be measured by strain gauges. This was chosen over null force balancing methods for its simple setup and sufficient accuracy.</a:t>
+            </a:r>
+          </a:p>
+          <a:p>
+            <a:r>
+              <a:rPr lang="en-GB" dirty="0"/>
+              <a:t>Full bridge load cell refers to 4 strain gauges in the Wheatstone bridge which can compensate for off axis forces.</a:t>
+            </a:r>
+          </a:p>
+          <a:p>
+            <a:endParaRPr lang="en-GB" dirty="0"/>
+          </a:p>
+        </p:txBody>
+      </p:sp>
+      <p:sp>
+        <p:nvSpPr>
+          <p:cNvPr id="4" name="Slide Number Placeholder 3"/>
+          <p:cNvSpPr>
+            <a:spLocks noGrp="1"/>
+          </p:cNvSpPr>
+          <p:nvPr>
+            <p:ph type="sldNum" sz="quarter" idx="5"/>
+          </p:nvPr>
+        </p:nvSpPr>
+        <p:spPr/>
+        <p:txBody>
+          <a:bodyPr/>
+          <a:lstStyle/>
+          <a:p>
+            <a:fld id="{339AB5C0-8D71-4250-8AD2-76EE22722959}" type="slidenum">
+              <a:rPr lang="en-GB" smtClean="0"/>
+              <a:t>7</a:t>
+            </a:fld>
+            <a:endParaRPr lang="en-GB"/>
+          </a:p>
+        </p:txBody>
+      </p:sp>
+    </p:spTree>
+    <p:extLst>
+      <p:ext uri="{BB962C8B-B14F-4D97-AF65-F5344CB8AC3E}">
         <p14:creationId xmlns:p14="http://schemas.microsoft.com/office/powerpoint/2010/main" val="1624805185"/>
+      </p:ext>
+    </p:extLst>
+  </p:cSld>
+  <p:clrMapOvr>
+    <a:masterClrMapping/>
+  </p:clrMapOvr>
+</p:notes>
+</file>
+
+<file path=ppt/notesSlides/notesSlide8.xml><?xml version="1.0" encoding="utf-8"?>
+<p:notes xmlns:a="http://schemas.openxmlformats.org/drawingml/2006/main" xmlns:r="http://schemas.openxmlformats.org/officeDocument/2006/relationships" xmlns:p="http://schemas.openxmlformats.org/presentationml/2006/main">
+  <p:cSld>
+    <p:spTree>
+      <p:nvGrpSpPr>
+        <p:cNvPr id="1" name=""/>
+        <p:cNvGrpSpPr/>
+        <p:nvPr/>
+      </p:nvGrpSpPr>
+      <p:grpSpPr>
+        <a:xfrm>
+          <a:off x="0" y="0"/>
+          <a:ext cx="0" cy="0"/>
+          <a:chOff x="0" y="0"/>
+          <a:chExt cx="0" cy="0"/>
+        </a:xfrm>
+      </p:grpSpPr>
+      <p:sp>
+        <p:nvSpPr>
+          <p:cNvPr id="2" name="Slide Image Placeholder 1"/>
+          <p:cNvSpPr>
+            <a:spLocks noGrp="1" noRot="1" noChangeAspect="1"/>
+          </p:cNvSpPr>
+          <p:nvPr>
+            <p:ph type="sldImg"/>
+          </p:nvPr>
+        </p:nvSpPr>
+        <p:spPr/>
+      </p:sp>
+      <p:sp>
+        <p:nvSpPr>
+          <p:cNvPr id="3" name="Notes Placeholder 2"/>
+          <p:cNvSpPr>
+            <a:spLocks noGrp="1"/>
+          </p:cNvSpPr>
+          <p:nvPr>
+            <p:ph type="body" idx="1"/>
+          </p:nvPr>
+        </p:nvSpPr>
+        <p:spPr/>
+        <p:txBody>
+          <a:bodyPr/>
+          <a:lstStyle/>
+          <a:p>
+            <a:endParaRPr lang="en-GB" dirty="0"/>
+          </a:p>
+        </p:txBody>
+      </p:sp>
+      <p:sp>
+        <p:nvSpPr>
+          <p:cNvPr id="4" name="Slide Number Placeholder 3"/>
+          <p:cNvSpPr>
+            <a:spLocks noGrp="1"/>
+          </p:cNvSpPr>
+          <p:nvPr>
+            <p:ph type="sldNum" sz="quarter" idx="5"/>
+          </p:nvPr>
+        </p:nvSpPr>
+        <p:spPr/>
+        <p:txBody>
+          <a:bodyPr/>
+          <a:lstStyle/>
+          <a:p>
+            <a:fld id="{339AB5C0-8D71-4250-8AD2-76EE22722959}" type="slidenum">
+              <a:rPr lang="en-GB" smtClean="0"/>
+              <a:t>8</a:t>
+            </a:fld>
+            <a:endParaRPr lang="en-GB"/>
+          </a:p>
+        </p:txBody>
+      </p:sp>
+    </p:spTree>
+    <p:extLst>
+      <p:ext uri="{BB962C8B-B14F-4D97-AF65-F5344CB8AC3E}">
+        <p14:creationId xmlns:p14="http://schemas.microsoft.com/office/powerpoint/2010/main" val="1226897306"/>
+      </p:ext>
+    </p:extLst>
+  </p:cSld>
+  <p:clrMapOvr>
+    <a:masterClrMapping/>
+  </p:clrMapOvr>
+</p:notes>
+</file>
+
+<file path=ppt/notesSlides/notesSlide9.xml><?xml version="1.0" encoding="utf-8"?>
+<p:notes xmlns:a="http://schemas.openxmlformats.org/drawingml/2006/main" xmlns:r="http://schemas.openxmlformats.org/officeDocument/2006/relationships" xmlns:p="http://schemas.openxmlformats.org/presentationml/2006/main">
+  <p:cSld>
+    <p:spTree>
+      <p:nvGrpSpPr>
+        <p:cNvPr id="1" name=""/>
+        <p:cNvGrpSpPr/>
+        <p:nvPr/>
+      </p:nvGrpSpPr>
+      <p:grpSpPr>
+        <a:xfrm>
+          <a:off x="0" y="0"/>
+          <a:ext cx="0" cy="0"/>
+          <a:chOff x="0" y="0"/>
+          <a:chExt cx="0" cy="0"/>
+        </a:xfrm>
+      </p:grpSpPr>
+      <p:sp>
+        <p:nvSpPr>
+          <p:cNvPr id="2" name="Slide Image Placeholder 1"/>
+          <p:cNvSpPr>
+            <a:spLocks noGrp="1" noRot="1" noChangeAspect="1"/>
+          </p:cNvSpPr>
+          <p:nvPr>
+            <p:ph type="sldImg"/>
+          </p:nvPr>
+        </p:nvSpPr>
+        <p:spPr/>
+      </p:sp>
+      <p:sp>
+        <p:nvSpPr>
+          <p:cNvPr id="3" name="Notes Placeholder 2"/>
+          <p:cNvSpPr>
+            <a:spLocks noGrp="1"/>
+          </p:cNvSpPr>
+          <p:nvPr>
+            <p:ph type="body" idx="1"/>
+          </p:nvPr>
+        </p:nvSpPr>
+        <p:spPr/>
+        <p:txBody>
+          <a:bodyPr/>
+          <a:lstStyle/>
+          <a:p>
+            <a:endParaRPr lang="en-GB" dirty="0"/>
+          </a:p>
+        </p:txBody>
+      </p:sp>
+      <p:sp>
+        <p:nvSpPr>
+          <p:cNvPr id="4" name="Slide Number Placeholder 3"/>
+          <p:cNvSpPr>
+            <a:spLocks noGrp="1"/>
+          </p:cNvSpPr>
+          <p:nvPr>
+            <p:ph type="sldNum" sz="quarter" idx="5"/>
+          </p:nvPr>
+        </p:nvSpPr>
+        <p:spPr/>
+        <p:txBody>
+          <a:bodyPr/>
+          <a:lstStyle/>
+          <a:p>
+            <a:fld id="{339AB5C0-8D71-4250-8AD2-76EE22722959}" type="slidenum">
+              <a:rPr lang="en-GB" smtClean="0"/>
+              <a:t>9</a:t>
+            </a:fld>
+            <a:endParaRPr lang="en-GB"/>
+          </a:p>
+        </p:txBody>
+      </p:sp>
+    </p:spTree>
+    <p:extLst>
+      <p:ext uri="{BB962C8B-B14F-4D97-AF65-F5344CB8AC3E}">
+        <p14:creationId xmlns:p14="http://schemas.microsoft.com/office/powerpoint/2010/main" val="3832086078"/>
       </p:ext>
     </p:extLst>
   </p:cSld>
@@ -1066,7 +1469,7 @@
           <a:p>
             <a:fld id="{B8C3C57F-C92A-483E-A8E5-2F94B59C9323}" type="datetimeFigureOut">
               <a:rPr lang="en-GB" smtClean="0"/>
-              <a:t>25/11/2024</a:t>
+              <a:t>26/11/2024</a:t>
             </a:fld>
             <a:endParaRPr lang="en-GB"/>
           </a:p>
@@ -1266,7 +1669,7 @@
           <a:p>
             <a:fld id="{B8C3C57F-C92A-483E-A8E5-2F94B59C9323}" type="datetimeFigureOut">
               <a:rPr lang="en-GB" smtClean="0"/>
-              <a:t>25/11/2024</a:t>
+              <a:t>26/11/2024</a:t>
             </a:fld>
             <a:endParaRPr lang="en-GB"/>
           </a:p>
@@ -1476,7 +1879,7 @@
           <a:p>
             <a:fld id="{B8C3C57F-C92A-483E-A8E5-2F94B59C9323}" type="datetimeFigureOut">
               <a:rPr lang="en-GB" smtClean="0"/>
-              <a:t>25/11/2024</a:t>
+              <a:t>26/11/2024</a:t>
             </a:fld>
             <a:endParaRPr lang="en-GB"/>
           </a:p>
@@ -1676,7 +2079,7 @@
           <a:p>
             <a:fld id="{B8C3C57F-C92A-483E-A8E5-2F94B59C9323}" type="datetimeFigureOut">
               <a:rPr lang="en-GB" smtClean="0"/>
-              <a:t>25/11/2024</a:t>
+              <a:t>26/11/2024</a:t>
             </a:fld>
             <a:endParaRPr lang="en-GB"/>
           </a:p>
@@ -1952,7 +2355,7 @@
           <a:p>
             <a:fld id="{B8C3C57F-C92A-483E-A8E5-2F94B59C9323}" type="datetimeFigureOut">
               <a:rPr lang="en-GB" smtClean="0"/>
-              <a:t>25/11/2024</a:t>
+              <a:t>26/11/2024</a:t>
             </a:fld>
             <a:endParaRPr lang="en-GB"/>
           </a:p>
@@ -2220,7 +2623,7 @@
           <a:p>
             <a:fld id="{B8C3C57F-C92A-483E-A8E5-2F94B59C9323}" type="datetimeFigureOut">
               <a:rPr lang="en-GB" smtClean="0"/>
-              <a:t>25/11/2024</a:t>
+              <a:t>26/11/2024</a:t>
             </a:fld>
             <a:endParaRPr lang="en-GB"/>
           </a:p>
@@ -2635,7 +3038,7 @@
           <a:p>
             <a:fld id="{B8C3C57F-C92A-483E-A8E5-2F94B59C9323}" type="datetimeFigureOut">
               <a:rPr lang="en-GB" smtClean="0"/>
-              <a:t>25/11/2024</a:t>
+              <a:t>26/11/2024</a:t>
             </a:fld>
             <a:endParaRPr lang="en-GB"/>
           </a:p>
@@ -2777,7 +3180,7 @@
           <a:p>
             <a:fld id="{B8C3C57F-C92A-483E-A8E5-2F94B59C9323}" type="datetimeFigureOut">
               <a:rPr lang="en-GB" smtClean="0"/>
-              <a:t>25/11/2024</a:t>
+              <a:t>26/11/2024</a:t>
             </a:fld>
             <a:endParaRPr lang="en-GB"/>
           </a:p>
@@ -2890,7 +3293,7 @@
           <a:p>
             <a:fld id="{B8C3C57F-C92A-483E-A8E5-2F94B59C9323}" type="datetimeFigureOut">
               <a:rPr lang="en-GB" smtClean="0"/>
-              <a:t>25/11/2024</a:t>
+              <a:t>26/11/2024</a:t>
             </a:fld>
             <a:endParaRPr lang="en-GB"/>
           </a:p>
@@ -3203,7 +3606,7 @@
           <a:p>
             <a:fld id="{B8C3C57F-C92A-483E-A8E5-2F94B59C9323}" type="datetimeFigureOut">
               <a:rPr lang="en-GB" smtClean="0"/>
-              <a:t>25/11/2024</a:t>
+              <a:t>26/11/2024</a:t>
             </a:fld>
             <a:endParaRPr lang="en-GB"/>
           </a:p>
@@ -3492,7 +3895,7 @@
           <a:p>
             <a:fld id="{B8C3C57F-C92A-483E-A8E5-2F94B59C9323}" type="datetimeFigureOut">
               <a:rPr lang="en-GB" smtClean="0"/>
-              <a:t>25/11/2024</a:t>
+              <a:t>26/11/2024</a:t>
             </a:fld>
             <a:endParaRPr lang="en-GB"/>
           </a:p>
@@ -3735,7 +4138,7 @@
           <a:p>
             <a:fld id="{B8C3C57F-C92A-483E-A8E5-2F94B59C9323}" type="datetimeFigureOut">
               <a:rPr lang="en-GB" smtClean="0"/>
-              <a:t>25/11/2024</a:t>
+              <a:t>26/11/2024</a:t>
             </a:fld>
             <a:endParaRPr lang="en-GB"/>
           </a:p>
@@ -4870,6 +5273,206 @@
 </p:sld>
 </file>
 
+<file path=ppt/slides/slide10.xml><?xml version="1.0" encoding="utf-8"?>
+<p:sld xmlns:a="http://schemas.openxmlformats.org/drawingml/2006/main" xmlns:r="http://schemas.openxmlformats.org/officeDocument/2006/relationships" xmlns:p="http://schemas.openxmlformats.org/presentationml/2006/main">
+  <p:cSld>
+    <p:spTree>
+      <p:nvGrpSpPr>
+        <p:cNvPr id="1" name=""/>
+        <p:cNvGrpSpPr/>
+        <p:nvPr/>
+      </p:nvGrpSpPr>
+      <p:grpSpPr>
+        <a:xfrm>
+          <a:off x="0" y="0"/>
+          <a:ext cx="0" cy="0"/>
+          <a:chOff x="0" y="0"/>
+          <a:chExt cx="0" cy="0"/>
+        </a:xfrm>
+      </p:grpSpPr>
+      <p:sp>
+        <p:nvSpPr>
+          <p:cNvPr id="2" name="Title 1">
+            <a:extLst>
+              <a:ext uri="{FF2B5EF4-FFF2-40B4-BE49-F238E27FC236}">
+                <a16:creationId xmlns:a16="http://schemas.microsoft.com/office/drawing/2014/main" id="{8684C99E-1C51-E619-7C98-62CACEBDF7D0}"/>
+              </a:ext>
+            </a:extLst>
+          </p:cNvPr>
+          <p:cNvSpPr>
+            <a:spLocks noGrp="1"/>
+          </p:cNvSpPr>
+          <p:nvPr>
+            <p:ph type="title"/>
+          </p:nvPr>
+        </p:nvSpPr>
+        <p:spPr/>
+        <p:txBody>
+          <a:bodyPr/>
+          <a:lstStyle/>
+          <a:p>
+            <a:r>
+              <a:rPr lang="en-GB" dirty="0"/>
+              <a:t>Conclusion/Hypothesis</a:t>
+            </a:r>
+          </a:p>
+        </p:txBody>
+      </p:sp>
+      <p:sp>
+        <p:nvSpPr>
+          <p:cNvPr id="3" name="Content Placeholder 2">
+            <a:extLst>
+              <a:ext uri="{FF2B5EF4-FFF2-40B4-BE49-F238E27FC236}">
+                <a16:creationId xmlns:a16="http://schemas.microsoft.com/office/drawing/2014/main" id="{8B29E6C3-E2AE-1A2C-4E04-2B8C7295EEC0}"/>
+              </a:ext>
+            </a:extLst>
+          </p:cNvPr>
+          <p:cNvSpPr>
+            <a:spLocks noGrp="1"/>
+          </p:cNvSpPr>
+          <p:nvPr>
+            <p:ph idx="1"/>
+          </p:nvPr>
+        </p:nvSpPr>
+        <p:spPr/>
+        <p:txBody>
+          <a:bodyPr/>
+          <a:lstStyle/>
+          <a:p>
+            <a:endParaRPr lang="en-GB" dirty="0"/>
+          </a:p>
+        </p:txBody>
+      </p:sp>
+    </p:spTree>
+    <p:extLst>
+      <p:ext uri="{BB962C8B-B14F-4D97-AF65-F5344CB8AC3E}">
+        <p14:creationId xmlns:p14="http://schemas.microsoft.com/office/powerpoint/2010/main" val="1814590356"/>
+      </p:ext>
+    </p:extLst>
+  </p:cSld>
+  <p:clrMapOvr>
+    <a:masterClrMapping/>
+  </p:clrMapOvr>
+</p:sld>
+</file>
+
+<file path=ppt/slides/slide11.xml><?xml version="1.0" encoding="utf-8"?>
+<p:sld xmlns:a="http://schemas.openxmlformats.org/drawingml/2006/main" xmlns:r="http://schemas.openxmlformats.org/officeDocument/2006/relationships" xmlns:p="http://schemas.openxmlformats.org/presentationml/2006/main">
+  <p:cSld>
+    <p:spTree>
+      <p:nvGrpSpPr>
+        <p:cNvPr id="1" name=""/>
+        <p:cNvGrpSpPr/>
+        <p:nvPr/>
+      </p:nvGrpSpPr>
+      <p:grpSpPr>
+        <a:xfrm>
+          <a:off x="0" y="0"/>
+          <a:ext cx="0" cy="0"/>
+          <a:chOff x="0" y="0"/>
+          <a:chExt cx="0" cy="0"/>
+        </a:xfrm>
+      </p:grpSpPr>
+      <p:sp>
+        <p:nvSpPr>
+          <p:cNvPr id="2" name="Title 1">
+            <a:extLst>
+              <a:ext uri="{FF2B5EF4-FFF2-40B4-BE49-F238E27FC236}">
+                <a16:creationId xmlns:a16="http://schemas.microsoft.com/office/drawing/2014/main" id="{1EBECBE2-A4C4-70B6-C758-B1BD9EEA99FE}"/>
+              </a:ext>
+            </a:extLst>
+          </p:cNvPr>
+          <p:cNvSpPr>
+            <a:spLocks noGrp="1"/>
+          </p:cNvSpPr>
+          <p:nvPr>
+            <p:ph type="title"/>
+          </p:nvPr>
+        </p:nvSpPr>
+        <p:spPr>
+          <a:xfrm>
+            <a:off x="753451" y="249153"/>
+            <a:ext cx="10515600" cy="1325563"/>
+          </a:xfrm>
+        </p:spPr>
+        <p:txBody>
+          <a:bodyPr/>
+          <a:lstStyle/>
+          <a:p>
+            <a:r>
+              <a:rPr lang="en-GB" dirty="0"/>
+              <a:t>Questions?</a:t>
+            </a:r>
+          </a:p>
+        </p:txBody>
+      </p:sp>
+      <p:sp>
+        <p:nvSpPr>
+          <p:cNvPr id="6" name="Title 1">
+            <a:extLst>
+              <a:ext uri="{FF2B5EF4-FFF2-40B4-BE49-F238E27FC236}">
+                <a16:creationId xmlns:a16="http://schemas.microsoft.com/office/drawing/2014/main" id="{B2EDC919-4D0D-9CAF-829E-6BC52F9E82E6}"/>
+              </a:ext>
+            </a:extLst>
+          </p:cNvPr>
+          <p:cNvSpPr txBox="1">
+            <a:spLocks/>
+          </p:cNvSpPr>
+          <p:nvPr/>
+        </p:nvSpPr>
+        <p:spPr>
+          <a:xfrm>
+            <a:off x="753451" y="3429000"/>
+            <a:ext cx="10515600" cy="1325563"/>
+          </a:xfrm>
+          <a:prstGeom prst="rect">
+            <a:avLst/>
+          </a:prstGeom>
+        </p:spPr>
+        <p:txBody>
+          <a:bodyPr vert="horz" lIns="91440" tIns="45720" rIns="91440" bIns="45720" rtlCol="0" anchor="ctr">
+            <a:normAutofit/>
+          </a:bodyPr>
+          <a:lstStyle>
+            <a:lvl1pPr algn="l" defTabSz="914400" rtl="0" eaLnBrk="1" latinLnBrk="0" hangingPunct="1">
+              <a:lnSpc>
+                <a:spcPct val="90000"/>
+              </a:lnSpc>
+              <a:spcBef>
+                <a:spcPct val="0"/>
+              </a:spcBef>
+              <a:buNone/>
+              <a:defRPr sz="4400" kern="1200">
+                <a:solidFill>
+                  <a:schemeClr val="tx1"/>
+                </a:solidFill>
+                <a:latin typeface="+mj-lt"/>
+                <a:ea typeface="+mj-ea"/>
+                <a:cs typeface="+mj-cs"/>
+              </a:defRPr>
+            </a:lvl1pPr>
+          </a:lstStyle>
+          <a:p>
+            <a:r>
+              <a:rPr lang="en-GB" dirty="0"/>
+              <a:t>References</a:t>
+            </a:r>
+          </a:p>
+        </p:txBody>
+      </p:sp>
+    </p:spTree>
+    <p:extLst>
+      <p:ext uri="{BB962C8B-B14F-4D97-AF65-F5344CB8AC3E}">
+        <p14:creationId xmlns:p14="http://schemas.microsoft.com/office/powerpoint/2010/main" val="1414727049"/>
+      </p:ext>
+    </p:extLst>
+  </p:cSld>
+  <p:clrMapOvr>
+    <a:masterClrMapping/>
+  </p:clrMapOvr>
+</p:sld>
+</file>
+
 <file path=ppt/slides/slide2.xml><?xml version="1.0" encoding="utf-8"?>
 <p:sld xmlns:a="http://schemas.openxmlformats.org/drawingml/2006/main" xmlns:r="http://schemas.openxmlformats.org/officeDocument/2006/relationships" xmlns:p="http://schemas.openxmlformats.org/presentationml/2006/main">
   <p:cSld>
@@ -5358,7 +5961,7 @@
             </a:pPr>
             <a:r>
               <a:rPr lang="en-GB" dirty="0"/>
-              <a:t>Propellers are the primary source of noise but also </a:t>
+              <a:t>Propellers account for the primary source of noise but are also important for productivity.</a:t>
             </a:r>
           </a:p>
           <a:p>
@@ -6113,36 +6716,92 @@
           </a:p>
         </p:txBody>
       </p:sp>
-      <p:pic>
-        <p:nvPicPr>
-          <p:cNvPr id="6" name="Picture 5">
-            <a:extLst>
-              <a:ext uri="{FF2B5EF4-FFF2-40B4-BE49-F238E27FC236}">
-                <a16:creationId xmlns:a16="http://schemas.microsoft.com/office/drawing/2014/main" id="{8E28C63F-94ED-AE22-8F66-C521AF20E882}"/>
-              </a:ext>
-            </a:extLst>
-          </p:cNvPr>
-          <p:cNvPicPr>
-            <a:picLocks noChangeAspect="1"/>
-          </p:cNvPicPr>
+      <p:grpSp>
+        <p:nvGrpSpPr>
+          <p:cNvPr id="13" name="Group 12">
+            <a:extLst>
+              <a:ext uri="{FF2B5EF4-FFF2-40B4-BE49-F238E27FC236}">
+                <a16:creationId xmlns:a16="http://schemas.microsoft.com/office/drawing/2014/main" id="{30C9D165-BE70-4E74-4603-F7C49AD44FC9}"/>
+              </a:ext>
+            </a:extLst>
+          </p:cNvPr>
+          <p:cNvGrpSpPr/>
           <p:nvPr/>
-        </p:nvPicPr>
-        <p:blipFill>
-          <a:blip r:embed="rId6"/>
-          <a:stretch>
-            <a:fillRect/>
-          </a:stretch>
-        </p:blipFill>
-        <p:spPr>
+        </p:nvGrpSpPr>
+        <p:grpSpPr>
           <a:xfrm>
-            <a:off x="6397492" y="3420589"/>
+            <a:off x="6282700" y="3570606"/>
             <a:ext cx="5336037" cy="3001521"/>
+            <a:chOff x="6282700" y="3570606"/>
+            <a:chExt cx="5336037" cy="3001521"/>
           </a:xfrm>
-          <a:prstGeom prst="rect">
-            <a:avLst/>
-          </a:prstGeom>
-        </p:spPr>
-      </p:pic>
+        </p:grpSpPr>
+        <p:pic>
+          <p:nvPicPr>
+            <p:cNvPr id="6" name="Picture 5">
+              <a:extLst>
+                <a:ext uri="{FF2B5EF4-FFF2-40B4-BE49-F238E27FC236}">
+                  <a16:creationId xmlns:a16="http://schemas.microsoft.com/office/drawing/2014/main" id="{8E28C63F-94ED-AE22-8F66-C521AF20E882}"/>
+                </a:ext>
+              </a:extLst>
+            </p:cNvPr>
+            <p:cNvPicPr>
+              <a:picLocks noChangeAspect="1"/>
+            </p:cNvPicPr>
+            <p:nvPr/>
+          </p:nvPicPr>
+          <p:blipFill>
+            <a:blip r:embed="rId6"/>
+            <a:stretch>
+              <a:fillRect/>
+            </a:stretch>
+          </p:blipFill>
+          <p:spPr>
+            <a:xfrm>
+              <a:off x="6282700" y="3570606"/>
+              <a:ext cx="5336037" cy="3001521"/>
+            </a:xfrm>
+            <a:prstGeom prst="rect">
+              <a:avLst/>
+            </a:prstGeom>
+          </p:spPr>
+        </p:pic>
+        <p:sp>
+          <p:nvSpPr>
+            <p:cNvPr id="11" name="TextBox 10">
+              <a:extLst>
+                <a:ext uri="{FF2B5EF4-FFF2-40B4-BE49-F238E27FC236}">
+                  <a16:creationId xmlns:a16="http://schemas.microsoft.com/office/drawing/2014/main" id="{D6258E11-FAAE-C175-D482-1D2F77033364}"/>
+                </a:ext>
+              </a:extLst>
+            </p:cNvPr>
+            <p:cNvSpPr txBox="1"/>
+            <p:nvPr/>
+          </p:nvSpPr>
+          <p:spPr>
+            <a:xfrm>
+              <a:off x="8043808" y="3816655"/>
+              <a:ext cx="2135859" cy="369332"/>
+            </a:xfrm>
+            <a:prstGeom prst="rect">
+              <a:avLst/>
+            </a:prstGeom>
+            <a:noFill/>
+          </p:spPr>
+          <p:txBody>
+            <a:bodyPr wrap="square">
+              <a:spAutoFit/>
+            </a:bodyPr>
+            <a:lstStyle/>
+            <a:p>
+              <a:r>
+                <a:rPr lang="en-GB" dirty="0"/>
+                <a:t>L. Wang et al.</a:t>
+              </a:r>
+            </a:p>
+          </p:txBody>
+        </p:sp>
+      </p:grpSp>
     </p:spTree>
     <p:extLst>
       <p:ext uri="{BB962C8B-B14F-4D97-AF65-F5344CB8AC3E}">
@@ -6187,7 +6846,7 @@
                                           </p:stCondLst>
                                         </p:cTn>
                                         <p:tgtEl>
-                                          <p:spTgt spid="6"/>
+                                          <p:spTgt spid="13"/>
                                         </p:tgtEl>
                                         <p:attrNameLst>
                                           <p:attrName>style.visibility</p:attrName>
@@ -6234,6 +6893,183 @@
 <file path=ppt/slides/slide4.xml><?xml version="1.0" encoding="utf-8"?>
 <p:sld xmlns:a="http://schemas.openxmlformats.org/drawingml/2006/main" xmlns:r="http://schemas.openxmlformats.org/officeDocument/2006/relationships" xmlns:p="http://schemas.openxmlformats.org/presentationml/2006/main">
   <p:cSld>
+    <p:spTree>
+      <p:nvGrpSpPr>
+        <p:cNvPr id="1" name=""/>
+        <p:cNvGrpSpPr/>
+        <p:nvPr/>
+      </p:nvGrpSpPr>
+      <p:grpSpPr>
+        <a:xfrm>
+          <a:off x="0" y="0"/>
+          <a:ext cx="0" cy="0"/>
+          <a:chOff x="0" y="0"/>
+          <a:chExt cx="0" cy="0"/>
+        </a:xfrm>
+      </p:grpSpPr>
+      <p:sp>
+        <p:nvSpPr>
+          <p:cNvPr id="2" name="Title 1">
+            <a:extLst>
+              <a:ext uri="{FF2B5EF4-FFF2-40B4-BE49-F238E27FC236}">
+                <a16:creationId xmlns:a16="http://schemas.microsoft.com/office/drawing/2014/main" id="{C636BCF1-F4AB-B535-D03D-7FD6B954927E}"/>
+              </a:ext>
+            </a:extLst>
+          </p:cNvPr>
+          <p:cNvSpPr>
+            <a:spLocks noGrp="1"/>
+          </p:cNvSpPr>
+          <p:nvPr>
+            <p:ph type="title"/>
+          </p:nvPr>
+        </p:nvSpPr>
+        <p:spPr/>
+        <p:txBody>
+          <a:bodyPr/>
+          <a:lstStyle/>
+          <a:p>
+            <a:r>
+              <a:rPr lang="en-GB" dirty="0"/>
+              <a:t>Toroidal and varying edge</a:t>
+            </a:r>
+          </a:p>
+        </p:txBody>
+      </p:sp>
+      <p:pic>
+        <p:nvPicPr>
+          <p:cNvPr id="7" name="Content Placeholder 6" descr="A black metal tongs&#10;&#10;Description automatically generated">
+            <a:extLst>
+              <a:ext uri="{FF2B5EF4-FFF2-40B4-BE49-F238E27FC236}">
+                <a16:creationId xmlns:a16="http://schemas.microsoft.com/office/drawing/2014/main" id="{880BBE34-3152-AFE0-5D87-79E643BFAF28}"/>
+              </a:ext>
+            </a:extLst>
+          </p:cNvPr>
+          <p:cNvPicPr>
+            <a:picLocks noGrp="1" noChangeAspect="1"/>
+          </p:cNvPicPr>
+          <p:nvPr>
+            <p:ph idx="1"/>
+          </p:nvPr>
+        </p:nvPicPr>
+        <p:blipFill>
+          <a:blip r:embed="rId3">
+            <a:extLst>
+              <a:ext uri="{28A0092B-C50C-407E-A947-70E740481C1C}">
+                <a14:useLocalDpi xmlns:a14="http://schemas.microsoft.com/office/drawing/2010/main" val="0"/>
+              </a:ext>
+            </a:extLst>
+          </a:blip>
+          <a:srcRect t="27535" b="23273"/>
+          <a:stretch/>
+        </p:blipFill>
+        <p:spPr>
+          <a:xfrm>
+            <a:off x="6613252" y="1618880"/>
+            <a:ext cx="4960125" cy="3356263"/>
+          </a:xfrm>
+        </p:spPr>
+      </p:pic>
+      <p:sp>
+        <p:nvSpPr>
+          <p:cNvPr id="8" name="TextBox 7">
+            <a:extLst>
+              <a:ext uri="{FF2B5EF4-FFF2-40B4-BE49-F238E27FC236}">
+                <a16:creationId xmlns:a16="http://schemas.microsoft.com/office/drawing/2014/main" id="{BFAF2F64-5005-E43B-C643-C35BC2A07982}"/>
+              </a:ext>
+            </a:extLst>
+          </p:cNvPr>
+          <p:cNvSpPr txBox="1"/>
+          <p:nvPr/>
+        </p:nvSpPr>
+        <p:spPr>
+          <a:xfrm>
+            <a:off x="8693726" y="4516497"/>
+            <a:ext cx="2140527" cy="369332"/>
+          </a:xfrm>
+          <a:prstGeom prst="rect">
+            <a:avLst/>
+          </a:prstGeom>
+          <a:noFill/>
+        </p:spPr>
+        <p:txBody>
+          <a:bodyPr wrap="square" rtlCol="0">
+            <a:spAutoFit/>
+          </a:bodyPr>
+          <a:lstStyle/>
+          <a:p>
+            <a:r>
+              <a:rPr lang="en-GB" dirty="0" err="1"/>
+              <a:t>Foxeer</a:t>
+            </a:r>
+            <a:endParaRPr lang="en-GB" dirty="0"/>
+          </a:p>
+        </p:txBody>
+      </p:sp>
+      <p:sp>
+        <p:nvSpPr>
+          <p:cNvPr id="10" name="Rectangle 9">
+            <a:extLst>
+              <a:ext uri="{FF2B5EF4-FFF2-40B4-BE49-F238E27FC236}">
+                <a16:creationId xmlns:a16="http://schemas.microsoft.com/office/drawing/2014/main" id="{DF87DB04-9879-0400-BB66-6CD4B59A734D}"/>
+              </a:ext>
+            </a:extLst>
+          </p:cNvPr>
+          <p:cNvSpPr/>
+          <p:nvPr/>
+        </p:nvSpPr>
+        <p:spPr>
+          <a:xfrm>
+            <a:off x="1215736" y="1787236"/>
+            <a:ext cx="4363013" cy="4094019"/>
+          </a:xfrm>
+          <a:prstGeom prst="rect">
+            <a:avLst/>
+          </a:prstGeom>
+        </p:spPr>
+        <p:style>
+          <a:lnRef idx="2">
+            <a:schemeClr val="accent1">
+              <a:shade val="15000"/>
+            </a:schemeClr>
+          </a:lnRef>
+          <a:fillRef idx="1">
+            <a:schemeClr val="accent1"/>
+          </a:fillRef>
+          <a:effectRef idx="0">
+            <a:schemeClr val="accent1"/>
+          </a:effectRef>
+          <a:fontRef idx="minor">
+            <a:schemeClr val="lt1"/>
+          </a:fontRef>
+        </p:style>
+        <p:txBody>
+          <a:bodyPr rtlCol="0" anchor="ctr"/>
+          <a:lstStyle/>
+          <a:p>
+            <a:pPr algn="ctr"/>
+            <a:r>
+              <a:rPr lang="en-GB" dirty="0"/>
+              <a:t>Uneven blade span</a:t>
+            </a:r>
+          </a:p>
+        </p:txBody>
+      </p:sp>
+    </p:spTree>
+    <p:extLst>
+      <p:ext uri="{BB962C8B-B14F-4D97-AF65-F5344CB8AC3E}">
+        <p14:creationId xmlns:p14="http://schemas.microsoft.com/office/powerpoint/2010/main" val="3454612006"/>
+      </p:ext>
+    </p:extLst>
+  </p:cSld>
+  <p:clrMapOvr>
+    <a:masterClrMapping/>
+  </p:clrMapOvr>
+</p:sld>
+</file>
+
+<file path=ppt/slides/slide5.xml><?xml version="1.0" encoding="utf-8"?>
+<p:sld xmlns:a="http://schemas.openxmlformats.org/drawingml/2006/main" xmlns:r="http://schemas.openxmlformats.org/officeDocument/2006/relationships" xmlns:p="http://schemas.openxmlformats.org/presentationml/2006/main">
+  <p:cSld>
     <p:bg>
       <p:bgPr>
         <a:solidFill>
@@ -6689,8 +7525,8 @@
         </p:nvSpPr>
         <p:spPr>
           <a:xfrm>
-            <a:off x="744719" y="2638708"/>
-            <a:ext cx="10398046" cy="3683358"/>
+            <a:off x="599247" y="2358855"/>
+            <a:ext cx="10398046" cy="3724339"/>
           </a:xfrm>
         </p:spPr>
         <p:txBody>
@@ -6743,7 +7579,7 @@
           <a:p>
             <a:r>
               <a:rPr lang="en-GB" dirty="0"/>
-              <a:t>Analyse psychoacoustic performance </a:t>
+              <a:t>Analyse and compare psychoacoustic performance</a:t>
             </a:r>
           </a:p>
           <a:p>
@@ -6764,7 +7600,7 @@
 </p:sld>
 </file>
 
-<file path=ppt/slides/slide5.xml><?xml version="1.0" encoding="utf-8"?>
+<file path=ppt/slides/slide6.xml><?xml version="1.0" encoding="utf-8"?>
 <p:sld xmlns:a="http://schemas.openxmlformats.org/drawingml/2006/main" xmlns:r="http://schemas.openxmlformats.org/officeDocument/2006/relationships" xmlns:p="http://schemas.openxmlformats.org/presentationml/2006/main">
   <p:cSld>
     <p:bg>
@@ -7235,12 +8071,12 @@
               <a:lstStyle/>
               <a:p>
                 <a:r>
-                  <a:rPr lang="en-GB" sz="2400" dirty="0"/>
+                  <a:rPr lang="en-GB" dirty="0"/>
                   <a:t>Aerodynamic performance quantities</a:t>
                 </a:r>
               </a:p>
               <a:p>
-                <a:endParaRPr lang="en-GB" sz="2400" dirty="0"/>
+                <a:endParaRPr lang="en-GB" dirty="0"/>
               </a:p>
               <a:p>
                 <a:pPr marL="0" indent="0">
@@ -7255,14 +8091,14 @@
                       <m:sSub>
                         <m:sSubPr>
                           <m:ctrlPr>
-                            <a:rPr lang="en-GB" sz="2400" b="0" i="1">
+                            <a:rPr lang="en-GB" b="0" i="1">
                               <a:latin typeface="Cambria Math" panose="02040503050406030204" pitchFamily="18" charset="0"/>
                             </a:rPr>
                           </m:ctrlPr>
                         </m:sSubPr>
                         <m:e>
                           <m:r>
-                            <a:rPr lang="en-GB" sz="2400" b="0" i="1">
+                            <a:rPr lang="en-GB" b="0" i="1">
                               <a:latin typeface="Cambria Math" panose="02040503050406030204" pitchFamily="18" charset="0"/>
                             </a:rPr>
                             <m:t>𝐶</m:t>
@@ -7270,7 +8106,7 @@
                         </m:e>
                         <m:sub>
                           <m:r>
-                            <a:rPr lang="en-GB" sz="2400" b="0" i="1">
+                            <a:rPr lang="en-GB" b="0" i="1">
                               <a:latin typeface="Cambria Math" panose="02040503050406030204" pitchFamily="18" charset="0"/>
                             </a:rPr>
                             <m:t>𝑇</m:t>
@@ -7278,7 +8114,7 @@
                         </m:sub>
                       </m:sSub>
                       <m:r>
-                        <a:rPr lang="en-GB" sz="2400" b="0" i="1">
+                        <a:rPr lang="en-GB" b="0" i="1">
                           <a:latin typeface="Cambria Math" panose="02040503050406030204" pitchFamily="18" charset="0"/>
                         </a:rPr>
                         <m:t>=</m:t>
@@ -7286,14 +8122,14 @@
                       <m:f>
                         <m:fPr>
                           <m:ctrlPr>
-                            <a:rPr lang="en-GB" sz="2400" b="0" i="1">
+                            <a:rPr lang="en-GB" b="0" i="1">
                               <a:latin typeface="Cambria Math" panose="02040503050406030204" pitchFamily="18" charset="0"/>
                             </a:rPr>
                           </m:ctrlPr>
                         </m:fPr>
                         <m:num>
                           <m:r>
-                            <a:rPr lang="en-GB" sz="2400" b="0" i="1">
+                            <a:rPr lang="en-GB" b="0" i="1">
                               <a:latin typeface="Cambria Math" panose="02040503050406030204" pitchFamily="18" charset="0"/>
                             </a:rPr>
                             <m:t>𝑇</m:t>
@@ -7301,7 +8137,7 @@
                         </m:num>
                         <m:den>
                           <m:r>
-                            <a:rPr lang="en-GB" sz="2400" b="0" i="1">
+                            <a:rPr lang="en-GB" b="0" i="1">
                               <a:latin typeface="Cambria Math" panose="02040503050406030204" pitchFamily="18" charset="0"/>
                             </a:rPr>
                             <m:t>𝜌</m:t>
@@ -7309,14 +8145,14 @@
                           <m:sSup>
                             <m:sSupPr>
                               <m:ctrlPr>
-                                <a:rPr lang="en-GB" sz="2400" b="0" i="1">
+                                <a:rPr lang="en-GB" b="0" i="1">
                                   <a:latin typeface="Cambria Math" panose="02040503050406030204" pitchFamily="18" charset="0"/>
                                 </a:rPr>
                               </m:ctrlPr>
                             </m:sSupPr>
                             <m:e>
                               <m:r>
-                                <a:rPr lang="en-GB" sz="2400" b="0" i="1">
+                                <a:rPr lang="en-GB" b="0" i="1">
                                   <a:latin typeface="Cambria Math" panose="02040503050406030204" pitchFamily="18" charset="0"/>
                                 </a:rPr>
                                 <m:t>𝑁</m:t>
@@ -7324,7 +8160,7 @@
                             </m:e>
                             <m:sup>
                               <m:r>
-                                <a:rPr lang="en-GB" sz="2400" b="0" i="1">
+                                <a:rPr lang="en-GB" b="0" i="1">
                                   <a:latin typeface="Cambria Math" panose="02040503050406030204" pitchFamily="18" charset="0"/>
                                 </a:rPr>
                                 <m:t>2</m:t>
@@ -7334,14 +8170,14 @@
                           <m:sSup>
                             <m:sSupPr>
                               <m:ctrlPr>
-                                <a:rPr lang="en-GB" sz="2400" b="0" i="1">
+                                <a:rPr lang="en-GB" b="0" i="1">
                                   <a:latin typeface="Cambria Math" panose="02040503050406030204" pitchFamily="18" charset="0"/>
                                 </a:rPr>
                               </m:ctrlPr>
                             </m:sSupPr>
                             <m:e>
                               <m:r>
-                                <a:rPr lang="en-GB" sz="2400" b="0" i="1">
+                                <a:rPr lang="en-GB" b="0" i="1">
                                   <a:latin typeface="Cambria Math" panose="02040503050406030204" pitchFamily="18" charset="0"/>
                                 </a:rPr>
                                 <m:t>𝐷</m:t>
@@ -7349,7 +8185,7 @@
                             </m:e>
                             <m:sup>
                               <m:r>
-                                <a:rPr lang="en-GB" sz="2400" b="0" i="1">
+                                <a:rPr lang="en-GB" b="0" i="1">
                                   <a:latin typeface="Cambria Math" panose="02040503050406030204" pitchFamily="18" charset="0"/>
                                 </a:rPr>
                                 <m:t>4</m:t>
@@ -7359,7 +8195,7 @@
                         </m:den>
                       </m:f>
                       <m:r>
-                        <a:rPr lang="en-GB" sz="2400" b="0" i="1">
+                        <a:rPr lang="en-GB" b="0" i="1">
                           <a:latin typeface="Cambria Math" panose="02040503050406030204" pitchFamily="18" charset="0"/>
                         </a:rPr>
                         <m:t>, </m:t>
@@ -7367,14 +8203,14 @@
                       <m:sSub>
                         <m:sSubPr>
                           <m:ctrlPr>
-                            <a:rPr lang="en-GB" sz="2400" b="0" i="1">
+                            <a:rPr lang="en-GB" b="0" i="1">
                               <a:latin typeface="Cambria Math" panose="02040503050406030204" pitchFamily="18" charset="0"/>
                             </a:rPr>
                           </m:ctrlPr>
                         </m:sSubPr>
                         <m:e>
                           <m:r>
-                            <a:rPr lang="en-GB" sz="2400" b="0" i="1">
+                            <a:rPr lang="en-GB" b="0" i="1">
                               <a:latin typeface="Cambria Math" panose="02040503050406030204" pitchFamily="18" charset="0"/>
                             </a:rPr>
                             <m:t>𝐶</m:t>
@@ -7382,7 +8218,7 @@
                         </m:e>
                         <m:sub>
                           <m:r>
-                            <a:rPr lang="en-GB" sz="2400" b="0" i="1">
+                            <a:rPr lang="en-GB" b="0" i="1">
                               <a:latin typeface="Cambria Math" panose="02040503050406030204" pitchFamily="18" charset="0"/>
                             </a:rPr>
                             <m:t>𝑃</m:t>
@@ -7390,7 +8226,7 @@
                         </m:sub>
                       </m:sSub>
                       <m:r>
-                        <a:rPr lang="en-GB" sz="2400" b="0" i="1">
+                        <a:rPr lang="en-GB" b="0" i="1">
                           <a:latin typeface="Cambria Math" panose="02040503050406030204" pitchFamily="18" charset="0"/>
                         </a:rPr>
                         <m:t>=</m:t>
@@ -7398,14 +8234,14 @@
                       <m:f>
                         <m:fPr>
                           <m:ctrlPr>
-                            <a:rPr lang="en-GB" sz="2400" b="0" i="1">
+                            <a:rPr lang="en-GB" b="0" i="1">
                               <a:latin typeface="Cambria Math" panose="02040503050406030204" pitchFamily="18" charset="0"/>
                             </a:rPr>
                           </m:ctrlPr>
                         </m:fPr>
                         <m:num>
                           <m:r>
-                            <a:rPr lang="en-GB" sz="2400" b="0" i="1">
+                            <a:rPr lang="en-GB" b="0" i="1">
                               <a:latin typeface="Cambria Math" panose="02040503050406030204" pitchFamily="18" charset="0"/>
                             </a:rPr>
                             <m:t>𝑃</m:t>
@@ -7413,7 +8249,7 @@
                         </m:num>
                         <m:den>
                           <m:r>
-                            <a:rPr lang="en-GB" sz="2400" b="0" i="1">
+                            <a:rPr lang="en-GB" b="0" i="1">
                               <a:latin typeface="Cambria Math" panose="02040503050406030204" pitchFamily="18" charset="0"/>
                             </a:rPr>
                             <m:t>𝜌</m:t>
@@ -7421,14 +8257,14 @@
                           <m:sSup>
                             <m:sSupPr>
                               <m:ctrlPr>
-                                <a:rPr lang="en-GB" sz="2400" b="0" i="1">
+                                <a:rPr lang="en-GB" b="0" i="1">
                                   <a:latin typeface="Cambria Math" panose="02040503050406030204" pitchFamily="18" charset="0"/>
                                 </a:rPr>
                               </m:ctrlPr>
                             </m:sSupPr>
                             <m:e>
                               <m:r>
-                                <a:rPr lang="en-GB" sz="2400" b="0" i="1">
+                                <a:rPr lang="en-GB" b="0" i="1">
                                   <a:latin typeface="Cambria Math" panose="02040503050406030204" pitchFamily="18" charset="0"/>
                                 </a:rPr>
                                 <m:t>𝑁</m:t>
@@ -7436,7 +8272,7 @@
                             </m:e>
                             <m:sup>
                               <m:r>
-                                <a:rPr lang="en-GB" sz="2400" b="0" i="1">
+                                <a:rPr lang="en-GB" b="0" i="1">
                                   <a:latin typeface="Cambria Math" panose="02040503050406030204" pitchFamily="18" charset="0"/>
                                 </a:rPr>
                                 <m:t>3</m:t>
@@ -7446,14 +8282,14 @@
                           <m:sSup>
                             <m:sSupPr>
                               <m:ctrlPr>
-                                <a:rPr lang="en-GB" sz="2400" b="0" i="1">
+                                <a:rPr lang="en-GB" b="0" i="1">
                                   <a:latin typeface="Cambria Math" panose="02040503050406030204" pitchFamily="18" charset="0"/>
                                 </a:rPr>
                               </m:ctrlPr>
                             </m:sSupPr>
                             <m:e>
                               <m:r>
-                                <a:rPr lang="en-GB" sz="2400" b="0" i="1">
+                                <a:rPr lang="en-GB" b="0" i="1">
                                   <a:latin typeface="Cambria Math" panose="02040503050406030204" pitchFamily="18" charset="0"/>
                                 </a:rPr>
                                 <m:t>𝐷</m:t>
@@ -7461,7 +8297,7 @@
                             </m:e>
                             <m:sup>
                               <m:r>
-                                <a:rPr lang="en-GB" sz="2400" b="0" i="1">
+                                <a:rPr lang="en-GB" b="0" i="1">
                                   <a:latin typeface="Cambria Math" panose="02040503050406030204" pitchFamily="18" charset="0"/>
                                 </a:rPr>
                                 <m:t>5</m:t>
@@ -7473,44 +8309,44 @@
                     </m:oMath>
                   </m:oMathPara>
                 </a14:m>
-                <a:endParaRPr lang="en-GB" sz="2400" dirty="0"/>
+                <a:endParaRPr lang="en-GB" dirty="0"/>
               </a:p>
               <a:p>
                 <a:pPr marL="0" indent="0">
                   <a:buNone/>
                 </a:pPr>
-                <a:endParaRPr lang="en-GB" sz="2400" dirty="0"/>
+                <a:endParaRPr lang="en-GB" dirty="0"/>
               </a:p>
               <a:p>
                 <a:pPr marL="0" indent="0">
                   <a:buNone/>
                 </a:pPr>
                 <a:r>
-                  <a:rPr lang="en-GB" sz="2400" dirty="0"/>
+                  <a:rPr lang="en-GB" dirty="0"/>
                   <a:t>Power is obtained from </a:t>
                 </a:r>
                 <a14:m>
                   <m:oMath xmlns:m="http://schemas.openxmlformats.org/officeDocument/2006/math">
                     <m:r>
-                      <a:rPr lang="en-GB" sz="2400" b="0" i="1">
+                      <a:rPr lang="en-GB" b="0" i="1">
                         <a:latin typeface="Cambria Math" panose="02040503050406030204" pitchFamily="18" charset="0"/>
                       </a:rPr>
                       <m:t>𝜏</m:t>
                     </m:r>
                     <m:r>
-                      <a:rPr lang="en-GB" sz="2400" b="0" i="1">
+                      <a:rPr lang="en-GB" b="0" i="1">
                         <a:latin typeface="Cambria Math" panose="02040503050406030204" pitchFamily="18" charset="0"/>
                       </a:rPr>
                       <m:t>⋅2</m:t>
                     </m:r>
                     <m:r>
-                      <a:rPr lang="en-GB" sz="2400" b="0" i="1">
+                      <a:rPr lang="en-GB" b="0" i="1">
                         <a:latin typeface="Cambria Math" panose="02040503050406030204" pitchFamily="18" charset="0"/>
                       </a:rPr>
                       <m:t>𝜋</m:t>
                     </m:r>
                     <m:r>
-                      <a:rPr lang="en-GB" sz="2400" b="0" i="1">
+                      <a:rPr lang="en-GB" b="0" i="1">
                         <a:latin typeface="Cambria Math" panose="02040503050406030204" pitchFamily="18" charset="0"/>
                       </a:rPr>
                       <m:t>𝑁</m:t>
@@ -7518,7 +8354,7 @@
                   </m:oMath>
                 </a14:m>
                 <a:r>
-                  <a:rPr lang="en-GB" sz="2400" dirty="0"/>
+                  <a:rPr lang="en-GB" dirty="0"/>
                   <a:t> </a:t>
                 </a:r>
               </a:p>
@@ -7526,14 +8362,14 @@
                 <a:pPr marL="0" indent="0">
                   <a:buNone/>
                 </a:pPr>
-                <a:endParaRPr lang="en-GB" sz="2400" dirty="0"/>
+                <a:endParaRPr lang="en-GB" dirty="0"/>
               </a:p>
               <a:p>
                 <a:pPr marL="0" indent="0">
                   <a:buNone/>
                 </a:pPr>
                 <a:r>
-                  <a:rPr lang="en-GB" sz="2400" dirty="0"/>
+                  <a:rPr lang="en-GB" dirty="0"/>
                   <a:t>Require values for torque, thrust and angular speed.</a:t>
                 </a:r>
               </a:p>
@@ -7565,7 +8401,7 @@
               <a:blipFill>
                 <a:blip r:embed="rId3"/>
                 <a:stretch>
-                  <a:fillRect l="-940"/>
+                  <a:fillRect l="-1254" t="-612" b="-2141"/>
                 </a:stretch>
               </a:blipFill>
             </p:spPr>
@@ -7597,7 +8433,7 @@
 </p:sld>
 </file>
 
-<file path=ppt/slides/slide6.xml><?xml version="1.0" encoding="utf-8"?>
+<file path=ppt/slides/slide7.xml><?xml version="1.0" encoding="utf-8"?>
 <p:sld xmlns:a="http://schemas.openxmlformats.org/drawingml/2006/main" xmlns:r="http://schemas.openxmlformats.org/officeDocument/2006/relationships" xmlns:p="http://schemas.openxmlformats.org/presentationml/2006/main">
   <p:cSld>
     <p:spTree>
@@ -7641,10 +8477,9 @@
           <a:lstStyle/>
           <a:p>
             <a:r>
-              <a:rPr lang="en-GB"/>
+              <a:rPr lang="en-GB" dirty="0"/>
               <a:t>Aerodynamic measurements</a:t>
             </a:r>
-            <a:endParaRPr lang="en-GB" dirty="0"/>
           </a:p>
         </p:txBody>
       </p:sp>
@@ -7680,7 +8515,7 @@
               <a:buNone/>
             </a:pPr>
             <a:r>
-              <a:rPr lang="en-GB"/>
+              <a:rPr lang="en-GB" dirty="0"/>
               <a:t>Torque and thrust measured by strain gauge load cells</a:t>
             </a:r>
           </a:p>
@@ -7688,14 +8523,14 @@
             <a:pPr marL="0" indent="0">
               <a:buNone/>
             </a:pPr>
-            <a:endParaRPr lang="en-GB"/>
+            <a:endParaRPr lang="en-GB" dirty="0"/>
           </a:p>
           <a:p>
             <a:pPr marL="0" indent="0">
               <a:buNone/>
             </a:pPr>
             <a:r>
-              <a:rPr lang="en-GB"/>
+              <a:rPr lang="en-GB" dirty="0"/>
               <a:t>Full bridge cantilever models selected for sensitivity and resistance to off-axis forces</a:t>
             </a:r>
           </a:p>
@@ -7703,17 +8538,16 @@
             <a:pPr marL="0" indent="0">
               <a:buNone/>
             </a:pPr>
-            <a:endParaRPr lang="en-GB"/>
+            <a:endParaRPr lang="en-GB" dirty="0"/>
           </a:p>
           <a:p>
             <a:pPr marL="0" indent="0">
               <a:buNone/>
             </a:pPr>
             <a:r>
-              <a:rPr lang="en-GB"/>
+              <a:rPr lang="en-GB" dirty="0"/>
               <a:t>Orientation selected for accuracy, and ease of calibration</a:t>
             </a:r>
-            <a:endParaRPr lang="en-GB" dirty="0"/>
           </a:p>
         </p:txBody>
       </p:sp>
@@ -7760,7 +8594,7 @@
 </p:sld>
 </file>
 
-<file path=ppt/slides/slide7.xml><?xml version="1.0" encoding="utf-8"?>
+<file path=ppt/slides/slide8.xml><?xml version="1.0" encoding="utf-8"?>
 <p:sld xmlns:a="http://schemas.openxmlformats.org/drawingml/2006/main" xmlns:r="http://schemas.openxmlformats.org/officeDocument/2006/relationships" xmlns:p="http://schemas.openxmlformats.org/presentationml/2006/main">
   <p:cSld>
     <p:spTree>
@@ -7894,7 +8728,7 @@
 </p:sld>
 </file>
 
-<file path=ppt/slides/slide8.xml><?xml version="1.0" encoding="utf-8"?>
+<file path=ppt/slides/slide9.xml><?xml version="1.0" encoding="utf-8"?>
 <p:sld xmlns:a="http://schemas.openxmlformats.org/drawingml/2006/main" xmlns:r="http://schemas.openxmlformats.org/officeDocument/2006/relationships" xmlns:p="http://schemas.openxmlformats.org/presentationml/2006/main">
   <p:cSld>
     <p:spTree>
@@ -7926,7 +8760,7 @@
           <p:nvPr/>
         </p:nvPicPr>
         <p:blipFill>
-          <a:blip r:embed="rId2"/>
+          <a:blip r:embed="rId3"/>
           <a:stretch>
             <a:fillRect/>
           </a:stretch>
@@ -7974,8 +8808,8 @@
           </a:p>
         </p:txBody>
       </p:sp>
-      <mc:AlternateContent xmlns:mc="http://schemas.openxmlformats.org/markup-compatibility/2006">
-        <mc:Choice xmlns:a14="http://schemas.microsoft.com/office/drawing/2010/main" Requires="a14">
+      <mc:AlternateContent xmlns:mc="http://schemas.openxmlformats.org/markup-compatibility/2006" xmlns:a14="http://schemas.microsoft.com/office/drawing/2010/main">
+        <mc:Choice Requires="a14">
           <p:sp>
             <p:nvSpPr>
               <p:cNvPr id="7" name="TextBox 6">
@@ -8006,6 +8840,7 @@
               </a:bodyPr>
               <a:lstStyle/>
               <a:p>
+                <a:pPr/>
                 <a14:m>
                   <m:oMathPara xmlns:m="http://schemas.openxmlformats.org/officeDocument/2006/math">
                     <m:oMathParaPr>
@@ -8032,7 +8867,7 @@
             </p:txBody>
           </p:sp>
         </mc:Choice>
-        <mc:Fallback>
+        <mc:Fallback xmlns="">
           <p:sp>
             <p:nvSpPr>
               <p:cNvPr id="7" name="TextBox 6">
@@ -8056,7 +8891,7 @@
                 <a:avLst/>
               </a:prstGeom>
               <a:blipFill>
-                <a:blip r:embed="rId3"/>
+                <a:blip r:embed="rId4"/>
                 <a:stretch>
                   <a:fillRect/>
                 </a:stretch>
@@ -8077,85 +8912,22 @@
           </p:sp>
         </mc:Fallback>
       </mc:AlternateContent>
-    </p:spTree>
-    <p:extLst>
-      <p:ext uri="{BB962C8B-B14F-4D97-AF65-F5344CB8AC3E}">
-        <p14:creationId xmlns:p14="http://schemas.microsoft.com/office/powerpoint/2010/main" val="3386808046"/>
-      </p:ext>
-    </p:extLst>
-  </p:cSld>
-  <p:clrMapOvr>
-    <a:masterClrMapping/>
-  </p:clrMapOvr>
-</p:sld>
-</file>
-
-<file path=ppt/slides/slide9.xml><?xml version="1.0" encoding="utf-8"?>
-<p:sld xmlns:a="http://schemas.openxmlformats.org/drawingml/2006/main" xmlns:r="http://schemas.openxmlformats.org/officeDocument/2006/relationships" xmlns:p="http://schemas.openxmlformats.org/presentationml/2006/main">
-  <p:cSld>
-    <p:spTree>
-      <p:nvGrpSpPr>
-        <p:cNvPr id="1" name=""/>
-        <p:cNvGrpSpPr/>
-        <p:nvPr/>
-      </p:nvGrpSpPr>
-      <p:grpSpPr>
-        <a:xfrm>
-          <a:off x="0" y="0"/>
-          <a:ext cx="0" cy="0"/>
-          <a:chOff x="0" y="0"/>
-          <a:chExt cx="0" cy="0"/>
-        </a:xfrm>
-      </p:grpSpPr>
-      <p:sp>
-        <p:nvSpPr>
-          <p:cNvPr id="2" name="Title 1">
-            <a:extLst>
-              <a:ext uri="{FF2B5EF4-FFF2-40B4-BE49-F238E27FC236}">
-                <a16:creationId xmlns:a16="http://schemas.microsoft.com/office/drawing/2014/main" id="{1EBECBE2-A4C4-70B6-C758-B1BD9EEA99FE}"/>
-              </a:ext>
-            </a:extLst>
-          </p:cNvPr>
-          <p:cNvSpPr>
-            <a:spLocks noGrp="1"/>
-          </p:cNvSpPr>
-          <p:nvPr>
-            <p:ph type="title"/>
-          </p:nvPr>
+      <p:sp>
+        <p:nvSpPr>
+          <p:cNvPr id="3" name="TextBox 2">
+            <a:extLst>
+              <a:ext uri="{FF2B5EF4-FFF2-40B4-BE49-F238E27FC236}">
+                <a16:creationId xmlns:a16="http://schemas.microsoft.com/office/drawing/2014/main" id="{2994AB0B-01E0-C9B1-FAB4-4B6511A40250}"/>
+              </a:ext>
+            </a:extLst>
+          </p:cNvPr>
+          <p:cNvSpPr txBox="1"/>
+          <p:nvPr/>
         </p:nvSpPr>
         <p:spPr>
           <a:xfrm>
-            <a:off x="753451" y="249153"/>
-            <a:ext cx="10515600" cy="1325563"/>
-          </a:xfrm>
-        </p:spPr>
-        <p:txBody>
-          <a:bodyPr/>
-          <a:lstStyle/>
-          <a:p>
-            <a:r>
-              <a:rPr lang="en-GB" dirty="0"/>
-              <a:t>Questions?</a:t>
-            </a:r>
-          </a:p>
-        </p:txBody>
-      </p:sp>
-      <p:sp>
-        <p:nvSpPr>
-          <p:cNvPr id="5" name="TextBox 4">
-            <a:extLst>
-              <a:ext uri="{FF2B5EF4-FFF2-40B4-BE49-F238E27FC236}">
-                <a16:creationId xmlns:a16="http://schemas.microsoft.com/office/drawing/2014/main" id="{E44BC597-3E26-981B-2200-703284AC4B74}"/>
-              </a:ext>
-            </a:extLst>
-          </p:cNvPr>
-          <p:cNvSpPr txBox="1"/>
-          <p:nvPr/>
-        </p:nvSpPr>
-        <p:spPr>
-          <a:xfrm>
-            <a:off x="922949" y="4398395"/>
-            <a:ext cx="6095256" cy="646331"/>
+            <a:off x="438150" y="1574655"/>
+            <a:ext cx="5027468" cy="2677656"/>
           </a:xfrm>
           <a:prstGeom prst="rect">
             <a:avLst/>
@@ -8163,74 +8935,23 @@
           <a:noFill/>
         </p:spPr>
         <p:txBody>
-          <a:bodyPr wrap="square">
+          <a:bodyPr wrap="square" rtlCol="0">
             <a:spAutoFit/>
           </a:bodyPr>
           <a:lstStyle/>
           <a:p>
             <a:r>
-              <a:rPr lang="en-GB" dirty="0"/>
-              <a:t>Toroidal propeller designs – Thingyverse </a:t>
-            </a:r>
-          </a:p>
-          <a:p>
-            <a:r>
-              <a:rPr lang="en-GB" dirty="0"/>
-              <a:t>Owl image – Wang and Liu</a:t>
-            </a:r>
-          </a:p>
-        </p:txBody>
-      </p:sp>
-      <p:sp>
-        <p:nvSpPr>
-          <p:cNvPr id="6" name="Title 1">
-            <a:extLst>
-              <a:ext uri="{FF2B5EF4-FFF2-40B4-BE49-F238E27FC236}">
-                <a16:creationId xmlns:a16="http://schemas.microsoft.com/office/drawing/2014/main" id="{B2EDC919-4D0D-9CAF-829E-6BC52F9E82E6}"/>
-              </a:ext>
-            </a:extLst>
-          </p:cNvPr>
-          <p:cNvSpPr txBox="1">
-            <a:spLocks/>
-          </p:cNvSpPr>
-          <p:nvPr/>
-        </p:nvSpPr>
-        <p:spPr>
-          <a:xfrm>
-            <a:off x="753451" y="3072832"/>
-            <a:ext cx="10515600" cy="1325563"/>
-          </a:xfrm>
-          <a:prstGeom prst="rect">
-            <a:avLst/>
-          </a:prstGeom>
-        </p:spPr>
-        <p:txBody>
-          <a:bodyPr vert="horz" lIns="91440" tIns="45720" rIns="91440" bIns="45720" rtlCol="0" anchor="ctr">
-            <a:normAutofit/>
-          </a:bodyPr>
-          <a:lstStyle>
-            <a:lvl1pPr algn="l" defTabSz="914400" rtl="0" eaLnBrk="1" latinLnBrk="0" hangingPunct="1">
-              <a:lnSpc>
-                <a:spcPct val="90000"/>
-              </a:lnSpc>
-              <a:spcBef>
-                <a:spcPct val="0"/>
-              </a:spcBef>
-              <a:buNone/>
-              <a:defRPr sz="4400" kern="1200">
-                <a:solidFill>
-                  <a:schemeClr val="tx1"/>
-                </a:solidFill>
-                <a:latin typeface="+mj-lt"/>
-                <a:ea typeface="+mj-ea"/>
-                <a:cs typeface="+mj-cs"/>
-              </a:defRPr>
-            </a:lvl1pPr>
-          </a:lstStyle>
-          <a:p>
-            <a:r>
-              <a:rPr lang="en-GB" dirty="0"/>
-              <a:t>References</a:t>
+              <a:rPr lang="en-GB" sz="2400" dirty="0"/>
+              <a:t>Ideally, the propeller acoustics must be isolated from the motor and motor driver.</a:t>
+            </a:r>
+          </a:p>
+          <a:p>
+            <a:endParaRPr lang="en-GB" sz="2400" dirty="0"/>
+          </a:p>
+          <a:p>
+            <a:r>
+              <a:rPr lang="en-GB" sz="2400" dirty="0"/>
+              <a:t>However, this is not possible and so the acoustics of no propeller will be measured at the same speed</a:t>
             </a:r>
           </a:p>
         </p:txBody>
@@ -8238,7 +8959,7 @@
     </p:spTree>
     <p:extLst>
       <p:ext uri="{BB962C8B-B14F-4D97-AF65-F5344CB8AC3E}">
-        <p14:creationId xmlns:p14="http://schemas.microsoft.com/office/powerpoint/2010/main" val="1414727049"/>
+        <p14:creationId xmlns:p14="http://schemas.microsoft.com/office/powerpoint/2010/main" val="3386808046"/>
       </p:ext>
     </p:extLst>
   </p:cSld>

--- a/deliverables/michaelmas_presentation.pptx
+++ b/deliverables/michaelmas_presentation.pptx
@@ -748,6 +748,21 @@
               <a:t>It's also worth noting that these trailing edge serrations at low Reynolds numbers were inspired by owl wings.</a:t>
             </a:r>
           </a:p>
+          <a:p>
+            <a:endParaRPr lang="en-GB" dirty="0"/>
+          </a:p>
+          <a:p>
+            <a:r>
+              <a:rPr lang="en-GB" dirty="0"/>
+              <a:t>This needs to be naturally and indirectly introduced by exploring the problem of aero acoustic performance</a:t>
+            </a:r>
+          </a:p>
+          <a:p>
+            <a:r>
+              <a:rPr lang="en-GB" dirty="0"/>
+              <a:t>Treat as large design space </a:t>
+            </a:r>
+          </a:p>
         </p:txBody>
       </p:sp>
       <p:sp>
@@ -835,6 +850,15 @@
               <a:t>The key designs considered in this project will be uneven blade span and toroidal on the right.</a:t>
             </a:r>
           </a:p>
+          <a:p>
+            <a:endParaRPr lang="en-GB" dirty="0"/>
+          </a:p>
+          <a:p>
+            <a:r>
+              <a:rPr lang="en-GB" dirty="0"/>
+              <a:t>This needs to be introduced after </a:t>
+            </a:r>
+          </a:p>
         </p:txBody>
       </p:sp>
       <p:sp>
@@ -1012,8 +1036,23 @@
           <a:p>
             <a:r>
               <a:rPr lang="en-GB" dirty="0"/>
-              <a:t>For the experimental setup it's important to consider the parameters needed to define a given propellers performance. Dimensionless thrust and power coefficients can be found from blade tip speed and area. The ratio of these coefficients define a ‘static’ efficiency which is different to the typical propulsive efficiency. The values then required to be measured are the torque, thrust and angular speed.</a:t>
-            </a:r>
+              <a:t>For the experimental setup it's important to consider the parameters needed to define a given propellers performance. Dimensionless thrust and power coefficients can be found from blade tip speed and area. </a:t>
+            </a:r>
+          </a:p>
+          <a:p>
+            <a:endParaRPr lang="en-GB" dirty="0"/>
+          </a:p>
+          <a:p>
+            <a:endParaRPr lang="en-GB" dirty="0"/>
+          </a:p>
+          <a:p>
+            <a:r>
+              <a:rPr lang="en-GB" dirty="0"/>
+              <a:t>Add coefficient of merit</a:t>
+            </a:r>
+          </a:p>
+          <a:p>
+            <a:endParaRPr lang="en-GB" dirty="0"/>
           </a:p>
           <a:p>
             <a:endParaRPr lang="en-GB" dirty="0"/>
@@ -1113,6 +1152,12 @@
           </a:p>
           <a:p>
             <a:endParaRPr lang="en-GB" dirty="0"/>
+          </a:p>
+          <a:p>
+            <a:r>
+              <a:rPr lang="en-GB" dirty="0"/>
+              <a:t>Current work</a:t>
+            </a:r>
           </a:p>
         </p:txBody>
       </p:sp>
@@ -5313,7 +5358,7 @@
           <a:p>
             <a:r>
               <a:rPr lang="en-GB" dirty="0"/>
-              <a:t>Conclusion/Hypothesis</a:t>
+              <a:t>Hypothesis</a:t>
             </a:r>
           </a:p>
         </p:txBody>
@@ -5339,7 +5384,36 @@
           <a:bodyPr/>
           <a:lstStyle/>
           <a:p>
+            <a:r>
+              <a:rPr lang="en-GB" dirty="0"/>
+              <a:t>Variable blade span could promote mixing of wing tip vortices, reducing  tonal sound</a:t>
+            </a:r>
+          </a:p>
+          <a:p>
             <a:endParaRPr lang="en-GB" dirty="0"/>
+          </a:p>
+          <a:p>
+            <a:r>
+              <a:rPr lang="en-GB" dirty="0"/>
+              <a:t>Serrations on trailing edge of front loop or closely spaced propellers will reduce blade wake interaction and hence the broadband noise</a:t>
+            </a:r>
+          </a:p>
+          <a:p>
+            <a:endParaRPr lang="en-GB" dirty="0"/>
+          </a:p>
+          <a:p>
+            <a:r>
+              <a:rPr lang="en-GB" dirty="0"/>
+              <a:t>High loading at the tip will produce stronger </a:t>
+            </a:r>
+            <a:r>
+              <a:rPr lang="en-GB" dirty="0" err="1"/>
+              <a:t>vorticies</a:t>
+            </a:r>
+            <a:r>
+              <a:rPr lang="en-GB" dirty="0"/>
+              <a:t> </a:t>
+            </a:r>
           </a:p>
         </p:txBody>
       </p:sp>
@@ -6515,8 +6589,8 @@
         </p:nvGrpSpPr>
         <p:grpSpPr>
           <a:xfrm>
-            <a:off x="7287219" y="441171"/>
-            <a:ext cx="4445431" cy="1948368"/>
+            <a:off x="6354438" y="1175989"/>
+            <a:ext cx="5457290" cy="2487338"/>
             <a:chOff x="459350" y="4615094"/>
             <a:chExt cx="4445431" cy="1948368"/>
           </a:xfrm>
@@ -6608,38 +6682,8 @@
         </p:blipFill>
         <p:spPr>
           <a:xfrm>
-            <a:off x="6724323" y="2667429"/>
+            <a:off x="6748308" y="2674954"/>
             <a:ext cx="5026054" cy="4033394"/>
-          </a:xfrm>
-          <a:prstGeom prst="rect">
-            <a:avLst/>
-          </a:prstGeom>
-        </p:spPr>
-      </p:pic>
-      <p:pic>
-        <p:nvPicPr>
-          <p:cNvPr id="30" name="Picture 29">
-            <a:extLst>
-              <a:ext uri="{FF2B5EF4-FFF2-40B4-BE49-F238E27FC236}">
-                <a16:creationId xmlns:a16="http://schemas.microsoft.com/office/drawing/2014/main" id="{7CD423FC-03F4-D5A1-2483-AE0A82548D4C}"/>
-              </a:ext>
-            </a:extLst>
-          </p:cNvPr>
-          <p:cNvPicPr>
-            <a:picLocks noChangeAspect="1"/>
-          </p:cNvPicPr>
-          <p:nvPr/>
-        </p:nvPicPr>
-        <p:blipFill>
-          <a:blip r:embed="rId5"/>
-          <a:stretch>
-            <a:fillRect/>
-          </a:stretch>
-        </p:blipFill>
-        <p:spPr>
-          <a:xfrm>
-            <a:off x="420859" y="4590779"/>
-            <a:ext cx="5861841" cy="1827277"/>
           </a:xfrm>
           <a:prstGeom prst="rect">
             <a:avLst/>
@@ -6681,47 +6725,12 @@
           </a:p>
         </p:txBody>
       </p:sp>
-      <p:sp>
-        <p:nvSpPr>
-          <p:cNvPr id="34" name="TextBox 33">
-            <a:extLst>
-              <a:ext uri="{FF2B5EF4-FFF2-40B4-BE49-F238E27FC236}">
-                <a16:creationId xmlns:a16="http://schemas.microsoft.com/office/drawing/2014/main" id="{C21B5BFC-0666-1747-43A2-6F76CB712D48}"/>
-              </a:ext>
-            </a:extLst>
-          </p:cNvPr>
-          <p:cNvSpPr txBox="1"/>
-          <p:nvPr/>
-        </p:nvSpPr>
-        <p:spPr>
-          <a:xfrm>
-            <a:off x="2403245" y="5703934"/>
-            <a:ext cx="1654405" cy="369332"/>
-          </a:xfrm>
-          <a:prstGeom prst="rect">
-            <a:avLst/>
-          </a:prstGeom>
-          <a:noFill/>
-        </p:spPr>
-        <p:txBody>
-          <a:bodyPr wrap="square">
-            <a:spAutoFit/>
-          </a:bodyPr>
-          <a:lstStyle/>
-          <a:p>
-            <a:r>
-              <a:rPr lang="en-GB" dirty="0"/>
-              <a:t>B. Zang et al.</a:t>
-            </a:r>
-          </a:p>
-        </p:txBody>
-      </p:sp>
       <p:grpSp>
         <p:nvGrpSpPr>
-          <p:cNvPr id="13" name="Group 12">
-            <a:extLst>
-              <a:ext uri="{FF2B5EF4-FFF2-40B4-BE49-F238E27FC236}">
-                <a16:creationId xmlns:a16="http://schemas.microsoft.com/office/drawing/2014/main" id="{30C9D165-BE70-4E74-4603-F7C49AD44FC9}"/>
+          <p:cNvPr id="5" name="Group 4">
+            <a:extLst>
+              <a:ext uri="{FF2B5EF4-FFF2-40B4-BE49-F238E27FC236}">
+                <a16:creationId xmlns:a16="http://schemas.microsoft.com/office/drawing/2014/main" id="{5DDEF540-2758-FFDA-4A9A-934D0BF28A52}"/>
               </a:ext>
             </a:extLst>
           </p:cNvPr>
@@ -6730,48 +6739,155 @@
         </p:nvGrpSpPr>
         <p:grpSpPr>
           <a:xfrm>
-            <a:off x="6282700" y="3570606"/>
-            <a:ext cx="5336037" cy="3001521"/>
-            <a:chOff x="6282700" y="3570606"/>
-            <a:chExt cx="5336037" cy="3001521"/>
+            <a:off x="392205" y="3487974"/>
+            <a:ext cx="11197878" cy="3001521"/>
+            <a:chOff x="392205" y="3487974"/>
+            <a:chExt cx="11197878" cy="3001521"/>
           </a:xfrm>
         </p:grpSpPr>
-        <p:pic>
-          <p:nvPicPr>
-            <p:cNvPr id="6" name="Picture 5">
+        <p:grpSp>
+          <p:nvGrpSpPr>
+            <p:cNvPr id="4" name="Group 3">
               <a:extLst>
                 <a:ext uri="{FF2B5EF4-FFF2-40B4-BE49-F238E27FC236}">
-                  <a16:creationId xmlns:a16="http://schemas.microsoft.com/office/drawing/2014/main" id="{8E28C63F-94ED-AE22-8F66-C521AF20E882}"/>
+                  <a16:creationId xmlns:a16="http://schemas.microsoft.com/office/drawing/2014/main" id="{5EA873DD-E14A-D8F1-79ED-D3A98497AA28}"/>
                 </a:ext>
               </a:extLst>
             </p:cNvPr>
-            <p:cNvPicPr>
-              <a:picLocks noChangeAspect="1"/>
-            </p:cNvPicPr>
+            <p:cNvGrpSpPr/>
             <p:nvPr/>
-          </p:nvPicPr>
-          <p:blipFill>
-            <a:blip r:embed="rId6"/>
-            <a:stretch>
-              <a:fillRect/>
-            </a:stretch>
-          </p:blipFill>
-          <p:spPr>
+          </p:nvGrpSpPr>
+          <p:grpSpPr>
             <a:xfrm>
-              <a:off x="6282700" y="3570606"/>
-              <a:ext cx="5336037" cy="3001521"/>
+              <a:off x="392205" y="3487974"/>
+              <a:ext cx="11197878" cy="3001521"/>
+              <a:chOff x="420859" y="3570606"/>
+              <a:chExt cx="11197878" cy="3001521"/>
             </a:xfrm>
-            <a:prstGeom prst="rect">
-              <a:avLst/>
-            </a:prstGeom>
-          </p:spPr>
-        </p:pic>
+          </p:grpSpPr>
+          <p:pic>
+            <p:nvPicPr>
+              <p:cNvPr id="30" name="Picture 29">
+                <a:extLst>
+                  <a:ext uri="{FF2B5EF4-FFF2-40B4-BE49-F238E27FC236}">
+                    <a16:creationId xmlns:a16="http://schemas.microsoft.com/office/drawing/2014/main" id="{7CD423FC-03F4-D5A1-2483-AE0A82548D4C}"/>
+                  </a:ext>
+                </a:extLst>
+              </p:cNvPr>
+              <p:cNvPicPr>
+                <a:picLocks noChangeAspect="1"/>
+              </p:cNvPicPr>
+              <p:nvPr/>
+            </p:nvPicPr>
+            <p:blipFill>
+              <a:blip r:embed="rId5"/>
+              <a:stretch>
+                <a:fillRect/>
+              </a:stretch>
+            </p:blipFill>
+            <p:spPr>
+              <a:xfrm>
+                <a:off x="420859" y="4590779"/>
+                <a:ext cx="5861841" cy="1827277"/>
+              </a:xfrm>
+              <a:prstGeom prst="rect">
+                <a:avLst/>
+              </a:prstGeom>
+            </p:spPr>
+          </p:pic>
+          <p:grpSp>
+            <p:nvGrpSpPr>
+              <p:cNvPr id="13" name="Group 12">
+                <a:extLst>
+                  <a:ext uri="{FF2B5EF4-FFF2-40B4-BE49-F238E27FC236}">
+                    <a16:creationId xmlns:a16="http://schemas.microsoft.com/office/drawing/2014/main" id="{30C9D165-BE70-4E74-4603-F7C49AD44FC9}"/>
+                  </a:ext>
+                </a:extLst>
+              </p:cNvPr>
+              <p:cNvGrpSpPr/>
+              <p:nvPr/>
+            </p:nvGrpSpPr>
+            <p:grpSpPr>
+              <a:xfrm>
+                <a:off x="6282700" y="3570606"/>
+                <a:ext cx="5336037" cy="3001521"/>
+                <a:chOff x="6282700" y="3570606"/>
+                <a:chExt cx="5336037" cy="3001521"/>
+              </a:xfrm>
+            </p:grpSpPr>
+            <p:pic>
+              <p:nvPicPr>
+                <p:cNvPr id="6" name="Picture 5">
+                  <a:extLst>
+                    <a:ext uri="{FF2B5EF4-FFF2-40B4-BE49-F238E27FC236}">
+                      <a16:creationId xmlns:a16="http://schemas.microsoft.com/office/drawing/2014/main" id="{8E28C63F-94ED-AE22-8F66-C521AF20E882}"/>
+                    </a:ext>
+                  </a:extLst>
+                </p:cNvPr>
+                <p:cNvPicPr>
+                  <a:picLocks noChangeAspect="1"/>
+                </p:cNvPicPr>
+                <p:nvPr/>
+              </p:nvPicPr>
+              <p:blipFill>
+                <a:blip r:embed="rId6"/>
+                <a:stretch>
+                  <a:fillRect/>
+                </a:stretch>
+              </p:blipFill>
+              <p:spPr>
+                <a:xfrm>
+                  <a:off x="6282700" y="3570606"/>
+                  <a:ext cx="5336037" cy="3001521"/>
+                </a:xfrm>
+                <a:prstGeom prst="rect">
+                  <a:avLst/>
+                </a:prstGeom>
+              </p:spPr>
+            </p:pic>
+            <p:sp>
+              <p:nvSpPr>
+                <p:cNvPr id="11" name="TextBox 10">
+                  <a:extLst>
+                    <a:ext uri="{FF2B5EF4-FFF2-40B4-BE49-F238E27FC236}">
+                      <a16:creationId xmlns:a16="http://schemas.microsoft.com/office/drawing/2014/main" id="{D6258E11-FAAE-C175-D482-1D2F77033364}"/>
+                    </a:ext>
+                  </a:extLst>
+                </p:cNvPr>
+                <p:cNvSpPr txBox="1"/>
+                <p:nvPr/>
+              </p:nvSpPr>
+              <p:spPr>
+                <a:xfrm>
+                  <a:off x="8043808" y="3816655"/>
+                  <a:ext cx="2135859" cy="369332"/>
+                </a:xfrm>
+                <a:prstGeom prst="rect">
+                  <a:avLst/>
+                </a:prstGeom>
+                <a:noFill/>
+              </p:spPr>
+              <p:txBody>
+                <a:bodyPr wrap="square">
+                  <a:spAutoFit/>
+                </a:bodyPr>
+                <a:lstStyle/>
+                <a:p>
+                  <a:r>
+                    <a:rPr lang="en-GB" dirty="0"/>
+                    <a:t>L. Wang et al.</a:t>
+                  </a:r>
+                </a:p>
+              </p:txBody>
+            </p:sp>
+          </p:grpSp>
+        </p:grpSp>
         <p:sp>
           <p:nvSpPr>
-            <p:cNvPr id="11" name="TextBox 10">
+            <p:cNvPr id="34" name="TextBox 33">
               <a:extLst>
                 <a:ext uri="{FF2B5EF4-FFF2-40B4-BE49-F238E27FC236}">
-                  <a16:creationId xmlns:a16="http://schemas.microsoft.com/office/drawing/2014/main" id="{D6258E11-FAAE-C175-D482-1D2F77033364}"/>
+                  <a16:creationId xmlns:a16="http://schemas.microsoft.com/office/drawing/2014/main" id="{C21B5BFC-0666-1747-43A2-6F76CB712D48}"/>
                 </a:ext>
               </a:extLst>
             </p:cNvPr>
@@ -6780,8 +6896,8 @@
           </p:nvSpPr>
           <p:spPr>
             <a:xfrm>
-              <a:off x="8043808" y="3816655"/>
-              <a:ext cx="2135859" cy="369332"/>
+              <a:off x="2403245" y="5703934"/>
+              <a:ext cx="1654405" cy="369332"/>
             </a:xfrm>
             <a:prstGeom prst="rect">
               <a:avLst/>
@@ -6796,7 +6912,7 @@
             <a:p>
               <a:r>
                 <a:rPr lang="en-GB" dirty="0"/>
-                <a:t>L. Wang et al.</a:t>
+                <a:t>B. Zang et al.</a:t>
               </a:r>
             </a:p>
           </p:txBody>
@@ -6846,7 +6962,52 @@
                                           </p:stCondLst>
                                         </p:cTn>
                                         <p:tgtEl>
-                                          <p:spTgt spid="13"/>
+                                          <p:spTgt spid="26"/>
+                                        </p:tgtEl>
+                                        <p:attrNameLst>
+                                          <p:attrName>style.visibility</p:attrName>
+                                        </p:attrNameLst>
+                                      </p:cBhvr>
+                                      <p:to>
+                                        <p:strVal val="visible"/>
+                                      </p:to>
+                                    </p:set>
+                                  </p:childTnLst>
+                                </p:cTn>
+                              </p:par>
+                            </p:childTnLst>
+                          </p:cTn>
+                        </p:par>
+                      </p:childTnLst>
+                    </p:cTn>
+                  </p:par>
+                  <p:par>
+                    <p:cTn id="7" fill="hold">
+                      <p:stCondLst>
+                        <p:cond delay="indefinite"/>
+                      </p:stCondLst>
+                      <p:childTnLst>
+                        <p:par>
+                          <p:cTn id="8" fill="hold">
+                            <p:stCondLst>
+                              <p:cond delay="0"/>
+                            </p:stCondLst>
+                            <p:childTnLst>
+                              <p:par>
+                                <p:cTn id="9" presetID="1" presetClass="entr" presetSubtype="0" fill="hold" nodeType="clickEffect">
+                                  <p:stCondLst>
+                                    <p:cond delay="0"/>
+                                  </p:stCondLst>
+                                  <p:childTnLst>
+                                    <p:set>
+                                      <p:cBhvr>
+                                        <p:cTn id="10" dur="1" fill="hold">
+                                          <p:stCondLst>
+                                            <p:cond delay="0"/>
+                                          </p:stCondLst>
+                                        </p:cTn>
+                                        <p:tgtEl>
+                                          <p:spTgt spid="5"/>
                                         </p:tgtEl>
                                         <p:attrNameLst>
                                           <p:attrName>style.visibility</p:attrName>
@@ -7005,55 +7166,6 @@
           </a:p>
         </p:txBody>
       </p:sp>
-      <p:sp>
-        <p:nvSpPr>
-          <p:cNvPr id="10" name="Rectangle 9">
-            <a:extLst>
-              <a:ext uri="{FF2B5EF4-FFF2-40B4-BE49-F238E27FC236}">
-                <a16:creationId xmlns:a16="http://schemas.microsoft.com/office/drawing/2014/main" id="{DF87DB04-9879-0400-BB66-6CD4B59A734D}"/>
-              </a:ext>
-            </a:extLst>
-          </p:cNvPr>
-          <p:cNvSpPr/>
-          <p:nvPr/>
-        </p:nvSpPr>
-        <p:spPr>
-          <a:xfrm>
-            <a:off x="1215736" y="1787236"/>
-            <a:ext cx="4363013" cy="4094019"/>
-          </a:xfrm>
-          <a:prstGeom prst="rect">
-            <a:avLst/>
-          </a:prstGeom>
-        </p:spPr>
-        <p:style>
-          <a:lnRef idx="2">
-            <a:schemeClr val="accent1">
-              <a:shade val="15000"/>
-            </a:schemeClr>
-          </a:lnRef>
-          <a:fillRef idx="1">
-            <a:schemeClr val="accent1"/>
-          </a:fillRef>
-          <a:effectRef idx="0">
-            <a:schemeClr val="accent1"/>
-          </a:effectRef>
-          <a:fontRef idx="minor">
-            <a:schemeClr val="lt1"/>
-          </a:fontRef>
-        </p:style>
-        <p:txBody>
-          <a:bodyPr rtlCol="0" anchor="ctr"/>
-          <a:lstStyle/>
-          <a:p>
-            <a:pPr algn="ctr"/>
-            <a:r>
-              <a:rPr lang="en-GB" dirty="0"/>
-              <a:t>Uneven blade span</a:t>
-            </a:r>
-          </a:p>
-        </p:txBody>
-      </p:sp>
     </p:spTree>
     <p:extLst>
       <p:ext uri="{BB962C8B-B14F-4D97-AF65-F5344CB8AC3E}">
@@ -8040,8 +8152,8 @@
           </a:p>
         </p:txBody>
       </p:sp>
-      <mc:AlternateContent xmlns:mc="http://schemas.openxmlformats.org/markup-compatibility/2006">
-        <mc:Choice xmlns:a14="http://schemas.microsoft.com/office/drawing/2010/main" Requires="a14">
+      <mc:AlternateContent xmlns:mc="http://schemas.openxmlformats.org/markup-compatibility/2006" xmlns:a14="http://schemas.microsoft.com/office/drawing/2010/main">
+        <mc:Choice Requires="a14">
           <p:sp>
             <p:nvSpPr>
               <p:cNvPr id="3" name="Content Placeholder 2">
@@ -8376,7 +8488,7 @@
             </p:txBody>
           </p:sp>
         </mc:Choice>
-        <mc:Fallback>
+        <mc:Fallback xmlns="">
           <p:sp>
             <p:nvSpPr>
               <p:cNvPr id="3" name="Content Placeholder 2">
@@ -8657,8 +8769,8 @@
         </p:nvSpPr>
         <p:spPr>
           <a:xfrm>
-            <a:off x="838200" y="1825624"/>
-            <a:ext cx="10515600" cy="4367785"/>
+            <a:off x="709774" y="1830762"/>
+            <a:ext cx="6333162" cy="4367785"/>
           </a:xfrm>
         </p:spPr>
         <p:txBody>
@@ -8672,45 +8784,246 @@
             </a:pPr>
             <a:r>
               <a:rPr lang="en-GB" dirty="0"/>
-              <a:t>Can be separated into tonal and broadband.</a:t>
-            </a:r>
-          </a:p>
+              <a:t>Noise separated into</a:t>
+            </a:r>
+          </a:p>
+          <a:p>
+            <a:r>
+              <a:rPr lang="en-GB" dirty="0"/>
+              <a:t>Discrete frequency tonal noise</a:t>
+            </a:r>
+          </a:p>
+          <a:p>
+            <a:r>
+              <a:rPr lang="en-GB" dirty="0"/>
+              <a:t>Broadband</a:t>
+            </a:r>
+          </a:p>
+        </p:txBody>
+      </p:sp>
+      <p:sp>
+        <p:nvSpPr>
+          <p:cNvPr id="6" name="Content Placeholder 2">
+            <a:extLst>
+              <a:ext uri="{FF2B5EF4-FFF2-40B4-BE49-F238E27FC236}">
+                <a16:creationId xmlns:a16="http://schemas.microsoft.com/office/drawing/2014/main" id="{7BACF53C-DB37-050E-6D7F-B0341BBAECF9}"/>
+              </a:ext>
+            </a:extLst>
+          </p:cNvPr>
+          <p:cNvSpPr txBox="1">
+            <a:spLocks/>
+          </p:cNvSpPr>
+          <p:nvPr/>
+        </p:nvSpPr>
+        <p:spPr>
+          <a:xfrm>
+            <a:off x="6446178" y="1736582"/>
+            <a:ext cx="5857126" cy="4367785"/>
+          </a:xfrm>
+          <a:prstGeom prst="rect">
+            <a:avLst/>
+          </a:prstGeom>
+        </p:spPr>
+        <p:txBody>
+          <a:bodyPr vert="horz" lIns="91440" tIns="45720" rIns="91440" bIns="45720" rtlCol="0">
+            <a:normAutofit/>
+          </a:bodyPr>
+          <a:lstStyle>
+            <a:lvl1pPr marL="228600" indent="-228600" algn="l" defTabSz="914400" rtl="0" eaLnBrk="1" latinLnBrk="0" hangingPunct="1">
+              <a:lnSpc>
+                <a:spcPct val="90000"/>
+              </a:lnSpc>
+              <a:spcBef>
+                <a:spcPts val="1000"/>
+              </a:spcBef>
+              <a:buFont typeface="Arial" panose="020B0604020202020204" pitchFamily="34" charset="0"/>
+              <a:buChar char="•"/>
+              <a:defRPr sz="2800" kern="1200">
+                <a:solidFill>
+                  <a:schemeClr val="tx1"/>
+                </a:solidFill>
+                <a:latin typeface="+mn-lt"/>
+                <a:ea typeface="+mn-ea"/>
+                <a:cs typeface="+mn-cs"/>
+              </a:defRPr>
+            </a:lvl1pPr>
+            <a:lvl2pPr marL="685800" indent="-228600" algn="l" defTabSz="914400" rtl="0" eaLnBrk="1" latinLnBrk="0" hangingPunct="1">
+              <a:lnSpc>
+                <a:spcPct val="90000"/>
+              </a:lnSpc>
+              <a:spcBef>
+                <a:spcPts val="500"/>
+              </a:spcBef>
+              <a:buFont typeface="Arial" panose="020B0604020202020204" pitchFamily="34" charset="0"/>
+              <a:buChar char="•"/>
+              <a:defRPr sz="2400" kern="1200">
+                <a:solidFill>
+                  <a:schemeClr val="tx1"/>
+                </a:solidFill>
+                <a:latin typeface="+mn-lt"/>
+                <a:ea typeface="+mn-ea"/>
+                <a:cs typeface="+mn-cs"/>
+              </a:defRPr>
+            </a:lvl2pPr>
+            <a:lvl3pPr marL="1143000" indent="-228600" algn="l" defTabSz="914400" rtl="0" eaLnBrk="1" latinLnBrk="0" hangingPunct="1">
+              <a:lnSpc>
+                <a:spcPct val="90000"/>
+              </a:lnSpc>
+              <a:spcBef>
+                <a:spcPts val="500"/>
+              </a:spcBef>
+              <a:buFont typeface="Arial" panose="020B0604020202020204" pitchFamily="34" charset="0"/>
+              <a:buChar char="•"/>
+              <a:defRPr sz="2000" kern="1200">
+                <a:solidFill>
+                  <a:schemeClr val="tx1"/>
+                </a:solidFill>
+                <a:latin typeface="+mn-lt"/>
+                <a:ea typeface="+mn-ea"/>
+                <a:cs typeface="+mn-cs"/>
+              </a:defRPr>
+            </a:lvl3pPr>
+            <a:lvl4pPr marL="1600200" indent="-228600" algn="l" defTabSz="914400" rtl="0" eaLnBrk="1" latinLnBrk="0" hangingPunct="1">
+              <a:lnSpc>
+                <a:spcPct val="90000"/>
+              </a:lnSpc>
+              <a:spcBef>
+                <a:spcPts val="500"/>
+              </a:spcBef>
+              <a:buFont typeface="Arial" panose="020B0604020202020204" pitchFamily="34" charset="0"/>
+              <a:buChar char="•"/>
+              <a:defRPr sz="1800" kern="1200">
+                <a:solidFill>
+                  <a:schemeClr val="tx1"/>
+                </a:solidFill>
+                <a:latin typeface="+mn-lt"/>
+                <a:ea typeface="+mn-ea"/>
+                <a:cs typeface="+mn-cs"/>
+              </a:defRPr>
+            </a:lvl4pPr>
+            <a:lvl5pPr marL="2057400" indent="-228600" algn="l" defTabSz="914400" rtl="0" eaLnBrk="1" latinLnBrk="0" hangingPunct="1">
+              <a:lnSpc>
+                <a:spcPct val="90000"/>
+              </a:lnSpc>
+              <a:spcBef>
+                <a:spcPts val="500"/>
+              </a:spcBef>
+              <a:buFont typeface="Arial" panose="020B0604020202020204" pitchFamily="34" charset="0"/>
+              <a:buChar char="•"/>
+              <a:defRPr sz="1800" kern="1200">
+                <a:solidFill>
+                  <a:schemeClr val="tx1"/>
+                </a:solidFill>
+                <a:latin typeface="+mn-lt"/>
+                <a:ea typeface="+mn-ea"/>
+                <a:cs typeface="+mn-cs"/>
+              </a:defRPr>
+            </a:lvl5pPr>
+            <a:lvl6pPr marL="2514600" indent="-228600" algn="l" defTabSz="914400" rtl="0" eaLnBrk="1" latinLnBrk="0" hangingPunct="1">
+              <a:lnSpc>
+                <a:spcPct val="90000"/>
+              </a:lnSpc>
+              <a:spcBef>
+                <a:spcPts val="500"/>
+              </a:spcBef>
+              <a:buFont typeface="Arial" panose="020B0604020202020204" pitchFamily="34" charset="0"/>
+              <a:buChar char="•"/>
+              <a:defRPr sz="1800" kern="1200">
+                <a:solidFill>
+                  <a:schemeClr val="tx1"/>
+                </a:solidFill>
+                <a:latin typeface="+mn-lt"/>
+                <a:ea typeface="+mn-ea"/>
+                <a:cs typeface="+mn-cs"/>
+              </a:defRPr>
+            </a:lvl6pPr>
+            <a:lvl7pPr marL="2971800" indent="-228600" algn="l" defTabSz="914400" rtl="0" eaLnBrk="1" latinLnBrk="0" hangingPunct="1">
+              <a:lnSpc>
+                <a:spcPct val="90000"/>
+              </a:lnSpc>
+              <a:spcBef>
+                <a:spcPts val="500"/>
+              </a:spcBef>
+              <a:buFont typeface="Arial" panose="020B0604020202020204" pitchFamily="34" charset="0"/>
+              <a:buChar char="•"/>
+              <a:defRPr sz="1800" kern="1200">
+                <a:solidFill>
+                  <a:schemeClr val="tx1"/>
+                </a:solidFill>
+                <a:latin typeface="+mn-lt"/>
+                <a:ea typeface="+mn-ea"/>
+                <a:cs typeface="+mn-cs"/>
+              </a:defRPr>
+            </a:lvl7pPr>
+            <a:lvl8pPr marL="3429000" indent="-228600" algn="l" defTabSz="914400" rtl="0" eaLnBrk="1" latinLnBrk="0" hangingPunct="1">
+              <a:lnSpc>
+                <a:spcPct val="90000"/>
+              </a:lnSpc>
+              <a:spcBef>
+                <a:spcPts val="500"/>
+              </a:spcBef>
+              <a:buFont typeface="Arial" panose="020B0604020202020204" pitchFamily="34" charset="0"/>
+              <a:buChar char="•"/>
+              <a:defRPr sz="1800" kern="1200">
+                <a:solidFill>
+                  <a:schemeClr val="tx1"/>
+                </a:solidFill>
+                <a:latin typeface="+mn-lt"/>
+                <a:ea typeface="+mn-ea"/>
+                <a:cs typeface="+mn-cs"/>
+              </a:defRPr>
+            </a:lvl8pPr>
+            <a:lvl9pPr marL="3886200" indent="-228600" algn="l" defTabSz="914400" rtl="0" eaLnBrk="1" latinLnBrk="0" hangingPunct="1">
+              <a:lnSpc>
+                <a:spcPct val="90000"/>
+              </a:lnSpc>
+              <a:spcBef>
+                <a:spcPts val="500"/>
+              </a:spcBef>
+              <a:buFont typeface="Arial" panose="020B0604020202020204" pitchFamily="34" charset="0"/>
+              <a:buChar char="•"/>
+              <a:defRPr sz="1800" kern="1200">
+                <a:solidFill>
+                  <a:schemeClr val="tx1"/>
+                </a:solidFill>
+                <a:latin typeface="+mn-lt"/>
+                <a:ea typeface="+mn-ea"/>
+                <a:cs typeface="+mn-cs"/>
+              </a:defRPr>
+            </a:lvl9pPr>
+          </a:lstStyle>
           <a:p>
             <a:pPr marL="0" indent="0">
+              <a:buFont typeface="Arial" panose="020B0604020202020204" pitchFamily="34" charset="0"/>
               <a:buNone/>
             </a:pPr>
-            <a:endParaRPr lang="en-GB" dirty="0"/>
-          </a:p>
-          <a:p>
-            <a:pPr marL="0" indent="0">
-              <a:buNone/>
-            </a:pPr>
             <a:r>
               <a:rPr lang="en-GB" dirty="0"/>
-              <a:t>To quantify the perceived annoyance of sound, a psychoacoustic model must be considered</a:t>
-            </a:r>
-          </a:p>
-          <a:p>
-            <a:pPr marL="0" indent="0">
-              <a:buNone/>
-            </a:pPr>
-            <a:endParaRPr lang="en-GB" dirty="0"/>
-          </a:p>
-          <a:p>
-            <a:pPr marL="0" indent="0">
-              <a:buNone/>
-            </a:pPr>
+              <a:t>Zwicker’s psychoacoustic model</a:t>
+            </a:r>
+          </a:p>
+          <a:p>
             <a:r>
               <a:rPr lang="en-US" dirty="0"/>
-              <a:t>Psychoacoustic annoyance can be quantified </a:t>
-            </a:r>
-            <a:r>
-              <a:rPr lang="en-GB" dirty="0"/>
-              <a:t>using Zwicker’s model which defines </a:t>
-            </a:r>
+              <a:t>Loudness</a:t>
+            </a:r>
+          </a:p>
+          <a:p>
             <a:r>
               <a:rPr lang="en-US" dirty="0"/>
-              <a:t>metrics of loudness, fluctuation strength, roughness, sharpness.</a:t>
+              <a:t>fluctuation strength</a:t>
+            </a:r>
+          </a:p>
+          <a:p>
+            <a:r>
+              <a:rPr lang="en-US" dirty="0"/>
+              <a:t>Roughness</a:t>
+            </a:r>
+          </a:p>
+          <a:p>
+            <a:r>
+              <a:rPr lang="en-US" dirty="0"/>
+              <a:t>sharpness.</a:t>
             </a:r>
           </a:p>
         </p:txBody>

--- a/deliverables/michaelmas_presentation.pptx
+++ b/deliverables/michaelmas_presentation.pptx
@@ -5,20 +5,21 @@
     <p:sldMasterId id="2147483648" r:id="rId1"/>
   </p:sldMasterIdLst>
   <p:notesMasterIdLst>
-    <p:notesMasterId r:id="rId13"/>
+    <p:notesMasterId r:id="rId14"/>
   </p:notesMasterIdLst>
   <p:sldIdLst>
     <p:sldId id="256" r:id="rId2"/>
     <p:sldId id="257" r:id="rId3"/>
-    <p:sldId id="265" r:id="rId4"/>
-    <p:sldId id="267" r:id="rId5"/>
-    <p:sldId id="258" r:id="rId6"/>
-    <p:sldId id="261" r:id="rId7"/>
-    <p:sldId id="263" r:id="rId8"/>
-    <p:sldId id="264" r:id="rId9"/>
-    <p:sldId id="266" r:id="rId10"/>
-    <p:sldId id="268" r:id="rId11"/>
-    <p:sldId id="262" r:id="rId12"/>
+    <p:sldId id="271" r:id="rId4"/>
+    <p:sldId id="265" r:id="rId5"/>
+    <p:sldId id="270" r:id="rId6"/>
+    <p:sldId id="258" r:id="rId7"/>
+    <p:sldId id="261" r:id="rId8"/>
+    <p:sldId id="263" r:id="rId9"/>
+    <p:sldId id="264" r:id="rId10"/>
+    <p:sldId id="266" r:id="rId11"/>
+    <p:sldId id="268" r:id="rId12"/>
+    <p:sldId id="262" r:id="rId13"/>
   </p:sldIdLst>
   <p:sldSz cx="12192000" cy="6858000"/>
   <p:notesSz cx="6858000" cy="9144000"/>
@@ -559,6 +560,108 @@
 </p:notes>
 </file>
 
+<file path=ppt/notesSlides/notesSlide10.xml><?xml version="1.0" encoding="utf-8"?>
+<p:notes xmlns:a="http://schemas.openxmlformats.org/drawingml/2006/main" xmlns:r="http://schemas.openxmlformats.org/officeDocument/2006/relationships" xmlns:p="http://schemas.openxmlformats.org/presentationml/2006/main">
+  <p:cSld>
+    <p:spTree>
+      <p:nvGrpSpPr>
+        <p:cNvPr id="1" name=""/>
+        <p:cNvGrpSpPr/>
+        <p:nvPr/>
+      </p:nvGrpSpPr>
+      <p:grpSpPr>
+        <a:xfrm>
+          <a:off x="0" y="0"/>
+          <a:ext cx="0" cy="0"/>
+          <a:chOff x="0" y="0"/>
+          <a:chExt cx="0" cy="0"/>
+        </a:xfrm>
+      </p:grpSpPr>
+      <p:sp>
+        <p:nvSpPr>
+          <p:cNvPr id="2" name="Slide Image Placeholder 1"/>
+          <p:cNvSpPr>
+            <a:spLocks noGrp="1" noRot="1" noChangeAspect="1"/>
+          </p:cNvSpPr>
+          <p:nvPr>
+            <p:ph type="sldImg"/>
+          </p:nvPr>
+        </p:nvSpPr>
+        <p:spPr/>
+      </p:sp>
+      <p:sp>
+        <p:nvSpPr>
+          <p:cNvPr id="3" name="Notes Placeholder 2"/>
+          <p:cNvSpPr>
+            <a:spLocks noGrp="1"/>
+          </p:cNvSpPr>
+          <p:nvPr>
+            <p:ph type="body" idx="1"/>
+          </p:nvPr>
+        </p:nvSpPr>
+        <p:spPr/>
+        <p:txBody>
+          <a:bodyPr/>
+          <a:lstStyle/>
+          <a:p>
+            <a:r>
+              <a:rPr lang="en-GB" dirty="0"/>
+              <a:t>Possible Qs</a:t>
+            </a:r>
+          </a:p>
+          <a:p>
+            <a:r>
+              <a:rPr lang="en-GB" dirty="0"/>
+              <a:t>Reynolds Number</a:t>
+            </a:r>
+          </a:p>
+          <a:p>
+            <a:r>
+              <a:rPr lang="en-GB" dirty="0"/>
+              <a:t>Propulsive efficiency vs figure of merit</a:t>
+            </a:r>
+          </a:p>
+          <a:p>
+            <a:endParaRPr lang="en-GB" dirty="0"/>
+          </a:p>
+        </p:txBody>
+      </p:sp>
+      <p:sp>
+        <p:nvSpPr>
+          <p:cNvPr id="4" name="Slide Number Placeholder 3"/>
+          <p:cNvSpPr>
+            <a:spLocks noGrp="1"/>
+          </p:cNvSpPr>
+          <p:nvPr>
+            <p:ph type="sldNum" sz="quarter" idx="5"/>
+          </p:nvPr>
+        </p:nvSpPr>
+        <p:spPr/>
+        <p:txBody>
+          <a:bodyPr/>
+          <a:lstStyle/>
+          <a:p>
+            <a:fld id="{339AB5C0-8D71-4250-8AD2-76EE22722959}" type="slidenum">
+              <a:rPr lang="en-GB" smtClean="0"/>
+              <a:t>12</a:t>
+            </a:fld>
+            <a:endParaRPr lang="en-GB"/>
+          </a:p>
+        </p:txBody>
+      </p:sp>
+    </p:spTree>
+    <p:extLst>
+      <p:ext uri="{BB962C8B-B14F-4D97-AF65-F5344CB8AC3E}">
+        <p14:creationId xmlns:p14="http://schemas.microsoft.com/office/powerpoint/2010/main" val="1987813147"/>
+      </p:ext>
+    </p:extLst>
+  </p:cSld>
+  <p:clrMapOvr>
+    <a:masterClrMapping/>
+  </p:clrMapOvr>
+</p:notes>
+</file>
+
 <file path=ppt/notesSlides/notesSlide2.xml><?xml version="1.0" encoding="utf-8"?>
 <p:notes xmlns:a="http://schemas.openxmlformats.org/drawingml/2006/main" xmlns:r="http://schemas.openxmlformats.org/officeDocument/2006/relationships" xmlns:p="http://schemas.openxmlformats.org/presentationml/2006/main">
   <p:cSld>
@@ -680,7 +783,13 @@
   <p:cSld>
     <p:spTree>
       <p:nvGrpSpPr>
-        <p:cNvPr id="1" name=""/>
+        <p:cNvPr id="1" name="">
+          <a:extLst>
+            <a:ext uri="{FF2B5EF4-FFF2-40B4-BE49-F238E27FC236}">
+              <a16:creationId xmlns:a16="http://schemas.microsoft.com/office/drawing/2014/main" id="{1CC85965-03A0-3412-9CD0-8FE7807537F4}"/>
+            </a:ext>
+          </a:extLst>
+        </p:cNvPr>
         <p:cNvGrpSpPr/>
         <p:nvPr/>
       </p:nvGrpSpPr>
@@ -694,7 +803,13 @@
       </p:grpSpPr>
       <p:sp>
         <p:nvSpPr>
-          <p:cNvPr id="2" name="Slide Image Placeholder 1"/>
+          <p:cNvPr id="2" name="Slide Image Placeholder 1">
+            <a:extLst>
+              <a:ext uri="{FF2B5EF4-FFF2-40B4-BE49-F238E27FC236}">
+                <a16:creationId xmlns:a16="http://schemas.microsoft.com/office/drawing/2014/main" id="{0AE6E0E5-229F-CCAB-1A3E-1C4984C170E5}"/>
+              </a:ext>
+            </a:extLst>
+          </p:cNvPr>
           <p:cNvSpPr>
             <a:spLocks noGrp="1" noRot="1" noChangeAspect="1"/>
           </p:cNvSpPr>
@@ -706,7 +821,13 @@
       </p:sp>
       <p:sp>
         <p:nvSpPr>
-          <p:cNvPr id="3" name="Notes Placeholder 2"/>
+          <p:cNvPr id="3" name="Notes Placeholder 2">
+            <a:extLst>
+              <a:ext uri="{FF2B5EF4-FFF2-40B4-BE49-F238E27FC236}">
+                <a16:creationId xmlns:a16="http://schemas.microsoft.com/office/drawing/2014/main" id="{0CB81DF3-6DFC-9AA1-341D-1C675D6ADB32}"/>
+              </a:ext>
+            </a:extLst>
+          </p:cNvPr>
           <p:cNvSpPr>
             <a:spLocks noGrp="1"/>
           </p:cNvSpPr>
@@ -721,53 +842,26 @@
           <a:p>
             <a:r>
               <a:rPr lang="en-GB" dirty="0"/>
-              <a:t>Of course this isn’t a new topic </a:t>
+              <a:t>The objectives of this project are to design and build an experimental setup to measure aerodynamic and aeroacoustics performance.</a:t>
             </a:r>
           </a:p>
           <a:p>
             <a:r>
               <a:rPr lang="en-GB" dirty="0"/>
-              <a:t>Previous research has covered changes to tip geometry which has reduced tonality from tip vortex blade interaction.</a:t>
-            </a:r>
-          </a:p>
-          <a:p>
-            <a:r>
-              <a:rPr lang="en-GB" dirty="0"/>
-              <a:t>Blade sweep was found to have little affect</a:t>
-            </a:r>
-          </a:p>
-          <a:p>
-            <a:r>
-              <a:rPr lang="en-GB" dirty="0"/>
-              <a:t>Variable blade spacing and trailing edge serrations reduced the broadband noise by destructive acoustic interference and mixing</a:t>
-            </a:r>
-          </a:p>
-          <a:p>
-            <a:r>
-              <a:rPr lang="en-GB" dirty="0"/>
-              <a:t>It's also worth noting that these trailing edge serrations at low Reynolds numbers were inspired by owl wings.</a:t>
-            </a:r>
-          </a:p>
-          <a:p>
-            <a:endParaRPr lang="en-GB" dirty="0"/>
-          </a:p>
-          <a:p>
-            <a:r>
-              <a:rPr lang="en-GB" dirty="0"/>
-              <a:t>This needs to be naturally and indirectly introduced by exploring the problem of aero acoustic performance</a:t>
-            </a:r>
-          </a:p>
-          <a:p>
-            <a:r>
-              <a:rPr lang="en-GB" dirty="0"/>
-              <a:t>Treat as large design space </a:t>
-            </a:r>
-          </a:p>
-        </p:txBody>
-      </p:sp>
-      <p:sp>
-        <p:nvSpPr>
-          <p:cNvPr id="4" name="Slide Number Placeholder 3"/>
+              <a:t>This will be done for varying propeller geometry</a:t>
+            </a:r>
+          </a:p>
+        </p:txBody>
+      </p:sp>
+      <p:sp>
+        <p:nvSpPr>
+          <p:cNvPr id="4" name="Slide Number Placeholder 3">
+            <a:extLst>
+              <a:ext uri="{FF2B5EF4-FFF2-40B4-BE49-F238E27FC236}">
+                <a16:creationId xmlns:a16="http://schemas.microsoft.com/office/drawing/2014/main" id="{138763B6-BEAA-719C-B63B-028D5D72ECC4}"/>
+              </a:ext>
+            </a:extLst>
+          </p:cNvPr>
           <p:cNvSpPr>
             <a:spLocks noGrp="1"/>
           </p:cNvSpPr>
@@ -791,7 +885,7 @@
     </p:spTree>
     <p:extLst>
       <p:ext uri="{BB962C8B-B14F-4D97-AF65-F5344CB8AC3E}">
-        <p14:creationId xmlns:p14="http://schemas.microsoft.com/office/powerpoint/2010/main" val="1580789794"/>
+        <p14:creationId xmlns:p14="http://schemas.microsoft.com/office/powerpoint/2010/main" val="1425279334"/>
       </p:ext>
     </p:extLst>
   </p:cSld>
@@ -847,7 +941,31 @@
           <a:p>
             <a:r>
               <a:rPr lang="en-GB" dirty="0"/>
-              <a:t>The key designs considered in this project will be uneven blade span and toroidal on the right.</a:t>
+              <a:t>Of course this isn’t a new topic </a:t>
+            </a:r>
+          </a:p>
+          <a:p>
+            <a:r>
+              <a:rPr lang="en-GB" dirty="0"/>
+              <a:t>Previous research has covered changes to tip geometry which has reduced tonality from tip vortex blade interaction.</a:t>
+            </a:r>
+          </a:p>
+          <a:p>
+            <a:r>
+              <a:rPr lang="en-GB" dirty="0"/>
+              <a:t>Blade sweep was found to have little affect</a:t>
+            </a:r>
+          </a:p>
+          <a:p>
+            <a:r>
+              <a:rPr lang="en-GB" dirty="0"/>
+              <a:t>Variable blade spacing and trailing edge serrations reduced the broadband noise by destructive acoustic interference and mixing</a:t>
+            </a:r>
+          </a:p>
+          <a:p>
+            <a:r>
+              <a:rPr lang="en-GB" dirty="0"/>
+              <a:t>It's also worth noting that these trailing edge serrations at low Reynolds numbers were inspired by owl wings.</a:t>
             </a:r>
           </a:p>
           <a:p>
@@ -856,7 +974,13 @@
           <a:p>
             <a:r>
               <a:rPr lang="en-GB" dirty="0"/>
-              <a:t>This needs to be introduced after </a:t>
+              <a:t>This needs to be naturally and indirectly introduced by exploring the problem of aero acoustic performance</a:t>
+            </a:r>
+          </a:p>
+          <a:p>
+            <a:r>
+              <a:rPr lang="en-GB" dirty="0"/>
+              <a:t>Treat as large design space </a:t>
             </a:r>
           </a:p>
         </p:txBody>
@@ -887,7 +1011,7 @@
     </p:spTree>
     <p:extLst>
       <p:ext uri="{BB962C8B-B14F-4D97-AF65-F5344CB8AC3E}">
-        <p14:creationId xmlns:p14="http://schemas.microsoft.com/office/powerpoint/2010/main" val="399730149"/>
+        <p14:creationId xmlns:p14="http://schemas.microsoft.com/office/powerpoint/2010/main" val="1580789794"/>
       </p:ext>
     </p:extLst>
   </p:cSld>
@@ -971,7 +1095,7 @@
           <a:p>
             <a:fld id="{339AB5C0-8D71-4250-8AD2-76EE22722959}" type="slidenum">
               <a:rPr lang="en-GB" smtClean="0"/>
-              <a:t>5</a:t>
+              <a:t>6</a:t>
             </a:fld>
             <a:endParaRPr lang="en-GB"/>
           </a:p>
@@ -1036,7 +1160,7 @@
           <a:p>
             <a:r>
               <a:rPr lang="en-GB" dirty="0"/>
-              <a:t>For the experimental setup it's important to consider the parameters needed to define a given propellers performance. Dimensionless thrust and power coefficients can be found from blade tip speed and area. </a:t>
+              <a:t>For the experimental setup it's important to consider the parameters needed to define a given propellers performance. Dimensionless thrust and torque coefficients can be found from blade tip speed and area. </a:t>
             </a:r>
           </a:p>
           <a:p>
@@ -1076,7 +1200,7 @@
           <a:p>
             <a:fld id="{339AB5C0-8D71-4250-8AD2-76EE22722959}" type="slidenum">
               <a:rPr lang="en-GB" smtClean="0"/>
-              <a:t>6</a:t>
+              <a:t>7</a:t>
             </a:fld>
             <a:endParaRPr lang="en-GB"/>
           </a:p>
@@ -1178,7 +1302,7 @@
           <a:p>
             <a:fld id="{339AB5C0-8D71-4250-8AD2-76EE22722959}" type="slidenum">
               <a:rPr lang="en-GB" smtClean="0"/>
-              <a:t>7</a:t>
+              <a:t>8</a:t>
             </a:fld>
             <a:endParaRPr lang="en-GB"/>
           </a:p>
@@ -1262,7 +1386,7 @@
           <a:p>
             <a:fld id="{339AB5C0-8D71-4250-8AD2-76EE22722959}" type="slidenum">
               <a:rPr lang="en-GB" smtClean="0"/>
-              <a:t>8</a:t>
+              <a:t>9</a:t>
             </a:fld>
             <a:endParaRPr lang="en-GB"/>
           </a:p>
@@ -1346,7 +1470,7 @@
           <a:p>
             <a:fld id="{339AB5C0-8D71-4250-8AD2-76EE22722959}" type="slidenum">
               <a:rPr lang="en-GB" smtClean="0"/>
-              <a:t>9</a:t>
+              <a:t>10</a:t>
             </a:fld>
             <a:endParaRPr lang="en-GB"/>
           </a:p>
@@ -5156,8 +5280,8 @@
         </p:nvSpPr>
         <p:spPr>
           <a:xfrm>
-            <a:off x="4162567" y="818984"/>
-            <a:ext cx="6714699" cy="3178689"/>
+            <a:off x="4162567" y="2192482"/>
+            <a:ext cx="6714699" cy="1805191"/>
           </a:xfrm>
         </p:spPr>
         <p:txBody>
@@ -5168,7 +5292,7 @@
           <a:p>
             <a:pPr algn="l"/>
             <a:r>
-              <a:rPr lang="en-GB" sz="4800">
+              <a:rPr lang="en-GB" sz="4800" dirty="0">
                 <a:solidFill>
                   <a:srgbClr val="FFFFFF"/>
                 </a:solidFill>
@@ -5335,6 +5459,247 @@
           <a:chExt cx="0" cy="0"/>
         </a:xfrm>
       </p:grpSpPr>
+      <p:pic>
+        <p:nvPicPr>
+          <p:cNvPr id="5" name="Picture 4">
+            <a:extLst>
+              <a:ext uri="{FF2B5EF4-FFF2-40B4-BE49-F238E27FC236}">
+                <a16:creationId xmlns:a16="http://schemas.microsoft.com/office/drawing/2014/main" id="{DE22670F-0D71-AD7E-B183-43040CD2741A}"/>
+              </a:ext>
+            </a:extLst>
+          </p:cNvPr>
+          <p:cNvPicPr>
+            <a:picLocks noChangeAspect="1"/>
+          </p:cNvPicPr>
+          <p:nvPr/>
+        </p:nvPicPr>
+        <p:blipFill>
+          <a:blip r:embed="rId3"/>
+          <a:stretch>
+            <a:fillRect/>
+          </a:stretch>
+        </p:blipFill>
+        <p:spPr>
+          <a:xfrm>
+            <a:off x="5303978" y="447674"/>
+            <a:ext cx="6820194" cy="6175375"/>
+          </a:xfrm>
+          <a:prstGeom prst="rect">
+            <a:avLst/>
+          </a:prstGeom>
+        </p:spPr>
+      </p:pic>
+      <p:sp>
+        <p:nvSpPr>
+          <p:cNvPr id="2" name="Title 1">
+            <a:extLst>
+              <a:ext uri="{FF2B5EF4-FFF2-40B4-BE49-F238E27FC236}">
+                <a16:creationId xmlns:a16="http://schemas.microsoft.com/office/drawing/2014/main" id="{31AA5FBC-085C-6F67-FFE6-B768D4CC0250}"/>
+              </a:ext>
+            </a:extLst>
+          </p:cNvPr>
+          <p:cNvSpPr>
+            <a:spLocks noGrp="1"/>
+          </p:cNvSpPr>
+          <p:nvPr>
+            <p:ph type="title"/>
+          </p:nvPr>
+        </p:nvSpPr>
+        <p:spPr>
+          <a:xfrm>
+            <a:off x="438150" y="155575"/>
+            <a:ext cx="10515600" cy="1325563"/>
+          </a:xfrm>
+        </p:spPr>
+        <p:txBody>
+          <a:bodyPr/>
+          <a:lstStyle/>
+          <a:p>
+            <a:r>
+              <a:rPr lang="en-GB" dirty="0"/>
+              <a:t>Acoustic measurements</a:t>
+            </a:r>
+          </a:p>
+        </p:txBody>
+      </p:sp>
+      <mc:AlternateContent xmlns:mc="http://schemas.openxmlformats.org/markup-compatibility/2006" xmlns:a14="http://schemas.microsoft.com/office/drawing/2010/main">
+        <mc:Choice Requires="a14">
+          <p:sp>
+            <p:nvSpPr>
+              <p:cNvPr id="7" name="TextBox 6">
+                <a:extLst>
+                  <a:ext uri="{FF2B5EF4-FFF2-40B4-BE49-F238E27FC236}">
+                    <a16:creationId xmlns:a16="http://schemas.microsoft.com/office/drawing/2014/main" id="{5FE54BC4-6E6B-11A7-1B30-9A93B0ACC3A4}"/>
+                  </a:ext>
+                </a:extLst>
+              </p:cNvPr>
+              <p:cNvSpPr txBox="1"/>
+              <p:nvPr/>
+            </p:nvSpPr>
+            <p:spPr>
+              <a:xfrm rot="2674917">
+                <a:off x="7101426" y="3867428"/>
+                <a:ext cx="675686" cy="369332"/>
+              </a:xfrm>
+              <a:prstGeom prst="rect">
+                <a:avLst/>
+              </a:prstGeom>
+              <a:solidFill>
+                <a:schemeClr val="bg1"/>
+              </a:solidFill>
+            </p:spPr>
+            <p:txBody>
+              <a:bodyPr wrap="square" rtlCol="0">
+                <a:spAutoFit/>
+              </a:bodyPr>
+              <a:lstStyle/>
+              <a:p>
+                <a:pPr/>
+                <a14:m>
+                  <m:oMathPara xmlns:m="http://schemas.openxmlformats.org/officeDocument/2006/math">
+                    <m:oMathParaPr>
+                      <m:jc m:val="centerGroup"/>
+                    </m:oMathParaPr>
+                    <m:oMath xmlns:m="http://schemas.openxmlformats.org/officeDocument/2006/math">
+                      <m:r>
+                        <a:rPr lang="en-GB" b="0" i="1" smtClean="0">
+                          <a:latin typeface="Cambria Math" panose="02040503050406030204" pitchFamily="18" charset="0"/>
+                        </a:rPr>
+                        <m:t>2.5</m:t>
+                      </m:r>
+                      <m:r>
+                        <a:rPr lang="en-GB" b="0" i="1" smtClean="0">
+                          <a:latin typeface="Cambria Math" panose="02040503050406030204" pitchFamily="18" charset="0"/>
+                        </a:rPr>
+                        <m:t>𝑑</m:t>
+                      </m:r>
+                    </m:oMath>
+                  </m:oMathPara>
+                </a14:m>
+                <a:endParaRPr lang="en-GB" dirty="0"/>
+              </a:p>
+            </p:txBody>
+          </p:sp>
+        </mc:Choice>
+        <mc:Fallback xmlns="">
+          <p:sp>
+            <p:nvSpPr>
+              <p:cNvPr id="7" name="TextBox 6">
+                <a:extLst>
+                  <a:ext uri="{FF2B5EF4-FFF2-40B4-BE49-F238E27FC236}">
+                    <a16:creationId xmlns:a16="http://schemas.microsoft.com/office/drawing/2014/main" id="{5FE54BC4-6E6B-11A7-1B30-9A93B0ACC3A4}"/>
+                  </a:ext>
+                </a:extLst>
+              </p:cNvPr>
+              <p:cNvSpPr txBox="1">
+                <a:spLocks noRot="1" noChangeAspect="1" noMove="1" noResize="1" noEditPoints="1" noAdjustHandles="1" noChangeArrowheads="1" noChangeShapeType="1" noTextEdit="1"/>
+              </p:cNvSpPr>
+              <p:nvPr/>
+            </p:nvSpPr>
+            <p:spPr>
+              <a:xfrm rot="2674917">
+                <a:off x="7101426" y="3867428"/>
+                <a:ext cx="675686" cy="369332"/>
+              </a:xfrm>
+              <a:prstGeom prst="rect">
+                <a:avLst/>
+              </a:prstGeom>
+              <a:blipFill>
+                <a:blip r:embed="rId4"/>
+                <a:stretch>
+                  <a:fillRect/>
+                </a:stretch>
+              </a:blipFill>
+            </p:spPr>
+            <p:txBody>
+              <a:bodyPr/>
+              <a:lstStyle/>
+              <a:p>
+                <a:r>
+                  <a:rPr lang="en-GB">
+                    <a:noFill/>
+                  </a:rPr>
+                  <a:t> </a:t>
+                </a:r>
+              </a:p>
+            </p:txBody>
+          </p:sp>
+        </mc:Fallback>
+      </mc:AlternateContent>
+      <p:sp>
+        <p:nvSpPr>
+          <p:cNvPr id="3" name="TextBox 2">
+            <a:extLst>
+              <a:ext uri="{FF2B5EF4-FFF2-40B4-BE49-F238E27FC236}">
+                <a16:creationId xmlns:a16="http://schemas.microsoft.com/office/drawing/2014/main" id="{2994AB0B-01E0-C9B1-FAB4-4B6511A40250}"/>
+              </a:ext>
+            </a:extLst>
+          </p:cNvPr>
+          <p:cNvSpPr txBox="1"/>
+          <p:nvPr/>
+        </p:nvSpPr>
+        <p:spPr>
+          <a:xfrm>
+            <a:off x="438150" y="1574655"/>
+            <a:ext cx="5027468" cy="2677656"/>
+          </a:xfrm>
+          <a:prstGeom prst="rect">
+            <a:avLst/>
+          </a:prstGeom>
+          <a:noFill/>
+        </p:spPr>
+        <p:txBody>
+          <a:bodyPr wrap="square" rtlCol="0">
+            <a:spAutoFit/>
+          </a:bodyPr>
+          <a:lstStyle/>
+          <a:p>
+            <a:r>
+              <a:rPr lang="en-GB" sz="2400" dirty="0"/>
+              <a:t>Ideally, the propeller acoustics must be isolated from the motor and motor driver.</a:t>
+            </a:r>
+          </a:p>
+          <a:p>
+            <a:endParaRPr lang="en-GB" sz="2400" dirty="0"/>
+          </a:p>
+          <a:p>
+            <a:r>
+              <a:rPr lang="en-GB" sz="2400" dirty="0"/>
+              <a:t>However, this is not possible and so the acoustics of no propeller will be measured at the same speed</a:t>
+            </a:r>
+          </a:p>
+        </p:txBody>
+      </p:sp>
+    </p:spTree>
+    <p:extLst>
+      <p:ext uri="{BB962C8B-B14F-4D97-AF65-F5344CB8AC3E}">
+        <p14:creationId xmlns:p14="http://schemas.microsoft.com/office/powerpoint/2010/main" val="3386808046"/>
+      </p:ext>
+    </p:extLst>
+  </p:cSld>
+  <p:clrMapOvr>
+    <a:masterClrMapping/>
+  </p:clrMapOvr>
+</p:sld>
+</file>
+
+<file path=ppt/slides/slide11.xml><?xml version="1.0" encoding="utf-8"?>
+<p:sld xmlns:a="http://schemas.openxmlformats.org/drawingml/2006/main" xmlns:r="http://schemas.openxmlformats.org/officeDocument/2006/relationships" xmlns:p="http://schemas.openxmlformats.org/presentationml/2006/main">
+  <p:cSld>
+    <p:spTree>
+      <p:nvGrpSpPr>
+        <p:cNvPr id="1" name=""/>
+        <p:cNvGrpSpPr/>
+        <p:nvPr/>
+      </p:nvGrpSpPr>
+      <p:grpSpPr>
+        <a:xfrm>
+          <a:off x="0" y="0"/>
+          <a:ext cx="0" cy="0"/>
+          <a:chOff x="0" y="0"/>
+          <a:chExt cx="0" cy="0"/>
+        </a:xfrm>
+      </p:grpSpPr>
       <p:sp>
         <p:nvSpPr>
           <p:cNvPr id="2" name="Title 1">
@@ -5430,7 +5795,7 @@
 </p:sld>
 </file>
 
-<file path=ppt/slides/slide11.xml><?xml version="1.0" encoding="utf-8"?>
+<file path=ppt/slides/slide12.xml><?xml version="1.0" encoding="utf-8"?>
 <p:sld xmlns:a="http://schemas.openxmlformats.org/drawingml/2006/main" xmlns:r="http://schemas.openxmlformats.org/officeDocument/2006/relationships" xmlns:p="http://schemas.openxmlformats.org/presentationml/2006/main">
   <p:cSld>
     <p:spTree>
@@ -5966,7 +6331,7 @@
         </p:nvSpPr>
         <p:spPr>
           <a:xfrm>
-            <a:off x="1371599" y="294538"/>
+            <a:off x="999679" y="439994"/>
             <a:ext cx="9895951" cy="1033669"/>
           </a:xfrm>
         </p:spPr>
@@ -5977,7 +6342,7 @@
           <a:lstStyle/>
           <a:p>
             <a:r>
-              <a:rPr lang="en-GB" sz="4000">
+              <a:rPr lang="en-GB" sz="4000" dirty="0">
                 <a:solidFill>
                   <a:srgbClr val="FFFFFF"/>
                 </a:solidFill>
@@ -6005,8 +6370,8 @@
         </p:nvSpPr>
         <p:spPr>
           <a:xfrm>
-            <a:off x="459350" y="1768200"/>
-            <a:ext cx="11484411" cy="4795261"/>
+            <a:off x="999679" y="1768201"/>
+            <a:ext cx="9599050" cy="4795261"/>
           </a:xfrm>
         </p:spPr>
         <p:txBody>
@@ -6020,7 +6385,7 @@
             </a:pPr>
             <a:r>
               <a:rPr lang="en-GB" dirty="0"/>
-              <a:t>The widespread adoption of drone-based services is limited by their negative public perception, which is in part due to the irritating noise they make.</a:t>
+              <a:t>Noise pollution acts as a barrier for adoption of drone-based services</a:t>
             </a:r>
           </a:p>
           <a:p>
@@ -6035,7 +6400,7 @@
             </a:pPr>
             <a:r>
               <a:rPr lang="en-GB" dirty="0"/>
-              <a:t>Propellers account for the primary source of noise but are also important for productivity.</a:t>
+              <a:t>Propellers are the primary source of noise</a:t>
             </a:r>
           </a:p>
           <a:p>
@@ -6050,7 +6415,7 @@
             </a:pPr>
             <a:r>
               <a:rPr lang="en-GB" dirty="0"/>
-              <a:t>Recent research has focused on optimising aerodynamic and aeroacoustics performance to overcome these barriers.</a:t>
+              <a:t>Aerodynamic and aero-acoustic performance are closely related</a:t>
             </a:r>
           </a:p>
         </p:txBody>
@@ -6084,7 +6449,7 @@
         <p:cNvPr id="1" name="">
           <a:extLst>
             <a:ext uri="{FF2B5EF4-FFF2-40B4-BE49-F238E27FC236}">
-              <a16:creationId xmlns:a16="http://schemas.microsoft.com/office/drawing/2014/main" id="{05B5025B-3D80-0CC4-2006-923A1BC2AE9D}"/>
+              <a16:creationId xmlns:a16="http://schemas.microsoft.com/office/drawing/2014/main" id="{34D59634-B6D2-CA0D-3E91-0CC9F230D0C9}"/>
             </a:ext>
           </a:extLst>
         </p:cNvPr>
@@ -6104,7 +6469,7 @@
           <p:cNvPr id="8" name="Rectangle 7">
             <a:extLst>
               <a:ext uri="{FF2B5EF4-FFF2-40B4-BE49-F238E27FC236}">
-                <a16:creationId xmlns:a16="http://schemas.microsoft.com/office/drawing/2014/main" id="{33D4F78A-F37B-B1DE-69AB-C270AC8F17AB}"/>
+                <a16:creationId xmlns:a16="http://schemas.microsoft.com/office/drawing/2014/main" id="{19F2C86B-310B-26E1-B5F6-92321096F370}"/>
               </a:ext>
               <a:ext uri="{C183D7F6-B498-43B3-948B-1728B52AA6E4}">
                 <adec:decorative xmlns:adec="http://schemas.microsoft.com/office/drawing/2017/decorative" val="1"/>
@@ -6180,7 +6545,7 @@
           <p:cNvPr id="10" name="Rectangle 9">
             <a:extLst>
               <a:ext uri="{FF2B5EF4-FFF2-40B4-BE49-F238E27FC236}">
-                <a16:creationId xmlns:a16="http://schemas.microsoft.com/office/drawing/2014/main" id="{035745CF-9619-AF40-1167-3856C048C0B8}"/>
+                <a16:creationId xmlns:a16="http://schemas.microsoft.com/office/drawing/2014/main" id="{74496510-076E-6529-3C69-A5D983CF8149}"/>
               </a:ext>
               <a:ext uri="{C183D7F6-B498-43B3-948B-1728B52AA6E4}">
                 <adec:decorative xmlns:adec="http://schemas.microsoft.com/office/drawing/2017/decorative" val="1"/>
@@ -6253,7 +6618,7 @@
           <p:cNvPr id="12" name="Rectangle 11">
             <a:extLst>
               <a:ext uri="{FF2B5EF4-FFF2-40B4-BE49-F238E27FC236}">
-                <a16:creationId xmlns:a16="http://schemas.microsoft.com/office/drawing/2014/main" id="{4CE8B599-FC68-4E63-838A-8742AE80E50C}"/>
+                <a16:creationId xmlns:a16="http://schemas.microsoft.com/office/drawing/2014/main" id="{7AB27B4C-4A61-6EE3-38BA-70D67541991B}"/>
               </a:ext>
               <a:ext uri="{C183D7F6-B498-43B3-948B-1728B52AA6E4}">
                 <adec:decorative xmlns:adec="http://schemas.microsoft.com/office/drawing/2017/decorative" val="1"/>
@@ -6329,7 +6694,7 @@
           <p:cNvPr id="14" name="Rectangle 13">
             <a:extLst>
               <a:ext uri="{FF2B5EF4-FFF2-40B4-BE49-F238E27FC236}">
-                <a16:creationId xmlns:a16="http://schemas.microsoft.com/office/drawing/2014/main" id="{0CF0590A-59B4-6573-5680-74BEE528BF36}"/>
+                <a16:creationId xmlns:a16="http://schemas.microsoft.com/office/drawing/2014/main" id="{40A801EC-4108-CBBB-9056-375B4702A29E}"/>
               </a:ext>
               <a:ext uri="{C183D7F6-B498-43B3-948B-1728B52AA6E4}">
                 <adec:decorative xmlns:adec="http://schemas.microsoft.com/office/drawing/2017/decorative" val="1"/>
@@ -6404,7 +6769,7 @@
           <p:cNvPr id="16" name="Rectangle 15">
             <a:extLst>
               <a:ext uri="{FF2B5EF4-FFF2-40B4-BE49-F238E27FC236}">
-                <a16:creationId xmlns:a16="http://schemas.microsoft.com/office/drawing/2014/main" id="{DB2AD4C7-3E3E-AA35-1F16-8BCB0365387B}"/>
+                <a16:creationId xmlns:a16="http://schemas.microsoft.com/office/drawing/2014/main" id="{95D6A083-C23A-C199-CBA4-DE8C0F06F065}"/>
               </a:ext>
               <a:ext uri="{C183D7F6-B498-43B3-948B-1728B52AA6E4}">
                 <adec:decorative xmlns:adec="http://schemas.microsoft.com/office/drawing/2017/decorative" val="1"/>
@@ -6480,7 +6845,7 @@
           <p:cNvPr id="2" name="Title 1">
             <a:extLst>
               <a:ext uri="{FF2B5EF4-FFF2-40B4-BE49-F238E27FC236}">
-                <a16:creationId xmlns:a16="http://schemas.microsoft.com/office/drawing/2014/main" id="{09DF2F80-4B94-3290-D89A-4F89C94F2D60}"/>
+                <a16:creationId xmlns:a16="http://schemas.microsoft.com/office/drawing/2014/main" id="{E5B2840D-6AEF-7E31-8A46-F7D203459E20}"/>
               </a:ext>
             </a:extLst>
           </p:cNvPr>
@@ -6493,7 +6858,7 @@
         </p:nvSpPr>
         <p:spPr>
           <a:xfrm>
-            <a:off x="392205" y="285873"/>
+            <a:off x="1371599" y="294538"/>
             <a:ext cx="9895951" cy="1033669"/>
           </a:xfrm>
         </p:spPr>
@@ -6509,7 +6874,7 @@
                   <a:srgbClr val="FFFFFF"/>
                 </a:solidFill>
               </a:rPr>
-              <a:t>Previous aero acoustic research</a:t>
+              <a:t>Sources of propeller sound</a:t>
             </a:r>
           </a:p>
         </p:txBody>
@@ -6519,7 +6884,7 @@
           <p:cNvPr id="3" name="Content Placeholder 2">
             <a:extLst>
               <a:ext uri="{FF2B5EF4-FFF2-40B4-BE49-F238E27FC236}">
-                <a16:creationId xmlns:a16="http://schemas.microsoft.com/office/drawing/2014/main" id="{540CA7AA-5659-48B1-C827-BCB210B1C7E8}"/>
+                <a16:creationId xmlns:a16="http://schemas.microsoft.com/office/drawing/2014/main" id="{CD048A5A-3BCD-676E-62FE-E0615AA4A1EB}"/>
               </a:ext>
             </a:extLst>
           </p:cNvPr>
@@ -6532,8 +6897,8 @@
         </p:nvSpPr>
         <p:spPr>
           <a:xfrm>
-            <a:off x="227818" y="1682605"/>
-            <a:ext cx="9724031" cy="3001521"/>
+            <a:off x="444804" y="2047009"/>
+            <a:ext cx="10398046" cy="4810991"/>
           </a:xfrm>
         </p:spPr>
         <p:txBody>
@@ -6542,17 +6907,273 @@
           </a:bodyPr>
           <a:lstStyle/>
           <a:p>
+            <a:pPr marL="0" indent="0">
+              <a:buNone/>
+            </a:pPr>
+            <a:r>
+              <a:rPr lang="en-GB" dirty="0"/>
+              <a:t>Discrete frequency tonal noise</a:t>
+            </a:r>
+          </a:p>
+          <a:p>
+            <a:r>
+              <a:rPr lang="en-GB" dirty="0"/>
+              <a:t>Periodic pressure fluctuations</a:t>
+            </a:r>
+          </a:p>
+          <a:p>
+            <a:pPr marL="0" indent="0">
+              <a:buNone/>
+            </a:pPr>
+            <a:endParaRPr lang="en-GB" dirty="0"/>
+          </a:p>
+          <a:p>
+            <a:pPr marL="0" indent="0">
+              <a:buNone/>
+            </a:pPr>
+            <a:r>
+              <a:rPr lang="en-GB" dirty="0"/>
+              <a:t>Broadband</a:t>
+            </a:r>
+          </a:p>
+          <a:p>
+            <a:r>
+              <a:rPr lang="en-GB" dirty="0"/>
+              <a:t>Formation and shedding of vortices</a:t>
+            </a:r>
+          </a:p>
+          <a:p>
+            <a:r>
+              <a:rPr lang="en-GB" dirty="0"/>
+              <a:t>Trailing edge turbulent interaction</a:t>
+            </a:r>
+          </a:p>
+          <a:p>
+            <a:r>
+              <a:rPr lang="en-GB" dirty="0"/>
+              <a:t>Flow separation</a:t>
+            </a:r>
+          </a:p>
+          <a:p>
+            <a:pPr marL="0" indent="0">
+              <a:buNone/>
+            </a:pPr>
+            <a:endParaRPr lang="en-GB" dirty="0"/>
+          </a:p>
+        </p:txBody>
+      </p:sp>
+      <p:sp>
+        <p:nvSpPr>
+          <p:cNvPr id="4" name="Content Placeholder 2">
+            <a:extLst>
+              <a:ext uri="{FF2B5EF4-FFF2-40B4-BE49-F238E27FC236}">
+                <a16:creationId xmlns:a16="http://schemas.microsoft.com/office/drawing/2014/main" id="{540CA7AA-5659-48B1-C827-BCB210B1C7E8}"/>
+              </a:ext>
+            </a:extLst>
+          </p:cNvPr>
+          <p:cNvSpPr txBox="1">
+            <a:spLocks/>
+          </p:cNvSpPr>
+          <p:nvPr/>
+        </p:nvSpPr>
+        <p:spPr>
+          <a:xfrm>
+            <a:off x="6735992" y="1652675"/>
+            <a:ext cx="4860265" cy="3001521"/>
+          </a:xfrm>
+          <a:prstGeom prst="rect">
+            <a:avLst/>
+          </a:prstGeom>
+        </p:spPr>
+        <p:txBody>
+          <a:bodyPr vert="horz" lIns="91440" tIns="45720" rIns="91440" bIns="45720" rtlCol="0" anchor="ctr">
+            <a:normAutofit/>
+          </a:bodyPr>
+          <a:lstStyle>
+            <a:lvl1pPr marL="228600" indent="-228600" algn="l" defTabSz="914400" rtl="0" eaLnBrk="1" latinLnBrk="0" hangingPunct="1">
+              <a:lnSpc>
+                <a:spcPct val="90000"/>
+              </a:lnSpc>
+              <a:spcBef>
+                <a:spcPts val="1000"/>
+              </a:spcBef>
+              <a:buFont typeface="Arial" panose="020B0604020202020204" pitchFamily="34" charset="0"/>
+              <a:buChar char="•"/>
+              <a:defRPr sz="2800" kern="1200">
+                <a:solidFill>
+                  <a:schemeClr val="tx1"/>
+                </a:solidFill>
+                <a:latin typeface="+mn-lt"/>
+                <a:ea typeface="+mn-ea"/>
+                <a:cs typeface="+mn-cs"/>
+              </a:defRPr>
+            </a:lvl1pPr>
+            <a:lvl2pPr marL="685800" indent="-228600" algn="l" defTabSz="914400" rtl="0" eaLnBrk="1" latinLnBrk="0" hangingPunct="1">
+              <a:lnSpc>
+                <a:spcPct val="90000"/>
+              </a:lnSpc>
+              <a:spcBef>
+                <a:spcPts val="500"/>
+              </a:spcBef>
+              <a:buFont typeface="Arial" panose="020B0604020202020204" pitchFamily="34" charset="0"/>
+              <a:buChar char="•"/>
+              <a:defRPr sz="2400" kern="1200">
+                <a:solidFill>
+                  <a:schemeClr val="tx1"/>
+                </a:solidFill>
+                <a:latin typeface="+mn-lt"/>
+                <a:ea typeface="+mn-ea"/>
+                <a:cs typeface="+mn-cs"/>
+              </a:defRPr>
+            </a:lvl2pPr>
+            <a:lvl3pPr marL="1143000" indent="-228600" algn="l" defTabSz="914400" rtl="0" eaLnBrk="1" latinLnBrk="0" hangingPunct="1">
+              <a:lnSpc>
+                <a:spcPct val="90000"/>
+              </a:lnSpc>
+              <a:spcBef>
+                <a:spcPts val="500"/>
+              </a:spcBef>
+              <a:buFont typeface="Arial" panose="020B0604020202020204" pitchFamily="34" charset="0"/>
+              <a:buChar char="•"/>
+              <a:defRPr sz="2000" kern="1200">
+                <a:solidFill>
+                  <a:schemeClr val="tx1"/>
+                </a:solidFill>
+                <a:latin typeface="+mn-lt"/>
+                <a:ea typeface="+mn-ea"/>
+                <a:cs typeface="+mn-cs"/>
+              </a:defRPr>
+            </a:lvl3pPr>
+            <a:lvl4pPr marL="1600200" indent="-228600" algn="l" defTabSz="914400" rtl="0" eaLnBrk="1" latinLnBrk="0" hangingPunct="1">
+              <a:lnSpc>
+                <a:spcPct val="90000"/>
+              </a:lnSpc>
+              <a:spcBef>
+                <a:spcPts val="500"/>
+              </a:spcBef>
+              <a:buFont typeface="Arial" panose="020B0604020202020204" pitchFamily="34" charset="0"/>
+              <a:buChar char="•"/>
+              <a:defRPr sz="1800" kern="1200">
+                <a:solidFill>
+                  <a:schemeClr val="tx1"/>
+                </a:solidFill>
+                <a:latin typeface="+mn-lt"/>
+                <a:ea typeface="+mn-ea"/>
+                <a:cs typeface="+mn-cs"/>
+              </a:defRPr>
+            </a:lvl4pPr>
+            <a:lvl5pPr marL="2057400" indent="-228600" algn="l" defTabSz="914400" rtl="0" eaLnBrk="1" latinLnBrk="0" hangingPunct="1">
+              <a:lnSpc>
+                <a:spcPct val="90000"/>
+              </a:lnSpc>
+              <a:spcBef>
+                <a:spcPts val="500"/>
+              </a:spcBef>
+              <a:buFont typeface="Arial" panose="020B0604020202020204" pitchFamily="34" charset="0"/>
+              <a:buChar char="•"/>
+              <a:defRPr sz="1800" kern="1200">
+                <a:solidFill>
+                  <a:schemeClr val="tx1"/>
+                </a:solidFill>
+                <a:latin typeface="+mn-lt"/>
+                <a:ea typeface="+mn-ea"/>
+                <a:cs typeface="+mn-cs"/>
+              </a:defRPr>
+            </a:lvl5pPr>
+            <a:lvl6pPr marL="2514600" indent="-228600" algn="l" defTabSz="914400" rtl="0" eaLnBrk="1" latinLnBrk="0" hangingPunct="1">
+              <a:lnSpc>
+                <a:spcPct val="90000"/>
+              </a:lnSpc>
+              <a:spcBef>
+                <a:spcPts val="500"/>
+              </a:spcBef>
+              <a:buFont typeface="Arial" panose="020B0604020202020204" pitchFamily="34" charset="0"/>
+              <a:buChar char="•"/>
+              <a:defRPr sz="1800" kern="1200">
+                <a:solidFill>
+                  <a:schemeClr val="tx1"/>
+                </a:solidFill>
+                <a:latin typeface="+mn-lt"/>
+                <a:ea typeface="+mn-ea"/>
+                <a:cs typeface="+mn-cs"/>
+              </a:defRPr>
+            </a:lvl6pPr>
+            <a:lvl7pPr marL="2971800" indent="-228600" algn="l" defTabSz="914400" rtl="0" eaLnBrk="1" latinLnBrk="0" hangingPunct="1">
+              <a:lnSpc>
+                <a:spcPct val="90000"/>
+              </a:lnSpc>
+              <a:spcBef>
+                <a:spcPts val="500"/>
+              </a:spcBef>
+              <a:buFont typeface="Arial" panose="020B0604020202020204" pitchFamily="34" charset="0"/>
+              <a:buChar char="•"/>
+              <a:defRPr sz="1800" kern="1200">
+                <a:solidFill>
+                  <a:schemeClr val="tx1"/>
+                </a:solidFill>
+                <a:latin typeface="+mn-lt"/>
+                <a:ea typeface="+mn-ea"/>
+                <a:cs typeface="+mn-cs"/>
+              </a:defRPr>
+            </a:lvl7pPr>
+            <a:lvl8pPr marL="3429000" indent="-228600" algn="l" defTabSz="914400" rtl="0" eaLnBrk="1" latinLnBrk="0" hangingPunct="1">
+              <a:lnSpc>
+                <a:spcPct val="90000"/>
+              </a:lnSpc>
+              <a:spcBef>
+                <a:spcPts val="500"/>
+              </a:spcBef>
+              <a:buFont typeface="Arial" panose="020B0604020202020204" pitchFamily="34" charset="0"/>
+              <a:buChar char="•"/>
+              <a:defRPr sz="1800" kern="1200">
+                <a:solidFill>
+                  <a:schemeClr val="tx1"/>
+                </a:solidFill>
+                <a:latin typeface="+mn-lt"/>
+                <a:ea typeface="+mn-ea"/>
+                <a:cs typeface="+mn-cs"/>
+              </a:defRPr>
+            </a:lvl8pPr>
+            <a:lvl9pPr marL="3886200" indent="-228600" algn="l" defTabSz="914400" rtl="0" eaLnBrk="1" latinLnBrk="0" hangingPunct="1">
+              <a:lnSpc>
+                <a:spcPct val="90000"/>
+              </a:lnSpc>
+              <a:spcBef>
+                <a:spcPts val="500"/>
+              </a:spcBef>
+              <a:buFont typeface="Arial" panose="020B0604020202020204" pitchFamily="34" charset="0"/>
+              <a:buChar char="•"/>
+              <a:defRPr sz="1800" kern="1200">
+                <a:solidFill>
+                  <a:schemeClr val="tx1"/>
+                </a:solidFill>
+                <a:latin typeface="+mn-lt"/>
+                <a:ea typeface="+mn-ea"/>
+                <a:cs typeface="+mn-cs"/>
+              </a:defRPr>
+            </a:lvl9pPr>
+          </a:lstStyle>
+          <a:p>
+            <a:pPr marL="457200" lvl="1" indent="0">
+              <a:buNone/>
+            </a:pPr>
+            <a:r>
+              <a:rPr lang="en-GB" sz="2800" dirty="0"/>
+              <a:t>Geometry</a:t>
+            </a:r>
+          </a:p>
+          <a:p>
+            <a:pPr lvl="1"/>
+            <a:r>
+              <a:rPr lang="en-GB" sz="2800" dirty="0"/>
+              <a:t>Blade sweep</a:t>
+            </a:r>
+          </a:p>
+          <a:p>
             <a:pPr lvl="1"/>
             <a:r>
               <a:rPr lang="en-GB" sz="2800" dirty="0"/>
               <a:t>Tip geometry</a:t>
-            </a:r>
-          </a:p>
-          <a:p>
-            <a:pPr lvl="1"/>
-            <a:r>
-              <a:rPr lang="en-GB" sz="2800" dirty="0"/>
-              <a:t>Blade sweep</a:t>
             </a:r>
           </a:p>
           <a:p>
@@ -6589,7 +7210,7 @@
         </p:nvGrpSpPr>
         <p:grpSpPr>
           <a:xfrm>
-            <a:off x="6354438" y="1175989"/>
+            <a:off x="6548174" y="4259862"/>
             <a:ext cx="5457290" cy="2487338"/>
             <a:chOff x="459350" y="4615094"/>
             <a:chExt cx="4445431" cy="1948368"/>
@@ -6660,6 +7281,465 @@
           </p:txBody>
         </p:sp>
       </p:grpSp>
+    </p:spTree>
+    <p:extLst>
+      <p:ext uri="{BB962C8B-B14F-4D97-AF65-F5344CB8AC3E}">
+        <p14:creationId xmlns:p14="http://schemas.microsoft.com/office/powerpoint/2010/main" val="2108568212"/>
+      </p:ext>
+    </p:extLst>
+  </p:cSld>
+  <p:clrMapOvr>
+    <a:masterClrMapping/>
+  </p:clrMapOvr>
+</p:sld>
+</file>
+
+<file path=ppt/slides/slide4.xml><?xml version="1.0" encoding="utf-8"?>
+<p:sld xmlns:a="http://schemas.openxmlformats.org/drawingml/2006/main" xmlns:r="http://schemas.openxmlformats.org/officeDocument/2006/relationships" xmlns:p="http://schemas.openxmlformats.org/presentationml/2006/main">
+  <p:cSld>
+    <p:bg>
+      <p:bgPr>
+        <a:solidFill>
+          <a:schemeClr val="bg1"/>
+        </a:solidFill>
+        <a:effectLst/>
+      </p:bgPr>
+    </p:bg>
+    <p:spTree>
+      <p:nvGrpSpPr>
+        <p:cNvPr id="1" name="">
+          <a:extLst>
+            <a:ext uri="{FF2B5EF4-FFF2-40B4-BE49-F238E27FC236}">
+              <a16:creationId xmlns:a16="http://schemas.microsoft.com/office/drawing/2014/main" id="{05B5025B-3D80-0CC4-2006-923A1BC2AE9D}"/>
+            </a:ext>
+          </a:extLst>
+        </p:cNvPr>
+        <p:cNvGrpSpPr/>
+        <p:nvPr/>
+      </p:nvGrpSpPr>
+      <p:grpSpPr>
+        <a:xfrm>
+          <a:off x="0" y="0"/>
+          <a:ext cx="0" cy="0"/>
+          <a:chOff x="0" y="0"/>
+          <a:chExt cx="0" cy="0"/>
+        </a:xfrm>
+      </p:grpSpPr>
+      <p:sp useBgFill="1">
+        <p:nvSpPr>
+          <p:cNvPr id="8" name="Rectangle 7">
+            <a:extLst>
+              <a:ext uri="{FF2B5EF4-FFF2-40B4-BE49-F238E27FC236}">
+                <a16:creationId xmlns:a16="http://schemas.microsoft.com/office/drawing/2014/main" id="{33D4F78A-F37B-B1DE-69AB-C270AC8F17AB}"/>
+              </a:ext>
+              <a:ext uri="{C183D7F6-B498-43B3-948B-1728B52AA6E4}">
+                <adec:decorative xmlns:adec="http://schemas.microsoft.com/office/drawing/2017/decorative" val="1"/>
+              </a:ext>
+            </a:extLst>
+          </p:cNvPr>
+          <p:cNvSpPr>
+            <a:spLocks noGrp="1" noRot="1" noChangeAspect="1" noMove="1" noResize="1" noEditPoints="1" noAdjustHandles="1" noChangeArrowheads="1" noChangeShapeType="1" noTextEdit="1"/>
+          </p:cNvSpPr>
+          <p:nvPr>
+            <p:extLst>
+              <p:ext uri="{386F3935-93C4-4BCD-93E2-E3B085C9AB24}">
+                <p16:designElem xmlns:p16="http://schemas.microsoft.com/office/powerpoint/2015/main" val="1"/>
+              </p:ext>
+            </p:extLst>
+          </p:nvPr>
+        </p:nvSpPr>
+        <p:spPr>
+          <a:xfrm>
+            <a:off x="0" y="0"/>
+            <a:ext cx="12192000" cy="6858000"/>
+          </a:xfrm>
+          <a:prstGeom prst="rect">
+            <a:avLst/>
+          </a:prstGeom>
+          <a:ln w="12700" cap="flat" cmpd="sng" algn="ctr">
+            <a:noFill/>
+            <a:prstDash val="solid"/>
+            <a:miter lim="800000"/>
+          </a:ln>
+          <a:effectLst/>
+          <a:extLst>
+            <a:ext uri="{91240B29-F687-4F45-9708-019B960494DF}">
+              <a14:hiddenLine xmlns:a14="http://schemas.microsoft.com/office/drawing/2010/main" w="12700" cap="flat" cmpd="sng" algn="ctr">
+                <a:solidFill>
+                  <a:schemeClr val="accent1">
+                    <a:shade val="50000"/>
+                  </a:schemeClr>
+                </a:solidFill>
+                <a:prstDash val="solid"/>
+                <a:miter lim="800000"/>
+              </a14:hiddenLine>
+            </a:ext>
+          </a:extLst>
+        </p:spPr>
+        <p:style>
+          <a:lnRef idx="2">
+            <a:schemeClr val="accent1">
+              <a:shade val="50000"/>
+            </a:schemeClr>
+          </a:lnRef>
+          <a:fillRef idx="1">
+            <a:schemeClr val="accent1"/>
+          </a:fillRef>
+          <a:effectRef idx="0">
+            <a:schemeClr val="accent1"/>
+          </a:effectRef>
+          <a:fontRef idx="minor">
+            <a:schemeClr val="lt1"/>
+          </a:fontRef>
+        </p:style>
+        <p:txBody>
+          <a:bodyPr rtlCol="0" anchor="ctr"/>
+          <a:lstStyle/>
+          <a:p>
+            <a:pPr algn="ctr"/>
+            <a:endParaRPr lang="en-US"/>
+          </a:p>
+        </p:txBody>
+      </p:sp>
+      <p:sp>
+        <p:nvSpPr>
+          <p:cNvPr id="10" name="Rectangle 9">
+            <a:extLst>
+              <a:ext uri="{FF2B5EF4-FFF2-40B4-BE49-F238E27FC236}">
+                <a16:creationId xmlns:a16="http://schemas.microsoft.com/office/drawing/2014/main" id="{035745CF-9619-AF40-1167-3856C048C0B8}"/>
+              </a:ext>
+              <a:ext uri="{C183D7F6-B498-43B3-948B-1728B52AA6E4}">
+                <adec:decorative xmlns:adec="http://schemas.microsoft.com/office/drawing/2017/decorative" val="1"/>
+              </a:ext>
+            </a:extLst>
+          </p:cNvPr>
+          <p:cNvSpPr>
+            <a:spLocks noGrp="1" noRot="1" noChangeAspect="1" noMove="1" noResize="1" noEditPoints="1" noAdjustHandles="1" noChangeArrowheads="1" noChangeShapeType="1" noTextEdit="1"/>
+          </p:cNvSpPr>
+          <p:nvPr>
+            <p:extLst>
+              <p:ext uri="{386F3935-93C4-4BCD-93E2-E3B085C9AB24}">
+                <p16:designElem xmlns:p16="http://schemas.microsoft.com/office/powerpoint/2015/main" val="1"/>
+              </p:ext>
+            </p:extLst>
+          </p:nvPr>
+        </p:nvSpPr>
+        <p:spPr>
+          <a:xfrm flipH="1">
+            <a:off x="-1" y="-1"/>
+            <a:ext cx="12191998" cy="1590742"/>
+          </a:xfrm>
+          <a:prstGeom prst="rect">
+            <a:avLst/>
+          </a:prstGeom>
+          <a:gradFill>
+            <a:gsLst>
+              <a:gs pos="0">
+                <a:srgbClr val="000000"/>
+              </a:gs>
+              <a:gs pos="100000">
+                <a:schemeClr val="accent1">
+                  <a:lumMod val="75000"/>
+                </a:schemeClr>
+              </a:gs>
+            </a:gsLst>
+            <a:lin ang="8400000" scaled="0"/>
+          </a:gradFill>
+          <a:ln>
+            <a:noFill/>
+          </a:ln>
+        </p:spPr>
+        <p:style>
+          <a:lnRef idx="2">
+            <a:schemeClr val="accent1">
+              <a:shade val="50000"/>
+            </a:schemeClr>
+          </a:lnRef>
+          <a:fillRef idx="1">
+            <a:schemeClr val="accent1"/>
+          </a:fillRef>
+          <a:effectRef idx="0">
+            <a:schemeClr val="accent1"/>
+          </a:effectRef>
+          <a:fontRef idx="minor">
+            <a:schemeClr val="lt1"/>
+          </a:fontRef>
+        </p:style>
+        <p:txBody>
+          <a:bodyPr rtlCol="0" anchor="ctr"/>
+          <a:lstStyle/>
+          <a:p>
+            <a:pPr algn="ctr"/>
+            <a:endParaRPr lang="en-US"/>
+          </a:p>
+        </p:txBody>
+      </p:sp>
+      <p:sp>
+        <p:nvSpPr>
+          <p:cNvPr id="12" name="Rectangle 11">
+            <a:extLst>
+              <a:ext uri="{FF2B5EF4-FFF2-40B4-BE49-F238E27FC236}">
+                <a16:creationId xmlns:a16="http://schemas.microsoft.com/office/drawing/2014/main" id="{4CE8B599-FC68-4E63-838A-8742AE80E50C}"/>
+              </a:ext>
+              <a:ext uri="{C183D7F6-B498-43B3-948B-1728B52AA6E4}">
+                <adec:decorative xmlns:adec="http://schemas.microsoft.com/office/drawing/2017/decorative" val="1"/>
+              </a:ext>
+            </a:extLst>
+          </p:cNvPr>
+          <p:cNvSpPr>
+            <a:spLocks noGrp="1" noRot="1" noChangeAspect="1" noMove="1" noResize="1" noEditPoints="1" noAdjustHandles="1" noChangeArrowheads="1" noChangeShapeType="1" noTextEdit="1"/>
+          </p:cNvSpPr>
+          <p:nvPr>
+            <p:extLst>
+              <p:ext uri="{386F3935-93C4-4BCD-93E2-E3B085C9AB24}">
+                <p16:designElem xmlns:p16="http://schemas.microsoft.com/office/powerpoint/2015/main" val="1"/>
+              </p:ext>
+            </p:extLst>
+          </p:nvPr>
+        </p:nvSpPr>
+        <p:spPr>
+          <a:xfrm rot="10800000" flipH="1">
+            <a:off x="-3" y="0"/>
+            <a:ext cx="8115306" cy="1590742"/>
+          </a:xfrm>
+          <a:prstGeom prst="rect">
+            <a:avLst/>
+          </a:prstGeom>
+          <a:gradFill>
+            <a:gsLst>
+              <a:gs pos="20000">
+                <a:schemeClr val="accent1">
+                  <a:alpha val="0"/>
+                </a:schemeClr>
+              </a:gs>
+              <a:gs pos="100000">
+                <a:schemeClr val="accent1">
+                  <a:lumMod val="50000"/>
+                  <a:alpha val="55000"/>
+                </a:schemeClr>
+              </a:gs>
+            </a:gsLst>
+            <a:lin ang="13800000" scaled="0"/>
+          </a:gradFill>
+          <a:ln>
+            <a:noFill/>
+          </a:ln>
+        </p:spPr>
+        <p:style>
+          <a:lnRef idx="2">
+            <a:schemeClr val="accent1">
+              <a:shade val="50000"/>
+            </a:schemeClr>
+          </a:lnRef>
+          <a:fillRef idx="1">
+            <a:schemeClr val="accent1"/>
+          </a:fillRef>
+          <a:effectRef idx="0">
+            <a:schemeClr val="accent1"/>
+          </a:effectRef>
+          <a:fontRef idx="minor">
+            <a:schemeClr val="lt1"/>
+          </a:fontRef>
+        </p:style>
+        <p:txBody>
+          <a:bodyPr rtlCol="0" anchor="ctr"/>
+          <a:lstStyle/>
+          <a:p>
+            <a:pPr algn="ctr"/>
+            <a:endParaRPr lang="en-US"/>
+          </a:p>
+        </p:txBody>
+      </p:sp>
+      <p:sp>
+        <p:nvSpPr>
+          <p:cNvPr id="14" name="Rectangle 13">
+            <a:extLst>
+              <a:ext uri="{FF2B5EF4-FFF2-40B4-BE49-F238E27FC236}">
+                <a16:creationId xmlns:a16="http://schemas.microsoft.com/office/drawing/2014/main" id="{0CF0590A-59B4-6573-5680-74BEE528BF36}"/>
+              </a:ext>
+              <a:ext uri="{C183D7F6-B498-43B3-948B-1728B52AA6E4}">
+                <adec:decorative xmlns:adec="http://schemas.microsoft.com/office/drawing/2017/decorative" val="1"/>
+              </a:ext>
+            </a:extLst>
+          </p:cNvPr>
+          <p:cNvSpPr>
+            <a:spLocks noGrp="1" noRot="1" noChangeAspect="1" noMove="1" noResize="1" noEditPoints="1" noAdjustHandles="1" noChangeArrowheads="1" noChangeShapeType="1" noTextEdit="1"/>
+          </p:cNvSpPr>
+          <p:nvPr>
+            <p:extLst>
+              <p:ext uri="{386F3935-93C4-4BCD-93E2-E3B085C9AB24}">
+                <p16:designElem xmlns:p16="http://schemas.microsoft.com/office/powerpoint/2015/main" val="1"/>
+              </p:ext>
+            </p:extLst>
+          </p:nvPr>
+        </p:nvSpPr>
+        <p:spPr>
+          <a:xfrm flipH="1">
+            <a:off x="8115299" y="-1"/>
+            <a:ext cx="4076698" cy="1590742"/>
+          </a:xfrm>
+          <a:prstGeom prst="rect">
+            <a:avLst/>
+          </a:prstGeom>
+          <a:gradFill>
+            <a:gsLst>
+              <a:gs pos="0">
+                <a:schemeClr val="accent1">
+                  <a:alpha val="66000"/>
+                </a:schemeClr>
+              </a:gs>
+              <a:gs pos="100000">
+                <a:srgbClr val="000000">
+                  <a:alpha val="30000"/>
+                </a:srgbClr>
+              </a:gs>
+            </a:gsLst>
+            <a:lin ang="13200000" scaled="0"/>
+          </a:gradFill>
+          <a:ln>
+            <a:noFill/>
+          </a:ln>
+        </p:spPr>
+        <p:style>
+          <a:lnRef idx="2">
+            <a:schemeClr val="accent1">
+              <a:shade val="50000"/>
+            </a:schemeClr>
+          </a:lnRef>
+          <a:fillRef idx="1">
+            <a:schemeClr val="accent1"/>
+          </a:fillRef>
+          <a:effectRef idx="0">
+            <a:schemeClr val="accent1"/>
+          </a:effectRef>
+          <a:fontRef idx="minor">
+            <a:schemeClr val="lt1"/>
+          </a:fontRef>
+        </p:style>
+        <p:txBody>
+          <a:bodyPr rtlCol="0" anchor="ctr"/>
+          <a:lstStyle/>
+          <a:p>
+            <a:pPr algn="ctr"/>
+            <a:endParaRPr lang="en-US"/>
+          </a:p>
+        </p:txBody>
+      </p:sp>
+      <p:sp>
+        <p:nvSpPr>
+          <p:cNvPr id="16" name="Rectangle 15">
+            <a:extLst>
+              <a:ext uri="{FF2B5EF4-FFF2-40B4-BE49-F238E27FC236}">
+                <a16:creationId xmlns:a16="http://schemas.microsoft.com/office/drawing/2014/main" id="{DB2AD4C7-3E3E-AA35-1F16-8BCB0365387B}"/>
+              </a:ext>
+              <a:ext uri="{C183D7F6-B498-43B3-948B-1728B52AA6E4}">
+                <adec:decorative xmlns:adec="http://schemas.microsoft.com/office/drawing/2017/decorative" val="1"/>
+              </a:ext>
+            </a:extLst>
+          </p:cNvPr>
+          <p:cNvSpPr>
+            <a:spLocks noGrp="1" noRot="1" noChangeAspect="1" noMove="1" noResize="1" noEditPoints="1" noAdjustHandles="1" noChangeArrowheads="1" noChangeShapeType="1" noTextEdit="1"/>
+          </p:cNvSpPr>
+          <p:nvPr>
+            <p:extLst>
+              <p:ext uri="{386F3935-93C4-4BCD-93E2-E3B085C9AB24}">
+                <p16:designElem xmlns:p16="http://schemas.microsoft.com/office/powerpoint/2015/main" val="1"/>
+              </p:ext>
+            </p:extLst>
+          </p:nvPr>
+        </p:nvSpPr>
+        <p:spPr>
+          <a:xfrm>
+            <a:off x="459350" y="-1"/>
+            <a:ext cx="11732646" cy="1597433"/>
+          </a:xfrm>
+          <a:prstGeom prst="rect">
+            <a:avLst/>
+          </a:prstGeom>
+          <a:gradFill>
+            <a:gsLst>
+              <a:gs pos="50000">
+                <a:srgbClr val="000000">
+                  <a:alpha val="0"/>
+                </a:srgbClr>
+              </a:gs>
+              <a:gs pos="99000">
+                <a:schemeClr val="accent1">
+                  <a:lumMod val="50000"/>
+                  <a:alpha val="52000"/>
+                </a:schemeClr>
+              </a:gs>
+            </a:gsLst>
+            <a:lin ang="16800000" scaled="0"/>
+          </a:gradFill>
+          <a:ln>
+            <a:noFill/>
+          </a:ln>
+        </p:spPr>
+        <p:style>
+          <a:lnRef idx="2">
+            <a:schemeClr val="accent1">
+              <a:shade val="50000"/>
+            </a:schemeClr>
+          </a:lnRef>
+          <a:fillRef idx="1">
+            <a:schemeClr val="accent1"/>
+          </a:fillRef>
+          <a:effectRef idx="0">
+            <a:schemeClr val="accent1"/>
+          </a:effectRef>
+          <a:fontRef idx="minor">
+            <a:schemeClr val="lt1"/>
+          </a:fontRef>
+        </p:style>
+        <p:txBody>
+          <a:bodyPr rtlCol="0" anchor="ctr"/>
+          <a:lstStyle/>
+          <a:p>
+            <a:pPr algn="ctr"/>
+            <a:endParaRPr lang="en-US"/>
+          </a:p>
+        </p:txBody>
+      </p:sp>
+      <p:sp>
+        <p:nvSpPr>
+          <p:cNvPr id="2" name="Title 1">
+            <a:extLst>
+              <a:ext uri="{FF2B5EF4-FFF2-40B4-BE49-F238E27FC236}">
+                <a16:creationId xmlns:a16="http://schemas.microsoft.com/office/drawing/2014/main" id="{09DF2F80-4B94-3290-D89A-4F89C94F2D60}"/>
+              </a:ext>
+            </a:extLst>
+          </p:cNvPr>
+          <p:cNvSpPr>
+            <a:spLocks noGrp="1"/>
+          </p:cNvSpPr>
+          <p:nvPr>
+            <p:ph type="title"/>
+          </p:nvPr>
+        </p:nvSpPr>
+        <p:spPr>
+          <a:xfrm>
+            <a:off x="392205" y="285873"/>
+            <a:ext cx="9895951" cy="1033669"/>
+          </a:xfrm>
+        </p:spPr>
+        <p:txBody>
+          <a:bodyPr>
+            <a:normAutofit/>
+          </a:bodyPr>
+          <a:lstStyle/>
+          <a:p>
+            <a:r>
+              <a:rPr lang="en-GB" sz="4000" dirty="0">
+                <a:solidFill>
+                  <a:srgbClr val="FFFFFF"/>
+                </a:solidFill>
+              </a:rPr>
+              <a:t>Previous aero acoustic research</a:t>
+            </a:r>
+          </a:p>
+        </p:txBody>
+      </p:sp>
       <p:pic>
         <p:nvPicPr>
           <p:cNvPr id="26" name="Picture 25">
@@ -6675,7 +7755,7 @@
           <p:nvPr/>
         </p:nvPicPr>
         <p:blipFill>
-          <a:blip r:embed="rId4"/>
+          <a:blip r:embed="rId3"/>
           <a:stretch>
             <a:fillRect/>
           </a:stretch>
@@ -6780,7 +7860,7 @@
               <p:nvPr/>
             </p:nvPicPr>
             <p:blipFill>
-              <a:blip r:embed="rId5"/>
+              <a:blip r:embed="rId4"/>
               <a:stretch>
                 <a:fillRect/>
               </a:stretch>
@@ -6830,7 +7910,7 @@
                 <p:nvPr/>
               </p:nvPicPr>
               <p:blipFill>
-                <a:blip r:embed="rId6"/>
+                <a:blip r:embed="rId5"/>
                 <a:stretch>
                   <a:fillRect/>
                 </a:stretch>
@@ -6918,6 +7998,31 @@
           </p:txBody>
         </p:sp>
       </p:grpSp>
+      <p:sp>
+        <p:nvSpPr>
+          <p:cNvPr id="15" name="Content Placeholder 14">
+            <a:extLst>
+              <a:ext uri="{FF2B5EF4-FFF2-40B4-BE49-F238E27FC236}">
+                <a16:creationId xmlns:a16="http://schemas.microsoft.com/office/drawing/2014/main" id="{F47C10FF-806A-41E4-FB8E-27340CEB6749}"/>
+              </a:ext>
+            </a:extLst>
+          </p:cNvPr>
+          <p:cNvSpPr>
+            <a:spLocks noGrp="1"/>
+          </p:cNvSpPr>
+          <p:nvPr>
+            <p:ph idx="1"/>
+          </p:nvPr>
+        </p:nvSpPr>
+        <p:spPr/>
+        <p:txBody>
+          <a:bodyPr/>
+          <a:lstStyle/>
+          <a:p>
+            <a:endParaRPr lang="en-GB" dirty="0"/>
+          </a:p>
+        </p:txBody>
+      </p:sp>
     </p:spTree>
     <p:extLst>
       <p:ext uri="{BB962C8B-B14F-4D97-AF65-F5344CB8AC3E}">
@@ -7051,12 +8156,18 @@
 </p:sld>
 </file>
 
-<file path=ppt/slides/slide4.xml><?xml version="1.0" encoding="utf-8"?>
+<file path=ppt/slides/slide5.xml><?xml version="1.0" encoding="utf-8"?>
 <p:sld xmlns:a="http://schemas.openxmlformats.org/drawingml/2006/main" xmlns:r="http://schemas.openxmlformats.org/officeDocument/2006/relationships" xmlns:p="http://schemas.openxmlformats.org/presentationml/2006/main">
   <p:cSld>
     <p:spTree>
       <p:nvGrpSpPr>
-        <p:cNvPr id="1" name=""/>
+        <p:cNvPr id="1" name="">
+          <a:extLst>
+            <a:ext uri="{FF2B5EF4-FFF2-40B4-BE49-F238E27FC236}">
+              <a16:creationId xmlns:a16="http://schemas.microsoft.com/office/drawing/2014/main" id="{E1373EFC-50AC-AC9B-D8C3-83D34FA273A5}"/>
+            </a:ext>
+          </a:extLst>
+        </p:cNvPr>
         <p:cNvGrpSpPr/>
         <p:nvPr/>
       </p:nvGrpSpPr>
@@ -7073,7 +8184,7 @@
           <p:cNvPr id="2" name="Title 1">
             <a:extLst>
               <a:ext uri="{FF2B5EF4-FFF2-40B4-BE49-F238E27FC236}">
-                <a16:creationId xmlns:a16="http://schemas.microsoft.com/office/drawing/2014/main" id="{C636BCF1-F4AB-B535-D03D-7FD6B954927E}"/>
+                <a16:creationId xmlns:a16="http://schemas.microsoft.com/office/drawing/2014/main" id="{ACA28203-AC4A-1D11-486D-ED27D84B5E12}"/>
               </a:ext>
             </a:extLst>
           </p:cNvPr>
@@ -7089,87 +8200,69 @@
           <a:bodyPr/>
           <a:lstStyle/>
           <a:p>
-            <a:r>
-              <a:rPr lang="en-GB" dirty="0"/>
-              <a:t>Toroidal and varying edge</a:t>
-            </a:r>
+            <a:endParaRPr lang="en-GB"/>
+          </a:p>
+        </p:txBody>
+      </p:sp>
+      <p:sp>
+        <p:nvSpPr>
+          <p:cNvPr id="3" name="Content Placeholder 2">
+            <a:extLst>
+              <a:ext uri="{FF2B5EF4-FFF2-40B4-BE49-F238E27FC236}">
+                <a16:creationId xmlns:a16="http://schemas.microsoft.com/office/drawing/2014/main" id="{89994F24-311F-CF99-1DA6-6FFFBD37DD20}"/>
+              </a:ext>
+            </a:extLst>
+          </p:cNvPr>
+          <p:cNvSpPr>
+            <a:spLocks noGrp="1"/>
+          </p:cNvSpPr>
+          <p:nvPr>
+            <p:ph idx="1"/>
+          </p:nvPr>
+        </p:nvSpPr>
+        <p:spPr/>
+        <p:txBody>
+          <a:bodyPr/>
+          <a:lstStyle/>
+          <a:p>
+            <a:endParaRPr lang="en-GB"/>
           </a:p>
         </p:txBody>
       </p:sp>
       <p:pic>
         <p:nvPicPr>
-          <p:cNvPr id="7" name="Content Placeholder 6" descr="A black metal tongs&#10;&#10;Description automatically generated">
-            <a:extLst>
-              <a:ext uri="{FF2B5EF4-FFF2-40B4-BE49-F238E27FC236}">
-                <a16:creationId xmlns:a16="http://schemas.microsoft.com/office/drawing/2014/main" id="{880BBE34-3152-AFE0-5D87-79E643BFAF28}"/>
+          <p:cNvPr id="13" name="Picture 12">
+            <a:extLst>
+              <a:ext uri="{FF2B5EF4-FFF2-40B4-BE49-F238E27FC236}">
+                <a16:creationId xmlns:a16="http://schemas.microsoft.com/office/drawing/2014/main" id="{0861257B-D118-BE46-6933-3A1C3AE8CB33}"/>
               </a:ext>
             </a:extLst>
           </p:cNvPr>
           <p:cNvPicPr>
-            <a:picLocks noGrp="1" noChangeAspect="1"/>
+            <a:picLocks noChangeAspect="1"/>
           </p:cNvPicPr>
-          <p:nvPr>
-            <p:ph idx="1"/>
-          </p:nvPr>
+          <p:nvPr/>
         </p:nvPicPr>
         <p:blipFill>
-          <a:blip r:embed="rId3">
-            <a:extLst>
-              <a:ext uri="{28A0092B-C50C-407E-A947-70E740481C1C}">
-                <a14:useLocalDpi xmlns:a14="http://schemas.microsoft.com/office/drawing/2010/main" val="0"/>
-              </a:ext>
-            </a:extLst>
-          </a:blip>
-          <a:srcRect t="27535" b="23273"/>
-          <a:stretch/>
+          <a:blip r:embed="rId2"/>
+          <a:stretch>
+            <a:fillRect/>
+          </a:stretch>
         </p:blipFill>
         <p:spPr>
           <a:xfrm>
-            <a:off x="6613252" y="1618880"/>
-            <a:ext cx="4960125" cy="3356263"/>
-          </a:xfrm>
-        </p:spPr>
-      </p:pic>
-      <p:sp>
-        <p:nvSpPr>
-          <p:cNvPr id="8" name="TextBox 7">
-            <a:extLst>
-              <a:ext uri="{FF2B5EF4-FFF2-40B4-BE49-F238E27FC236}">
-                <a16:creationId xmlns:a16="http://schemas.microsoft.com/office/drawing/2014/main" id="{BFAF2F64-5005-E43B-C643-C35BC2A07982}"/>
-              </a:ext>
-            </a:extLst>
-          </p:cNvPr>
-          <p:cNvSpPr txBox="1"/>
-          <p:nvPr/>
-        </p:nvSpPr>
-        <p:spPr>
-          <a:xfrm>
-            <a:off x="8693726" y="4516497"/>
-            <a:ext cx="2140527" cy="369332"/>
+            <a:off x="1617518" y="250103"/>
+            <a:ext cx="8320216" cy="6357793"/>
           </a:xfrm>
           <a:prstGeom prst="rect">
             <a:avLst/>
           </a:prstGeom>
-          <a:noFill/>
         </p:spPr>
-        <p:txBody>
-          <a:bodyPr wrap="square" rtlCol="0">
-            <a:spAutoFit/>
-          </a:bodyPr>
-          <a:lstStyle/>
-          <a:p>
-            <a:r>
-              <a:rPr lang="en-GB" dirty="0" err="1"/>
-              <a:t>Foxeer</a:t>
-            </a:r>
-            <a:endParaRPr lang="en-GB" dirty="0"/>
-          </a:p>
-        </p:txBody>
-      </p:sp>
+      </p:pic>
     </p:spTree>
     <p:extLst>
       <p:ext uri="{BB962C8B-B14F-4D97-AF65-F5344CB8AC3E}">
-        <p14:creationId xmlns:p14="http://schemas.microsoft.com/office/powerpoint/2010/main" val="3454612006"/>
+        <p14:creationId xmlns:p14="http://schemas.microsoft.com/office/powerpoint/2010/main" val="2036023876"/>
       </p:ext>
     </p:extLst>
   </p:cSld>
@@ -7179,7 +8272,7 @@
 </p:sld>
 </file>
 
-<file path=ppt/slides/slide5.xml><?xml version="1.0" encoding="utf-8"?>
+<file path=ppt/slides/slide6.xml><?xml version="1.0" encoding="utf-8"?>
 <p:sld xmlns:a="http://schemas.openxmlformats.org/drawingml/2006/main" xmlns:r="http://schemas.openxmlformats.org/officeDocument/2006/relationships" xmlns:p="http://schemas.openxmlformats.org/presentationml/2006/main">
   <p:cSld>
     <p:bg>
@@ -7649,7 +8742,7 @@
           <a:p>
             <a:r>
               <a:rPr lang="en-GB" dirty="0"/>
-              <a:t>Design and build an experimental setup to measure</a:t>
+              <a:t>Design and build an experimental setups to measure</a:t>
             </a:r>
             <a:r>
               <a:rPr lang="en-GB" b="1" dirty="0"/>
@@ -7712,7 +8805,7 @@
 </p:sld>
 </file>
 
-<file path=ppt/slides/slide6.xml><?xml version="1.0" encoding="utf-8"?>
+<file path=ppt/slides/slide7.xml><?xml version="1.0" encoding="utf-8"?>
 <p:sld xmlns:a="http://schemas.openxmlformats.org/drawingml/2006/main" xmlns:r="http://schemas.openxmlformats.org/officeDocument/2006/relationships" xmlns:p="http://schemas.openxmlformats.org/presentationml/2006/main">
   <p:cSld>
     <p:bg>
@@ -8152,8 +9245,8 @@
           </a:p>
         </p:txBody>
       </p:sp>
-      <mc:AlternateContent xmlns:mc="http://schemas.openxmlformats.org/markup-compatibility/2006" xmlns:a14="http://schemas.microsoft.com/office/drawing/2010/main">
-        <mc:Choice Requires="a14">
+      <mc:AlternateContent xmlns:mc="http://schemas.openxmlformats.org/markup-compatibility/2006">
+        <mc:Choice xmlns:a14="http://schemas.microsoft.com/office/drawing/2010/main" Requires="a14">
           <p:sp>
             <p:nvSpPr>
               <p:cNvPr id="3" name="Content Placeholder 2">
@@ -8257,53 +9350,57 @@
                           <m:sSup>
                             <m:sSupPr>
                               <m:ctrlPr>
-                                <a:rPr lang="en-GB" b="0" i="1">
+                                <a:rPr lang="en-GB" b="0" i="1" smtClean="0">
                                   <a:latin typeface="Cambria Math" panose="02040503050406030204" pitchFamily="18" charset="0"/>
                                 </a:rPr>
                               </m:ctrlPr>
                             </m:sSupPr>
                             <m:e>
-                              <m:r>
-                                <a:rPr lang="en-GB" b="0" i="1">
-                                  <a:latin typeface="Cambria Math" panose="02040503050406030204" pitchFamily="18" charset="0"/>
-                                </a:rPr>
-                                <m:t>𝑁</m:t>
-                              </m:r>
+                              <m:d>
+                                <m:dPr>
+                                  <m:ctrlPr>
+                                    <a:rPr lang="en-GB" b="0" i="1" smtClean="0">
+                                      <a:latin typeface="Cambria Math" panose="02040503050406030204" pitchFamily="18" charset="0"/>
+                                    </a:rPr>
+                                  </m:ctrlPr>
+                                </m:dPr>
+                                <m:e>
+                                  <m:r>
+                                    <m:rPr>
+                                      <m:sty m:val="p"/>
+                                    </m:rPr>
+                                    <a:rPr lang="en-GB" b="0" i="0" smtClean="0">
+                                      <a:latin typeface="Cambria Math" panose="02040503050406030204" pitchFamily="18" charset="0"/>
+                                    </a:rPr>
+                                    <m:t>r</m:t>
+                                  </m:r>
+                                  <m:r>
+                                    <m:rPr>
+                                      <m:sty m:val="p"/>
+                                    </m:rPr>
+                                    <a:rPr lang="en-GB" b="0" i="0" smtClean="0">
+                                      <a:latin typeface="Cambria Math" panose="02040503050406030204" pitchFamily="18" charset="0"/>
+                                    </a:rPr>
+                                    <m:t>Ω</m:t>
+                                  </m:r>
+                                </m:e>
+                              </m:d>
                             </m:e>
                             <m:sup>
                               <m:r>
-                                <a:rPr lang="en-GB" b="0" i="1">
+                                <a:rPr lang="en-GB" b="0" i="1" smtClean="0">
                                   <a:latin typeface="Cambria Math" panose="02040503050406030204" pitchFamily="18" charset="0"/>
                                 </a:rPr>
                                 <m:t>2</m:t>
                               </m:r>
                             </m:sup>
                           </m:sSup>
-                          <m:sSup>
-                            <m:sSupPr>
-                              <m:ctrlPr>
-                                <a:rPr lang="en-GB" b="0" i="1">
-                                  <a:latin typeface="Cambria Math" panose="02040503050406030204" pitchFamily="18" charset="0"/>
-                                </a:rPr>
-                              </m:ctrlPr>
-                            </m:sSupPr>
-                            <m:e>
-                              <m:r>
-                                <a:rPr lang="en-GB" b="0" i="1">
-                                  <a:latin typeface="Cambria Math" panose="02040503050406030204" pitchFamily="18" charset="0"/>
-                                </a:rPr>
-                                <m:t>𝐷</m:t>
-                              </m:r>
-                            </m:e>
-                            <m:sup>
-                              <m:r>
-                                <a:rPr lang="en-GB" b="0" i="1">
-                                  <a:latin typeface="Cambria Math" panose="02040503050406030204" pitchFamily="18" charset="0"/>
-                                </a:rPr>
-                                <m:t>4</m:t>
-                              </m:r>
-                            </m:sup>
-                          </m:sSup>
+                          <m:r>
+                            <a:rPr lang="en-GB" b="0" i="1" smtClean="0">
+                              <a:latin typeface="Cambria Math" panose="02040503050406030204" pitchFamily="18" charset="0"/>
+                            </a:rPr>
+                            <m:t>𝐴</m:t>
+                          </m:r>
                         </m:den>
                       </m:f>
                       <m:r>
@@ -8330,10 +9427,10 @@
                         </m:e>
                         <m:sub>
                           <m:r>
-                            <a:rPr lang="en-GB" b="0" i="1">
+                            <a:rPr lang="en-GB" b="0" i="1" smtClean="0">
                               <a:latin typeface="Cambria Math" panose="02040503050406030204" pitchFamily="18" charset="0"/>
                             </a:rPr>
-                            <m:t>𝑃</m:t>
+                            <m:t>𝑄</m:t>
                           </m:r>
                         </m:sub>
                       </m:sSub>
@@ -8369,53 +9466,54 @@
                           <m:sSup>
                             <m:sSupPr>
                               <m:ctrlPr>
-                                <a:rPr lang="en-GB" b="0" i="1">
+                                <a:rPr lang="en-GB" b="0" i="1" smtClean="0">
                                   <a:latin typeface="Cambria Math" panose="02040503050406030204" pitchFamily="18" charset="0"/>
                                 </a:rPr>
                               </m:ctrlPr>
                             </m:sSupPr>
                             <m:e>
-                              <m:r>
-                                <a:rPr lang="en-GB" b="0" i="1">
-                                  <a:latin typeface="Cambria Math" panose="02040503050406030204" pitchFamily="18" charset="0"/>
-                                </a:rPr>
-                                <m:t>𝑁</m:t>
-                              </m:r>
+                              <m:d>
+                                <m:dPr>
+                                  <m:ctrlPr>
+                                    <a:rPr lang="en-GB" b="0" i="1" smtClean="0">
+                                      <a:latin typeface="Cambria Math" panose="02040503050406030204" pitchFamily="18" charset="0"/>
+                                    </a:rPr>
+                                  </m:ctrlPr>
+                                </m:dPr>
+                                <m:e>
+                                  <m:r>
+                                    <a:rPr lang="en-GB" b="0" i="1" smtClean="0">
+                                      <a:latin typeface="Cambria Math" panose="02040503050406030204" pitchFamily="18" charset="0"/>
+                                    </a:rPr>
+                                    <m:t>𝑟</m:t>
+                                  </m:r>
+                                  <m:r>
+                                    <m:rPr>
+                                      <m:sty m:val="p"/>
+                                    </m:rPr>
+                                    <a:rPr lang="en-GB" b="0" i="0" smtClean="0">
+                                      <a:latin typeface="Cambria Math" panose="02040503050406030204" pitchFamily="18" charset="0"/>
+                                    </a:rPr>
+                                    <m:t>Ω</m:t>
+                                  </m:r>
+                                </m:e>
+                              </m:d>
                             </m:e>
                             <m:sup>
                               <m:r>
-                                <a:rPr lang="en-GB" b="0" i="1">
+                                <a:rPr lang="en-GB" b="0" i="1" smtClean="0">
                                   <a:latin typeface="Cambria Math" panose="02040503050406030204" pitchFamily="18" charset="0"/>
                                 </a:rPr>
-                                <m:t>3</m:t>
+                                <m:t>2</m:t>
                               </m:r>
                             </m:sup>
                           </m:sSup>
-                          <m:sSup>
-                            <m:sSupPr>
-                              <m:ctrlPr>
-                                <a:rPr lang="en-GB" b="0" i="1">
-                                  <a:latin typeface="Cambria Math" panose="02040503050406030204" pitchFamily="18" charset="0"/>
-                                </a:rPr>
-                              </m:ctrlPr>
-                            </m:sSupPr>
-                            <m:e>
-                              <m:r>
-                                <a:rPr lang="en-GB" b="0" i="1">
-                                  <a:latin typeface="Cambria Math" panose="02040503050406030204" pitchFamily="18" charset="0"/>
-                                </a:rPr>
-                                <m:t>𝐷</m:t>
-                              </m:r>
-                            </m:e>
-                            <m:sup>
-                              <m:r>
-                                <a:rPr lang="en-GB" b="0" i="1">
-                                  <a:latin typeface="Cambria Math" panose="02040503050406030204" pitchFamily="18" charset="0"/>
-                                </a:rPr>
-                                <m:t>5</m:t>
-                              </m:r>
-                            </m:sup>
-                          </m:sSup>
+                          <m:r>
+                            <a:rPr lang="en-GB" b="0" i="1" smtClean="0">
+                              <a:latin typeface="Cambria Math" panose="02040503050406030204" pitchFamily="18" charset="0"/>
+                            </a:rPr>
+                            <m:t>𝑟𝐴</m:t>
+                          </m:r>
                         </m:den>
                       </m:f>
                     </m:oMath>
@@ -8488,7 +9586,7 @@
             </p:txBody>
           </p:sp>
         </mc:Choice>
-        <mc:Fallback xmlns="">
+        <mc:Fallback>
           <p:sp>
             <p:nvSpPr>
               <p:cNvPr id="3" name="Content Placeholder 2">
@@ -8532,6 +9630,180 @@
           </p:sp>
         </mc:Fallback>
       </mc:AlternateContent>
+      <mc:AlternateContent xmlns:mc="http://schemas.openxmlformats.org/markup-compatibility/2006">
+        <mc:Choice xmlns:a14="http://schemas.microsoft.com/office/drawing/2010/main" Requires="a14">
+          <p:sp>
+            <p:nvSpPr>
+              <p:cNvPr id="4" name="TextBox 3">
+                <a:extLst>
+                  <a:ext uri="{FF2B5EF4-FFF2-40B4-BE49-F238E27FC236}">
+                    <a16:creationId xmlns:a16="http://schemas.microsoft.com/office/drawing/2014/main" id="{6CDBE3A3-63F0-6B49-F498-15D8A8897B14}"/>
+                  </a:ext>
+                </a:extLst>
+              </p:cNvPr>
+              <p:cNvSpPr txBox="1"/>
+              <p:nvPr/>
+            </p:nvSpPr>
+            <p:spPr>
+              <a:xfrm>
+                <a:off x="3077438" y="2854355"/>
+                <a:ext cx="6037119" cy="1149289"/>
+              </a:xfrm>
+              <a:prstGeom prst="rect">
+                <a:avLst/>
+              </a:prstGeom>
+              <a:solidFill>
+                <a:schemeClr val="bg1"/>
+              </a:solidFill>
+            </p:spPr>
+            <p:txBody>
+              <a:bodyPr wrap="square" rtlCol="0">
+                <a:spAutoFit/>
+              </a:bodyPr>
+              <a:lstStyle/>
+              <a:p>
+                <a14:m>
+                  <m:oMathPara xmlns:m="http://schemas.openxmlformats.org/officeDocument/2006/math">
+                    <m:oMathParaPr>
+                      <m:jc m:val="centerGroup"/>
+                    </m:oMathParaPr>
+                    <m:oMath xmlns:m="http://schemas.openxmlformats.org/officeDocument/2006/math">
+                      <m:r>
+                        <a:rPr lang="en-GB" sz="2800" b="0" i="1" smtClean="0">
+                          <a:latin typeface="Cambria Math" panose="02040503050406030204" pitchFamily="18" charset="0"/>
+                        </a:rPr>
+                        <m:t>𝐹𝑀</m:t>
+                      </m:r>
+                      <m:r>
+                        <a:rPr lang="en-GB" sz="2800" b="0" i="1" smtClean="0">
+                          <a:latin typeface="Cambria Math" panose="02040503050406030204" pitchFamily="18" charset="0"/>
+                        </a:rPr>
+                        <m:t>=</m:t>
+                      </m:r>
+                      <m:f>
+                        <m:fPr>
+                          <m:ctrlPr>
+                            <a:rPr lang="en-GB" sz="2800" b="0" i="1" smtClean="0">
+                              <a:latin typeface="Cambria Math" panose="02040503050406030204" pitchFamily="18" charset="0"/>
+                            </a:rPr>
+                          </m:ctrlPr>
+                        </m:fPr>
+                        <m:num>
+                          <m:sSubSup>
+                            <m:sSubSupPr>
+                              <m:ctrlPr>
+                                <a:rPr lang="en-GB" sz="2800" b="0" i="1" smtClean="0">
+                                  <a:latin typeface="Cambria Math" panose="02040503050406030204" pitchFamily="18" charset="0"/>
+                                </a:rPr>
+                              </m:ctrlPr>
+                            </m:sSubSupPr>
+                            <m:e>
+                              <m:r>
+                                <a:rPr lang="en-GB" sz="2800" b="0" i="1" smtClean="0">
+                                  <a:latin typeface="Cambria Math" panose="02040503050406030204" pitchFamily="18" charset="0"/>
+                                </a:rPr>
+                                <m:t>𝐶</m:t>
+                              </m:r>
+                            </m:e>
+                            <m:sub>
+                              <m:r>
+                                <a:rPr lang="en-GB" sz="2800" b="0" i="1" smtClean="0">
+                                  <a:latin typeface="Cambria Math" panose="02040503050406030204" pitchFamily="18" charset="0"/>
+                                </a:rPr>
+                                <m:t>𝑇</m:t>
+                              </m:r>
+                            </m:sub>
+                            <m:sup>
+                              <m:r>
+                                <a:rPr lang="en-GB" sz="2800" b="0" i="1" smtClean="0">
+                                  <a:latin typeface="Cambria Math" panose="02040503050406030204" pitchFamily="18" charset="0"/>
+                                </a:rPr>
+                                <m:t>2/3</m:t>
+                              </m:r>
+                            </m:sup>
+                          </m:sSubSup>
+                        </m:num>
+                        <m:den>
+                          <m:sSub>
+                            <m:sSubPr>
+                              <m:ctrlPr>
+                                <a:rPr lang="en-GB" sz="2800" b="0" i="1" smtClean="0">
+                                  <a:latin typeface="Cambria Math" panose="02040503050406030204" pitchFamily="18" charset="0"/>
+                                </a:rPr>
+                              </m:ctrlPr>
+                            </m:sSubPr>
+                            <m:e>
+                              <m:r>
+                                <a:rPr lang="en-GB" sz="2800" b="0" i="1" smtClean="0">
+                                  <a:latin typeface="Cambria Math" panose="02040503050406030204" pitchFamily="18" charset="0"/>
+                                </a:rPr>
+                                <m:t>𝐶</m:t>
+                              </m:r>
+                            </m:e>
+                            <m:sub>
+                              <m:r>
+                                <a:rPr lang="en-GB" sz="2800" b="0" i="1" smtClean="0">
+                                  <a:latin typeface="Cambria Math" panose="02040503050406030204" pitchFamily="18" charset="0"/>
+                                </a:rPr>
+                                <m:t>𝑄</m:t>
+                              </m:r>
+                            </m:sub>
+                          </m:sSub>
+                        </m:den>
+                      </m:f>
+                    </m:oMath>
+                  </m:oMathPara>
+                </a14:m>
+                <a:endParaRPr lang="en-GB" sz="2800" dirty="0"/>
+              </a:p>
+            </p:txBody>
+          </p:sp>
+        </mc:Choice>
+        <mc:Fallback>
+          <p:sp>
+            <p:nvSpPr>
+              <p:cNvPr id="4" name="TextBox 3">
+                <a:extLst>
+                  <a:ext uri="{FF2B5EF4-FFF2-40B4-BE49-F238E27FC236}">
+                    <a16:creationId xmlns:a16="http://schemas.microsoft.com/office/drawing/2014/main" id="{6CDBE3A3-63F0-6B49-F498-15D8A8897B14}"/>
+                  </a:ext>
+                </a:extLst>
+              </p:cNvPr>
+              <p:cNvSpPr txBox="1">
+                <a:spLocks noRot="1" noChangeAspect="1" noMove="1" noResize="1" noEditPoints="1" noAdjustHandles="1" noChangeArrowheads="1" noChangeShapeType="1" noTextEdit="1"/>
+              </p:cNvSpPr>
+              <p:nvPr/>
+            </p:nvSpPr>
+            <p:spPr>
+              <a:xfrm>
+                <a:off x="3077438" y="2854355"/>
+                <a:ext cx="6037119" cy="1149289"/>
+              </a:xfrm>
+              <a:prstGeom prst="rect">
+                <a:avLst/>
+              </a:prstGeom>
+              <a:blipFill>
+                <a:blip r:embed="rId4"/>
+                <a:stretch>
+                  <a:fillRect/>
+                </a:stretch>
+              </a:blipFill>
+            </p:spPr>
+            <p:txBody>
+              <a:bodyPr/>
+              <a:lstStyle/>
+              <a:p>
+                <a:r>
+                  <a:rPr lang="en-GB">
+                    <a:noFill/>
+                  </a:rPr>
+                  <a:t> </a:t>
+                </a:r>
+              </a:p>
+            </p:txBody>
+          </p:sp>
+        </mc:Fallback>
+      </mc:AlternateContent>
     </p:spTree>
     <p:extLst>
       <p:ext uri="{BB962C8B-B14F-4D97-AF65-F5344CB8AC3E}">
@@ -8542,10 +9814,88 @@
   <p:clrMapOvr>
     <a:masterClrMapping/>
   </p:clrMapOvr>
+  <p:timing>
+    <p:tnLst>
+      <p:par>
+        <p:cTn id="1" dur="indefinite" restart="never" nodeType="tmRoot">
+          <p:childTnLst>
+            <p:seq concurrent="1" nextAc="seek">
+              <p:cTn id="2" dur="indefinite" nodeType="mainSeq">
+                <p:childTnLst>
+                  <p:par>
+                    <p:cTn id="3" fill="hold">
+                      <p:stCondLst>
+                        <p:cond delay="indefinite"/>
+                      </p:stCondLst>
+                      <p:childTnLst>
+                        <p:par>
+                          <p:cTn id="4" fill="hold">
+                            <p:stCondLst>
+                              <p:cond delay="0"/>
+                            </p:stCondLst>
+                            <p:childTnLst>
+                              <p:par>
+                                <p:cTn id="5" presetID="1" presetClass="entr" presetSubtype="0" fill="hold" grpId="0" nodeType="clickEffect">
+                                  <p:stCondLst>
+                                    <p:cond delay="0"/>
+                                  </p:stCondLst>
+                                  <p:childTnLst>
+                                    <p:set>
+                                      <p:cBhvr>
+                                        <p:cTn id="6" dur="1" fill="hold">
+                                          <p:stCondLst>
+                                            <p:cond delay="0"/>
+                                          </p:stCondLst>
+                                        </p:cTn>
+                                        <p:tgtEl>
+                                          <p:spTgt spid="4"/>
+                                        </p:tgtEl>
+                                        <p:attrNameLst>
+                                          <p:attrName>style.visibility</p:attrName>
+                                        </p:attrNameLst>
+                                      </p:cBhvr>
+                                      <p:to>
+                                        <p:strVal val="visible"/>
+                                      </p:to>
+                                    </p:set>
+                                  </p:childTnLst>
+                                </p:cTn>
+                              </p:par>
+                            </p:childTnLst>
+                          </p:cTn>
+                        </p:par>
+                      </p:childTnLst>
+                    </p:cTn>
+                  </p:par>
+                </p:childTnLst>
+              </p:cTn>
+              <p:prevCondLst>
+                <p:cond evt="onPrev" delay="0">
+                  <p:tgtEl>
+                    <p:sldTgt/>
+                  </p:tgtEl>
+                </p:cond>
+              </p:prevCondLst>
+              <p:nextCondLst>
+                <p:cond evt="onNext" delay="0">
+                  <p:tgtEl>
+                    <p:sldTgt/>
+                  </p:tgtEl>
+                </p:cond>
+              </p:nextCondLst>
+            </p:seq>
+          </p:childTnLst>
+        </p:cTn>
+      </p:par>
+    </p:tnLst>
+    <p:bldLst>
+      <p:bldP spid="4" grpId="0" animBg="1"/>
+    </p:bldLst>
+  </p:timing>
 </p:sld>
 </file>
 
-<file path=ppt/slides/slide7.xml><?xml version="1.0" encoding="utf-8"?>
+<file path=ppt/slides/slide8.xml><?xml version="1.0" encoding="utf-8"?>
 <p:sld xmlns:a="http://schemas.openxmlformats.org/drawingml/2006/main" xmlns:r="http://schemas.openxmlformats.org/officeDocument/2006/relationships" xmlns:p="http://schemas.openxmlformats.org/presentationml/2006/main">
   <p:cSld>
     <p:spTree>
@@ -8706,7 +10056,7 @@
 </p:sld>
 </file>
 
-<file path=ppt/slides/slide8.xml><?xml version="1.0" encoding="utf-8"?>
+<file path=ppt/slides/slide9.xml><?xml version="1.0" encoding="utf-8"?>
 <p:sld xmlns:a="http://schemas.openxmlformats.org/drawingml/2006/main" xmlns:r="http://schemas.openxmlformats.org/officeDocument/2006/relationships" xmlns:p="http://schemas.openxmlformats.org/presentationml/2006/main">
   <p:cSld>
     <p:spTree>
@@ -8782,22 +10132,7 @@
             <a:pPr marL="0" indent="0">
               <a:buNone/>
             </a:pPr>
-            <a:r>
-              <a:rPr lang="en-GB" dirty="0"/>
-              <a:t>Noise separated into</a:t>
-            </a:r>
-          </a:p>
-          <a:p>
-            <a:r>
-              <a:rPr lang="en-GB" dirty="0"/>
-              <a:t>Discrete frequency tonal noise</a:t>
-            </a:r>
-          </a:p>
-          <a:p>
-            <a:r>
-              <a:rPr lang="en-GB" dirty="0"/>
-              <a:t>Broadband</a:t>
-            </a:r>
+            <a:endParaRPr lang="en-GB" dirty="0"/>
           </a:p>
         </p:txBody>
       </p:sp>
@@ -9032,247 +10367,6 @@
     <p:extLst>
       <p:ext uri="{BB962C8B-B14F-4D97-AF65-F5344CB8AC3E}">
         <p14:creationId xmlns:p14="http://schemas.microsoft.com/office/powerpoint/2010/main" val="1354065674"/>
-      </p:ext>
-    </p:extLst>
-  </p:cSld>
-  <p:clrMapOvr>
-    <a:masterClrMapping/>
-  </p:clrMapOvr>
-</p:sld>
-</file>
-
-<file path=ppt/slides/slide9.xml><?xml version="1.0" encoding="utf-8"?>
-<p:sld xmlns:a="http://schemas.openxmlformats.org/drawingml/2006/main" xmlns:r="http://schemas.openxmlformats.org/officeDocument/2006/relationships" xmlns:p="http://schemas.openxmlformats.org/presentationml/2006/main">
-  <p:cSld>
-    <p:spTree>
-      <p:nvGrpSpPr>
-        <p:cNvPr id="1" name=""/>
-        <p:cNvGrpSpPr/>
-        <p:nvPr/>
-      </p:nvGrpSpPr>
-      <p:grpSpPr>
-        <a:xfrm>
-          <a:off x="0" y="0"/>
-          <a:ext cx="0" cy="0"/>
-          <a:chOff x="0" y="0"/>
-          <a:chExt cx="0" cy="0"/>
-        </a:xfrm>
-      </p:grpSpPr>
-      <p:pic>
-        <p:nvPicPr>
-          <p:cNvPr id="5" name="Picture 4">
-            <a:extLst>
-              <a:ext uri="{FF2B5EF4-FFF2-40B4-BE49-F238E27FC236}">
-                <a16:creationId xmlns:a16="http://schemas.microsoft.com/office/drawing/2014/main" id="{DE22670F-0D71-AD7E-B183-43040CD2741A}"/>
-              </a:ext>
-            </a:extLst>
-          </p:cNvPr>
-          <p:cNvPicPr>
-            <a:picLocks noChangeAspect="1"/>
-          </p:cNvPicPr>
-          <p:nvPr/>
-        </p:nvPicPr>
-        <p:blipFill>
-          <a:blip r:embed="rId3"/>
-          <a:stretch>
-            <a:fillRect/>
-          </a:stretch>
-        </p:blipFill>
-        <p:spPr>
-          <a:xfrm>
-            <a:off x="5303978" y="447674"/>
-            <a:ext cx="6820194" cy="6175375"/>
-          </a:xfrm>
-          <a:prstGeom prst="rect">
-            <a:avLst/>
-          </a:prstGeom>
-        </p:spPr>
-      </p:pic>
-      <p:sp>
-        <p:nvSpPr>
-          <p:cNvPr id="2" name="Title 1">
-            <a:extLst>
-              <a:ext uri="{FF2B5EF4-FFF2-40B4-BE49-F238E27FC236}">
-                <a16:creationId xmlns:a16="http://schemas.microsoft.com/office/drawing/2014/main" id="{31AA5FBC-085C-6F67-FFE6-B768D4CC0250}"/>
-              </a:ext>
-            </a:extLst>
-          </p:cNvPr>
-          <p:cNvSpPr>
-            <a:spLocks noGrp="1"/>
-          </p:cNvSpPr>
-          <p:nvPr>
-            <p:ph type="title"/>
-          </p:nvPr>
-        </p:nvSpPr>
-        <p:spPr>
-          <a:xfrm>
-            <a:off x="438150" y="155575"/>
-            <a:ext cx="10515600" cy="1325563"/>
-          </a:xfrm>
-        </p:spPr>
-        <p:txBody>
-          <a:bodyPr/>
-          <a:lstStyle/>
-          <a:p>
-            <a:r>
-              <a:rPr lang="en-GB" dirty="0"/>
-              <a:t>Acoustic measurements</a:t>
-            </a:r>
-          </a:p>
-        </p:txBody>
-      </p:sp>
-      <mc:AlternateContent xmlns:mc="http://schemas.openxmlformats.org/markup-compatibility/2006" xmlns:a14="http://schemas.microsoft.com/office/drawing/2010/main">
-        <mc:Choice Requires="a14">
-          <p:sp>
-            <p:nvSpPr>
-              <p:cNvPr id="7" name="TextBox 6">
-                <a:extLst>
-                  <a:ext uri="{FF2B5EF4-FFF2-40B4-BE49-F238E27FC236}">
-                    <a16:creationId xmlns:a16="http://schemas.microsoft.com/office/drawing/2014/main" id="{5FE54BC4-6E6B-11A7-1B30-9A93B0ACC3A4}"/>
-                  </a:ext>
-                </a:extLst>
-              </p:cNvPr>
-              <p:cNvSpPr txBox="1"/>
-              <p:nvPr/>
-            </p:nvSpPr>
-            <p:spPr>
-              <a:xfrm rot="2674917">
-                <a:off x="7101426" y="3867428"/>
-                <a:ext cx="675686" cy="369332"/>
-              </a:xfrm>
-              <a:prstGeom prst="rect">
-                <a:avLst/>
-              </a:prstGeom>
-              <a:solidFill>
-                <a:schemeClr val="bg1"/>
-              </a:solidFill>
-            </p:spPr>
-            <p:txBody>
-              <a:bodyPr wrap="square" rtlCol="0">
-                <a:spAutoFit/>
-              </a:bodyPr>
-              <a:lstStyle/>
-              <a:p>
-                <a:pPr/>
-                <a14:m>
-                  <m:oMathPara xmlns:m="http://schemas.openxmlformats.org/officeDocument/2006/math">
-                    <m:oMathParaPr>
-                      <m:jc m:val="centerGroup"/>
-                    </m:oMathParaPr>
-                    <m:oMath xmlns:m="http://schemas.openxmlformats.org/officeDocument/2006/math">
-                      <m:r>
-                        <a:rPr lang="en-GB" b="0" i="1" smtClean="0">
-                          <a:latin typeface="Cambria Math" panose="02040503050406030204" pitchFamily="18" charset="0"/>
-                        </a:rPr>
-                        <m:t>2.5</m:t>
-                      </m:r>
-                      <m:r>
-                        <a:rPr lang="en-GB" b="0" i="1" smtClean="0">
-                          <a:latin typeface="Cambria Math" panose="02040503050406030204" pitchFamily="18" charset="0"/>
-                        </a:rPr>
-                        <m:t>𝑑</m:t>
-                      </m:r>
-                    </m:oMath>
-                  </m:oMathPara>
-                </a14:m>
-                <a:endParaRPr lang="en-GB" dirty="0"/>
-              </a:p>
-            </p:txBody>
-          </p:sp>
-        </mc:Choice>
-        <mc:Fallback xmlns="">
-          <p:sp>
-            <p:nvSpPr>
-              <p:cNvPr id="7" name="TextBox 6">
-                <a:extLst>
-                  <a:ext uri="{FF2B5EF4-FFF2-40B4-BE49-F238E27FC236}">
-                    <a16:creationId xmlns:a16="http://schemas.microsoft.com/office/drawing/2014/main" id="{5FE54BC4-6E6B-11A7-1B30-9A93B0ACC3A4}"/>
-                  </a:ext>
-                </a:extLst>
-              </p:cNvPr>
-              <p:cNvSpPr txBox="1">
-                <a:spLocks noRot="1" noChangeAspect="1" noMove="1" noResize="1" noEditPoints="1" noAdjustHandles="1" noChangeArrowheads="1" noChangeShapeType="1" noTextEdit="1"/>
-              </p:cNvSpPr>
-              <p:nvPr/>
-            </p:nvSpPr>
-            <p:spPr>
-              <a:xfrm rot="2674917">
-                <a:off x="7101426" y="3867428"/>
-                <a:ext cx="675686" cy="369332"/>
-              </a:xfrm>
-              <a:prstGeom prst="rect">
-                <a:avLst/>
-              </a:prstGeom>
-              <a:blipFill>
-                <a:blip r:embed="rId4"/>
-                <a:stretch>
-                  <a:fillRect/>
-                </a:stretch>
-              </a:blipFill>
-            </p:spPr>
-            <p:txBody>
-              <a:bodyPr/>
-              <a:lstStyle/>
-              <a:p>
-                <a:r>
-                  <a:rPr lang="en-GB">
-                    <a:noFill/>
-                  </a:rPr>
-                  <a:t> </a:t>
-                </a:r>
-              </a:p>
-            </p:txBody>
-          </p:sp>
-        </mc:Fallback>
-      </mc:AlternateContent>
-      <p:sp>
-        <p:nvSpPr>
-          <p:cNvPr id="3" name="TextBox 2">
-            <a:extLst>
-              <a:ext uri="{FF2B5EF4-FFF2-40B4-BE49-F238E27FC236}">
-                <a16:creationId xmlns:a16="http://schemas.microsoft.com/office/drawing/2014/main" id="{2994AB0B-01E0-C9B1-FAB4-4B6511A40250}"/>
-              </a:ext>
-            </a:extLst>
-          </p:cNvPr>
-          <p:cNvSpPr txBox="1"/>
-          <p:nvPr/>
-        </p:nvSpPr>
-        <p:spPr>
-          <a:xfrm>
-            <a:off x="438150" y="1574655"/>
-            <a:ext cx="5027468" cy="2677656"/>
-          </a:xfrm>
-          <a:prstGeom prst="rect">
-            <a:avLst/>
-          </a:prstGeom>
-          <a:noFill/>
-        </p:spPr>
-        <p:txBody>
-          <a:bodyPr wrap="square" rtlCol="0">
-            <a:spAutoFit/>
-          </a:bodyPr>
-          <a:lstStyle/>
-          <a:p>
-            <a:r>
-              <a:rPr lang="en-GB" sz="2400" dirty="0"/>
-              <a:t>Ideally, the propeller acoustics must be isolated from the motor and motor driver.</a:t>
-            </a:r>
-          </a:p>
-          <a:p>
-            <a:endParaRPr lang="en-GB" sz="2400" dirty="0"/>
-          </a:p>
-          <a:p>
-            <a:r>
-              <a:rPr lang="en-GB" sz="2400" dirty="0"/>
-              <a:t>However, this is not possible and so the acoustics of no propeller will be measured at the same speed</a:t>
-            </a:r>
-          </a:p>
-        </p:txBody>
-      </p:sp>
-    </p:spTree>
-    <p:extLst>
-      <p:ext uri="{BB962C8B-B14F-4D97-AF65-F5344CB8AC3E}">
-        <p14:creationId xmlns:p14="http://schemas.microsoft.com/office/powerpoint/2010/main" val="3386808046"/>
       </p:ext>
     </p:extLst>
   </p:cSld>

--- a/deliverables/michaelmas_presentation.pptx
+++ b/deliverables/michaelmas_presentation.pptx
@@ -5,21 +5,22 @@
     <p:sldMasterId id="2147483648" r:id="rId1"/>
   </p:sldMasterIdLst>
   <p:notesMasterIdLst>
-    <p:notesMasterId r:id="rId14"/>
+    <p:notesMasterId r:id="rId15"/>
   </p:notesMasterIdLst>
   <p:sldIdLst>
     <p:sldId id="256" r:id="rId2"/>
     <p:sldId id="257" r:id="rId3"/>
     <p:sldId id="271" r:id="rId4"/>
-    <p:sldId id="265" r:id="rId5"/>
-    <p:sldId id="270" r:id="rId6"/>
-    <p:sldId id="258" r:id="rId7"/>
-    <p:sldId id="261" r:id="rId8"/>
-    <p:sldId id="263" r:id="rId9"/>
-    <p:sldId id="264" r:id="rId10"/>
-    <p:sldId id="266" r:id="rId11"/>
-    <p:sldId id="268" r:id="rId12"/>
-    <p:sldId id="262" r:id="rId13"/>
+    <p:sldId id="270" r:id="rId5"/>
+    <p:sldId id="265" r:id="rId6"/>
+    <p:sldId id="268" r:id="rId7"/>
+    <p:sldId id="258" r:id="rId8"/>
+    <p:sldId id="275" r:id="rId9"/>
+    <p:sldId id="261" r:id="rId10"/>
+    <p:sldId id="273" r:id="rId11"/>
+    <p:sldId id="266" r:id="rId12"/>
+    <p:sldId id="272" r:id="rId13"/>
+    <p:sldId id="262" r:id="rId14"/>
   </p:sldIdLst>
   <p:sldSz cx="12192000" cy="6858000"/>
   <p:notesSz cx="6858000" cy="9144000"/>
@@ -565,6 +566,114 @@
   <p:cSld>
     <p:spTree>
       <p:nvGrpSpPr>
+        <p:cNvPr id="1" name="">
+          <a:extLst>
+            <a:ext uri="{FF2B5EF4-FFF2-40B4-BE49-F238E27FC236}">
+              <a16:creationId xmlns:a16="http://schemas.microsoft.com/office/drawing/2014/main" id="{5D1F99CB-4436-76D3-04AB-BB639B262917}"/>
+            </a:ext>
+          </a:extLst>
+        </p:cNvPr>
+        <p:cNvGrpSpPr/>
+        <p:nvPr/>
+      </p:nvGrpSpPr>
+      <p:grpSpPr>
+        <a:xfrm>
+          <a:off x="0" y="0"/>
+          <a:ext cx="0" cy="0"/>
+          <a:chOff x="0" y="0"/>
+          <a:chExt cx="0" cy="0"/>
+        </a:xfrm>
+      </p:grpSpPr>
+      <p:sp>
+        <p:nvSpPr>
+          <p:cNvPr id="2" name="Slide Image Placeholder 1">
+            <a:extLst>
+              <a:ext uri="{FF2B5EF4-FFF2-40B4-BE49-F238E27FC236}">
+                <a16:creationId xmlns:a16="http://schemas.microsoft.com/office/drawing/2014/main" id="{349C4BBA-B884-3910-3B44-1D1C122B1AE4}"/>
+              </a:ext>
+            </a:extLst>
+          </p:cNvPr>
+          <p:cNvSpPr>
+            <a:spLocks noGrp="1" noRot="1" noChangeAspect="1"/>
+          </p:cNvSpPr>
+          <p:nvPr>
+            <p:ph type="sldImg"/>
+          </p:nvPr>
+        </p:nvSpPr>
+        <p:spPr/>
+      </p:sp>
+      <p:sp>
+        <p:nvSpPr>
+          <p:cNvPr id="3" name="Notes Placeholder 2">
+            <a:extLst>
+              <a:ext uri="{FF2B5EF4-FFF2-40B4-BE49-F238E27FC236}">
+                <a16:creationId xmlns:a16="http://schemas.microsoft.com/office/drawing/2014/main" id="{CAE08912-9E6D-54B9-9BAB-A236BBCA1C56}"/>
+              </a:ext>
+            </a:extLst>
+          </p:cNvPr>
+          <p:cNvSpPr>
+            <a:spLocks noGrp="1"/>
+          </p:cNvSpPr>
+          <p:nvPr>
+            <p:ph type="body" idx="1"/>
+          </p:nvPr>
+        </p:nvSpPr>
+        <p:spPr/>
+        <p:txBody>
+          <a:bodyPr/>
+          <a:lstStyle/>
+          <a:p>
+            <a:endParaRPr lang="en-GB" dirty="0"/>
+          </a:p>
+        </p:txBody>
+      </p:sp>
+      <p:sp>
+        <p:nvSpPr>
+          <p:cNvPr id="4" name="Slide Number Placeholder 3">
+            <a:extLst>
+              <a:ext uri="{FF2B5EF4-FFF2-40B4-BE49-F238E27FC236}">
+                <a16:creationId xmlns:a16="http://schemas.microsoft.com/office/drawing/2014/main" id="{5D63CA47-5490-2C86-CD87-EF5A62168580}"/>
+              </a:ext>
+            </a:extLst>
+          </p:cNvPr>
+          <p:cNvSpPr>
+            <a:spLocks noGrp="1"/>
+          </p:cNvSpPr>
+          <p:nvPr>
+            <p:ph type="sldNum" sz="quarter" idx="5"/>
+          </p:nvPr>
+        </p:nvSpPr>
+        <p:spPr/>
+        <p:txBody>
+          <a:bodyPr/>
+          <a:lstStyle/>
+          <a:p>
+            <a:fld id="{339AB5C0-8D71-4250-8AD2-76EE22722959}" type="slidenum">
+              <a:rPr lang="en-GB" smtClean="0"/>
+              <a:t>10</a:t>
+            </a:fld>
+            <a:endParaRPr lang="en-GB"/>
+          </a:p>
+        </p:txBody>
+      </p:sp>
+    </p:spTree>
+    <p:extLst>
+      <p:ext uri="{BB962C8B-B14F-4D97-AF65-F5344CB8AC3E}">
+        <p14:creationId xmlns:p14="http://schemas.microsoft.com/office/powerpoint/2010/main" val="732465060"/>
+      </p:ext>
+    </p:extLst>
+  </p:cSld>
+  <p:clrMapOvr>
+    <a:masterClrMapping/>
+  </p:clrMapOvr>
+</p:notes>
+</file>
+
+<file path=ppt/notesSlides/notesSlide11.xml><?xml version="1.0" encoding="utf-8"?>
+<p:notes xmlns:a="http://schemas.openxmlformats.org/drawingml/2006/main" xmlns:r="http://schemas.openxmlformats.org/officeDocument/2006/relationships" xmlns:p="http://schemas.openxmlformats.org/presentationml/2006/main">
+  <p:cSld>
+    <p:spTree>
+      <p:nvGrpSpPr>
         <p:cNvPr id="1" name=""/>
         <p:cNvGrpSpPr/>
         <p:nvPr/>
@@ -604,21 +713,93 @@
           <a:bodyPr/>
           <a:lstStyle/>
           <a:p>
+            <a:endParaRPr lang="en-GB" dirty="0"/>
+          </a:p>
+        </p:txBody>
+      </p:sp>
+      <p:sp>
+        <p:nvSpPr>
+          <p:cNvPr id="4" name="Slide Number Placeholder 3"/>
+          <p:cNvSpPr>
+            <a:spLocks noGrp="1"/>
+          </p:cNvSpPr>
+          <p:nvPr>
+            <p:ph type="sldNum" sz="quarter" idx="5"/>
+          </p:nvPr>
+        </p:nvSpPr>
+        <p:spPr/>
+        <p:txBody>
+          <a:bodyPr/>
+          <a:lstStyle/>
+          <a:p>
+            <a:fld id="{339AB5C0-8D71-4250-8AD2-76EE22722959}" type="slidenum">
+              <a:rPr lang="en-GB" smtClean="0"/>
+              <a:t>11</a:t>
+            </a:fld>
+            <a:endParaRPr lang="en-GB"/>
+          </a:p>
+        </p:txBody>
+      </p:sp>
+    </p:spTree>
+    <p:extLst>
+      <p:ext uri="{BB962C8B-B14F-4D97-AF65-F5344CB8AC3E}">
+        <p14:creationId xmlns:p14="http://schemas.microsoft.com/office/powerpoint/2010/main" val="3832086078"/>
+      </p:ext>
+    </p:extLst>
+  </p:cSld>
+  <p:clrMapOvr>
+    <a:masterClrMapping/>
+  </p:clrMapOvr>
+</p:notes>
+</file>
+
+<file path=ppt/notesSlides/notesSlide12.xml><?xml version="1.0" encoding="utf-8"?>
+<p:notes xmlns:a="http://schemas.openxmlformats.org/drawingml/2006/main" xmlns:r="http://schemas.openxmlformats.org/officeDocument/2006/relationships" xmlns:p="http://schemas.openxmlformats.org/presentationml/2006/main">
+  <p:cSld>
+    <p:spTree>
+      <p:nvGrpSpPr>
+        <p:cNvPr id="1" name=""/>
+        <p:cNvGrpSpPr/>
+        <p:nvPr/>
+      </p:nvGrpSpPr>
+      <p:grpSpPr>
+        <a:xfrm>
+          <a:off x="0" y="0"/>
+          <a:ext cx="0" cy="0"/>
+          <a:chOff x="0" y="0"/>
+          <a:chExt cx="0" cy="0"/>
+        </a:xfrm>
+      </p:grpSpPr>
+      <p:sp>
+        <p:nvSpPr>
+          <p:cNvPr id="2" name="Slide Image Placeholder 1"/>
+          <p:cNvSpPr>
+            <a:spLocks noGrp="1" noRot="1" noChangeAspect="1"/>
+          </p:cNvSpPr>
+          <p:nvPr>
+            <p:ph type="sldImg"/>
+          </p:nvPr>
+        </p:nvSpPr>
+        <p:spPr/>
+      </p:sp>
+      <p:sp>
+        <p:nvSpPr>
+          <p:cNvPr id="3" name="Notes Placeholder 2"/>
+          <p:cNvSpPr>
+            <a:spLocks noGrp="1"/>
+          </p:cNvSpPr>
+          <p:nvPr>
+            <p:ph type="body" idx="1"/>
+          </p:nvPr>
+        </p:nvSpPr>
+        <p:spPr/>
+        <p:txBody>
+          <a:bodyPr/>
+          <a:lstStyle/>
+          <a:p>
             <a:r>
               <a:rPr lang="en-GB" dirty="0"/>
-              <a:t>Possible Qs</a:t>
-            </a:r>
-          </a:p>
-          <a:p>
-            <a:r>
-              <a:rPr lang="en-GB" dirty="0"/>
-              <a:t>Reynolds Number</a:t>
-            </a:r>
-          </a:p>
-          <a:p>
-            <a:r>
-              <a:rPr lang="en-GB" dirty="0"/>
-              <a:t>Propulsive efficiency vs figure of merit</a:t>
+              <a:t>A preliminary setup to measure thrust against a speed control input was built.</a:t>
             </a:r>
           </a:p>
           <a:p>
@@ -644,6 +825,108 @@
             <a:fld id="{339AB5C0-8D71-4250-8AD2-76EE22722959}" type="slidenum">
               <a:rPr lang="en-GB" smtClean="0"/>
               <a:t>12</a:t>
+            </a:fld>
+            <a:endParaRPr lang="en-GB"/>
+          </a:p>
+        </p:txBody>
+      </p:sp>
+    </p:spTree>
+    <p:extLst>
+      <p:ext uri="{BB962C8B-B14F-4D97-AF65-F5344CB8AC3E}">
+        <p14:creationId xmlns:p14="http://schemas.microsoft.com/office/powerpoint/2010/main" val="4125597737"/>
+      </p:ext>
+    </p:extLst>
+  </p:cSld>
+  <p:clrMapOvr>
+    <a:masterClrMapping/>
+  </p:clrMapOvr>
+</p:notes>
+</file>
+
+<file path=ppt/notesSlides/notesSlide13.xml><?xml version="1.0" encoding="utf-8"?>
+<p:notes xmlns:a="http://schemas.openxmlformats.org/drawingml/2006/main" xmlns:r="http://schemas.openxmlformats.org/officeDocument/2006/relationships" xmlns:p="http://schemas.openxmlformats.org/presentationml/2006/main">
+  <p:cSld>
+    <p:spTree>
+      <p:nvGrpSpPr>
+        <p:cNvPr id="1" name=""/>
+        <p:cNvGrpSpPr/>
+        <p:nvPr/>
+      </p:nvGrpSpPr>
+      <p:grpSpPr>
+        <a:xfrm>
+          <a:off x="0" y="0"/>
+          <a:ext cx="0" cy="0"/>
+          <a:chOff x="0" y="0"/>
+          <a:chExt cx="0" cy="0"/>
+        </a:xfrm>
+      </p:grpSpPr>
+      <p:sp>
+        <p:nvSpPr>
+          <p:cNvPr id="2" name="Slide Image Placeholder 1"/>
+          <p:cNvSpPr>
+            <a:spLocks noGrp="1" noRot="1" noChangeAspect="1"/>
+          </p:cNvSpPr>
+          <p:nvPr>
+            <p:ph type="sldImg"/>
+          </p:nvPr>
+        </p:nvSpPr>
+        <p:spPr/>
+      </p:sp>
+      <p:sp>
+        <p:nvSpPr>
+          <p:cNvPr id="3" name="Notes Placeholder 2"/>
+          <p:cNvSpPr>
+            <a:spLocks noGrp="1"/>
+          </p:cNvSpPr>
+          <p:nvPr>
+            <p:ph type="body" idx="1"/>
+          </p:nvPr>
+        </p:nvSpPr>
+        <p:spPr/>
+        <p:txBody>
+          <a:bodyPr/>
+          <a:lstStyle/>
+          <a:p>
+            <a:r>
+              <a:rPr lang="en-GB" dirty="0"/>
+              <a:t>Possible Qs</a:t>
+            </a:r>
+          </a:p>
+          <a:p>
+            <a:r>
+              <a:rPr lang="en-GB" dirty="0"/>
+              <a:t>Reynolds Number</a:t>
+            </a:r>
+          </a:p>
+          <a:p>
+            <a:r>
+              <a:rPr lang="en-GB" dirty="0"/>
+              <a:t>Propulsive efficiency vs figure of merit</a:t>
+            </a:r>
+          </a:p>
+          <a:p>
+            <a:endParaRPr lang="en-GB" dirty="0"/>
+          </a:p>
+        </p:txBody>
+      </p:sp>
+      <p:sp>
+        <p:nvSpPr>
+          <p:cNvPr id="4" name="Slide Number Placeholder 3"/>
+          <p:cNvSpPr>
+            <a:spLocks noGrp="1"/>
+          </p:cNvSpPr>
+          <p:nvPr>
+            <p:ph type="sldNum" sz="quarter" idx="5"/>
+          </p:nvPr>
+        </p:nvSpPr>
+        <p:spPr/>
+        <p:txBody>
+          <a:bodyPr/>
+          <a:lstStyle/>
+          <a:p>
+            <a:fld id="{339AB5C0-8D71-4250-8AD2-76EE22722959}" type="slidenum">
+              <a:rPr lang="en-GB" smtClean="0"/>
+              <a:t>13</a:t>
             </a:fld>
             <a:endParaRPr lang="en-GB"/>
           </a:p>
@@ -708,13 +991,25 @@
           <a:p>
             <a:r>
               <a:rPr lang="en-GB" dirty="0"/>
-              <a:t>The noise made by drones acts as a barrier to their wider adoption for drone-based services such as logistics, surveying and mapping.</a:t>
+              <a:t>The noise made by drones acts as a barrier to their wider adoption for drone-based services such as </a:t>
             </a:r>
           </a:p>
           <a:p>
             <a:r>
               <a:rPr lang="en-GB" dirty="0"/>
-              <a:t>The propellers of drones make up a small fraction of their cost, but efficient designs are important for productivity such as payload and flight time.</a:t>
+              <a:t>logistics, surveying and mapping.</a:t>
+            </a:r>
+          </a:p>
+          <a:p>
+            <a:r>
+              <a:rPr lang="en-GB" dirty="0"/>
+              <a:t>Propellers are a small part of a drone’s cost to produce,</a:t>
+            </a:r>
+          </a:p>
+          <a:p>
+            <a:r>
+              <a:rPr lang="en-GB" dirty="0"/>
+              <a:t>but efficient designs can increase productivity such as payload and flight time.</a:t>
             </a:r>
           </a:p>
           <a:p>
@@ -737,7 +1032,7 @@
             </a:pPr>
             <a:r>
               <a:rPr lang="en-GB" dirty="0"/>
-              <a:t>Future legislation will likely require small and reliable drones with many propellers for redundancy.</a:t>
+              <a:t>Propellers are also the main source of noise from drones</a:t>
             </a:r>
           </a:p>
         </p:txBody>
@@ -842,14 +1137,93 @@
           <a:p>
             <a:r>
               <a:rPr lang="en-GB" dirty="0"/>
-              <a:t>The objectives of this project are to design and build an experimental setup to measure aerodynamic and aeroacoustics performance.</a:t>
+              <a:t>The sound can be split into two:</a:t>
             </a:r>
           </a:p>
           <a:p>
             <a:r>
               <a:rPr lang="en-GB" dirty="0"/>
-              <a:t>This will be done for varying propeller geometry</a:t>
-            </a:r>
+              <a:t>Broadband distributed over a wide range of frequencies</a:t>
+            </a:r>
+          </a:p>
+          <a:p>
+            <a:pPr marL="0" marR="0" lvl="0" indent="0" algn="l" defTabSz="914400" rtl="0" eaLnBrk="1" fontAlgn="auto" latinLnBrk="0" hangingPunct="1">
+              <a:lnSpc>
+                <a:spcPct val="100000"/>
+              </a:lnSpc>
+              <a:spcBef>
+                <a:spcPts val="0"/>
+              </a:spcBef>
+              <a:spcAft>
+                <a:spcPts val="0"/>
+              </a:spcAft>
+              <a:buClrTx/>
+              <a:buSzTx/>
+              <a:buFontTx/>
+              <a:buNone/>
+              <a:tabLst/>
+              <a:defRPr/>
+            </a:pPr>
+            <a:r>
+              <a:rPr lang="en-GB" dirty="0"/>
+              <a:t>Tonal at discrete frequency</a:t>
+            </a:r>
+          </a:p>
+          <a:p>
+            <a:pPr marL="0" marR="0" lvl="0" indent="0" algn="l" defTabSz="914400" rtl="0" eaLnBrk="1" fontAlgn="auto" latinLnBrk="0" hangingPunct="1">
+              <a:lnSpc>
+                <a:spcPct val="100000"/>
+              </a:lnSpc>
+              <a:spcBef>
+                <a:spcPts val="0"/>
+              </a:spcBef>
+              <a:spcAft>
+                <a:spcPts val="0"/>
+              </a:spcAft>
+              <a:buClrTx/>
+              <a:buSzTx/>
+              <a:buFontTx/>
+              <a:buNone/>
+              <a:tabLst/>
+              <a:defRPr/>
+            </a:pPr>
+            <a:endParaRPr lang="en-GB" dirty="0"/>
+          </a:p>
+          <a:p>
+            <a:r>
+              <a:rPr lang="en-GB" dirty="0"/>
+              <a:t>Broadband noise primarily consists of formation and shedding of vortices</a:t>
+            </a:r>
+          </a:p>
+          <a:p>
+            <a:r>
+              <a:rPr lang="en-GB" dirty="0"/>
+              <a:t>Trailing edge turbulent interaction and flow separation</a:t>
+            </a:r>
+          </a:p>
+          <a:p>
+            <a:endParaRPr lang="en-GB" dirty="0"/>
+          </a:p>
+          <a:p>
+            <a:r>
+              <a:rPr lang="en-GB" dirty="0"/>
+              <a:t>Tonal noise primarily consists of </a:t>
+            </a:r>
+          </a:p>
+          <a:p>
+            <a:r>
+              <a:rPr lang="en-GB" dirty="0"/>
+              <a:t>oscillating thickness displacement and pressure loading</a:t>
+            </a:r>
+          </a:p>
+          <a:p>
+            <a:r>
+              <a:rPr lang="en-GB" dirty="0"/>
+              <a:t>But can include BVI and blade wake interactions</a:t>
+            </a:r>
+          </a:p>
+          <a:p>
+            <a:endParaRPr lang="en-GB" dirty="0"/>
           </a:p>
         </p:txBody>
       </p:sp>
@@ -941,47 +1315,35 @@
           <a:p>
             <a:r>
               <a:rPr lang="en-GB" dirty="0"/>
-              <a:t>Of course this isn’t a new topic </a:t>
+              <a:t>The Y axis represents a psychoacoustic annoyance factor which is used to quantify subjective feelings caused by sound.</a:t>
             </a:r>
           </a:p>
           <a:p>
             <a:r>
               <a:rPr lang="en-GB" dirty="0"/>
-              <a:t>Previous research has covered changes to tip geometry which has reduced tonality from tip vortex blade interaction.</a:t>
+              <a:t>The FM colour bar represents a static efficiency.</a:t>
             </a:r>
           </a:p>
           <a:p>
             <a:r>
               <a:rPr lang="en-GB" dirty="0"/>
-              <a:t>Blade sweep was found to have little affect</a:t>
+              <a:t>This graph shows two important things</a:t>
             </a:r>
           </a:p>
           <a:p>
             <a:r>
               <a:rPr lang="en-GB" dirty="0"/>
-              <a:t>Variable blade spacing and trailing edge serrations reduced the broadband noise by destructive acoustic interference and mixing</a:t>
+              <a:t>Reducing thrust can significantly reduce acoustic annoyance</a:t>
             </a:r>
           </a:p>
           <a:p>
             <a:r>
               <a:rPr lang="en-GB" dirty="0"/>
-              <a:t>It's also worth noting that these trailing edge serrations at low Reynolds numbers were inspired by owl wings.</a:t>
+              <a:t>For a fixed thrust a reduction in acoustic annoyance comes at a penalty of efficiency.</a:t>
             </a:r>
           </a:p>
           <a:p>
             <a:endParaRPr lang="en-GB" dirty="0"/>
-          </a:p>
-          <a:p>
-            <a:r>
-              <a:rPr lang="en-GB" dirty="0"/>
-              <a:t>This needs to be naturally and indirectly introduced by exploring the problem of aero acoustic performance</a:t>
-            </a:r>
-          </a:p>
-          <a:p>
-            <a:r>
-              <a:rPr lang="en-GB" dirty="0"/>
-              <a:t>Treat as large design space </a:t>
-            </a:r>
           </a:p>
         </p:txBody>
       </p:sp>
@@ -1011,7 +1373,7 @@
     </p:spTree>
     <p:extLst>
       <p:ext uri="{BB962C8B-B14F-4D97-AF65-F5344CB8AC3E}">
-        <p14:creationId xmlns:p14="http://schemas.microsoft.com/office/powerpoint/2010/main" val="1580789794"/>
+        <p14:creationId xmlns:p14="http://schemas.microsoft.com/office/powerpoint/2010/main" val="1749543501"/>
       </p:ext>
     </p:extLst>
   </p:cSld>
@@ -1067,14 +1429,29 @@
           <a:p>
             <a:r>
               <a:rPr lang="en-GB" dirty="0"/>
-              <a:t>The objectives of this project are to design and build an experimental setup to measure aerodynamic and aeroacoustics performance.</a:t>
+              <a:t>Noise reduction at a similar level of performance has been achieved.</a:t>
             </a:r>
           </a:p>
           <a:p>
             <a:r>
               <a:rPr lang="en-GB" dirty="0"/>
-              <a:t>This will be done for varying propeller geometry</a:t>
-            </a:r>
+              <a:t>Tip geometry has reduced broadband and in some cases blade pass frequency tones.</a:t>
+            </a:r>
+          </a:p>
+          <a:p>
+            <a:r>
+              <a:rPr lang="en-GB" dirty="0"/>
+              <a:t>Variable blade spacing and trailing edge serrations reduced the broadband noise by destructive acoustic interference and mixing</a:t>
+            </a:r>
+          </a:p>
+          <a:p>
+            <a:r>
+              <a:rPr lang="en-GB" dirty="0"/>
+              <a:t>It's also worth noting that these trailing edge serrations at low Reynolds numbers were inspired by owl wings.</a:t>
+            </a:r>
+          </a:p>
+          <a:p>
+            <a:endParaRPr lang="en-GB" dirty="0"/>
           </a:p>
         </p:txBody>
       </p:sp>
@@ -1095,7 +1472,7 @@
           <a:p>
             <a:fld id="{339AB5C0-8D71-4250-8AD2-76EE22722959}" type="slidenum">
               <a:rPr lang="en-GB" smtClean="0"/>
-              <a:t>6</a:t>
+              <a:t>5</a:t>
             </a:fld>
             <a:endParaRPr lang="en-GB"/>
           </a:p>
@@ -1104,7 +1481,7 @@
     </p:spTree>
     <p:extLst>
       <p:ext uri="{BB962C8B-B14F-4D97-AF65-F5344CB8AC3E}">
-        <p14:creationId xmlns:p14="http://schemas.microsoft.com/office/powerpoint/2010/main" val="2282649506"/>
+        <p14:creationId xmlns:p14="http://schemas.microsoft.com/office/powerpoint/2010/main" val="1580789794"/>
       </p:ext>
     </p:extLst>
   </p:cSld>
@@ -1158,27 +1535,6 @@
           <a:bodyPr/>
           <a:lstStyle/>
           <a:p>
-            <a:r>
-              <a:rPr lang="en-GB" dirty="0"/>
-              <a:t>For the experimental setup it's important to consider the parameters needed to define a given propellers performance. Dimensionless thrust and torque coefficients can be found from blade tip speed and area. </a:t>
-            </a:r>
-          </a:p>
-          <a:p>
-            <a:endParaRPr lang="en-GB" dirty="0"/>
-          </a:p>
-          <a:p>
-            <a:endParaRPr lang="en-GB" dirty="0"/>
-          </a:p>
-          <a:p>
-            <a:r>
-              <a:rPr lang="en-GB" dirty="0"/>
-              <a:t>Add coefficient of merit</a:t>
-            </a:r>
-          </a:p>
-          <a:p>
-            <a:endParaRPr lang="en-GB" dirty="0"/>
-          </a:p>
-          <a:p>
             <a:endParaRPr lang="en-GB" dirty="0"/>
           </a:p>
         </p:txBody>
@@ -1200,7 +1556,7 @@
           <a:p>
             <a:fld id="{339AB5C0-8D71-4250-8AD2-76EE22722959}" type="slidenum">
               <a:rPr lang="en-GB" smtClean="0"/>
-              <a:t>7</a:t>
+              <a:t>6</a:t>
             </a:fld>
             <a:endParaRPr lang="en-GB"/>
           </a:p>
@@ -1209,7 +1565,7 @@
     </p:spTree>
     <p:extLst>
       <p:ext uri="{BB962C8B-B14F-4D97-AF65-F5344CB8AC3E}">
-        <p14:creationId xmlns:p14="http://schemas.microsoft.com/office/powerpoint/2010/main" val="1790782265"/>
+        <p14:creationId xmlns:p14="http://schemas.microsoft.com/office/powerpoint/2010/main" val="2506275"/>
       </p:ext>
     </p:extLst>
   </p:cSld>
@@ -1265,22 +1621,13 @@
           <a:p>
             <a:r>
               <a:rPr lang="en-GB" dirty="0"/>
-              <a:t>To measure torque and thrust the deflection of load cells will be measured by strain gauges. This was chosen over null force balancing methods for its simple setup and sufficient accuracy.</a:t>
+              <a:t>The objectives of this project are to design and build an experimental setup to measure aerodynamic and aeroacoustics performance.</a:t>
             </a:r>
           </a:p>
           <a:p>
             <a:r>
               <a:rPr lang="en-GB" dirty="0"/>
-              <a:t>Full bridge load cell refers to 4 strain gauges in the Wheatstone bridge which can compensate for off axis forces.</a:t>
-            </a:r>
-          </a:p>
-          <a:p>
-            <a:endParaRPr lang="en-GB" dirty="0"/>
-          </a:p>
-          <a:p>
-            <a:r>
-              <a:rPr lang="en-GB" dirty="0"/>
-              <a:t>Current work</a:t>
+              <a:t>This will be done for varying propeller geometry</a:t>
             </a:r>
           </a:p>
         </p:txBody>
@@ -1302,7 +1649,7 @@
           <a:p>
             <a:fld id="{339AB5C0-8D71-4250-8AD2-76EE22722959}" type="slidenum">
               <a:rPr lang="en-GB" smtClean="0"/>
-              <a:t>8</a:t>
+              <a:t>7</a:t>
             </a:fld>
             <a:endParaRPr lang="en-GB"/>
           </a:p>
@@ -1311,7 +1658,7 @@
     </p:spTree>
     <p:extLst>
       <p:ext uri="{BB962C8B-B14F-4D97-AF65-F5344CB8AC3E}">
-        <p14:creationId xmlns:p14="http://schemas.microsoft.com/office/powerpoint/2010/main" val="1624805185"/>
+        <p14:creationId xmlns:p14="http://schemas.microsoft.com/office/powerpoint/2010/main" val="2282649506"/>
       </p:ext>
     </p:extLst>
   </p:cSld>
@@ -1326,7 +1673,13 @@
   <p:cSld>
     <p:spTree>
       <p:nvGrpSpPr>
-        <p:cNvPr id="1" name=""/>
+        <p:cNvPr id="1" name="">
+          <a:extLst>
+            <a:ext uri="{FF2B5EF4-FFF2-40B4-BE49-F238E27FC236}">
+              <a16:creationId xmlns:a16="http://schemas.microsoft.com/office/drawing/2014/main" id="{F0B96EA8-02F3-2F30-B4E2-D4E4B265BA82}"/>
+            </a:ext>
+          </a:extLst>
+        </p:cNvPr>
         <p:cNvGrpSpPr/>
         <p:nvPr/>
       </p:nvGrpSpPr>
@@ -1340,7 +1693,13 @@
       </p:grpSpPr>
       <p:sp>
         <p:nvSpPr>
-          <p:cNvPr id="2" name="Slide Image Placeholder 1"/>
+          <p:cNvPr id="2" name="Slide Image Placeholder 1">
+            <a:extLst>
+              <a:ext uri="{FF2B5EF4-FFF2-40B4-BE49-F238E27FC236}">
+                <a16:creationId xmlns:a16="http://schemas.microsoft.com/office/drawing/2014/main" id="{4FFB3C0D-6E41-BC99-934B-974A1E72A459}"/>
+              </a:ext>
+            </a:extLst>
+          </p:cNvPr>
           <p:cNvSpPr>
             <a:spLocks noGrp="1" noRot="1" noChangeAspect="1"/>
           </p:cNvSpPr>
@@ -1352,7 +1711,13 @@
       </p:sp>
       <p:sp>
         <p:nvSpPr>
-          <p:cNvPr id="3" name="Notes Placeholder 2"/>
+          <p:cNvPr id="3" name="Notes Placeholder 2">
+            <a:extLst>
+              <a:ext uri="{FF2B5EF4-FFF2-40B4-BE49-F238E27FC236}">
+                <a16:creationId xmlns:a16="http://schemas.microsoft.com/office/drawing/2014/main" id="{B8A6453A-1E10-028D-52A8-A7854ED6D0E1}"/>
+              </a:ext>
+            </a:extLst>
+          </p:cNvPr>
           <p:cNvSpPr>
             <a:spLocks noGrp="1"/>
           </p:cNvSpPr>
@@ -1365,13 +1730,60 @@
           <a:bodyPr/>
           <a:lstStyle/>
           <a:p>
+            <a:r>
+              <a:rPr lang="en-GB" dirty="0"/>
+              <a:t>These are some examples of geometry modifications that are planned to be made.</a:t>
+            </a:r>
+          </a:p>
+          <a:p>
+            <a:pPr marL="0" marR="0" lvl="0" indent="0" algn="l" defTabSz="914400" rtl="0" eaLnBrk="1" fontAlgn="auto" latinLnBrk="0" hangingPunct="1">
+              <a:lnSpc>
+                <a:spcPct val="100000"/>
+              </a:lnSpc>
+              <a:spcBef>
+                <a:spcPts val="0"/>
+              </a:spcBef>
+              <a:spcAft>
+                <a:spcPts val="0"/>
+              </a:spcAft>
+              <a:buClrTx/>
+              <a:buSzTx/>
+              <a:buFontTx/>
+              <a:buNone/>
+              <a:tabLst/>
+              <a:defRPr/>
+            </a:pPr>
+            <a:r>
+              <a:rPr lang="en-GB" dirty="0"/>
+              <a:t>A conventional propeller optimised for efficiency will be used as a base case.</a:t>
+            </a:r>
+          </a:p>
+          <a:p>
+            <a:r>
+              <a:rPr lang="en-GB" dirty="0"/>
+              <a:t>The left shows varying amounts of sweep for the toroidal propeller.</a:t>
+            </a:r>
+          </a:p>
+          <a:p>
+            <a:r>
+              <a:rPr lang="en-GB" dirty="0"/>
+              <a:t>Trailing edge serrations will also be added to toroidal and an uneven blade spacing design to test this hypothesis</a:t>
+            </a:r>
+          </a:p>
+          <a:p>
             <a:endParaRPr lang="en-GB" dirty="0"/>
           </a:p>
         </p:txBody>
       </p:sp>
       <p:sp>
         <p:nvSpPr>
-          <p:cNvPr id="4" name="Slide Number Placeholder 3"/>
+          <p:cNvPr id="4" name="Slide Number Placeholder 3">
+            <a:extLst>
+              <a:ext uri="{FF2B5EF4-FFF2-40B4-BE49-F238E27FC236}">
+                <a16:creationId xmlns:a16="http://schemas.microsoft.com/office/drawing/2014/main" id="{C7169CF6-A17C-A34B-9ECC-F2704744D1E3}"/>
+              </a:ext>
+            </a:extLst>
+          </p:cNvPr>
           <p:cNvSpPr>
             <a:spLocks noGrp="1"/>
           </p:cNvSpPr>
@@ -1386,7 +1798,7 @@
           <a:p>
             <a:fld id="{339AB5C0-8D71-4250-8AD2-76EE22722959}" type="slidenum">
               <a:rPr lang="en-GB" smtClean="0"/>
-              <a:t>9</a:t>
+              <a:t>8</a:t>
             </a:fld>
             <a:endParaRPr lang="en-GB"/>
           </a:p>
@@ -1395,7 +1807,7 @@
     </p:spTree>
     <p:extLst>
       <p:ext uri="{BB962C8B-B14F-4D97-AF65-F5344CB8AC3E}">
-        <p14:creationId xmlns:p14="http://schemas.microsoft.com/office/powerpoint/2010/main" val="1226897306"/>
+        <p14:creationId xmlns:p14="http://schemas.microsoft.com/office/powerpoint/2010/main" val="1196071974"/>
       </p:ext>
     </p:extLst>
   </p:cSld>
@@ -1449,6 +1861,23 @@
           <a:bodyPr/>
           <a:lstStyle/>
           <a:p>
+            <a:r>
+              <a:rPr lang="en-GB" dirty="0"/>
+              <a:t>For the experimental setup it's important to consider the parameters needed to define a given propellers performance. Dimensionless thrust and torque coefficients can be found from blade tip speed and area. </a:t>
+            </a:r>
+          </a:p>
+          <a:p>
+            <a:r>
+              <a:rPr lang="en-GB" dirty="0"/>
+              <a:t>These can then be combined into a static efficiency, or figure of merit which is the </a:t>
+            </a:r>
+            <a:r>
+              <a:rPr lang="en-US" dirty="0"/>
+              <a:t>ratio the ideal power required to hover to the actual power required.</a:t>
+            </a:r>
+            <a:endParaRPr lang="en-GB" dirty="0"/>
+          </a:p>
+          <a:p>
             <a:endParaRPr lang="en-GB" dirty="0"/>
           </a:p>
         </p:txBody>
@@ -1470,7 +1899,7 @@
           <a:p>
             <a:fld id="{339AB5C0-8D71-4250-8AD2-76EE22722959}" type="slidenum">
               <a:rPr lang="en-GB" smtClean="0"/>
-              <a:t>10</a:t>
+              <a:t>9</a:t>
             </a:fld>
             <a:endParaRPr lang="en-GB"/>
           </a:p>
@@ -1479,7 +1908,7 @@
     </p:spTree>
     <p:extLst>
       <p:ext uri="{BB962C8B-B14F-4D97-AF65-F5344CB8AC3E}">
-        <p14:creationId xmlns:p14="http://schemas.microsoft.com/office/powerpoint/2010/main" val="3832086078"/>
+        <p14:creationId xmlns:p14="http://schemas.microsoft.com/office/powerpoint/2010/main" val="1790782265"/>
       </p:ext>
     </p:extLst>
   </p:cSld>
@@ -5396,7 +5825,7 @@
         </p:nvSpPr>
         <p:spPr>
           <a:xfrm>
-            <a:off x="4285397" y="4960961"/>
+            <a:off x="4426985" y="5250991"/>
             <a:ext cx="7055893" cy="1078054"/>
           </a:xfrm>
         </p:spPr>
@@ -5406,7 +5835,7 @@
           </a:bodyPr>
           <a:lstStyle/>
           <a:p>
-            <a:pPr algn="l"/>
+            <a:pPr algn="r"/>
             <a:r>
               <a:rPr lang="en-GB" dirty="0">
                 <a:solidFill>
@@ -5417,14 +5846,14 @@
             </a:r>
           </a:p>
           <a:p>
-            <a:pPr algn="l"/>
+            <a:pPr algn="r"/>
             <a:r>
               <a:rPr lang="en-GB" dirty="0">
                 <a:solidFill>
                   <a:srgbClr val="FFFFFF"/>
                 </a:solidFill>
               </a:rPr>
-              <a:t>LWP26</a:t>
+              <a:t>Supervised by Dr Shreyas Mandre</a:t>
             </a:r>
           </a:p>
         </p:txBody>
@@ -5445,9 +5874,23 @@
 <file path=ppt/slides/slide10.xml><?xml version="1.0" encoding="utf-8"?>
 <p:sld xmlns:a="http://schemas.openxmlformats.org/drawingml/2006/main" xmlns:r="http://schemas.openxmlformats.org/officeDocument/2006/relationships" xmlns:p="http://schemas.openxmlformats.org/presentationml/2006/main">
   <p:cSld>
+    <p:bg>
+      <p:bgPr>
+        <a:solidFill>
+          <a:schemeClr val="bg1"/>
+        </a:solidFill>
+        <a:effectLst/>
+      </p:bgPr>
+    </p:bg>
     <p:spTree>
       <p:nvGrpSpPr>
-        <p:cNvPr id="1" name=""/>
+        <p:cNvPr id="1" name="">
+          <a:extLst>
+            <a:ext uri="{FF2B5EF4-FFF2-40B4-BE49-F238E27FC236}">
+              <a16:creationId xmlns:a16="http://schemas.microsoft.com/office/drawing/2014/main" id="{F84B8105-AB67-C5F8-1784-31BF50D6E661}"/>
+            </a:ext>
+          </a:extLst>
+        </p:cNvPr>
         <p:cNvGrpSpPr/>
         <p:nvPr/>
       </p:nvGrpSpPr>
@@ -5459,410 +5902,326 @@
           <a:chExt cx="0" cy="0"/>
         </a:xfrm>
       </p:grpSpPr>
-      <p:pic>
-        <p:nvPicPr>
-          <p:cNvPr id="5" name="Picture 4">
-            <a:extLst>
-              <a:ext uri="{FF2B5EF4-FFF2-40B4-BE49-F238E27FC236}">
-                <a16:creationId xmlns:a16="http://schemas.microsoft.com/office/drawing/2014/main" id="{DE22670F-0D71-AD7E-B183-43040CD2741A}"/>
-              </a:ext>
-            </a:extLst>
-          </p:cNvPr>
-          <p:cNvPicPr>
-            <a:picLocks noChangeAspect="1"/>
-          </p:cNvPicPr>
-          <p:nvPr/>
-        </p:nvPicPr>
-        <p:blipFill>
-          <a:blip r:embed="rId3"/>
-          <a:stretch>
-            <a:fillRect/>
-          </a:stretch>
-        </p:blipFill>
+      <p:sp useBgFill="1">
+        <p:nvSpPr>
+          <p:cNvPr id="9" name="Rectangle 8">
+            <a:extLst>
+              <a:ext uri="{FF2B5EF4-FFF2-40B4-BE49-F238E27FC236}">
+                <a16:creationId xmlns:a16="http://schemas.microsoft.com/office/drawing/2014/main" id="{27E2F0B1-559D-8AF4-BE87-827A893FB4FB}"/>
+              </a:ext>
+              <a:ext uri="{C183D7F6-B498-43B3-948B-1728B52AA6E4}">
+                <adec:decorative xmlns:adec="http://schemas.microsoft.com/office/drawing/2017/decorative" val="1"/>
+              </a:ext>
+            </a:extLst>
+          </p:cNvPr>
+          <p:cNvSpPr>
+            <a:spLocks noGrp="1" noRot="1" noChangeAspect="1" noMove="1" noResize="1" noEditPoints="1" noAdjustHandles="1" noChangeArrowheads="1" noChangeShapeType="1" noTextEdit="1"/>
+          </p:cNvSpPr>
+          <p:nvPr>
+            <p:extLst>
+              <p:ext uri="{386F3935-93C4-4BCD-93E2-E3B085C9AB24}">
+                <p16:designElem xmlns:p16="http://schemas.microsoft.com/office/powerpoint/2015/main" val="1"/>
+              </p:ext>
+            </p:extLst>
+          </p:nvPr>
+        </p:nvSpPr>
         <p:spPr>
           <a:xfrm>
-            <a:off x="5303978" y="447674"/>
-            <a:ext cx="6820194" cy="6175375"/>
+            <a:off x="0" y="0"/>
+            <a:ext cx="12192000" cy="6858000"/>
           </a:xfrm>
           <a:prstGeom prst="rect">
             <a:avLst/>
           </a:prstGeom>
+          <a:ln w="12700" cap="flat" cmpd="sng" algn="ctr">
+            <a:noFill/>
+            <a:prstDash val="solid"/>
+            <a:miter lim="800000"/>
+          </a:ln>
+          <a:effectLst/>
+          <a:extLst>
+            <a:ext uri="{91240B29-F687-4F45-9708-019B960494DF}">
+              <a14:hiddenLine xmlns:a14="http://schemas.microsoft.com/office/drawing/2010/main" w="12700" cap="flat" cmpd="sng" algn="ctr">
+                <a:solidFill>
+                  <a:schemeClr val="accent1">
+                    <a:shade val="50000"/>
+                  </a:schemeClr>
+                </a:solidFill>
+                <a:prstDash val="solid"/>
+                <a:miter lim="800000"/>
+              </a14:hiddenLine>
+            </a:ext>
+          </a:extLst>
         </p:spPr>
-      </p:pic>
-      <p:sp>
-        <p:nvSpPr>
-          <p:cNvPr id="2" name="Title 1">
-            <a:extLst>
-              <a:ext uri="{FF2B5EF4-FFF2-40B4-BE49-F238E27FC236}">
-                <a16:creationId xmlns:a16="http://schemas.microsoft.com/office/drawing/2014/main" id="{31AA5FBC-085C-6F67-FFE6-B768D4CC0250}"/>
-              </a:ext>
-            </a:extLst>
-          </p:cNvPr>
-          <p:cNvSpPr>
-            <a:spLocks noGrp="1"/>
-          </p:cNvSpPr>
-          <p:nvPr>
-            <p:ph type="title"/>
+        <p:style>
+          <a:lnRef idx="2">
+            <a:schemeClr val="accent1">
+              <a:shade val="50000"/>
+            </a:schemeClr>
+          </a:lnRef>
+          <a:fillRef idx="1">
+            <a:schemeClr val="accent1"/>
+          </a:fillRef>
+          <a:effectRef idx="0">
+            <a:schemeClr val="accent1"/>
+          </a:effectRef>
+          <a:fontRef idx="minor">
+            <a:schemeClr val="lt1"/>
+          </a:fontRef>
+        </p:style>
+        <p:txBody>
+          <a:bodyPr rtlCol="0" anchor="ctr"/>
+          <a:lstStyle/>
+          <a:p>
+            <a:pPr algn="ctr"/>
+            <a:endParaRPr lang="en-US"/>
+          </a:p>
+        </p:txBody>
+      </p:sp>
+      <p:sp>
+        <p:nvSpPr>
+          <p:cNvPr id="11" name="Rectangle 10">
+            <a:extLst>
+              <a:ext uri="{FF2B5EF4-FFF2-40B4-BE49-F238E27FC236}">
+                <a16:creationId xmlns:a16="http://schemas.microsoft.com/office/drawing/2014/main" id="{2EB7FEAB-C04D-1184-9E48-ED5D23977C26}"/>
+              </a:ext>
+              <a:ext uri="{C183D7F6-B498-43B3-948B-1728B52AA6E4}">
+                <adec:decorative xmlns:adec="http://schemas.microsoft.com/office/drawing/2017/decorative" val="1"/>
+              </a:ext>
+            </a:extLst>
+          </p:cNvPr>
+          <p:cNvSpPr>
+            <a:spLocks noGrp="1" noRot="1" noChangeAspect="1" noMove="1" noResize="1" noEditPoints="1" noAdjustHandles="1" noChangeArrowheads="1" noChangeShapeType="1" noTextEdit="1"/>
+          </p:cNvSpPr>
+          <p:nvPr>
+            <p:extLst>
+              <p:ext uri="{386F3935-93C4-4BCD-93E2-E3B085C9AB24}">
+                <p16:designElem xmlns:p16="http://schemas.microsoft.com/office/powerpoint/2015/main" val="1"/>
+              </p:ext>
+            </p:extLst>
           </p:nvPr>
         </p:nvSpPr>
         <p:spPr>
-          <a:xfrm>
-            <a:off x="438150" y="155575"/>
-            <a:ext cx="10515600" cy="1325563"/>
-          </a:xfrm>
-        </p:spPr>
-        <p:txBody>
-          <a:bodyPr/>
-          <a:lstStyle/>
-          <a:p>
-            <a:r>
-              <a:rPr lang="en-GB" dirty="0"/>
-              <a:t>Acoustic measurements</a:t>
-            </a:r>
-          </a:p>
-        </p:txBody>
-      </p:sp>
-      <mc:AlternateContent xmlns:mc="http://schemas.openxmlformats.org/markup-compatibility/2006" xmlns:a14="http://schemas.microsoft.com/office/drawing/2010/main">
-        <mc:Choice Requires="a14">
-          <p:sp>
-            <p:nvSpPr>
-              <p:cNvPr id="7" name="TextBox 6">
-                <a:extLst>
-                  <a:ext uri="{FF2B5EF4-FFF2-40B4-BE49-F238E27FC236}">
-                    <a16:creationId xmlns:a16="http://schemas.microsoft.com/office/drawing/2014/main" id="{5FE54BC4-6E6B-11A7-1B30-9A93B0ACC3A4}"/>
-                  </a:ext>
-                </a:extLst>
-              </p:cNvPr>
-              <p:cNvSpPr txBox="1"/>
-              <p:nvPr/>
-            </p:nvSpPr>
-            <p:spPr>
-              <a:xfrm rot="2674917">
-                <a:off x="7101426" y="3867428"/>
-                <a:ext cx="675686" cy="369332"/>
-              </a:xfrm>
-              <a:prstGeom prst="rect">
-                <a:avLst/>
-              </a:prstGeom>
-              <a:solidFill>
-                <a:schemeClr val="bg1"/>
-              </a:solidFill>
-            </p:spPr>
-            <p:txBody>
-              <a:bodyPr wrap="square" rtlCol="0">
-                <a:spAutoFit/>
-              </a:bodyPr>
-              <a:lstStyle/>
-              <a:p>
-                <a:pPr/>
-                <a14:m>
-                  <m:oMathPara xmlns:m="http://schemas.openxmlformats.org/officeDocument/2006/math">
-                    <m:oMathParaPr>
-                      <m:jc m:val="centerGroup"/>
-                    </m:oMathParaPr>
-                    <m:oMath xmlns:m="http://schemas.openxmlformats.org/officeDocument/2006/math">
-                      <m:r>
-                        <a:rPr lang="en-GB" b="0" i="1" smtClean="0">
-                          <a:latin typeface="Cambria Math" panose="02040503050406030204" pitchFamily="18" charset="0"/>
-                        </a:rPr>
-                        <m:t>2.5</m:t>
-                      </m:r>
-                      <m:r>
-                        <a:rPr lang="en-GB" b="0" i="1" smtClean="0">
-                          <a:latin typeface="Cambria Math" panose="02040503050406030204" pitchFamily="18" charset="0"/>
-                        </a:rPr>
-                        <m:t>𝑑</m:t>
-                      </m:r>
-                    </m:oMath>
-                  </m:oMathPara>
-                </a14:m>
-                <a:endParaRPr lang="en-GB" dirty="0"/>
-              </a:p>
-            </p:txBody>
-          </p:sp>
-        </mc:Choice>
-        <mc:Fallback xmlns="">
-          <p:sp>
-            <p:nvSpPr>
-              <p:cNvPr id="7" name="TextBox 6">
-                <a:extLst>
-                  <a:ext uri="{FF2B5EF4-FFF2-40B4-BE49-F238E27FC236}">
-                    <a16:creationId xmlns:a16="http://schemas.microsoft.com/office/drawing/2014/main" id="{5FE54BC4-6E6B-11A7-1B30-9A93B0ACC3A4}"/>
-                  </a:ext>
-                </a:extLst>
-              </p:cNvPr>
-              <p:cNvSpPr txBox="1">
-                <a:spLocks noRot="1" noChangeAspect="1" noMove="1" noResize="1" noEditPoints="1" noAdjustHandles="1" noChangeArrowheads="1" noChangeShapeType="1" noTextEdit="1"/>
-              </p:cNvSpPr>
-              <p:nvPr/>
-            </p:nvSpPr>
-            <p:spPr>
-              <a:xfrm rot="2674917">
-                <a:off x="7101426" y="3867428"/>
-                <a:ext cx="675686" cy="369332"/>
-              </a:xfrm>
-              <a:prstGeom prst="rect">
-                <a:avLst/>
-              </a:prstGeom>
-              <a:blipFill>
-                <a:blip r:embed="rId4"/>
-                <a:stretch>
-                  <a:fillRect/>
-                </a:stretch>
-              </a:blipFill>
-            </p:spPr>
-            <p:txBody>
-              <a:bodyPr/>
-              <a:lstStyle/>
-              <a:p>
-                <a:r>
-                  <a:rPr lang="en-GB">
-                    <a:noFill/>
-                  </a:rPr>
-                  <a:t> </a:t>
-                </a:r>
-              </a:p>
-            </p:txBody>
-          </p:sp>
-        </mc:Fallback>
-      </mc:AlternateContent>
-      <p:sp>
-        <p:nvSpPr>
-          <p:cNvPr id="3" name="TextBox 2">
-            <a:extLst>
-              <a:ext uri="{FF2B5EF4-FFF2-40B4-BE49-F238E27FC236}">
-                <a16:creationId xmlns:a16="http://schemas.microsoft.com/office/drawing/2014/main" id="{2994AB0B-01E0-C9B1-FAB4-4B6511A40250}"/>
-              </a:ext>
-            </a:extLst>
-          </p:cNvPr>
-          <p:cNvSpPr txBox="1"/>
-          <p:nvPr/>
-        </p:nvSpPr>
-        <p:spPr>
-          <a:xfrm>
-            <a:off x="438150" y="1574655"/>
-            <a:ext cx="5027468" cy="2677656"/>
+          <a:xfrm flipH="1">
+            <a:off x="2" y="0"/>
+            <a:ext cx="12191998" cy="1575955"/>
           </a:xfrm>
           <a:prstGeom prst="rect">
             <a:avLst/>
           </a:prstGeom>
-          <a:noFill/>
+          <a:gradFill>
+            <a:gsLst>
+              <a:gs pos="0">
+                <a:srgbClr val="000000">
+                  <a:alpha val="96000"/>
+                </a:srgbClr>
+              </a:gs>
+              <a:gs pos="100000">
+                <a:schemeClr val="accent1">
+                  <a:lumMod val="75000"/>
+                </a:schemeClr>
+              </a:gs>
+            </a:gsLst>
+            <a:lin ang="8400000" scaled="0"/>
+          </a:gradFill>
+          <a:ln>
+            <a:noFill/>
+          </a:ln>
         </p:spPr>
-        <p:txBody>
-          <a:bodyPr wrap="square" rtlCol="0">
-            <a:spAutoFit/>
-          </a:bodyPr>
-          <a:lstStyle/>
-          <a:p>
-            <a:r>
-              <a:rPr lang="en-GB" sz="2400" dirty="0"/>
-              <a:t>Ideally, the propeller acoustics must be isolated from the motor and motor driver.</a:t>
-            </a:r>
-          </a:p>
-          <a:p>
-            <a:endParaRPr lang="en-GB" sz="2400" dirty="0"/>
-          </a:p>
-          <a:p>
-            <a:r>
-              <a:rPr lang="en-GB" sz="2400" dirty="0"/>
-              <a:t>However, this is not possible and so the acoustics of no propeller will be measured at the same speed</a:t>
-            </a:r>
-          </a:p>
-        </p:txBody>
-      </p:sp>
-    </p:spTree>
-    <p:extLst>
-      <p:ext uri="{BB962C8B-B14F-4D97-AF65-F5344CB8AC3E}">
-        <p14:creationId xmlns:p14="http://schemas.microsoft.com/office/powerpoint/2010/main" val="3386808046"/>
-      </p:ext>
-    </p:extLst>
-  </p:cSld>
-  <p:clrMapOvr>
-    <a:masterClrMapping/>
-  </p:clrMapOvr>
-</p:sld>
-</file>
-
-<file path=ppt/slides/slide11.xml><?xml version="1.0" encoding="utf-8"?>
-<p:sld xmlns:a="http://schemas.openxmlformats.org/drawingml/2006/main" xmlns:r="http://schemas.openxmlformats.org/officeDocument/2006/relationships" xmlns:p="http://schemas.openxmlformats.org/presentationml/2006/main">
-  <p:cSld>
-    <p:spTree>
-      <p:nvGrpSpPr>
-        <p:cNvPr id="1" name=""/>
-        <p:cNvGrpSpPr/>
-        <p:nvPr/>
-      </p:nvGrpSpPr>
-      <p:grpSpPr>
-        <a:xfrm>
-          <a:off x="0" y="0"/>
-          <a:ext cx="0" cy="0"/>
-          <a:chOff x="0" y="0"/>
-          <a:chExt cx="0" cy="0"/>
-        </a:xfrm>
-      </p:grpSpPr>
-      <p:sp>
-        <p:nvSpPr>
-          <p:cNvPr id="2" name="Title 1">
-            <a:extLst>
-              <a:ext uri="{FF2B5EF4-FFF2-40B4-BE49-F238E27FC236}">
-                <a16:creationId xmlns:a16="http://schemas.microsoft.com/office/drawing/2014/main" id="{8684C99E-1C51-E619-7C98-62CACEBDF7D0}"/>
-              </a:ext>
-            </a:extLst>
-          </p:cNvPr>
-          <p:cNvSpPr>
-            <a:spLocks noGrp="1"/>
-          </p:cNvSpPr>
-          <p:nvPr>
-            <p:ph type="title"/>
-          </p:nvPr>
-        </p:nvSpPr>
-        <p:spPr/>
-        <p:txBody>
-          <a:bodyPr/>
-          <a:lstStyle/>
-          <a:p>
-            <a:r>
-              <a:rPr lang="en-GB" dirty="0"/>
-              <a:t>Hypothesis</a:t>
-            </a:r>
-          </a:p>
-        </p:txBody>
-      </p:sp>
-      <p:sp>
-        <p:nvSpPr>
-          <p:cNvPr id="3" name="Content Placeholder 2">
-            <a:extLst>
-              <a:ext uri="{FF2B5EF4-FFF2-40B4-BE49-F238E27FC236}">
-                <a16:creationId xmlns:a16="http://schemas.microsoft.com/office/drawing/2014/main" id="{8B29E6C3-E2AE-1A2C-4E04-2B8C7295EEC0}"/>
-              </a:ext>
-            </a:extLst>
-          </p:cNvPr>
-          <p:cNvSpPr>
-            <a:spLocks noGrp="1"/>
-          </p:cNvSpPr>
-          <p:nvPr>
-            <p:ph idx="1"/>
-          </p:nvPr>
-        </p:nvSpPr>
-        <p:spPr/>
-        <p:txBody>
-          <a:bodyPr/>
-          <a:lstStyle/>
-          <a:p>
-            <a:r>
-              <a:rPr lang="en-GB" dirty="0"/>
-              <a:t>Variable blade span could promote mixing of wing tip vortices, reducing  tonal sound</a:t>
-            </a:r>
-          </a:p>
-          <a:p>
-            <a:endParaRPr lang="en-GB" dirty="0"/>
-          </a:p>
-          <a:p>
-            <a:r>
-              <a:rPr lang="en-GB" dirty="0"/>
-              <a:t>Serrations on trailing edge of front loop or closely spaced propellers will reduce blade wake interaction and hence the broadband noise</a:t>
-            </a:r>
-          </a:p>
-          <a:p>
-            <a:endParaRPr lang="en-GB" dirty="0"/>
-          </a:p>
-          <a:p>
-            <a:r>
-              <a:rPr lang="en-GB" dirty="0"/>
-              <a:t>High loading at the tip will produce stronger </a:t>
-            </a:r>
-            <a:r>
-              <a:rPr lang="en-GB" dirty="0" err="1"/>
-              <a:t>vorticies</a:t>
-            </a:r>
-            <a:r>
-              <a:rPr lang="en-GB" dirty="0"/>
-              <a:t> </a:t>
-            </a:r>
-          </a:p>
-        </p:txBody>
-      </p:sp>
-    </p:spTree>
-    <p:extLst>
-      <p:ext uri="{BB962C8B-B14F-4D97-AF65-F5344CB8AC3E}">
-        <p14:creationId xmlns:p14="http://schemas.microsoft.com/office/powerpoint/2010/main" val="1814590356"/>
-      </p:ext>
-    </p:extLst>
-  </p:cSld>
-  <p:clrMapOvr>
-    <a:masterClrMapping/>
-  </p:clrMapOvr>
-</p:sld>
-</file>
-
-<file path=ppt/slides/slide12.xml><?xml version="1.0" encoding="utf-8"?>
-<p:sld xmlns:a="http://schemas.openxmlformats.org/drawingml/2006/main" xmlns:r="http://schemas.openxmlformats.org/officeDocument/2006/relationships" xmlns:p="http://schemas.openxmlformats.org/presentationml/2006/main">
-  <p:cSld>
-    <p:spTree>
-      <p:nvGrpSpPr>
-        <p:cNvPr id="1" name=""/>
-        <p:cNvGrpSpPr/>
-        <p:nvPr/>
-      </p:nvGrpSpPr>
-      <p:grpSpPr>
-        <a:xfrm>
-          <a:off x="0" y="0"/>
-          <a:ext cx="0" cy="0"/>
-          <a:chOff x="0" y="0"/>
-          <a:chExt cx="0" cy="0"/>
-        </a:xfrm>
-      </p:grpSpPr>
-      <p:sp>
-        <p:nvSpPr>
-          <p:cNvPr id="2" name="Title 1">
-            <a:extLst>
-              <a:ext uri="{FF2B5EF4-FFF2-40B4-BE49-F238E27FC236}">
-                <a16:creationId xmlns:a16="http://schemas.microsoft.com/office/drawing/2014/main" id="{1EBECBE2-A4C4-70B6-C758-B1BD9EEA99FE}"/>
-              </a:ext>
-            </a:extLst>
-          </p:cNvPr>
-          <p:cNvSpPr>
-            <a:spLocks noGrp="1"/>
-          </p:cNvSpPr>
-          <p:nvPr>
-            <p:ph type="title"/>
-          </p:nvPr>
+        <p:style>
+          <a:lnRef idx="2">
+            <a:schemeClr val="accent1">
+              <a:shade val="50000"/>
+            </a:schemeClr>
+          </a:lnRef>
+          <a:fillRef idx="1">
+            <a:schemeClr val="accent1"/>
+          </a:fillRef>
+          <a:effectRef idx="0">
+            <a:schemeClr val="accent1"/>
+          </a:effectRef>
+          <a:fontRef idx="minor">
+            <a:schemeClr val="lt1"/>
+          </a:fontRef>
+        </p:style>
+        <p:txBody>
+          <a:bodyPr rtlCol="0" anchor="ctr"/>
+          <a:lstStyle/>
+          <a:p>
+            <a:pPr algn="ctr"/>
+            <a:endParaRPr lang="en-US"/>
+          </a:p>
+        </p:txBody>
+      </p:sp>
+      <p:sp>
+        <p:nvSpPr>
+          <p:cNvPr id="13" name="Rectangle 12">
+            <a:extLst>
+              <a:ext uri="{FF2B5EF4-FFF2-40B4-BE49-F238E27FC236}">
+                <a16:creationId xmlns:a16="http://schemas.microsoft.com/office/drawing/2014/main" id="{354922DB-E2BC-FFA7-D69F-F4BCC9C21FA2}"/>
+              </a:ext>
+              <a:ext uri="{C183D7F6-B498-43B3-948B-1728B52AA6E4}">
+                <adec:decorative xmlns:adec="http://schemas.microsoft.com/office/drawing/2017/decorative" val="1"/>
+              </a:ext>
+            </a:extLst>
+          </p:cNvPr>
+          <p:cNvSpPr>
+            <a:spLocks noGrp="1" noRot="1" noChangeAspect="1" noMove="1" noResize="1" noEditPoints="1" noAdjustHandles="1" noChangeArrowheads="1" noChangeShapeType="1" noTextEdit="1"/>
+          </p:cNvSpPr>
+          <p:nvPr>
+            <p:extLst>
+              <p:ext uri="{386F3935-93C4-4BCD-93E2-E3B085C9AB24}">
+                <p16:designElem xmlns:p16="http://schemas.microsoft.com/office/powerpoint/2015/main" val="1"/>
+              </p:ext>
+            </p:extLst>
+          </p:nvPr>
+        </p:nvSpPr>
+        <p:spPr>
+          <a:xfrm rot="10800000" flipH="1">
+            <a:off x="8128857" y="0"/>
+            <a:ext cx="4063143" cy="1576412"/>
+          </a:xfrm>
+          <a:prstGeom prst="rect">
+            <a:avLst/>
+          </a:prstGeom>
+          <a:gradFill>
+            <a:gsLst>
+              <a:gs pos="19000">
+                <a:schemeClr val="accent1">
+                  <a:lumMod val="50000"/>
+                  <a:alpha val="68000"/>
+                </a:schemeClr>
+              </a:gs>
+              <a:gs pos="100000">
+                <a:schemeClr val="accent1">
+                  <a:alpha val="79000"/>
+                </a:schemeClr>
+              </a:gs>
+            </a:gsLst>
+            <a:lin ang="19200000" scaled="0"/>
+          </a:gradFill>
+          <a:ln>
+            <a:noFill/>
+          </a:ln>
+        </p:spPr>
+        <p:style>
+          <a:lnRef idx="2">
+            <a:schemeClr val="accent1">
+              <a:shade val="50000"/>
+            </a:schemeClr>
+          </a:lnRef>
+          <a:fillRef idx="1">
+            <a:schemeClr val="accent1"/>
+          </a:fillRef>
+          <a:effectRef idx="0">
+            <a:schemeClr val="accent1"/>
+          </a:effectRef>
+          <a:fontRef idx="minor">
+            <a:schemeClr val="lt1"/>
+          </a:fontRef>
+        </p:style>
+        <p:txBody>
+          <a:bodyPr rtlCol="0" anchor="ctr"/>
+          <a:lstStyle/>
+          <a:p>
+            <a:pPr algn="ctr"/>
+            <a:endParaRPr lang="en-US"/>
+          </a:p>
+        </p:txBody>
+      </p:sp>
+      <p:sp>
+        <p:nvSpPr>
+          <p:cNvPr id="15" name="Rectangle 14">
+            <a:extLst>
+              <a:ext uri="{FF2B5EF4-FFF2-40B4-BE49-F238E27FC236}">
+                <a16:creationId xmlns:a16="http://schemas.microsoft.com/office/drawing/2014/main" id="{E1B20118-9CCC-2AE4-FA00-A5BCC73DE072}"/>
+              </a:ext>
+              <a:ext uri="{C183D7F6-B498-43B3-948B-1728B52AA6E4}">
+                <adec:decorative xmlns:adec="http://schemas.microsoft.com/office/drawing/2017/decorative" val="1"/>
+              </a:ext>
+            </a:extLst>
+          </p:cNvPr>
+          <p:cNvSpPr>
+            <a:spLocks noGrp="1" noRot="1" noChangeAspect="1" noMove="1" noResize="1" noEditPoints="1" noAdjustHandles="1" noChangeArrowheads="1" noChangeShapeType="1" noTextEdit="1"/>
+          </p:cNvSpPr>
+          <p:nvPr>
+            <p:extLst>
+              <p:ext uri="{386F3935-93C4-4BCD-93E2-E3B085C9AB24}">
+                <p16:designElem xmlns:p16="http://schemas.microsoft.com/office/powerpoint/2015/main" val="1"/>
+              </p:ext>
+            </p:extLst>
+          </p:nvPr>
+        </p:nvSpPr>
+        <p:spPr>
+          <a:xfrm rot="5400000">
+            <a:off x="5307777" y="-5307778"/>
+            <a:ext cx="1576446" cy="12192002"/>
+          </a:xfrm>
+          <a:prstGeom prst="rect">
+            <a:avLst/>
+          </a:prstGeom>
+          <a:gradFill>
+            <a:gsLst>
+              <a:gs pos="23000">
+                <a:schemeClr val="accent1">
+                  <a:alpha val="0"/>
+                </a:schemeClr>
+              </a:gs>
+              <a:gs pos="99000">
+                <a:srgbClr val="000000">
+                  <a:alpha val="74000"/>
+                </a:srgbClr>
+              </a:gs>
+            </a:gsLst>
+            <a:lin ang="20400000" scaled="0"/>
+          </a:gradFill>
+          <a:ln>
+            <a:noFill/>
+          </a:ln>
+        </p:spPr>
+        <p:style>
+          <a:lnRef idx="2">
+            <a:schemeClr val="accent1">
+              <a:shade val="50000"/>
+            </a:schemeClr>
+          </a:lnRef>
+          <a:fillRef idx="1">
+            <a:schemeClr val="accent1"/>
+          </a:fillRef>
+          <a:effectRef idx="0">
+            <a:schemeClr val="accent1"/>
+          </a:effectRef>
+          <a:fontRef idx="minor">
+            <a:schemeClr val="lt1"/>
+          </a:fontRef>
+        </p:style>
+        <p:txBody>
+          <a:bodyPr rtlCol="0" anchor="ctr"/>
+          <a:lstStyle/>
+          <a:p>
+            <a:pPr algn="ctr"/>
+            <a:endParaRPr lang="en-US" dirty="0"/>
+          </a:p>
+        </p:txBody>
+      </p:sp>
+      <p:sp>
+        <p:nvSpPr>
+          <p:cNvPr id="6" name="Title 1">
+            <a:extLst>
+              <a:ext uri="{FF2B5EF4-FFF2-40B4-BE49-F238E27FC236}">
+                <a16:creationId xmlns:a16="http://schemas.microsoft.com/office/drawing/2014/main" id="{DD1D9AC5-0EC4-38D7-8E7D-41944460A213}"/>
+              </a:ext>
+            </a:extLst>
+          </p:cNvPr>
+          <p:cNvSpPr txBox="1">
+            <a:spLocks/>
+          </p:cNvSpPr>
+          <p:nvPr/>
         </p:nvSpPr>
         <p:spPr>
           <a:xfrm>
-            <a:off x="753451" y="249153"/>
-            <a:ext cx="10515600" cy="1325563"/>
-          </a:xfrm>
-        </p:spPr>
-        <p:txBody>
-          <a:bodyPr/>
-          <a:lstStyle/>
-          <a:p>
-            <a:r>
-              <a:rPr lang="en-GB" dirty="0"/>
-              <a:t>Questions?</a:t>
-            </a:r>
-          </a:p>
-        </p:txBody>
-      </p:sp>
-      <p:sp>
-        <p:nvSpPr>
-          <p:cNvPr id="6" name="Title 1">
-            <a:extLst>
-              <a:ext uri="{FF2B5EF4-FFF2-40B4-BE49-F238E27FC236}">
-                <a16:creationId xmlns:a16="http://schemas.microsoft.com/office/drawing/2014/main" id="{B2EDC919-4D0D-9CAF-829E-6BC52F9E82E6}"/>
-              </a:ext>
-            </a:extLst>
-          </p:cNvPr>
-          <p:cNvSpPr txBox="1">
-            <a:spLocks/>
-          </p:cNvSpPr>
-          <p:nvPr/>
-        </p:nvSpPr>
-        <p:spPr>
-          <a:xfrm>
-            <a:off x="753451" y="3429000"/>
-            <a:ext cx="10515600" cy="1325563"/>
+            <a:off x="386594" y="168226"/>
+            <a:ext cx="6270324" cy="1325563"/>
           </a:xfrm>
           <a:prstGeom prst="rect">
             <a:avLst/>
@@ -5893,8 +6252,2132 @@
           </a:lstStyle>
           <a:p>
             <a:r>
+              <a:rPr lang="en-GB" sz="4000" dirty="0">
+                <a:solidFill>
+                  <a:schemeClr val="bg1"/>
+                </a:solidFill>
+              </a:rPr>
+              <a:t>Aerodynamic measurements</a:t>
+            </a:r>
+          </a:p>
+        </p:txBody>
+      </p:sp>
+      <p:sp>
+        <p:nvSpPr>
+          <p:cNvPr id="7" name="Content Placeholder 2">
+            <a:extLst>
+              <a:ext uri="{FF2B5EF4-FFF2-40B4-BE49-F238E27FC236}">
+                <a16:creationId xmlns:a16="http://schemas.microsoft.com/office/drawing/2014/main" id="{9C7375A3-69B7-413F-69EC-A8BA51B8A28B}"/>
+              </a:ext>
+            </a:extLst>
+          </p:cNvPr>
+          <p:cNvSpPr>
+            <a:spLocks noGrp="1"/>
+          </p:cNvSpPr>
+          <p:nvPr>
+            <p:ph idx="1"/>
+          </p:nvPr>
+        </p:nvSpPr>
+        <p:spPr>
+          <a:xfrm>
+            <a:off x="569845" y="1756051"/>
+            <a:ext cx="5304181" cy="4629840"/>
+          </a:xfrm>
+        </p:spPr>
+        <p:txBody>
+          <a:bodyPr>
+            <a:normAutofit fontScale="92500" lnSpcReduction="10000"/>
+          </a:bodyPr>
+          <a:lstStyle/>
+          <a:p>
+            <a:pPr marL="0" indent="0">
+              <a:buNone/>
+            </a:pPr>
+            <a:r>
               <a:rPr lang="en-GB" dirty="0"/>
-              <a:t>References</a:t>
+              <a:t>Torque and thrust measured by strain gauge load cells</a:t>
+            </a:r>
+          </a:p>
+          <a:p>
+            <a:pPr marL="0" indent="0">
+              <a:buNone/>
+            </a:pPr>
+            <a:endParaRPr lang="en-GB" dirty="0"/>
+          </a:p>
+          <a:p>
+            <a:pPr marL="0" indent="0">
+              <a:buNone/>
+            </a:pPr>
+            <a:r>
+              <a:rPr lang="en-GB" dirty="0"/>
+              <a:t>Cantilever models selected for sensitivity</a:t>
+            </a:r>
+          </a:p>
+          <a:p>
+            <a:pPr marL="0" indent="0">
+              <a:buNone/>
+            </a:pPr>
+            <a:endParaRPr lang="en-GB" dirty="0"/>
+          </a:p>
+          <a:p>
+            <a:pPr marL="0" indent="0">
+              <a:buNone/>
+            </a:pPr>
+            <a:r>
+              <a:rPr lang="en-GB" dirty="0"/>
+              <a:t>Full bridge strain gauge for resistance to off-axis forces</a:t>
+            </a:r>
+          </a:p>
+          <a:p>
+            <a:pPr marL="0" indent="0">
+              <a:buNone/>
+            </a:pPr>
+            <a:endParaRPr lang="en-GB" dirty="0"/>
+          </a:p>
+          <a:p>
+            <a:pPr marL="0" indent="0">
+              <a:buNone/>
+            </a:pPr>
+            <a:r>
+              <a:rPr lang="en-GB" dirty="0"/>
+              <a:t>Orientation selected for accuracy, and ease of calibration</a:t>
+            </a:r>
+          </a:p>
+        </p:txBody>
+      </p:sp>
+      <p:pic>
+        <p:nvPicPr>
+          <p:cNvPr id="8" name="Picture 7">
+            <a:extLst>
+              <a:ext uri="{FF2B5EF4-FFF2-40B4-BE49-F238E27FC236}">
+                <a16:creationId xmlns:a16="http://schemas.microsoft.com/office/drawing/2014/main" id="{CF86DFC9-3FCE-4B2C-21D4-5096FA13A820}"/>
+              </a:ext>
+            </a:extLst>
+          </p:cNvPr>
+          <p:cNvPicPr>
+            <a:picLocks noChangeAspect="1"/>
+          </p:cNvPicPr>
+          <p:nvPr/>
+        </p:nvPicPr>
+        <p:blipFill>
+          <a:blip r:embed="rId3"/>
+          <a:stretch>
+            <a:fillRect/>
+          </a:stretch>
+        </p:blipFill>
+        <p:spPr>
+          <a:xfrm>
+            <a:off x="6656918" y="678959"/>
+            <a:ext cx="5535079" cy="5706932"/>
+          </a:xfrm>
+          <a:prstGeom prst="rect">
+            <a:avLst/>
+          </a:prstGeom>
+        </p:spPr>
+      </p:pic>
+    </p:spTree>
+    <p:extLst>
+      <p:ext uri="{BB962C8B-B14F-4D97-AF65-F5344CB8AC3E}">
+        <p14:creationId xmlns:p14="http://schemas.microsoft.com/office/powerpoint/2010/main" val="2773337856"/>
+      </p:ext>
+    </p:extLst>
+  </p:cSld>
+  <p:clrMapOvr>
+    <a:masterClrMapping/>
+  </p:clrMapOvr>
+</p:sld>
+</file>
+
+<file path=ppt/slides/slide11.xml><?xml version="1.0" encoding="utf-8"?>
+<p:sld xmlns:a="http://schemas.openxmlformats.org/drawingml/2006/main" xmlns:r="http://schemas.openxmlformats.org/officeDocument/2006/relationships" xmlns:p="http://schemas.openxmlformats.org/presentationml/2006/main">
+  <p:cSld>
+    <p:bg>
+      <p:bgPr>
+        <a:solidFill>
+          <a:schemeClr val="bg1"/>
+        </a:solidFill>
+        <a:effectLst/>
+      </p:bgPr>
+    </p:bg>
+    <p:spTree>
+      <p:nvGrpSpPr>
+        <p:cNvPr id="1" name=""/>
+        <p:cNvGrpSpPr/>
+        <p:nvPr/>
+      </p:nvGrpSpPr>
+      <p:grpSpPr>
+        <a:xfrm>
+          <a:off x="0" y="0"/>
+          <a:ext cx="0" cy="0"/>
+          <a:chOff x="0" y="0"/>
+          <a:chExt cx="0" cy="0"/>
+        </a:xfrm>
+      </p:grpSpPr>
+      <p:sp useBgFill="1">
+        <p:nvSpPr>
+          <p:cNvPr id="9" name="Rectangle 8">
+            <a:extLst>
+              <a:ext uri="{FF2B5EF4-FFF2-40B4-BE49-F238E27FC236}">
+                <a16:creationId xmlns:a16="http://schemas.microsoft.com/office/drawing/2014/main" id="{BACC6370-2D7E-4714-9D71-7542949D7D5D}"/>
+              </a:ext>
+              <a:ext uri="{C183D7F6-B498-43B3-948B-1728B52AA6E4}">
+                <adec:decorative xmlns:adec="http://schemas.microsoft.com/office/drawing/2017/decorative" val="1"/>
+              </a:ext>
+            </a:extLst>
+          </p:cNvPr>
+          <p:cNvSpPr>
+            <a:spLocks noGrp="1" noRot="1" noChangeAspect="1" noMove="1" noResize="1" noEditPoints="1" noAdjustHandles="1" noChangeArrowheads="1" noChangeShapeType="1" noTextEdit="1"/>
+          </p:cNvSpPr>
+          <p:nvPr>
+            <p:extLst>
+              <p:ext uri="{386F3935-93C4-4BCD-93E2-E3B085C9AB24}">
+                <p16:designElem xmlns:p16="http://schemas.microsoft.com/office/powerpoint/2015/main" val="1"/>
+              </p:ext>
+            </p:extLst>
+          </p:nvPr>
+        </p:nvSpPr>
+        <p:spPr>
+          <a:xfrm>
+            <a:off x="0" y="0"/>
+            <a:ext cx="12192000" cy="6858000"/>
+          </a:xfrm>
+          <a:prstGeom prst="rect">
+            <a:avLst/>
+          </a:prstGeom>
+          <a:ln w="12700" cap="flat" cmpd="sng" algn="ctr">
+            <a:noFill/>
+            <a:prstDash val="solid"/>
+            <a:miter lim="800000"/>
+          </a:ln>
+          <a:effectLst/>
+          <a:extLst>
+            <a:ext uri="{91240B29-F687-4F45-9708-019B960494DF}">
+              <a14:hiddenLine xmlns:a14="http://schemas.microsoft.com/office/drawing/2010/main" w="12700" cap="flat" cmpd="sng" algn="ctr">
+                <a:solidFill>
+                  <a:schemeClr val="accent1">
+                    <a:shade val="50000"/>
+                  </a:schemeClr>
+                </a:solidFill>
+                <a:prstDash val="solid"/>
+                <a:miter lim="800000"/>
+              </a14:hiddenLine>
+            </a:ext>
+          </a:extLst>
+        </p:spPr>
+        <p:style>
+          <a:lnRef idx="2">
+            <a:schemeClr val="accent1">
+              <a:shade val="50000"/>
+            </a:schemeClr>
+          </a:lnRef>
+          <a:fillRef idx="1">
+            <a:schemeClr val="accent1"/>
+          </a:fillRef>
+          <a:effectRef idx="0">
+            <a:schemeClr val="accent1"/>
+          </a:effectRef>
+          <a:fontRef idx="minor">
+            <a:schemeClr val="lt1"/>
+          </a:fontRef>
+        </p:style>
+        <p:txBody>
+          <a:bodyPr rtlCol="0" anchor="ctr"/>
+          <a:lstStyle/>
+          <a:p>
+            <a:pPr algn="ctr"/>
+            <a:endParaRPr lang="en-US"/>
+          </a:p>
+        </p:txBody>
+      </p:sp>
+      <p:sp>
+        <p:nvSpPr>
+          <p:cNvPr id="11" name="Rectangle 10">
+            <a:extLst>
+              <a:ext uri="{FF2B5EF4-FFF2-40B4-BE49-F238E27FC236}">
+                <a16:creationId xmlns:a16="http://schemas.microsoft.com/office/drawing/2014/main" id="{F68B3F68-107C-434F-AA38-110D5EA91B85}"/>
+              </a:ext>
+              <a:ext uri="{C183D7F6-B498-43B3-948B-1728B52AA6E4}">
+                <adec:decorative xmlns:adec="http://schemas.microsoft.com/office/drawing/2017/decorative" val="1"/>
+              </a:ext>
+            </a:extLst>
+          </p:cNvPr>
+          <p:cNvSpPr>
+            <a:spLocks noGrp="1" noRot="1" noChangeAspect="1" noMove="1" noResize="1" noEditPoints="1" noAdjustHandles="1" noChangeArrowheads="1" noChangeShapeType="1" noTextEdit="1"/>
+          </p:cNvSpPr>
+          <p:nvPr>
+            <p:extLst>
+              <p:ext uri="{386F3935-93C4-4BCD-93E2-E3B085C9AB24}">
+                <p16:designElem xmlns:p16="http://schemas.microsoft.com/office/powerpoint/2015/main" val="1"/>
+              </p:ext>
+            </p:extLst>
+          </p:nvPr>
+        </p:nvSpPr>
+        <p:spPr>
+          <a:xfrm flipH="1">
+            <a:off x="2" y="0"/>
+            <a:ext cx="12191998" cy="1575955"/>
+          </a:xfrm>
+          <a:prstGeom prst="rect">
+            <a:avLst/>
+          </a:prstGeom>
+          <a:gradFill>
+            <a:gsLst>
+              <a:gs pos="0">
+                <a:srgbClr val="000000">
+                  <a:alpha val="96000"/>
+                </a:srgbClr>
+              </a:gs>
+              <a:gs pos="100000">
+                <a:schemeClr val="accent1">
+                  <a:lumMod val="75000"/>
+                </a:schemeClr>
+              </a:gs>
+            </a:gsLst>
+            <a:lin ang="8400000" scaled="0"/>
+          </a:gradFill>
+          <a:ln>
+            <a:noFill/>
+          </a:ln>
+        </p:spPr>
+        <p:style>
+          <a:lnRef idx="2">
+            <a:schemeClr val="accent1">
+              <a:shade val="50000"/>
+            </a:schemeClr>
+          </a:lnRef>
+          <a:fillRef idx="1">
+            <a:schemeClr val="accent1"/>
+          </a:fillRef>
+          <a:effectRef idx="0">
+            <a:schemeClr val="accent1"/>
+          </a:effectRef>
+          <a:fontRef idx="minor">
+            <a:schemeClr val="lt1"/>
+          </a:fontRef>
+        </p:style>
+        <p:txBody>
+          <a:bodyPr rtlCol="0" anchor="ctr"/>
+          <a:lstStyle/>
+          <a:p>
+            <a:pPr algn="ctr"/>
+            <a:endParaRPr lang="en-US"/>
+          </a:p>
+        </p:txBody>
+      </p:sp>
+      <p:sp>
+        <p:nvSpPr>
+          <p:cNvPr id="13" name="Rectangle 12">
+            <a:extLst>
+              <a:ext uri="{FF2B5EF4-FFF2-40B4-BE49-F238E27FC236}">
+                <a16:creationId xmlns:a16="http://schemas.microsoft.com/office/drawing/2014/main" id="{AAD0DBB9-1A4B-4391-81D4-CB19F9AB918A}"/>
+              </a:ext>
+              <a:ext uri="{C183D7F6-B498-43B3-948B-1728B52AA6E4}">
+                <adec:decorative xmlns:adec="http://schemas.microsoft.com/office/drawing/2017/decorative" val="1"/>
+              </a:ext>
+            </a:extLst>
+          </p:cNvPr>
+          <p:cNvSpPr>
+            <a:spLocks noGrp="1" noRot="1" noChangeAspect="1" noMove="1" noResize="1" noEditPoints="1" noAdjustHandles="1" noChangeArrowheads="1" noChangeShapeType="1" noTextEdit="1"/>
+          </p:cNvSpPr>
+          <p:nvPr>
+            <p:extLst>
+              <p:ext uri="{386F3935-93C4-4BCD-93E2-E3B085C9AB24}">
+                <p16:designElem xmlns:p16="http://schemas.microsoft.com/office/powerpoint/2015/main" val="1"/>
+              </p:ext>
+            </p:extLst>
+          </p:nvPr>
+        </p:nvSpPr>
+        <p:spPr>
+          <a:xfrm rot="10800000" flipH="1">
+            <a:off x="8128857" y="0"/>
+            <a:ext cx="4063143" cy="1576412"/>
+          </a:xfrm>
+          <a:prstGeom prst="rect">
+            <a:avLst/>
+          </a:prstGeom>
+          <a:gradFill>
+            <a:gsLst>
+              <a:gs pos="19000">
+                <a:schemeClr val="accent1">
+                  <a:lumMod val="50000"/>
+                  <a:alpha val="68000"/>
+                </a:schemeClr>
+              </a:gs>
+              <a:gs pos="100000">
+                <a:schemeClr val="accent1">
+                  <a:alpha val="79000"/>
+                </a:schemeClr>
+              </a:gs>
+            </a:gsLst>
+            <a:lin ang="19200000" scaled="0"/>
+          </a:gradFill>
+          <a:ln>
+            <a:noFill/>
+          </a:ln>
+        </p:spPr>
+        <p:style>
+          <a:lnRef idx="2">
+            <a:schemeClr val="accent1">
+              <a:shade val="50000"/>
+            </a:schemeClr>
+          </a:lnRef>
+          <a:fillRef idx="1">
+            <a:schemeClr val="accent1"/>
+          </a:fillRef>
+          <a:effectRef idx="0">
+            <a:schemeClr val="accent1"/>
+          </a:effectRef>
+          <a:fontRef idx="minor">
+            <a:schemeClr val="lt1"/>
+          </a:fontRef>
+        </p:style>
+        <p:txBody>
+          <a:bodyPr rtlCol="0" anchor="ctr"/>
+          <a:lstStyle/>
+          <a:p>
+            <a:pPr algn="ctr"/>
+            <a:endParaRPr lang="en-US"/>
+          </a:p>
+        </p:txBody>
+      </p:sp>
+      <p:sp>
+        <p:nvSpPr>
+          <p:cNvPr id="15" name="Rectangle 14">
+            <a:extLst>
+              <a:ext uri="{FF2B5EF4-FFF2-40B4-BE49-F238E27FC236}">
+                <a16:creationId xmlns:a16="http://schemas.microsoft.com/office/drawing/2014/main" id="{063BBA22-50EA-4C4D-BE05-F1CE4E63AA56}"/>
+              </a:ext>
+              <a:ext uri="{C183D7F6-B498-43B3-948B-1728B52AA6E4}">
+                <adec:decorative xmlns:adec="http://schemas.microsoft.com/office/drawing/2017/decorative" val="1"/>
+              </a:ext>
+            </a:extLst>
+          </p:cNvPr>
+          <p:cNvSpPr>
+            <a:spLocks noGrp="1" noRot="1" noChangeAspect="1" noMove="1" noResize="1" noEditPoints="1" noAdjustHandles="1" noChangeArrowheads="1" noChangeShapeType="1" noTextEdit="1"/>
+          </p:cNvSpPr>
+          <p:nvPr>
+            <p:extLst>
+              <p:ext uri="{386F3935-93C4-4BCD-93E2-E3B085C9AB24}">
+                <p16:designElem xmlns:p16="http://schemas.microsoft.com/office/powerpoint/2015/main" val="1"/>
+              </p:ext>
+            </p:extLst>
+          </p:nvPr>
+        </p:nvSpPr>
+        <p:spPr>
+          <a:xfrm rot="5400000">
+            <a:off x="5307777" y="-5307778"/>
+            <a:ext cx="1576446" cy="12192002"/>
+          </a:xfrm>
+          <a:prstGeom prst="rect">
+            <a:avLst/>
+          </a:prstGeom>
+          <a:gradFill>
+            <a:gsLst>
+              <a:gs pos="23000">
+                <a:schemeClr val="accent1">
+                  <a:alpha val="0"/>
+                </a:schemeClr>
+              </a:gs>
+              <a:gs pos="99000">
+                <a:srgbClr val="000000">
+                  <a:alpha val="74000"/>
+                </a:srgbClr>
+              </a:gs>
+            </a:gsLst>
+            <a:lin ang="20400000" scaled="0"/>
+          </a:gradFill>
+          <a:ln>
+            <a:noFill/>
+          </a:ln>
+        </p:spPr>
+        <p:style>
+          <a:lnRef idx="2">
+            <a:schemeClr val="accent1">
+              <a:shade val="50000"/>
+            </a:schemeClr>
+          </a:lnRef>
+          <a:fillRef idx="1">
+            <a:schemeClr val="accent1"/>
+          </a:fillRef>
+          <a:effectRef idx="0">
+            <a:schemeClr val="accent1"/>
+          </a:effectRef>
+          <a:fontRef idx="minor">
+            <a:schemeClr val="lt1"/>
+          </a:fontRef>
+        </p:style>
+        <p:txBody>
+          <a:bodyPr rtlCol="0" anchor="ctr"/>
+          <a:lstStyle/>
+          <a:p>
+            <a:pPr algn="ctr"/>
+            <a:endParaRPr lang="en-US" dirty="0"/>
+          </a:p>
+        </p:txBody>
+      </p:sp>
+      <p:sp>
+        <p:nvSpPr>
+          <p:cNvPr id="2" name="Title 1">
+            <a:extLst>
+              <a:ext uri="{FF2B5EF4-FFF2-40B4-BE49-F238E27FC236}">
+                <a16:creationId xmlns:a16="http://schemas.microsoft.com/office/drawing/2014/main" id="{31AA5FBC-085C-6F67-FFE6-B768D4CC0250}"/>
+              </a:ext>
+            </a:extLst>
+          </p:cNvPr>
+          <p:cNvSpPr>
+            <a:spLocks noGrp="1"/>
+          </p:cNvSpPr>
+          <p:nvPr>
+            <p:ph type="title"/>
+          </p:nvPr>
+        </p:nvSpPr>
+        <p:spPr>
+          <a:xfrm>
+            <a:off x="1371597" y="348865"/>
+            <a:ext cx="10044023" cy="877729"/>
+          </a:xfrm>
+        </p:spPr>
+        <p:txBody>
+          <a:bodyPr vert="horz" lIns="91440" tIns="45720" rIns="91440" bIns="45720" rtlCol="0" anchor="ctr">
+            <a:normAutofit/>
+          </a:bodyPr>
+          <a:lstStyle/>
+          <a:p>
+            <a:r>
+              <a:rPr lang="en-US" sz="4000" kern="1200">
+                <a:solidFill>
+                  <a:srgbClr val="FFFFFF"/>
+                </a:solidFill>
+                <a:latin typeface="+mj-lt"/>
+                <a:ea typeface="+mj-ea"/>
+                <a:cs typeface="+mj-cs"/>
+              </a:rPr>
+              <a:t>Acoustic measurements</a:t>
+            </a:r>
+          </a:p>
+        </p:txBody>
+      </p:sp>
+      <p:sp>
+        <p:nvSpPr>
+          <p:cNvPr id="4" name="TextBox 3">
+            <a:extLst>
+              <a:ext uri="{FF2B5EF4-FFF2-40B4-BE49-F238E27FC236}">
+                <a16:creationId xmlns:a16="http://schemas.microsoft.com/office/drawing/2014/main" id="{71E7441A-FA9D-6416-2F48-B1CF5C5E3D5A}"/>
+              </a:ext>
+            </a:extLst>
+          </p:cNvPr>
+          <p:cNvSpPr txBox="1"/>
+          <p:nvPr/>
+        </p:nvSpPr>
+        <p:spPr>
+          <a:xfrm>
+            <a:off x="720762" y="1995544"/>
+            <a:ext cx="4232238" cy="2677656"/>
+          </a:xfrm>
+          <a:prstGeom prst="rect">
+            <a:avLst/>
+          </a:prstGeom>
+          <a:noFill/>
+        </p:spPr>
+        <p:txBody>
+          <a:bodyPr wrap="square" rtlCol="0">
+            <a:spAutoFit/>
+          </a:bodyPr>
+          <a:lstStyle/>
+          <a:p>
+            <a:r>
+              <a:rPr lang="en-GB" sz="2400" dirty="0"/>
+              <a:t>Separate acoustic setup</a:t>
+            </a:r>
+          </a:p>
+          <a:p>
+            <a:endParaRPr lang="en-GB" sz="2400" dirty="0"/>
+          </a:p>
+          <a:p>
+            <a:r>
+              <a:rPr lang="en-GB" sz="2400" dirty="0"/>
+              <a:t>Acoustically insulate motor</a:t>
+            </a:r>
+          </a:p>
+          <a:p>
+            <a:endParaRPr lang="en-GB" sz="2400" dirty="0"/>
+          </a:p>
+          <a:p>
+            <a:r>
+              <a:rPr lang="en-GB" sz="2400" dirty="0"/>
+              <a:t>Calibrated microphone will be moved around the propeller to measure directivity</a:t>
+            </a:r>
+          </a:p>
+        </p:txBody>
+      </p:sp>
+      <p:sp>
+        <p:nvSpPr>
+          <p:cNvPr id="8" name="Rectangle 7">
+            <a:extLst>
+              <a:ext uri="{FF2B5EF4-FFF2-40B4-BE49-F238E27FC236}">
+                <a16:creationId xmlns:a16="http://schemas.microsoft.com/office/drawing/2014/main" id="{E52FB14C-2BFA-7005-0BDD-85C20A79B2FF}"/>
+              </a:ext>
+            </a:extLst>
+          </p:cNvPr>
+          <p:cNvSpPr/>
+          <p:nvPr/>
+        </p:nvSpPr>
+        <p:spPr>
+          <a:xfrm>
+            <a:off x="9594509" y="3675442"/>
+            <a:ext cx="709217" cy="767204"/>
+          </a:xfrm>
+          <a:prstGeom prst="rect">
+            <a:avLst/>
+          </a:prstGeom>
+        </p:spPr>
+        <p:style>
+          <a:lnRef idx="2">
+            <a:schemeClr val="accent1">
+              <a:shade val="15000"/>
+            </a:schemeClr>
+          </a:lnRef>
+          <a:fillRef idx="1">
+            <a:schemeClr val="accent1"/>
+          </a:fillRef>
+          <a:effectRef idx="0">
+            <a:schemeClr val="accent1"/>
+          </a:effectRef>
+          <a:fontRef idx="minor">
+            <a:schemeClr val="lt1"/>
+          </a:fontRef>
+        </p:style>
+        <p:txBody>
+          <a:bodyPr rtlCol="0" anchor="ctr"/>
+          <a:lstStyle/>
+          <a:p>
+            <a:pPr algn="ctr"/>
+            <a:endParaRPr lang="en-GB"/>
+          </a:p>
+        </p:txBody>
+      </p:sp>
+      <p:sp>
+        <p:nvSpPr>
+          <p:cNvPr id="18" name="Rectangle 17">
+            <a:extLst>
+              <a:ext uri="{FF2B5EF4-FFF2-40B4-BE49-F238E27FC236}">
+                <a16:creationId xmlns:a16="http://schemas.microsoft.com/office/drawing/2014/main" id="{84344AF3-D23C-4669-0B36-A3267FB2322E}"/>
+              </a:ext>
+            </a:extLst>
+          </p:cNvPr>
+          <p:cNvSpPr/>
+          <p:nvPr/>
+        </p:nvSpPr>
+        <p:spPr>
+          <a:xfrm>
+            <a:off x="6228678" y="1922470"/>
+            <a:ext cx="5783416" cy="4108110"/>
+          </a:xfrm>
+          <a:prstGeom prst="rect">
+            <a:avLst/>
+          </a:prstGeom>
+          <a:solidFill>
+            <a:schemeClr val="bg1">
+              <a:lumMod val="85000"/>
+            </a:schemeClr>
+          </a:solidFill>
+        </p:spPr>
+        <p:style>
+          <a:lnRef idx="2">
+            <a:schemeClr val="accent1">
+              <a:shade val="15000"/>
+            </a:schemeClr>
+          </a:lnRef>
+          <a:fillRef idx="1">
+            <a:schemeClr val="accent1"/>
+          </a:fillRef>
+          <a:effectRef idx="0">
+            <a:schemeClr val="accent1"/>
+          </a:effectRef>
+          <a:fontRef idx="minor">
+            <a:schemeClr val="lt1"/>
+          </a:fontRef>
+        </p:style>
+        <p:txBody>
+          <a:bodyPr rtlCol="0" anchor="ctr"/>
+          <a:lstStyle/>
+          <a:p>
+            <a:pPr algn="ctr"/>
+            <a:endParaRPr lang="en-GB" dirty="0"/>
+          </a:p>
+        </p:txBody>
+      </p:sp>
+      <p:sp>
+        <p:nvSpPr>
+          <p:cNvPr id="19" name="Arc 18">
+            <a:extLst>
+              <a:ext uri="{FF2B5EF4-FFF2-40B4-BE49-F238E27FC236}">
+                <a16:creationId xmlns:a16="http://schemas.microsoft.com/office/drawing/2014/main" id="{9F98A153-4E1B-3B61-09E8-2EFDCFAEBD9D}"/>
+              </a:ext>
+            </a:extLst>
+          </p:cNvPr>
+          <p:cNvSpPr/>
+          <p:nvPr/>
+        </p:nvSpPr>
+        <p:spPr>
+          <a:xfrm>
+            <a:off x="7069498" y="2335065"/>
+            <a:ext cx="4011210" cy="3447957"/>
+          </a:xfrm>
+          <a:prstGeom prst="arc">
+            <a:avLst>
+              <a:gd name="adj1" fmla="val 13538050"/>
+              <a:gd name="adj2" fmla="val 21502376"/>
+            </a:avLst>
+          </a:prstGeom>
+        </p:spPr>
+        <p:style>
+          <a:lnRef idx="2">
+            <a:schemeClr val="accent1"/>
+          </a:lnRef>
+          <a:fillRef idx="0">
+            <a:schemeClr val="accent1"/>
+          </a:fillRef>
+          <a:effectRef idx="1">
+            <a:schemeClr val="accent1"/>
+          </a:effectRef>
+          <a:fontRef idx="minor">
+            <a:schemeClr val="tx1"/>
+          </a:fontRef>
+        </p:style>
+        <p:txBody>
+          <a:bodyPr rtlCol="0" anchor="ctr"/>
+          <a:lstStyle/>
+          <a:p>
+            <a:pPr algn="ctr"/>
+            <a:endParaRPr lang="en-GB"/>
+          </a:p>
+        </p:txBody>
+      </p:sp>
+      <p:pic>
+        <p:nvPicPr>
+          <p:cNvPr id="21" name="Picture 20" descr="A black microphone icon&#10;&#10;Description automatically generated">
+            <a:extLst>
+              <a:ext uri="{FF2B5EF4-FFF2-40B4-BE49-F238E27FC236}">
+                <a16:creationId xmlns:a16="http://schemas.microsoft.com/office/drawing/2014/main" id="{C73239C3-3601-685D-F630-2EDB042840A4}"/>
+              </a:ext>
+            </a:extLst>
+          </p:cNvPr>
+          <p:cNvPicPr>
+            <a:picLocks noChangeAspect="1"/>
+          </p:cNvPicPr>
+          <p:nvPr/>
+        </p:nvPicPr>
+        <p:blipFill>
+          <a:blip r:embed="rId3">
+            <a:extLst>
+              <a:ext uri="{BEBA8EAE-BF5A-486C-A8C5-ECC9F3942E4B}">
+                <a14:imgProps xmlns:a14="http://schemas.microsoft.com/office/drawing/2010/main">
+                  <a14:imgLayer r:embed="rId4">
+                    <a14:imgEffect>
+                      <a14:backgroundRemoval t="10000" b="90000" l="10000" r="90000">
+                        <a14:foregroundMark x1="49455" y1="72131" x2="49455" y2="72131"/>
+                      </a14:backgroundRemoval>
+                    </a14:imgEffect>
+                  </a14:imgLayer>
+                </a14:imgProps>
+              </a:ext>
+              <a:ext uri="{28A0092B-C50C-407E-A947-70E740481C1C}">
+                <a14:useLocalDpi xmlns:a14="http://schemas.microsoft.com/office/drawing/2010/main" val="0"/>
+              </a:ext>
+            </a:extLst>
+          </a:blip>
+          <a:stretch>
+            <a:fillRect/>
+          </a:stretch>
+        </p:blipFill>
+        <p:spPr>
+          <a:xfrm>
+            <a:off x="8618284" y="2025228"/>
+            <a:ext cx="951418" cy="633125"/>
+          </a:xfrm>
+          <a:prstGeom prst="rect">
+            <a:avLst/>
+          </a:prstGeom>
+        </p:spPr>
+      </p:pic>
+      <p:sp>
+        <p:nvSpPr>
+          <p:cNvPr id="24" name="Oval 23">
+            <a:extLst>
+              <a:ext uri="{FF2B5EF4-FFF2-40B4-BE49-F238E27FC236}">
+                <a16:creationId xmlns:a16="http://schemas.microsoft.com/office/drawing/2014/main" id="{54DDB280-4E08-210E-6E34-3C9D1C7D13DC}"/>
+              </a:ext>
+            </a:extLst>
+          </p:cNvPr>
+          <p:cNvSpPr/>
+          <p:nvPr/>
+        </p:nvSpPr>
+        <p:spPr>
+          <a:xfrm>
+            <a:off x="10985458" y="3895725"/>
+            <a:ext cx="190500" cy="180975"/>
+          </a:xfrm>
+          <a:prstGeom prst="ellipse">
+            <a:avLst/>
+          </a:prstGeom>
+          <a:solidFill>
+            <a:schemeClr val="tx1"/>
+          </a:solidFill>
+        </p:spPr>
+        <p:style>
+          <a:lnRef idx="2">
+            <a:schemeClr val="accent1">
+              <a:shade val="15000"/>
+            </a:schemeClr>
+          </a:lnRef>
+          <a:fillRef idx="1">
+            <a:schemeClr val="accent1"/>
+          </a:fillRef>
+          <a:effectRef idx="0">
+            <a:schemeClr val="accent1"/>
+          </a:effectRef>
+          <a:fontRef idx="minor">
+            <a:schemeClr val="lt1"/>
+          </a:fontRef>
+        </p:style>
+        <p:txBody>
+          <a:bodyPr rtlCol="0" anchor="ctr"/>
+          <a:lstStyle/>
+          <a:p>
+            <a:pPr algn="ctr"/>
+            <a:endParaRPr lang="en-GB"/>
+          </a:p>
+        </p:txBody>
+      </p:sp>
+      <p:sp>
+        <p:nvSpPr>
+          <p:cNvPr id="26" name="Oval 25">
+            <a:extLst>
+              <a:ext uri="{FF2B5EF4-FFF2-40B4-BE49-F238E27FC236}">
+                <a16:creationId xmlns:a16="http://schemas.microsoft.com/office/drawing/2014/main" id="{4852010F-A772-F928-6525-37478CBBEC97}"/>
+              </a:ext>
+            </a:extLst>
+          </p:cNvPr>
+          <p:cNvSpPr/>
+          <p:nvPr/>
+        </p:nvSpPr>
+        <p:spPr>
+          <a:xfrm>
+            <a:off x="10701592" y="3120976"/>
+            <a:ext cx="190500" cy="180975"/>
+          </a:xfrm>
+          <a:prstGeom prst="ellipse">
+            <a:avLst/>
+          </a:prstGeom>
+          <a:solidFill>
+            <a:schemeClr val="tx1"/>
+          </a:solidFill>
+        </p:spPr>
+        <p:style>
+          <a:lnRef idx="2">
+            <a:schemeClr val="accent1">
+              <a:shade val="15000"/>
+            </a:schemeClr>
+          </a:lnRef>
+          <a:fillRef idx="1">
+            <a:schemeClr val="accent1"/>
+          </a:fillRef>
+          <a:effectRef idx="0">
+            <a:schemeClr val="accent1"/>
+          </a:effectRef>
+          <a:fontRef idx="minor">
+            <a:schemeClr val="lt1"/>
+          </a:fontRef>
+        </p:style>
+        <p:txBody>
+          <a:bodyPr rtlCol="0" anchor="ctr"/>
+          <a:lstStyle/>
+          <a:p>
+            <a:pPr algn="ctr"/>
+            <a:endParaRPr lang="en-GB"/>
+          </a:p>
+        </p:txBody>
+      </p:sp>
+      <p:sp>
+        <p:nvSpPr>
+          <p:cNvPr id="28" name="Rectangle 27">
+            <a:extLst>
+              <a:ext uri="{FF2B5EF4-FFF2-40B4-BE49-F238E27FC236}">
+                <a16:creationId xmlns:a16="http://schemas.microsoft.com/office/drawing/2014/main" id="{EC8BD5B0-08F1-1842-7A50-692C1966A461}"/>
+              </a:ext>
+            </a:extLst>
+          </p:cNvPr>
+          <p:cNvSpPr/>
+          <p:nvPr/>
+        </p:nvSpPr>
+        <p:spPr>
+          <a:xfrm>
+            <a:off x="8448508" y="4548280"/>
+            <a:ext cx="1272402" cy="1234742"/>
+          </a:xfrm>
+          <a:prstGeom prst="rect">
+            <a:avLst/>
+          </a:prstGeom>
+          <a:solidFill>
+            <a:schemeClr val="bg1">
+              <a:lumMod val="65000"/>
+            </a:schemeClr>
+          </a:solidFill>
+        </p:spPr>
+        <p:style>
+          <a:lnRef idx="2">
+            <a:schemeClr val="accent1">
+              <a:shade val="15000"/>
+            </a:schemeClr>
+          </a:lnRef>
+          <a:fillRef idx="1">
+            <a:schemeClr val="accent1"/>
+          </a:fillRef>
+          <a:effectRef idx="0">
+            <a:schemeClr val="accent1"/>
+          </a:effectRef>
+          <a:fontRef idx="minor">
+            <a:schemeClr val="lt1"/>
+          </a:fontRef>
+        </p:style>
+        <p:txBody>
+          <a:bodyPr rtlCol="0" anchor="ctr"/>
+          <a:lstStyle/>
+          <a:p>
+            <a:pPr algn="ctr"/>
+            <a:endParaRPr lang="en-GB"/>
+          </a:p>
+        </p:txBody>
+      </p:sp>
+      <p:pic>
+        <p:nvPicPr>
+          <p:cNvPr id="23" name="Picture 22" descr="A black and white image of a couple of cotton swabs&#10;&#10;Description automatically generated">
+            <a:extLst>
+              <a:ext uri="{FF2B5EF4-FFF2-40B4-BE49-F238E27FC236}">
+                <a16:creationId xmlns:a16="http://schemas.microsoft.com/office/drawing/2014/main" id="{5854F576-6B54-6249-5A72-58815CEA4B7B}"/>
+              </a:ext>
+            </a:extLst>
+          </p:cNvPr>
+          <p:cNvPicPr>
+            <a:picLocks noChangeAspect="1"/>
+          </p:cNvPicPr>
+          <p:nvPr/>
+        </p:nvPicPr>
+        <p:blipFill>
+          <a:blip r:embed="rId5">
+            <a:extLst>
+              <a:ext uri="{BEBA8EAE-BF5A-486C-A8C5-ECC9F3942E4B}">
+                <a14:imgProps xmlns:a14="http://schemas.microsoft.com/office/drawing/2010/main">
+                  <a14:imgLayer r:embed="rId6">
+                    <a14:imgEffect>
+                      <a14:backgroundRemoval t="10000" b="90000" l="10000" r="90000"/>
+                    </a14:imgEffect>
+                    <a14:imgEffect>
+                      <a14:artisticPhotocopy/>
+                    </a14:imgEffect>
+                  </a14:imgLayer>
+                </a14:imgProps>
+              </a:ext>
+              <a:ext uri="{28A0092B-C50C-407E-A947-70E740481C1C}">
+                <a14:useLocalDpi xmlns:a14="http://schemas.microsoft.com/office/drawing/2010/main" val="0"/>
+              </a:ext>
+            </a:extLst>
+          </a:blip>
+          <a:stretch>
+            <a:fillRect/>
+          </a:stretch>
+        </p:blipFill>
+        <p:spPr>
+          <a:xfrm rot="5400000" flipH="1">
+            <a:off x="7806329" y="3530363"/>
+            <a:ext cx="2575328" cy="1852612"/>
+          </a:xfrm>
+          <a:prstGeom prst="rect">
+            <a:avLst/>
+          </a:prstGeom>
+        </p:spPr>
+      </p:pic>
+      <p:sp>
+        <p:nvSpPr>
+          <p:cNvPr id="29" name="TextBox 28">
+            <a:extLst>
+              <a:ext uri="{FF2B5EF4-FFF2-40B4-BE49-F238E27FC236}">
+                <a16:creationId xmlns:a16="http://schemas.microsoft.com/office/drawing/2014/main" id="{19FEAD75-7FE1-CC7B-9CF4-65F7AA58726E}"/>
+              </a:ext>
+            </a:extLst>
+          </p:cNvPr>
+          <p:cNvSpPr txBox="1"/>
+          <p:nvPr/>
+        </p:nvSpPr>
+        <p:spPr>
+          <a:xfrm>
+            <a:off x="8732202" y="4894330"/>
+            <a:ext cx="685800" cy="649188"/>
+          </a:xfrm>
+          <a:prstGeom prst="ellipse">
+            <a:avLst/>
+          </a:prstGeom>
+          <a:noFill/>
+          <a:ln w="28575">
+            <a:solidFill>
+              <a:schemeClr val="tx1"/>
+            </a:solidFill>
+          </a:ln>
+        </p:spPr>
+        <p:txBody>
+          <a:bodyPr wrap="square" rtlCol="0">
+            <a:spAutoFit/>
+          </a:bodyPr>
+          <a:lstStyle/>
+          <a:p>
+            <a:pPr algn="ctr"/>
+            <a:r>
+              <a:rPr lang="en-GB" sz="2400" b="1" dirty="0"/>
+              <a:t>M</a:t>
+            </a:r>
+          </a:p>
+        </p:txBody>
+      </p:sp>
+      <p:cxnSp>
+        <p:nvCxnSpPr>
+          <p:cNvPr id="31" name="Straight Arrow Connector 30">
+            <a:extLst>
+              <a:ext uri="{FF2B5EF4-FFF2-40B4-BE49-F238E27FC236}">
+                <a16:creationId xmlns:a16="http://schemas.microsoft.com/office/drawing/2014/main" id="{F107FF39-D1F0-23CF-044C-4C53A559F114}"/>
+              </a:ext>
+            </a:extLst>
+          </p:cNvPr>
+          <p:cNvCxnSpPr/>
+          <p:nvPr/>
+        </p:nvCxnSpPr>
+        <p:spPr>
+          <a:xfrm flipH="1" flipV="1">
+            <a:off x="7839075" y="2758760"/>
+            <a:ext cx="1262063" cy="1246503"/>
+          </a:xfrm>
+          <a:prstGeom prst="straightConnector1">
+            <a:avLst/>
+          </a:prstGeom>
+          <a:ln>
+            <a:tailEnd type="triangle"/>
+          </a:ln>
+        </p:spPr>
+        <p:style>
+          <a:lnRef idx="2">
+            <a:schemeClr val="accent1"/>
+          </a:lnRef>
+          <a:fillRef idx="0">
+            <a:schemeClr val="accent1"/>
+          </a:fillRef>
+          <a:effectRef idx="1">
+            <a:schemeClr val="accent1"/>
+          </a:effectRef>
+          <a:fontRef idx="minor">
+            <a:schemeClr val="tx1"/>
+          </a:fontRef>
+        </p:style>
+      </p:cxnSp>
+      <mc:AlternateContent xmlns:mc="http://schemas.openxmlformats.org/markup-compatibility/2006">
+        <mc:Choice xmlns:a14="http://schemas.microsoft.com/office/drawing/2010/main" Requires="a14">
+          <p:sp>
+            <p:nvSpPr>
+              <p:cNvPr id="32" name="TextBox 31">
+                <a:extLst>
+                  <a:ext uri="{FF2B5EF4-FFF2-40B4-BE49-F238E27FC236}">
+                    <a16:creationId xmlns:a16="http://schemas.microsoft.com/office/drawing/2014/main" id="{C6EF783B-71C1-27F3-18B8-0DC29B794C42}"/>
+                  </a:ext>
+                </a:extLst>
+              </p:cNvPr>
+              <p:cNvSpPr txBox="1"/>
+              <p:nvPr/>
+            </p:nvSpPr>
+            <p:spPr>
+              <a:xfrm>
+                <a:off x="7979071" y="3182455"/>
+                <a:ext cx="565553" cy="369332"/>
+              </a:xfrm>
+              <a:prstGeom prst="rect">
+                <a:avLst/>
+              </a:prstGeom>
+              <a:noFill/>
+            </p:spPr>
+            <p:txBody>
+              <a:bodyPr wrap="square" rtlCol="0">
+                <a:spAutoFit/>
+              </a:bodyPr>
+              <a:lstStyle/>
+              <a:p>
+                <a14:m>
+                  <m:oMathPara xmlns:m="http://schemas.openxmlformats.org/officeDocument/2006/math">
+                    <m:oMathParaPr>
+                      <m:jc m:val="centerGroup"/>
+                    </m:oMathParaPr>
+                    <m:oMath xmlns:m="http://schemas.openxmlformats.org/officeDocument/2006/math">
+                      <m:r>
+                        <a:rPr lang="en-GB" b="0" i="1" smtClean="0">
+                          <a:latin typeface="Cambria Math" panose="02040503050406030204" pitchFamily="18" charset="0"/>
+                        </a:rPr>
+                        <m:t>𝑅</m:t>
+                      </m:r>
+                    </m:oMath>
+                  </m:oMathPara>
+                </a14:m>
+                <a:endParaRPr lang="en-GB" dirty="0"/>
+              </a:p>
+            </p:txBody>
+          </p:sp>
+        </mc:Choice>
+        <mc:Fallback>
+          <p:sp>
+            <p:nvSpPr>
+              <p:cNvPr id="32" name="TextBox 31">
+                <a:extLst>
+                  <a:ext uri="{FF2B5EF4-FFF2-40B4-BE49-F238E27FC236}">
+                    <a16:creationId xmlns:a16="http://schemas.microsoft.com/office/drawing/2014/main" id="{C6EF783B-71C1-27F3-18B8-0DC29B794C42}"/>
+                  </a:ext>
+                </a:extLst>
+              </p:cNvPr>
+              <p:cNvSpPr txBox="1">
+                <a:spLocks noRot="1" noChangeAspect="1" noMove="1" noResize="1" noEditPoints="1" noAdjustHandles="1" noChangeArrowheads="1" noChangeShapeType="1" noTextEdit="1"/>
+              </p:cNvSpPr>
+              <p:nvPr/>
+            </p:nvSpPr>
+            <p:spPr>
+              <a:xfrm>
+                <a:off x="7979071" y="3182455"/>
+                <a:ext cx="565553" cy="369332"/>
+              </a:xfrm>
+              <a:prstGeom prst="rect">
+                <a:avLst/>
+              </a:prstGeom>
+              <a:blipFill>
+                <a:blip r:embed="rId7"/>
+                <a:stretch>
+                  <a:fillRect/>
+                </a:stretch>
+              </a:blipFill>
+            </p:spPr>
+            <p:txBody>
+              <a:bodyPr/>
+              <a:lstStyle/>
+              <a:p>
+                <a:r>
+                  <a:rPr lang="en-GB">
+                    <a:noFill/>
+                  </a:rPr>
+                  <a:t> </a:t>
+                </a:r>
+              </a:p>
+            </p:txBody>
+          </p:sp>
+        </mc:Fallback>
+      </mc:AlternateContent>
+      <p:sp>
+        <p:nvSpPr>
+          <p:cNvPr id="35" name="Arc 34">
+            <a:extLst>
+              <a:ext uri="{FF2B5EF4-FFF2-40B4-BE49-F238E27FC236}">
+                <a16:creationId xmlns:a16="http://schemas.microsoft.com/office/drawing/2014/main" id="{5111A3C0-9DF7-DB8C-A593-7AFD08700D98}"/>
+              </a:ext>
+            </a:extLst>
+          </p:cNvPr>
+          <p:cNvSpPr/>
+          <p:nvPr/>
+        </p:nvSpPr>
+        <p:spPr>
+          <a:xfrm>
+            <a:off x="6949441" y="2605869"/>
+            <a:ext cx="3563535" cy="3042456"/>
+          </a:xfrm>
+          <a:prstGeom prst="arc">
+            <a:avLst>
+              <a:gd name="adj1" fmla="val 20194489"/>
+              <a:gd name="adj2" fmla="val 21389731"/>
+            </a:avLst>
+          </a:prstGeom>
+        </p:spPr>
+        <p:style>
+          <a:lnRef idx="2">
+            <a:schemeClr val="accent1"/>
+          </a:lnRef>
+          <a:fillRef idx="0">
+            <a:schemeClr val="accent1"/>
+          </a:fillRef>
+          <a:effectRef idx="1">
+            <a:schemeClr val="accent1"/>
+          </a:effectRef>
+          <a:fontRef idx="minor">
+            <a:schemeClr val="tx1"/>
+          </a:fontRef>
+        </p:style>
+        <p:txBody>
+          <a:bodyPr rtlCol="0" anchor="ctr"/>
+          <a:lstStyle/>
+          <a:p>
+            <a:pPr algn="ctr"/>
+            <a:endParaRPr lang="en-GB" dirty="0"/>
+          </a:p>
+        </p:txBody>
+      </p:sp>
+      <p:cxnSp>
+        <p:nvCxnSpPr>
+          <p:cNvPr id="37" name="Straight Connector 36">
+            <a:extLst>
+              <a:ext uri="{FF2B5EF4-FFF2-40B4-BE49-F238E27FC236}">
+                <a16:creationId xmlns:a16="http://schemas.microsoft.com/office/drawing/2014/main" id="{58648488-BABC-02B7-5F54-D3F923A14721}"/>
+              </a:ext>
+            </a:extLst>
+          </p:cNvPr>
+          <p:cNvCxnSpPr>
+            <a:cxnSpLocks/>
+          </p:cNvCxnSpPr>
+          <p:nvPr/>
+        </p:nvCxnSpPr>
+        <p:spPr>
+          <a:xfrm flipH="1">
+            <a:off x="9720910" y="3003482"/>
+            <a:ext cx="1499794" cy="723549"/>
+          </a:xfrm>
+          <a:prstGeom prst="line">
+            <a:avLst/>
+          </a:prstGeom>
+        </p:spPr>
+        <p:style>
+          <a:lnRef idx="2">
+            <a:schemeClr val="accent1"/>
+          </a:lnRef>
+          <a:fillRef idx="0">
+            <a:schemeClr val="accent1"/>
+          </a:fillRef>
+          <a:effectRef idx="1">
+            <a:schemeClr val="accent1"/>
+          </a:effectRef>
+          <a:fontRef idx="minor">
+            <a:schemeClr val="tx1"/>
+          </a:fontRef>
+        </p:style>
+      </p:cxnSp>
+      <p:cxnSp>
+        <p:nvCxnSpPr>
+          <p:cNvPr id="39" name="Straight Connector 38">
+            <a:extLst>
+              <a:ext uri="{FF2B5EF4-FFF2-40B4-BE49-F238E27FC236}">
+                <a16:creationId xmlns:a16="http://schemas.microsoft.com/office/drawing/2014/main" id="{3CF2D22A-78AF-FC33-A39B-997CEA474A58}"/>
+              </a:ext>
+            </a:extLst>
+          </p:cNvPr>
+          <p:cNvCxnSpPr>
+            <a:cxnSpLocks/>
+          </p:cNvCxnSpPr>
+          <p:nvPr/>
+        </p:nvCxnSpPr>
+        <p:spPr>
+          <a:xfrm flipH="1">
+            <a:off x="10208915" y="3998850"/>
+            <a:ext cx="1271078" cy="0"/>
+          </a:xfrm>
+          <a:prstGeom prst="line">
+            <a:avLst/>
+          </a:prstGeom>
+        </p:spPr>
+        <p:style>
+          <a:lnRef idx="2">
+            <a:schemeClr val="accent1"/>
+          </a:lnRef>
+          <a:fillRef idx="0">
+            <a:schemeClr val="accent1"/>
+          </a:fillRef>
+          <a:effectRef idx="1">
+            <a:schemeClr val="accent1"/>
+          </a:effectRef>
+          <a:fontRef idx="minor">
+            <a:schemeClr val="tx1"/>
+          </a:fontRef>
+        </p:style>
+      </p:cxnSp>
+      <mc:AlternateContent xmlns:mc="http://schemas.openxmlformats.org/markup-compatibility/2006">
+        <mc:Choice xmlns:a14="http://schemas.microsoft.com/office/drawing/2010/main" Requires="a14">
+          <p:sp>
+            <p:nvSpPr>
+              <p:cNvPr id="46" name="TextBox 45">
+                <a:extLst>
+                  <a:ext uri="{FF2B5EF4-FFF2-40B4-BE49-F238E27FC236}">
+                    <a16:creationId xmlns:a16="http://schemas.microsoft.com/office/drawing/2014/main" id="{9B819E69-7C68-6C40-8DA8-AD6B3CC5EDFE}"/>
+                  </a:ext>
+                </a:extLst>
+              </p:cNvPr>
+              <p:cNvSpPr txBox="1"/>
+              <p:nvPr/>
+            </p:nvSpPr>
+            <p:spPr>
+              <a:xfrm>
+                <a:off x="9949117" y="3607887"/>
+                <a:ext cx="627351" cy="369332"/>
+              </a:xfrm>
+              <a:prstGeom prst="rect">
+                <a:avLst/>
+              </a:prstGeom>
+              <a:noFill/>
+            </p:spPr>
+            <p:txBody>
+              <a:bodyPr wrap="square" rtlCol="0">
+                <a:spAutoFit/>
+              </a:bodyPr>
+              <a:lstStyle/>
+              <a:p>
+                <a14:m>
+                  <m:oMathPara xmlns:m="http://schemas.openxmlformats.org/officeDocument/2006/math">
+                    <m:oMathParaPr>
+                      <m:jc m:val="centerGroup"/>
+                    </m:oMathParaPr>
+                    <m:oMath xmlns:m="http://schemas.openxmlformats.org/officeDocument/2006/math">
+                      <m:r>
+                        <a:rPr lang="en-GB" b="0" i="1" smtClean="0">
+                          <a:latin typeface="Cambria Math" panose="02040503050406030204" pitchFamily="18" charset="0"/>
+                        </a:rPr>
+                        <m:t>𝜃</m:t>
+                      </m:r>
+                    </m:oMath>
+                  </m:oMathPara>
+                </a14:m>
+                <a:endParaRPr lang="en-GB" dirty="0"/>
+              </a:p>
+            </p:txBody>
+          </p:sp>
+        </mc:Choice>
+        <mc:Fallback>
+          <p:sp>
+            <p:nvSpPr>
+              <p:cNvPr id="46" name="TextBox 45">
+                <a:extLst>
+                  <a:ext uri="{FF2B5EF4-FFF2-40B4-BE49-F238E27FC236}">
+                    <a16:creationId xmlns:a16="http://schemas.microsoft.com/office/drawing/2014/main" id="{9B819E69-7C68-6C40-8DA8-AD6B3CC5EDFE}"/>
+                  </a:ext>
+                </a:extLst>
+              </p:cNvPr>
+              <p:cNvSpPr txBox="1">
+                <a:spLocks noRot="1" noChangeAspect="1" noMove="1" noResize="1" noEditPoints="1" noAdjustHandles="1" noChangeArrowheads="1" noChangeShapeType="1" noTextEdit="1"/>
+              </p:cNvSpPr>
+              <p:nvPr/>
+            </p:nvSpPr>
+            <p:spPr>
+              <a:xfrm>
+                <a:off x="9949117" y="3607887"/>
+                <a:ext cx="627351" cy="369332"/>
+              </a:xfrm>
+              <a:prstGeom prst="rect">
+                <a:avLst/>
+              </a:prstGeom>
+              <a:blipFill>
+                <a:blip r:embed="rId8"/>
+                <a:stretch>
+                  <a:fillRect/>
+                </a:stretch>
+              </a:blipFill>
+            </p:spPr>
+            <p:txBody>
+              <a:bodyPr/>
+              <a:lstStyle/>
+              <a:p>
+                <a:r>
+                  <a:rPr lang="en-GB">
+                    <a:noFill/>
+                  </a:rPr>
+                  <a:t> </a:t>
+                </a:r>
+              </a:p>
+            </p:txBody>
+          </p:sp>
+        </mc:Fallback>
+      </mc:AlternateContent>
+    </p:spTree>
+    <p:extLst>
+      <p:ext uri="{BB962C8B-B14F-4D97-AF65-F5344CB8AC3E}">
+        <p14:creationId xmlns:p14="http://schemas.microsoft.com/office/powerpoint/2010/main" val="3386808046"/>
+      </p:ext>
+    </p:extLst>
+  </p:cSld>
+  <p:clrMapOvr>
+    <a:masterClrMapping/>
+  </p:clrMapOvr>
+</p:sld>
+</file>
+
+<file path=ppt/slides/slide12.xml><?xml version="1.0" encoding="utf-8"?>
+<p:sld xmlns:a="http://schemas.openxmlformats.org/drawingml/2006/main" xmlns:r="http://schemas.openxmlformats.org/officeDocument/2006/relationships" xmlns:p="http://schemas.openxmlformats.org/presentationml/2006/main">
+  <p:cSld>
+    <p:bg>
+      <p:bgPr>
+        <a:solidFill>
+          <a:schemeClr val="bg1"/>
+        </a:solidFill>
+        <a:effectLst/>
+      </p:bgPr>
+    </p:bg>
+    <p:spTree>
+      <p:nvGrpSpPr>
+        <p:cNvPr id="1" name=""/>
+        <p:cNvGrpSpPr/>
+        <p:nvPr/>
+      </p:nvGrpSpPr>
+      <p:grpSpPr>
+        <a:xfrm>
+          <a:off x="0" y="0"/>
+          <a:ext cx="0" cy="0"/>
+          <a:chOff x="0" y="0"/>
+          <a:chExt cx="0" cy="0"/>
+        </a:xfrm>
+      </p:grpSpPr>
+      <p:sp useBgFill="1">
+        <p:nvSpPr>
+          <p:cNvPr id="9" name="Rectangle 8">
+            <a:extLst>
+              <a:ext uri="{FF2B5EF4-FFF2-40B4-BE49-F238E27FC236}">
+                <a16:creationId xmlns:a16="http://schemas.microsoft.com/office/drawing/2014/main" id="{1B15ED52-F352-441B-82BF-E0EA34836D08}"/>
+              </a:ext>
+              <a:ext uri="{C183D7F6-B498-43B3-948B-1728B52AA6E4}">
+                <adec:decorative xmlns:adec="http://schemas.microsoft.com/office/drawing/2017/decorative" val="1"/>
+              </a:ext>
+            </a:extLst>
+          </p:cNvPr>
+          <p:cNvSpPr>
+            <a:spLocks noGrp="1" noRot="1" noChangeAspect="1" noMove="1" noResize="1" noEditPoints="1" noAdjustHandles="1" noChangeArrowheads="1" noChangeShapeType="1" noTextEdit="1"/>
+          </p:cNvSpPr>
+          <p:nvPr>
+            <p:extLst>
+              <p:ext uri="{386F3935-93C4-4BCD-93E2-E3B085C9AB24}">
+                <p16:designElem xmlns:p16="http://schemas.microsoft.com/office/powerpoint/2015/main" val="1"/>
+              </p:ext>
+            </p:extLst>
+          </p:nvPr>
+        </p:nvSpPr>
+        <p:spPr>
+          <a:xfrm>
+            <a:off x="0" y="0"/>
+            <a:ext cx="12192000" cy="6858000"/>
+          </a:xfrm>
+          <a:prstGeom prst="rect">
+            <a:avLst/>
+          </a:prstGeom>
+          <a:ln w="12700" cap="flat" cmpd="sng" algn="ctr">
+            <a:noFill/>
+            <a:prstDash val="solid"/>
+            <a:miter lim="800000"/>
+          </a:ln>
+          <a:effectLst/>
+          <a:extLst>
+            <a:ext uri="{91240B29-F687-4F45-9708-019B960494DF}">
+              <a14:hiddenLine xmlns:a14="http://schemas.microsoft.com/office/drawing/2010/main" w="12700" cap="flat" cmpd="sng" algn="ctr">
+                <a:solidFill>
+                  <a:schemeClr val="accent1">
+                    <a:shade val="50000"/>
+                  </a:schemeClr>
+                </a:solidFill>
+                <a:prstDash val="solid"/>
+                <a:miter lim="800000"/>
+              </a14:hiddenLine>
+            </a:ext>
+          </a:extLst>
+        </p:spPr>
+        <p:style>
+          <a:lnRef idx="2">
+            <a:schemeClr val="accent1">
+              <a:shade val="50000"/>
+            </a:schemeClr>
+          </a:lnRef>
+          <a:fillRef idx="1">
+            <a:schemeClr val="accent1"/>
+          </a:fillRef>
+          <a:effectRef idx="0">
+            <a:schemeClr val="accent1"/>
+          </a:effectRef>
+          <a:fontRef idx="minor">
+            <a:schemeClr val="lt1"/>
+          </a:fontRef>
+        </p:style>
+        <p:txBody>
+          <a:bodyPr rtlCol="0" anchor="ctr"/>
+          <a:lstStyle/>
+          <a:p>
+            <a:pPr algn="ctr"/>
+            <a:endParaRPr lang="en-US"/>
+          </a:p>
+        </p:txBody>
+      </p:sp>
+      <p:sp>
+        <p:nvSpPr>
+          <p:cNvPr id="11" name="Rectangle 10">
+            <a:extLst>
+              <a:ext uri="{FF2B5EF4-FFF2-40B4-BE49-F238E27FC236}">
+                <a16:creationId xmlns:a16="http://schemas.microsoft.com/office/drawing/2014/main" id="{3B2E3793-BFE6-45A2-9B7B-E18844431C99}"/>
+              </a:ext>
+              <a:ext uri="{C183D7F6-B498-43B3-948B-1728B52AA6E4}">
+                <adec:decorative xmlns:adec="http://schemas.microsoft.com/office/drawing/2017/decorative" val="1"/>
+              </a:ext>
+            </a:extLst>
+          </p:cNvPr>
+          <p:cNvSpPr>
+            <a:spLocks noGrp="1" noRot="1" noChangeAspect="1" noMove="1" noResize="1" noEditPoints="1" noAdjustHandles="1" noChangeArrowheads="1" noChangeShapeType="1" noTextEdit="1"/>
+          </p:cNvSpPr>
+          <p:nvPr>
+            <p:extLst>
+              <p:ext uri="{386F3935-93C4-4BCD-93E2-E3B085C9AB24}">
+                <p16:designElem xmlns:p16="http://schemas.microsoft.com/office/powerpoint/2015/main" val="1"/>
+              </p:ext>
+            </p:extLst>
+          </p:nvPr>
+        </p:nvSpPr>
+        <p:spPr>
+          <a:xfrm flipH="1">
+            <a:off x="-1" y="-1"/>
+            <a:ext cx="12191998" cy="1590742"/>
+          </a:xfrm>
+          <a:prstGeom prst="rect">
+            <a:avLst/>
+          </a:prstGeom>
+          <a:gradFill>
+            <a:gsLst>
+              <a:gs pos="0">
+                <a:srgbClr val="000000"/>
+              </a:gs>
+              <a:gs pos="100000">
+                <a:schemeClr val="accent1">
+                  <a:lumMod val="75000"/>
+                </a:schemeClr>
+              </a:gs>
+            </a:gsLst>
+            <a:lin ang="8400000" scaled="0"/>
+          </a:gradFill>
+          <a:ln>
+            <a:noFill/>
+          </a:ln>
+        </p:spPr>
+        <p:style>
+          <a:lnRef idx="2">
+            <a:schemeClr val="accent1">
+              <a:shade val="50000"/>
+            </a:schemeClr>
+          </a:lnRef>
+          <a:fillRef idx="1">
+            <a:schemeClr val="accent1"/>
+          </a:fillRef>
+          <a:effectRef idx="0">
+            <a:schemeClr val="accent1"/>
+          </a:effectRef>
+          <a:fontRef idx="minor">
+            <a:schemeClr val="lt1"/>
+          </a:fontRef>
+        </p:style>
+        <p:txBody>
+          <a:bodyPr rtlCol="0" anchor="ctr"/>
+          <a:lstStyle/>
+          <a:p>
+            <a:pPr algn="ctr"/>
+            <a:endParaRPr lang="en-US"/>
+          </a:p>
+        </p:txBody>
+      </p:sp>
+      <p:sp>
+        <p:nvSpPr>
+          <p:cNvPr id="13" name="Rectangle 12">
+            <a:extLst>
+              <a:ext uri="{FF2B5EF4-FFF2-40B4-BE49-F238E27FC236}">
+                <a16:creationId xmlns:a16="http://schemas.microsoft.com/office/drawing/2014/main" id="{BC4C4868-CB8F-4AF9-9CDB-8108F2C19B67}"/>
+              </a:ext>
+              <a:ext uri="{C183D7F6-B498-43B3-948B-1728B52AA6E4}">
+                <adec:decorative xmlns:adec="http://schemas.microsoft.com/office/drawing/2017/decorative" val="1"/>
+              </a:ext>
+            </a:extLst>
+          </p:cNvPr>
+          <p:cNvSpPr>
+            <a:spLocks noGrp="1" noRot="1" noChangeAspect="1" noMove="1" noResize="1" noEditPoints="1" noAdjustHandles="1" noChangeArrowheads="1" noChangeShapeType="1" noTextEdit="1"/>
+          </p:cNvSpPr>
+          <p:nvPr>
+            <p:extLst>
+              <p:ext uri="{386F3935-93C4-4BCD-93E2-E3B085C9AB24}">
+                <p16:designElem xmlns:p16="http://schemas.microsoft.com/office/powerpoint/2015/main" val="1"/>
+              </p:ext>
+            </p:extLst>
+          </p:nvPr>
+        </p:nvSpPr>
+        <p:spPr>
+          <a:xfrm rot="10800000" flipH="1">
+            <a:off x="-3" y="0"/>
+            <a:ext cx="8115306" cy="1590742"/>
+          </a:xfrm>
+          <a:prstGeom prst="rect">
+            <a:avLst/>
+          </a:prstGeom>
+          <a:gradFill>
+            <a:gsLst>
+              <a:gs pos="20000">
+                <a:schemeClr val="accent1">
+                  <a:alpha val="0"/>
+                </a:schemeClr>
+              </a:gs>
+              <a:gs pos="100000">
+                <a:schemeClr val="accent1">
+                  <a:lumMod val="50000"/>
+                  <a:alpha val="55000"/>
+                </a:schemeClr>
+              </a:gs>
+            </a:gsLst>
+            <a:lin ang="13800000" scaled="0"/>
+          </a:gradFill>
+          <a:ln>
+            <a:noFill/>
+          </a:ln>
+        </p:spPr>
+        <p:style>
+          <a:lnRef idx="2">
+            <a:schemeClr val="accent1">
+              <a:shade val="50000"/>
+            </a:schemeClr>
+          </a:lnRef>
+          <a:fillRef idx="1">
+            <a:schemeClr val="accent1"/>
+          </a:fillRef>
+          <a:effectRef idx="0">
+            <a:schemeClr val="accent1"/>
+          </a:effectRef>
+          <a:fontRef idx="minor">
+            <a:schemeClr val="lt1"/>
+          </a:fontRef>
+        </p:style>
+        <p:txBody>
+          <a:bodyPr rtlCol="0" anchor="ctr"/>
+          <a:lstStyle/>
+          <a:p>
+            <a:pPr algn="ctr"/>
+            <a:endParaRPr lang="en-US"/>
+          </a:p>
+        </p:txBody>
+      </p:sp>
+      <p:sp>
+        <p:nvSpPr>
+          <p:cNvPr id="15" name="Rectangle 14">
+            <a:extLst>
+              <a:ext uri="{FF2B5EF4-FFF2-40B4-BE49-F238E27FC236}">
+                <a16:creationId xmlns:a16="http://schemas.microsoft.com/office/drawing/2014/main" id="{375E0459-6403-40CD-989D-56A4407CA12E}"/>
+              </a:ext>
+              <a:ext uri="{C183D7F6-B498-43B3-948B-1728B52AA6E4}">
+                <adec:decorative xmlns:adec="http://schemas.microsoft.com/office/drawing/2017/decorative" val="1"/>
+              </a:ext>
+            </a:extLst>
+          </p:cNvPr>
+          <p:cNvSpPr>
+            <a:spLocks noGrp="1" noRot="1" noChangeAspect="1" noMove="1" noResize="1" noEditPoints="1" noAdjustHandles="1" noChangeArrowheads="1" noChangeShapeType="1" noTextEdit="1"/>
+          </p:cNvSpPr>
+          <p:nvPr>
+            <p:extLst>
+              <p:ext uri="{386F3935-93C4-4BCD-93E2-E3B085C9AB24}">
+                <p16:designElem xmlns:p16="http://schemas.microsoft.com/office/powerpoint/2015/main" val="1"/>
+              </p:ext>
+            </p:extLst>
+          </p:nvPr>
+        </p:nvSpPr>
+        <p:spPr>
+          <a:xfrm flipH="1">
+            <a:off x="8115299" y="-1"/>
+            <a:ext cx="4076698" cy="1590742"/>
+          </a:xfrm>
+          <a:prstGeom prst="rect">
+            <a:avLst/>
+          </a:prstGeom>
+          <a:gradFill>
+            <a:gsLst>
+              <a:gs pos="0">
+                <a:schemeClr val="accent1">
+                  <a:alpha val="66000"/>
+                </a:schemeClr>
+              </a:gs>
+              <a:gs pos="100000">
+                <a:srgbClr val="000000">
+                  <a:alpha val="30000"/>
+                </a:srgbClr>
+              </a:gs>
+            </a:gsLst>
+            <a:lin ang="13200000" scaled="0"/>
+          </a:gradFill>
+          <a:ln>
+            <a:noFill/>
+          </a:ln>
+        </p:spPr>
+        <p:style>
+          <a:lnRef idx="2">
+            <a:schemeClr val="accent1">
+              <a:shade val="50000"/>
+            </a:schemeClr>
+          </a:lnRef>
+          <a:fillRef idx="1">
+            <a:schemeClr val="accent1"/>
+          </a:fillRef>
+          <a:effectRef idx="0">
+            <a:schemeClr val="accent1"/>
+          </a:effectRef>
+          <a:fontRef idx="minor">
+            <a:schemeClr val="lt1"/>
+          </a:fontRef>
+        </p:style>
+        <p:txBody>
+          <a:bodyPr rtlCol="0" anchor="ctr"/>
+          <a:lstStyle/>
+          <a:p>
+            <a:pPr algn="ctr"/>
+            <a:endParaRPr lang="en-US"/>
+          </a:p>
+        </p:txBody>
+      </p:sp>
+      <p:sp>
+        <p:nvSpPr>
+          <p:cNvPr id="17" name="Rectangle 16">
+            <a:extLst>
+              <a:ext uri="{FF2B5EF4-FFF2-40B4-BE49-F238E27FC236}">
+                <a16:creationId xmlns:a16="http://schemas.microsoft.com/office/drawing/2014/main" id="{53E5B1A8-3AC9-4BD1-9BBC-78CA94F2D1BA}"/>
+              </a:ext>
+              <a:ext uri="{C183D7F6-B498-43B3-948B-1728B52AA6E4}">
+                <adec:decorative xmlns:adec="http://schemas.microsoft.com/office/drawing/2017/decorative" val="1"/>
+              </a:ext>
+            </a:extLst>
+          </p:cNvPr>
+          <p:cNvSpPr>
+            <a:spLocks noGrp="1" noRot="1" noChangeAspect="1" noMove="1" noResize="1" noEditPoints="1" noAdjustHandles="1" noChangeArrowheads="1" noChangeShapeType="1" noTextEdit="1"/>
+          </p:cNvSpPr>
+          <p:nvPr>
+            <p:extLst>
+              <p:ext uri="{386F3935-93C4-4BCD-93E2-E3B085C9AB24}">
+                <p16:designElem xmlns:p16="http://schemas.microsoft.com/office/powerpoint/2015/main" val="1"/>
+              </p:ext>
+            </p:extLst>
+          </p:nvPr>
+        </p:nvSpPr>
+        <p:spPr>
+          <a:xfrm>
+            <a:off x="459350" y="-1"/>
+            <a:ext cx="11732646" cy="1597433"/>
+          </a:xfrm>
+          <a:prstGeom prst="rect">
+            <a:avLst/>
+          </a:prstGeom>
+          <a:gradFill>
+            <a:gsLst>
+              <a:gs pos="50000">
+                <a:srgbClr val="000000">
+                  <a:alpha val="0"/>
+                </a:srgbClr>
+              </a:gs>
+              <a:gs pos="99000">
+                <a:schemeClr val="accent1">
+                  <a:lumMod val="50000"/>
+                  <a:alpha val="52000"/>
+                </a:schemeClr>
+              </a:gs>
+            </a:gsLst>
+            <a:lin ang="16800000" scaled="0"/>
+          </a:gradFill>
+          <a:ln>
+            <a:noFill/>
+          </a:ln>
+        </p:spPr>
+        <p:style>
+          <a:lnRef idx="2">
+            <a:schemeClr val="accent1">
+              <a:shade val="50000"/>
+            </a:schemeClr>
+          </a:lnRef>
+          <a:fillRef idx="1">
+            <a:schemeClr val="accent1"/>
+          </a:fillRef>
+          <a:effectRef idx="0">
+            <a:schemeClr val="accent1"/>
+          </a:effectRef>
+          <a:fontRef idx="minor">
+            <a:schemeClr val="lt1"/>
+          </a:fontRef>
+        </p:style>
+        <p:txBody>
+          <a:bodyPr rtlCol="0" anchor="ctr"/>
+          <a:lstStyle/>
+          <a:p>
+            <a:pPr algn="ctr"/>
+            <a:endParaRPr lang="en-US"/>
+          </a:p>
+        </p:txBody>
+      </p:sp>
+      <p:sp>
+        <p:nvSpPr>
+          <p:cNvPr id="2" name="Title 1">
+            <a:extLst>
+              <a:ext uri="{FF2B5EF4-FFF2-40B4-BE49-F238E27FC236}">
+                <a16:creationId xmlns:a16="http://schemas.microsoft.com/office/drawing/2014/main" id="{37C7607D-6C99-8A72-BB0E-0D8646CB257C}"/>
+              </a:ext>
+            </a:extLst>
+          </p:cNvPr>
+          <p:cNvSpPr>
+            <a:spLocks noGrp="1"/>
+          </p:cNvSpPr>
+          <p:nvPr>
+            <p:ph type="title"/>
+          </p:nvPr>
+        </p:nvSpPr>
+        <p:spPr>
+          <a:xfrm>
+            <a:off x="1371599" y="294538"/>
+            <a:ext cx="9895951" cy="1033669"/>
+          </a:xfrm>
+        </p:spPr>
+        <p:txBody>
+          <a:bodyPr vert="horz" lIns="91440" tIns="45720" rIns="91440" bIns="45720" rtlCol="0" anchor="ctr">
+            <a:normAutofit/>
+          </a:bodyPr>
+          <a:lstStyle/>
+          <a:p>
+            <a:r>
+              <a:rPr lang="en-US" sz="4000" dirty="0">
+                <a:solidFill>
+                  <a:srgbClr val="FFFFFF"/>
+                </a:solidFill>
+              </a:rPr>
+              <a:t>Preliminary setup</a:t>
+            </a:r>
+            <a:endParaRPr lang="en-US" sz="4000" kern="1200" dirty="0">
+              <a:solidFill>
+                <a:srgbClr val="FFFFFF"/>
+              </a:solidFill>
+              <a:latin typeface="+mj-lt"/>
+              <a:ea typeface="+mj-ea"/>
+              <a:cs typeface="+mj-cs"/>
+            </a:endParaRPr>
+          </a:p>
+        </p:txBody>
+      </p:sp>
+      <p:pic>
+        <p:nvPicPr>
+          <p:cNvPr id="8" name="Picture 7">
+            <a:extLst>
+              <a:ext uri="{FF2B5EF4-FFF2-40B4-BE49-F238E27FC236}">
+                <a16:creationId xmlns:a16="http://schemas.microsoft.com/office/drawing/2014/main" id="{FBE190A3-5FBC-0D78-B099-0031FC35AB41}"/>
+              </a:ext>
+            </a:extLst>
+          </p:cNvPr>
+          <p:cNvPicPr>
+            <a:picLocks noChangeAspect="1"/>
+          </p:cNvPicPr>
+          <p:nvPr/>
+        </p:nvPicPr>
+        <p:blipFill>
+          <a:blip r:embed="rId3"/>
+          <a:stretch>
+            <a:fillRect/>
+          </a:stretch>
+        </p:blipFill>
+        <p:spPr>
+          <a:xfrm>
+            <a:off x="5704496" y="2074260"/>
+            <a:ext cx="5446149" cy="4032147"/>
+          </a:xfrm>
+          <a:prstGeom prst="rect">
+            <a:avLst/>
+          </a:prstGeom>
+        </p:spPr>
+      </p:pic>
+      <p:pic>
+        <p:nvPicPr>
+          <p:cNvPr id="16" name="Picture 15" descr="A fan on a table&#10;&#10;Description automatically generated">
+            <a:extLst>
+              <a:ext uri="{FF2B5EF4-FFF2-40B4-BE49-F238E27FC236}">
+                <a16:creationId xmlns:a16="http://schemas.microsoft.com/office/drawing/2014/main" id="{F1B7C94D-EBEC-3A93-1CEB-1AB67958F0B9}"/>
+              </a:ext>
+            </a:extLst>
+          </p:cNvPr>
+          <p:cNvPicPr>
+            <a:picLocks noChangeAspect="1"/>
+          </p:cNvPicPr>
+          <p:nvPr/>
+        </p:nvPicPr>
+        <p:blipFill>
+          <a:blip r:embed="rId4">
+            <a:extLst>
+              <a:ext uri="{28A0092B-C50C-407E-A947-70E740481C1C}">
+                <a14:useLocalDpi xmlns:a14="http://schemas.microsoft.com/office/drawing/2010/main" val="0"/>
+              </a:ext>
+            </a:extLst>
+          </a:blip>
+          <a:srcRect l="19903" r="20131"/>
+          <a:stretch/>
+        </p:blipFill>
+        <p:spPr>
+          <a:xfrm rot="5400000">
+            <a:off x="1076461" y="1429311"/>
+            <a:ext cx="4112570" cy="5143500"/>
+          </a:xfrm>
+          <a:prstGeom prst="rect">
+            <a:avLst/>
+          </a:prstGeom>
+        </p:spPr>
+      </p:pic>
+    </p:spTree>
+    <p:extLst>
+      <p:ext uri="{BB962C8B-B14F-4D97-AF65-F5344CB8AC3E}">
+        <p14:creationId xmlns:p14="http://schemas.microsoft.com/office/powerpoint/2010/main" val="17778767"/>
+      </p:ext>
+    </p:extLst>
+  </p:cSld>
+  <p:clrMapOvr>
+    <a:masterClrMapping/>
+  </p:clrMapOvr>
+  <p:timing>
+    <p:tnLst>
+      <p:par>
+        <p:cTn id="1" dur="indefinite" restart="never" nodeType="tmRoot">
+          <p:childTnLst>
+            <p:seq concurrent="1" nextAc="seek">
+              <p:cTn id="2" dur="indefinite" nodeType="mainSeq">
+                <p:childTnLst>
+                  <p:par>
+                    <p:cTn id="3" fill="hold">
+                      <p:stCondLst>
+                        <p:cond delay="indefinite"/>
+                        <p:cond evt="onBegin" delay="0">
+                          <p:tn val="2"/>
+                        </p:cond>
+                      </p:stCondLst>
+                      <p:childTnLst>
+                        <p:par>
+                          <p:cTn id="4" fill="hold">
+                            <p:stCondLst>
+                              <p:cond delay="0"/>
+                            </p:stCondLst>
+                            <p:childTnLst>
+                              <p:par>
+                                <p:cTn id="5" presetID="10" presetClass="entr" presetSubtype="0" fill="hold" grpId="0" nodeType="withEffect">
+                                  <p:stCondLst>
+                                    <p:cond delay="500"/>
+                                  </p:stCondLst>
+                                  <p:iterate type="wd">
+                                    <p:tmPct val="15000"/>
+                                  </p:iterate>
+                                  <p:childTnLst>
+                                    <p:set>
+                                      <p:cBhvr>
+                                        <p:cTn id="6" dur="1" fill="hold">
+                                          <p:stCondLst>
+                                            <p:cond delay="0"/>
+                                          </p:stCondLst>
+                                        </p:cTn>
+                                        <p:tgtEl>
+                                          <p:spTgt spid="2"/>
+                                        </p:tgtEl>
+                                        <p:attrNameLst>
+                                          <p:attrName>style.visibility</p:attrName>
+                                        </p:attrNameLst>
+                                      </p:cBhvr>
+                                      <p:to>
+                                        <p:strVal val="visible"/>
+                                      </p:to>
+                                    </p:set>
+                                    <p:animEffect transition="in" filter="fade">
+                                      <p:cBhvr>
+                                        <p:cTn id="7" dur="1000"/>
+                                        <p:tgtEl>
+                                          <p:spTgt spid="2"/>
+                                        </p:tgtEl>
+                                      </p:cBhvr>
+                                    </p:animEffect>
+                                  </p:childTnLst>
+                                </p:cTn>
+                              </p:par>
+                            </p:childTnLst>
+                          </p:cTn>
+                        </p:par>
+                      </p:childTnLst>
+                    </p:cTn>
+                  </p:par>
+                </p:childTnLst>
+              </p:cTn>
+              <p:prevCondLst>
+                <p:cond evt="onPrev" delay="0">
+                  <p:tgtEl>
+                    <p:sldTgt/>
+                  </p:tgtEl>
+                </p:cond>
+              </p:prevCondLst>
+              <p:nextCondLst>
+                <p:cond evt="onNext" delay="0">
+                  <p:tgtEl>
+                    <p:sldTgt/>
+                  </p:tgtEl>
+                </p:cond>
+              </p:nextCondLst>
+            </p:seq>
+          </p:childTnLst>
+        </p:cTn>
+      </p:par>
+    </p:tnLst>
+    <p:bldLst>
+      <p:bldP spid="2" grpId="0"/>
+    </p:bldLst>
+  </p:timing>
+</p:sld>
+</file>
+
+<file path=ppt/slides/slide13.xml><?xml version="1.0" encoding="utf-8"?>
+<p:sld xmlns:a="http://schemas.openxmlformats.org/drawingml/2006/main" xmlns:r="http://schemas.openxmlformats.org/officeDocument/2006/relationships" xmlns:p="http://schemas.openxmlformats.org/presentationml/2006/main">
+  <p:cSld>
+    <p:spTree>
+      <p:nvGrpSpPr>
+        <p:cNvPr id="1" name=""/>
+        <p:cNvGrpSpPr/>
+        <p:nvPr/>
+      </p:nvGrpSpPr>
+      <p:grpSpPr>
+        <a:xfrm>
+          <a:off x="0" y="0"/>
+          <a:ext cx="0" cy="0"/>
+          <a:chOff x="0" y="0"/>
+          <a:chExt cx="0" cy="0"/>
+        </a:xfrm>
+      </p:grpSpPr>
+      <p:sp>
+        <p:nvSpPr>
+          <p:cNvPr id="2" name="Title 1">
+            <a:extLst>
+              <a:ext uri="{FF2B5EF4-FFF2-40B4-BE49-F238E27FC236}">
+                <a16:creationId xmlns:a16="http://schemas.microsoft.com/office/drawing/2014/main" id="{1EBECBE2-A4C4-70B6-C758-B1BD9EEA99FE}"/>
+              </a:ext>
+            </a:extLst>
+          </p:cNvPr>
+          <p:cNvSpPr>
+            <a:spLocks noGrp="1"/>
+          </p:cNvSpPr>
+          <p:nvPr>
+            <p:ph type="title"/>
+          </p:nvPr>
+        </p:nvSpPr>
+        <p:spPr>
+          <a:xfrm>
+            <a:off x="650709" y="4723549"/>
+            <a:ext cx="10515600" cy="1325563"/>
+          </a:xfrm>
+        </p:spPr>
+        <p:txBody>
+          <a:bodyPr/>
+          <a:lstStyle/>
+          <a:p>
+            <a:r>
+              <a:rPr lang="en-GB" dirty="0"/>
+              <a:t>Questions?</a:t>
+            </a:r>
+          </a:p>
+        </p:txBody>
+      </p:sp>
+      <p:sp>
+        <p:nvSpPr>
+          <p:cNvPr id="3" name="Title 1">
+            <a:extLst>
+              <a:ext uri="{FF2B5EF4-FFF2-40B4-BE49-F238E27FC236}">
+                <a16:creationId xmlns:a16="http://schemas.microsoft.com/office/drawing/2014/main" id="{98F77CED-4624-8290-2A0D-089D1BE580B9}"/>
+              </a:ext>
+            </a:extLst>
+          </p:cNvPr>
+          <p:cNvSpPr txBox="1">
+            <a:spLocks/>
+          </p:cNvSpPr>
+          <p:nvPr/>
+        </p:nvSpPr>
+        <p:spPr>
+          <a:xfrm>
+            <a:off x="650709" y="0"/>
+            <a:ext cx="10515600" cy="1325563"/>
+          </a:xfrm>
+          <a:prstGeom prst="rect">
+            <a:avLst/>
+          </a:prstGeom>
+        </p:spPr>
+        <p:txBody>
+          <a:bodyPr vert="horz" lIns="91440" tIns="45720" rIns="91440" bIns="45720" rtlCol="0" anchor="ctr">
+            <a:normAutofit/>
+          </a:bodyPr>
+          <a:lstStyle>
+            <a:lvl1pPr algn="l" defTabSz="914400" rtl="0" eaLnBrk="1" latinLnBrk="0" hangingPunct="1">
+              <a:lnSpc>
+                <a:spcPct val="90000"/>
+              </a:lnSpc>
+              <a:spcBef>
+                <a:spcPct val="0"/>
+              </a:spcBef>
+              <a:buNone/>
+              <a:defRPr sz="4400" kern="1200">
+                <a:solidFill>
+                  <a:schemeClr val="tx1"/>
+                </a:solidFill>
+                <a:latin typeface="+mj-lt"/>
+                <a:ea typeface="+mj-ea"/>
+                <a:cs typeface="+mj-cs"/>
+              </a:defRPr>
+            </a:lvl1pPr>
+          </a:lstStyle>
+          <a:p>
+            <a:r>
+              <a:rPr lang="en-GB" dirty="0"/>
+              <a:t>Summary and future work</a:t>
+            </a:r>
+          </a:p>
+        </p:txBody>
+      </p:sp>
+      <p:sp>
+        <p:nvSpPr>
+          <p:cNvPr id="4" name="TextBox 3">
+            <a:extLst>
+              <a:ext uri="{FF2B5EF4-FFF2-40B4-BE49-F238E27FC236}">
+                <a16:creationId xmlns:a16="http://schemas.microsoft.com/office/drawing/2014/main" id="{F2395B41-79D9-3866-8416-AEA780AB929D}"/>
+              </a:ext>
+            </a:extLst>
+          </p:cNvPr>
+          <p:cNvSpPr txBox="1"/>
+          <p:nvPr/>
+        </p:nvSpPr>
+        <p:spPr>
+          <a:xfrm>
+            <a:off x="740441" y="1378291"/>
+            <a:ext cx="6507852" cy="923330"/>
+          </a:xfrm>
+          <a:prstGeom prst="rect">
+            <a:avLst/>
+          </a:prstGeom>
+          <a:noFill/>
+        </p:spPr>
+        <p:txBody>
+          <a:bodyPr wrap="square" rtlCol="0">
+            <a:spAutoFit/>
+          </a:bodyPr>
+          <a:lstStyle/>
+          <a:p>
+            <a:pPr marL="285750" indent="-285750">
+              <a:buFont typeface="Arial" panose="020B0604020202020204" pitchFamily="34" charset="0"/>
+              <a:buChar char="•"/>
+            </a:pPr>
+            <a:r>
+              <a:rPr lang="en-GB" dirty="0"/>
+              <a:t>Reducing drone noise important for adoption</a:t>
+            </a:r>
+          </a:p>
+          <a:p>
+            <a:pPr marL="285750" indent="-285750">
+              <a:buFont typeface="Arial" panose="020B0604020202020204" pitchFamily="34" charset="0"/>
+              <a:buChar char="•"/>
+            </a:pPr>
+            <a:endParaRPr lang="en-GB" dirty="0"/>
+          </a:p>
+          <a:p>
+            <a:pPr marL="285750" indent="-285750">
+              <a:buFont typeface="Arial" panose="020B0604020202020204" pitchFamily="34" charset="0"/>
+              <a:buChar char="•"/>
+            </a:pPr>
+            <a:r>
+              <a:rPr lang="en-GB" dirty="0"/>
+              <a:t>Not an easy problem, large design space</a:t>
             </a:r>
           </a:p>
         </p:txBody>
@@ -6415,7 +8898,7 @@
             </a:pPr>
             <a:r>
               <a:rPr lang="en-GB" dirty="0"/>
-              <a:t>Aerodynamic and aero-acoustic performance are closely related</a:t>
+              <a:t>Must optimise aerodynamic and aero-acoustic performance</a:t>
             </a:r>
           </a:p>
         </p:txBody>
@@ -6858,7 +9341,7 @@
         </p:nvSpPr>
         <p:spPr>
           <a:xfrm>
-            <a:off x="1371599" y="294538"/>
+            <a:off x="595743" y="402414"/>
             <a:ext cx="9895951" cy="1033669"/>
           </a:xfrm>
         </p:spPr>
@@ -6874,7 +9357,7 @@
                   <a:srgbClr val="FFFFFF"/>
                 </a:solidFill>
               </a:rPr>
-              <a:t>Sources of propeller sound</a:t>
+              <a:t>Sources of propeller noise</a:t>
             </a:r>
           </a:p>
         </p:txBody>
@@ -6897,8 +9380,8 @@
         </p:nvSpPr>
         <p:spPr>
           <a:xfrm>
-            <a:off x="444804" y="2047009"/>
-            <a:ext cx="10398046" cy="4810991"/>
+            <a:off x="1028120" y="1794953"/>
+            <a:ext cx="7789844" cy="4573010"/>
           </a:xfrm>
         </p:spPr>
         <p:txBody>
@@ -6912,13 +9395,25 @@
             </a:pPr>
             <a:r>
               <a:rPr lang="en-GB" dirty="0"/>
-              <a:t>Discrete frequency tonal noise</a:t>
-            </a:r>
-          </a:p>
-          <a:p>
-            <a:r>
-              <a:rPr lang="en-GB" dirty="0"/>
-              <a:t>Periodic pressure fluctuations</a:t>
+              <a:t>Broadband</a:t>
+            </a:r>
+          </a:p>
+          <a:p>
+            <a:r>
+              <a:rPr lang="en-GB" sz="2400" b="1" dirty="0"/>
+              <a:t>Formation and shedding of vortices</a:t>
+            </a:r>
+          </a:p>
+          <a:p>
+            <a:r>
+              <a:rPr lang="en-GB" sz="2400" dirty="0"/>
+              <a:t>Trailing edge turbulent interaction</a:t>
+            </a:r>
+          </a:p>
+          <a:p>
+            <a:r>
+              <a:rPr lang="en-GB" sz="2400" dirty="0"/>
+              <a:t>Flow separation</a:t>
             </a:r>
           </a:p>
           <a:p>
@@ -6933,53 +9428,1081 @@
             </a:pPr>
             <a:r>
               <a:rPr lang="en-GB" dirty="0"/>
-              <a:t>Broadband</a:t>
-            </a:r>
-          </a:p>
-          <a:p>
-            <a:r>
-              <a:rPr lang="en-GB" dirty="0"/>
-              <a:t>Formation and shedding of vortices</a:t>
-            </a:r>
-          </a:p>
-          <a:p>
-            <a:r>
-              <a:rPr lang="en-GB" dirty="0"/>
-              <a:t>Trailing edge turbulent interaction</a:t>
-            </a:r>
-          </a:p>
-          <a:p>
-            <a:r>
-              <a:rPr lang="en-GB" dirty="0"/>
-              <a:t>Flow separation</a:t>
-            </a:r>
-          </a:p>
-          <a:p>
-            <a:pPr marL="0" indent="0">
-              <a:buNone/>
-            </a:pPr>
-            <a:endParaRPr lang="en-GB" dirty="0"/>
-          </a:p>
-        </p:txBody>
-      </p:sp>
-      <p:sp>
-        <p:nvSpPr>
-          <p:cNvPr id="4" name="Content Placeholder 2">
-            <a:extLst>
-              <a:ext uri="{FF2B5EF4-FFF2-40B4-BE49-F238E27FC236}">
-                <a16:creationId xmlns:a16="http://schemas.microsoft.com/office/drawing/2014/main" id="{540CA7AA-5659-48B1-C827-BCB210B1C7E8}"/>
-              </a:ext>
-            </a:extLst>
-          </p:cNvPr>
-          <p:cNvSpPr txBox="1">
-            <a:spLocks/>
-          </p:cNvSpPr>
+              <a:t>Discrete frequency tonal noise</a:t>
+            </a:r>
+          </a:p>
+          <a:p>
+            <a:r>
+              <a:rPr lang="en-GB" sz="2400" dirty="0"/>
+              <a:t>Thickness noise</a:t>
+            </a:r>
+          </a:p>
+          <a:p>
+            <a:r>
+              <a:rPr lang="en-GB" sz="2400" b="1" dirty="0"/>
+              <a:t>Loading noise</a:t>
+            </a:r>
+          </a:p>
+          <a:p>
+            <a:r>
+              <a:rPr lang="en-GB" sz="2400" dirty="0"/>
+              <a:t>Interaction and distortion effects</a:t>
+            </a:r>
+          </a:p>
+        </p:txBody>
+      </p:sp>
+      <p:sp>
+        <p:nvSpPr>
+          <p:cNvPr id="6" name="TextBox 5">
+            <a:extLst>
+              <a:ext uri="{FF2B5EF4-FFF2-40B4-BE49-F238E27FC236}">
+                <a16:creationId xmlns:a16="http://schemas.microsoft.com/office/drawing/2014/main" id="{7E4E60C8-6F57-3C51-70F3-12293B831D55}"/>
+              </a:ext>
+            </a:extLst>
+          </p:cNvPr>
+          <p:cNvSpPr txBox="1"/>
           <p:nvPr/>
         </p:nvSpPr>
         <p:spPr>
           <a:xfrm>
-            <a:off x="6735992" y="1652675"/>
-            <a:ext cx="4860265" cy="3001521"/>
+            <a:off x="4202263" y="5059259"/>
+            <a:ext cx="4017898" cy="461665"/>
+          </a:xfrm>
+          <a:prstGeom prst="rect">
+            <a:avLst/>
+          </a:prstGeom>
+          <a:noFill/>
+        </p:spPr>
+        <p:txBody>
+          <a:bodyPr wrap="square" rtlCol="0">
+            <a:spAutoFit/>
+          </a:bodyPr>
+          <a:lstStyle/>
+          <a:p>
+            <a:r>
+              <a:rPr lang="en-GB" sz="2400" dirty="0"/>
+              <a:t>Blade passing frequencies</a:t>
+            </a:r>
+          </a:p>
+        </p:txBody>
+      </p:sp>
+      <p:sp>
+        <p:nvSpPr>
+          <p:cNvPr id="7" name="Right Brace 6">
+            <a:extLst>
+              <a:ext uri="{FF2B5EF4-FFF2-40B4-BE49-F238E27FC236}">
+                <a16:creationId xmlns:a16="http://schemas.microsoft.com/office/drawing/2014/main" id="{FAFEF700-1428-A902-97E6-2FEE77631A6F}"/>
+              </a:ext>
+            </a:extLst>
+          </p:cNvPr>
+          <p:cNvSpPr/>
+          <p:nvPr/>
+        </p:nvSpPr>
+        <p:spPr>
+          <a:xfrm>
+            <a:off x="3650519" y="4961984"/>
+            <a:ext cx="551743" cy="656216"/>
+          </a:xfrm>
+          <a:prstGeom prst="rightBrace">
+            <a:avLst/>
+          </a:prstGeom>
+        </p:spPr>
+        <p:style>
+          <a:lnRef idx="2">
+            <a:schemeClr val="accent1"/>
+          </a:lnRef>
+          <a:fillRef idx="0">
+            <a:schemeClr val="accent1"/>
+          </a:fillRef>
+          <a:effectRef idx="1">
+            <a:schemeClr val="accent1"/>
+          </a:effectRef>
+          <a:fontRef idx="minor">
+            <a:schemeClr val="tx1"/>
+          </a:fontRef>
+        </p:style>
+        <p:txBody>
+          <a:bodyPr rtlCol="0" anchor="ctr"/>
+          <a:lstStyle/>
+          <a:p>
+            <a:pPr algn="ctr"/>
+            <a:endParaRPr lang="en-GB"/>
+          </a:p>
+        </p:txBody>
+      </p:sp>
+    </p:spTree>
+    <p:extLst>
+      <p:ext uri="{BB962C8B-B14F-4D97-AF65-F5344CB8AC3E}">
+        <p14:creationId xmlns:p14="http://schemas.microsoft.com/office/powerpoint/2010/main" val="2108568212"/>
+      </p:ext>
+    </p:extLst>
+  </p:cSld>
+  <p:clrMapOvr>
+    <a:masterClrMapping/>
+  </p:clrMapOvr>
+</p:sld>
+</file>
+
+<file path=ppt/slides/slide4.xml><?xml version="1.0" encoding="utf-8"?>
+<p:sld xmlns:a="http://schemas.openxmlformats.org/drawingml/2006/main" xmlns:r="http://schemas.openxmlformats.org/officeDocument/2006/relationships" xmlns:p="http://schemas.openxmlformats.org/presentationml/2006/main">
+  <p:cSld>
+    <p:bg>
+      <p:bgPr>
+        <a:solidFill>
+          <a:schemeClr val="bg1"/>
+        </a:solidFill>
+        <a:effectLst/>
+      </p:bgPr>
+    </p:bg>
+    <p:spTree>
+      <p:nvGrpSpPr>
+        <p:cNvPr id="1" name="">
+          <a:extLst>
+            <a:ext uri="{FF2B5EF4-FFF2-40B4-BE49-F238E27FC236}">
+              <a16:creationId xmlns:a16="http://schemas.microsoft.com/office/drawing/2014/main" id="{E1373EFC-50AC-AC9B-D8C3-83D34FA273A5}"/>
+            </a:ext>
+          </a:extLst>
+        </p:cNvPr>
+        <p:cNvGrpSpPr/>
+        <p:nvPr/>
+      </p:nvGrpSpPr>
+      <p:grpSpPr>
+        <a:xfrm>
+          <a:off x="0" y="0"/>
+          <a:ext cx="0" cy="0"/>
+          <a:chOff x="0" y="0"/>
+          <a:chExt cx="0" cy="0"/>
+        </a:xfrm>
+      </p:grpSpPr>
+      <p:sp useBgFill="1">
+        <p:nvSpPr>
+          <p:cNvPr id="42" name="Rectangle 41">
+            <a:extLst>
+              <a:ext uri="{FF2B5EF4-FFF2-40B4-BE49-F238E27FC236}">
+                <a16:creationId xmlns:a16="http://schemas.microsoft.com/office/drawing/2014/main" id="{AB8C311F-7253-4AED-9701-7FC0708C41C7}"/>
+              </a:ext>
+              <a:ext uri="{C183D7F6-B498-43B3-948B-1728B52AA6E4}">
+                <adec:decorative xmlns:adec="http://schemas.microsoft.com/office/drawing/2017/decorative" val="1"/>
+              </a:ext>
+            </a:extLst>
+          </p:cNvPr>
+          <p:cNvSpPr>
+            <a:spLocks noGrp="1" noRot="1" noChangeAspect="1" noMove="1" noResize="1" noEditPoints="1" noAdjustHandles="1" noChangeArrowheads="1" noChangeShapeType="1" noTextEdit="1"/>
+          </p:cNvSpPr>
+          <p:nvPr>
+            <p:extLst>
+              <p:ext uri="{386F3935-93C4-4BCD-93E2-E3B085C9AB24}">
+                <p16:designElem xmlns:p16="http://schemas.microsoft.com/office/powerpoint/2015/main" val="1"/>
+              </p:ext>
+            </p:extLst>
+          </p:nvPr>
+        </p:nvSpPr>
+        <p:spPr>
+          <a:xfrm>
+            <a:off x="0" y="0"/>
+            <a:ext cx="12192000" cy="6858000"/>
+          </a:xfrm>
+          <a:prstGeom prst="rect">
+            <a:avLst/>
+          </a:prstGeom>
+          <a:ln w="12700" cap="flat" cmpd="sng" algn="ctr">
+            <a:noFill/>
+            <a:prstDash val="solid"/>
+            <a:miter lim="800000"/>
+          </a:ln>
+          <a:effectLst/>
+          <a:extLst>
+            <a:ext uri="{91240B29-F687-4F45-9708-019B960494DF}">
+              <a14:hiddenLine xmlns:a14="http://schemas.microsoft.com/office/drawing/2010/main" w="12700" cap="flat" cmpd="sng" algn="ctr">
+                <a:solidFill>
+                  <a:schemeClr val="accent1">
+                    <a:shade val="50000"/>
+                  </a:schemeClr>
+                </a:solidFill>
+                <a:prstDash val="solid"/>
+                <a:miter lim="800000"/>
+              </a14:hiddenLine>
+            </a:ext>
+          </a:extLst>
+        </p:spPr>
+        <p:style>
+          <a:lnRef idx="2">
+            <a:schemeClr val="accent1">
+              <a:shade val="50000"/>
+            </a:schemeClr>
+          </a:lnRef>
+          <a:fillRef idx="1">
+            <a:schemeClr val="accent1"/>
+          </a:fillRef>
+          <a:effectRef idx="0">
+            <a:schemeClr val="accent1"/>
+          </a:effectRef>
+          <a:fontRef idx="minor">
+            <a:schemeClr val="lt1"/>
+          </a:fontRef>
+        </p:style>
+        <p:txBody>
+          <a:bodyPr rtlCol="0" anchor="ctr"/>
+          <a:lstStyle/>
+          <a:p>
+            <a:pPr algn="ctr"/>
+            <a:endParaRPr lang="en-US"/>
+          </a:p>
+        </p:txBody>
+      </p:sp>
+      <p:sp>
+        <p:nvSpPr>
+          <p:cNvPr id="44" name="Rectangle 43">
+            <a:extLst>
+              <a:ext uri="{FF2B5EF4-FFF2-40B4-BE49-F238E27FC236}">
+                <a16:creationId xmlns:a16="http://schemas.microsoft.com/office/drawing/2014/main" id="{E2384209-CB15-4CDF-9D31-C44FD9A3F20D}"/>
+              </a:ext>
+              <a:ext uri="{C183D7F6-B498-43B3-948B-1728B52AA6E4}">
+                <adec:decorative xmlns:adec="http://schemas.microsoft.com/office/drawing/2017/decorative" val="1"/>
+              </a:ext>
+            </a:extLst>
+          </p:cNvPr>
+          <p:cNvSpPr>
+            <a:spLocks noGrp="1" noRot="1" noChangeAspect="1" noMove="1" noResize="1" noEditPoints="1" noAdjustHandles="1" noChangeArrowheads="1" noChangeShapeType="1" noTextEdit="1"/>
+          </p:cNvSpPr>
+          <p:nvPr>
+            <p:extLst>
+              <p:ext uri="{386F3935-93C4-4BCD-93E2-E3B085C9AB24}">
+                <p16:designElem xmlns:p16="http://schemas.microsoft.com/office/powerpoint/2015/main" val="1"/>
+              </p:ext>
+            </p:extLst>
+          </p:nvPr>
+        </p:nvSpPr>
+        <p:spPr>
+          <a:xfrm rot="16200000" flipH="1">
+            <a:off x="2666617" y="-2666188"/>
+            <a:ext cx="6858000" cy="12191233"/>
+          </a:xfrm>
+          <a:prstGeom prst="rect">
+            <a:avLst/>
+          </a:prstGeom>
+          <a:gradFill>
+            <a:gsLst>
+              <a:gs pos="8000">
+                <a:schemeClr val="accent1"/>
+              </a:gs>
+              <a:gs pos="100000">
+                <a:schemeClr val="accent1">
+                  <a:lumMod val="50000"/>
+                </a:schemeClr>
+              </a:gs>
+            </a:gsLst>
+            <a:lin ang="12000000" scaled="0"/>
+          </a:gradFill>
+          <a:ln>
+            <a:noFill/>
+          </a:ln>
+        </p:spPr>
+        <p:style>
+          <a:lnRef idx="2">
+            <a:schemeClr val="accent1">
+              <a:shade val="50000"/>
+            </a:schemeClr>
+          </a:lnRef>
+          <a:fillRef idx="1">
+            <a:schemeClr val="accent1"/>
+          </a:fillRef>
+          <a:effectRef idx="0">
+            <a:schemeClr val="accent1"/>
+          </a:effectRef>
+          <a:fontRef idx="minor">
+            <a:schemeClr val="lt1"/>
+          </a:fontRef>
+        </p:style>
+        <p:txBody>
+          <a:bodyPr rtlCol="0" anchor="ctr"/>
+          <a:lstStyle/>
+          <a:p>
+            <a:pPr algn="ctr"/>
+            <a:endParaRPr lang="en-US"/>
+          </a:p>
+        </p:txBody>
+      </p:sp>
+      <p:sp>
+        <p:nvSpPr>
+          <p:cNvPr id="46" name="Rectangle 45">
+            <a:extLst>
+              <a:ext uri="{FF2B5EF4-FFF2-40B4-BE49-F238E27FC236}">
+                <a16:creationId xmlns:a16="http://schemas.microsoft.com/office/drawing/2014/main" id="{2633B3B5-CC90-43F0-8714-D31D1F3F0209}"/>
+              </a:ext>
+              <a:ext uri="{C183D7F6-B498-43B3-948B-1728B52AA6E4}">
+                <adec:decorative xmlns:adec="http://schemas.microsoft.com/office/drawing/2017/decorative" val="1"/>
+              </a:ext>
+            </a:extLst>
+          </p:cNvPr>
+          <p:cNvSpPr>
+            <a:spLocks noGrp="1" noRot="1" noChangeAspect="1" noMove="1" noResize="1" noEditPoints="1" noAdjustHandles="1" noChangeArrowheads="1" noChangeShapeType="1" noTextEdit="1"/>
+          </p:cNvSpPr>
+          <p:nvPr>
+            <p:extLst>
+              <p:ext uri="{386F3935-93C4-4BCD-93E2-E3B085C9AB24}">
+                <p16:designElem xmlns:p16="http://schemas.microsoft.com/office/powerpoint/2015/main" val="1"/>
+              </p:ext>
+            </p:extLst>
+          </p:nvPr>
+        </p:nvSpPr>
+        <p:spPr>
+          <a:xfrm rot="10800000" flipH="1">
+            <a:off x="-2311" y="0"/>
+            <a:ext cx="9070846" cy="6857572"/>
+          </a:xfrm>
+          <a:prstGeom prst="rect">
+            <a:avLst/>
+          </a:prstGeom>
+          <a:gradFill>
+            <a:gsLst>
+              <a:gs pos="8000">
+                <a:srgbClr val="000000">
+                  <a:alpha val="52000"/>
+                </a:srgbClr>
+              </a:gs>
+              <a:gs pos="100000">
+                <a:schemeClr val="accent1"/>
+              </a:gs>
+            </a:gsLst>
+            <a:lin ang="4800000" scaled="0"/>
+          </a:gradFill>
+          <a:ln>
+            <a:noFill/>
+          </a:ln>
+        </p:spPr>
+        <p:style>
+          <a:lnRef idx="2">
+            <a:schemeClr val="accent1">
+              <a:shade val="50000"/>
+            </a:schemeClr>
+          </a:lnRef>
+          <a:fillRef idx="1">
+            <a:schemeClr val="accent1"/>
+          </a:fillRef>
+          <a:effectRef idx="0">
+            <a:schemeClr val="accent1"/>
+          </a:effectRef>
+          <a:fontRef idx="minor">
+            <a:schemeClr val="lt1"/>
+          </a:fontRef>
+        </p:style>
+        <p:txBody>
+          <a:bodyPr rtlCol="0" anchor="ctr"/>
+          <a:lstStyle/>
+          <a:p>
+            <a:pPr algn="ctr"/>
+            <a:endParaRPr lang="en-US"/>
+          </a:p>
+        </p:txBody>
+      </p:sp>
+      <p:sp>
+        <p:nvSpPr>
+          <p:cNvPr id="48" name="Rectangle 47">
+            <a:extLst>
+              <a:ext uri="{FF2B5EF4-FFF2-40B4-BE49-F238E27FC236}">
+                <a16:creationId xmlns:a16="http://schemas.microsoft.com/office/drawing/2014/main" id="{A8D57A06-A426-446D-B02C-A2DC6B62E45E}"/>
+              </a:ext>
+              <a:ext uri="{C183D7F6-B498-43B3-948B-1728B52AA6E4}">
+                <adec:decorative xmlns:adec="http://schemas.microsoft.com/office/drawing/2017/decorative" val="1"/>
+              </a:ext>
+            </a:extLst>
+          </p:cNvPr>
+          <p:cNvSpPr>
+            <a:spLocks noGrp="1" noRot="1" noChangeAspect="1" noMove="1" noResize="1" noEditPoints="1" noAdjustHandles="1" noChangeArrowheads="1" noChangeShapeType="1" noTextEdit="1"/>
+          </p:cNvSpPr>
+          <p:nvPr>
+            <p:extLst>
+              <p:ext uri="{386F3935-93C4-4BCD-93E2-E3B085C9AB24}">
+                <p16:designElem xmlns:p16="http://schemas.microsoft.com/office/powerpoint/2015/main" val="1"/>
+              </p:ext>
+            </p:extLst>
+          </p:nvPr>
+        </p:nvSpPr>
+        <p:spPr>
+          <a:xfrm rot="16200000" flipH="1">
+            <a:off x="3649491" y="-1685840"/>
+            <a:ext cx="4894564" cy="12193546"/>
+          </a:xfrm>
+          <a:prstGeom prst="rect">
+            <a:avLst/>
+          </a:prstGeom>
+          <a:gradFill>
+            <a:gsLst>
+              <a:gs pos="0">
+                <a:schemeClr val="accent5">
+                  <a:lumMod val="60000"/>
+                  <a:lumOff val="40000"/>
+                  <a:alpha val="0"/>
+                </a:schemeClr>
+              </a:gs>
+              <a:gs pos="100000">
+                <a:srgbClr val="000000">
+                  <a:alpha val="46000"/>
+                </a:srgbClr>
+              </a:gs>
+            </a:gsLst>
+            <a:lin ang="1200000" scaled="0"/>
+          </a:gradFill>
+          <a:ln>
+            <a:noFill/>
+          </a:ln>
+        </p:spPr>
+        <p:style>
+          <a:lnRef idx="2">
+            <a:schemeClr val="accent1">
+              <a:shade val="50000"/>
+            </a:schemeClr>
+          </a:lnRef>
+          <a:fillRef idx="1">
+            <a:schemeClr val="accent1"/>
+          </a:fillRef>
+          <a:effectRef idx="0">
+            <a:schemeClr val="accent1"/>
+          </a:effectRef>
+          <a:fontRef idx="minor">
+            <a:schemeClr val="lt1"/>
+          </a:fontRef>
+        </p:style>
+        <p:txBody>
+          <a:bodyPr rtlCol="0" anchor="ctr"/>
+          <a:lstStyle/>
+          <a:p>
+            <a:pPr algn="ctr"/>
+            <a:endParaRPr lang="en-US"/>
+          </a:p>
+        </p:txBody>
+      </p:sp>
+      <p:pic>
+        <p:nvPicPr>
+          <p:cNvPr id="13" name="Picture 12" descr="A diagram of a number of stars&#10;&#10;Description automatically generated">
+            <a:extLst>
+              <a:ext uri="{FF2B5EF4-FFF2-40B4-BE49-F238E27FC236}">
+                <a16:creationId xmlns:a16="http://schemas.microsoft.com/office/drawing/2014/main" id="{0861257B-D118-BE46-6933-3A1C3AE8CB33}"/>
+              </a:ext>
+            </a:extLst>
+          </p:cNvPr>
+          <p:cNvPicPr>
+            <a:picLocks noChangeAspect="1"/>
+          </p:cNvPicPr>
+          <p:nvPr/>
+        </p:nvPicPr>
+        <p:blipFill>
+          <a:blip r:embed="rId3"/>
+          <a:stretch>
+            <a:fillRect/>
+          </a:stretch>
+        </p:blipFill>
+        <p:spPr>
+          <a:xfrm>
+            <a:off x="3660397" y="508339"/>
+            <a:ext cx="7635155" cy="5840894"/>
+          </a:xfrm>
+          <a:prstGeom prst="rect">
+            <a:avLst/>
+          </a:prstGeom>
+        </p:spPr>
+      </p:pic>
+      <p:sp>
+        <p:nvSpPr>
+          <p:cNvPr id="5" name="TextBox 4">
+            <a:extLst>
+              <a:ext uri="{FF2B5EF4-FFF2-40B4-BE49-F238E27FC236}">
+                <a16:creationId xmlns:a16="http://schemas.microsoft.com/office/drawing/2014/main" id="{65FC4491-0C2F-5B07-DD17-36B52939958D}"/>
+              </a:ext>
+            </a:extLst>
+          </p:cNvPr>
+          <p:cNvSpPr txBox="1"/>
+          <p:nvPr/>
+        </p:nvSpPr>
+        <p:spPr>
+          <a:xfrm>
+            <a:off x="536932" y="1715845"/>
+            <a:ext cx="2840019" cy="1815882"/>
+          </a:xfrm>
+          <a:prstGeom prst="rect">
+            <a:avLst/>
+          </a:prstGeom>
+          <a:noFill/>
+        </p:spPr>
+        <p:txBody>
+          <a:bodyPr wrap="square" rtlCol="0">
+            <a:spAutoFit/>
+          </a:bodyPr>
+          <a:lstStyle/>
+          <a:p>
+            <a:r>
+              <a:rPr lang="en-GB" sz="2800" dirty="0">
+                <a:solidFill>
+                  <a:schemeClr val="bg1"/>
+                </a:solidFill>
+              </a:rPr>
+              <a:t>PA quantifies:</a:t>
+            </a:r>
+          </a:p>
+          <a:p>
+            <a:endParaRPr lang="en-GB" sz="2800" dirty="0">
+              <a:solidFill>
+                <a:schemeClr val="bg1"/>
+              </a:solidFill>
+            </a:endParaRPr>
+          </a:p>
+          <a:p>
+            <a:r>
+              <a:rPr lang="en-GB" sz="2800" dirty="0">
+                <a:solidFill>
+                  <a:schemeClr val="bg1"/>
+                </a:solidFill>
+              </a:rPr>
+              <a:t>Psychoacoustic annoyance</a:t>
+            </a:r>
+          </a:p>
+        </p:txBody>
+      </p:sp>
+    </p:spTree>
+    <p:extLst>
+      <p:ext uri="{BB962C8B-B14F-4D97-AF65-F5344CB8AC3E}">
+        <p14:creationId xmlns:p14="http://schemas.microsoft.com/office/powerpoint/2010/main" val="2036023876"/>
+      </p:ext>
+    </p:extLst>
+  </p:cSld>
+  <p:clrMapOvr>
+    <a:masterClrMapping/>
+  </p:clrMapOvr>
+</p:sld>
+</file>
+
+<file path=ppt/slides/slide5.xml><?xml version="1.0" encoding="utf-8"?>
+<p:sld xmlns:a="http://schemas.openxmlformats.org/drawingml/2006/main" xmlns:r="http://schemas.openxmlformats.org/officeDocument/2006/relationships" xmlns:p="http://schemas.openxmlformats.org/presentationml/2006/main">
+  <p:cSld>
+    <p:bg>
+      <p:bgPr>
+        <a:solidFill>
+          <a:schemeClr val="bg1"/>
+        </a:solidFill>
+        <a:effectLst/>
+      </p:bgPr>
+    </p:bg>
+    <p:spTree>
+      <p:nvGrpSpPr>
+        <p:cNvPr id="1" name="">
+          <a:extLst>
+            <a:ext uri="{FF2B5EF4-FFF2-40B4-BE49-F238E27FC236}">
+              <a16:creationId xmlns:a16="http://schemas.microsoft.com/office/drawing/2014/main" id="{05B5025B-3D80-0CC4-2006-923A1BC2AE9D}"/>
+            </a:ext>
+          </a:extLst>
+        </p:cNvPr>
+        <p:cNvGrpSpPr/>
+        <p:nvPr/>
+      </p:nvGrpSpPr>
+      <p:grpSpPr>
+        <a:xfrm>
+          <a:off x="0" y="0"/>
+          <a:ext cx="0" cy="0"/>
+          <a:chOff x="0" y="0"/>
+          <a:chExt cx="0" cy="0"/>
+        </a:xfrm>
+      </p:grpSpPr>
+      <p:sp useBgFill="1">
+        <p:nvSpPr>
+          <p:cNvPr id="8" name="Rectangle 7">
+            <a:extLst>
+              <a:ext uri="{FF2B5EF4-FFF2-40B4-BE49-F238E27FC236}">
+                <a16:creationId xmlns:a16="http://schemas.microsoft.com/office/drawing/2014/main" id="{33D4F78A-F37B-B1DE-69AB-C270AC8F17AB}"/>
+              </a:ext>
+              <a:ext uri="{C183D7F6-B498-43B3-948B-1728B52AA6E4}">
+                <adec:decorative xmlns:adec="http://schemas.microsoft.com/office/drawing/2017/decorative" val="1"/>
+              </a:ext>
+            </a:extLst>
+          </p:cNvPr>
+          <p:cNvSpPr>
+            <a:spLocks noGrp="1" noRot="1" noChangeAspect="1" noMove="1" noResize="1" noEditPoints="1" noAdjustHandles="1" noChangeArrowheads="1" noChangeShapeType="1" noTextEdit="1"/>
+          </p:cNvSpPr>
+          <p:nvPr>
+            <p:extLst>
+              <p:ext uri="{386F3935-93C4-4BCD-93E2-E3B085C9AB24}">
+                <p16:designElem xmlns:p16="http://schemas.microsoft.com/office/powerpoint/2015/main" val="1"/>
+              </p:ext>
+            </p:extLst>
+          </p:nvPr>
+        </p:nvSpPr>
+        <p:spPr>
+          <a:xfrm>
+            <a:off x="0" y="0"/>
+            <a:ext cx="12192000" cy="6858000"/>
+          </a:xfrm>
+          <a:prstGeom prst="rect">
+            <a:avLst/>
+          </a:prstGeom>
+          <a:ln w="12700" cap="flat" cmpd="sng" algn="ctr">
+            <a:noFill/>
+            <a:prstDash val="solid"/>
+            <a:miter lim="800000"/>
+          </a:ln>
+          <a:effectLst/>
+          <a:extLst>
+            <a:ext uri="{91240B29-F687-4F45-9708-019B960494DF}">
+              <a14:hiddenLine xmlns:a14="http://schemas.microsoft.com/office/drawing/2010/main" w="12700" cap="flat" cmpd="sng" algn="ctr">
+                <a:solidFill>
+                  <a:schemeClr val="accent1">
+                    <a:shade val="50000"/>
+                  </a:schemeClr>
+                </a:solidFill>
+                <a:prstDash val="solid"/>
+                <a:miter lim="800000"/>
+              </a14:hiddenLine>
+            </a:ext>
+          </a:extLst>
+        </p:spPr>
+        <p:style>
+          <a:lnRef idx="2">
+            <a:schemeClr val="accent1">
+              <a:shade val="50000"/>
+            </a:schemeClr>
+          </a:lnRef>
+          <a:fillRef idx="1">
+            <a:schemeClr val="accent1"/>
+          </a:fillRef>
+          <a:effectRef idx="0">
+            <a:schemeClr val="accent1"/>
+          </a:effectRef>
+          <a:fontRef idx="minor">
+            <a:schemeClr val="lt1"/>
+          </a:fontRef>
+        </p:style>
+        <p:txBody>
+          <a:bodyPr rtlCol="0" anchor="ctr"/>
+          <a:lstStyle/>
+          <a:p>
+            <a:pPr algn="ctr"/>
+            <a:endParaRPr lang="en-US"/>
+          </a:p>
+        </p:txBody>
+      </p:sp>
+      <p:sp>
+        <p:nvSpPr>
+          <p:cNvPr id="10" name="Rectangle 9">
+            <a:extLst>
+              <a:ext uri="{FF2B5EF4-FFF2-40B4-BE49-F238E27FC236}">
+                <a16:creationId xmlns:a16="http://schemas.microsoft.com/office/drawing/2014/main" id="{035745CF-9619-AF40-1167-3856C048C0B8}"/>
+              </a:ext>
+              <a:ext uri="{C183D7F6-B498-43B3-948B-1728B52AA6E4}">
+                <adec:decorative xmlns:adec="http://schemas.microsoft.com/office/drawing/2017/decorative" val="1"/>
+              </a:ext>
+            </a:extLst>
+          </p:cNvPr>
+          <p:cNvSpPr>
+            <a:spLocks noGrp="1" noRot="1" noChangeAspect="1" noMove="1" noResize="1" noEditPoints="1" noAdjustHandles="1" noChangeArrowheads="1" noChangeShapeType="1" noTextEdit="1"/>
+          </p:cNvSpPr>
+          <p:nvPr>
+            <p:extLst>
+              <p:ext uri="{386F3935-93C4-4BCD-93E2-E3B085C9AB24}">
+                <p16:designElem xmlns:p16="http://schemas.microsoft.com/office/powerpoint/2015/main" val="1"/>
+              </p:ext>
+            </p:extLst>
+          </p:nvPr>
+        </p:nvSpPr>
+        <p:spPr>
+          <a:xfrm flipH="1">
+            <a:off x="-1" y="-1"/>
+            <a:ext cx="12191998" cy="1590742"/>
+          </a:xfrm>
+          <a:prstGeom prst="rect">
+            <a:avLst/>
+          </a:prstGeom>
+          <a:gradFill>
+            <a:gsLst>
+              <a:gs pos="0">
+                <a:srgbClr val="000000"/>
+              </a:gs>
+              <a:gs pos="100000">
+                <a:schemeClr val="accent1">
+                  <a:lumMod val="75000"/>
+                </a:schemeClr>
+              </a:gs>
+            </a:gsLst>
+            <a:lin ang="8400000" scaled="0"/>
+          </a:gradFill>
+          <a:ln>
+            <a:noFill/>
+          </a:ln>
+        </p:spPr>
+        <p:style>
+          <a:lnRef idx="2">
+            <a:schemeClr val="accent1">
+              <a:shade val="50000"/>
+            </a:schemeClr>
+          </a:lnRef>
+          <a:fillRef idx="1">
+            <a:schemeClr val="accent1"/>
+          </a:fillRef>
+          <a:effectRef idx="0">
+            <a:schemeClr val="accent1"/>
+          </a:effectRef>
+          <a:fontRef idx="minor">
+            <a:schemeClr val="lt1"/>
+          </a:fontRef>
+        </p:style>
+        <p:txBody>
+          <a:bodyPr rtlCol="0" anchor="ctr"/>
+          <a:lstStyle/>
+          <a:p>
+            <a:pPr algn="ctr"/>
+            <a:endParaRPr lang="en-US"/>
+          </a:p>
+        </p:txBody>
+      </p:sp>
+      <p:sp>
+        <p:nvSpPr>
+          <p:cNvPr id="12" name="Rectangle 11">
+            <a:extLst>
+              <a:ext uri="{FF2B5EF4-FFF2-40B4-BE49-F238E27FC236}">
+                <a16:creationId xmlns:a16="http://schemas.microsoft.com/office/drawing/2014/main" id="{4CE8B599-FC68-4E63-838A-8742AE80E50C}"/>
+              </a:ext>
+              <a:ext uri="{C183D7F6-B498-43B3-948B-1728B52AA6E4}">
+                <adec:decorative xmlns:adec="http://schemas.microsoft.com/office/drawing/2017/decorative" val="1"/>
+              </a:ext>
+            </a:extLst>
+          </p:cNvPr>
+          <p:cNvSpPr>
+            <a:spLocks noGrp="1" noRot="1" noChangeAspect="1" noMove="1" noResize="1" noEditPoints="1" noAdjustHandles="1" noChangeArrowheads="1" noChangeShapeType="1" noTextEdit="1"/>
+          </p:cNvSpPr>
+          <p:nvPr>
+            <p:extLst>
+              <p:ext uri="{386F3935-93C4-4BCD-93E2-E3B085C9AB24}">
+                <p16:designElem xmlns:p16="http://schemas.microsoft.com/office/powerpoint/2015/main" val="1"/>
+              </p:ext>
+            </p:extLst>
+          </p:nvPr>
+        </p:nvSpPr>
+        <p:spPr>
+          <a:xfrm rot="10800000" flipH="1">
+            <a:off x="-3" y="0"/>
+            <a:ext cx="8115306" cy="1590742"/>
+          </a:xfrm>
+          <a:prstGeom prst="rect">
+            <a:avLst/>
+          </a:prstGeom>
+          <a:gradFill>
+            <a:gsLst>
+              <a:gs pos="20000">
+                <a:schemeClr val="accent1">
+                  <a:alpha val="0"/>
+                </a:schemeClr>
+              </a:gs>
+              <a:gs pos="100000">
+                <a:schemeClr val="accent1">
+                  <a:lumMod val="50000"/>
+                  <a:alpha val="55000"/>
+                </a:schemeClr>
+              </a:gs>
+            </a:gsLst>
+            <a:lin ang="13800000" scaled="0"/>
+          </a:gradFill>
+          <a:ln>
+            <a:noFill/>
+          </a:ln>
+        </p:spPr>
+        <p:style>
+          <a:lnRef idx="2">
+            <a:schemeClr val="accent1">
+              <a:shade val="50000"/>
+            </a:schemeClr>
+          </a:lnRef>
+          <a:fillRef idx="1">
+            <a:schemeClr val="accent1"/>
+          </a:fillRef>
+          <a:effectRef idx="0">
+            <a:schemeClr val="accent1"/>
+          </a:effectRef>
+          <a:fontRef idx="minor">
+            <a:schemeClr val="lt1"/>
+          </a:fontRef>
+        </p:style>
+        <p:txBody>
+          <a:bodyPr rtlCol="0" anchor="ctr"/>
+          <a:lstStyle/>
+          <a:p>
+            <a:pPr algn="ctr"/>
+            <a:endParaRPr lang="en-US"/>
+          </a:p>
+        </p:txBody>
+      </p:sp>
+      <p:sp>
+        <p:nvSpPr>
+          <p:cNvPr id="14" name="Rectangle 13">
+            <a:extLst>
+              <a:ext uri="{FF2B5EF4-FFF2-40B4-BE49-F238E27FC236}">
+                <a16:creationId xmlns:a16="http://schemas.microsoft.com/office/drawing/2014/main" id="{0CF0590A-59B4-6573-5680-74BEE528BF36}"/>
+              </a:ext>
+              <a:ext uri="{C183D7F6-B498-43B3-948B-1728B52AA6E4}">
+                <adec:decorative xmlns:adec="http://schemas.microsoft.com/office/drawing/2017/decorative" val="1"/>
+              </a:ext>
+            </a:extLst>
+          </p:cNvPr>
+          <p:cNvSpPr>
+            <a:spLocks noGrp="1" noRot="1" noChangeAspect="1" noMove="1" noResize="1" noEditPoints="1" noAdjustHandles="1" noChangeArrowheads="1" noChangeShapeType="1" noTextEdit="1"/>
+          </p:cNvSpPr>
+          <p:nvPr>
+            <p:extLst>
+              <p:ext uri="{386F3935-93C4-4BCD-93E2-E3B085C9AB24}">
+                <p16:designElem xmlns:p16="http://schemas.microsoft.com/office/powerpoint/2015/main" val="1"/>
+              </p:ext>
+            </p:extLst>
+          </p:nvPr>
+        </p:nvSpPr>
+        <p:spPr>
+          <a:xfrm flipH="1">
+            <a:off x="8115299" y="-1"/>
+            <a:ext cx="4076698" cy="1590742"/>
+          </a:xfrm>
+          <a:prstGeom prst="rect">
+            <a:avLst/>
+          </a:prstGeom>
+          <a:gradFill>
+            <a:gsLst>
+              <a:gs pos="0">
+                <a:schemeClr val="accent1">
+                  <a:alpha val="66000"/>
+                </a:schemeClr>
+              </a:gs>
+              <a:gs pos="100000">
+                <a:srgbClr val="000000">
+                  <a:alpha val="30000"/>
+                </a:srgbClr>
+              </a:gs>
+            </a:gsLst>
+            <a:lin ang="13200000" scaled="0"/>
+          </a:gradFill>
+          <a:ln>
+            <a:noFill/>
+          </a:ln>
+        </p:spPr>
+        <p:style>
+          <a:lnRef idx="2">
+            <a:schemeClr val="accent1">
+              <a:shade val="50000"/>
+            </a:schemeClr>
+          </a:lnRef>
+          <a:fillRef idx="1">
+            <a:schemeClr val="accent1"/>
+          </a:fillRef>
+          <a:effectRef idx="0">
+            <a:schemeClr val="accent1"/>
+          </a:effectRef>
+          <a:fontRef idx="minor">
+            <a:schemeClr val="lt1"/>
+          </a:fontRef>
+        </p:style>
+        <p:txBody>
+          <a:bodyPr rtlCol="0" anchor="ctr"/>
+          <a:lstStyle/>
+          <a:p>
+            <a:pPr algn="ctr"/>
+            <a:endParaRPr lang="en-US"/>
+          </a:p>
+        </p:txBody>
+      </p:sp>
+      <p:sp>
+        <p:nvSpPr>
+          <p:cNvPr id="16" name="Rectangle 15">
+            <a:extLst>
+              <a:ext uri="{FF2B5EF4-FFF2-40B4-BE49-F238E27FC236}">
+                <a16:creationId xmlns:a16="http://schemas.microsoft.com/office/drawing/2014/main" id="{DB2AD4C7-3E3E-AA35-1F16-8BCB0365387B}"/>
+              </a:ext>
+              <a:ext uri="{C183D7F6-B498-43B3-948B-1728B52AA6E4}">
+                <adec:decorative xmlns:adec="http://schemas.microsoft.com/office/drawing/2017/decorative" val="1"/>
+              </a:ext>
+            </a:extLst>
+          </p:cNvPr>
+          <p:cNvSpPr>
+            <a:spLocks noGrp="1" noRot="1" noChangeAspect="1" noMove="1" noResize="1" noEditPoints="1" noAdjustHandles="1" noChangeArrowheads="1" noChangeShapeType="1" noTextEdit="1"/>
+          </p:cNvSpPr>
+          <p:nvPr>
+            <p:extLst>
+              <p:ext uri="{386F3935-93C4-4BCD-93E2-E3B085C9AB24}">
+                <p16:designElem xmlns:p16="http://schemas.microsoft.com/office/powerpoint/2015/main" val="1"/>
+              </p:ext>
+            </p:extLst>
+          </p:nvPr>
+        </p:nvSpPr>
+        <p:spPr>
+          <a:xfrm>
+            <a:off x="459350" y="-1"/>
+            <a:ext cx="11732646" cy="1597433"/>
+          </a:xfrm>
+          <a:prstGeom prst="rect">
+            <a:avLst/>
+          </a:prstGeom>
+          <a:gradFill>
+            <a:gsLst>
+              <a:gs pos="50000">
+                <a:srgbClr val="000000">
+                  <a:alpha val="0"/>
+                </a:srgbClr>
+              </a:gs>
+              <a:gs pos="99000">
+                <a:schemeClr val="accent1">
+                  <a:lumMod val="50000"/>
+                  <a:alpha val="52000"/>
+                </a:schemeClr>
+              </a:gs>
+            </a:gsLst>
+            <a:lin ang="16800000" scaled="0"/>
+          </a:gradFill>
+          <a:ln>
+            <a:noFill/>
+          </a:ln>
+        </p:spPr>
+        <p:style>
+          <a:lnRef idx="2">
+            <a:schemeClr val="accent1">
+              <a:shade val="50000"/>
+            </a:schemeClr>
+          </a:lnRef>
+          <a:fillRef idx="1">
+            <a:schemeClr val="accent1"/>
+          </a:fillRef>
+          <a:effectRef idx="0">
+            <a:schemeClr val="accent1"/>
+          </a:effectRef>
+          <a:fontRef idx="minor">
+            <a:schemeClr val="lt1"/>
+          </a:fontRef>
+        </p:style>
+        <p:txBody>
+          <a:bodyPr rtlCol="0" anchor="ctr"/>
+          <a:lstStyle/>
+          <a:p>
+            <a:pPr algn="ctr"/>
+            <a:endParaRPr lang="en-US"/>
+          </a:p>
+        </p:txBody>
+      </p:sp>
+      <p:sp>
+        <p:nvSpPr>
+          <p:cNvPr id="2" name="Title 1">
+            <a:extLst>
+              <a:ext uri="{FF2B5EF4-FFF2-40B4-BE49-F238E27FC236}">
+                <a16:creationId xmlns:a16="http://schemas.microsoft.com/office/drawing/2014/main" id="{09DF2F80-4B94-3290-D89A-4F89C94F2D60}"/>
+              </a:ext>
+            </a:extLst>
+          </p:cNvPr>
+          <p:cNvSpPr>
+            <a:spLocks noGrp="1"/>
+          </p:cNvSpPr>
+          <p:nvPr>
+            <p:ph type="title"/>
+          </p:nvPr>
+        </p:nvSpPr>
+        <p:spPr>
+          <a:xfrm>
+            <a:off x="762887" y="302965"/>
+            <a:ext cx="9895951" cy="1033669"/>
+          </a:xfrm>
+        </p:spPr>
+        <p:txBody>
+          <a:bodyPr>
+            <a:normAutofit/>
+          </a:bodyPr>
+          <a:lstStyle/>
+          <a:p>
+            <a:r>
+              <a:rPr lang="en-GB" sz="4000" dirty="0">
+                <a:solidFill>
+                  <a:srgbClr val="FFFFFF"/>
+                </a:solidFill>
+              </a:rPr>
+              <a:t>Noise reduction geometry</a:t>
+            </a:r>
+          </a:p>
+        </p:txBody>
+      </p:sp>
+      <p:pic>
+        <p:nvPicPr>
+          <p:cNvPr id="26" name="Picture 25">
+            <a:extLst>
+              <a:ext uri="{FF2B5EF4-FFF2-40B4-BE49-F238E27FC236}">
+                <a16:creationId xmlns:a16="http://schemas.microsoft.com/office/drawing/2014/main" id="{AFBB8285-6432-1BCC-8C52-B726981C3B40}"/>
+              </a:ext>
+            </a:extLst>
+          </p:cNvPr>
+          <p:cNvPicPr>
+            <a:picLocks noChangeAspect="1"/>
+          </p:cNvPicPr>
+          <p:nvPr/>
+        </p:nvPicPr>
+        <p:blipFill>
+          <a:blip r:embed="rId3"/>
+          <a:stretch>
+            <a:fillRect/>
+          </a:stretch>
+        </p:blipFill>
+        <p:spPr>
+          <a:xfrm>
+            <a:off x="6869561" y="1867577"/>
+            <a:ext cx="5026054" cy="4033394"/>
+          </a:xfrm>
+          <a:prstGeom prst="rect">
+            <a:avLst/>
+          </a:prstGeom>
+        </p:spPr>
+      </p:pic>
+      <p:sp>
+        <p:nvSpPr>
+          <p:cNvPr id="32" name="TextBox 31">
+            <a:extLst>
+              <a:ext uri="{FF2B5EF4-FFF2-40B4-BE49-F238E27FC236}">
+                <a16:creationId xmlns:a16="http://schemas.microsoft.com/office/drawing/2014/main" id="{84200314-9225-28E0-2806-649E768B771D}"/>
+              </a:ext>
+            </a:extLst>
+          </p:cNvPr>
+          <p:cNvSpPr txBox="1"/>
+          <p:nvPr/>
+        </p:nvSpPr>
+        <p:spPr>
+          <a:xfrm>
+            <a:off x="9291674" y="3903711"/>
+            <a:ext cx="2603941" cy="369332"/>
+          </a:xfrm>
+          <a:prstGeom prst="rect">
+            <a:avLst/>
+          </a:prstGeom>
+          <a:noFill/>
+        </p:spPr>
+        <p:txBody>
+          <a:bodyPr wrap="square">
+            <a:spAutoFit/>
+          </a:bodyPr>
+          <a:lstStyle/>
+          <a:p>
+            <a:r>
+              <a:rPr lang="en-GB" dirty="0"/>
+              <a:t>A. D. Wiedemann et al.</a:t>
+            </a:r>
+          </a:p>
+        </p:txBody>
+      </p:sp>
+      <p:sp>
+        <p:nvSpPr>
+          <p:cNvPr id="3" name="Content Placeholder 2">
+            <a:extLst>
+              <a:ext uri="{FF2B5EF4-FFF2-40B4-BE49-F238E27FC236}">
+                <a16:creationId xmlns:a16="http://schemas.microsoft.com/office/drawing/2014/main" id="{540CA7AA-5659-48B1-C827-BCB210B1C7E8}"/>
+              </a:ext>
+            </a:extLst>
+          </p:cNvPr>
+          <p:cNvSpPr txBox="1">
+            <a:spLocks noGrp="1"/>
+          </p:cNvSpPr>
+          <p:nvPr>
+            <p:ph idx="1"/>
+          </p:nvPr>
+        </p:nvSpPr>
+        <p:spPr>
+          <a:xfrm>
+            <a:off x="459349" y="1639599"/>
+            <a:ext cx="5457289" cy="2831817"/>
           </a:xfrm>
           <a:prstGeom prst="rect">
             <a:avLst/>
@@ -7165,31 +10688,31 @@
           <a:p>
             <a:pPr lvl="1"/>
             <a:r>
-              <a:rPr lang="en-GB" sz="2800" dirty="0"/>
+              <a:rPr lang="en-GB" dirty="0"/>
+              <a:t>Tip geometry</a:t>
+            </a:r>
+          </a:p>
+          <a:p>
+            <a:pPr lvl="1"/>
+            <a:r>
+              <a:rPr lang="en-GB" dirty="0"/>
               <a:t>Blade sweep</a:t>
             </a:r>
           </a:p>
           <a:p>
             <a:pPr lvl="1"/>
             <a:r>
-              <a:rPr lang="en-GB" sz="2800" dirty="0"/>
-              <a:t>Tip geometry</a:t>
+              <a:rPr lang="en-GB" dirty="0"/>
+              <a:t>Varying blade spacing</a:t>
             </a:r>
           </a:p>
           <a:p>
             <a:pPr lvl="1"/>
             <a:r>
-              <a:rPr lang="en-GB" sz="2800" dirty="0"/>
-              <a:t>Varying blade spacing</a:t>
-            </a:r>
-          </a:p>
-          <a:p>
-            <a:pPr lvl="1"/>
-            <a:r>
-              <a:rPr lang="en-GB" sz="2800" dirty="0"/>
+              <a:rPr lang="en-GB" dirty="0"/>
               <a:t>Trailing edge serrations</a:t>
             </a:r>
-            <a:endParaRPr lang="en-GB" dirty="0"/>
+            <a:endParaRPr lang="en-GB" sz="2000" dirty="0"/>
           </a:p>
           <a:p>
             <a:endParaRPr lang="en-GB" sz="2000" dirty="0"/>
@@ -7210,10 +10733,10 @@
         </p:nvGrpSpPr>
         <p:grpSpPr>
           <a:xfrm>
-            <a:off x="6548174" y="4259862"/>
-            <a:ext cx="5457290" cy="2487338"/>
+            <a:off x="549271" y="4215265"/>
+            <a:ext cx="5471416" cy="2487338"/>
             <a:chOff x="459350" y="4615094"/>
-            <a:chExt cx="4445431" cy="1948368"/>
+            <a:chExt cx="4456938" cy="1948368"/>
           </a:xfrm>
         </p:grpSpPr>
         <p:pic>
@@ -7231,7 +10754,7 @@
             <p:nvPr/>
           </p:nvPicPr>
           <p:blipFill>
-            <a:blip r:embed="rId3"/>
+            <a:blip r:embed="rId4"/>
             <a:srcRect b="49009"/>
             <a:stretch/>
           </p:blipFill>
@@ -7259,7 +10782,7 @@
           </p:nvSpPr>
           <p:spPr>
             <a:xfrm>
-              <a:off x="528178" y="5419923"/>
+              <a:off x="1811531" y="5637216"/>
               <a:ext cx="3104757" cy="369332"/>
             </a:xfrm>
             <a:prstGeom prst="rect">
@@ -7281,530 +10804,6 @@
           </p:txBody>
         </p:sp>
       </p:grpSp>
-    </p:spTree>
-    <p:extLst>
-      <p:ext uri="{BB962C8B-B14F-4D97-AF65-F5344CB8AC3E}">
-        <p14:creationId xmlns:p14="http://schemas.microsoft.com/office/powerpoint/2010/main" val="2108568212"/>
-      </p:ext>
-    </p:extLst>
-  </p:cSld>
-  <p:clrMapOvr>
-    <a:masterClrMapping/>
-  </p:clrMapOvr>
-</p:sld>
-</file>
-
-<file path=ppt/slides/slide4.xml><?xml version="1.0" encoding="utf-8"?>
-<p:sld xmlns:a="http://schemas.openxmlformats.org/drawingml/2006/main" xmlns:r="http://schemas.openxmlformats.org/officeDocument/2006/relationships" xmlns:p="http://schemas.openxmlformats.org/presentationml/2006/main">
-  <p:cSld>
-    <p:bg>
-      <p:bgPr>
-        <a:solidFill>
-          <a:schemeClr val="bg1"/>
-        </a:solidFill>
-        <a:effectLst/>
-      </p:bgPr>
-    </p:bg>
-    <p:spTree>
-      <p:nvGrpSpPr>
-        <p:cNvPr id="1" name="">
-          <a:extLst>
-            <a:ext uri="{FF2B5EF4-FFF2-40B4-BE49-F238E27FC236}">
-              <a16:creationId xmlns:a16="http://schemas.microsoft.com/office/drawing/2014/main" id="{05B5025B-3D80-0CC4-2006-923A1BC2AE9D}"/>
-            </a:ext>
-          </a:extLst>
-        </p:cNvPr>
-        <p:cNvGrpSpPr/>
-        <p:nvPr/>
-      </p:nvGrpSpPr>
-      <p:grpSpPr>
-        <a:xfrm>
-          <a:off x="0" y="0"/>
-          <a:ext cx="0" cy="0"/>
-          <a:chOff x="0" y="0"/>
-          <a:chExt cx="0" cy="0"/>
-        </a:xfrm>
-      </p:grpSpPr>
-      <p:sp useBgFill="1">
-        <p:nvSpPr>
-          <p:cNvPr id="8" name="Rectangle 7">
-            <a:extLst>
-              <a:ext uri="{FF2B5EF4-FFF2-40B4-BE49-F238E27FC236}">
-                <a16:creationId xmlns:a16="http://schemas.microsoft.com/office/drawing/2014/main" id="{33D4F78A-F37B-B1DE-69AB-C270AC8F17AB}"/>
-              </a:ext>
-              <a:ext uri="{C183D7F6-B498-43B3-948B-1728B52AA6E4}">
-                <adec:decorative xmlns:adec="http://schemas.microsoft.com/office/drawing/2017/decorative" val="1"/>
-              </a:ext>
-            </a:extLst>
-          </p:cNvPr>
-          <p:cNvSpPr>
-            <a:spLocks noGrp="1" noRot="1" noChangeAspect="1" noMove="1" noResize="1" noEditPoints="1" noAdjustHandles="1" noChangeArrowheads="1" noChangeShapeType="1" noTextEdit="1"/>
-          </p:cNvSpPr>
-          <p:nvPr>
-            <p:extLst>
-              <p:ext uri="{386F3935-93C4-4BCD-93E2-E3B085C9AB24}">
-                <p16:designElem xmlns:p16="http://schemas.microsoft.com/office/powerpoint/2015/main" val="1"/>
-              </p:ext>
-            </p:extLst>
-          </p:nvPr>
-        </p:nvSpPr>
-        <p:spPr>
-          <a:xfrm>
-            <a:off x="0" y="0"/>
-            <a:ext cx="12192000" cy="6858000"/>
-          </a:xfrm>
-          <a:prstGeom prst="rect">
-            <a:avLst/>
-          </a:prstGeom>
-          <a:ln w="12700" cap="flat" cmpd="sng" algn="ctr">
-            <a:noFill/>
-            <a:prstDash val="solid"/>
-            <a:miter lim="800000"/>
-          </a:ln>
-          <a:effectLst/>
-          <a:extLst>
-            <a:ext uri="{91240B29-F687-4F45-9708-019B960494DF}">
-              <a14:hiddenLine xmlns:a14="http://schemas.microsoft.com/office/drawing/2010/main" w="12700" cap="flat" cmpd="sng" algn="ctr">
-                <a:solidFill>
-                  <a:schemeClr val="accent1">
-                    <a:shade val="50000"/>
-                  </a:schemeClr>
-                </a:solidFill>
-                <a:prstDash val="solid"/>
-                <a:miter lim="800000"/>
-              </a14:hiddenLine>
-            </a:ext>
-          </a:extLst>
-        </p:spPr>
-        <p:style>
-          <a:lnRef idx="2">
-            <a:schemeClr val="accent1">
-              <a:shade val="50000"/>
-            </a:schemeClr>
-          </a:lnRef>
-          <a:fillRef idx="1">
-            <a:schemeClr val="accent1"/>
-          </a:fillRef>
-          <a:effectRef idx="0">
-            <a:schemeClr val="accent1"/>
-          </a:effectRef>
-          <a:fontRef idx="minor">
-            <a:schemeClr val="lt1"/>
-          </a:fontRef>
-        </p:style>
-        <p:txBody>
-          <a:bodyPr rtlCol="0" anchor="ctr"/>
-          <a:lstStyle/>
-          <a:p>
-            <a:pPr algn="ctr"/>
-            <a:endParaRPr lang="en-US"/>
-          </a:p>
-        </p:txBody>
-      </p:sp>
-      <p:sp>
-        <p:nvSpPr>
-          <p:cNvPr id="10" name="Rectangle 9">
-            <a:extLst>
-              <a:ext uri="{FF2B5EF4-FFF2-40B4-BE49-F238E27FC236}">
-                <a16:creationId xmlns:a16="http://schemas.microsoft.com/office/drawing/2014/main" id="{035745CF-9619-AF40-1167-3856C048C0B8}"/>
-              </a:ext>
-              <a:ext uri="{C183D7F6-B498-43B3-948B-1728B52AA6E4}">
-                <adec:decorative xmlns:adec="http://schemas.microsoft.com/office/drawing/2017/decorative" val="1"/>
-              </a:ext>
-            </a:extLst>
-          </p:cNvPr>
-          <p:cNvSpPr>
-            <a:spLocks noGrp="1" noRot="1" noChangeAspect="1" noMove="1" noResize="1" noEditPoints="1" noAdjustHandles="1" noChangeArrowheads="1" noChangeShapeType="1" noTextEdit="1"/>
-          </p:cNvSpPr>
-          <p:nvPr>
-            <p:extLst>
-              <p:ext uri="{386F3935-93C4-4BCD-93E2-E3B085C9AB24}">
-                <p16:designElem xmlns:p16="http://schemas.microsoft.com/office/powerpoint/2015/main" val="1"/>
-              </p:ext>
-            </p:extLst>
-          </p:nvPr>
-        </p:nvSpPr>
-        <p:spPr>
-          <a:xfrm flipH="1">
-            <a:off x="-1" y="-1"/>
-            <a:ext cx="12191998" cy="1590742"/>
-          </a:xfrm>
-          <a:prstGeom prst="rect">
-            <a:avLst/>
-          </a:prstGeom>
-          <a:gradFill>
-            <a:gsLst>
-              <a:gs pos="0">
-                <a:srgbClr val="000000"/>
-              </a:gs>
-              <a:gs pos="100000">
-                <a:schemeClr val="accent1">
-                  <a:lumMod val="75000"/>
-                </a:schemeClr>
-              </a:gs>
-            </a:gsLst>
-            <a:lin ang="8400000" scaled="0"/>
-          </a:gradFill>
-          <a:ln>
-            <a:noFill/>
-          </a:ln>
-        </p:spPr>
-        <p:style>
-          <a:lnRef idx="2">
-            <a:schemeClr val="accent1">
-              <a:shade val="50000"/>
-            </a:schemeClr>
-          </a:lnRef>
-          <a:fillRef idx="1">
-            <a:schemeClr val="accent1"/>
-          </a:fillRef>
-          <a:effectRef idx="0">
-            <a:schemeClr val="accent1"/>
-          </a:effectRef>
-          <a:fontRef idx="minor">
-            <a:schemeClr val="lt1"/>
-          </a:fontRef>
-        </p:style>
-        <p:txBody>
-          <a:bodyPr rtlCol="0" anchor="ctr"/>
-          <a:lstStyle/>
-          <a:p>
-            <a:pPr algn="ctr"/>
-            <a:endParaRPr lang="en-US"/>
-          </a:p>
-        </p:txBody>
-      </p:sp>
-      <p:sp>
-        <p:nvSpPr>
-          <p:cNvPr id="12" name="Rectangle 11">
-            <a:extLst>
-              <a:ext uri="{FF2B5EF4-FFF2-40B4-BE49-F238E27FC236}">
-                <a16:creationId xmlns:a16="http://schemas.microsoft.com/office/drawing/2014/main" id="{4CE8B599-FC68-4E63-838A-8742AE80E50C}"/>
-              </a:ext>
-              <a:ext uri="{C183D7F6-B498-43B3-948B-1728B52AA6E4}">
-                <adec:decorative xmlns:adec="http://schemas.microsoft.com/office/drawing/2017/decorative" val="1"/>
-              </a:ext>
-            </a:extLst>
-          </p:cNvPr>
-          <p:cNvSpPr>
-            <a:spLocks noGrp="1" noRot="1" noChangeAspect="1" noMove="1" noResize="1" noEditPoints="1" noAdjustHandles="1" noChangeArrowheads="1" noChangeShapeType="1" noTextEdit="1"/>
-          </p:cNvSpPr>
-          <p:nvPr>
-            <p:extLst>
-              <p:ext uri="{386F3935-93C4-4BCD-93E2-E3B085C9AB24}">
-                <p16:designElem xmlns:p16="http://schemas.microsoft.com/office/powerpoint/2015/main" val="1"/>
-              </p:ext>
-            </p:extLst>
-          </p:nvPr>
-        </p:nvSpPr>
-        <p:spPr>
-          <a:xfrm rot="10800000" flipH="1">
-            <a:off x="-3" y="0"/>
-            <a:ext cx="8115306" cy="1590742"/>
-          </a:xfrm>
-          <a:prstGeom prst="rect">
-            <a:avLst/>
-          </a:prstGeom>
-          <a:gradFill>
-            <a:gsLst>
-              <a:gs pos="20000">
-                <a:schemeClr val="accent1">
-                  <a:alpha val="0"/>
-                </a:schemeClr>
-              </a:gs>
-              <a:gs pos="100000">
-                <a:schemeClr val="accent1">
-                  <a:lumMod val="50000"/>
-                  <a:alpha val="55000"/>
-                </a:schemeClr>
-              </a:gs>
-            </a:gsLst>
-            <a:lin ang="13800000" scaled="0"/>
-          </a:gradFill>
-          <a:ln>
-            <a:noFill/>
-          </a:ln>
-        </p:spPr>
-        <p:style>
-          <a:lnRef idx="2">
-            <a:schemeClr val="accent1">
-              <a:shade val="50000"/>
-            </a:schemeClr>
-          </a:lnRef>
-          <a:fillRef idx="1">
-            <a:schemeClr val="accent1"/>
-          </a:fillRef>
-          <a:effectRef idx="0">
-            <a:schemeClr val="accent1"/>
-          </a:effectRef>
-          <a:fontRef idx="minor">
-            <a:schemeClr val="lt1"/>
-          </a:fontRef>
-        </p:style>
-        <p:txBody>
-          <a:bodyPr rtlCol="0" anchor="ctr"/>
-          <a:lstStyle/>
-          <a:p>
-            <a:pPr algn="ctr"/>
-            <a:endParaRPr lang="en-US"/>
-          </a:p>
-        </p:txBody>
-      </p:sp>
-      <p:sp>
-        <p:nvSpPr>
-          <p:cNvPr id="14" name="Rectangle 13">
-            <a:extLst>
-              <a:ext uri="{FF2B5EF4-FFF2-40B4-BE49-F238E27FC236}">
-                <a16:creationId xmlns:a16="http://schemas.microsoft.com/office/drawing/2014/main" id="{0CF0590A-59B4-6573-5680-74BEE528BF36}"/>
-              </a:ext>
-              <a:ext uri="{C183D7F6-B498-43B3-948B-1728B52AA6E4}">
-                <adec:decorative xmlns:adec="http://schemas.microsoft.com/office/drawing/2017/decorative" val="1"/>
-              </a:ext>
-            </a:extLst>
-          </p:cNvPr>
-          <p:cNvSpPr>
-            <a:spLocks noGrp="1" noRot="1" noChangeAspect="1" noMove="1" noResize="1" noEditPoints="1" noAdjustHandles="1" noChangeArrowheads="1" noChangeShapeType="1" noTextEdit="1"/>
-          </p:cNvSpPr>
-          <p:nvPr>
-            <p:extLst>
-              <p:ext uri="{386F3935-93C4-4BCD-93E2-E3B085C9AB24}">
-                <p16:designElem xmlns:p16="http://schemas.microsoft.com/office/powerpoint/2015/main" val="1"/>
-              </p:ext>
-            </p:extLst>
-          </p:nvPr>
-        </p:nvSpPr>
-        <p:spPr>
-          <a:xfrm flipH="1">
-            <a:off x="8115299" y="-1"/>
-            <a:ext cx="4076698" cy="1590742"/>
-          </a:xfrm>
-          <a:prstGeom prst="rect">
-            <a:avLst/>
-          </a:prstGeom>
-          <a:gradFill>
-            <a:gsLst>
-              <a:gs pos="0">
-                <a:schemeClr val="accent1">
-                  <a:alpha val="66000"/>
-                </a:schemeClr>
-              </a:gs>
-              <a:gs pos="100000">
-                <a:srgbClr val="000000">
-                  <a:alpha val="30000"/>
-                </a:srgbClr>
-              </a:gs>
-            </a:gsLst>
-            <a:lin ang="13200000" scaled="0"/>
-          </a:gradFill>
-          <a:ln>
-            <a:noFill/>
-          </a:ln>
-        </p:spPr>
-        <p:style>
-          <a:lnRef idx="2">
-            <a:schemeClr val="accent1">
-              <a:shade val="50000"/>
-            </a:schemeClr>
-          </a:lnRef>
-          <a:fillRef idx="1">
-            <a:schemeClr val="accent1"/>
-          </a:fillRef>
-          <a:effectRef idx="0">
-            <a:schemeClr val="accent1"/>
-          </a:effectRef>
-          <a:fontRef idx="minor">
-            <a:schemeClr val="lt1"/>
-          </a:fontRef>
-        </p:style>
-        <p:txBody>
-          <a:bodyPr rtlCol="0" anchor="ctr"/>
-          <a:lstStyle/>
-          <a:p>
-            <a:pPr algn="ctr"/>
-            <a:endParaRPr lang="en-US"/>
-          </a:p>
-        </p:txBody>
-      </p:sp>
-      <p:sp>
-        <p:nvSpPr>
-          <p:cNvPr id="16" name="Rectangle 15">
-            <a:extLst>
-              <a:ext uri="{FF2B5EF4-FFF2-40B4-BE49-F238E27FC236}">
-                <a16:creationId xmlns:a16="http://schemas.microsoft.com/office/drawing/2014/main" id="{DB2AD4C7-3E3E-AA35-1F16-8BCB0365387B}"/>
-              </a:ext>
-              <a:ext uri="{C183D7F6-B498-43B3-948B-1728B52AA6E4}">
-                <adec:decorative xmlns:adec="http://schemas.microsoft.com/office/drawing/2017/decorative" val="1"/>
-              </a:ext>
-            </a:extLst>
-          </p:cNvPr>
-          <p:cNvSpPr>
-            <a:spLocks noGrp="1" noRot="1" noChangeAspect="1" noMove="1" noResize="1" noEditPoints="1" noAdjustHandles="1" noChangeArrowheads="1" noChangeShapeType="1" noTextEdit="1"/>
-          </p:cNvSpPr>
-          <p:nvPr>
-            <p:extLst>
-              <p:ext uri="{386F3935-93C4-4BCD-93E2-E3B085C9AB24}">
-                <p16:designElem xmlns:p16="http://schemas.microsoft.com/office/powerpoint/2015/main" val="1"/>
-              </p:ext>
-            </p:extLst>
-          </p:nvPr>
-        </p:nvSpPr>
-        <p:spPr>
-          <a:xfrm>
-            <a:off x="459350" y="-1"/>
-            <a:ext cx="11732646" cy="1597433"/>
-          </a:xfrm>
-          <a:prstGeom prst="rect">
-            <a:avLst/>
-          </a:prstGeom>
-          <a:gradFill>
-            <a:gsLst>
-              <a:gs pos="50000">
-                <a:srgbClr val="000000">
-                  <a:alpha val="0"/>
-                </a:srgbClr>
-              </a:gs>
-              <a:gs pos="99000">
-                <a:schemeClr val="accent1">
-                  <a:lumMod val="50000"/>
-                  <a:alpha val="52000"/>
-                </a:schemeClr>
-              </a:gs>
-            </a:gsLst>
-            <a:lin ang="16800000" scaled="0"/>
-          </a:gradFill>
-          <a:ln>
-            <a:noFill/>
-          </a:ln>
-        </p:spPr>
-        <p:style>
-          <a:lnRef idx="2">
-            <a:schemeClr val="accent1">
-              <a:shade val="50000"/>
-            </a:schemeClr>
-          </a:lnRef>
-          <a:fillRef idx="1">
-            <a:schemeClr val="accent1"/>
-          </a:fillRef>
-          <a:effectRef idx="0">
-            <a:schemeClr val="accent1"/>
-          </a:effectRef>
-          <a:fontRef idx="minor">
-            <a:schemeClr val="lt1"/>
-          </a:fontRef>
-        </p:style>
-        <p:txBody>
-          <a:bodyPr rtlCol="0" anchor="ctr"/>
-          <a:lstStyle/>
-          <a:p>
-            <a:pPr algn="ctr"/>
-            <a:endParaRPr lang="en-US"/>
-          </a:p>
-        </p:txBody>
-      </p:sp>
-      <p:sp>
-        <p:nvSpPr>
-          <p:cNvPr id="2" name="Title 1">
-            <a:extLst>
-              <a:ext uri="{FF2B5EF4-FFF2-40B4-BE49-F238E27FC236}">
-                <a16:creationId xmlns:a16="http://schemas.microsoft.com/office/drawing/2014/main" id="{09DF2F80-4B94-3290-D89A-4F89C94F2D60}"/>
-              </a:ext>
-            </a:extLst>
-          </p:cNvPr>
-          <p:cNvSpPr>
-            <a:spLocks noGrp="1"/>
-          </p:cNvSpPr>
-          <p:nvPr>
-            <p:ph type="title"/>
-          </p:nvPr>
-        </p:nvSpPr>
-        <p:spPr>
-          <a:xfrm>
-            <a:off x="392205" y="285873"/>
-            <a:ext cx="9895951" cy="1033669"/>
-          </a:xfrm>
-        </p:spPr>
-        <p:txBody>
-          <a:bodyPr>
-            <a:normAutofit/>
-          </a:bodyPr>
-          <a:lstStyle/>
-          <a:p>
-            <a:r>
-              <a:rPr lang="en-GB" sz="4000" dirty="0">
-                <a:solidFill>
-                  <a:srgbClr val="FFFFFF"/>
-                </a:solidFill>
-              </a:rPr>
-              <a:t>Previous aero acoustic research</a:t>
-            </a:r>
-          </a:p>
-        </p:txBody>
-      </p:sp>
-      <p:pic>
-        <p:nvPicPr>
-          <p:cNvPr id="26" name="Picture 25">
-            <a:extLst>
-              <a:ext uri="{FF2B5EF4-FFF2-40B4-BE49-F238E27FC236}">
-                <a16:creationId xmlns:a16="http://schemas.microsoft.com/office/drawing/2014/main" id="{AFBB8285-6432-1BCC-8C52-B726981C3B40}"/>
-              </a:ext>
-            </a:extLst>
-          </p:cNvPr>
-          <p:cNvPicPr>
-            <a:picLocks noChangeAspect="1"/>
-          </p:cNvPicPr>
-          <p:nvPr/>
-        </p:nvPicPr>
-        <p:blipFill>
-          <a:blip r:embed="rId3"/>
-          <a:stretch>
-            <a:fillRect/>
-          </a:stretch>
-        </p:blipFill>
-        <p:spPr>
-          <a:xfrm>
-            <a:off x="6748308" y="2674954"/>
-            <a:ext cx="5026054" cy="4033394"/>
-          </a:xfrm>
-          <a:prstGeom prst="rect">
-            <a:avLst/>
-          </a:prstGeom>
-        </p:spPr>
-      </p:pic>
-      <p:sp>
-        <p:nvSpPr>
-          <p:cNvPr id="32" name="TextBox 31">
-            <a:extLst>
-              <a:ext uri="{FF2B5EF4-FFF2-40B4-BE49-F238E27FC236}">
-                <a16:creationId xmlns:a16="http://schemas.microsoft.com/office/drawing/2014/main" id="{84200314-9225-28E0-2806-649E768B771D}"/>
-              </a:ext>
-            </a:extLst>
-          </p:cNvPr>
-          <p:cNvSpPr txBox="1"/>
-          <p:nvPr/>
-        </p:nvSpPr>
-        <p:spPr>
-          <a:xfrm>
-            <a:off x="7959365" y="3673718"/>
-            <a:ext cx="2603941" cy="369332"/>
-          </a:xfrm>
-          <a:prstGeom prst="rect">
-            <a:avLst/>
-          </a:prstGeom>
-          <a:noFill/>
-        </p:spPr>
-        <p:txBody>
-          <a:bodyPr wrap="square">
-            <a:spAutoFit/>
-          </a:bodyPr>
-          <a:lstStyle/>
-          <a:p>
-            <a:r>
-              <a:rPr lang="en-GB" dirty="0"/>
-              <a:t>A. D. Wiedemann et al.</a:t>
-            </a:r>
-          </a:p>
-        </p:txBody>
-      </p:sp>
       <p:grpSp>
         <p:nvGrpSpPr>
           <p:cNvPr id="5" name="Group 4">
@@ -7819,10 +10818,10 @@
         </p:nvGrpSpPr>
         <p:grpSpPr>
           <a:xfrm>
-            <a:off x="392205" y="3487974"/>
-            <a:ext cx="11197878" cy="3001521"/>
-            <a:chOff x="392205" y="3487974"/>
-            <a:chExt cx="11197878" cy="3001521"/>
+            <a:off x="396501" y="3571433"/>
+            <a:ext cx="11398993" cy="3149089"/>
+            <a:chOff x="341513" y="3528752"/>
+            <a:chExt cx="11398993" cy="3149089"/>
           </a:xfrm>
         </p:grpSpPr>
         <p:grpSp>
@@ -7839,10 +10838,10 @@
           </p:nvGrpSpPr>
           <p:grpSpPr>
             <a:xfrm>
-              <a:off x="392205" y="3487974"/>
-              <a:ext cx="11197878" cy="3001521"/>
-              <a:chOff x="420859" y="3570606"/>
-              <a:chExt cx="11197878" cy="3001521"/>
+              <a:off x="341513" y="3528752"/>
+              <a:ext cx="11398993" cy="3149089"/>
+              <a:chOff x="370167" y="3611384"/>
+              <a:chExt cx="11398993" cy="3149089"/>
             </a:xfrm>
           </p:grpSpPr>
           <p:pic>
@@ -7860,14 +10859,14 @@
               <p:nvPr/>
             </p:nvPicPr>
             <p:blipFill>
-              <a:blip r:embed="rId4"/>
+              <a:blip r:embed="rId5"/>
               <a:stretch>
                 <a:fillRect/>
               </a:stretch>
             </p:blipFill>
             <p:spPr>
               <a:xfrm>
-                <a:off x="420859" y="4590779"/>
+                <a:off x="370167" y="4933196"/>
                 <a:ext cx="5861841" cy="1827277"/>
               </a:xfrm>
               <a:prstGeom prst="rect">
@@ -7889,9 +10888,9 @@
             </p:nvGrpSpPr>
             <p:grpSpPr>
               <a:xfrm>
-                <a:off x="6282700" y="3570606"/>
+                <a:off x="6433123" y="3611384"/>
                 <a:ext cx="5336037" cy="3001521"/>
-                <a:chOff x="6282700" y="3570606"/>
+                <a:chOff x="6433123" y="3611384"/>
                 <a:chExt cx="5336037" cy="3001521"/>
               </a:xfrm>
             </p:grpSpPr>
@@ -7910,14 +10909,14 @@
                 <p:nvPr/>
               </p:nvPicPr>
               <p:blipFill>
-                <a:blip r:embed="rId5"/>
+                <a:blip r:embed="rId6"/>
                 <a:stretch>
                   <a:fillRect/>
                 </a:stretch>
               </p:blipFill>
               <p:spPr>
                 <a:xfrm>
-                  <a:off x="6282700" y="3570606"/>
+                  <a:off x="6433123" y="3611384"/>
                   <a:ext cx="5336037" cy="3001521"/>
                 </a:xfrm>
                 <a:prstGeom prst="rect">
@@ -7998,31 +10997,6 @@
           </p:txBody>
         </p:sp>
       </p:grpSp>
-      <p:sp>
-        <p:nvSpPr>
-          <p:cNvPr id="15" name="Content Placeholder 14">
-            <a:extLst>
-              <a:ext uri="{FF2B5EF4-FFF2-40B4-BE49-F238E27FC236}">
-                <a16:creationId xmlns:a16="http://schemas.microsoft.com/office/drawing/2014/main" id="{F47C10FF-806A-41E4-FB8E-27340CEB6749}"/>
-              </a:ext>
-            </a:extLst>
-          </p:cNvPr>
-          <p:cNvSpPr>
-            <a:spLocks noGrp="1"/>
-          </p:cNvSpPr>
-          <p:nvPr>
-            <p:ph idx="1"/>
-          </p:nvPr>
-        </p:nvSpPr>
-        <p:spPr/>
-        <p:txBody>
-          <a:bodyPr/>
-          <a:lstStyle/>
-          <a:p>
-            <a:endParaRPr lang="en-GB" dirty="0"/>
-          </a:p>
-        </p:txBody>
-      </p:sp>
     </p:spTree>
     <p:extLst>
       <p:ext uri="{BB962C8B-B14F-4D97-AF65-F5344CB8AC3E}">
@@ -8062,51 +11036,6 @@
                                     <p:set>
                                       <p:cBhvr>
                                         <p:cTn id="6" dur="1" fill="hold">
-                                          <p:stCondLst>
-                                            <p:cond delay="0"/>
-                                          </p:stCondLst>
-                                        </p:cTn>
-                                        <p:tgtEl>
-                                          <p:spTgt spid="26"/>
-                                        </p:tgtEl>
-                                        <p:attrNameLst>
-                                          <p:attrName>style.visibility</p:attrName>
-                                        </p:attrNameLst>
-                                      </p:cBhvr>
-                                      <p:to>
-                                        <p:strVal val="visible"/>
-                                      </p:to>
-                                    </p:set>
-                                  </p:childTnLst>
-                                </p:cTn>
-                              </p:par>
-                            </p:childTnLst>
-                          </p:cTn>
-                        </p:par>
-                      </p:childTnLst>
-                    </p:cTn>
-                  </p:par>
-                  <p:par>
-                    <p:cTn id="7" fill="hold">
-                      <p:stCondLst>
-                        <p:cond delay="indefinite"/>
-                      </p:stCondLst>
-                      <p:childTnLst>
-                        <p:par>
-                          <p:cTn id="8" fill="hold">
-                            <p:stCondLst>
-                              <p:cond delay="0"/>
-                            </p:stCondLst>
-                            <p:childTnLst>
-                              <p:par>
-                                <p:cTn id="9" presetID="1" presetClass="entr" presetSubtype="0" fill="hold" nodeType="clickEffect">
-                                  <p:stCondLst>
-                                    <p:cond delay="0"/>
-                                  </p:stCondLst>
-                                  <p:childTnLst>
-                                    <p:set>
-                                      <p:cBhvr>
-                                        <p:cTn id="10" dur="1" fill="hold">
                                           <p:stCondLst>
                                             <p:cond delay="0"/>
                                           </p:stCondLst>
@@ -8156,122 +11085,6 @@
 </p:sld>
 </file>
 
-<file path=ppt/slides/slide5.xml><?xml version="1.0" encoding="utf-8"?>
-<p:sld xmlns:a="http://schemas.openxmlformats.org/drawingml/2006/main" xmlns:r="http://schemas.openxmlformats.org/officeDocument/2006/relationships" xmlns:p="http://schemas.openxmlformats.org/presentationml/2006/main">
-  <p:cSld>
-    <p:spTree>
-      <p:nvGrpSpPr>
-        <p:cNvPr id="1" name="">
-          <a:extLst>
-            <a:ext uri="{FF2B5EF4-FFF2-40B4-BE49-F238E27FC236}">
-              <a16:creationId xmlns:a16="http://schemas.microsoft.com/office/drawing/2014/main" id="{E1373EFC-50AC-AC9B-D8C3-83D34FA273A5}"/>
-            </a:ext>
-          </a:extLst>
-        </p:cNvPr>
-        <p:cNvGrpSpPr/>
-        <p:nvPr/>
-      </p:nvGrpSpPr>
-      <p:grpSpPr>
-        <a:xfrm>
-          <a:off x="0" y="0"/>
-          <a:ext cx="0" cy="0"/>
-          <a:chOff x="0" y="0"/>
-          <a:chExt cx="0" cy="0"/>
-        </a:xfrm>
-      </p:grpSpPr>
-      <p:sp>
-        <p:nvSpPr>
-          <p:cNvPr id="2" name="Title 1">
-            <a:extLst>
-              <a:ext uri="{FF2B5EF4-FFF2-40B4-BE49-F238E27FC236}">
-                <a16:creationId xmlns:a16="http://schemas.microsoft.com/office/drawing/2014/main" id="{ACA28203-AC4A-1D11-486D-ED27D84B5E12}"/>
-              </a:ext>
-            </a:extLst>
-          </p:cNvPr>
-          <p:cNvSpPr>
-            <a:spLocks noGrp="1"/>
-          </p:cNvSpPr>
-          <p:nvPr>
-            <p:ph type="title"/>
-          </p:nvPr>
-        </p:nvSpPr>
-        <p:spPr/>
-        <p:txBody>
-          <a:bodyPr/>
-          <a:lstStyle/>
-          <a:p>
-            <a:endParaRPr lang="en-GB"/>
-          </a:p>
-        </p:txBody>
-      </p:sp>
-      <p:sp>
-        <p:nvSpPr>
-          <p:cNvPr id="3" name="Content Placeholder 2">
-            <a:extLst>
-              <a:ext uri="{FF2B5EF4-FFF2-40B4-BE49-F238E27FC236}">
-                <a16:creationId xmlns:a16="http://schemas.microsoft.com/office/drawing/2014/main" id="{89994F24-311F-CF99-1DA6-6FFFBD37DD20}"/>
-              </a:ext>
-            </a:extLst>
-          </p:cNvPr>
-          <p:cNvSpPr>
-            <a:spLocks noGrp="1"/>
-          </p:cNvSpPr>
-          <p:nvPr>
-            <p:ph idx="1"/>
-          </p:nvPr>
-        </p:nvSpPr>
-        <p:spPr/>
-        <p:txBody>
-          <a:bodyPr/>
-          <a:lstStyle/>
-          <a:p>
-            <a:endParaRPr lang="en-GB"/>
-          </a:p>
-        </p:txBody>
-      </p:sp>
-      <p:pic>
-        <p:nvPicPr>
-          <p:cNvPr id="13" name="Picture 12">
-            <a:extLst>
-              <a:ext uri="{FF2B5EF4-FFF2-40B4-BE49-F238E27FC236}">
-                <a16:creationId xmlns:a16="http://schemas.microsoft.com/office/drawing/2014/main" id="{0861257B-D118-BE46-6933-3A1C3AE8CB33}"/>
-              </a:ext>
-            </a:extLst>
-          </p:cNvPr>
-          <p:cNvPicPr>
-            <a:picLocks noChangeAspect="1"/>
-          </p:cNvPicPr>
-          <p:nvPr/>
-        </p:nvPicPr>
-        <p:blipFill>
-          <a:blip r:embed="rId2"/>
-          <a:stretch>
-            <a:fillRect/>
-          </a:stretch>
-        </p:blipFill>
-        <p:spPr>
-          <a:xfrm>
-            <a:off x="1617518" y="250103"/>
-            <a:ext cx="8320216" cy="6357793"/>
-          </a:xfrm>
-          <a:prstGeom prst="rect">
-            <a:avLst/>
-          </a:prstGeom>
-        </p:spPr>
-      </p:pic>
-    </p:spTree>
-    <p:extLst>
-      <p:ext uri="{BB962C8B-B14F-4D97-AF65-F5344CB8AC3E}">
-        <p14:creationId xmlns:p14="http://schemas.microsoft.com/office/powerpoint/2010/main" val="2036023876"/>
-      </p:ext>
-    </p:extLst>
-  </p:cSld>
-  <p:clrMapOvr>
-    <a:masterClrMapping/>
-  </p:clrMapOvr>
-</p:sld>
-</file>
-
 <file path=ppt/slides/slide6.xml><?xml version="1.0" encoding="utf-8"?>
 <p:sld xmlns:a="http://schemas.openxmlformats.org/drawingml/2006/main" xmlns:r="http://schemas.openxmlformats.org/officeDocument/2006/relationships" xmlns:p="http://schemas.openxmlformats.org/presentationml/2006/main">
   <p:cSld>
@@ -8678,7 +11491,7 @@
           <p:cNvPr id="2" name="Title 1">
             <a:extLst>
               <a:ext uri="{FF2B5EF4-FFF2-40B4-BE49-F238E27FC236}">
-                <a16:creationId xmlns:a16="http://schemas.microsoft.com/office/drawing/2014/main" id="{4C6D6236-4AA6-6861-46AD-140A40AA449A}"/>
+                <a16:creationId xmlns:a16="http://schemas.microsoft.com/office/drawing/2014/main" id="{8684C99E-1C51-E619-7C98-62CACEBDF7D0}"/>
               </a:ext>
             </a:extLst>
           </p:cNvPr>
@@ -8707,6 +11520,526 @@
                   <a:srgbClr val="FFFFFF"/>
                 </a:solidFill>
               </a:rPr>
+              <a:t>Hypothesis</a:t>
+            </a:r>
+          </a:p>
+        </p:txBody>
+      </p:sp>
+      <p:sp>
+        <p:nvSpPr>
+          <p:cNvPr id="3" name="Content Placeholder 2">
+            <a:extLst>
+              <a:ext uri="{FF2B5EF4-FFF2-40B4-BE49-F238E27FC236}">
+                <a16:creationId xmlns:a16="http://schemas.microsoft.com/office/drawing/2014/main" id="{8B29E6C3-E2AE-1A2C-4E04-2B8C7295EEC0}"/>
+              </a:ext>
+            </a:extLst>
+          </p:cNvPr>
+          <p:cNvSpPr>
+            <a:spLocks noGrp="1"/>
+          </p:cNvSpPr>
+          <p:nvPr>
+            <p:ph idx="1"/>
+          </p:nvPr>
+        </p:nvSpPr>
+        <p:spPr>
+          <a:xfrm>
+            <a:off x="643626" y="1786678"/>
+            <a:ext cx="10343766" cy="4071025"/>
+          </a:xfrm>
+        </p:spPr>
+        <p:txBody>
+          <a:bodyPr anchor="ctr">
+            <a:normAutofit/>
+          </a:bodyPr>
+          <a:lstStyle/>
+          <a:p>
+            <a:r>
+              <a:rPr lang="en-GB" dirty="0"/>
+              <a:t>Reducing tip loading will decrease tonal and broadband noise</a:t>
+            </a:r>
+          </a:p>
+          <a:p>
+            <a:endParaRPr lang="en-GB" dirty="0"/>
+          </a:p>
+          <a:p>
+            <a:r>
+              <a:rPr lang="en-GB" dirty="0"/>
+              <a:t>Closed loop toroidal propellers predicted to have</a:t>
+            </a:r>
+          </a:p>
+          <a:p>
+            <a:pPr lvl="1"/>
+            <a:r>
+              <a:rPr lang="en-GB" sz="2800" dirty="0"/>
+              <a:t>reduced tonal components due to sweep</a:t>
+            </a:r>
+          </a:p>
+          <a:p>
+            <a:pPr lvl="1"/>
+            <a:r>
+              <a:rPr lang="en-GB" sz="2800" dirty="0"/>
+              <a:t>reduced broadband due to low tip loading.</a:t>
+            </a:r>
+          </a:p>
+          <a:p>
+            <a:endParaRPr lang="en-GB" dirty="0"/>
+          </a:p>
+          <a:p>
+            <a:r>
+              <a:rPr lang="en-GB" dirty="0"/>
+              <a:t>Trailing edge serrations predicted to reduce blade wake interaction and hence the broadband noise.</a:t>
+            </a:r>
+          </a:p>
+        </p:txBody>
+      </p:sp>
+    </p:spTree>
+    <p:extLst>
+      <p:ext uri="{BB962C8B-B14F-4D97-AF65-F5344CB8AC3E}">
+        <p14:creationId xmlns:p14="http://schemas.microsoft.com/office/powerpoint/2010/main" val="1814590356"/>
+      </p:ext>
+    </p:extLst>
+  </p:cSld>
+  <p:clrMapOvr>
+    <a:masterClrMapping/>
+  </p:clrMapOvr>
+</p:sld>
+</file>
+
+<file path=ppt/slides/slide7.xml><?xml version="1.0" encoding="utf-8"?>
+<p:sld xmlns:a="http://schemas.openxmlformats.org/drawingml/2006/main" xmlns:r="http://schemas.openxmlformats.org/officeDocument/2006/relationships" xmlns:p="http://schemas.openxmlformats.org/presentationml/2006/main">
+  <p:cSld>
+    <p:bg>
+      <p:bgPr>
+        <a:solidFill>
+          <a:schemeClr val="bg1"/>
+        </a:solidFill>
+        <a:effectLst/>
+      </p:bgPr>
+    </p:bg>
+    <p:spTree>
+      <p:nvGrpSpPr>
+        <p:cNvPr id="1" name=""/>
+        <p:cNvGrpSpPr/>
+        <p:nvPr/>
+      </p:nvGrpSpPr>
+      <p:grpSpPr>
+        <a:xfrm>
+          <a:off x="0" y="0"/>
+          <a:ext cx="0" cy="0"/>
+          <a:chOff x="0" y="0"/>
+          <a:chExt cx="0" cy="0"/>
+        </a:xfrm>
+      </p:grpSpPr>
+      <p:sp useBgFill="1">
+        <p:nvSpPr>
+          <p:cNvPr id="8" name="Rectangle 7">
+            <a:extLst>
+              <a:ext uri="{FF2B5EF4-FFF2-40B4-BE49-F238E27FC236}">
+                <a16:creationId xmlns:a16="http://schemas.microsoft.com/office/drawing/2014/main" id="{1B15ED52-F352-441B-82BF-E0EA34836D08}"/>
+              </a:ext>
+              <a:ext uri="{C183D7F6-B498-43B3-948B-1728B52AA6E4}">
+                <adec:decorative xmlns:adec="http://schemas.microsoft.com/office/drawing/2017/decorative" val="1"/>
+              </a:ext>
+            </a:extLst>
+          </p:cNvPr>
+          <p:cNvSpPr>
+            <a:spLocks noGrp="1" noRot="1" noChangeAspect="1" noMove="1" noResize="1" noEditPoints="1" noAdjustHandles="1" noChangeArrowheads="1" noChangeShapeType="1" noTextEdit="1"/>
+          </p:cNvSpPr>
+          <p:nvPr>
+            <p:extLst>
+              <p:ext uri="{386F3935-93C4-4BCD-93E2-E3B085C9AB24}">
+                <p16:designElem xmlns:p16="http://schemas.microsoft.com/office/powerpoint/2015/main" val="1"/>
+              </p:ext>
+            </p:extLst>
+          </p:nvPr>
+        </p:nvSpPr>
+        <p:spPr>
+          <a:xfrm>
+            <a:off x="0" y="0"/>
+            <a:ext cx="12192000" cy="6858000"/>
+          </a:xfrm>
+          <a:prstGeom prst="rect">
+            <a:avLst/>
+          </a:prstGeom>
+          <a:ln w="12700" cap="flat" cmpd="sng" algn="ctr">
+            <a:noFill/>
+            <a:prstDash val="solid"/>
+            <a:miter lim="800000"/>
+          </a:ln>
+          <a:effectLst/>
+          <a:extLst>
+            <a:ext uri="{91240B29-F687-4F45-9708-019B960494DF}">
+              <a14:hiddenLine xmlns:a14="http://schemas.microsoft.com/office/drawing/2010/main" w="12700" cap="flat" cmpd="sng" algn="ctr">
+                <a:solidFill>
+                  <a:schemeClr val="accent1">
+                    <a:shade val="50000"/>
+                  </a:schemeClr>
+                </a:solidFill>
+                <a:prstDash val="solid"/>
+                <a:miter lim="800000"/>
+              </a14:hiddenLine>
+            </a:ext>
+          </a:extLst>
+        </p:spPr>
+        <p:style>
+          <a:lnRef idx="2">
+            <a:schemeClr val="accent1">
+              <a:shade val="50000"/>
+            </a:schemeClr>
+          </a:lnRef>
+          <a:fillRef idx="1">
+            <a:schemeClr val="accent1"/>
+          </a:fillRef>
+          <a:effectRef idx="0">
+            <a:schemeClr val="accent1"/>
+          </a:effectRef>
+          <a:fontRef idx="minor">
+            <a:schemeClr val="lt1"/>
+          </a:fontRef>
+        </p:style>
+        <p:txBody>
+          <a:bodyPr rtlCol="0" anchor="ctr"/>
+          <a:lstStyle/>
+          <a:p>
+            <a:pPr algn="ctr"/>
+            <a:endParaRPr lang="en-US"/>
+          </a:p>
+        </p:txBody>
+      </p:sp>
+      <p:sp>
+        <p:nvSpPr>
+          <p:cNvPr id="10" name="Rectangle 9">
+            <a:extLst>
+              <a:ext uri="{FF2B5EF4-FFF2-40B4-BE49-F238E27FC236}">
+                <a16:creationId xmlns:a16="http://schemas.microsoft.com/office/drawing/2014/main" id="{3B2E3793-BFE6-45A2-9B7B-E18844431C99}"/>
+              </a:ext>
+              <a:ext uri="{C183D7F6-B498-43B3-948B-1728B52AA6E4}">
+                <adec:decorative xmlns:adec="http://schemas.microsoft.com/office/drawing/2017/decorative" val="1"/>
+              </a:ext>
+            </a:extLst>
+          </p:cNvPr>
+          <p:cNvSpPr>
+            <a:spLocks noGrp="1" noRot="1" noChangeAspect="1" noMove="1" noResize="1" noEditPoints="1" noAdjustHandles="1" noChangeArrowheads="1" noChangeShapeType="1" noTextEdit="1"/>
+          </p:cNvSpPr>
+          <p:nvPr>
+            <p:extLst>
+              <p:ext uri="{386F3935-93C4-4BCD-93E2-E3B085C9AB24}">
+                <p16:designElem xmlns:p16="http://schemas.microsoft.com/office/powerpoint/2015/main" val="1"/>
+              </p:ext>
+            </p:extLst>
+          </p:nvPr>
+        </p:nvSpPr>
+        <p:spPr>
+          <a:xfrm flipH="1">
+            <a:off x="-1" y="-1"/>
+            <a:ext cx="12191998" cy="1590742"/>
+          </a:xfrm>
+          <a:prstGeom prst="rect">
+            <a:avLst/>
+          </a:prstGeom>
+          <a:gradFill>
+            <a:gsLst>
+              <a:gs pos="0">
+                <a:srgbClr val="000000"/>
+              </a:gs>
+              <a:gs pos="100000">
+                <a:schemeClr val="accent1">
+                  <a:lumMod val="75000"/>
+                </a:schemeClr>
+              </a:gs>
+            </a:gsLst>
+            <a:lin ang="8400000" scaled="0"/>
+          </a:gradFill>
+          <a:ln>
+            <a:noFill/>
+          </a:ln>
+        </p:spPr>
+        <p:style>
+          <a:lnRef idx="2">
+            <a:schemeClr val="accent1">
+              <a:shade val="50000"/>
+            </a:schemeClr>
+          </a:lnRef>
+          <a:fillRef idx="1">
+            <a:schemeClr val="accent1"/>
+          </a:fillRef>
+          <a:effectRef idx="0">
+            <a:schemeClr val="accent1"/>
+          </a:effectRef>
+          <a:fontRef idx="minor">
+            <a:schemeClr val="lt1"/>
+          </a:fontRef>
+        </p:style>
+        <p:txBody>
+          <a:bodyPr rtlCol="0" anchor="ctr"/>
+          <a:lstStyle/>
+          <a:p>
+            <a:pPr algn="ctr"/>
+            <a:endParaRPr lang="en-US"/>
+          </a:p>
+        </p:txBody>
+      </p:sp>
+      <p:sp>
+        <p:nvSpPr>
+          <p:cNvPr id="12" name="Rectangle 11">
+            <a:extLst>
+              <a:ext uri="{FF2B5EF4-FFF2-40B4-BE49-F238E27FC236}">
+                <a16:creationId xmlns:a16="http://schemas.microsoft.com/office/drawing/2014/main" id="{BC4C4868-CB8F-4AF9-9CDB-8108F2C19B67}"/>
+              </a:ext>
+              <a:ext uri="{C183D7F6-B498-43B3-948B-1728B52AA6E4}">
+                <adec:decorative xmlns:adec="http://schemas.microsoft.com/office/drawing/2017/decorative" val="1"/>
+              </a:ext>
+            </a:extLst>
+          </p:cNvPr>
+          <p:cNvSpPr>
+            <a:spLocks noGrp="1" noRot="1" noChangeAspect="1" noMove="1" noResize="1" noEditPoints="1" noAdjustHandles="1" noChangeArrowheads="1" noChangeShapeType="1" noTextEdit="1"/>
+          </p:cNvSpPr>
+          <p:nvPr>
+            <p:extLst>
+              <p:ext uri="{386F3935-93C4-4BCD-93E2-E3B085C9AB24}">
+                <p16:designElem xmlns:p16="http://schemas.microsoft.com/office/powerpoint/2015/main" val="1"/>
+              </p:ext>
+            </p:extLst>
+          </p:nvPr>
+        </p:nvSpPr>
+        <p:spPr>
+          <a:xfrm rot="10800000" flipH="1">
+            <a:off x="-3" y="0"/>
+            <a:ext cx="8115306" cy="1590742"/>
+          </a:xfrm>
+          <a:prstGeom prst="rect">
+            <a:avLst/>
+          </a:prstGeom>
+          <a:gradFill>
+            <a:gsLst>
+              <a:gs pos="20000">
+                <a:schemeClr val="accent1">
+                  <a:alpha val="0"/>
+                </a:schemeClr>
+              </a:gs>
+              <a:gs pos="100000">
+                <a:schemeClr val="accent1">
+                  <a:lumMod val="50000"/>
+                  <a:alpha val="55000"/>
+                </a:schemeClr>
+              </a:gs>
+            </a:gsLst>
+            <a:lin ang="13800000" scaled="0"/>
+          </a:gradFill>
+          <a:ln>
+            <a:noFill/>
+          </a:ln>
+        </p:spPr>
+        <p:style>
+          <a:lnRef idx="2">
+            <a:schemeClr val="accent1">
+              <a:shade val="50000"/>
+            </a:schemeClr>
+          </a:lnRef>
+          <a:fillRef idx="1">
+            <a:schemeClr val="accent1"/>
+          </a:fillRef>
+          <a:effectRef idx="0">
+            <a:schemeClr val="accent1"/>
+          </a:effectRef>
+          <a:fontRef idx="minor">
+            <a:schemeClr val="lt1"/>
+          </a:fontRef>
+        </p:style>
+        <p:txBody>
+          <a:bodyPr rtlCol="0" anchor="ctr"/>
+          <a:lstStyle/>
+          <a:p>
+            <a:pPr algn="ctr"/>
+            <a:endParaRPr lang="en-US"/>
+          </a:p>
+        </p:txBody>
+      </p:sp>
+      <p:sp>
+        <p:nvSpPr>
+          <p:cNvPr id="14" name="Rectangle 13">
+            <a:extLst>
+              <a:ext uri="{FF2B5EF4-FFF2-40B4-BE49-F238E27FC236}">
+                <a16:creationId xmlns:a16="http://schemas.microsoft.com/office/drawing/2014/main" id="{375E0459-6403-40CD-989D-56A4407CA12E}"/>
+              </a:ext>
+              <a:ext uri="{C183D7F6-B498-43B3-948B-1728B52AA6E4}">
+                <adec:decorative xmlns:adec="http://schemas.microsoft.com/office/drawing/2017/decorative" val="1"/>
+              </a:ext>
+            </a:extLst>
+          </p:cNvPr>
+          <p:cNvSpPr>
+            <a:spLocks noGrp="1" noRot="1" noChangeAspect="1" noMove="1" noResize="1" noEditPoints="1" noAdjustHandles="1" noChangeArrowheads="1" noChangeShapeType="1" noTextEdit="1"/>
+          </p:cNvSpPr>
+          <p:nvPr>
+            <p:extLst>
+              <p:ext uri="{386F3935-93C4-4BCD-93E2-E3B085C9AB24}">
+                <p16:designElem xmlns:p16="http://schemas.microsoft.com/office/powerpoint/2015/main" val="1"/>
+              </p:ext>
+            </p:extLst>
+          </p:nvPr>
+        </p:nvSpPr>
+        <p:spPr>
+          <a:xfrm flipH="1">
+            <a:off x="8115299" y="-1"/>
+            <a:ext cx="4076698" cy="1590742"/>
+          </a:xfrm>
+          <a:prstGeom prst="rect">
+            <a:avLst/>
+          </a:prstGeom>
+          <a:gradFill>
+            <a:gsLst>
+              <a:gs pos="0">
+                <a:schemeClr val="accent1">
+                  <a:alpha val="66000"/>
+                </a:schemeClr>
+              </a:gs>
+              <a:gs pos="100000">
+                <a:srgbClr val="000000">
+                  <a:alpha val="30000"/>
+                </a:srgbClr>
+              </a:gs>
+            </a:gsLst>
+            <a:lin ang="13200000" scaled="0"/>
+          </a:gradFill>
+          <a:ln>
+            <a:noFill/>
+          </a:ln>
+        </p:spPr>
+        <p:style>
+          <a:lnRef idx="2">
+            <a:schemeClr val="accent1">
+              <a:shade val="50000"/>
+            </a:schemeClr>
+          </a:lnRef>
+          <a:fillRef idx="1">
+            <a:schemeClr val="accent1"/>
+          </a:fillRef>
+          <a:effectRef idx="0">
+            <a:schemeClr val="accent1"/>
+          </a:effectRef>
+          <a:fontRef idx="minor">
+            <a:schemeClr val="lt1"/>
+          </a:fontRef>
+        </p:style>
+        <p:txBody>
+          <a:bodyPr rtlCol="0" anchor="ctr"/>
+          <a:lstStyle/>
+          <a:p>
+            <a:pPr algn="ctr"/>
+            <a:endParaRPr lang="en-US"/>
+          </a:p>
+        </p:txBody>
+      </p:sp>
+      <p:sp>
+        <p:nvSpPr>
+          <p:cNvPr id="16" name="Rectangle 15">
+            <a:extLst>
+              <a:ext uri="{FF2B5EF4-FFF2-40B4-BE49-F238E27FC236}">
+                <a16:creationId xmlns:a16="http://schemas.microsoft.com/office/drawing/2014/main" id="{53E5B1A8-3AC9-4BD1-9BBC-78CA94F2D1BA}"/>
+              </a:ext>
+              <a:ext uri="{C183D7F6-B498-43B3-948B-1728B52AA6E4}">
+                <adec:decorative xmlns:adec="http://schemas.microsoft.com/office/drawing/2017/decorative" val="1"/>
+              </a:ext>
+            </a:extLst>
+          </p:cNvPr>
+          <p:cNvSpPr>
+            <a:spLocks noGrp="1" noRot="1" noChangeAspect="1" noMove="1" noResize="1" noEditPoints="1" noAdjustHandles="1" noChangeArrowheads="1" noChangeShapeType="1" noTextEdit="1"/>
+          </p:cNvSpPr>
+          <p:nvPr>
+            <p:extLst>
+              <p:ext uri="{386F3935-93C4-4BCD-93E2-E3B085C9AB24}">
+                <p16:designElem xmlns:p16="http://schemas.microsoft.com/office/powerpoint/2015/main" val="1"/>
+              </p:ext>
+            </p:extLst>
+          </p:nvPr>
+        </p:nvSpPr>
+        <p:spPr>
+          <a:xfrm>
+            <a:off x="459350" y="-1"/>
+            <a:ext cx="11732646" cy="1597433"/>
+          </a:xfrm>
+          <a:prstGeom prst="rect">
+            <a:avLst/>
+          </a:prstGeom>
+          <a:gradFill>
+            <a:gsLst>
+              <a:gs pos="50000">
+                <a:srgbClr val="000000">
+                  <a:alpha val="0"/>
+                </a:srgbClr>
+              </a:gs>
+              <a:gs pos="99000">
+                <a:schemeClr val="accent1">
+                  <a:lumMod val="50000"/>
+                  <a:alpha val="52000"/>
+                </a:schemeClr>
+              </a:gs>
+            </a:gsLst>
+            <a:lin ang="16800000" scaled="0"/>
+          </a:gradFill>
+          <a:ln>
+            <a:noFill/>
+          </a:ln>
+        </p:spPr>
+        <p:style>
+          <a:lnRef idx="2">
+            <a:schemeClr val="accent1">
+              <a:shade val="50000"/>
+            </a:schemeClr>
+          </a:lnRef>
+          <a:fillRef idx="1">
+            <a:schemeClr val="accent1"/>
+          </a:fillRef>
+          <a:effectRef idx="0">
+            <a:schemeClr val="accent1"/>
+          </a:effectRef>
+          <a:fontRef idx="minor">
+            <a:schemeClr val="lt1"/>
+          </a:fontRef>
+        </p:style>
+        <p:txBody>
+          <a:bodyPr rtlCol="0" anchor="ctr"/>
+          <a:lstStyle/>
+          <a:p>
+            <a:pPr algn="ctr"/>
+            <a:endParaRPr lang="en-US"/>
+          </a:p>
+        </p:txBody>
+      </p:sp>
+      <p:sp>
+        <p:nvSpPr>
+          <p:cNvPr id="2" name="Title 1">
+            <a:extLst>
+              <a:ext uri="{FF2B5EF4-FFF2-40B4-BE49-F238E27FC236}">
+                <a16:creationId xmlns:a16="http://schemas.microsoft.com/office/drawing/2014/main" id="{4C6D6236-4AA6-6861-46AD-140A40AA449A}"/>
+              </a:ext>
+            </a:extLst>
+          </p:cNvPr>
+          <p:cNvSpPr>
+            <a:spLocks noGrp="1"/>
+          </p:cNvSpPr>
+          <p:nvPr>
+            <p:ph type="title"/>
+          </p:nvPr>
+        </p:nvSpPr>
+        <p:spPr>
+          <a:xfrm>
+            <a:off x="599247" y="420949"/>
+            <a:ext cx="9895951" cy="1033669"/>
+          </a:xfrm>
+        </p:spPr>
+        <p:txBody>
+          <a:bodyPr>
+            <a:normAutofit/>
+          </a:bodyPr>
+          <a:lstStyle/>
+          <a:p>
+            <a:r>
+              <a:rPr lang="en-GB" sz="4000" dirty="0">
+                <a:solidFill>
+                  <a:srgbClr val="FFFFFF"/>
+                </a:solidFill>
+              </a:rPr>
               <a:t>Objectives</a:t>
             </a:r>
           </a:p>
@@ -8731,7 +12064,7 @@
         <p:spPr>
           <a:xfrm>
             <a:off x="599247" y="2358855"/>
-            <a:ext cx="10398046" cy="3724339"/>
+            <a:ext cx="10398046" cy="4343502"/>
           </a:xfrm>
         </p:spPr>
         <p:txBody>
@@ -8742,7 +12075,7 @@
           <a:p>
             <a:r>
               <a:rPr lang="en-GB" dirty="0"/>
-              <a:t>Design and build an experimental setups to measure</a:t>
+              <a:t>Design and build experimental setups to measure</a:t>
             </a:r>
             <a:r>
               <a:rPr lang="en-GB" b="1" dirty="0"/>
@@ -8779,12 +12112,15 @@
             </a:r>
           </a:p>
           <a:p>
+            <a:pPr marL="0" indent="0">
+              <a:buNone/>
+            </a:pPr>
             <a:endParaRPr lang="en-GB" dirty="0"/>
           </a:p>
           <a:p>
             <a:r>
               <a:rPr lang="en-GB" dirty="0"/>
-              <a:t>Analyse and compare psychoacoustic performance</a:t>
+              <a:t>Analyse and compare performance of the different designs</a:t>
             </a:r>
           </a:p>
           <a:p>
@@ -8805,7 +12141,616 @@
 </p:sld>
 </file>
 
-<file path=ppt/slides/slide7.xml><?xml version="1.0" encoding="utf-8"?>
+<file path=ppt/slides/slide8.xml><?xml version="1.0" encoding="utf-8"?>
+<p:sld xmlns:a="http://schemas.openxmlformats.org/drawingml/2006/main" xmlns:r="http://schemas.openxmlformats.org/officeDocument/2006/relationships" xmlns:p="http://schemas.openxmlformats.org/presentationml/2006/main">
+  <p:cSld>
+    <p:bg>
+      <p:bgPr>
+        <a:solidFill>
+          <a:schemeClr val="bg1"/>
+        </a:solidFill>
+        <a:effectLst/>
+      </p:bgPr>
+    </p:bg>
+    <p:spTree>
+      <p:nvGrpSpPr>
+        <p:cNvPr id="1" name="">
+          <a:extLst>
+            <a:ext uri="{FF2B5EF4-FFF2-40B4-BE49-F238E27FC236}">
+              <a16:creationId xmlns:a16="http://schemas.microsoft.com/office/drawing/2014/main" id="{8AFAAA1C-6749-297B-735C-924DA2CE162C}"/>
+            </a:ext>
+          </a:extLst>
+        </p:cNvPr>
+        <p:cNvGrpSpPr/>
+        <p:nvPr/>
+      </p:nvGrpSpPr>
+      <p:grpSpPr>
+        <a:xfrm>
+          <a:off x="0" y="0"/>
+          <a:ext cx="0" cy="0"/>
+          <a:chOff x="0" y="0"/>
+          <a:chExt cx="0" cy="0"/>
+        </a:xfrm>
+      </p:grpSpPr>
+      <p:sp useBgFill="1">
+        <p:nvSpPr>
+          <p:cNvPr id="8" name="Rectangle 7">
+            <a:extLst>
+              <a:ext uri="{FF2B5EF4-FFF2-40B4-BE49-F238E27FC236}">
+                <a16:creationId xmlns:a16="http://schemas.microsoft.com/office/drawing/2014/main" id="{11E9543B-D305-A95D-4A26-9A08F719FE09}"/>
+              </a:ext>
+              <a:ext uri="{C183D7F6-B498-43B3-948B-1728B52AA6E4}">
+                <adec:decorative xmlns:adec="http://schemas.microsoft.com/office/drawing/2017/decorative" val="1"/>
+              </a:ext>
+            </a:extLst>
+          </p:cNvPr>
+          <p:cNvSpPr>
+            <a:spLocks noGrp="1" noRot="1" noChangeAspect="1" noMove="1" noResize="1" noEditPoints="1" noAdjustHandles="1" noChangeArrowheads="1" noChangeShapeType="1" noTextEdit="1"/>
+          </p:cNvSpPr>
+          <p:nvPr>
+            <p:extLst>
+              <p:ext uri="{386F3935-93C4-4BCD-93E2-E3B085C9AB24}">
+                <p16:designElem xmlns:p16="http://schemas.microsoft.com/office/powerpoint/2015/main" val="1"/>
+              </p:ext>
+            </p:extLst>
+          </p:nvPr>
+        </p:nvSpPr>
+        <p:spPr>
+          <a:xfrm>
+            <a:off x="0" y="0"/>
+            <a:ext cx="12192000" cy="6858000"/>
+          </a:xfrm>
+          <a:prstGeom prst="rect">
+            <a:avLst/>
+          </a:prstGeom>
+          <a:ln w="12700" cap="flat" cmpd="sng" algn="ctr">
+            <a:noFill/>
+            <a:prstDash val="solid"/>
+            <a:miter lim="800000"/>
+          </a:ln>
+          <a:effectLst/>
+          <a:extLst>
+            <a:ext uri="{91240B29-F687-4F45-9708-019B960494DF}">
+              <a14:hiddenLine xmlns:a14="http://schemas.microsoft.com/office/drawing/2010/main" w="12700" cap="flat" cmpd="sng" algn="ctr">
+                <a:solidFill>
+                  <a:schemeClr val="accent1">
+                    <a:shade val="50000"/>
+                  </a:schemeClr>
+                </a:solidFill>
+                <a:prstDash val="solid"/>
+                <a:miter lim="800000"/>
+              </a14:hiddenLine>
+            </a:ext>
+          </a:extLst>
+        </p:spPr>
+        <p:style>
+          <a:lnRef idx="2">
+            <a:schemeClr val="accent1">
+              <a:shade val="50000"/>
+            </a:schemeClr>
+          </a:lnRef>
+          <a:fillRef idx="1">
+            <a:schemeClr val="accent1"/>
+          </a:fillRef>
+          <a:effectRef idx="0">
+            <a:schemeClr val="accent1"/>
+          </a:effectRef>
+          <a:fontRef idx="minor">
+            <a:schemeClr val="lt1"/>
+          </a:fontRef>
+        </p:style>
+        <p:txBody>
+          <a:bodyPr rtlCol="0" anchor="ctr"/>
+          <a:lstStyle/>
+          <a:p>
+            <a:pPr algn="ctr"/>
+            <a:endParaRPr lang="en-US"/>
+          </a:p>
+        </p:txBody>
+      </p:sp>
+      <p:sp>
+        <p:nvSpPr>
+          <p:cNvPr id="10" name="Rectangle 9">
+            <a:extLst>
+              <a:ext uri="{FF2B5EF4-FFF2-40B4-BE49-F238E27FC236}">
+                <a16:creationId xmlns:a16="http://schemas.microsoft.com/office/drawing/2014/main" id="{A9A2FD05-61FF-ED5E-1576-B40C045ADA21}"/>
+              </a:ext>
+              <a:ext uri="{C183D7F6-B498-43B3-948B-1728B52AA6E4}">
+                <adec:decorative xmlns:adec="http://schemas.microsoft.com/office/drawing/2017/decorative" val="1"/>
+              </a:ext>
+            </a:extLst>
+          </p:cNvPr>
+          <p:cNvSpPr>
+            <a:spLocks noGrp="1" noRot="1" noChangeAspect="1" noMove="1" noResize="1" noEditPoints="1" noAdjustHandles="1" noChangeArrowheads="1" noChangeShapeType="1" noTextEdit="1"/>
+          </p:cNvSpPr>
+          <p:nvPr>
+            <p:extLst>
+              <p:ext uri="{386F3935-93C4-4BCD-93E2-E3B085C9AB24}">
+                <p16:designElem xmlns:p16="http://schemas.microsoft.com/office/powerpoint/2015/main" val="1"/>
+              </p:ext>
+            </p:extLst>
+          </p:nvPr>
+        </p:nvSpPr>
+        <p:spPr>
+          <a:xfrm flipH="1">
+            <a:off x="-1" y="-1"/>
+            <a:ext cx="12191998" cy="1590742"/>
+          </a:xfrm>
+          <a:prstGeom prst="rect">
+            <a:avLst/>
+          </a:prstGeom>
+          <a:gradFill>
+            <a:gsLst>
+              <a:gs pos="0">
+                <a:srgbClr val="000000"/>
+              </a:gs>
+              <a:gs pos="100000">
+                <a:schemeClr val="accent1">
+                  <a:lumMod val="75000"/>
+                </a:schemeClr>
+              </a:gs>
+            </a:gsLst>
+            <a:lin ang="8400000" scaled="0"/>
+          </a:gradFill>
+          <a:ln>
+            <a:noFill/>
+          </a:ln>
+        </p:spPr>
+        <p:style>
+          <a:lnRef idx="2">
+            <a:schemeClr val="accent1">
+              <a:shade val="50000"/>
+            </a:schemeClr>
+          </a:lnRef>
+          <a:fillRef idx="1">
+            <a:schemeClr val="accent1"/>
+          </a:fillRef>
+          <a:effectRef idx="0">
+            <a:schemeClr val="accent1"/>
+          </a:effectRef>
+          <a:fontRef idx="minor">
+            <a:schemeClr val="lt1"/>
+          </a:fontRef>
+        </p:style>
+        <p:txBody>
+          <a:bodyPr rtlCol="0" anchor="ctr"/>
+          <a:lstStyle/>
+          <a:p>
+            <a:pPr algn="ctr"/>
+            <a:endParaRPr lang="en-US"/>
+          </a:p>
+        </p:txBody>
+      </p:sp>
+      <p:sp>
+        <p:nvSpPr>
+          <p:cNvPr id="12" name="Rectangle 11">
+            <a:extLst>
+              <a:ext uri="{FF2B5EF4-FFF2-40B4-BE49-F238E27FC236}">
+                <a16:creationId xmlns:a16="http://schemas.microsoft.com/office/drawing/2014/main" id="{B45EDE1A-9062-AD43-DF26-D9E96BCCC76E}"/>
+              </a:ext>
+              <a:ext uri="{C183D7F6-B498-43B3-948B-1728B52AA6E4}">
+                <adec:decorative xmlns:adec="http://schemas.microsoft.com/office/drawing/2017/decorative" val="1"/>
+              </a:ext>
+            </a:extLst>
+          </p:cNvPr>
+          <p:cNvSpPr>
+            <a:spLocks noGrp="1" noRot="1" noChangeAspect="1" noMove="1" noResize="1" noEditPoints="1" noAdjustHandles="1" noChangeArrowheads="1" noChangeShapeType="1" noTextEdit="1"/>
+          </p:cNvSpPr>
+          <p:nvPr>
+            <p:extLst>
+              <p:ext uri="{386F3935-93C4-4BCD-93E2-E3B085C9AB24}">
+                <p16:designElem xmlns:p16="http://schemas.microsoft.com/office/powerpoint/2015/main" val="1"/>
+              </p:ext>
+            </p:extLst>
+          </p:nvPr>
+        </p:nvSpPr>
+        <p:spPr>
+          <a:xfrm rot="10800000" flipH="1">
+            <a:off x="-3" y="0"/>
+            <a:ext cx="8115306" cy="1590742"/>
+          </a:xfrm>
+          <a:prstGeom prst="rect">
+            <a:avLst/>
+          </a:prstGeom>
+          <a:gradFill>
+            <a:gsLst>
+              <a:gs pos="20000">
+                <a:schemeClr val="accent1">
+                  <a:alpha val="0"/>
+                </a:schemeClr>
+              </a:gs>
+              <a:gs pos="100000">
+                <a:schemeClr val="accent1">
+                  <a:lumMod val="50000"/>
+                  <a:alpha val="55000"/>
+                </a:schemeClr>
+              </a:gs>
+            </a:gsLst>
+            <a:lin ang="13800000" scaled="0"/>
+          </a:gradFill>
+          <a:ln>
+            <a:noFill/>
+          </a:ln>
+        </p:spPr>
+        <p:style>
+          <a:lnRef idx="2">
+            <a:schemeClr val="accent1">
+              <a:shade val="50000"/>
+            </a:schemeClr>
+          </a:lnRef>
+          <a:fillRef idx="1">
+            <a:schemeClr val="accent1"/>
+          </a:fillRef>
+          <a:effectRef idx="0">
+            <a:schemeClr val="accent1"/>
+          </a:effectRef>
+          <a:fontRef idx="minor">
+            <a:schemeClr val="lt1"/>
+          </a:fontRef>
+        </p:style>
+        <p:txBody>
+          <a:bodyPr rtlCol="0" anchor="ctr"/>
+          <a:lstStyle/>
+          <a:p>
+            <a:pPr algn="ctr"/>
+            <a:endParaRPr lang="en-US"/>
+          </a:p>
+        </p:txBody>
+      </p:sp>
+      <p:sp>
+        <p:nvSpPr>
+          <p:cNvPr id="14" name="Rectangle 13">
+            <a:extLst>
+              <a:ext uri="{FF2B5EF4-FFF2-40B4-BE49-F238E27FC236}">
+                <a16:creationId xmlns:a16="http://schemas.microsoft.com/office/drawing/2014/main" id="{BC16ABDB-D530-4E22-34DE-AF1E04988C61}"/>
+              </a:ext>
+              <a:ext uri="{C183D7F6-B498-43B3-948B-1728B52AA6E4}">
+                <adec:decorative xmlns:adec="http://schemas.microsoft.com/office/drawing/2017/decorative" val="1"/>
+              </a:ext>
+            </a:extLst>
+          </p:cNvPr>
+          <p:cNvSpPr>
+            <a:spLocks noGrp="1" noRot="1" noChangeAspect="1" noMove="1" noResize="1" noEditPoints="1" noAdjustHandles="1" noChangeArrowheads="1" noChangeShapeType="1" noTextEdit="1"/>
+          </p:cNvSpPr>
+          <p:nvPr>
+            <p:extLst>
+              <p:ext uri="{386F3935-93C4-4BCD-93E2-E3B085C9AB24}">
+                <p16:designElem xmlns:p16="http://schemas.microsoft.com/office/powerpoint/2015/main" val="1"/>
+              </p:ext>
+            </p:extLst>
+          </p:nvPr>
+        </p:nvSpPr>
+        <p:spPr>
+          <a:xfrm flipH="1">
+            <a:off x="8115299" y="-1"/>
+            <a:ext cx="4076698" cy="1590742"/>
+          </a:xfrm>
+          <a:prstGeom prst="rect">
+            <a:avLst/>
+          </a:prstGeom>
+          <a:gradFill>
+            <a:gsLst>
+              <a:gs pos="0">
+                <a:schemeClr val="accent1">
+                  <a:alpha val="66000"/>
+                </a:schemeClr>
+              </a:gs>
+              <a:gs pos="100000">
+                <a:srgbClr val="000000">
+                  <a:alpha val="30000"/>
+                </a:srgbClr>
+              </a:gs>
+            </a:gsLst>
+            <a:lin ang="13200000" scaled="0"/>
+          </a:gradFill>
+          <a:ln>
+            <a:noFill/>
+          </a:ln>
+        </p:spPr>
+        <p:style>
+          <a:lnRef idx="2">
+            <a:schemeClr val="accent1">
+              <a:shade val="50000"/>
+            </a:schemeClr>
+          </a:lnRef>
+          <a:fillRef idx="1">
+            <a:schemeClr val="accent1"/>
+          </a:fillRef>
+          <a:effectRef idx="0">
+            <a:schemeClr val="accent1"/>
+          </a:effectRef>
+          <a:fontRef idx="minor">
+            <a:schemeClr val="lt1"/>
+          </a:fontRef>
+        </p:style>
+        <p:txBody>
+          <a:bodyPr rtlCol="0" anchor="ctr"/>
+          <a:lstStyle/>
+          <a:p>
+            <a:pPr algn="ctr"/>
+            <a:endParaRPr lang="en-US"/>
+          </a:p>
+        </p:txBody>
+      </p:sp>
+      <p:sp>
+        <p:nvSpPr>
+          <p:cNvPr id="16" name="Rectangle 15">
+            <a:extLst>
+              <a:ext uri="{FF2B5EF4-FFF2-40B4-BE49-F238E27FC236}">
+                <a16:creationId xmlns:a16="http://schemas.microsoft.com/office/drawing/2014/main" id="{48494E08-E107-2C0F-2BD9-9FC0EA879BDF}"/>
+              </a:ext>
+              <a:ext uri="{C183D7F6-B498-43B3-948B-1728B52AA6E4}">
+                <adec:decorative xmlns:adec="http://schemas.microsoft.com/office/drawing/2017/decorative" val="1"/>
+              </a:ext>
+            </a:extLst>
+          </p:cNvPr>
+          <p:cNvSpPr>
+            <a:spLocks noGrp="1" noRot="1" noChangeAspect="1" noMove="1" noResize="1" noEditPoints="1" noAdjustHandles="1" noChangeArrowheads="1" noChangeShapeType="1" noTextEdit="1"/>
+          </p:cNvSpPr>
+          <p:nvPr>
+            <p:extLst>
+              <p:ext uri="{386F3935-93C4-4BCD-93E2-E3B085C9AB24}">
+                <p16:designElem xmlns:p16="http://schemas.microsoft.com/office/powerpoint/2015/main" val="1"/>
+              </p:ext>
+            </p:extLst>
+          </p:nvPr>
+        </p:nvSpPr>
+        <p:spPr>
+          <a:xfrm>
+            <a:off x="459350" y="-1"/>
+            <a:ext cx="11732646" cy="1597433"/>
+          </a:xfrm>
+          <a:prstGeom prst="rect">
+            <a:avLst/>
+          </a:prstGeom>
+          <a:gradFill>
+            <a:gsLst>
+              <a:gs pos="50000">
+                <a:srgbClr val="000000">
+                  <a:alpha val="0"/>
+                </a:srgbClr>
+              </a:gs>
+              <a:gs pos="99000">
+                <a:schemeClr val="accent1">
+                  <a:lumMod val="50000"/>
+                  <a:alpha val="52000"/>
+                </a:schemeClr>
+              </a:gs>
+            </a:gsLst>
+            <a:lin ang="16800000" scaled="0"/>
+          </a:gradFill>
+          <a:ln>
+            <a:noFill/>
+          </a:ln>
+        </p:spPr>
+        <p:style>
+          <a:lnRef idx="2">
+            <a:schemeClr val="accent1">
+              <a:shade val="50000"/>
+            </a:schemeClr>
+          </a:lnRef>
+          <a:fillRef idx="1">
+            <a:schemeClr val="accent1"/>
+          </a:fillRef>
+          <a:effectRef idx="0">
+            <a:schemeClr val="accent1"/>
+          </a:effectRef>
+          <a:fontRef idx="minor">
+            <a:schemeClr val="lt1"/>
+          </a:fontRef>
+        </p:style>
+        <p:txBody>
+          <a:bodyPr rtlCol="0" anchor="ctr"/>
+          <a:lstStyle/>
+          <a:p>
+            <a:pPr algn="ctr"/>
+            <a:endParaRPr lang="en-US"/>
+          </a:p>
+        </p:txBody>
+      </p:sp>
+      <p:sp>
+        <p:nvSpPr>
+          <p:cNvPr id="2" name="Title 1">
+            <a:extLst>
+              <a:ext uri="{FF2B5EF4-FFF2-40B4-BE49-F238E27FC236}">
+                <a16:creationId xmlns:a16="http://schemas.microsoft.com/office/drawing/2014/main" id="{2853D2C8-8303-CE0B-DAF7-1F47137880A2}"/>
+              </a:ext>
+            </a:extLst>
+          </p:cNvPr>
+          <p:cNvSpPr>
+            <a:spLocks noGrp="1"/>
+          </p:cNvSpPr>
+          <p:nvPr>
+            <p:ph type="title"/>
+          </p:nvPr>
+        </p:nvSpPr>
+        <p:spPr>
+          <a:xfrm>
+            <a:off x="549612" y="290734"/>
+            <a:ext cx="9895951" cy="1033669"/>
+          </a:xfrm>
+        </p:spPr>
+        <p:txBody>
+          <a:bodyPr>
+            <a:normAutofit/>
+          </a:bodyPr>
+          <a:lstStyle/>
+          <a:p>
+            <a:r>
+              <a:rPr lang="en-GB" sz="4000" dirty="0">
+                <a:solidFill>
+                  <a:srgbClr val="FFFFFF"/>
+                </a:solidFill>
+              </a:rPr>
+              <a:t>Geometry Modifications</a:t>
+            </a:r>
+          </a:p>
+        </p:txBody>
+      </p:sp>
+      <p:pic>
+        <p:nvPicPr>
+          <p:cNvPr id="7" name="Picture 6">
+            <a:extLst>
+              <a:ext uri="{FF2B5EF4-FFF2-40B4-BE49-F238E27FC236}">
+                <a16:creationId xmlns:a16="http://schemas.microsoft.com/office/drawing/2014/main" id="{1B6DA977-C88F-498F-0C81-5ABBA8C7BC07}"/>
+              </a:ext>
+            </a:extLst>
+          </p:cNvPr>
+          <p:cNvPicPr>
+            <a:picLocks noChangeAspect="1"/>
+          </p:cNvPicPr>
+          <p:nvPr/>
+        </p:nvPicPr>
+        <p:blipFill>
+          <a:blip r:embed="rId3"/>
+          <a:stretch>
+            <a:fillRect/>
+          </a:stretch>
+        </p:blipFill>
+        <p:spPr>
+          <a:xfrm>
+            <a:off x="197794" y="2927181"/>
+            <a:ext cx="5204298" cy="1669914"/>
+          </a:xfrm>
+          <a:prstGeom prst="rect">
+            <a:avLst/>
+          </a:prstGeom>
+        </p:spPr>
+      </p:pic>
+      <p:pic>
+        <p:nvPicPr>
+          <p:cNvPr id="11" name="Picture 10">
+            <a:extLst>
+              <a:ext uri="{FF2B5EF4-FFF2-40B4-BE49-F238E27FC236}">
+                <a16:creationId xmlns:a16="http://schemas.microsoft.com/office/drawing/2014/main" id="{667B79E1-6F2F-D186-AD11-637A9414A6D4}"/>
+              </a:ext>
+            </a:extLst>
+          </p:cNvPr>
+          <p:cNvPicPr>
+            <a:picLocks noChangeAspect="1"/>
+          </p:cNvPicPr>
+          <p:nvPr/>
+        </p:nvPicPr>
+        <p:blipFill>
+          <a:blip r:embed="rId4"/>
+          <a:stretch>
+            <a:fillRect/>
+          </a:stretch>
+        </p:blipFill>
+        <p:spPr>
+          <a:xfrm>
+            <a:off x="197794" y="4528415"/>
+            <a:ext cx="5204298" cy="1988201"/>
+          </a:xfrm>
+          <a:prstGeom prst="rect">
+            <a:avLst/>
+          </a:prstGeom>
+        </p:spPr>
+      </p:pic>
+      <p:pic>
+        <p:nvPicPr>
+          <p:cNvPr id="15" name="Picture 14">
+            <a:extLst>
+              <a:ext uri="{FF2B5EF4-FFF2-40B4-BE49-F238E27FC236}">
+                <a16:creationId xmlns:a16="http://schemas.microsoft.com/office/drawing/2014/main" id="{369CB367-7352-D22E-43D2-58CEC3BF7DA0}"/>
+              </a:ext>
+            </a:extLst>
+          </p:cNvPr>
+          <p:cNvPicPr>
+            <a:picLocks noChangeAspect="1"/>
+          </p:cNvPicPr>
+          <p:nvPr/>
+        </p:nvPicPr>
+        <p:blipFill>
+          <a:blip r:embed="rId5"/>
+          <a:stretch>
+            <a:fillRect/>
+          </a:stretch>
+        </p:blipFill>
+        <p:spPr>
+          <a:xfrm>
+            <a:off x="191904" y="1885279"/>
+            <a:ext cx="5210188" cy="1048591"/>
+          </a:xfrm>
+          <a:prstGeom prst="rect">
+            <a:avLst/>
+          </a:prstGeom>
+        </p:spPr>
+      </p:pic>
+      <p:pic>
+        <p:nvPicPr>
+          <p:cNvPr id="20" name="Picture 19">
+            <a:extLst>
+              <a:ext uri="{FF2B5EF4-FFF2-40B4-BE49-F238E27FC236}">
+                <a16:creationId xmlns:a16="http://schemas.microsoft.com/office/drawing/2014/main" id="{69FA8A88-8658-E01C-FED1-D3F127C76164}"/>
+              </a:ext>
+            </a:extLst>
+          </p:cNvPr>
+          <p:cNvPicPr>
+            <a:picLocks noChangeAspect="1"/>
+          </p:cNvPicPr>
+          <p:nvPr/>
+        </p:nvPicPr>
+        <p:blipFill>
+          <a:blip r:embed="rId6"/>
+          <a:stretch>
+            <a:fillRect/>
+          </a:stretch>
+        </p:blipFill>
+        <p:spPr>
+          <a:xfrm>
+            <a:off x="7997505" y="2181723"/>
+            <a:ext cx="2156143" cy="4334893"/>
+          </a:xfrm>
+          <a:prstGeom prst="rect">
+            <a:avLst/>
+          </a:prstGeom>
+        </p:spPr>
+      </p:pic>
+      <p:pic>
+        <p:nvPicPr>
+          <p:cNvPr id="23" name="Picture 22">
+            <a:extLst>
+              <a:ext uri="{FF2B5EF4-FFF2-40B4-BE49-F238E27FC236}">
+                <a16:creationId xmlns:a16="http://schemas.microsoft.com/office/drawing/2014/main" id="{5046C491-2D00-B7B8-7100-67567EE958CE}"/>
+              </a:ext>
+            </a:extLst>
+          </p:cNvPr>
+          <p:cNvPicPr>
+            <a:picLocks noChangeAspect="1"/>
+          </p:cNvPicPr>
+          <p:nvPr/>
+        </p:nvPicPr>
+        <p:blipFill>
+          <a:blip r:embed="rId7"/>
+          <a:stretch>
+            <a:fillRect/>
+          </a:stretch>
+        </p:blipFill>
+        <p:spPr>
+          <a:xfrm>
+            <a:off x="6092541" y="2078676"/>
+            <a:ext cx="1394738" cy="4488590"/>
+          </a:xfrm>
+          <a:prstGeom prst="rect">
+            <a:avLst/>
+          </a:prstGeom>
+        </p:spPr>
+      </p:pic>
+    </p:spTree>
+    <p:extLst>
+      <p:ext uri="{BB962C8B-B14F-4D97-AF65-F5344CB8AC3E}">
+        <p14:creationId xmlns:p14="http://schemas.microsoft.com/office/powerpoint/2010/main" val="954881210"/>
+      </p:ext>
+    </p:extLst>
+  </p:cSld>
+  <p:clrMapOvr>
+    <a:masterClrMapping/>
+  </p:clrMapOvr>
+</p:sld>
+</file>
+
+<file path=ppt/slides/slide9.xml><?xml version="1.0" encoding="utf-8"?>
 <p:sld xmlns:a="http://schemas.openxmlformats.org/drawingml/2006/main" xmlns:r="http://schemas.openxmlformats.org/officeDocument/2006/relationships" xmlns:p="http://schemas.openxmlformats.org/presentationml/2006/main">
   <p:cSld>
     <p:bg>
@@ -9372,16 +13317,7 @@
                                     <a:rPr lang="en-GB" b="0" i="0" smtClean="0">
                                       <a:latin typeface="Cambria Math" panose="02040503050406030204" pitchFamily="18" charset="0"/>
                                     </a:rPr>
-                                    <m:t>r</m:t>
-                                  </m:r>
-                                  <m:r>
-                                    <m:rPr>
-                                      <m:sty m:val="p"/>
-                                    </m:rPr>
-                                    <a:rPr lang="en-GB" b="0" i="0" smtClean="0">
-                                      <a:latin typeface="Cambria Math" panose="02040503050406030204" pitchFamily="18" charset="0"/>
-                                    </a:rPr>
-                                    <m:t>Ω</m:t>
+                                    <m:t>rΩ</m:t>
                                   </m:r>
                                 </m:e>
                               </m:d>
@@ -9533,54 +13469,7 @@
                 </a:pPr>
                 <a:r>
                   <a:rPr lang="en-GB" dirty="0"/>
-                  <a:t>Power is obtained from </a:t>
-                </a:r>
-                <a14:m>
-                  <m:oMath xmlns:m="http://schemas.openxmlformats.org/officeDocument/2006/math">
-                    <m:r>
-                      <a:rPr lang="en-GB" b="0" i="1">
-                        <a:latin typeface="Cambria Math" panose="02040503050406030204" pitchFamily="18" charset="0"/>
-                      </a:rPr>
-                      <m:t>𝜏</m:t>
-                    </m:r>
-                    <m:r>
-                      <a:rPr lang="en-GB" b="0" i="1">
-                        <a:latin typeface="Cambria Math" panose="02040503050406030204" pitchFamily="18" charset="0"/>
-                      </a:rPr>
-                      <m:t>⋅2</m:t>
-                    </m:r>
-                    <m:r>
-                      <a:rPr lang="en-GB" b="0" i="1">
-                        <a:latin typeface="Cambria Math" panose="02040503050406030204" pitchFamily="18" charset="0"/>
-                      </a:rPr>
-                      <m:t>𝜋</m:t>
-                    </m:r>
-                    <m:r>
-                      <a:rPr lang="en-GB" b="0" i="1">
-                        <a:latin typeface="Cambria Math" panose="02040503050406030204" pitchFamily="18" charset="0"/>
-                      </a:rPr>
-                      <m:t>𝑁</m:t>
-                    </m:r>
-                  </m:oMath>
-                </a14:m>
-                <a:r>
-                  <a:rPr lang="en-GB" dirty="0"/>
-                  <a:t> </a:t>
-                </a:r>
-              </a:p>
-              <a:p>
-                <a:pPr marL="0" indent="0">
-                  <a:buNone/>
-                </a:pPr>
-                <a:endParaRPr lang="en-GB" dirty="0"/>
-              </a:p>
-              <a:p>
-                <a:pPr marL="0" indent="0">
-                  <a:buNone/>
-                </a:pPr>
-                <a:r>
-                  <a:rPr lang="en-GB" dirty="0"/>
-                  <a:t>Require values for torque, thrust and angular speed.</a:t>
+                  <a:t>Require measurements for torque, thrust and angular speed.</a:t>
                 </a:r>
               </a:p>
             </p:txBody>
@@ -9611,7 +13500,7 @@
               <a:blipFill>
                 <a:blip r:embed="rId3"/>
                 <a:stretch>
-                  <a:fillRect l="-1254" t="-612" b="-2141"/>
+                  <a:fillRect l="-1254"/>
                 </a:stretch>
               </a:blipFill>
             </p:spPr>
@@ -9646,8 +13535,8 @@
             </p:nvSpPr>
             <p:spPr>
               <a:xfrm>
-                <a:off x="3077438" y="2854355"/>
-                <a:ext cx="6037119" cy="1149289"/>
+                <a:off x="3077438" y="3327167"/>
+                <a:ext cx="6037119" cy="1222835"/>
               </a:xfrm>
               <a:prstGeom prst="rect">
                 <a:avLst/>
@@ -9662,6 +13551,7 @@
               </a:bodyPr>
               <a:lstStyle/>
               <a:p>
+                <a:pPr/>
                 <a14:m>
                   <m:oMathPara xmlns:m="http://schemas.openxmlformats.org/officeDocument/2006/math">
                     <m:oMathParaPr>
@@ -9672,7 +13562,7 @@
                         <a:rPr lang="en-GB" sz="2800" b="0" i="1" smtClean="0">
                           <a:latin typeface="Cambria Math" panose="02040503050406030204" pitchFamily="18" charset="0"/>
                         </a:rPr>
-                        <m:t>𝐹𝑀</m:t>
+                        <m:t>𝐹𝑂𝑀</m:t>
                       </m:r>
                       <m:r>
                         <a:rPr lang="en-GB" sz="2800" b="0" i="1" smtClean="0">
@@ -9724,6 +13614,25 @@
                           </m:sSubSup>
                         </m:num>
                         <m:den>
+                          <m:rad>
+                            <m:radPr>
+                              <m:degHide m:val="on"/>
+                              <m:ctrlPr>
+                                <a:rPr lang="en-GB" sz="2800" b="0" i="1" smtClean="0">
+                                  <a:latin typeface="Cambria Math" panose="02040503050406030204" pitchFamily="18" charset="0"/>
+                                </a:rPr>
+                              </m:ctrlPr>
+                            </m:radPr>
+                            <m:deg/>
+                            <m:e>
+                              <m:r>
+                                <a:rPr lang="en-GB" sz="2800" b="0" i="1" smtClean="0">
+                                  <a:latin typeface="Cambria Math" panose="02040503050406030204" pitchFamily="18" charset="0"/>
+                                </a:rPr>
+                                <m:t>2</m:t>
+                              </m:r>
+                            </m:e>
+                          </m:rad>
                           <m:sSub>
                             <m:sSubPr>
                               <m:ctrlPr>
@@ -9776,8 +13685,8 @@
             </p:nvSpPr>
             <p:spPr>
               <a:xfrm>
-                <a:off x="3077438" y="2854355"/>
-                <a:ext cx="6037119" cy="1149289"/>
+                <a:off x="3077438" y="3327167"/>
+                <a:ext cx="6037119" cy="1222835"/>
               </a:xfrm>
               <a:prstGeom prst="rect">
                 <a:avLst/>
@@ -9892,487 +13801,6 @@
       <p:bldP spid="4" grpId="0" animBg="1"/>
     </p:bldLst>
   </p:timing>
-</p:sld>
-</file>
-
-<file path=ppt/slides/slide8.xml><?xml version="1.0" encoding="utf-8"?>
-<p:sld xmlns:a="http://schemas.openxmlformats.org/drawingml/2006/main" xmlns:r="http://schemas.openxmlformats.org/officeDocument/2006/relationships" xmlns:p="http://schemas.openxmlformats.org/presentationml/2006/main">
-  <p:cSld>
-    <p:spTree>
-      <p:nvGrpSpPr>
-        <p:cNvPr id="1" name=""/>
-        <p:cNvGrpSpPr/>
-        <p:nvPr/>
-      </p:nvGrpSpPr>
-      <p:grpSpPr>
-        <a:xfrm>
-          <a:off x="0" y="0"/>
-          <a:ext cx="0" cy="0"/>
-          <a:chOff x="0" y="0"/>
-          <a:chExt cx="0" cy="0"/>
-        </a:xfrm>
-      </p:grpSpPr>
-      <p:sp>
-        <p:nvSpPr>
-          <p:cNvPr id="2" name="Title 1">
-            <a:extLst>
-              <a:ext uri="{FF2B5EF4-FFF2-40B4-BE49-F238E27FC236}">
-                <a16:creationId xmlns:a16="http://schemas.microsoft.com/office/drawing/2014/main" id="{DD1D9AC5-0EC4-38D7-8E7D-41944460A213}"/>
-              </a:ext>
-            </a:extLst>
-          </p:cNvPr>
-          <p:cNvSpPr>
-            <a:spLocks noGrp="1"/>
-          </p:cNvSpPr>
-          <p:nvPr>
-            <p:ph type="title"/>
-          </p:nvPr>
-        </p:nvSpPr>
-        <p:spPr>
-          <a:xfrm>
-            <a:off x="614570" y="231946"/>
-            <a:ext cx="10515600" cy="1325563"/>
-          </a:xfrm>
-        </p:spPr>
-        <p:txBody>
-          <a:bodyPr/>
-          <a:lstStyle/>
-          <a:p>
-            <a:r>
-              <a:rPr lang="en-GB" dirty="0"/>
-              <a:t>Aerodynamic measurements</a:t>
-            </a:r>
-          </a:p>
-        </p:txBody>
-      </p:sp>
-      <p:sp>
-        <p:nvSpPr>
-          <p:cNvPr id="3" name="Content Placeholder 2">
-            <a:extLst>
-              <a:ext uri="{FF2B5EF4-FFF2-40B4-BE49-F238E27FC236}">
-                <a16:creationId xmlns:a16="http://schemas.microsoft.com/office/drawing/2014/main" id="{9C7375A3-69B7-413F-69EC-A8BA51B8A28B}"/>
-              </a:ext>
-            </a:extLst>
-          </p:cNvPr>
-          <p:cNvSpPr>
-            <a:spLocks noGrp="1"/>
-          </p:cNvSpPr>
-          <p:nvPr>
-            <p:ph idx="1"/>
-          </p:nvPr>
-        </p:nvSpPr>
-        <p:spPr>
-          <a:xfrm>
-            <a:off x="569845" y="1756051"/>
-            <a:ext cx="5304181" cy="4629840"/>
-          </a:xfrm>
-        </p:spPr>
-        <p:txBody>
-          <a:bodyPr>
-            <a:normAutofit/>
-          </a:bodyPr>
-          <a:lstStyle/>
-          <a:p>
-            <a:pPr marL="0" indent="0">
-              <a:buNone/>
-            </a:pPr>
-            <a:r>
-              <a:rPr lang="en-GB" dirty="0"/>
-              <a:t>Torque and thrust measured by strain gauge load cells</a:t>
-            </a:r>
-          </a:p>
-          <a:p>
-            <a:pPr marL="0" indent="0">
-              <a:buNone/>
-            </a:pPr>
-            <a:endParaRPr lang="en-GB" dirty="0"/>
-          </a:p>
-          <a:p>
-            <a:pPr marL="0" indent="0">
-              <a:buNone/>
-            </a:pPr>
-            <a:r>
-              <a:rPr lang="en-GB" dirty="0"/>
-              <a:t>Full bridge cantilever models selected for sensitivity and resistance to off-axis forces</a:t>
-            </a:r>
-          </a:p>
-          <a:p>
-            <a:pPr marL="0" indent="0">
-              <a:buNone/>
-            </a:pPr>
-            <a:endParaRPr lang="en-GB" dirty="0"/>
-          </a:p>
-          <a:p>
-            <a:pPr marL="0" indent="0">
-              <a:buNone/>
-            </a:pPr>
-            <a:r>
-              <a:rPr lang="en-GB" dirty="0"/>
-              <a:t>Orientation selected for accuracy, and ease of calibration</a:t>
-            </a:r>
-          </a:p>
-        </p:txBody>
-      </p:sp>
-      <p:pic>
-        <p:nvPicPr>
-          <p:cNvPr id="5" name="Picture 4">
-            <a:extLst>
-              <a:ext uri="{FF2B5EF4-FFF2-40B4-BE49-F238E27FC236}">
-                <a16:creationId xmlns:a16="http://schemas.microsoft.com/office/drawing/2014/main" id="{CF86DFC9-3FCE-4B2C-21D4-5096FA13A820}"/>
-              </a:ext>
-            </a:extLst>
-          </p:cNvPr>
-          <p:cNvPicPr>
-            <a:picLocks noChangeAspect="1"/>
-          </p:cNvPicPr>
-          <p:nvPr/>
-        </p:nvPicPr>
-        <p:blipFill>
-          <a:blip r:embed="rId3"/>
-          <a:stretch>
-            <a:fillRect/>
-          </a:stretch>
-        </p:blipFill>
-        <p:spPr>
-          <a:xfrm>
-            <a:off x="6524624" y="1236485"/>
-            <a:ext cx="5199557" cy="5360993"/>
-          </a:xfrm>
-          <a:prstGeom prst="rect">
-            <a:avLst/>
-          </a:prstGeom>
-        </p:spPr>
-      </p:pic>
-    </p:spTree>
-    <p:extLst>
-      <p:ext uri="{BB962C8B-B14F-4D97-AF65-F5344CB8AC3E}">
-        <p14:creationId xmlns:p14="http://schemas.microsoft.com/office/powerpoint/2010/main" val="2695031417"/>
-      </p:ext>
-    </p:extLst>
-  </p:cSld>
-  <p:clrMapOvr>
-    <a:masterClrMapping/>
-  </p:clrMapOvr>
-</p:sld>
-</file>
-
-<file path=ppt/slides/slide9.xml><?xml version="1.0" encoding="utf-8"?>
-<p:sld xmlns:a="http://schemas.openxmlformats.org/drawingml/2006/main" xmlns:r="http://schemas.openxmlformats.org/officeDocument/2006/relationships" xmlns:p="http://schemas.openxmlformats.org/presentationml/2006/main">
-  <p:cSld>
-    <p:spTree>
-      <p:nvGrpSpPr>
-        <p:cNvPr id="1" name=""/>
-        <p:cNvGrpSpPr/>
-        <p:nvPr/>
-      </p:nvGrpSpPr>
-      <p:grpSpPr>
-        <a:xfrm>
-          <a:off x="0" y="0"/>
-          <a:ext cx="0" cy="0"/>
-          <a:chOff x="0" y="0"/>
-          <a:chExt cx="0" cy="0"/>
-        </a:xfrm>
-      </p:grpSpPr>
-      <p:sp>
-        <p:nvSpPr>
-          <p:cNvPr id="2" name="Title 1">
-            <a:extLst>
-              <a:ext uri="{FF2B5EF4-FFF2-40B4-BE49-F238E27FC236}">
-                <a16:creationId xmlns:a16="http://schemas.microsoft.com/office/drawing/2014/main" id="{92553C29-8BE0-FA3F-BADF-EB4F5C5E7059}"/>
-              </a:ext>
-            </a:extLst>
-          </p:cNvPr>
-          <p:cNvSpPr>
-            <a:spLocks noGrp="1"/>
-          </p:cNvSpPr>
-          <p:nvPr>
-            <p:ph type="title"/>
-          </p:nvPr>
-        </p:nvSpPr>
-        <p:spPr/>
-        <p:txBody>
-          <a:bodyPr/>
-          <a:lstStyle/>
-          <a:p>
-            <a:r>
-              <a:rPr lang="en-GB" dirty="0"/>
-              <a:t>Acoustic performance</a:t>
-            </a:r>
-          </a:p>
-        </p:txBody>
-      </p:sp>
-      <p:sp>
-        <p:nvSpPr>
-          <p:cNvPr id="3" name="Content Placeholder 2">
-            <a:extLst>
-              <a:ext uri="{FF2B5EF4-FFF2-40B4-BE49-F238E27FC236}">
-                <a16:creationId xmlns:a16="http://schemas.microsoft.com/office/drawing/2014/main" id="{5C5C9FEE-F51C-BBC5-5750-D5F85AFD1F9B}"/>
-              </a:ext>
-            </a:extLst>
-          </p:cNvPr>
-          <p:cNvSpPr>
-            <a:spLocks noGrp="1"/>
-          </p:cNvSpPr>
-          <p:nvPr>
-            <p:ph idx="1"/>
-          </p:nvPr>
-        </p:nvSpPr>
-        <p:spPr>
-          <a:xfrm>
-            <a:off x="709774" y="1830762"/>
-            <a:ext cx="6333162" cy="4367785"/>
-          </a:xfrm>
-        </p:spPr>
-        <p:txBody>
-          <a:bodyPr>
-            <a:normAutofit/>
-          </a:bodyPr>
-          <a:lstStyle/>
-          <a:p>
-            <a:pPr marL="0" indent="0">
-              <a:buNone/>
-            </a:pPr>
-            <a:endParaRPr lang="en-GB" dirty="0"/>
-          </a:p>
-        </p:txBody>
-      </p:sp>
-      <p:sp>
-        <p:nvSpPr>
-          <p:cNvPr id="6" name="Content Placeholder 2">
-            <a:extLst>
-              <a:ext uri="{FF2B5EF4-FFF2-40B4-BE49-F238E27FC236}">
-                <a16:creationId xmlns:a16="http://schemas.microsoft.com/office/drawing/2014/main" id="{7BACF53C-DB37-050E-6D7F-B0341BBAECF9}"/>
-              </a:ext>
-            </a:extLst>
-          </p:cNvPr>
-          <p:cNvSpPr txBox="1">
-            <a:spLocks/>
-          </p:cNvSpPr>
-          <p:nvPr/>
-        </p:nvSpPr>
-        <p:spPr>
-          <a:xfrm>
-            <a:off x="6446178" y="1736582"/>
-            <a:ext cx="5857126" cy="4367785"/>
-          </a:xfrm>
-          <a:prstGeom prst="rect">
-            <a:avLst/>
-          </a:prstGeom>
-        </p:spPr>
-        <p:txBody>
-          <a:bodyPr vert="horz" lIns="91440" tIns="45720" rIns="91440" bIns="45720" rtlCol="0">
-            <a:normAutofit/>
-          </a:bodyPr>
-          <a:lstStyle>
-            <a:lvl1pPr marL="228600" indent="-228600" algn="l" defTabSz="914400" rtl="0" eaLnBrk="1" latinLnBrk="0" hangingPunct="1">
-              <a:lnSpc>
-                <a:spcPct val="90000"/>
-              </a:lnSpc>
-              <a:spcBef>
-                <a:spcPts val="1000"/>
-              </a:spcBef>
-              <a:buFont typeface="Arial" panose="020B0604020202020204" pitchFamily="34" charset="0"/>
-              <a:buChar char="•"/>
-              <a:defRPr sz="2800" kern="1200">
-                <a:solidFill>
-                  <a:schemeClr val="tx1"/>
-                </a:solidFill>
-                <a:latin typeface="+mn-lt"/>
-                <a:ea typeface="+mn-ea"/>
-                <a:cs typeface="+mn-cs"/>
-              </a:defRPr>
-            </a:lvl1pPr>
-            <a:lvl2pPr marL="685800" indent="-228600" algn="l" defTabSz="914400" rtl="0" eaLnBrk="1" latinLnBrk="0" hangingPunct="1">
-              <a:lnSpc>
-                <a:spcPct val="90000"/>
-              </a:lnSpc>
-              <a:spcBef>
-                <a:spcPts val="500"/>
-              </a:spcBef>
-              <a:buFont typeface="Arial" panose="020B0604020202020204" pitchFamily="34" charset="0"/>
-              <a:buChar char="•"/>
-              <a:defRPr sz="2400" kern="1200">
-                <a:solidFill>
-                  <a:schemeClr val="tx1"/>
-                </a:solidFill>
-                <a:latin typeface="+mn-lt"/>
-                <a:ea typeface="+mn-ea"/>
-                <a:cs typeface="+mn-cs"/>
-              </a:defRPr>
-            </a:lvl2pPr>
-            <a:lvl3pPr marL="1143000" indent="-228600" algn="l" defTabSz="914400" rtl="0" eaLnBrk="1" latinLnBrk="0" hangingPunct="1">
-              <a:lnSpc>
-                <a:spcPct val="90000"/>
-              </a:lnSpc>
-              <a:spcBef>
-                <a:spcPts val="500"/>
-              </a:spcBef>
-              <a:buFont typeface="Arial" panose="020B0604020202020204" pitchFamily="34" charset="0"/>
-              <a:buChar char="•"/>
-              <a:defRPr sz="2000" kern="1200">
-                <a:solidFill>
-                  <a:schemeClr val="tx1"/>
-                </a:solidFill>
-                <a:latin typeface="+mn-lt"/>
-                <a:ea typeface="+mn-ea"/>
-                <a:cs typeface="+mn-cs"/>
-              </a:defRPr>
-            </a:lvl3pPr>
-            <a:lvl4pPr marL="1600200" indent="-228600" algn="l" defTabSz="914400" rtl="0" eaLnBrk="1" latinLnBrk="0" hangingPunct="1">
-              <a:lnSpc>
-                <a:spcPct val="90000"/>
-              </a:lnSpc>
-              <a:spcBef>
-                <a:spcPts val="500"/>
-              </a:spcBef>
-              <a:buFont typeface="Arial" panose="020B0604020202020204" pitchFamily="34" charset="0"/>
-              <a:buChar char="•"/>
-              <a:defRPr sz="1800" kern="1200">
-                <a:solidFill>
-                  <a:schemeClr val="tx1"/>
-                </a:solidFill>
-                <a:latin typeface="+mn-lt"/>
-                <a:ea typeface="+mn-ea"/>
-                <a:cs typeface="+mn-cs"/>
-              </a:defRPr>
-            </a:lvl4pPr>
-            <a:lvl5pPr marL="2057400" indent="-228600" algn="l" defTabSz="914400" rtl="0" eaLnBrk="1" latinLnBrk="0" hangingPunct="1">
-              <a:lnSpc>
-                <a:spcPct val="90000"/>
-              </a:lnSpc>
-              <a:spcBef>
-                <a:spcPts val="500"/>
-              </a:spcBef>
-              <a:buFont typeface="Arial" panose="020B0604020202020204" pitchFamily="34" charset="0"/>
-              <a:buChar char="•"/>
-              <a:defRPr sz="1800" kern="1200">
-                <a:solidFill>
-                  <a:schemeClr val="tx1"/>
-                </a:solidFill>
-                <a:latin typeface="+mn-lt"/>
-                <a:ea typeface="+mn-ea"/>
-                <a:cs typeface="+mn-cs"/>
-              </a:defRPr>
-            </a:lvl5pPr>
-            <a:lvl6pPr marL="2514600" indent="-228600" algn="l" defTabSz="914400" rtl="0" eaLnBrk="1" latinLnBrk="0" hangingPunct="1">
-              <a:lnSpc>
-                <a:spcPct val="90000"/>
-              </a:lnSpc>
-              <a:spcBef>
-                <a:spcPts val="500"/>
-              </a:spcBef>
-              <a:buFont typeface="Arial" panose="020B0604020202020204" pitchFamily="34" charset="0"/>
-              <a:buChar char="•"/>
-              <a:defRPr sz="1800" kern="1200">
-                <a:solidFill>
-                  <a:schemeClr val="tx1"/>
-                </a:solidFill>
-                <a:latin typeface="+mn-lt"/>
-                <a:ea typeface="+mn-ea"/>
-                <a:cs typeface="+mn-cs"/>
-              </a:defRPr>
-            </a:lvl6pPr>
-            <a:lvl7pPr marL="2971800" indent="-228600" algn="l" defTabSz="914400" rtl="0" eaLnBrk="1" latinLnBrk="0" hangingPunct="1">
-              <a:lnSpc>
-                <a:spcPct val="90000"/>
-              </a:lnSpc>
-              <a:spcBef>
-                <a:spcPts val="500"/>
-              </a:spcBef>
-              <a:buFont typeface="Arial" panose="020B0604020202020204" pitchFamily="34" charset="0"/>
-              <a:buChar char="•"/>
-              <a:defRPr sz="1800" kern="1200">
-                <a:solidFill>
-                  <a:schemeClr val="tx1"/>
-                </a:solidFill>
-                <a:latin typeface="+mn-lt"/>
-                <a:ea typeface="+mn-ea"/>
-                <a:cs typeface="+mn-cs"/>
-              </a:defRPr>
-            </a:lvl7pPr>
-            <a:lvl8pPr marL="3429000" indent="-228600" algn="l" defTabSz="914400" rtl="0" eaLnBrk="1" latinLnBrk="0" hangingPunct="1">
-              <a:lnSpc>
-                <a:spcPct val="90000"/>
-              </a:lnSpc>
-              <a:spcBef>
-                <a:spcPts val="500"/>
-              </a:spcBef>
-              <a:buFont typeface="Arial" panose="020B0604020202020204" pitchFamily="34" charset="0"/>
-              <a:buChar char="•"/>
-              <a:defRPr sz="1800" kern="1200">
-                <a:solidFill>
-                  <a:schemeClr val="tx1"/>
-                </a:solidFill>
-                <a:latin typeface="+mn-lt"/>
-                <a:ea typeface="+mn-ea"/>
-                <a:cs typeface="+mn-cs"/>
-              </a:defRPr>
-            </a:lvl8pPr>
-            <a:lvl9pPr marL="3886200" indent="-228600" algn="l" defTabSz="914400" rtl="0" eaLnBrk="1" latinLnBrk="0" hangingPunct="1">
-              <a:lnSpc>
-                <a:spcPct val="90000"/>
-              </a:lnSpc>
-              <a:spcBef>
-                <a:spcPts val="500"/>
-              </a:spcBef>
-              <a:buFont typeface="Arial" panose="020B0604020202020204" pitchFamily="34" charset="0"/>
-              <a:buChar char="•"/>
-              <a:defRPr sz="1800" kern="1200">
-                <a:solidFill>
-                  <a:schemeClr val="tx1"/>
-                </a:solidFill>
-                <a:latin typeface="+mn-lt"/>
-                <a:ea typeface="+mn-ea"/>
-                <a:cs typeface="+mn-cs"/>
-              </a:defRPr>
-            </a:lvl9pPr>
-          </a:lstStyle>
-          <a:p>
-            <a:pPr marL="0" indent="0">
-              <a:buFont typeface="Arial" panose="020B0604020202020204" pitchFamily="34" charset="0"/>
-              <a:buNone/>
-            </a:pPr>
-            <a:r>
-              <a:rPr lang="en-GB" dirty="0"/>
-              <a:t>Zwicker’s psychoacoustic model</a:t>
-            </a:r>
-          </a:p>
-          <a:p>
-            <a:r>
-              <a:rPr lang="en-US" dirty="0"/>
-              <a:t>Loudness</a:t>
-            </a:r>
-          </a:p>
-          <a:p>
-            <a:r>
-              <a:rPr lang="en-US" dirty="0"/>
-              <a:t>fluctuation strength</a:t>
-            </a:r>
-          </a:p>
-          <a:p>
-            <a:r>
-              <a:rPr lang="en-US" dirty="0"/>
-              <a:t>Roughness</a:t>
-            </a:r>
-          </a:p>
-          <a:p>
-            <a:r>
-              <a:rPr lang="en-US" dirty="0"/>
-              <a:t>sharpness.</a:t>
-            </a:r>
-          </a:p>
-        </p:txBody>
-      </p:sp>
-    </p:spTree>
-    <p:extLst>
-      <p:ext uri="{BB962C8B-B14F-4D97-AF65-F5344CB8AC3E}">
-        <p14:creationId xmlns:p14="http://schemas.microsoft.com/office/powerpoint/2010/main" val="1354065674"/>
-      </p:ext>
-    </p:extLst>
-  </p:cSld>
-  <p:clrMapOvr>
-    <a:masterClrMapping/>
-  </p:clrMapOvr>
 </p:sld>
 </file>
 
